--- a/obayashi_it_presentation/Obayashi_Senior_Manager_IT_Presentation_Maheshchandra_Hegde.pptx
+++ b/obayashi_it_presentation/Obayashi_Senior_Manager_IT_Presentation_Maheshchandra_Hegde.pptx
@@ -16,6 +16,7 @@
     <p:sldId id="264" r:id="rId15"/>
     <p:sldId id="265" r:id="rId16"/>
     <p:sldId id="266" r:id="rId17"/>
+    <p:sldId id="267" r:id="rId18"/>
   </p:sldIdLst>
   <p:sldSz cx="12191695" cy="6858000" type="screen4x3"/>
   <p:notesSz cx="6858000" cy="9144000"/>
@@ -3252,14 +3253,14 @@
           </a:p>
           <a:p>
             <a:pPr>
-              <a:defRPr sz="1300">
+              <a:defRPr sz="1250">
                 <a:solidFill>
                   <a:srgbClr val="CBD5E1"/>
                 </a:solidFill>
               </a:defRPr>
             </a:pPr>
             <a:r>
-              <a:t>A comprehensive portfolio mapping enterprise technology leadership, mission-critical infrastructure, cybersecurity governance, and operational resilience to Obayashi's global engineering mandates.</a:t>
+              <a:t>A comprehensive portfolio mapping enterprise technology leadership, mission-critical infrastructure, 3D visualization / spatial AI engineering (Voxelforge AI, ayam3d), and operational resilience to Obayashi's global engineering mandates.</a:t>
             </a:r>
           </a:p>
         </p:txBody>
@@ -3347,7 +3348,7 @@
           </a:p>
           <a:p>
             <a:pPr>
-              <a:defRPr sz="1000">
+              <a:defRPr sz="950">
                 <a:solidFill>
                   <a:srgbClr val="94A3B8"/>
                 </a:solidFill>
@@ -3442,7 +3443,7 @@
           </a:p>
           <a:p>
             <a:pPr>
-              <a:defRPr sz="1000">
+              <a:defRPr sz="950">
                 <a:solidFill>
                   <a:srgbClr val="94A3B8"/>
                 </a:solidFill>
@@ -3532,19 +3533,19 @@
               </a:defRPr>
             </a:pPr>
             <a:r>
-              <a:t>Project &amp; Team Delivery</a:t>
-            </a:r>
-          </a:p>
-          <a:p>
-            <a:pPr>
-              <a:defRPr sz="1000">
+              <a:t>3D Visualization &amp; AI</a:t>
+            </a:r>
+          </a:p>
+          <a:p>
+            <a:pPr>
+              <a:defRPr sz="950">
                 <a:solidFill>
                   <a:srgbClr val="94A3B8"/>
                 </a:solidFill>
               </a:defRPr>
             </a:pPr>
             <a:r>
-              <a:t>Enterprise systems, cross-functional squads, digital transformation</a:t>
+              <a:t>50+ 3D/CAD projects, Voxelforge AI, ayam3d, spatial digital twins</a:t>
             </a:r>
           </a:p>
         </p:txBody>
@@ -3632,7 +3633,7 @@
           </a:p>
           <a:p>
             <a:pPr>
-              <a:defRPr sz="1000">
+              <a:defRPr sz="950">
                 <a:solidFill>
                   <a:srgbClr val="94A3B8"/>
                 </a:solidFill>
@@ -3674,7 +3675,7 @@
               </a:defRPr>
             </a:pPr>
             <a:r>
-              <a:t>Obayashi Corporation · Senior Manager – IT Candidate Portfolio | Maheshchandra Hegde · Page 1 of 11</a:t>
+              <a:t>Obayashi Corporation · Senior Manager – IT Candidate Portfolio | Maheshchandra Hegde · Slide 1 of 12</a:t>
             </a:r>
           </a:p>
         </p:txBody>
@@ -3770,7 +3771,7 @@
               </a:defRPr>
             </a:pPr>
             <a:r>
-              <a:t>LEADERSHIP ONBOARDING &amp; VALUE REALIZATION</a:t>
+              <a:t>STRATEGIC VISION FOR OBAYASHI</a:t>
             </a:r>
           </a:p>
         </p:txBody>
@@ -3798,14 +3799,14 @@
           <a:lstStyle/>
           <a:p>
             <a:pPr>
-              <a:defRPr sz="2200" b="1">
+              <a:defRPr sz="2100" b="1">
                 <a:solidFill>
                   <a:srgbClr val="0F1E36"/>
                 </a:solidFill>
               </a:defRPr>
             </a:pPr>
             <a:r>
-              <a:t>First 90 Days: Strategic Execution Roadmap for Senior Manager – IT</a:t>
+              <a:t>Suggestions for Future Process Improvements at Obayashi Corporation</a:t>
             </a:r>
           </a:p>
         </p:txBody>
@@ -3862,7 +3863,7 @@
         <p:spPr>
           <a:xfrm>
             <a:off x="731520" y="1463040"/>
-            <a:ext cx="3401568" cy="4754880"/>
+            <a:ext cx="10728655" cy="1078992"/>
           </a:xfrm>
           <a:prstGeom prst="roundRect">
             <a:avLst/>
@@ -3900,92 +3901,14 @@
       </p:sp>
       <p:sp>
         <p:nvSpPr>
-          <p:cNvPr id="7" name="Rectangle 6"/>
-          <p:cNvSpPr/>
-          <p:nvPr/>
-        </p:nvSpPr>
-        <p:spPr>
-          <a:xfrm>
-            <a:off x="740664" y="1472184"/>
-            <a:ext cx="3383280" cy="438912"/>
-          </a:xfrm>
-          <a:prstGeom prst="rect">
-            <a:avLst/>
-          </a:prstGeom>
-          <a:solidFill>
-            <a:srgbClr val="004E96"/>
-          </a:solidFill>
-          <a:ln>
-            <a:noFill/>
-          </a:ln>
-        </p:spPr>
-        <p:style>
-          <a:lnRef idx="1">
-            <a:schemeClr val="accent1"/>
-          </a:lnRef>
-          <a:fillRef idx="3">
-            <a:schemeClr val="accent1"/>
-          </a:fillRef>
-          <a:effectRef idx="2">
-            <a:schemeClr val="accent1"/>
-          </a:effectRef>
-          <a:fontRef idx="minor">
-            <a:schemeClr val="lt1"/>
-          </a:fontRef>
-        </p:style>
-        <p:txBody>
-          <a:bodyPr rtlCol="0" anchor="ctr"/>
-          <a:lstStyle/>
-          <a:p>
-            <a:pPr algn="ctr"/>
-          </a:p>
-        </p:txBody>
-      </p:sp>
-      <p:sp>
-        <p:nvSpPr>
-          <p:cNvPr id="8" name="TextBox 7"/>
+          <p:cNvPr id="7" name="TextBox 6"/>
           <p:cNvSpPr txBox="1"/>
           <p:nvPr/>
         </p:nvSpPr>
         <p:spPr>
           <a:xfrm>
-            <a:off x="841248" y="1536192"/>
-            <a:ext cx="3182112" cy="320040"/>
-          </a:xfrm>
-          <a:prstGeom prst="rect">
-            <a:avLst/>
-          </a:prstGeom>
-          <a:noFill/>
-        </p:spPr>
-        <p:txBody>
-          <a:bodyPr wrap="none">
-            <a:spAutoFit/>
-          </a:bodyPr>
-          <a:lstStyle/>
-          <a:p>
-            <a:pPr>
-              <a:defRPr sz="1100" b="1">
-                <a:solidFill>
-                  <a:srgbClr val="FFFFFF"/>
-                </a:solidFill>
-              </a:defRPr>
-            </a:pPr>
-            <a:r>
-              <a:t>Days 1 – 30: Discovery &amp; Baseline Assessment</a:t>
-            </a:r>
-          </a:p>
-        </p:txBody>
-      </p:sp>
-      <p:sp>
-        <p:nvSpPr>
-          <p:cNvPr id="9" name="TextBox 8"/>
-          <p:cNvSpPr txBox="1"/>
-          <p:nvPr/>
-        </p:nvSpPr>
-        <p:spPr>
-          <a:xfrm>
-            <a:off x="868680" y="2011680"/>
-            <a:ext cx="3127248" cy="4023360"/>
+            <a:off x="960120" y="1554480"/>
+            <a:ext cx="10241280" cy="914400"/>
           </a:xfrm>
           <a:prstGeom prst="rect">
             <a:avLst/>
@@ -4000,90 +3923,57 @@
           <a:p>
             <a:pPr>
               <a:spcAft>
-                <a:spcPts val="1000"/>
+                <a:spcPts val="200"/>
               </a:spcAft>
-              <a:defRPr sz="950" b="1">
-                <a:solidFill>
-                  <a:srgbClr val="0F1E36"/>
-                </a:solidFill>
-              </a:defRPr>
-            </a:pPr>
-            <a:r>
-              <a:t>Objective: Understand Current State, Build Relationships &amp; Audit Risks</a:t>
+              <a:defRPr sz="1150" b="1">
+                <a:solidFill>
+                  <a:srgbClr val="004E96"/>
+                </a:solidFill>
+              </a:defRPr>
+            </a:pPr>
+            <a:r>
+              <a:t>1. Standardized Construction Site 'IT-in-a-Box' Rapid Deployment Kit</a:t>
             </a:r>
           </a:p>
           <a:p>
             <a:pPr>
               <a:spcAft>
-                <a:spcPts val="800"/>
+                <a:spcPts val="200"/>
               </a:spcAft>
-              <a:defRPr sz="950">
+              <a:defRPr sz="900" b="1">
                 <a:solidFill>
                   <a:srgbClr val="1E293B"/>
                 </a:solidFill>
               </a:defRPr>
             </a:pPr>
             <a:r>
-              <a:t>✔ Audit all existing IT infrastructure, networks, cloud tenancies, and active construction site connections.</a:t>
-            </a:r>
-          </a:p>
-          <a:p>
-            <a:pPr>
-              <a:spcAft>
-                <a:spcPts val="800"/>
-              </a:spcAft>
-              <a:defRPr sz="950">
-                <a:solidFill>
-                  <a:srgbClr val="1E293B"/>
-                </a:solidFill>
-              </a:defRPr>
-            </a:pPr>
-            <a:r>
-              <a:t>✔ Interview business unit heads, site project managers, and executive leadership to identify operational bottlenecks.</a:t>
-            </a:r>
-          </a:p>
-          <a:p>
-            <a:pPr>
-              <a:spcAft>
-                <a:spcPts val="800"/>
-              </a:spcAft>
-              <a:defRPr sz="950">
-                <a:solidFill>
-                  <a:srgbClr val="1E293B"/>
-                </a:solidFill>
-              </a:defRPr>
-            </a:pPr>
-            <a:r>
-              <a:t>✔ Review existing cybersecurity controls, backup regimes, DR documentation, and compliance standings.</a:t>
-            </a:r>
-          </a:p>
-          <a:p>
-            <a:pPr>
-              <a:spcAft>
-                <a:spcPts val="800"/>
-              </a:spcAft>
-              <a:defRPr sz="950">
-                <a:solidFill>
-                  <a:srgbClr val="1E293B"/>
-                </a:solidFill>
-              </a:defRPr>
-            </a:pPr>
-            <a:r>
-              <a:t>✔ Analyze IT budget utilization, vendor contracts, software licenses, and current SLA performance metrics.</a:t>
-            </a:r>
-          </a:p>
-        </p:txBody>
-      </p:sp>
-      <p:sp>
-        <p:nvSpPr>
-          <p:cNvPr id="10" name="Rounded Rectangle 9"/>
+              <a:t>Opportunity: Setting up reliable IT infrastructure at new construction sites often takes weeks and suffers from inconsistent hardware and security standards.</a:t>
+            </a:r>
+          </a:p>
+          <a:p>
+            <a:pPr>
+              <a:defRPr sz="850">
+                <a:solidFill>
+                  <a:srgbClr val="64748B"/>
+                </a:solidFill>
+              </a:defRPr>
+            </a:pPr>
+            <a:r>
+              <a:t>Proposed Solution: Design a containerized 'Site IT Kit' combining dual-SIM 5G/satellite SD-WAN routers, local edge server/caching node, pre-configured biometric access control, and ruggedized Wi-Fi 6 access points. Enables full site IT commissioning within 48 hours with automated zero-touch provisioning.</a:t>
+            </a:r>
+          </a:p>
+        </p:txBody>
+      </p:sp>
+      <p:sp>
+        <p:nvSpPr>
+          <p:cNvPr id="8" name="Rounded Rectangle 7"/>
           <p:cNvSpPr/>
           <p:nvPr/>
         </p:nvSpPr>
         <p:spPr>
           <a:xfrm>
-            <a:off x="4389120" y="1463040"/>
-            <a:ext cx="3401568" cy="4754880"/>
+            <a:off x="731520" y="2651760"/>
+            <a:ext cx="10728655" cy="1078992"/>
           </a:xfrm>
           <a:prstGeom prst="roundRect">
             <a:avLst/>
@@ -4121,92 +4011,14 @@
       </p:sp>
       <p:sp>
         <p:nvSpPr>
-          <p:cNvPr id="11" name="Rectangle 10"/>
-          <p:cNvSpPr/>
-          <p:nvPr/>
-        </p:nvSpPr>
-        <p:spPr>
-          <a:xfrm>
-            <a:off x="4398264" y="1472184"/>
-            <a:ext cx="3383280" cy="438912"/>
-          </a:xfrm>
-          <a:prstGeom prst="rect">
-            <a:avLst/>
-          </a:prstGeom>
-          <a:solidFill>
-            <a:srgbClr val="0E7490"/>
-          </a:solidFill>
-          <a:ln>
-            <a:noFill/>
-          </a:ln>
-        </p:spPr>
-        <p:style>
-          <a:lnRef idx="1">
-            <a:schemeClr val="accent1"/>
-          </a:lnRef>
-          <a:fillRef idx="3">
-            <a:schemeClr val="accent1"/>
-          </a:fillRef>
-          <a:effectRef idx="2">
-            <a:schemeClr val="accent1"/>
-          </a:effectRef>
-          <a:fontRef idx="minor">
-            <a:schemeClr val="lt1"/>
-          </a:fontRef>
-        </p:style>
-        <p:txBody>
-          <a:bodyPr rtlCol="0" anchor="ctr"/>
-          <a:lstStyle/>
-          <a:p>
-            <a:pPr algn="ctr"/>
-          </a:p>
-        </p:txBody>
-      </p:sp>
-      <p:sp>
-        <p:nvSpPr>
-          <p:cNvPr id="12" name="TextBox 11"/>
+          <p:cNvPr id="9" name="TextBox 8"/>
           <p:cNvSpPr txBox="1"/>
           <p:nvPr/>
         </p:nvSpPr>
         <p:spPr>
           <a:xfrm>
-            <a:off x="4498848" y="1536192"/>
-            <a:ext cx="3182112" cy="320040"/>
-          </a:xfrm>
-          <a:prstGeom prst="rect">
-            <a:avLst/>
-          </a:prstGeom>
-          <a:noFill/>
-        </p:spPr>
-        <p:txBody>
-          <a:bodyPr wrap="none">
-            <a:spAutoFit/>
-          </a:bodyPr>
-          <a:lstStyle/>
-          <a:p>
-            <a:pPr>
-              <a:defRPr sz="1100" b="1">
-                <a:solidFill>
-                  <a:srgbClr val="FFFFFF"/>
-                </a:solidFill>
-              </a:defRPr>
-            </a:pPr>
-            <a:r>
-              <a:t>Days 31 – 60: Stabilization &amp; Quick Wins</a:t>
-            </a:r>
-          </a:p>
-        </p:txBody>
-      </p:sp>
-      <p:sp>
-        <p:nvSpPr>
-          <p:cNvPr id="13" name="TextBox 12"/>
-          <p:cNvSpPr txBox="1"/>
-          <p:nvPr/>
-        </p:nvSpPr>
-        <p:spPr>
-          <a:xfrm>
-            <a:off x="4526280" y="2011680"/>
-            <a:ext cx="3127248" cy="4023360"/>
+            <a:off x="960120" y="2743200"/>
+            <a:ext cx="10241280" cy="914400"/>
           </a:xfrm>
           <a:prstGeom prst="rect">
             <a:avLst/>
@@ -4221,90 +4033,57 @@
           <a:p>
             <a:pPr>
               <a:spcAft>
-                <a:spcPts val="1000"/>
+                <a:spcPts val="200"/>
               </a:spcAft>
-              <a:defRPr sz="950" b="1">
-                <a:solidFill>
-                  <a:srgbClr val="0F1E36"/>
-                </a:solidFill>
-              </a:defRPr>
-            </a:pPr>
-            <a:r>
-              <a:t>Objective: Fortify Security, Address Gaps &amp; Streamline Operations</a:t>
+              <a:defRPr sz="1150" b="1">
+                <a:solidFill>
+                  <a:srgbClr val="004E96"/>
+                </a:solidFill>
+              </a:defRPr>
+            </a:pPr>
+            <a:r>
+              <a:t>2. Cloud BIM &amp; Common Data Environment (CDE) Acceleration Node (Powered by Spatial 3D Tech)</a:t>
             </a:r>
           </a:p>
           <a:p>
             <a:pPr>
               <a:spcAft>
-                <a:spcPts val="800"/>
+                <a:spcPts val="200"/>
               </a:spcAft>
-              <a:defRPr sz="950">
+              <a:defRPr sz="900" b="1">
                 <a:solidFill>
                   <a:srgbClr val="1E293B"/>
                 </a:solidFill>
               </a:defRPr>
             </a:pPr>
             <a:r>
-              <a:t>✔ Remediate critical vulnerabilities identified during audit; enforce uniform MFA and access policies.</a:t>
-            </a:r>
-          </a:p>
-          <a:p>
-            <a:pPr>
-              <a:spcAft>
-                <a:spcPts val="800"/>
-              </a:spcAft>
-              <a:defRPr sz="950">
-                <a:solidFill>
-                  <a:srgbClr val="1E293B"/>
-                </a:solidFill>
-              </a:defRPr>
-            </a:pPr>
-            <a:r>
-              <a:t>✔ Optimize job-site connectivity baselines; resolve recurring network instability pain points at active sites.</a:t>
-            </a:r>
-          </a:p>
-          <a:p>
-            <a:pPr>
-              <a:spcAft>
-                <a:spcPts val="800"/>
-              </a:spcAft>
-              <a:defRPr sz="950">
-                <a:solidFill>
-                  <a:srgbClr val="1E293B"/>
-                </a:solidFill>
-              </a:defRPr>
-            </a:pPr>
-            <a:r>
-              <a:t>✔ Consolidate vendor SLAs, eliminate redundant licenses, and introduce transparent IT support ticketing KPIs.</a:t>
-            </a:r>
-          </a:p>
-          <a:p>
-            <a:pPr>
-              <a:spcAft>
-                <a:spcPts val="800"/>
-              </a:spcAft>
-              <a:defRPr sz="950">
-                <a:solidFill>
-                  <a:srgbClr val="1E293B"/>
-                </a:solidFill>
-              </a:defRPr>
-            </a:pPr>
-            <a:r>
-              <a:t>✔ Conduct a full table-top Disaster Recovery (DR) and backup verification exercise to guarantee system resilience.</a:t>
-            </a:r>
-          </a:p>
-        </p:txBody>
-      </p:sp>
-      <p:sp>
-        <p:nvSpPr>
-          <p:cNvPr id="14" name="Rounded Rectangle 13"/>
+              <a:t>Opportunity: Field teams struggle downloading and rendering multi-gigabyte 3D BIM models, CAD drawings, and point clouds over remote job-site cellular connections.</a:t>
+            </a:r>
+          </a:p>
+          <a:p>
+            <a:pPr>
+              <a:defRPr sz="850">
+                <a:solidFill>
+                  <a:srgbClr val="64748B"/>
+                </a:solidFill>
+              </a:defRPr>
+            </a:pPr>
+            <a:r>
+              <a:t>Proposed Solution: Deploy localized edge-caching appliances paired with Voxelforge AI / ayam3d retopology and WebGL progressive 3D rendering. Site engineers view and markup complex 3D digital twins instantly without saturating job-site uplink bandwidth.</a:t>
+            </a:r>
+          </a:p>
+        </p:txBody>
+      </p:sp>
+      <p:sp>
+        <p:nvSpPr>
+          <p:cNvPr id="10" name="Rounded Rectangle 9"/>
           <p:cNvSpPr/>
           <p:nvPr/>
         </p:nvSpPr>
         <p:spPr>
           <a:xfrm>
-            <a:off x="8046720" y="1463040"/>
-            <a:ext cx="3401568" cy="4754880"/>
+            <a:off x="731520" y="3840480"/>
+            <a:ext cx="10728655" cy="1078992"/>
           </a:xfrm>
           <a:prstGeom prst="roundRect">
             <a:avLst/>
@@ -4342,23 +4121,90 @@
       </p:sp>
       <p:sp>
         <p:nvSpPr>
-          <p:cNvPr id="15" name="Rectangle 14"/>
+          <p:cNvPr id="11" name="TextBox 10"/>
+          <p:cNvSpPr txBox="1"/>
+          <p:nvPr/>
+        </p:nvSpPr>
+        <p:spPr>
+          <a:xfrm>
+            <a:off x="960120" y="3931920"/>
+            <a:ext cx="10241280" cy="914400"/>
+          </a:xfrm>
+          <a:prstGeom prst="rect">
+            <a:avLst/>
+          </a:prstGeom>
+          <a:noFill/>
+        </p:spPr>
+        <p:txBody>
+          <a:bodyPr wrap="square">
+            <a:spAutoFit/>
+          </a:bodyPr>
+          <a:lstStyle/>
+          <a:p>
+            <a:pPr>
+              <a:spcAft>
+                <a:spcPts val="200"/>
+              </a:spcAft>
+              <a:defRPr sz="1150" b="1">
+                <a:solidFill>
+                  <a:srgbClr val="004E96"/>
+                </a:solidFill>
+              </a:defRPr>
+            </a:pPr>
+            <a:r>
+              <a:t>3. Subcontractor Zero-Trust Security Mesh &amp; Automated Vendor Compliance</a:t>
+            </a:r>
+          </a:p>
+          <a:p>
+            <a:pPr>
+              <a:spcAft>
+                <a:spcPts val="200"/>
+              </a:spcAft>
+              <a:defRPr sz="900" b="1">
+                <a:solidFill>
+                  <a:srgbClr val="1E293B"/>
+                </a:solidFill>
+              </a:defRPr>
+            </a:pPr>
+            <a:r>
+              <a:t>Opportunity: General contractors interact with hundreds of specialized subcontractors and vendors, introducing major cybersecurity and intellectual property leakage risks.</a:t>
+            </a:r>
+          </a:p>
+          <a:p>
+            <a:pPr>
+              <a:defRPr sz="850">
+                <a:solidFill>
+                  <a:srgbClr val="64748B"/>
+                </a:solidFill>
+              </a:defRPr>
+            </a:pPr>
+            <a:r>
+              <a:t>Proposed Solution: Establish a cloud-native Zero-Trust Network Access (ZTNA) portal. Subcontractors access only designated project folders with time-bound credentials, multi-factor authentication, watermarked document viewers, and automated endpoint compliance checks.</a:t>
+            </a:r>
+          </a:p>
+        </p:txBody>
+      </p:sp>
+      <p:sp>
+        <p:nvSpPr>
+          <p:cNvPr id="12" name="Rounded Rectangle 11"/>
           <p:cNvSpPr/>
           <p:nvPr/>
         </p:nvSpPr>
         <p:spPr>
           <a:xfrm>
-            <a:off x="8055864" y="1472184"/>
-            <a:ext cx="3383280" cy="438912"/>
-          </a:xfrm>
-          <a:prstGeom prst="rect">
+            <a:off x="731520" y="5029200"/>
+            <a:ext cx="10728655" cy="1078992"/>
+          </a:xfrm>
+          <a:prstGeom prst="roundRect">
             <a:avLst/>
           </a:prstGeom>
           <a:solidFill>
-            <a:srgbClr val="109563"/>
+            <a:srgbClr val="FFFFFF"/>
           </a:solidFill>
-          <a:ln>
-            <a:noFill/>
+          <a:ln w="12700">
+            <a:solidFill>
+              <a:srgbClr val="E2E8F0"/>
+            </a:solidFill>
           </a:ln>
         </p:spPr>
         <p:style>
@@ -4385,49 +4231,14 @@
       </p:sp>
       <p:sp>
         <p:nvSpPr>
-          <p:cNvPr id="16" name="TextBox 15"/>
+          <p:cNvPr id="13" name="TextBox 12"/>
           <p:cNvSpPr txBox="1"/>
           <p:nvPr/>
         </p:nvSpPr>
         <p:spPr>
           <a:xfrm>
-            <a:off x="8156448" y="1536192"/>
-            <a:ext cx="3182112" cy="320040"/>
-          </a:xfrm>
-          <a:prstGeom prst="rect">
-            <a:avLst/>
-          </a:prstGeom>
-          <a:noFill/>
-        </p:spPr>
-        <p:txBody>
-          <a:bodyPr wrap="none">
-            <a:spAutoFit/>
-          </a:bodyPr>
-          <a:lstStyle/>
-          <a:p>
-            <a:pPr>
-              <a:defRPr sz="1100" b="1">
-                <a:solidFill>
-                  <a:srgbClr val="FFFFFF"/>
-                </a:solidFill>
-              </a:defRPr>
-            </a:pPr>
-            <a:r>
-              <a:t>Days 61 – 90: Modernization &amp; Strategic Roadmap</a:t>
-            </a:r>
-          </a:p>
-        </p:txBody>
-      </p:sp>
-      <p:sp>
-        <p:nvSpPr>
-          <p:cNvPr id="17" name="TextBox 16"/>
-          <p:cNvSpPr txBox="1"/>
-          <p:nvPr/>
-        </p:nvSpPr>
-        <p:spPr>
-          <a:xfrm>
-            <a:off x="8183880" y="2011680"/>
-            <a:ext cx="3127248" cy="4023360"/>
+            <a:off x="960120" y="5120640"/>
+            <a:ext cx="10241280" cy="914400"/>
           </a:xfrm>
           <a:prstGeom prst="rect">
             <a:avLst/>
@@ -4442,83 +4253,50 @@
           <a:p>
             <a:pPr>
               <a:spcAft>
-                <a:spcPts val="1000"/>
+                <a:spcPts val="200"/>
               </a:spcAft>
-              <a:defRPr sz="950" b="1">
-                <a:solidFill>
-                  <a:srgbClr val="0F1E36"/>
-                </a:solidFill>
-              </a:defRPr>
-            </a:pPr>
-            <a:r>
-              <a:t>Objective: Drive Scalability, Digital Transformation &amp; Long-Term Value</a:t>
+              <a:defRPr sz="1150" b="1">
+                <a:solidFill>
+                  <a:srgbClr val="004E96"/>
+                </a:solidFill>
+              </a:defRPr>
+            </a:pPr>
+            <a:r>
+              <a:t>4. AIOps for Predictive IT Maintenance &amp; Automated Disaster Recovery (DR)</a:t>
             </a:r>
           </a:p>
           <a:p>
             <a:pPr>
               <a:spcAft>
-                <a:spcPts val="800"/>
+                <a:spcPts val="200"/>
               </a:spcAft>
-              <a:defRPr sz="950">
+              <a:defRPr sz="900" b="1">
                 <a:solidFill>
                   <a:srgbClr val="1E293B"/>
                 </a:solidFill>
               </a:defRPr>
             </a:pPr>
             <a:r>
-              <a:t>✔ Present a 2-3 Year IT Strategy &amp; Digital Roadmap aligned directly with Obayashi's corporate objectives.</a:t>
-            </a:r>
-          </a:p>
-          <a:p>
-            <a:pPr>
-              <a:spcAft>
-                <a:spcPts val="800"/>
-              </a:spcAft>
-              <a:defRPr sz="950">
-                <a:solidFill>
-                  <a:srgbClr val="1E293B"/>
-                </a:solidFill>
-              </a:defRPr>
-            </a:pPr>
-            <a:r>
-              <a:t>✔ Pilot the 'Site IT-in-a-Box' rapid deployment kit for upcoming construction projects.</a:t>
-            </a:r>
-          </a:p>
-          <a:p>
-            <a:pPr>
-              <a:spcAft>
-                <a:spcPts val="800"/>
-              </a:spcAft>
-              <a:defRPr sz="950">
-                <a:solidFill>
-                  <a:srgbClr val="1E293B"/>
-                </a:solidFill>
-              </a:defRPr>
-            </a:pPr>
-            <a:r>
-              <a:t>✔ Initiate automation initiatives (CI/CD, automated log telemetry, self-service IT service catalog).</a:t>
-            </a:r>
-          </a:p>
-          <a:p>
-            <a:pPr>
-              <a:spcAft>
-                <a:spcPts val="800"/>
-              </a:spcAft>
-              <a:defRPr sz="950">
-                <a:solidFill>
-                  <a:srgbClr val="1E293B"/>
-                </a:solidFill>
-              </a:defRPr>
-            </a:pPr>
-            <a:r>
-              <a:t>✔ Foster continuous team upskilling, mentorship, and technical excellence within the internal IT workforce.</a:t>
-            </a:r>
-          </a:p>
-        </p:txBody>
-      </p:sp>
-      <p:sp>
-        <p:nvSpPr>
-          <p:cNvPr id="18" name="TextBox 17"/>
+              <a:t>Opportunity: Unplanned server outages, ISP disconnections, or backup failures at remote regional hubs disrupt critical construction scheduling and bid deadlines.</a:t>
+            </a:r>
+          </a:p>
+          <a:p>
+            <a:pPr>
+              <a:defRPr sz="850">
+                <a:solidFill>
+                  <a:srgbClr val="64748B"/>
+                </a:solidFill>
+              </a:defRPr>
+            </a:pPr>
+            <a:r>
+              <a:t>Proposed Solution: Implement AI-assisted log analysis and telemetry to detect early indicators of disk failure, bandwidth saturation, or cyber anomalies. Pair with automated immutable cloud backups (ransomware-proof) and scheduled push-button disaster recovery failover drills.</a:t>
+            </a:r>
+          </a:p>
+        </p:txBody>
+      </p:sp>
+      <p:sp>
+        <p:nvSpPr>
+          <p:cNvPr id="14" name="TextBox 13"/>
           <p:cNvSpPr txBox="1"/>
           <p:nvPr/>
         </p:nvSpPr>
@@ -4546,7 +4324,7 @@
               </a:defRPr>
             </a:pPr>
             <a:r>
-              <a:t>Obayashi Corporation · Senior Manager – IT Candidate Portfolio | Maheshchandra Hegde · Page 10 of 11</a:t>
+              <a:t>Obayashi Corporation · Senior Manager – IT Candidate Portfolio | Maheshchandra Hegde · Slide 10 of 12</a:t>
             </a:r>
           </a:p>
         </p:txBody>
@@ -4584,6 +4362,878 @@
             <a:avLst/>
           </a:prstGeom>
           <a:solidFill>
+            <a:srgbClr val="F8FAFC"/>
+          </a:solidFill>
+          <a:ln>
+            <a:noFill/>
+          </a:ln>
+        </p:spPr>
+        <p:style>
+          <a:lnRef idx="1">
+            <a:schemeClr val="accent1"/>
+          </a:lnRef>
+          <a:fillRef idx="3">
+            <a:schemeClr val="accent1"/>
+          </a:fillRef>
+          <a:effectRef idx="2">
+            <a:schemeClr val="accent1"/>
+          </a:effectRef>
+          <a:fontRef idx="minor">
+            <a:schemeClr val="lt1"/>
+          </a:fontRef>
+        </p:style>
+        <p:txBody>
+          <a:bodyPr rtlCol="0" anchor="ctr"/>
+          <a:lstStyle/>
+          <a:p>
+            <a:pPr algn="ctr"/>
+          </a:p>
+        </p:txBody>
+      </p:sp>
+      <p:sp>
+        <p:nvSpPr>
+          <p:cNvPr id="3" name="TextBox 2"/>
+          <p:cNvSpPr txBox="1"/>
+          <p:nvPr/>
+        </p:nvSpPr>
+        <p:spPr>
+          <a:xfrm>
+            <a:off x="731520" y="365760"/>
+            <a:ext cx="10698480" cy="274320"/>
+          </a:xfrm>
+          <a:prstGeom prst="rect">
+            <a:avLst/>
+          </a:prstGeom>
+          <a:noFill/>
+        </p:spPr>
+        <p:txBody>
+          <a:bodyPr wrap="square" lIns="0" rIns="0" tIns="0" bIns="0">
+            <a:spAutoFit/>
+          </a:bodyPr>
+          <a:lstStyle/>
+          <a:p>
+            <a:pPr>
+              <a:defRPr sz="1100" b="1">
+                <a:solidFill>
+                  <a:srgbClr val="004E96"/>
+                </a:solidFill>
+              </a:defRPr>
+            </a:pPr>
+            <a:r>
+              <a:t>LEADERSHIP ONBOARDING &amp; VALUE REALIZATION</a:t>
+            </a:r>
+          </a:p>
+        </p:txBody>
+      </p:sp>
+      <p:sp>
+        <p:nvSpPr>
+          <p:cNvPr id="4" name="TextBox 3"/>
+          <p:cNvSpPr txBox="1"/>
+          <p:nvPr/>
+        </p:nvSpPr>
+        <p:spPr>
+          <a:xfrm>
+            <a:off x="731520" y="658368"/>
+            <a:ext cx="10698480" cy="502920"/>
+          </a:xfrm>
+          <a:prstGeom prst="rect">
+            <a:avLst/>
+          </a:prstGeom>
+          <a:noFill/>
+        </p:spPr>
+        <p:txBody>
+          <a:bodyPr wrap="square" lIns="0" rIns="0" tIns="0" bIns="0">
+            <a:spAutoFit/>
+          </a:bodyPr>
+          <a:lstStyle/>
+          <a:p>
+            <a:pPr>
+              <a:defRPr sz="2100" b="1">
+                <a:solidFill>
+                  <a:srgbClr val="0F1E36"/>
+                </a:solidFill>
+              </a:defRPr>
+            </a:pPr>
+            <a:r>
+              <a:t>First 90 Days: Strategic Execution Roadmap for Senior Manager – IT</a:t>
+            </a:r>
+          </a:p>
+        </p:txBody>
+      </p:sp>
+      <p:sp>
+        <p:nvSpPr>
+          <p:cNvPr id="5" name="Rectangle 4"/>
+          <p:cNvSpPr/>
+          <p:nvPr/>
+        </p:nvSpPr>
+        <p:spPr>
+          <a:xfrm>
+            <a:off x="731520" y="1234440"/>
+            <a:ext cx="10728655" cy="22860"/>
+          </a:xfrm>
+          <a:prstGeom prst="rect">
+            <a:avLst/>
+          </a:prstGeom>
+          <a:solidFill>
+            <a:srgbClr val="E2E8F0"/>
+          </a:solidFill>
+          <a:ln>
+            <a:noFill/>
+          </a:ln>
+        </p:spPr>
+        <p:style>
+          <a:lnRef idx="1">
+            <a:schemeClr val="accent1"/>
+          </a:lnRef>
+          <a:fillRef idx="3">
+            <a:schemeClr val="accent1"/>
+          </a:fillRef>
+          <a:effectRef idx="2">
+            <a:schemeClr val="accent1"/>
+          </a:effectRef>
+          <a:fontRef idx="minor">
+            <a:schemeClr val="lt1"/>
+          </a:fontRef>
+        </p:style>
+        <p:txBody>
+          <a:bodyPr rtlCol="0" anchor="ctr"/>
+          <a:lstStyle/>
+          <a:p>
+            <a:pPr algn="ctr"/>
+          </a:p>
+        </p:txBody>
+      </p:sp>
+      <p:sp>
+        <p:nvSpPr>
+          <p:cNvPr id="6" name="Rounded Rectangle 5"/>
+          <p:cNvSpPr/>
+          <p:nvPr/>
+        </p:nvSpPr>
+        <p:spPr>
+          <a:xfrm>
+            <a:off x="731520" y="1463040"/>
+            <a:ext cx="3401568" cy="4754880"/>
+          </a:xfrm>
+          <a:prstGeom prst="roundRect">
+            <a:avLst/>
+          </a:prstGeom>
+          <a:solidFill>
+            <a:srgbClr val="FFFFFF"/>
+          </a:solidFill>
+          <a:ln w="12700">
+            <a:solidFill>
+              <a:srgbClr val="E2E8F0"/>
+            </a:solidFill>
+          </a:ln>
+        </p:spPr>
+        <p:style>
+          <a:lnRef idx="1">
+            <a:schemeClr val="accent1"/>
+          </a:lnRef>
+          <a:fillRef idx="3">
+            <a:schemeClr val="accent1"/>
+          </a:fillRef>
+          <a:effectRef idx="2">
+            <a:schemeClr val="accent1"/>
+          </a:effectRef>
+          <a:fontRef idx="minor">
+            <a:schemeClr val="lt1"/>
+          </a:fontRef>
+        </p:style>
+        <p:txBody>
+          <a:bodyPr rtlCol="0" anchor="ctr"/>
+          <a:lstStyle/>
+          <a:p>
+            <a:pPr algn="ctr"/>
+          </a:p>
+        </p:txBody>
+      </p:sp>
+      <p:sp>
+        <p:nvSpPr>
+          <p:cNvPr id="7" name="Rectangle 6"/>
+          <p:cNvSpPr/>
+          <p:nvPr/>
+        </p:nvSpPr>
+        <p:spPr>
+          <a:xfrm>
+            <a:off x="740664" y="1472184"/>
+            <a:ext cx="3383280" cy="438912"/>
+          </a:xfrm>
+          <a:prstGeom prst="rect">
+            <a:avLst/>
+          </a:prstGeom>
+          <a:solidFill>
+            <a:srgbClr val="004E96"/>
+          </a:solidFill>
+          <a:ln>
+            <a:noFill/>
+          </a:ln>
+        </p:spPr>
+        <p:style>
+          <a:lnRef idx="1">
+            <a:schemeClr val="accent1"/>
+          </a:lnRef>
+          <a:fillRef idx="3">
+            <a:schemeClr val="accent1"/>
+          </a:fillRef>
+          <a:effectRef idx="2">
+            <a:schemeClr val="accent1"/>
+          </a:effectRef>
+          <a:fontRef idx="minor">
+            <a:schemeClr val="lt1"/>
+          </a:fontRef>
+        </p:style>
+        <p:txBody>
+          <a:bodyPr rtlCol="0" anchor="ctr"/>
+          <a:lstStyle/>
+          <a:p>
+            <a:pPr algn="ctr"/>
+          </a:p>
+        </p:txBody>
+      </p:sp>
+      <p:sp>
+        <p:nvSpPr>
+          <p:cNvPr id="8" name="TextBox 7"/>
+          <p:cNvSpPr txBox="1"/>
+          <p:nvPr/>
+        </p:nvSpPr>
+        <p:spPr>
+          <a:xfrm>
+            <a:off x="841248" y="1536192"/>
+            <a:ext cx="3182112" cy="320040"/>
+          </a:xfrm>
+          <a:prstGeom prst="rect">
+            <a:avLst/>
+          </a:prstGeom>
+          <a:noFill/>
+        </p:spPr>
+        <p:txBody>
+          <a:bodyPr wrap="none">
+            <a:spAutoFit/>
+          </a:bodyPr>
+          <a:lstStyle/>
+          <a:p>
+            <a:pPr>
+              <a:defRPr sz="1100" b="1">
+                <a:solidFill>
+                  <a:srgbClr val="FFFFFF"/>
+                </a:solidFill>
+              </a:defRPr>
+            </a:pPr>
+            <a:r>
+              <a:t>Days 1 – 30: Discovery &amp; Baseline Assessment</a:t>
+            </a:r>
+          </a:p>
+        </p:txBody>
+      </p:sp>
+      <p:sp>
+        <p:nvSpPr>
+          <p:cNvPr id="9" name="TextBox 8"/>
+          <p:cNvSpPr txBox="1"/>
+          <p:nvPr/>
+        </p:nvSpPr>
+        <p:spPr>
+          <a:xfrm>
+            <a:off x="868680" y="2011680"/>
+            <a:ext cx="3127248" cy="4023360"/>
+          </a:xfrm>
+          <a:prstGeom prst="rect">
+            <a:avLst/>
+          </a:prstGeom>
+          <a:noFill/>
+        </p:spPr>
+        <p:txBody>
+          <a:bodyPr wrap="square">
+            <a:spAutoFit/>
+          </a:bodyPr>
+          <a:lstStyle/>
+          <a:p>
+            <a:pPr>
+              <a:spcAft>
+                <a:spcPts val="1000"/>
+              </a:spcAft>
+              <a:defRPr sz="950" b="1">
+                <a:solidFill>
+                  <a:srgbClr val="0F1E36"/>
+                </a:solidFill>
+              </a:defRPr>
+            </a:pPr>
+            <a:r>
+              <a:t>Objective: Understand Current State, Build Relationships &amp; Audit Risks</a:t>
+            </a:r>
+          </a:p>
+          <a:p>
+            <a:pPr>
+              <a:spcAft>
+                <a:spcPts val="800"/>
+              </a:spcAft>
+              <a:defRPr sz="950">
+                <a:solidFill>
+                  <a:srgbClr val="1E293B"/>
+                </a:solidFill>
+              </a:defRPr>
+            </a:pPr>
+            <a:r>
+              <a:t>✔ Audit all existing IT infrastructure, networks, cloud tenancies, and active construction site connections.</a:t>
+            </a:r>
+          </a:p>
+          <a:p>
+            <a:pPr>
+              <a:spcAft>
+                <a:spcPts val="800"/>
+              </a:spcAft>
+              <a:defRPr sz="950">
+                <a:solidFill>
+                  <a:srgbClr val="1E293B"/>
+                </a:solidFill>
+              </a:defRPr>
+            </a:pPr>
+            <a:r>
+              <a:t>✔ Interview business unit heads, site project managers, and executive leadership to identify operational bottlenecks.</a:t>
+            </a:r>
+          </a:p>
+          <a:p>
+            <a:pPr>
+              <a:spcAft>
+                <a:spcPts val="800"/>
+              </a:spcAft>
+              <a:defRPr sz="950">
+                <a:solidFill>
+                  <a:srgbClr val="1E293B"/>
+                </a:solidFill>
+              </a:defRPr>
+            </a:pPr>
+            <a:r>
+              <a:t>✔ Review existing cybersecurity controls, backup regimes, DR documentation, and compliance standings.</a:t>
+            </a:r>
+          </a:p>
+          <a:p>
+            <a:pPr>
+              <a:spcAft>
+                <a:spcPts val="800"/>
+              </a:spcAft>
+              <a:defRPr sz="950">
+                <a:solidFill>
+                  <a:srgbClr val="1E293B"/>
+                </a:solidFill>
+              </a:defRPr>
+            </a:pPr>
+            <a:r>
+              <a:t>✔ Analyze IT budget utilization, vendor contracts, software licenses, and current SLA performance metrics.</a:t>
+            </a:r>
+          </a:p>
+        </p:txBody>
+      </p:sp>
+      <p:sp>
+        <p:nvSpPr>
+          <p:cNvPr id="10" name="Rounded Rectangle 9"/>
+          <p:cNvSpPr/>
+          <p:nvPr/>
+        </p:nvSpPr>
+        <p:spPr>
+          <a:xfrm>
+            <a:off x="4389120" y="1463040"/>
+            <a:ext cx="3401568" cy="4754880"/>
+          </a:xfrm>
+          <a:prstGeom prst="roundRect">
+            <a:avLst/>
+          </a:prstGeom>
+          <a:solidFill>
+            <a:srgbClr val="FFFFFF"/>
+          </a:solidFill>
+          <a:ln w="12700">
+            <a:solidFill>
+              <a:srgbClr val="E2E8F0"/>
+            </a:solidFill>
+          </a:ln>
+        </p:spPr>
+        <p:style>
+          <a:lnRef idx="1">
+            <a:schemeClr val="accent1"/>
+          </a:lnRef>
+          <a:fillRef idx="3">
+            <a:schemeClr val="accent1"/>
+          </a:fillRef>
+          <a:effectRef idx="2">
+            <a:schemeClr val="accent1"/>
+          </a:effectRef>
+          <a:fontRef idx="minor">
+            <a:schemeClr val="lt1"/>
+          </a:fontRef>
+        </p:style>
+        <p:txBody>
+          <a:bodyPr rtlCol="0" anchor="ctr"/>
+          <a:lstStyle/>
+          <a:p>
+            <a:pPr algn="ctr"/>
+          </a:p>
+        </p:txBody>
+      </p:sp>
+      <p:sp>
+        <p:nvSpPr>
+          <p:cNvPr id="11" name="Rectangle 10"/>
+          <p:cNvSpPr/>
+          <p:nvPr/>
+        </p:nvSpPr>
+        <p:spPr>
+          <a:xfrm>
+            <a:off x="4398264" y="1472184"/>
+            <a:ext cx="3383280" cy="438912"/>
+          </a:xfrm>
+          <a:prstGeom prst="rect">
+            <a:avLst/>
+          </a:prstGeom>
+          <a:solidFill>
+            <a:srgbClr val="0E7490"/>
+          </a:solidFill>
+          <a:ln>
+            <a:noFill/>
+          </a:ln>
+        </p:spPr>
+        <p:style>
+          <a:lnRef idx="1">
+            <a:schemeClr val="accent1"/>
+          </a:lnRef>
+          <a:fillRef idx="3">
+            <a:schemeClr val="accent1"/>
+          </a:fillRef>
+          <a:effectRef idx="2">
+            <a:schemeClr val="accent1"/>
+          </a:effectRef>
+          <a:fontRef idx="minor">
+            <a:schemeClr val="lt1"/>
+          </a:fontRef>
+        </p:style>
+        <p:txBody>
+          <a:bodyPr rtlCol="0" anchor="ctr"/>
+          <a:lstStyle/>
+          <a:p>
+            <a:pPr algn="ctr"/>
+          </a:p>
+        </p:txBody>
+      </p:sp>
+      <p:sp>
+        <p:nvSpPr>
+          <p:cNvPr id="12" name="TextBox 11"/>
+          <p:cNvSpPr txBox="1"/>
+          <p:nvPr/>
+        </p:nvSpPr>
+        <p:spPr>
+          <a:xfrm>
+            <a:off x="4498848" y="1536192"/>
+            <a:ext cx="3182112" cy="320040"/>
+          </a:xfrm>
+          <a:prstGeom prst="rect">
+            <a:avLst/>
+          </a:prstGeom>
+          <a:noFill/>
+        </p:spPr>
+        <p:txBody>
+          <a:bodyPr wrap="none">
+            <a:spAutoFit/>
+          </a:bodyPr>
+          <a:lstStyle/>
+          <a:p>
+            <a:pPr>
+              <a:defRPr sz="1100" b="1">
+                <a:solidFill>
+                  <a:srgbClr val="FFFFFF"/>
+                </a:solidFill>
+              </a:defRPr>
+            </a:pPr>
+            <a:r>
+              <a:t>Days 31 – 60: Stabilization &amp; Quick Wins</a:t>
+            </a:r>
+          </a:p>
+        </p:txBody>
+      </p:sp>
+      <p:sp>
+        <p:nvSpPr>
+          <p:cNvPr id="13" name="TextBox 12"/>
+          <p:cNvSpPr txBox="1"/>
+          <p:nvPr/>
+        </p:nvSpPr>
+        <p:spPr>
+          <a:xfrm>
+            <a:off x="4526280" y="2011680"/>
+            <a:ext cx="3127248" cy="4023360"/>
+          </a:xfrm>
+          <a:prstGeom prst="rect">
+            <a:avLst/>
+          </a:prstGeom>
+          <a:noFill/>
+        </p:spPr>
+        <p:txBody>
+          <a:bodyPr wrap="square">
+            <a:spAutoFit/>
+          </a:bodyPr>
+          <a:lstStyle/>
+          <a:p>
+            <a:pPr>
+              <a:spcAft>
+                <a:spcPts val="1000"/>
+              </a:spcAft>
+              <a:defRPr sz="950" b="1">
+                <a:solidFill>
+                  <a:srgbClr val="0F1E36"/>
+                </a:solidFill>
+              </a:defRPr>
+            </a:pPr>
+            <a:r>
+              <a:t>Objective: Fortify Security, Address Gaps &amp; Streamline Operations</a:t>
+            </a:r>
+          </a:p>
+          <a:p>
+            <a:pPr>
+              <a:spcAft>
+                <a:spcPts val="800"/>
+              </a:spcAft>
+              <a:defRPr sz="950">
+                <a:solidFill>
+                  <a:srgbClr val="1E293B"/>
+                </a:solidFill>
+              </a:defRPr>
+            </a:pPr>
+            <a:r>
+              <a:t>✔ Remediate critical vulnerabilities identified during audit; enforce uniform MFA and access policies.</a:t>
+            </a:r>
+          </a:p>
+          <a:p>
+            <a:pPr>
+              <a:spcAft>
+                <a:spcPts val="800"/>
+              </a:spcAft>
+              <a:defRPr sz="950">
+                <a:solidFill>
+                  <a:srgbClr val="1E293B"/>
+                </a:solidFill>
+              </a:defRPr>
+            </a:pPr>
+            <a:r>
+              <a:t>✔ Optimize job-site connectivity baselines; resolve recurring network instability pain points at active sites.</a:t>
+            </a:r>
+          </a:p>
+          <a:p>
+            <a:pPr>
+              <a:spcAft>
+                <a:spcPts val="800"/>
+              </a:spcAft>
+              <a:defRPr sz="950">
+                <a:solidFill>
+                  <a:srgbClr val="1E293B"/>
+                </a:solidFill>
+              </a:defRPr>
+            </a:pPr>
+            <a:r>
+              <a:t>✔ Consolidate vendor SLAs, eliminate redundant licenses, and introduce transparent IT support ticketing KPIs.</a:t>
+            </a:r>
+          </a:p>
+          <a:p>
+            <a:pPr>
+              <a:spcAft>
+                <a:spcPts val="800"/>
+              </a:spcAft>
+              <a:defRPr sz="950">
+                <a:solidFill>
+                  <a:srgbClr val="1E293B"/>
+                </a:solidFill>
+              </a:defRPr>
+            </a:pPr>
+            <a:r>
+              <a:t>✔ Conduct a full table-top Disaster Recovery (DR) and backup verification exercise to guarantee system resilience.</a:t>
+            </a:r>
+          </a:p>
+        </p:txBody>
+      </p:sp>
+      <p:sp>
+        <p:nvSpPr>
+          <p:cNvPr id="14" name="Rounded Rectangle 13"/>
+          <p:cNvSpPr/>
+          <p:nvPr/>
+        </p:nvSpPr>
+        <p:spPr>
+          <a:xfrm>
+            <a:off x="8046720" y="1463040"/>
+            <a:ext cx="3401568" cy="4754880"/>
+          </a:xfrm>
+          <a:prstGeom prst="roundRect">
+            <a:avLst/>
+          </a:prstGeom>
+          <a:solidFill>
+            <a:srgbClr val="FFFFFF"/>
+          </a:solidFill>
+          <a:ln w="12700">
+            <a:solidFill>
+              <a:srgbClr val="E2E8F0"/>
+            </a:solidFill>
+          </a:ln>
+        </p:spPr>
+        <p:style>
+          <a:lnRef idx="1">
+            <a:schemeClr val="accent1"/>
+          </a:lnRef>
+          <a:fillRef idx="3">
+            <a:schemeClr val="accent1"/>
+          </a:fillRef>
+          <a:effectRef idx="2">
+            <a:schemeClr val="accent1"/>
+          </a:effectRef>
+          <a:fontRef idx="minor">
+            <a:schemeClr val="lt1"/>
+          </a:fontRef>
+        </p:style>
+        <p:txBody>
+          <a:bodyPr rtlCol="0" anchor="ctr"/>
+          <a:lstStyle/>
+          <a:p>
+            <a:pPr algn="ctr"/>
+          </a:p>
+        </p:txBody>
+      </p:sp>
+      <p:sp>
+        <p:nvSpPr>
+          <p:cNvPr id="15" name="Rectangle 14"/>
+          <p:cNvSpPr/>
+          <p:nvPr/>
+        </p:nvSpPr>
+        <p:spPr>
+          <a:xfrm>
+            <a:off x="8055864" y="1472184"/>
+            <a:ext cx="3383280" cy="438912"/>
+          </a:xfrm>
+          <a:prstGeom prst="rect">
+            <a:avLst/>
+          </a:prstGeom>
+          <a:solidFill>
+            <a:srgbClr val="109563"/>
+          </a:solidFill>
+          <a:ln>
+            <a:noFill/>
+          </a:ln>
+        </p:spPr>
+        <p:style>
+          <a:lnRef idx="1">
+            <a:schemeClr val="accent1"/>
+          </a:lnRef>
+          <a:fillRef idx="3">
+            <a:schemeClr val="accent1"/>
+          </a:fillRef>
+          <a:effectRef idx="2">
+            <a:schemeClr val="accent1"/>
+          </a:effectRef>
+          <a:fontRef idx="minor">
+            <a:schemeClr val="lt1"/>
+          </a:fontRef>
+        </p:style>
+        <p:txBody>
+          <a:bodyPr rtlCol="0" anchor="ctr"/>
+          <a:lstStyle/>
+          <a:p>
+            <a:pPr algn="ctr"/>
+          </a:p>
+        </p:txBody>
+      </p:sp>
+      <p:sp>
+        <p:nvSpPr>
+          <p:cNvPr id="16" name="TextBox 15"/>
+          <p:cNvSpPr txBox="1"/>
+          <p:nvPr/>
+        </p:nvSpPr>
+        <p:spPr>
+          <a:xfrm>
+            <a:off x="8156448" y="1536192"/>
+            <a:ext cx="3182112" cy="320040"/>
+          </a:xfrm>
+          <a:prstGeom prst="rect">
+            <a:avLst/>
+          </a:prstGeom>
+          <a:noFill/>
+        </p:spPr>
+        <p:txBody>
+          <a:bodyPr wrap="none">
+            <a:spAutoFit/>
+          </a:bodyPr>
+          <a:lstStyle/>
+          <a:p>
+            <a:pPr>
+              <a:defRPr sz="1100" b="1">
+                <a:solidFill>
+                  <a:srgbClr val="FFFFFF"/>
+                </a:solidFill>
+              </a:defRPr>
+            </a:pPr>
+            <a:r>
+              <a:t>Days 61 – 90: Modernization &amp; Strategic Roadmap</a:t>
+            </a:r>
+          </a:p>
+        </p:txBody>
+      </p:sp>
+      <p:sp>
+        <p:nvSpPr>
+          <p:cNvPr id="17" name="TextBox 16"/>
+          <p:cNvSpPr txBox="1"/>
+          <p:nvPr/>
+        </p:nvSpPr>
+        <p:spPr>
+          <a:xfrm>
+            <a:off x="8183880" y="2011680"/>
+            <a:ext cx="3127248" cy="4023360"/>
+          </a:xfrm>
+          <a:prstGeom prst="rect">
+            <a:avLst/>
+          </a:prstGeom>
+          <a:noFill/>
+        </p:spPr>
+        <p:txBody>
+          <a:bodyPr wrap="square">
+            <a:spAutoFit/>
+          </a:bodyPr>
+          <a:lstStyle/>
+          <a:p>
+            <a:pPr>
+              <a:spcAft>
+                <a:spcPts val="1000"/>
+              </a:spcAft>
+              <a:defRPr sz="950" b="1">
+                <a:solidFill>
+                  <a:srgbClr val="0F1E36"/>
+                </a:solidFill>
+              </a:defRPr>
+            </a:pPr>
+            <a:r>
+              <a:t>Objective: Drive Scalability, Digital Transformation &amp; Long-Term Value</a:t>
+            </a:r>
+          </a:p>
+          <a:p>
+            <a:pPr>
+              <a:spcAft>
+                <a:spcPts val="800"/>
+              </a:spcAft>
+              <a:defRPr sz="950">
+                <a:solidFill>
+                  <a:srgbClr val="1E293B"/>
+                </a:solidFill>
+              </a:defRPr>
+            </a:pPr>
+            <a:r>
+              <a:t>✔ Present a 2-3 Year IT Strategy &amp; Digital Roadmap aligned directly with Obayashi's corporate objectives.</a:t>
+            </a:r>
+          </a:p>
+          <a:p>
+            <a:pPr>
+              <a:spcAft>
+                <a:spcPts val="800"/>
+              </a:spcAft>
+              <a:defRPr sz="950">
+                <a:solidFill>
+                  <a:srgbClr val="1E293B"/>
+                </a:solidFill>
+              </a:defRPr>
+            </a:pPr>
+            <a:r>
+              <a:t>✔ Pilot the 'Site IT-in-a-Box' rapid deployment kit for upcoming construction projects.</a:t>
+            </a:r>
+          </a:p>
+          <a:p>
+            <a:pPr>
+              <a:spcAft>
+                <a:spcPts val="800"/>
+              </a:spcAft>
+              <a:defRPr sz="950">
+                <a:solidFill>
+                  <a:srgbClr val="1E293B"/>
+                </a:solidFill>
+              </a:defRPr>
+            </a:pPr>
+            <a:r>
+              <a:t>✔ Initiate automation initiatives (CI/CD, automated log telemetry, self-service IT service catalog).</a:t>
+            </a:r>
+          </a:p>
+          <a:p>
+            <a:pPr>
+              <a:spcAft>
+                <a:spcPts val="800"/>
+              </a:spcAft>
+              <a:defRPr sz="950">
+                <a:solidFill>
+                  <a:srgbClr val="1E293B"/>
+                </a:solidFill>
+              </a:defRPr>
+            </a:pPr>
+            <a:r>
+              <a:t>✔ Foster continuous team upskilling, mentorship, and technical excellence within the internal IT workforce.</a:t>
+            </a:r>
+          </a:p>
+        </p:txBody>
+      </p:sp>
+      <p:sp>
+        <p:nvSpPr>
+          <p:cNvPr id="18" name="TextBox 17"/>
+          <p:cNvSpPr txBox="1"/>
+          <p:nvPr/>
+        </p:nvSpPr>
+        <p:spPr>
+          <a:xfrm>
+            <a:off x="731520" y="6446520"/>
+            <a:ext cx="10728655" cy="320040"/>
+          </a:xfrm>
+          <a:prstGeom prst="rect">
+            <a:avLst/>
+          </a:prstGeom>
+          <a:noFill/>
+        </p:spPr>
+        <p:txBody>
+          <a:bodyPr wrap="none" lIns="0" rIns="0" tIns="0" bIns="0">
+            <a:spAutoFit/>
+          </a:bodyPr>
+          <a:lstStyle/>
+          <a:p>
+            <a:pPr>
+              <a:defRPr sz="900">
+                <a:solidFill>
+                  <a:srgbClr val="64748B"/>
+                </a:solidFill>
+              </a:defRPr>
+            </a:pPr>
+            <a:r>
+              <a:t>Obayashi Corporation · Senior Manager – IT Candidate Portfolio | Maheshchandra Hegde · Slide 11 of 12</a:t>
+            </a:r>
+          </a:p>
+        </p:txBody>
+      </p:sp>
+    </p:spTree>
+  </p:cSld>
+  <p:clrMapOvr>
+    <a:masterClrMapping/>
+  </p:clrMapOvr>
+</p:sld>
+</file>
+
+<file path=ppt/slides/slide12.xml><?xml version="1.0" encoding="utf-8"?>
+<p:sld xmlns:a="http://schemas.openxmlformats.org/drawingml/2006/main" xmlns:p="http://schemas.openxmlformats.org/presentationml/2006/main" xmlns:r="http://schemas.openxmlformats.org/officeDocument/2006/relationships">
+  <p:cSld>
+    <p:spTree>
+      <p:nvGrpSpPr>
+        <p:cNvPr id="1" name=""/>
+        <p:cNvGrpSpPr/>
+        <p:nvPr/>
+      </p:nvGrpSpPr>
+      <p:grpSpPr/>
+      <p:sp>
+        <p:nvSpPr>
+          <p:cNvPr id="2" name="Rectangle 1"/>
+          <p:cNvSpPr/>
+          <p:nvPr/>
+        </p:nvSpPr>
+        <p:spPr>
+          <a:xfrm>
+            <a:off x="0" y="0"/>
+            <a:ext cx="12191695" cy="6858000"/>
+          </a:xfrm>
+          <a:prstGeom prst="rect">
+            <a:avLst/>
+          </a:prstGeom>
+          <a:solidFill>
             <a:srgbClr val="0F1E36"/>
           </a:solidFill>
           <a:ln>
@@ -4711,9 +5361,9 @@
           <a:p>
             <a:pPr>
               <a:spcAft>
-                <a:spcPts val="800"/>
+                <a:spcPts val="700"/>
               </a:spcAft>
-              <a:defRPr sz="1100">
+              <a:defRPr sz="1050">
                 <a:solidFill>
                   <a:srgbClr val="E2E8F0"/>
                 </a:solidFill>
@@ -4726,9 +5376,9 @@
           <a:p>
             <a:pPr>
               <a:spcAft>
-                <a:spcPts val="800"/>
+                <a:spcPts val="700"/>
               </a:spcAft>
-              <a:defRPr sz="1100">
+              <a:defRPr sz="1050">
                 <a:solidFill>
                   <a:srgbClr val="E2E8F0"/>
                 </a:solidFill>
@@ -4741,24 +5391,39 @@
           <a:p>
             <a:pPr>
               <a:spcAft>
-                <a:spcPts val="800"/>
+                <a:spcPts val="700"/>
               </a:spcAft>
-              <a:defRPr sz="1100">
+              <a:defRPr sz="1050">
                 <a:solidFill>
                   <a:srgbClr val="E2E8F0"/>
                 </a:solidFill>
               </a:defRPr>
             </a:pPr>
             <a:r>
+              <a:t>• Digital Construction &amp; 3D Synergy: Leveraging 50+ project visualization pedigree, Voxelforge AI, and ayam3d to power next-generation BIM and digital twins.</a:t>
+            </a:r>
+          </a:p>
+          <a:p>
+            <a:pPr>
+              <a:spcAft>
+                <a:spcPts val="700"/>
+              </a:spcAft>
+              <a:defRPr sz="1050">
+                <a:solidFill>
+                  <a:srgbClr val="E2E8F0"/>
+                </a:solidFill>
+              </a:defRPr>
+            </a:pPr>
+            <a:r>
               <a:t>• Robust Cybersecurity &amp; Risk Mitigation: Protecting critical blueprints, intellectual property, and supply chain integrity with Zero Trust governance.</a:t>
             </a:r>
           </a:p>
           <a:p>
             <a:pPr>
               <a:spcAft>
-                <a:spcPts val="800"/>
+                <a:spcPts val="700"/>
               </a:spcAft>
-              <a:defRPr sz="1100">
+              <a:defRPr sz="1050">
                 <a:solidFill>
                   <a:srgbClr val="E2E8F0"/>
                 </a:solidFill>
@@ -4817,7 +5482,7 @@
               </a:defRPr>
             </a:pPr>
             <a:r>
-              <a:t>Obayashi Corporation · Senior Manager – IT Candidate Portfolio | Maheshchandra Hegde · Page 11 of 11</a:t>
+              <a:t>Obayashi Corporation · Senior Manager – IT Candidate Portfolio | Maheshchandra Hegde · Slide 12 of 12</a:t>
             </a:r>
           </a:p>
         </p:txBody>
@@ -4941,7 +5606,7 @@
           <a:lstStyle/>
           <a:p>
             <a:pPr>
-              <a:defRPr sz="2200" b="1">
+              <a:defRPr sz="2100" b="1">
                 <a:solidFill>
                   <a:srgbClr val="0F1E36"/>
                 </a:solidFill>
@@ -5089,7 +5754,7 @@
               </a:defRPr>
             </a:pPr>
             <a:r>
-              <a:t>Technology Leader · Systems Architect · Enterprise Delivery Expert</a:t>
+              <a:t>Technology Leader · Systems Architect · 3D Spatial Expert</a:t>
             </a:r>
           </a:p>
           <a:p>
@@ -5116,7 +5781,7 @@
               </a:defRPr>
             </a:pPr>
             <a:r>
-              <a:t>  20+ Years leading enterprise IT, architectures &amp; engineering teams</a:t>
+              <a:t>  20+ Years leading enterprise IT, systems architectures &amp; digital delivery</a:t>
             </a:r>
           </a:p>
           <a:p>
@@ -5155,7 +5820,7 @@
               </a:defRPr>
             </a:pPr>
             <a:r>
-              <a:t>• Key Past Tenures: </a:t>
+              <a:t>• Key Tenures: </a:t>
             </a:r>
           </a:p>
           <a:p>
@@ -5170,7 +5835,7 @@
               </a:defRPr>
             </a:pPr>
             <a:r>
-              <a:t>  Cyient (Philips Critical Care), Technoyana, UST Global (Cisco Systems), Moonraft, Ness, ThoughtFocus, Cognizant</a:t>
+              <a:t>  Cyient (Philips Critical Care), Technoyana, UST Global (Cisco Systems), CAE Simulation, Cognizant</a:t>
             </a:r>
           </a:p>
           <a:p>
@@ -5182,7 +5847,7 @@
               </a:defRPr>
             </a:pPr>
             <a:r>
-              <a:t>• Core Competencies: </a:t>
+              <a:t>• Dual Mastery: </a:t>
             </a:r>
           </a:p>
           <a:p>
@@ -5197,7 +5862,7 @@
               </a:defRPr>
             </a:pPr>
             <a:r>
-              <a:t>  Hybrid Infrastructure, IT Operations, Mission-Critical Availability, Cybersecurity, Team Mentorship, Vendor SLAs</a:t>
+              <a:t>  Enterprise IT Infrastructure / Cyber + 3D Visualization, CAD, BIM alignment &amp; Spatial AI</a:t>
             </a:r>
           </a:p>
           <a:p>
@@ -5224,7 +5889,7 @@
               </a:defRPr>
             </a:pPr>
             <a:r>
-              <a:t>  Healthcare Critical Systems, Enterprise Networking &amp; Dashboards, High-Reliability SaaS, 3D/Spatial Tech</a:t>
+              <a:t>  High-Reliability Healthcare, Enterprise Networking Dashboards, 3D Graphics &amp; SaaS</a:t>
             </a:r>
           </a:p>
         </p:txBody>
@@ -5497,7 +6162,7 @@
               </a:defRPr>
             </a:pPr>
             <a:r>
-              <a:t>3. Digital Transformation &amp; Enterprise Systems</a:t>
+              <a:t>3. 3D Spatial Computing &amp; Digital Construction Synergy</a:t>
             </a:r>
           </a:p>
           <a:p>
@@ -5509,7 +6174,7 @@
               </a:defRPr>
             </a:pPr>
             <a:r>
-              <a:t>Spearheaded enterprise system integrations, API gateways, automated telemetry, and modernized legacy workflows into performant, scalable cloud architectures.</a:t>
+              <a:t>Rare blend of enterprise IT governance and hands-on 3D visualization expertise (50+ projects, Voxelforge AI, ayam3d), directly bridging traditional IT with Obayashi's BIM and Digital Twin roadmaps.</a:t>
             </a:r>
           </a:p>
         </p:txBody>
@@ -5639,7 +6304,7 @@
               </a:defRPr>
             </a:pPr>
             <a:r>
-              <a:t>Obayashi Corporation · Senior Manager – IT Candidate Portfolio | Maheshchandra Hegde · Page 2 of 11</a:t>
+              <a:t>Obayashi Corporation · Senior Manager – IT Candidate Portfolio | Maheshchandra Hegde · Slide 2 of 12</a:t>
             </a:r>
           </a:p>
         </p:txBody>
@@ -5763,14 +6428,14 @@
           <a:lstStyle/>
           <a:p>
             <a:pPr>
-              <a:defRPr sz="2200" b="1">
+              <a:defRPr sz="2100" b="1">
                 <a:solidFill>
                   <a:srgbClr val="0F1E36"/>
                 </a:solidFill>
               </a:defRPr>
             </a:pPr>
             <a:r>
-              <a:t>Project Overview &amp; Objectives: Mission-Critical Enterprise System (Philips/Cyient)</a:t>
+              <a:t>Project Overview: Mission-Critical Clinical Systems (Philips / Cyient)</a:t>
             </a:r>
           </a:p>
         </p:txBody>
@@ -5896,7 +6561,7 @@
               </a:defRPr>
             </a:pPr>
             <a:r>
-              <a:t>Project Profile: Philips ICCA</a:t>
+              <a:t>Philips ICCA</a:t>
             </a:r>
           </a:p>
           <a:p>
@@ -6366,7 +7031,7 @@
               </a:defRPr>
             </a:pPr>
             <a:r>
-              <a:t>Obayashi Corporation · Senior Manager – IT Candidate Portfolio | Maheshchandra Hegde · Page 3 of 11</a:t>
+              <a:t>Obayashi Corporation · Senior Manager – IT Candidate Portfolio | Maheshchandra Hegde · Slide 3 of 12</a:t>
             </a:r>
           </a:p>
         </p:txBody>
@@ -6490,14 +7155,14 @@
           <a:lstStyle/>
           <a:p>
             <a:pPr>
-              <a:defRPr sz="2200" b="1">
+              <a:defRPr sz="2100" b="1">
                 <a:solidFill>
                   <a:srgbClr val="0F1E36"/>
                 </a:solidFill>
               </a:defRPr>
             </a:pPr>
             <a:r>
-              <a:t>Project Overview: High-Availability Cloud Transformation &amp; Edge Resilience (Technoyana)</a:t>
+              <a:t>Project Overview: Cloud Transformation &amp; Edge-Resilient Platform (Technoyana)</a:t>
             </a:r>
           </a:p>
         </p:txBody>
@@ -6638,7 +7303,7 @@
               </a:defRPr>
             </a:pPr>
             <a:r>
-              <a:t>Digital Transformation &amp; Distributed SaaS Ecosystem</a:t>
+              <a:t>Digital Transformation &amp; Distributed Cloud Ecosystem</a:t>
             </a:r>
           </a:p>
           <a:p>
@@ -6692,7 +7357,7 @@
               </a:defRPr>
             </a:pPr>
             <a:r>
-              <a:t>May 2021 - Oct 2023 (Ongoing Strategic Advisor)</a:t>
+              <a:t>May 2021 - Oct 2023 (Strategic Advisor)</a:t>
             </a:r>
           </a:p>
           <a:p>
@@ -6719,7 +7384,7 @@
               </a:defRPr>
             </a:pPr>
             <a:r>
-              <a:t>Twitan Sports OS (Shutlify), Fintech Operations Engine, Spatial AI Pipelines (Srushtilabs)</a:t>
+              <a:t>Twitan Sports OS (Shutlify), Fintech Operations Engine, Cloud Multi-Tenant Architecture</a:t>
             </a:r>
           </a:p>
           <a:p>
@@ -7046,7 +7711,7 @@
               </a:defRPr>
             </a:pPr>
             <a:r>
-              <a:t>3. Digital Innovation: Spatial 3D &amp; Automated Asset Workflows</a:t>
+              <a:t>3. High-Concurrency Event Telemetry &amp; Operational Uptime</a:t>
             </a:r>
           </a:p>
           <a:p>
@@ -7058,7 +7723,7 @@
               </a:defRPr>
             </a:pPr>
             <a:r>
-              <a:t>Pioneered spatial technology workflows (Voxelforge / Srushtilabs) producing modular 3D assets, automated mesh optimization, and WebGL visualizations. Establishes deep alignment with Obayashi's BIM, Digital Twin, and 3D construction modeling initiatives.</a:t>
+              <a:t>Built resilient real-time WebSocket state channels with automatic fallback to polling, ensuring zero operational downtime for critical tournament arbitration and multi-site scoring dashboards.</a:t>
             </a:r>
           </a:p>
         </p:txBody>
@@ -7093,7 +7758,7 @@
               </a:defRPr>
             </a:pPr>
             <a:r>
-              <a:t>Obayashi Corporation · Senior Manager – IT Candidate Portfolio | Maheshchandra Hegde · Page 4 of 11</a:t>
+              <a:t>Obayashi Corporation · Senior Manager – IT Candidate Portfolio | Maheshchandra Hegde · Slide 4 of 12</a:t>
             </a:r>
           </a:p>
         </p:txBody>
@@ -7189,7 +7854,7 @@
               </a:defRPr>
             </a:pPr>
             <a:r>
-              <a:t>LEADERSHIP &amp; EXECUTION</a:t>
+              <a:t>SPATIAL COMPUTING &amp; 3D ENGINEERING</a:t>
             </a:r>
           </a:p>
         </p:txBody>
@@ -7217,14 +7882,14 @@
           <a:lstStyle/>
           <a:p>
             <a:pPr>
-              <a:defRPr sz="2200" b="1">
+              <a:defRPr sz="2100" b="1">
                 <a:solidFill>
                   <a:srgbClr val="0F1E36"/>
                 </a:solidFill>
               </a:defRPr>
             </a:pPr>
             <a:r>
-              <a:t>Your Role &amp; Core Responsibilities: IT Strategy, Operations &amp; Governance</a:t>
+              <a:t>3D Visualization Pedigree &amp; Spatial AI: Voxelforge AI, ayam3d &amp; 50+ Projects</a:t>
             </a:r>
           </a:p>
         </p:txBody>
@@ -7281,7 +7946,7 @@
         <p:spPr>
           <a:xfrm>
             <a:off x="731520" y="1463040"/>
-            <a:ext cx="5230368" cy="2240280"/>
+            <a:ext cx="5120640" cy="4754880"/>
           </a:xfrm>
           <a:prstGeom prst="roundRect">
             <a:avLst/>
@@ -7326,7 +7991,7 @@
         <p:spPr>
           <a:xfrm>
             <a:off x="740664" y="1472184"/>
-            <a:ext cx="5212080" cy="384048"/>
+            <a:ext cx="5102352" cy="402336"/>
           </a:xfrm>
           <a:prstGeom prst="rect">
             <a:avLst/>
@@ -7368,8 +8033,8 @@
         </p:nvSpPr>
         <p:spPr>
           <a:xfrm>
-            <a:off x="914400" y="1517904"/>
-            <a:ext cx="4864608" cy="320040"/>
+            <a:off x="868680" y="1536192"/>
+            <a:ext cx="4846320" cy="320040"/>
           </a:xfrm>
           <a:prstGeom prst="rect">
             <a:avLst/>
@@ -7390,7 +8055,7 @@
               </a:defRPr>
             </a:pPr>
             <a:r>
-              <a:t>1. IT Strategy, Policy &amp; Enterprise Architecture</a:t>
+              <a:t>3D VISUALIZER EXPERT: 50+ PROJECTS DELIVERED</a:t>
             </a:r>
           </a:p>
         </p:txBody>
@@ -7403,8 +8068,8 @@
         </p:nvSpPr>
         <p:spPr>
           <a:xfrm>
-            <a:off x="914400" y="1901952"/>
-            <a:ext cx="4864608" cy="1737360"/>
+            <a:off x="914400" y="1965960"/>
+            <a:ext cx="4754880" cy="4114800"/>
           </a:xfrm>
           <a:prstGeom prst="rect">
             <a:avLst/>
@@ -7419,61 +8084,121 @@
           <a:p>
             <a:pPr>
               <a:spcAft>
-                <a:spcPts val="300"/>
+                <a:spcPts val="200"/>
               </a:spcAft>
-              <a:defRPr sz="950">
-                <a:solidFill>
-                  <a:srgbClr val="1E293B"/>
-                </a:solidFill>
-              </a:defRPr>
-            </a:pPr>
-            <a:r>
-              <a:t>• Formulated multi-year technology roadmaps aligning IT investments with organizational growth objectives.</a:t>
+              <a:defRPr sz="1050" b="1">
+                <a:solidFill>
+                  <a:srgbClr val="0F1E36"/>
+                </a:solidFill>
+              </a:defRPr>
+            </a:pPr>
+            <a:r>
+              <a:t>★ Architectural Visualization &amp; 3D Walkthroughs (35+ Projects)</a:t>
             </a:r>
           </a:p>
           <a:p>
             <a:pPr>
               <a:spcAft>
-                <a:spcPts val="300"/>
+                <a:spcPts val="600"/>
               </a:spcAft>
-              <a:defRPr sz="950">
-                <a:solidFill>
-                  <a:srgbClr val="1E293B"/>
-                </a:solidFill>
-              </a:defRPr>
-            </a:pPr>
-            <a:r>
-              <a:t>• Established standardized IT policies, coding standards, system architectures, and documentation protocols.</a:t>
+              <a:defRPr sz="900">
+                <a:solidFill>
+                  <a:srgbClr val="64748B"/>
+                </a:solidFill>
+              </a:defRPr>
+            </a:pPr>
+            <a:r>
+              <a:t>Extensive portfolio producing photorealistic architectural visualizations, exterior/interior 3D renderings, and high-impact 3D animated walkthroughs for commercial complexes, residential townships, and infrastructure projects.</a:t>
             </a:r>
           </a:p>
           <a:p>
             <a:pPr>
               <a:spcAft>
-                <a:spcPts val="300"/>
+                <a:spcPts val="200"/>
               </a:spcAft>
-              <a:defRPr sz="950">
-                <a:solidFill>
-                  <a:srgbClr val="1E293B"/>
-                </a:solidFill>
-              </a:defRPr>
-            </a:pPr>
-            <a:r>
-              <a:t>• Conducted architectural governance reviews to ensure maintainability, scalability, and technical debt reduction.</a:t>
+              <a:defRPr sz="1050" b="1">
+                <a:solidFill>
+                  <a:srgbClr val="0F1E36"/>
+                </a:solidFill>
+              </a:defRPr>
+            </a:pPr>
+            <a:r>
+              <a:t>★ CAE Simulation Technologies (Flight Simulator 3D Databases)</a:t>
             </a:r>
           </a:p>
           <a:p>
             <a:pPr>
               <a:spcAft>
-                <a:spcPts val="300"/>
+                <a:spcPts val="600"/>
               </a:spcAft>
-              <a:defRPr sz="950">
-                <a:solidFill>
-                  <a:srgbClr val="1E293B"/>
-                </a:solidFill>
-              </a:defRPr>
-            </a:pPr>
-            <a:r>
-              <a:t>• Evaluated emerging enterprise technologies (cloud, automation, spatial 3D) to drive continuous capability evolution.</a:t>
+              <a:defRPr sz="900">
+                <a:solidFill>
+                  <a:srgbClr val="64748B"/>
+                </a:solidFill>
+              </a:defRPr>
+            </a:pPr>
+            <a:r>
+              <a:t>Visual Database Developer creating high-fidelity 3D terrain databases, elevation grids, and precision 3D aircraft models for military and civil flight simulation systems.</a:t>
+            </a:r>
+          </a:p>
+          <a:p>
+            <a:pPr>
+              <a:spcAft>
+                <a:spcPts val="200"/>
+              </a:spcAft>
+              <a:defRPr sz="1050" b="1">
+                <a:solidFill>
+                  <a:srgbClr val="0F1E36"/>
+                </a:solidFill>
+              </a:defRPr>
+            </a:pPr>
+            <a:r>
+              <a:t>★ Cisco Systems: Enterprise Facility &amp; Smart Campus 3D Dashboards</a:t>
+            </a:r>
+          </a:p>
+          <a:p>
+            <a:pPr>
+              <a:spcAft>
+                <a:spcPts val="600"/>
+              </a:spcAft>
+              <a:defRPr sz="900">
+                <a:solidFill>
+                  <a:srgbClr val="64748B"/>
+                </a:solidFill>
+              </a:defRPr>
+            </a:pPr>
+            <a:r>
+              <a:t>Architected rich interactive facility monitoring dashboards visualizing campus physical infrastructure, spatial rack layouts, power utilization, and environmental sensor telemetry.</a:t>
+            </a:r>
+          </a:p>
+          <a:p>
+            <a:pPr>
+              <a:spcAft>
+                <a:spcPts val="200"/>
+              </a:spcAft>
+              <a:defRPr sz="1050" b="1">
+                <a:solidFill>
+                  <a:srgbClr val="0F1E36"/>
+                </a:solidFill>
+              </a:defRPr>
+            </a:pPr>
+            <a:r>
+              <a:t>★ CAD &amp; Digital Construction Interoperability</a:t>
+            </a:r>
+          </a:p>
+          <a:p>
+            <a:pPr>
+              <a:spcAft>
+                <a:spcPts val="600"/>
+              </a:spcAft>
+              <a:defRPr sz="900">
+                <a:solidFill>
+                  <a:srgbClr val="64748B"/>
+                </a:solidFill>
+              </a:defRPr>
+            </a:pPr>
+            <a:r>
+              <a:t>Hands-on expertise bridging 2D CAD blueprints, 3D coordinate geometry, polygonal mesh optimization, Level of Detail (LOD) management, and spatial rendering engines.</a:t>
             </a:r>
           </a:p>
         </p:txBody>
@@ -7486,8 +8211,8 @@
         </p:nvSpPr>
         <p:spPr>
           <a:xfrm>
-            <a:off x="6217920" y="1463040"/>
-            <a:ext cx="5230368" cy="2240280"/>
+            <a:off x="6108192" y="1463040"/>
+            <a:ext cx="5349240" cy="1508760"/>
           </a:xfrm>
           <a:prstGeom prst="roundRect">
             <a:avLst/>
@@ -7525,92 +8250,14 @@
       </p:sp>
       <p:sp>
         <p:nvSpPr>
-          <p:cNvPr id="11" name="Rectangle 10"/>
-          <p:cNvSpPr/>
-          <p:nvPr/>
-        </p:nvSpPr>
-        <p:spPr>
-          <a:xfrm>
-            <a:off x="6227064" y="1472184"/>
-            <a:ext cx="5212080" cy="384048"/>
-          </a:xfrm>
-          <a:prstGeom prst="rect">
-            <a:avLst/>
-          </a:prstGeom>
-          <a:solidFill>
-            <a:srgbClr val="0E7490"/>
-          </a:solidFill>
-          <a:ln>
-            <a:noFill/>
-          </a:ln>
-        </p:spPr>
-        <p:style>
-          <a:lnRef idx="1">
-            <a:schemeClr val="accent1"/>
-          </a:lnRef>
-          <a:fillRef idx="3">
-            <a:schemeClr val="accent1"/>
-          </a:fillRef>
-          <a:effectRef idx="2">
-            <a:schemeClr val="accent1"/>
-          </a:effectRef>
-          <a:fontRef idx="minor">
-            <a:schemeClr val="lt1"/>
-          </a:fontRef>
-        </p:style>
-        <p:txBody>
-          <a:bodyPr rtlCol="0" anchor="ctr"/>
-          <a:lstStyle/>
-          <a:p>
-            <a:pPr algn="ctr"/>
-          </a:p>
-        </p:txBody>
-      </p:sp>
-      <p:sp>
-        <p:nvSpPr>
-          <p:cNvPr id="12" name="TextBox 11"/>
+          <p:cNvPr id="11" name="TextBox 10"/>
           <p:cNvSpPr txBox="1"/>
           <p:nvPr/>
         </p:nvSpPr>
         <p:spPr>
           <a:xfrm>
-            <a:off x="6400800" y="1517904"/>
-            <a:ext cx="4864608" cy="320040"/>
-          </a:xfrm>
-          <a:prstGeom prst="rect">
-            <a:avLst/>
-          </a:prstGeom>
-          <a:noFill/>
-        </p:spPr>
-        <p:txBody>
-          <a:bodyPr wrap="none">
-            <a:spAutoFit/>
-          </a:bodyPr>
-          <a:lstStyle/>
-          <a:p>
-            <a:pPr>
-              <a:defRPr sz="1100" b="1">
-                <a:solidFill>
-                  <a:srgbClr val="FFFFFF"/>
-                </a:solidFill>
-              </a:defRPr>
-            </a:pPr>
-            <a:r>
-              <a:t>2. Infrastructure Operations, Cloud &amp; Business Continuity</a:t>
-            </a:r>
-          </a:p>
-        </p:txBody>
-      </p:sp>
-      <p:sp>
-        <p:nvSpPr>
-          <p:cNvPr id="13" name="TextBox 12"/>
-          <p:cNvSpPr txBox="1"/>
-          <p:nvPr/>
-        </p:nvSpPr>
-        <p:spPr>
-          <a:xfrm>
-            <a:off x="6400800" y="1901952"/>
-            <a:ext cx="4864608" cy="1737360"/>
+            <a:off x="6291072" y="1572768"/>
+            <a:ext cx="4983480" cy="1280160"/>
           </a:xfrm>
           <a:prstGeom prst="rect">
             <a:avLst/>
@@ -7627,6 +8274,18 @@
               <a:spcAft>
                 <a:spcPts val="300"/>
               </a:spcAft>
+              <a:defRPr sz="1200" b="1">
+                <a:solidFill>
+                  <a:srgbClr val="004E96"/>
+                </a:solidFill>
+              </a:defRPr>
+            </a:pPr>
+            <a:r>
+              <a:t>1. Voxelforge AI — Generative 3D Asset Workflows</a:t>
+            </a:r>
+          </a:p>
+          <a:p>
+            <a:pPr>
               <a:defRPr sz="950">
                 <a:solidFill>
                   <a:srgbClr val="1E293B"/>
@@ -7634,66 +8293,25 @@
               </a:defRPr>
             </a:pPr>
             <a:r>
-              <a:t>• Ensured 24/7 availability and resilience of mission-critical systems and multi-tier network topologies.</a:t>
-            </a:r>
-          </a:p>
-          <a:p>
-            <a:pPr>
-              <a:spcAft>
-                <a:spcPts val="300"/>
-              </a:spcAft>
-              <a:defRPr sz="950">
-                <a:solidFill>
-                  <a:srgbClr val="1E293B"/>
-                </a:solidFill>
-              </a:defRPr>
-            </a:pPr>
-            <a:r>
-              <a:t>• Supervised automated backup regimens, disaster recovery (DR) simulations, and zero-loss business continuity plans.</a:t>
-            </a:r>
-          </a:p>
-          <a:p>
-            <a:pPr>
-              <a:spcAft>
-                <a:spcPts val="300"/>
-              </a:spcAft>
-              <a:defRPr sz="950">
-                <a:solidFill>
-                  <a:srgbClr val="1E293B"/>
-                </a:solidFill>
-              </a:defRPr>
-            </a:pPr>
-            <a:r>
-              <a:t>• Managed hybrid cloud workloads, virtualization environments, network security boundaries, and telemetry.</a:t>
-            </a:r>
-          </a:p>
-          <a:p>
-            <a:pPr>
-              <a:spcAft>
-                <a:spcPts val="300"/>
-              </a:spcAft>
-              <a:defRPr sz="950">
-                <a:solidFill>
-                  <a:srgbClr val="1E293B"/>
-                </a:solidFill>
-              </a:defRPr>
-            </a:pPr>
-            <a:r>
-              <a:t>• Instituted synthetic monitoring and automated alerting to resolve system anomalies before end-user impact.</a:t>
-            </a:r>
-          </a:p>
-        </p:txBody>
-      </p:sp>
-      <p:sp>
-        <p:nvSpPr>
-          <p:cNvPr id="14" name="Rounded Rectangle 13"/>
+              <a:t>• AI-assisted generative 3D pipeline producing game-ready, modular low-poly 3D assets for WebGL, Unity, and Unreal Engine.</a:t>
+            </a:r>
+            <a:br/>
+            <a:r>
+              <a:t>• Automates prompt-to-3D synthesis, texture baking, and real-time polygon reduction, enabling instant browser-based 3D digital twin rendering.</a:t>
+            </a:r>
+          </a:p>
+        </p:txBody>
+      </p:sp>
+      <p:sp>
+        <p:nvSpPr>
+          <p:cNvPr id="12" name="Rounded Rectangle 11"/>
           <p:cNvSpPr/>
           <p:nvPr/>
         </p:nvSpPr>
         <p:spPr>
           <a:xfrm>
-            <a:off x="731520" y="3931920"/>
-            <a:ext cx="5230368" cy="2240280"/>
+            <a:off x="6108192" y="3090672"/>
+            <a:ext cx="5349240" cy="1508760"/>
           </a:xfrm>
           <a:prstGeom prst="roundRect">
             <a:avLst/>
@@ -7731,23 +8349,79 @@
       </p:sp>
       <p:sp>
         <p:nvSpPr>
-          <p:cNvPr id="15" name="Rectangle 14"/>
+          <p:cNvPr id="13" name="TextBox 12"/>
+          <p:cNvSpPr txBox="1"/>
+          <p:nvPr/>
+        </p:nvSpPr>
+        <p:spPr>
+          <a:xfrm>
+            <a:off x="6291072" y="3200400"/>
+            <a:ext cx="4983480" cy="1280160"/>
+          </a:xfrm>
+          <a:prstGeom prst="rect">
+            <a:avLst/>
+          </a:prstGeom>
+          <a:noFill/>
+        </p:spPr>
+        <p:txBody>
+          <a:bodyPr wrap="square">
+            <a:spAutoFit/>
+          </a:bodyPr>
+          <a:lstStyle/>
+          <a:p>
+            <a:pPr>
+              <a:spcAft>
+                <a:spcPts val="300"/>
+              </a:spcAft>
+              <a:defRPr sz="1200" b="1">
+                <a:solidFill>
+                  <a:srgbClr val="0E7490"/>
+                </a:solidFill>
+              </a:defRPr>
+            </a:pPr>
+            <a:r>
+              <a:t>2. ayam3d — Generative Mesh Synthesis &amp; Retopology</a:t>
+            </a:r>
+          </a:p>
+          <a:p>
+            <a:pPr>
+              <a:defRPr sz="950">
+                <a:solidFill>
+                  <a:srgbClr val="1E293B"/>
+                </a:solidFill>
+              </a:defRPr>
+            </a:pPr>
+            <a:r>
+              <a:t>• Advanced spatial computing R&amp;D in automated 3D mesh synthesis, intelligent quad/tri retopology, and PBR (Physically Based Rendering) texture generation.</a:t>
+            </a:r>
+            <a:br/>
+            <a:r>
+              <a:t>• Transforms heavy, raw 3D scans and photogrammetry point clouds into lightweight, optimized assets suitable for real-time edge streaming.</a:t>
+            </a:r>
+          </a:p>
+        </p:txBody>
+      </p:sp>
+      <p:sp>
+        <p:nvSpPr>
+          <p:cNvPr id="14" name="Rounded Rectangle 13"/>
           <p:cNvSpPr/>
           <p:nvPr/>
         </p:nvSpPr>
         <p:spPr>
           <a:xfrm>
-            <a:off x="740664" y="3941064"/>
-            <a:ext cx="5212080" cy="384048"/>
-          </a:xfrm>
-          <a:prstGeom prst="rect">
+            <a:off x="6108192" y="4709160"/>
+            <a:ext cx="5349240" cy="1508760"/>
+          </a:xfrm>
+          <a:prstGeom prst="roundRect">
             <a:avLst/>
           </a:prstGeom>
           <a:solidFill>
-            <a:srgbClr val="CC2229"/>
+            <a:srgbClr val="F0F9FF"/>
           </a:solidFill>
-          <a:ln>
-            <a:noFill/>
+          <a:ln w="12700">
+            <a:solidFill>
+              <a:srgbClr val="004E96"/>
+            </a:solidFill>
           </a:ln>
         </p:spPr>
         <p:style>
@@ -7774,49 +8448,14 @@
       </p:sp>
       <p:sp>
         <p:nvSpPr>
-          <p:cNvPr id="16" name="TextBox 15"/>
+          <p:cNvPr id="15" name="TextBox 14"/>
           <p:cNvSpPr txBox="1"/>
           <p:nvPr/>
         </p:nvSpPr>
         <p:spPr>
           <a:xfrm>
-            <a:off x="914400" y="3986784"/>
-            <a:ext cx="4864608" cy="320040"/>
-          </a:xfrm>
-          <a:prstGeom prst="rect">
-            <a:avLst/>
-          </a:prstGeom>
-          <a:noFill/>
-        </p:spPr>
-        <p:txBody>
-          <a:bodyPr wrap="none">
-            <a:spAutoFit/>
-          </a:bodyPr>
-          <a:lstStyle/>
-          <a:p>
-            <a:pPr>
-              <a:defRPr sz="1100" b="1">
-                <a:solidFill>
-                  <a:srgbClr val="FFFFFF"/>
-                </a:solidFill>
-              </a:defRPr>
-            </a:pPr>
-            <a:r>
-              <a:t>3. Cybersecurity Controls, Access Management &amp; Risk Mitigation</a:t>
-            </a:r>
-          </a:p>
-        </p:txBody>
-      </p:sp>
-      <p:sp>
-        <p:nvSpPr>
-          <p:cNvPr id="17" name="TextBox 16"/>
-          <p:cNvSpPr txBox="1"/>
-          <p:nvPr/>
-        </p:nvSpPr>
-        <p:spPr>
-          <a:xfrm>
-            <a:off x="914400" y="4370832"/>
-            <a:ext cx="4864608" cy="1737360"/>
+            <a:off x="6291072" y="4818888"/>
+            <a:ext cx="4983480" cy="1280160"/>
           </a:xfrm>
           <a:prstGeom prst="rect">
             <a:avLst/>
@@ -7833,272 +8472,37 @@
               <a:spcAft>
                 <a:spcPts val="300"/>
               </a:spcAft>
-              <a:defRPr sz="950">
+              <a:defRPr sz="1150" b="1">
+                <a:solidFill>
+                  <a:srgbClr val="004E96"/>
+                </a:solidFill>
+              </a:defRPr>
+            </a:pPr>
+            <a:r>
+              <a:t>Direct Synergy with Obayashi Corporation's Vision</a:t>
+            </a:r>
+          </a:p>
+          <a:p>
+            <a:pPr>
+              <a:defRPr sz="900">
                 <a:solidFill>
                   <a:srgbClr val="1E293B"/>
                 </a:solidFill>
               </a:defRPr>
             </a:pPr>
             <a:r>
-              <a:t>• Enforced Zero-Trust principles, role-based access control (RBAC), multi-factor authentication (MFA), and audit logging.</a:t>
-            </a:r>
-          </a:p>
-          <a:p>
-            <a:pPr>
-              <a:spcAft>
-                <a:spcPts val="300"/>
-              </a:spcAft>
-              <a:defRPr sz="950">
-                <a:solidFill>
-                  <a:srgbClr val="1E293B"/>
-                </a:solidFill>
-              </a:defRPr>
-            </a:pPr>
-            <a:r>
-              <a:t>• Conducted proactive vulnerability assessments, dependency scanning, code audits, and third-party risk evaluations.</a:t>
-            </a:r>
-          </a:p>
-          <a:p>
-            <a:pPr>
-              <a:spcAft>
-                <a:spcPts val="300"/>
-              </a:spcAft>
-              <a:defRPr sz="950">
-                <a:solidFill>
-                  <a:srgbClr val="1E293B"/>
-                </a:solidFill>
-              </a:defRPr>
-            </a:pPr>
-            <a:r>
-              <a:t>• Partnered with enterprise compliance teams to ensure strict adherence to ISO 27001 and industry safety standards.</a:t>
-            </a:r>
-          </a:p>
-          <a:p>
-            <a:pPr>
-              <a:spcAft>
-                <a:spcPts val="300"/>
-              </a:spcAft>
-              <a:defRPr sz="950">
-                <a:solidFill>
-                  <a:srgbClr val="1E293B"/>
-                </a:solidFill>
-              </a:defRPr>
-            </a:pPr>
-            <a:r>
-              <a:t>• Formulated incident response playbooks, disaster containment procedures, and cybersecurity staff training.</a:t>
-            </a:r>
-          </a:p>
-        </p:txBody>
-      </p:sp>
-      <p:sp>
-        <p:nvSpPr>
-          <p:cNvPr id="18" name="Rounded Rectangle 17"/>
-          <p:cNvSpPr/>
-          <p:nvPr/>
-        </p:nvSpPr>
-        <p:spPr>
-          <a:xfrm>
-            <a:off x="6217920" y="3931920"/>
-            <a:ext cx="5230368" cy="2240280"/>
-          </a:xfrm>
-          <a:prstGeom prst="roundRect">
-            <a:avLst/>
-          </a:prstGeom>
-          <a:solidFill>
-            <a:srgbClr val="FFFFFF"/>
-          </a:solidFill>
-          <a:ln w="12700">
-            <a:solidFill>
-              <a:srgbClr val="E2E8F0"/>
-            </a:solidFill>
-          </a:ln>
-        </p:spPr>
-        <p:style>
-          <a:lnRef idx="1">
-            <a:schemeClr val="accent1"/>
-          </a:lnRef>
-          <a:fillRef idx="3">
-            <a:schemeClr val="accent1"/>
-          </a:fillRef>
-          <a:effectRef idx="2">
-            <a:schemeClr val="accent1"/>
-          </a:effectRef>
-          <a:fontRef idx="minor">
-            <a:schemeClr val="lt1"/>
-          </a:fontRef>
-        </p:style>
-        <p:txBody>
-          <a:bodyPr rtlCol="0" anchor="ctr"/>
-          <a:lstStyle/>
-          <a:p>
-            <a:pPr algn="ctr"/>
-          </a:p>
-        </p:txBody>
-      </p:sp>
-      <p:sp>
-        <p:nvSpPr>
-          <p:cNvPr id="19" name="Rectangle 18"/>
-          <p:cNvSpPr/>
-          <p:nvPr/>
-        </p:nvSpPr>
-        <p:spPr>
-          <a:xfrm>
-            <a:off x="6227064" y="3941064"/>
-            <a:ext cx="5212080" cy="384048"/>
-          </a:xfrm>
-          <a:prstGeom prst="rect">
-            <a:avLst/>
-          </a:prstGeom>
-          <a:solidFill>
-            <a:srgbClr val="109563"/>
-          </a:solidFill>
-          <a:ln>
-            <a:noFill/>
-          </a:ln>
-        </p:spPr>
-        <p:style>
-          <a:lnRef idx="1">
-            <a:schemeClr val="accent1"/>
-          </a:lnRef>
-          <a:fillRef idx="3">
-            <a:schemeClr val="accent1"/>
-          </a:fillRef>
-          <a:effectRef idx="2">
-            <a:schemeClr val="accent1"/>
-          </a:effectRef>
-          <a:fontRef idx="minor">
-            <a:schemeClr val="lt1"/>
-          </a:fontRef>
-        </p:style>
-        <p:txBody>
-          <a:bodyPr rtlCol="0" anchor="ctr"/>
-          <a:lstStyle/>
-          <a:p>
-            <a:pPr algn="ctr"/>
-          </a:p>
-        </p:txBody>
-      </p:sp>
-      <p:sp>
-        <p:nvSpPr>
-          <p:cNvPr id="20" name="TextBox 19"/>
-          <p:cNvSpPr txBox="1"/>
-          <p:nvPr/>
-        </p:nvSpPr>
-        <p:spPr>
-          <a:xfrm>
-            <a:off x="6400800" y="3986784"/>
-            <a:ext cx="4864608" cy="320040"/>
-          </a:xfrm>
-          <a:prstGeom prst="rect">
-            <a:avLst/>
-          </a:prstGeom>
-          <a:noFill/>
-        </p:spPr>
-        <p:txBody>
-          <a:bodyPr wrap="none">
-            <a:spAutoFit/>
-          </a:bodyPr>
-          <a:lstStyle/>
-          <a:p>
-            <a:pPr>
-              <a:defRPr sz="1100" b="1">
-                <a:solidFill>
-                  <a:srgbClr val="FFFFFF"/>
-                </a:solidFill>
-              </a:defRPr>
-            </a:pPr>
-            <a:r>
-              <a:t>4. Team Leadership, Vendor Governance &amp; Fiscal Management</a:t>
-            </a:r>
-          </a:p>
-        </p:txBody>
-      </p:sp>
-      <p:sp>
-        <p:nvSpPr>
-          <p:cNvPr id="21" name="TextBox 20"/>
-          <p:cNvSpPr txBox="1"/>
-          <p:nvPr/>
-        </p:nvSpPr>
-        <p:spPr>
-          <a:xfrm>
-            <a:off x="6400800" y="4370832"/>
-            <a:ext cx="4864608" cy="1737360"/>
-          </a:xfrm>
-          <a:prstGeom prst="rect">
-            <a:avLst/>
-          </a:prstGeom>
-          <a:noFill/>
-        </p:spPr>
-        <p:txBody>
-          <a:bodyPr wrap="square">
-            <a:spAutoFit/>
-          </a:bodyPr>
-          <a:lstStyle/>
-          <a:p>
-            <a:pPr>
-              <a:spcAft>
-                <a:spcPts val="300"/>
-              </a:spcAft>
-              <a:defRPr sz="950">
-                <a:solidFill>
-                  <a:srgbClr val="1E293B"/>
-                </a:solidFill>
-              </a:defRPr>
-            </a:pPr>
-            <a:r>
-              <a:t>• Led, mentored, and fostered technical excellence across cross-functional engineering, infrastructure, and QA squads.</a:t>
-            </a:r>
-          </a:p>
-          <a:p>
-            <a:pPr>
-              <a:spcAft>
-                <a:spcPts val="300"/>
-              </a:spcAft>
-              <a:defRPr sz="950">
-                <a:solidFill>
-                  <a:srgbClr val="1E293B"/>
-                </a:solidFill>
-              </a:defRPr>
-            </a:pPr>
-            <a:r>
-              <a:t>• Governed multi-vendor contracts, service provider RFPs, cloud infrastructure budgets, and strict SLA compliance.</a:t>
-            </a:r>
-          </a:p>
-          <a:p>
-            <a:pPr>
-              <a:spcAft>
-                <a:spcPts val="300"/>
-              </a:spcAft>
-              <a:defRPr sz="950">
-                <a:solidFill>
-                  <a:srgbClr val="1E293B"/>
-                </a:solidFill>
-              </a:defRPr>
-            </a:pPr>
-            <a:r>
-              <a:t>• Optimized CapEx and OpEx allocations through license rationalization, automation, and cloud cost management.</a:t>
-            </a:r>
-          </a:p>
-          <a:p>
-            <a:pPr>
-              <a:spcAft>
-                <a:spcPts val="300"/>
-              </a:spcAft>
-              <a:defRPr sz="950">
-                <a:solidFill>
-                  <a:srgbClr val="1E293B"/>
-                </a:solidFill>
-              </a:defRPr>
-            </a:pPr>
-            <a:r>
-              <a:t>• Instituted transparent KPI dashboards tracking uptime, incident resolution MTTR, and engineering delivery velocity.</a:t>
-            </a:r>
-          </a:p>
-        </p:txBody>
-      </p:sp>
-      <p:sp>
-        <p:nvSpPr>
-          <p:cNvPr id="22" name="TextBox 21"/>
+              <a:t>• Bridges Enterprise IT with Digital Construction: Unifies BIM (Building Information Modeling 3D/4D/5D), Common Data Environments (CDE), and Digital Twins.</a:t>
+            </a:r>
+            <a:br/>
+            <a:r>
+              <a:t>• Solves the IT infrastructure bottleneck: GPU workstation virtualization, automated asset compression, and low-latency 3D rendering on job-site mobile devices.</a:t>
+            </a:r>
+          </a:p>
+        </p:txBody>
+      </p:sp>
+      <p:sp>
+        <p:nvSpPr>
+          <p:cNvPr id="16" name="TextBox 15"/>
           <p:cNvSpPr txBox="1"/>
           <p:nvPr/>
         </p:nvSpPr>
@@ -8126,7 +8530,7 @@
               </a:defRPr>
             </a:pPr>
             <a:r>
-              <a:t>Obayashi Corporation · Senior Manager – IT Candidate Portfolio | Maheshchandra Hegde · Page 5 of 11</a:t>
+              <a:t>Obayashi Corporation · Senior Manager – IT Candidate Portfolio | Maheshchandra Hegde · Slide 5 of 12</a:t>
             </a:r>
           </a:p>
         </p:txBody>
@@ -8222,7 +8626,7 @@
               </a:defRPr>
             </a:pPr>
             <a:r>
-              <a:t>BUSINESS IMPACT &amp; VALUE DELIVERY</a:t>
+              <a:t>LEADERSHIP &amp; EXECUTION</a:t>
             </a:r>
           </a:p>
         </p:txBody>
@@ -8250,14 +8654,14 @@
           <a:lstStyle/>
           <a:p>
             <a:pPr>
-              <a:defRPr sz="2200" b="1">
+              <a:defRPr sz="2100" b="1">
                 <a:solidFill>
                   <a:srgbClr val="0F1E36"/>
                 </a:solidFill>
               </a:defRPr>
             </a:pPr>
             <a:r>
-              <a:t>Major Achievements &amp; Quantifiable IT Milestones</a:t>
+              <a:t>Your Role &amp; Core Responsibilities: IT Strategy, Operations &amp; Governance</a:t>
             </a:r>
           </a:p>
         </p:txBody>
@@ -8314,447 +8718,7 @@
         <p:spPr>
           <a:xfrm>
             <a:off x="731520" y="1463040"/>
-            <a:ext cx="2542032" cy="1371600"/>
-          </a:xfrm>
-          <a:prstGeom prst="roundRect">
-            <a:avLst/>
-          </a:prstGeom>
-          <a:solidFill>
-            <a:srgbClr val="FFFFFF"/>
-          </a:solidFill>
-          <a:ln w="12700">
-            <a:solidFill>
-              <a:srgbClr val="004E96"/>
-            </a:solidFill>
-          </a:ln>
-        </p:spPr>
-        <p:style>
-          <a:lnRef idx="1">
-            <a:schemeClr val="accent1"/>
-          </a:lnRef>
-          <a:fillRef idx="3">
-            <a:schemeClr val="accent1"/>
-          </a:fillRef>
-          <a:effectRef idx="2">
-            <a:schemeClr val="accent1"/>
-          </a:effectRef>
-          <a:fontRef idx="minor">
-            <a:schemeClr val="lt1"/>
-          </a:fontRef>
-        </p:style>
-        <p:txBody>
-          <a:bodyPr rtlCol="0" anchor="ctr"/>
-          <a:lstStyle/>
-          <a:p>
-            <a:pPr algn="ctr"/>
-          </a:p>
-        </p:txBody>
-      </p:sp>
-      <p:sp>
-        <p:nvSpPr>
-          <p:cNvPr id="7" name="TextBox 6"/>
-          <p:cNvSpPr txBox="1"/>
-          <p:nvPr/>
-        </p:nvSpPr>
-        <p:spPr>
-          <a:xfrm>
-            <a:off x="841248" y="1572768"/>
-            <a:ext cx="2322576" cy="1152144"/>
-          </a:xfrm>
-          <a:prstGeom prst="rect">
-            <a:avLst/>
-          </a:prstGeom>
-          <a:noFill/>
-        </p:spPr>
-        <p:txBody>
-          <a:bodyPr wrap="square">
-            <a:spAutoFit/>
-          </a:bodyPr>
-          <a:lstStyle/>
-          <a:p>
-            <a:pPr>
-              <a:spcAft>
-                <a:spcPts val="200"/>
-              </a:spcAft>
-              <a:defRPr sz="2400" b="1">
-                <a:solidFill>
-                  <a:srgbClr val="004E96"/>
-                </a:solidFill>
-              </a:defRPr>
-            </a:pPr>
-            <a:r>
-              <a:t>99.95%+</a:t>
-            </a:r>
-          </a:p>
-          <a:p>
-            <a:pPr>
-              <a:spcAft>
-                <a:spcPts val="200"/>
-              </a:spcAft>
-              <a:defRPr sz="1000" b="1">
-                <a:solidFill>
-                  <a:srgbClr val="0F1E36"/>
-                </a:solidFill>
-              </a:defRPr>
-            </a:pPr>
-            <a:r>
-              <a:t>Critical System Availability</a:t>
-            </a:r>
-          </a:p>
-          <a:p>
-            <a:pPr>
-              <a:defRPr sz="850">
-                <a:solidFill>
-                  <a:srgbClr val="64748B"/>
-                </a:solidFill>
-              </a:defRPr>
-            </a:pPr>
-            <a:r>
-              <a:t>Sustained across 24/7 clinical ICU operations and high-traffic event workloads</a:t>
-            </a:r>
-          </a:p>
-        </p:txBody>
-      </p:sp>
-      <p:sp>
-        <p:nvSpPr>
-          <p:cNvPr id="8" name="Rounded Rectangle 7"/>
-          <p:cNvSpPr/>
-          <p:nvPr/>
-        </p:nvSpPr>
-        <p:spPr>
-          <a:xfrm>
-            <a:off x="3456432" y="1463040"/>
-            <a:ext cx="2542032" cy="1371600"/>
-          </a:xfrm>
-          <a:prstGeom prst="roundRect">
-            <a:avLst/>
-          </a:prstGeom>
-          <a:solidFill>
-            <a:srgbClr val="FFFFFF"/>
-          </a:solidFill>
-          <a:ln w="12700">
-            <a:solidFill>
-              <a:srgbClr val="004E96"/>
-            </a:solidFill>
-          </a:ln>
-        </p:spPr>
-        <p:style>
-          <a:lnRef idx="1">
-            <a:schemeClr val="accent1"/>
-          </a:lnRef>
-          <a:fillRef idx="3">
-            <a:schemeClr val="accent1"/>
-          </a:fillRef>
-          <a:effectRef idx="2">
-            <a:schemeClr val="accent1"/>
-          </a:effectRef>
-          <a:fontRef idx="minor">
-            <a:schemeClr val="lt1"/>
-          </a:fontRef>
-        </p:style>
-        <p:txBody>
-          <a:bodyPr rtlCol="0" anchor="ctr"/>
-          <a:lstStyle/>
-          <a:p>
-            <a:pPr algn="ctr"/>
-          </a:p>
-        </p:txBody>
-      </p:sp>
-      <p:sp>
-        <p:nvSpPr>
-          <p:cNvPr id="9" name="TextBox 8"/>
-          <p:cNvSpPr txBox="1"/>
-          <p:nvPr/>
-        </p:nvSpPr>
-        <p:spPr>
-          <a:xfrm>
-            <a:off x="3566160" y="1572768"/>
-            <a:ext cx="2322576" cy="1152144"/>
-          </a:xfrm>
-          <a:prstGeom prst="rect">
-            <a:avLst/>
-          </a:prstGeom>
-          <a:noFill/>
-        </p:spPr>
-        <p:txBody>
-          <a:bodyPr wrap="square">
-            <a:spAutoFit/>
-          </a:bodyPr>
-          <a:lstStyle/>
-          <a:p>
-            <a:pPr>
-              <a:spcAft>
-                <a:spcPts val="200"/>
-              </a:spcAft>
-              <a:defRPr sz="2400" b="1">
-                <a:solidFill>
-                  <a:srgbClr val="004E96"/>
-                </a:solidFill>
-              </a:defRPr>
-            </a:pPr>
-            <a:r>
-              <a:t>100%</a:t>
-            </a:r>
-          </a:p>
-          <a:p>
-            <a:pPr>
-              <a:spcAft>
-                <a:spcPts val="200"/>
-              </a:spcAft>
-              <a:defRPr sz="1000" b="1">
-                <a:solidFill>
-                  <a:srgbClr val="0F1E36"/>
-                </a:solidFill>
-              </a:defRPr>
-            </a:pPr>
-            <a:r>
-              <a:t>Data Persistence at Edge</a:t>
-            </a:r>
-          </a:p>
-          <a:p>
-            <a:pPr>
-              <a:defRPr sz="850">
-                <a:solidFill>
-                  <a:srgbClr val="64748B"/>
-                </a:solidFill>
-              </a:defRPr>
-            </a:pPr>
-            <a:r>
-              <a:t>Zero data loss during field network disconnections via offline-first syncing engine</a:t>
-            </a:r>
-          </a:p>
-        </p:txBody>
-      </p:sp>
-      <p:sp>
-        <p:nvSpPr>
-          <p:cNvPr id="10" name="Rounded Rectangle 9"/>
-          <p:cNvSpPr/>
-          <p:nvPr/>
-        </p:nvSpPr>
-        <p:spPr>
-          <a:xfrm>
-            <a:off x="6181344" y="1463040"/>
-            <a:ext cx="2542032" cy="1371600"/>
-          </a:xfrm>
-          <a:prstGeom prst="roundRect">
-            <a:avLst/>
-          </a:prstGeom>
-          <a:solidFill>
-            <a:srgbClr val="FFFFFF"/>
-          </a:solidFill>
-          <a:ln w="12700">
-            <a:solidFill>
-              <a:srgbClr val="004E96"/>
-            </a:solidFill>
-          </a:ln>
-        </p:spPr>
-        <p:style>
-          <a:lnRef idx="1">
-            <a:schemeClr val="accent1"/>
-          </a:lnRef>
-          <a:fillRef idx="3">
-            <a:schemeClr val="accent1"/>
-          </a:fillRef>
-          <a:effectRef idx="2">
-            <a:schemeClr val="accent1"/>
-          </a:effectRef>
-          <a:fontRef idx="minor">
-            <a:schemeClr val="lt1"/>
-          </a:fontRef>
-        </p:style>
-        <p:txBody>
-          <a:bodyPr rtlCol="0" anchor="ctr"/>
-          <a:lstStyle/>
-          <a:p>
-            <a:pPr algn="ctr"/>
-          </a:p>
-        </p:txBody>
-      </p:sp>
-      <p:sp>
-        <p:nvSpPr>
-          <p:cNvPr id="11" name="TextBox 10"/>
-          <p:cNvSpPr txBox="1"/>
-          <p:nvPr/>
-        </p:nvSpPr>
-        <p:spPr>
-          <a:xfrm>
-            <a:off x="6291072" y="1572768"/>
-            <a:ext cx="2322576" cy="1152144"/>
-          </a:xfrm>
-          <a:prstGeom prst="rect">
-            <a:avLst/>
-          </a:prstGeom>
-          <a:noFill/>
-        </p:spPr>
-        <p:txBody>
-          <a:bodyPr wrap="square">
-            <a:spAutoFit/>
-          </a:bodyPr>
-          <a:lstStyle/>
-          <a:p>
-            <a:pPr>
-              <a:spcAft>
-                <a:spcPts val="200"/>
-              </a:spcAft>
-              <a:defRPr sz="2400" b="1">
-                <a:solidFill>
-                  <a:srgbClr val="004E96"/>
-                </a:solidFill>
-              </a:defRPr>
-            </a:pPr>
-            <a:r>
-              <a:t>35%</a:t>
-            </a:r>
-          </a:p>
-          <a:p>
-            <a:pPr>
-              <a:spcAft>
-                <a:spcPts val="200"/>
-              </a:spcAft>
-              <a:defRPr sz="1000" b="1">
-                <a:solidFill>
-                  <a:srgbClr val="0F1E36"/>
-                </a:solidFill>
-              </a:defRPr>
-            </a:pPr>
-            <a:r>
-              <a:t>Faster Release Cycles</a:t>
-            </a:r>
-          </a:p>
-          <a:p>
-            <a:pPr>
-              <a:defRPr sz="850">
-                <a:solidFill>
-                  <a:srgbClr val="64748B"/>
-                </a:solidFill>
-              </a:defRPr>
-            </a:pPr>
-            <a:r>
-              <a:t>Achieved by implementing automated CI/CD pipelines, containerization &amp; lint tests</a:t>
-            </a:r>
-          </a:p>
-        </p:txBody>
-      </p:sp>
-      <p:sp>
-        <p:nvSpPr>
-          <p:cNvPr id="12" name="Rounded Rectangle 11"/>
-          <p:cNvSpPr/>
-          <p:nvPr/>
-        </p:nvSpPr>
-        <p:spPr>
-          <a:xfrm>
-            <a:off x="8906256" y="1463040"/>
-            <a:ext cx="2542032" cy="1371600"/>
-          </a:xfrm>
-          <a:prstGeom prst="roundRect">
-            <a:avLst/>
-          </a:prstGeom>
-          <a:solidFill>
-            <a:srgbClr val="FFFFFF"/>
-          </a:solidFill>
-          <a:ln w="12700">
-            <a:solidFill>
-              <a:srgbClr val="004E96"/>
-            </a:solidFill>
-          </a:ln>
-        </p:spPr>
-        <p:style>
-          <a:lnRef idx="1">
-            <a:schemeClr val="accent1"/>
-          </a:lnRef>
-          <a:fillRef idx="3">
-            <a:schemeClr val="accent1"/>
-          </a:fillRef>
-          <a:effectRef idx="2">
-            <a:schemeClr val="accent1"/>
-          </a:effectRef>
-          <a:fontRef idx="minor">
-            <a:schemeClr val="lt1"/>
-          </a:fontRef>
-        </p:style>
-        <p:txBody>
-          <a:bodyPr rtlCol="0" anchor="ctr"/>
-          <a:lstStyle/>
-          <a:p>
-            <a:pPr algn="ctr"/>
-          </a:p>
-        </p:txBody>
-      </p:sp>
-      <p:sp>
-        <p:nvSpPr>
-          <p:cNvPr id="13" name="TextBox 12"/>
-          <p:cNvSpPr txBox="1"/>
-          <p:nvPr/>
-        </p:nvSpPr>
-        <p:spPr>
-          <a:xfrm>
-            <a:off x="9015984" y="1572768"/>
-            <a:ext cx="2322576" cy="1152144"/>
-          </a:xfrm>
-          <a:prstGeom prst="rect">
-            <a:avLst/>
-          </a:prstGeom>
-          <a:noFill/>
-        </p:spPr>
-        <p:txBody>
-          <a:bodyPr wrap="square">
-            <a:spAutoFit/>
-          </a:bodyPr>
-          <a:lstStyle/>
-          <a:p>
-            <a:pPr>
-              <a:spcAft>
-                <a:spcPts val="200"/>
-              </a:spcAft>
-              <a:defRPr sz="2400" b="1">
-                <a:solidFill>
-                  <a:srgbClr val="004E96"/>
-                </a:solidFill>
-              </a:defRPr>
-            </a:pPr>
-            <a:r>
-              <a:t>22%</a:t>
-            </a:r>
-          </a:p>
-          <a:p>
-            <a:pPr>
-              <a:spcAft>
-                <a:spcPts val="200"/>
-              </a:spcAft>
-              <a:defRPr sz="1000" b="1">
-                <a:solidFill>
-                  <a:srgbClr val="0F1E36"/>
-                </a:solidFill>
-              </a:defRPr>
-            </a:pPr>
-            <a:r>
-              <a:t>Cloud Cost Optimization</a:t>
-            </a:r>
-          </a:p>
-          <a:p>
-            <a:pPr>
-              <a:defRPr sz="850">
-                <a:solidFill>
-                  <a:srgbClr val="64748B"/>
-                </a:solidFill>
-              </a:defRPr>
-            </a:pPr>
-            <a:r>
-              <a:t>Saved through resource rightsizing, auto-scaling policies, and license rationalization</a:t>
-            </a:r>
-          </a:p>
-        </p:txBody>
-      </p:sp>
-      <p:sp>
-        <p:nvSpPr>
-          <p:cNvPr id="14" name="Rounded Rectangle 13"/>
-          <p:cNvSpPr/>
-          <p:nvPr/>
-        </p:nvSpPr>
-        <p:spPr>
-          <a:xfrm>
-            <a:off x="731520" y="3017520"/>
-            <a:ext cx="10728655" cy="969264"/>
+            <a:ext cx="5230368" cy="2240280"/>
           </a:xfrm>
           <a:prstGeom prst="roundRect">
             <a:avLst/>
@@ -8792,14 +8756,92 @@
       </p:sp>
       <p:sp>
         <p:nvSpPr>
-          <p:cNvPr id="15" name="TextBox 14"/>
+          <p:cNvPr id="7" name="Rectangle 6"/>
+          <p:cNvSpPr/>
+          <p:nvPr/>
+        </p:nvSpPr>
+        <p:spPr>
+          <a:xfrm>
+            <a:off x="740664" y="1472184"/>
+            <a:ext cx="5212080" cy="384048"/>
+          </a:xfrm>
+          <a:prstGeom prst="rect">
+            <a:avLst/>
+          </a:prstGeom>
+          <a:solidFill>
+            <a:srgbClr val="004E96"/>
+          </a:solidFill>
+          <a:ln>
+            <a:noFill/>
+          </a:ln>
+        </p:spPr>
+        <p:style>
+          <a:lnRef idx="1">
+            <a:schemeClr val="accent1"/>
+          </a:lnRef>
+          <a:fillRef idx="3">
+            <a:schemeClr val="accent1"/>
+          </a:fillRef>
+          <a:effectRef idx="2">
+            <a:schemeClr val="accent1"/>
+          </a:effectRef>
+          <a:fontRef idx="minor">
+            <a:schemeClr val="lt1"/>
+          </a:fontRef>
+        </p:style>
+        <p:txBody>
+          <a:bodyPr rtlCol="0" anchor="ctr"/>
+          <a:lstStyle/>
+          <a:p>
+            <a:pPr algn="ctr"/>
+          </a:p>
+        </p:txBody>
+      </p:sp>
+      <p:sp>
+        <p:nvSpPr>
+          <p:cNvPr id="8" name="TextBox 7"/>
           <p:cNvSpPr txBox="1"/>
           <p:nvPr/>
         </p:nvSpPr>
         <p:spPr>
           <a:xfrm>
-            <a:off x="914400" y="3127248"/>
-            <a:ext cx="10332720" cy="777240"/>
+            <a:off x="914400" y="1517904"/>
+            <a:ext cx="4864608" cy="320040"/>
+          </a:xfrm>
+          <a:prstGeom prst="rect">
+            <a:avLst/>
+          </a:prstGeom>
+          <a:noFill/>
+        </p:spPr>
+        <p:txBody>
+          <a:bodyPr wrap="none">
+            <a:spAutoFit/>
+          </a:bodyPr>
+          <a:lstStyle/>
+          <a:p>
+            <a:pPr>
+              <a:defRPr sz="1100" b="1">
+                <a:solidFill>
+                  <a:srgbClr val="FFFFFF"/>
+                </a:solidFill>
+              </a:defRPr>
+            </a:pPr>
+            <a:r>
+              <a:t>1. IT Strategy, Policy &amp; Enterprise Architecture</a:t>
+            </a:r>
+          </a:p>
+        </p:txBody>
+      </p:sp>
+      <p:sp>
+        <p:nvSpPr>
+          <p:cNvPr id="9" name="TextBox 8"/>
+          <p:cNvSpPr txBox="1"/>
+          <p:nvPr/>
+        </p:nvSpPr>
+        <p:spPr>
+          <a:xfrm>
+            <a:off x="914400" y="1901952"/>
+            <a:ext cx="4864608" cy="1737360"/>
           </a:xfrm>
           <a:prstGeom prst="rect">
             <a:avLst/>
@@ -8816,18 +8858,6 @@
               <a:spcAft>
                 <a:spcPts val="300"/>
               </a:spcAft>
-              <a:defRPr sz="1200" b="1">
-                <a:solidFill>
-                  <a:srgbClr val="0F1E36"/>
-                </a:solidFill>
-              </a:defRPr>
-            </a:pPr>
-            <a:r>
-              <a:t>★  Enterprise Architecture Modernization &amp; Zero-Downtime Migration</a:t>
-            </a:r>
-          </a:p>
-          <a:p>
-            <a:pPr>
               <a:defRPr sz="950">
                 <a:solidFill>
                   <a:srgbClr val="1E293B"/>
@@ -8835,21 +8865,66 @@
               </a:defRPr>
             </a:pPr>
             <a:r>
-              <a:t>Successfully transformed legacy monolithic systems into modular, API-driven architectures at Cyient/Philips and Technoyana. Reduced regression cycles from weeks to hours and eliminated deployment downtime, ensuring hospital and enterprise operations remained completely uninterrupted during version upgrades.</a:t>
-            </a:r>
-          </a:p>
-        </p:txBody>
-      </p:sp>
-      <p:sp>
-        <p:nvSpPr>
-          <p:cNvPr id="16" name="Rounded Rectangle 15"/>
+              <a:t>• Formulated multi-year technology roadmaps aligning IT investments with organizational growth objectives.</a:t>
+            </a:r>
+          </a:p>
+          <a:p>
+            <a:pPr>
+              <a:spcAft>
+                <a:spcPts val="300"/>
+              </a:spcAft>
+              <a:defRPr sz="950">
+                <a:solidFill>
+                  <a:srgbClr val="1E293B"/>
+                </a:solidFill>
+              </a:defRPr>
+            </a:pPr>
+            <a:r>
+              <a:t>• Established standardized IT policies, coding standards, system architectures, and documentation protocols.</a:t>
+            </a:r>
+          </a:p>
+          <a:p>
+            <a:pPr>
+              <a:spcAft>
+                <a:spcPts val="300"/>
+              </a:spcAft>
+              <a:defRPr sz="950">
+                <a:solidFill>
+                  <a:srgbClr val="1E293B"/>
+                </a:solidFill>
+              </a:defRPr>
+            </a:pPr>
+            <a:r>
+              <a:t>• Conducted architectural governance reviews to ensure maintainability, scalability, and technical debt reduction.</a:t>
+            </a:r>
+          </a:p>
+          <a:p>
+            <a:pPr>
+              <a:spcAft>
+                <a:spcPts val="300"/>
+              </a:spcAft>
+              <a:defRPr sz="950">
+                <a:solidFill>
+                  <a:srgbClr val="1E293B"/>
+                </a:solidFill>
+              </a:defRPr>
+            </a:pPr>
+            <a:r>
+              <a:t>• Evaluated emerging enterprise technologies (cloud, automation, spatial 3D) to drive continuous capability evolution.</a:t>
+            </a:r>
+          </a:p>
+        </p:txBody>
+      </p:sp>
+      <p:sp>
+        <p:nvSpPr>
+          <p:cNvPr id="10" name="Rounded Rectangle 9"/>
           <p:cNvSpPr/>
           <p:nvPr/>
         </p:nvSpPr>
         <p:spPr>
           <a:xfrm>
-            <a:off x="731520" y="4096512"/>
-            <a:ext cx="10728655" cy="969264"/>
+            <a:off x="6217920" y="1463040"/>
+            <a:ext cx="5230368" cy="2240280"/>
           </a:xfrm>
           <a:prstGeom prst="roundRect">
             <a:avLst/>
@@ -8887,14 +8962,92 @@
       </p:sp>
       <p:sp>
         <p:nvSpPr>
-          <p:cNvPr id="17" name="TextBox 16"/>
+          <p:cNvPr id="11" name="Rectangle 10"/>
+          <p:cNvSpPr/>
+          <p:nvPr/>
+        </p:nvSpPr>
+        <p:spPr>
+          <a:xfrm>
+            <a:off x="6227064" y="1472184"/>
+            <a:ext cx="5212080" cy="384048"/>
+          </a:xfrm>
+          <a:prstGeom prst="rect">
+            <a:avLst/>
+          </a:prstGeom>
+          <a:solidFill>
+            <a:srgbClr val="0E7490"/>
+          </a:solidFill>
+          <a:ln>
+            <a:noFill/>
+          </a:ln>
+        </p:spPr>
+        <p:style>
+          <a:lnRef idx="1">
+            <a:schemeClr val="accent1"/>
+          </a:lnRef>
+          <a:fillRef idx="3">
+            <a:schemeClr val="accent1"/>
+          </a:fillRef>
+          <a:effectRef idx="2">
+            <a:schemeClr val="accent1"/>
+          </a:effectRef>
+          <a:fontRef idx="minor">
+            <a:schemeClr val="lt1"/>
+          </a:fontRef>
+        </p:style>
+        <p:txBody>
+          <a:bodyPr rtlCol="0" anchor="ctr"/>
+          <a:lstStyle/>
+          <a:p>
+            <a:pPr algn="ctr"/>
+          </a:p>
+        </p:txBody>
+      </p:sp>
+      <p:sp>
+        <p:nvSpPr>
+          <p:cNvPr id="12" name="TextBox 11"/>
           <p:cNvSpPr txBox="1"/>
           <p:nvPr/>
         </p:nvSpPr>
         <p:spPr>
           <a:xfrm>
-            <a:off x="914400" y="4206240"/>
-            <a:ext cx="10332720" cy="777240"/>
+            <a:off x="6400800" y="1517904"/>
+            <a:ext cx="4864608" cy="320040"/>
+          </a:xfrm>
+          <a:prstGeom prst="rect">
+            <a:avLst/>
+          </a:prstGeom>
+          <a:noFill/>
+        </p:spPr>
+        <p:txBody>
+          <a:bodyPr wrap="none">
+            <a:spAutoFit/>
+          </a:bodyPr>
+          <a:lstStyle/>
+          <a:p>
+            <a:pPr>
+              <a:defRPr sz="1100" b="1">
+                <a:solidFill>
+                  <a:srgbClr val="FFFFFF"/>
+                </a:solidFill>
+              </a:defRPr>
+            </a:pPr>
+            <a:r>
+              <a:t>2. Infrastructure Operations, Cloud &amp; Business Continuity</a:t>
+            </a:r>
+          </a:p>
+        </p:txBody>
+      </p:sp>
+      <p:sp>
+        <p:nvSpPr>
+          <p:cNvPr id="13" name="TextBox 12"/>
+          <p:cNvSpPr txBox="1"/>
+          <p:nvPr/>
+        </p:nvSpPr>
+        <p:spPr>
+          <a:xfrm>
+            <a:off x="6400800" y="1901952"/>
+            <a:ext cx="4864608" cy="1737360"/>
           </a:xfrm>
           <a:prstGeom prst="rect">
             <a:avLst/>
@@ -8911,18 +9064,6 @@
               <a:spcAft>
                 <a:spcPts val="300"/>
               </a:spcAft>
-              <a:defRPr sz="1200" b="1">
-                <a:solidFill>
-                  <a:srgbClr val="0F1E36"/>
-                </a:solidFill>
-              </a:defRPr>
-            </a:pPr>
-            <a:r>
-              <a:t>★  Multi-Site Network Resilience &amp; Field Data Integrity Engine</a:t>
-            </a:r>
-          </a:p>
-          <a:p>
-            <a:pPr>
               <a:defRPr sz="950">
                 <a:solidFill>
                   <a:srgbClr val="1E293B"/>
@@ -8930,21 +9071,66 @@
               </a:defRPr>
             </a:pPr>
             <a:r>
-              <a:t>Designed and deployed an edge-resilient synchronization pipeline for environments plagued by unstable cellular and local networks. Handled thousands of concurrent transactional updates offline with automatic background sync and deterministic conflict resolution upon network restoration.</a:t>
-            </a:r>
-          </a:p>
-        </p:txBody>
-      </p:sp>
-      <p:sp>
-        <p:nvSpPr>
-          <p:cNvPr id="18" name="Rounded Rectangle 17"/>
+              <a:t>• Ensured 24/7 availability and resilience of mission-critical systems and multi-tier network topologies.</a:t>
+            </a:r>
+          </a:p>
+          <a:p>
+            <a:pPr>
+              <a:spcAft>
+                <a:spcPts val="300"/>
+              </a:spcAft>
+              <a:defRPr sz="950">
+                <a:solidFill>
+                  <a:srgbClr val="1E293B"/>
+                </a:solidFill>
+              </a:defRPr>
+            </a:pPr>
+            <a:r>
+              <a:t>• Supervised automated backup regimens, disaster recovery (DR) simulations, and zero-loss business continuity plans.</a:t>
+            </a:r>
+          </a:p>
+          <a:p>
+            <a:pPr>
+              <a:spcAft>
+                <a:spcPts val="300"/>
+              </a:spcAft>
+              <a:defRPr sz="950">
+                <a:solidFill>
+                  <a:srgbClr val="1E293B"/>
+                </a:solidFill>
+              </a:defRPr>
+            </a:pPr>
+            <a:r>
+              <a:t>• Managed hybrid cloud workloads, virtualization environments, network security boundaries, and telemetry.</a:t>
+            </a:r>
+          </a:p>
+          <a:p>
+            <a:pPr>
+              <a:spcAft>
+                <a:spcPts val="300"/>
+              </a:spcAft>
+              <a:defRPr sz="950">
+                <a:solidFill>
+                  <a:srgbClr val="1E293B"/>
+                </a:solidFill>
+              </a:defRPr>
+            </a:pPr>
+            <a:r>
+              <a:t>• Instituted synthetic monitoring and automated alerting to resolve system anomalies before end-user impact.</a:t>
+            </a:r>
+          </a:p>
+        </p:txBody>
+      </p:sp>
+      <p:sp>
+        <p:nvSpPr>
+          <p:cNvPr id="14" name="Rounded Rectangle 13"/>
           <p:cNvSpPr/>
           <p:nvPr/>
         </p:nvSpPr>
         <p:spPr>
           <a:xfrm>
-            <a:off x="731520" y="5175504"/>
-            <a:ext cx="10728655" cy="969264"/>
+            <a:off x="731520" y="3931920"/>
+            <a:ext cx="5230368" cy="2240280"/>
           </a:xfrm>
           <a:prstGeom prst="roundRect">
             <a:avLst/>
@@ -8982,14 +9168,92 @@
       </p:sp>
       <p:sp>
         <p:nvSpPr>
-          <p:cNvPr id="19" name="TextBox 18"/>
+          <p:cNvPr id="15" name="Rectangle 14"/>
+          <p:cNvSpPr/>
+          <p:nvPr/>
+        </p:nvSpPr>
+        <p:spPr>
+          <a:xfrm>
+            <a:off x="740664" y="3941064"/>
+            <a:ext cx="5212080" cy="384048"/>
+          </a:xfrm>
+          <a:prstGeom prst="rect">
+            <a:avLst/>
+          </a:prstGeom>
+          <a:solidFill>
+            <a:srgbClr val="CC2229"/>
+          </a:solidFill>
+          <a:ln>
+            <a:noFill/>
+          </a:ln>
+        </p:spPr>
+        <p:style>
+          <a:lnRef idx="1">
+            <a:schemeClr val="accent1"/>
+          </a:lnRef>
+          <a:fillRef idx="3">
+            <a:schemeClr val="accent1"/>
+          </a:fillRef>
+          <a:effectRef idx="2">
+            <a:schemeClr val="accent1"/>
+          </a:effectRef>
+          <a:fontRef idx="minor">
+            <a:schemeClr val="lt1"/>
+          </a:fontRef>
+        </p:style>
+        <p:txBody>
+          <a:bodyPr rtlCol="0" anchor="ctr"/>
+          <a:lstStyle/>
+          <a:p>
+            <a:pPr algn="ctr"/>
+          </a:p>
+        </p:txBody>
+      </p:sp>
+      <p:sp>
+        <p:nvSpPr>
+          <p:cNvPr id="16" name="TextBox 15"/>
           <p:cNvSpPr txBox="1"/>
           <p:nvPr/>
         </p:nvSpPr>
         <p:spPr>
           <a:xfrm>
-            <a:off x="914400" y="5285232"/>
-            <a:ext cx="10332720" cy="777240"/>
+            <a:off x="914400" y="3986784"/>
+            <a:ext cx="4864608" cy="320040"/>
+          </a:xfrm>
+          <a:prstGeom prst="rect">
+            <a:avLst/>
+          </a:prstGeom>
+          <a:noFill/>
+        </p:spPr>
+        <p:txBody>
+          <a:bodyPr wrap="none">
+            <a:spAutoFit/>
+          </a:bodyPr>
+          <a:lstStyle/>
+          <a:p>
+            <a:pPr>
+              <a:defRPr sz="1100" b="1">
+                <a:solidFill>
+                  <a:srgbClr val="FFFFFF"/>
+                </a:solidFill>
+              </a:defRPr>
+            </a:pPr>
+            <a:r>
+              <a:t>3. Cybersecurity Controls, Access Management &amp; Risk Mitigation</a:t>
+            </a:r>
+          </a:p>
+        </p:txBody>
+      </p:sp>
+      <p:sp>
+        <p:nvSpPr>
+          <p:cNvPr id="17" name="TextBox 16"/>
+          <p:cNvSpPr txBox="1"/>
+          <p:nvPr/>
+        </p:nvSpPr>
+        <p:spPr>
+          <a:xfrm>
+            <a:off x="914400" y="4370832"/>
+            <a:ext cx="4864608" cy="1737360"/>
           </a:xfrm>
           <a:prstGeom prst="rect">
             <a:avLst/>
@@ -9006,18 +9270,6 @@
               <a:spcAft>
                 <a:spcPts val="300"/>
               </a:spcAft>
-              <a:defRPr sz="1200" b="1">
-                <a:solidFill>
-                  <a:srgbClr val="0F1E36"/>
-                </a:solidFill>
-              </a:defRPr>
-            </a:pPr>
-            <a:r>
-              <a:t>★  Enterprise Operational Governance &amp; Multi-Vendor SLA Excellence</a:t>
-            </a:r>
-          </a:p>
-          <a:p>
-            <a:pPr>
               <a:defRPr sz="950">
                 <a:solidFill>
                   <a:srgbClr val="1E293B"/>
@@ -9025,14 +9277,265 @@
               </a:defRPr>
             </a:pPr>
             <a:r>
-              <a:t>Managed cross-functional technical teams (15+ engineers, QA, DevOps) and vendor relationships with infrastructure providers, software vendors, and hardware suppliers. Standardized SLA benchmarks, improved incident MTTR by 40%, and received multiple corporate awards for excellence.</a:t>
-            </a:r>
+              <a:t>• Enforced Zero-Trust principles, role-based access control (RBAC), multi-factor authentication (MFA), and audit logging.</a:t>
+            </a:r>
+          </a:p>
+          <a:p>
+            <a:pPr>
+              <a:spcAft>
+                <a:spcPts val="300"/>
+              </a:spcAft>
+              <a:defRPr sz="950">
+                <a:solidFill>
+                  <a:srgbClr val="1E293B"/>
+                </a:solidFill>
+              </a:defRPr>
+            </a:pPr>
+            <a:r>
+              <a:t>• Conducted proactive vulnerability assessments, dependency scanning, code audits, and third-party risk evaluations.</a:t>
+            </a:r>
+          </a:p>
+          <a:p>
+            <a:pPr>
+              <a:spcAft>
+                <a:spcPts val="300"/>
+              </a:spcAft>
+              <a:defRPr sz="950">
+                <a:solidFill>
+                  <a:srgbClr val="1E293B"/>
+                </a:solidFill>
+              </a:defRPr>
+            </a:pPr>
+            <a:r>
+              <a:t>• Partnered with enterprise compliance teams to ensure strict adherence to ISO 27001 and industry safety standards.</a:t>
+            </a:r>
+          </a:p>
+          <a:p>
+            <a:pPr>
+              <a:spcAft>
+                <a:spcPts val="300"/>
+              </a:spcAft>
+              <a:defRPr sz="950">
+                <a:solidFill>
+                  <a:srgbClr val="1E293B"/>
+                </a:solidFill>
+              </a:defRPr>
+            </a:pPr>
+            <a:r>
+              <a:t>• Formulated incident response playbooks, disaster containment procedures, and cybersecurity staff training.</a:t>
+            </a:r>
+          </a:p>
+        </p:txBody>
+      </p:sp>
+      <p:sp>
+        <p:nvSpPr>
+          <p:cNvPr id="18" name="Rounded Rectangle 17"/>
+          <p:cNvSpPr/>
+          <p:nvPr/>
+        </p:nvSpPr>
+        <p:spPr>
+          <a:xfrm>
+            <a:off x="6217920" y="3931920"/>
+            <a:ext cx="5230368" cy="2240280"/>
+          </a:xfrm>
+          <a:prstGeom prst="roundRect">
+            <a:avLst/>
+          </a:prstGeom>
+          <a:solidFill>
+            <a:srgbClr val="FFFFFF"/>
+          </a:solidFill>
+          <a:ln w="12700">
+            <a:solidFill>
+              <a:srgbClr val="E2E8F0"/>
+            </a:solidFill>
+          </a:ln>
+        </p:spPr>
+        <p:style>
+          <a:lnRef idx="1">
+            <a:schemeClr val="accent1"/>
+          </a:lnRef>
+          <a:fillRef idx="3">
+            <a:schemeClr val="accent1"/>
+          </a:fillRef>
+          <a:effectRef idx="2">
+            <a:schemeClr val="accent1"/>
+          </a:effectRef>
+          <a:fontRef idx="minor">
+            <a:schemeClr val="lt1"/>
+          </a:fontRef>
+        </p:style>
+        <p:txBody>
+          <a:bodyPr rtlCol="0" anchor="ctr"/>
+          <a:lstStyle/>
+          <a:p>
+            <a:pPr algn="ctr"/>
+          </a:p>
+        </p:txBody>
+      </p:sp>
+      <p:sp>
+        <p:nvSpPr>
+          <p:cNvPr id="19" name="Rectangle 18"/>
+          <p:cNvSpPr/>
+          <p:nvPr/>
+        </p:nvSpPr>
+        <p:spPr>
+          <a:xfrm>
+            <a:off x="6227064" y="3941064"/>
+            <a:ext cx="5212080" cy="384048"/>
+          </a:xfrm>
+          <a:prstGeom prst="rect">
+            <a:avLst/>
+          </a:prstGeom>
+          <a:solidFill>
+            <a:srgbClr val="109563"/>
+          </a:solidFill>
+          <a:ln>
+            <a:noFill/>
+          </a:ln>
+        </p:spPr>
+        <p:style>
+          <a:lnRef idx="1">
+            <a:schemeClr val="accent1"/>
+          </a:lnRef>
+          <a:fillRef idx="3">
+            <a:schemeClr val="accent1"/>
+          </a:fillRef>
+          <a:effectRef idx="2">
+            <a:schemeClr val="accent1"/>
+          </a:effectRef>
+          <a:fontRef idx="minor">
+            <a:schemeClr val="lt1"/>
+          </a:fontRef>
+        </p:style>
+        <p:txBody>
+          <a:bodyPr rtlCol="0" anchor="ctr"/>
+          <a:lstStyle/>
+          <a:p>
+            <a:pPr algn="ctr"/>
           </a:p>
         </p:txBody>
       </p:sp>
       <p:sp>
         <p:nvSpPr>
           <p:cNvPr id="20" name="TextBox 19"/>
+          <p:cNvSpPr txBox="1"/>
+          <p:nvPr/>
+        </p:nvSpPr>
+        <p:spPr>
+          <a:xfrm>
+            <a:off x="6400800" y="3986784"/>
+            <a:ext cx="4864608" cy="320040"/>
+          </a:xfrm>
+          <a:prstGeom prst="rect">
+            <a:avLst/>
+          </a:prstGeom>
+          <a:noFill/>
+        </p:spPr>
+        <p:txBody>
+          <a:bodyPr wrap="none">
+            <a:spAutoFit/>
+          </a:bodyPr>
+          <a:lstStyle/>
+          <a:p>
+            <a:pPr>
+              <a:defRPr sz="1100" b="1">
+                <a:solidFill>
+                  <a:srgbClr val="FFFFFF"/>
+                </a:solidFill>
+              </a:defRPr>
+            </a:pPr>
+            <a:r>
+              <a:t>4. Team Leadership, Vendor Governance &amp; Fiscal Management</a:t>
+            </a:r>
+          </a:p>
+        </p:txBody>
+      </p:sp>
+      <p:sp>
+        <p:nvSpPr>
+          <p:cNvPr id="21" name="TextBox 20"/>
+          <p:cNvSpPr txBox="1"/>
+          <p:nvPr/>
+        </p:nvSpPr>
+        <p:spPr>
+          <a:xfrm>
+            <a:off x="6400800" y="4370832"/>
+            <a:ext cx="4864608" cy="1737360"/>
+          </a:xfrm>
+          <a:prstGeom prst="rect">
+            <a:avLst/>
+          </a:prstGeom>
+          <a:noFill/>
+        </p:spPr>
+        <p:txBody>
+          <a:bodyPr wrap="square">
+            <a:spAutoFit/>
+          </a:bodyPr>
+          <a:lstStyle/>
+          <a:p>
+            <a:pPr>
+              <a:spcAft>
+                <a:spcPts val="300"/>
+              </a:spcAft>
+              <a:defRPr sz="950">
+                <a:solidFill>
+                  <a:srgbClr val="1E293B"/>
+                </a:solidFill>
+              </a:defRPr>
+            </a:pPr>
+            <a:r>
+              <a:t>• Led, mentored, and fostered technical excellence across cross-functional engineering, infrastructure, and QA squads.</a:t>
+            </a:r>
+          </a:p>
+          <a:p>
+            <a:pPr>
+              <a:spcAft>
+                <a:spcPts val="300"/>
+              </a:spcAft>
+              <a:defRPr sz="950">
+                <a:solidFill>
+                  <a:srgbClr val="1E293B"/>
+                </a:solidFill>
+              </a:defRPr>
+            </a:pPr>
+            <a:r>
+              <a:t>• Governed multi-vendor contracts, service provider RFPs, cloud infrastructure budgets, and strict SLA compliance.</a:t>
+            </a:r>
+          </a:p>
+          <a:p>
+            <a:pPr>
+              <a:spcAft>
+                <a:spcPts val="300"/>
+              </a:spcAft>
+              <a:defRPr sz="950">
+                <a:solidFill>
+                  <a:srgbClr val="1E293B"/>
+                </a:solidFill>
+              </a:defRPr>
+            </a:pPr>
+            <a:r>
+              <a:t>• Optimized CapEx and OpEx allocations through license rationalization, automation, and cloud cost management.</a:t>
+            </a:r>
+          </a:p>
+          <a:p>
+            <a:pPr>
+              <a:spcAft>
+                <a:spcPts val="300"/>
+              </a:spcAft>
+              <a:defRPr sz="950">
+                <a:solidFill>
+                  <a:srgbClr val="1E293B"/>
+                </a:solidFill>
+              </a:defRPr>
+            </a:pPr>
+            <a:r>
+              <a:t>• Instituted transparent KPI dashboards tracking uptime, incident resolution MTTR, and engineering delivery velocity.</a:t>
+            </a:r>
+          </a:p>
+        </p:txBody>
+      </p:sp>
+      <p:sp>
+        <p:nvSpPr>
+          <p:cNvPr id="22" name="TextBox 21"/>
           <p:cNvSpPr txBox="1"/>
           <p:nvPr/>
         </p:nvSpPr>
@@ -9060,7 +9563,7 @@
               </a:defRPr>
             </a:pPr>
             <a:r>
-              <a:t>Obayashi Corporation · Senior Manager – IT Candidate Portfolio | Maheshchandra Hegde · Page 6 of 11</a:t>
+              <a:t>Obayashi Corporation · Senior Manager – IT Candidate Portfolio | Maheshchandra Hegde · Slide 6 of 12</a:t>
             </a:r>
           </a:p>
         </p:txBody>
@@ -9156,7 +9659,7 @@
               </a:defRPr>
             </a:pPr>
             <a:r>
-              <a:t>PROBLEM SOLVING &amp; CRISIS MANAGEMENT</a:t>
+              <a:t>BUSINESS IMPACT &amp; VALUE DELIVERY</a:t>
             </a:r>
           </a:p>
         </p:txBody>
@@ -9184,14 +9687,14 @@
           <a:lstStyle/>
           <a:p>
             <a:pPr>
-              <a:defRPr sz="2200" b="1">
+              <a:defRPr sz="2100" b="1">
                 <a:solidFill>
                   <a:srgbClr val="0F1E36"/>
                 </a:solidFill>
               </a:defRPr>
             </a:pPr>
             <a:r>
-              <a:t>Challenges Faced &amp; Strategic Resolutions Implemented</a:t>
+              <a:t>Major Achievements &amp; Quantifiable IT &amp; Spatial Engineering Milestones</a:t>
             </a:r>
           </a:p>
         </p:txBody>
@@ -9248,7 +9751,447 @@
         <p:spPr>
           <a:xfrm>
             <a:off x="731520" y="1463040"/>
-            <a:ext cx="10728655" cy="1481328"/>
+            <a:ext cx="2542032" cy="1371600"/>
+          </a:xfrm>
+          <a:prstGeom prst="roundRect">
+            <a:avLst/>
+          </a:prstGeom>
+          <a:solidFill>
+            <a:srgbClr val="FFFFFF"/>
+          </a:solidFill>
+          <a:ln w="12700">
+            <a:solidFill>
+              <a:srgbClr val="004E96"/>
+            </a:solidFill>
+          </a:ln>
+        </p:spPr>
+        <p:style>
+          <a:lnRef idx="1">
+            <a:schemeClr val="accent1"/>
+          </a:lnRef>
+          <a:fillRef idx="3">
+            <a:schemeClr val="accent1"/>
+          </a:fillRef>
+          <a:effectRef idx="2">
+            <a:schemeClr val="accent1"/>
+          </a:effectRef>
+          <a:fontRef idx="minor">
+            <a:schemeClr val="lt1"/>
+          </a:fontRef>
+        </p:style>
+        <p:txBody>
+          <a:bodyPr rtlCol="0" anchor="ctr"/>
+          <a:lstStyle/>
+          <a:p>
+            <a:pPr algn="ctr"/>
+          </a:p>
+        </p:txBody>
+      </p:sp>
+      <p:sp>
+        <p:nvSpPr>
+          <p:cNvPr id="7" name="TextBox 6"/>
+          <p:cNvSpPr txBox="1"/>
+          <p:nvPr/>
+        </p:nvSpPr>
+        <p:spPr>
+          <a:xfrm>
+            <a:off x="841248" y="1572768"/>
+            <a:ext cx="2322576" cy="1152144"/>
+          </a:xfrm>
+          <a:prstGeom prst="rect">
+            <a:avLst/>
+          </a:prstGeom>
+          <a:noFill/>
+        </p:spPr>
+        <p:txBody>
+          <a:bodyPr wrap="square">
+            <a:spAutoFit/>
+          </a:bodyPr>
+          <a:lstStyle/>
+          <a:p>
+            <a:pPr>
+              <a:spcAft>
+                <a:spcPts val="200"/>
+              </a:spcAft>
+              <a:defRPr sz="2400" b="1">
+                <a:solidFill>
+                  <a:srgbClr val="004E96"/>
+                </a:solidFill>
+              </a:defRPr>
+            </a:pPr>
+            <a:r>
+              <a:t>99.95%+</a:t>
+            </a:r>
+          </a:p>
+          <a:p>
+            <a:pPr>
+              <a:spcAft>
+                <a:spcPts val="200"/>
+              </a:spcAft>
+              <a:defRPr sz="1000" b="1">
+                <a:solidFill>
+                  <a:srgbClr val="0F1E36"/>
+                </a:solidFill>
+              </a:defRPr>
+            </a:pPr>
+            <a:r>
+              <a:t>System Availability</a:t>
+            </a:r>
+          </a:p>
+          <a:p>
+            <a:pPr>
+              <a:defRPr sz="850">
+                <a:solidFill>
+                  <a:srgbClr val="64748B"/>
+                </a:solidFill>
+              </a:defRPr>
+            </a:pPr>
+            <a:r>
+              <a:t>Sustained across 24/7 clinical ICU operations and high-traffic event workloads</a:t>
+            </a:r>
+          </a:p>
+        </p:txBody>
+      </p:sp>
+      <p:sp>
+        <p:nvSpPr>
+          <p:cNvPr id="8" name="Rounded Rectangle 7"/>
+          <p:cNvSpPr/>
+          <p:nvPr/>
+        </p:nvSpPr>
+        <p:spPr>
+          <a:xfrm>
+            <a:off x="3456432" y="1463040"/>
+            <a:ext cx="2542032" cy="1371600"/>
+          </a:xfrm>
+          <a:prstGeom prst="roundRect">
+            <a:avLst/>
+          </a:prstGeom>
+          <a:solidFill>
+            <a:srgbClr val="FFFFFF"/>
+          </a:solidFill>
+          <a:ln w="12700">
+            <a:solidFill>
+              <a:srgbClr val="004E96"/>
+            </a:solidFill>
+          </a:ln>
+        </p:spPr>
+        <p:style>
+          <a:lnRef idx="1">
+            <a:schemeClr val="accent1"/>
+          </a:lnRef>
+          <a:fillRef idx="3">
+            <a:schemeClr val="accent1"/>
+          </a:fillRef>
+          <a:effectRef idx="2">
+            <a:schemeClr val="accent1"/>
+          </a:effectRef>
+          <a:fontRef idx="minor">
+            <a:schemeClr val="lt1"/>
+          </a:fontRef>
+        </p:style>
+        <p:txBody>
+          <a:bodyPr rtlCol="0" anchor="ctr"/>
+          <a:lstStyle/>
+          <a:p>
+            <a:pPr algn="ctr"/>
+          </a:p>
+        </p:txBody>
+      </p:sp>
+      <p:sp>
+        <p:nvSpPr>
+          <p:cNvPr id="9" name="TextBox 8"/>
+          <p:cNvSpPr txBox="1"/>
+          <p:nvPr/>
+        </p:nvSpPr>
+        <p:spPr>
+          <a:xfrm>
+            <a:off x="3566160" y="1572768"/>
+            <a:ext cx="2322576" cy="1152144"/>
+          </a:xfrm>
+          <a:prstGeom prst="rect">
+            <a:avLst/>
+          </a:prstGeom>
+          <a:noFill/>
+        </p:spPr>
+        <p:txBody>
+          <a:bodyPr wrap="square">
+            <a:spAutoFit/>
+          </a:bodyPr>
+          <a:lstStyle/>
+          <a:p>
+            <a:pPr>
+              <a:spcAft>
+                <a:spcPts val="200"/>
+              </a:spcAft>
+              <a:defRPr sz="2400" b="1">
+                <a:solidFill>
+                  <a:srgbClr val="004E96"/>
+                </a:solidFill>
+              </a:defRPr>
+            </a:pPr>
+            <a:r>
+              <a:t>100%</a:t>
+            </a:r>
+          </a:p>
+          <a:p>
+            <a:pPr>
+              <a:spcAft>
+                <a:spcPts val="200"/>
+              </a:spcAft>
+              <a:defRPr sz="1000" b="1">
+                <a:solidFill>
+                  <a:srgbClr val="0F1E36"/>
+                </a:solidFill>
+              </a:defRPr>
+            </a:pPr>
+            <a:r>
+              <a:t>Data Persistence at Edge</a:t>
+            </a:r>
+          </a:p>
+          <a:p>
+            <a:pPr>
+              <a:defRPr sz="850">
+                <a:solidFill>
+                  <a:srgbClr val="64748B"/>
+                </a:solidFill>
+              </a:defRPr>
+            </a:pPr>
+            <a:r>
+              <a:t>Zero data loss during field network disconnections via offline-first syncing engine</a:t>
+            </a:r>
+          </a:p>
+        </p:txBody>
+      </p:sp>
+      <p:sp>
+        <p:nvSpPr>
+          <p:cNvPr id="10" name="Rounded Rectangle 9"/>
+          <p:cNvSpPr/>
+          <p:nvPr/>
+        </p:nvSpPr>
+        <p:spPr>
+          <a:xfrm>
+            <a:off x="6181344" y="1463040"/>
+            <a:ext cx="2542032" cy="1371600"/>
+          </a:xfrm>
+          <a:prstGeom prst="roundRect">
+            <a:avLst/>
+          </a:prstGeom>
+          <a:solidFill>
+            <a:srgbClr val="FFFFFF"/>
+          </a:solidFill>
+          <a:ln w="12700">
+            <a:solidFill>
+              <a:srgbClr val="004E96"/>
+            </a:solidFill>
+          </a:ln>
+        </p:spPr>
+        <p:style>
+          <a:lnRef idx="1">
+            <a:schemeClr val="accent1"/>
+          </a:lnRef>
+          <a:fillRef idx="3">
+            <a:schemeClr val="accent1"/>
+          </a:fillRef>
+          <a:effectRef idx="2">
+            <a:schemeClr val="accent1"/>
+          </a:effectRef>
+          <a:fontRef idx="minor">
+            <a:schemeClr val="lt1"/>
+          </a:fontRef>
+        </p:style>
+        <p:txBody>
+          <a:bodyPr rtlCol="0" anchor="ctr"/>
+          <a:lstStyle/>
+          <a:p>
+            <a:pPr algn="ctr"/>
+          </a:p>
+        </p:txBody>
+      </p:sp>
+      <p:sp>
+        <p:nvSpPr>
+          <p:cNvPr id="11" name="TextBox 10"/>
+          <p:cNvSpPr txBox="1"/>
+          <p:nvPr/>
+        </p:nvSpPr>
+        <p:spPr>
+          <a:xfrm>
+            <a:off x="6291072" y="1572768"/>
+            <a:ext cx="2322576" cy="1152144"/>
+          </a:xfrm>
+          <a:prstGeom prst="rect">
+            <a:avLst/>
+          </a:prstGeom>
+          <a:noFill/>
+        </p:spPr>
+        <p:txBody>
+          <a:bodyPr wrap="square">
+            <a:spAutoFit/>
+          </a:bodyPr>
+          <a:lstStyle/>
+          <a:p>
+            <a:pPr>
+              <a:spcAft>
+                <a:spcPts val="200"/>
+              </a:spcAft>
+              <a:defRPr sz="2400" b="1">
+                <a:solidFill>
+                  <a:srgbClr val="004E96"/>
+                </a:solidFill>
+              </a:defRPr>
+            </a:pPr>
+            <a:r>
+              <a:t>50+</a:t>
+            </a:r>
+          </a:p>
+          <a:p>
+            <a:pPr>
+              <a:spcAft>
+                <a:spcPts val="200"/>
+              </a:spcAft>
+              <a:defRPr sz="1000" b="1">
+                <a:solidFill>
+                  <a:srgbClr val="0F1E36"/>
+                </a:solidFill>
+              </a:defRPr>
+            </a:pPr>
+            <a:r>
+              <a:t>3D &amp; Spatial Projects</a:t>
+            </a:r>
+          </a:p>
+          <a:p>
+            <a:pPr>
+              <a:defRPr sz="850">
+                <a:solidFill>
+                  <a:srgbClr val="64748B"/>
+                </a:solidFill>
+              </a:defRPr>
+            </a:pPr>
+            <a:r>
+              <a:t>Delivered across architectural visualization, CAD, flight simulation &amp; AI workflows</a:t>
+            </a:r>
+          </a:p>
+        </p:txBody>
+      </p:sp>
+      <p:sp>
+        <p:nvSpPr>
+          <p:cNvPr id="12" name="Rounded Rectangle 11"/>
+          <p:cNvSpPr/>
+          <p:nvPr/>
+        </p:nvSpPr>
+        <p:spPr>
+          <a:xfrm>
+            <a:off x="8906256" y="1463040"/>
+            <a:ext cx="2542032" cy="1371600"/>
+          </a:xfrm>
+          <a:prstGeom prst="roundRect">
+            <a:avLst/>
+          </a:prstGeom>
+          <a:solidFill>
+            <a:srgbClr val="FFFFFF"/>
+          </a:solidFill>
+          <a:ln w="12700">
+            <a:solidFill>
+              <a:srgbClr val="004E96"/>
+            </a:solidFill>
+          </a:ln>
+        </p:spPr>
+        <p:style>
+          <a:lnRef idx="1">
+            <a:schemeClr val="accent1"/>
+          </a:lnRef>
+          <a:fillRef idx="3">
+            <a:schemeClr val="accent1"/>
+          </a:fillRef>
+          <a:effectRef idx="2">
+            <a:schemeClr val="accent1"/>
+          </a:effectRef>
+          <a:fontRef idx="minor">
+            <a:schemeClr val="lt1"/>
+          </a:fontRef>
+        </p:style>
+        <p:txBody>
+          <a:bodyPr rtlCol="0" anchor="ctr"/>
+          <a:lstStyle/>
+          <a:p>
+            <a:pPr algn="ctr"/>
+          </a:p>
+        </p:txBody>
+      </p:sp>
+      <p:sp>
+        <p:nvSpPr>
+          <p:cNvPr id="13" name="TextBox 12"/>
+          <p:cNvSpPr txBox="1"/>
+          <p:nvPr/>
+        </p:nvSpPr>
+        <p:spPr>
+          <a:xfrm>
+            <a:off x="9015984" y="1572768"/>
+            <a:ext cx="2322576" cy="1152144"/>
+          </a:xfrm>
+          <a:prstGeom prst="rect">
+            <a:avLst/>
+          </a:prstGeom>
+          <a:noFill/>
+        </p:spPr>
+        <p:txBody>
+          <a:bodyPr wrap="square">
+            <a:spAutoFit/>
+          </a:bodyPr>
+          <a:lstStyle/>
+          <a:p>
+            <a:pPr>
+              <a:spcAft>
+                <a:spcPts val="200"/>
+              </a:spcAft>
+              <a:defRPr sz="2400" b="1">
+                <a:solidFill>
+                  <a:srgbClr val="004E96"/>
+                </a:solidFill>
+              </a:defRPr>
+            </a:pPr>
+            <a:r>
+              <a:t>22%</a:t>
+            </a:r>
+          </a:p>
+          <a:p>
+            <a:pPr>
+              <a:spcAft>
+                <a:spcPts val="200"/>
+              </a:spcAft>
+              <a:defRPr sz="1000" b="1">
+                <a:solidFill>
+                  <a:srgbClr val="0F1E36"/>
+                </a:solidFill>
+              </a:defRPr>
+            </a:pPr>
+            <a:r>
+              <a:t>Cloud Cost Optimization</a:t>
+            </a:r>
+          </a:p>
+          <a:p>
+            <a:pPr>
+              <a:defRPr sz="850">
+                <a:solidFill>
+                  <a:srgbClr val="64748B"/>
+                </a:solidFill>
+              </a:defRPr>
+            </a:pPr>
+            <a:r>
+              <a:t>Saved through resource rightsizing, auto-scaling policies, and license rationalization</a:t>
+            </a:r>
+          </a:p>
+        </p:txBody>
+      </p:sp>
+      <p:sp>
+        <p:nvSpPr>
+          <p:cNvPr id="14" name="Rounded Rectangle 13"/>
+          <p:cNvSpPr/>
+          <p:nvPr/>
+        </p:nvSpPr>
+        <p:spPr>
+          <a:xfrm>
+            <a:off x="731520" y="2971800"/>
+            <a:ext cx="10728655" cy="768096"/>
           </a:xfrm>
           <a:prstGeom prst="roundRect">
             <a:avLst/>
@@ -9286,107 +10229,14 @@
       </p:sp>
       <p:sp>
         <p:nvSpPr>
-          <p:cNvPr id="7" name="TextBox 6"/>
+          <p:cNvPr id="15" name="TextBox 14"/>
           <p:cNvSpPr txBox="1"/>
           <p:nvPr/>
         </p:nvSpPr>
         <p:spPr>
           <a:xfrm>
-            <a:off x="914400" y="1572768"/>
-            <a:ext cx="4389120" cy="1280160"/>
-          </a:xfrm>
-          <a:prstGeom prst="rect">
-            <a:avLst/>
-          </a:prstGeom>
-          <a:noFill/>
-        </p:spPr>
-        <p:txBody>
-          <a:bodyPr wrap="square">
-            <a:spAutoFit/>
-          </a:bodyPr>
-          <a:lstStyle/>
-          <a:p>
-            <a:pPr>
-              <a:spcAft>
-                <a:spcPts val="400"/>
-              </a:spcAft>
-              <a:defRPr sz="1150" b="1">
-                <a:solidFill>
-                  <a:srgbClr val="CC2229"/>
-                </a:solidFill>
-              </a:defRPr>
-            </a:pPr>
-            <a:r>
-              <a:t>Challenge 1: Severe Network Fluctuation &amp; Remote Connectivity Drops</a:t>
-            </a:r>
-          </a:p>
-          <a:p>
-            <a:pPr>
-              <a:defRPr sz="950">
-                <a:solidFill>
-                  <a:srgbClr val="1E293B"/>
-                </a:solidFill>
-              </a:defRPr>
-            </a:pPr>
-            <a:r>
-              <a:t>Operating conditions at remote event venues and distributed client sites suffered frequent Wi-Fi packet drops, ISP latency spikes, and dead zones, causing cloud disconnects and user data loss.</a:t>
-            </a:r>
-          </a:p>
-        </p:txBody>
-      </p:sp>
-      <p:sp>
-        <p:nvSpPr>
-          <p:cNvPr id="8" name="Rectangle 7"/>
-          <p:cNvSpPr/>
-          <p:nvPr/>
-        </p:nvSpPr>
-        <p:spPr>
-          <a:xfrm>
-            <a:off x="5486400" y="1600200"/>
-            <a:ext cx="18288" cy="1188720"/>
-          </a:xfrm>
-          <a:prstGeom prst="rect">
-            <a:avLst/>
-          </a:prstGeom>
-          <a:solidFill>
-            <a:srgbClr val="E2E8F0"/>
-          </a:solidFill>
-          <a:ln>
-            <a:noFill/>
-          </a:ln>
-        </p:spPr>
-        <p:style>
-          <a:lnRef idx="1">
-            <a:schemeClr val="accent1"/>
-          </a:lnRef>
-          <a:fillRef idx="3">
-            <a:schemeClr val="accent1"/>
-          </a:fillRef>
-          <a:effectRef idx="2">
-            <a:schemeClr val="accent1"/>
-          </a:effectRef>
-          <a:fontRef idx="minor">
-            <a:schemeClr val="lt1"/>
-          </a:fontRef>
-        </p:style>
-        <p:txBody>
-          <a:bodyPr rtlCol="0" anchor="ctr"/>
-          <a:lstStyle/>
-          <a:p>
-            <a:pPr algn="ctr"/>
-          </a:p>
-        </p:txBody>
-      </p:sp>
-      <p:sp>
-        <p:nvSpPr>
-          <p:cNvPr id="9" name="TextBox 8"/>
-          <p:cNvSpPr txBox="1"/>
-          <p:nvPr/>
-        </p:nvSpPr>
-        <p:spPr>
-          <a:xfrm>
-            <a:off x="5669280" y="1572768"/>
-            <a:ext cx="5577840" cy="1280160"/>
+            <a:off x="914400" y="3044952"/>
+            <a:ext cx="10332720" cy="621792"/>
           </a:xfrm>
           <a:prstGeom prst="rect">
             <a:avLst/>
@@ -9405,53 +10255,38 @@
               </a:spcAft>
               <a:defRPr sz="1100" b="1">
                 <a:solidFill>
-                  <a:srgbClr val="004E96"/>
-                </a:solidFill>
-              </a:defRPr>
-            </a:pPr>
-            <a:r>
-              <a:t>Resolution Implemented:</a:t>
-            </a:r>
-          </a:p>
-          <a:p>
-            <a:pPr>
-              <a:spcAft>
-                <a:spcPts val="300"/>
-              </a:spcAft>
-              <a:defRPr sz="950">
+                  <a:srgbClr val="0F1E36"/>
+                </a:solidFill>
+              </a:defRPr>
+            </a:pPr>
+            <a:r>
+              <a:t>★  Enterprise Architecture Modernization &amp; Zero-Downtime Migration</a:t>
+            </a:r>
+          </a:p>
+          <a:p>
+            <a:pPr>
+              <a:defRPr sz="900">
                 <a:solidFill>
                   <a:srgbClr val="1E293B"/>
                 </a:solidFill>
               </a:defRPr>
             </a:pPr>
             <a:r>
-              <a:t>Architected an 'Offline-First' state engine using IndexedDB client persistence and service workers. Implemented optimistic UI updates and a transactional event replay queue that automatically resynchronizes once the network reconnects.</a:t>
-            </a:r>
-          </a:p>
-          <a:p>
-            <a:pPr>
-              <a:defRPr sz="950" b="1">
-                <a:solidFill>
-                  <a:srgbClr val="109563"/>
-                </a:solidFill>
-              </a:defRPr>
-            </a:pPr>
-            <a:r>
-              <a:t>Result: Impact: 100% data preservation, zero operator workflow interruptions, seamless user experience.</a:t>
-            </a:r>
-          </a:p>
-        </p:txBody>
-      </p:sp>
-      <p:sp>
-        <p:nvSpPr>
-          <p:cNvPr id="10" name="Rounded Rectangle 9"/>
+              <a:t>Successfully transformed legacy monolithic systems into modular, API-driven architectures at Cyient/Philips and Technoyana. Reduced regression cycles from weeks to hours and eliminated deployment downtime, ensuring hospital and enterprise operations remained completely uninterrupted during version upgrades.</a:t>
+            </a:r>
+          </a:p>
+        </p:txBody>
+      </p:sp>
+      <p:sp>
+        <p:nvSpPr>
+          <p:cNvPr id="16" name="Rounded Rectangle 15"/>
           <p:cNvSpPr/>
           <p:nvPr/>
         </p:nvSpPr>
         <p:spPr>
           <a:xfrm>
-            <a:off x="731520" y="3072384"/>
-            <a:ext cx="10728655" cy="1481328"/>
+            <a:off x="731520" y="3813048"/>
+            <a:ext cx="10728655" cy="768096"/>
           </a:xfrm>
           <a:prstGeom prst="roundRect">
             <a:avLst/>
@@ -9489,107 +10324,14 @@
       </p:sp>
       <p:sp>
         <p:nvSpPr>
-          <p:cNvPr id="11" name="TextBox 10"/>
+          <p:cNvPr id="17" name="TextBox 16"/>
           <p:cNvSpPr txBox="1"/>
           <p:nvPr/>
         </p:nvSpPr>
         <p:spPr>
           <a:xfrm>
-            <a:off x="914400" y="3182112"/>
-            <a:ext cx="4389120" cy="1280160"/>
-          </a:xfrm>
-          <a:prstGeom prst="rect">
-            <a:avLst/>
-          </a:prstGeom>
-          <a:noFill/>
-        </p:spPr>
-        <p:txBody>
-          <a:bodyPr wrap="square">
-            <a:spAutoFit/>
-          </a:bodyPr>
-          <a:lstStyle/>
-          <a:p>
-            <a:pPr>
-              <a:spcAft>
-                <a:spcPts val="400"/>
-              </a:spcAft>
-              <a:defRPr sz="1150" b="1">
-                <a:solidFill>
-                  <a:srgbClr val="CC2229"/>
-                </a:solidFill>
-              </a:defRPr>
-            </a:pPr>
-            <a:r>
-              <a:t>Challenge 2: Architectural Fragility &amp; High Downtime Risk in Monolithic Legacy Systems</a:t>
-            </a:r>
-          </a:p>
-          <a:p>
-            <a:pPr>
-              <a:defRPr sz="950">
-                <a:solidFill>
-                  <a:srgbClr val="1E293B"/>
-                </a:solidFill>
-              </a:defRPr>
-            </a:pPr>
-            <a:r>
-              <a:t>A legacy codebase had tight coupling between presentation and backend data layers. Deploying bug fixes or new features carried severe risks of regressions and system outages in critical environments.</a:t>
-            </a:r>
-          </a:p>
-        </p:txBody>
-      </p:sp>
-      <p:sp>
-        <p:nvSpPr>
-          <p:cNvPr id="12" name="Rectangle 11"/>
-          <p:cNvSpPr/>
-          <p:nvPr/>
-        </p:nvSpPr>
-        <p:spPr>
-          <a:xfrm>
-            <a:off x="5486400" y="3209544"/>
-            <a:ext cx="18288" cy="1188720"/>
-          </a:xfrm>
-          <a:prstGeom prst="rect">
-            <a:avLst/>
-          </a:prstGeom>
-          <a:solidFill>
-            <a:srgbClr val="E2E8F0"/>
-          </a:solidFill>
-          <a:ln>
-            <a:noFill/>
-          </a:ln>
-        </p:spPr>
-        <p:style>
-          <a:lnRef idx="1">
-            <a:schemeClr val="accent1"/>
-          </a:lnRef>
-          <a:fillRef idx="3">
-            <a:schemeClr val="accent1"/>
-          </a:fillRef>
-          <a:effectRef idx="2">
-            <a:schemeClr val="accent1"/>
-          </a:effectRef>
-          <a:fontRef idx="minor">
-            <a:schemeClr val="lt1"/>
-          </a:fontRef>
-        </p:style>
-        <p:txBody>
-          <a:bodyPr rtlCol="0" anchor="ctr"/>
-          <a:lstStyle/>
-          <a:p>
-            <a:pPr algn="ctr"/>
-          </a:p>
-        </p:txBody>
-      </p:sp>
-      <p:sp>
-        <p:nvSpPr>
-          <p:cNvPr id="13" name="TextBox 12"/>
-          <p:cNvSpPr txBox="1"/>
-          <p:nvPr/>
-        </p:nvSpPr>
-        <p:spPr>
-          <a:xfrm>
-            <a:off x="5669280" y="3182112"/>
-            <a:ext cx="5577840" cy="1280160"/>
+            <a:off x="914400" y="3886200"/>
+            <a:ext cx="10332720" cy="621792"/>
           </a:xfrm>
           <a:prstGeom prst="rect">
             <a:avLst/>
@@ -9608,53 +10350,38 @@
               </a:spcAft>
               <a:defRPr sz="1100" b="1">
                 <a:solidFill>
-                  <a:srgbClr val="004E96"/>
-                </a:solidFill>
-              </a:defRPr>
-            </a:pPr>
-            <a:r>
-              <a:t>Resolution Implemented:</a:t>
-            </a:r>
-          </a:p>
-          <a:p>
-            <a:pPr>
-              <a:spcAft>
-                <a:spcPts val="300"/>
-              </a:spcAft>
-              <a:defRPr sz="950">
+                  <a:srgbClr val="0F1E36"/>
+                </a:solidFill>
+              </a:defRPr>
+            </a:pPr>
+            <a:r>
+              <a:t>★  Multi-Site Network Resilience &amp; Field Data Integrity Engine</a:t>
+            </a:r>
+          </a:p>
+          <a:p>
+            <a:pPr>
+              <a:defRPr sz="900">
                 <a:solidFill>
                   <a:srgbClr val="1E293B"/>
                 </a:solidFill>
               </a:defRPr>
             </a:pPr>
             <a:r>
-              <a:t>Decomposed the monolith into isolated micro-frontends and standardized REST/WebSocket contracts. Established automated unit/integration testing pipelines and canary deployments to validate changes in staging.</a:t>
-            </a:r>
-          </a:p>
-          <a:p>
-            <a:pPr>
-              <a:defRPr sz="950" b="1">
-                <a:solidFill>
-                  <a:srgbClr val="109563"/>
-                </a:solidFill>
-              </a:defRPr>
-            </a:pPr>
-            <a:r>
-              <a:t>Result: Impact: Reduced regression risk to near-zero, cut deployment cycles by 35%, and enabled independent modular upgrades.</a:t>
-            </a:r>
-          </a:p>
-        </p:txBody>
-      </p:sp>
-      <p:sp>
-        <p:nvSpPr>
-          <p:cNvPr id="14" name="Rounded Rectangle 13"/>
+              <a:t>Designed and deployed an edge-resilient synchronization pipeline for environments plagued by unstable cellular and local networks. Handled thousands of concurrent transactional updates offline with automatic background sync and deterministic conflict resolution upon network restoration.</a:t>
+            </a:r>
+          </a:p>
+        </p:txBody>
+      </p:sp>
+      <p:sp>
+        <p:nvSpPr>
+          <p:cNvPr id="18" name="Rounded Rectangle 17"/>
           <p:cNvSpPr/>
           <p:nvPr/>
         </p:nvSpPr>
         <p:spPr>
           <a:xfrm>
-            <a:off x="731520" y="4681728"/>
-            <a:ext cx="10728655" cy="1481328"/>
+            <a:off x="731520" y="4654296"/>
+            <a:ext cx="10728655" cy="768096"/>
           </a:xfrm>
           <a:prstGeom prst="roundRect">
             <a:avLst/>
@@ -9692,14 +10419,14 @@
       </p:sp>
       <p:sp>
         <p:nvSpPr>
-          <p:cNvPr id="15" name="TextBox 14"/>
+          <p:cNvPr id="19" name="TextBox 18"/>
           <p:cNvSpPr txBox="1"/>
           <p:nvPr/>
         </p:nvSpPr>
         <p:spPr>
           <a:xfrm>
-            <a:off x="914400" y="4791456"/>
-            <a:ext cx="4389120" cy="1280160"/>
+            <a:off x="914400" y="4727448"/>
+            <a:ext cx="10332720" cy="621792"/>
           </a:xfrm>
           <a:prstGeom prst="rect">
             <a:avLst/>
@@ -9714,51 +10441,53 @@
           <a:p>
             <a:pPr>
               <a:spcAft>
-                <a:spcPts val="400"/>
+                <a:spcPts val="200"/>
               </a:spcAft>
-              <a:defRPr sz="1150" b="1">
-                <a:solidFill>
-                  <a:srgbClr val="CC2229"/>
-                </a:solidFill>
-              </a:defRPr>
-            </a:pPr>
-            <a:r>
-              <a:t>Challenge 3: Complex Multi-Vendor Dependencies &amp; SLA Enforcement Gaps</a:t>
-            </a:r>
-          </a:p>
-          <a:p>
-            <a:pPr>
-              <a:defRPr sz="950">
+              <a:defRPr sz="1100" b="1">
+                <a:solidFill>
+                  <a:srgbClr val="0F1E36"/>
+                </a:solidFill>
+              </a:defRPr>
+            </a:pPr>
+            <a:r>
+              <a:t>★  Spatial 3D Asset Pipelines &amp; Generative AI Innovation (Voxelforge AI / ayam3d)</a:t>
+            </a:r>
+          </a:p>
+          <a:p>
+            <a:pPr>
+              <a:defRPr sz="900">
                 <a:solidFill>
                   <a:srgbClr val="1E293B"/>
                 </a:solidFill>
               </a:defRPr>
             </a:pPr>
             <a:r>
-              <a:t>Dispersed third-party cloud tools, software licenses, and hardware vendors lacked centralized SLA tracking, resulting in finger-pointing during service degradation and creeping monthly cloud expenditure.</a:t>
-            </a:r>
-          </a:p>
-        </p:txBody>
-      </p:sp>
-      <p:sp>
-        <p:nvSpPr>
-          <p:cNvPr id="16" name="Rectangle 15"/>
+              <a:t>Successfully built scalable automated pipelines converting complex 3D meshes into real-time, low-poly assets with automated retopology and PBR texturing. Unlocked web-based 3D digital twin rendering without requiring expensive on-site graphics hardware.</a:t>
+            </a:r>
+          </a:p>
+        </p:txBody>
+      </p:sp>
+      <p:sp>
+        <p:nvSpPr>
+          <p:cNvPr id="20" name="Rounded Rectangle 19"/>
           <p:cNvSpPr/>
           <p:nvPr/>
         </p:nvSpPr>
         <p:spPr>
           <a:xfrm>
-            <a:off x="5486400" y="4818888"/>
-            <a:ext cx="18288" cy="1188720"/>
-          </a:xfrm>
-          <a:prstGeom prst="rect">
+            <a:off x="731520" y="5495544"/>
+            <a:ext cx="10728655" cy="768096"/>
+          </a:xfrm>
+          <a:prstGeom prst="roundRect">
             <a:avLst/>
           </a:prstGeom>
           <a:solidFill>
-            <a:srgbClr val="E2E8F0"/>
+            <a:srgbClr val="FFFFFF"/>
           </a:solidFill>
-          <a:ln>
-            <a:noFill/>
+          <a:ln w="12700">
+            <a:solidFill>
+              <a:srgbClr val="E2E8F0"/>
+            </a:solidFill>
           </a:ln>
         </p:spPr>
         <p:style>
@@ -9785,14 +10514,14 @@
       </p:sp>
       <p:sp>
         <p:nvSpPr>
-          <p:cNvPr id="17" name="TextBox 16"/>
+          <p:cNvPr id="21" name="TextBox 20"/>
           <p:cNvSpPr txBox="1"/>
           <p:nvPr/>
         </p:nvSpPr>
         <p:spPr>
           <a:xfrm>
-            <a:off x="5669280" y="4791456"/>
-            <a:ext cx="5577840" cy="1280160"/>
+            <a:off x="914400" y="5568696"/>
+            <a:ext cx="10332720" cy="621792"/>
           </a:xfrm>
           <a:prstGeom prst="rect">
             <a:avLst/>
@@ -9811,46 +10540,31 @@
               </a:spcAft>
               <a:defRPr sz="1100" b="1">
                 <a:solidFill>
-                  <a:srgbClr val="004E96"/>
-                </a:solidFill>
-              </a:defRPr>
-            </a:pPr>
-            <a:r>
-              <a:t>Resolution Implemented:</a:t>
-            </a:r>
-          </a:p>
-          <a:p>
-            <a:pPr>
-              <a:spcAft>
-                <a:spcPts val="300"/>
-              </a:spcAft>
-              <a:defRPr sz="950">
+                  <a:srgbClr val="0F1E36"/>
+                </a:solidFill>
+              </a:defRPr>
+            </a:pPr>
+            <a:r>
+              <a:t>★  Enterprise Operational Governance &amp; Multi-Vendor SLA Excellence</a:t>
+            </a:r>
+          </a:p>
+          <a:p>
+            <a:pPr>
+              <a:defRPr sz="900">
                 <a:solidFill>
                   <a:srgbClr val="1E293B"/>
                 </a:solidFill>
               </a:defRPr>
             </a:pPr>
             <a:r>
-              <a:t>Instituted a centralized IT Governance &amp; SLA Dashboard with automated latency/uptime telemetry. Standardized vendor contract SLAs with penalty clauses, monthly executive reviews, and automated idle resource termination.</a:t>
-            </a:r>
-          </a:p>
-          <a:p>
-            <a:pPr>
-              <a:defRPr sz="950" b="1">
-                <a:solidFill>
-                  <a:srgbClr val="109563"/>
-                </a:solidFill>
-              </a:defRPr>
-            </a:pPr>
-            <a:r>
-              <a:t>Result: Impact: Slashed mean-time-to-resolution (MTTR) by 40% and trimmed overall recurring cloud/vendor spend by 22%.</a:t>
-            </a:r>
-          </a:p>
-        </p:txBody>
-      </p:sp>
-      <p:sp>
-        <p:nvSpPr>
-          <p:cNvPr id="18" name="TextBox 17"/>
+              <a:t>Managed cross-functional technical teams (15+ engineers, QA, DevOps) and vendor relationships with infrastructure providers, software vendors, and hardware suppliers. Standardized SLA benchmarks, improved incident MTTR by 40%, and received multiple corporate awards for excellence.</a:t>
+            </a:r>
+          </a:p>
+        </p:txBody>
+      </p:sp>
+      <p:sp>
+        <p:nvSpPr>
+          <p:cNvPr id="22" name="TextBox 21"/>
           <p:cNvSpPr txBox="1"/>
           <p:nvPr/>
         </p:nvSpPr>
@@ -9878,7 +10592,7 @@
               </a:defRPr>
             </a:pPr>
             <a:r>
-              <a:t>Obayashi Corporation · Senior Manager – IT Candidate Portfolio | Maheshchandra Hegde · Page 7 of 11</a:t>
+              <a:t>Obayashi Corporation · Senior Manager – IT Candidate Portfolio | Maheshchandra Hegde · Slide 7 of 12</a:t>
             </a:r>
           </a:p>
         </p:txBody>
@@ -9974,7 +10688,7 @@
               </a:defRPr>
             </a:pPr>
             <a:r>
-              <a:t>OPERATIONAL PHILOSOPHY</a:t>
+              <a:t>PROBLEM SOLVING &amp; CRISIS MANAGEMENT</a:t>
             </a:r>
           </a:p>
         </p:txBody>
@@ -10002,14 +10716,14 @@
           <a:lstStyle/>
           <a:p>
             <a:pPr>
-              <a:defRPr sz="2200" b="1">
+              <a:defRPr sz="2100" b="1">
                 <a:solidFill>
                   <a:srgbClr val="0F1E36"/>
                 </a:solidFill>
               </a:defRPr>
             </a:pPr>
             <a:r>
-              <a:t>Lessons Learned &amp; Enterprise Best Practices</a:t>
+              <a:t>Challenges Faced &amp; Strategic Resolutions Implemented</a:t>
             </a:r>
           </a:p>
         </p:txBody>
@@ -10066,7 +10780,7 @@
         <p:spPr>
           <a:xfrm>
             <a:off x="731520" y="1463040"/>
-            <a:ext cx="10728655" cy="1051560"/>
+            <a:ext cx="10728655" cy="1481328"/>
           </a:xfrm>
           <a:prstGeom prst="roundRect">
             <a:avLst/>
@@ -10104,20 +10818,70 @@
       </p:sp>
       <p:sp>
         <p:nvSpPr>
-          <p:cNvPr id="7" name="Rectangle 6"/>
+          <p:cNvPr id="7" name="TextBox 6"/>
+          <p:cNvSpPr txBox="1"/>
+          <p:nvPr/>
+        </p:nvSpPr>
+        <p:spPr>
+          <a:xfrm>
+            <a:off x="914400" y="1572768"/>
+            <a:ext cx="4389120" cy="1280160"/>
+          </a:xfrm>
+          <a:prstGeom prst="rect">
+            <a:avLst/>
+          </a:prstGeom>
+          <a:noFill/>
+        </p:spPr>
+        <p:txBody>
+          <a:bodyPr wrap="square">
+            <a:spAutoFit/>
+          </a:bodyPr>
+          <a:lstStyle/>
+          <a:p>
+            <a:pPr>
+              <a:spcAft>
+                <a:spcPts val="300"/>
+              </a:spcAft>
+              <a:defRPr sz="1100" b="1">
+                <a:solidFill>
+                  <a:srgbClr val="CC2229"/>
+                </a:solidFill>
+              </a:defRPr>
+            </a:pPr>
+            <a:r>
+              <a:t>Challenge 1: Severe Network Fluctuation &amp; Remote Connectivity Drops</a:t>
+            </a:r>
+          </a:p>
+          <a:p>
+            <a:pPr>
+              <a:defRPr sz="900">
+                <a:solidFill>
+                  <a:srgbClr val="1E293B"/>
+                </a:solidFill>
+              </a:defRPr>
+            </a:pPr>
+            <a:r>
+              <a:t>Operating conditions at remote event venues and distributed client sites suffered frequent Wi-Fi packet drops, ISP latency spikes, and dead zones, causing cloud disconnects and user data loss.</a:t>
+            </a:r>
+          </a:p>
+        </p:txBody>
+      </p:sp>
+      <p:sp>
+        <p:nvSpPr>
+          <p:cNvPr id="8" name="Rectangle 7"/>
           <p:cNvSpPr/>
           <p:nvPr/>
         </p:nvSpPr>
         <p:spPr>
           <a:xfrm>
-            <a:off x="731520" y="1463040"/>
-            <a:ext cx="109728" cy="1051560"/>
+            <a:off x="5486400" y="1600200"/>
+            <a:ext cx="18288" cy="1188720"/>
           </a:xfrm>
           <a:prstGeom prst="rect">
             <a:avLst/>
           </a:prstGeom>
           <a:solidFill>
-            <a:srgbClr val="004E96"/>
+            <a:srgbClr val="E2E8F0"/>
           </a:solidFill>
           <a:ln>
             <a:noFill/>
@@ -10147,14 +10911,14 @@
       </p:sp>
       <p:sp>
         <p:nvSpPr>
-          <p:cNvPr id="8" name="TextBox 7"/>
+          <p:cNvPr id="9" name="TextBox 8"/>
           <p:cNvSpPr txBox="1"/>
           <p:nvPr/>
         </p:nvSpPr>
         <p:spPr>
           <a:xfrm>
-            <a:off x="1051560" y="1572768"/>
-            <a:ext cx="10149840" cy="868680"/>
+            <a:off x="5669280" y="1572768"/>
+            <a:ext cx="5577840" cy="1280160"/>
           </a:xfrm>
           <a:prstGeom prst="rect">
             <a:avLst/>
@@ -10169,42 +10933,57 @@
           <a:p>
             <a:pPr>
               <a:spcAft>
-                <a:spcPts val="400"/>
+                <a:spcPts val="200"/>
               </a:spcAft>
-              <a:defRPr sz="1200" b="1">
-                <a:solidFill>
-                  <a:srgbClr val="0F1E36"/>
-                </a:solidFill>
-              </a:defRPr>
-            </a:pPr>
-            <a:r>
-              <a:t>1. Resilience Must Be Engineered into the Architecture, Not Added as an Afterthought</a:t>
-            </a:r>
-          </a:p>
-          <a:p>
-            <a:pPr>
-              <a:defRPr sz="950">
+              <a:defRPr sz="1100" b="1">
+                <a:solidFill>
+                  <a:srgbClr val="004E96"/>
+                </a:solidFill>
+              </a:defRPr>
+            </a:pPr>
+            <a:r>
+              <a:t>Resolution Implemented:</a:t>
+            </a:r>
+          </a:p>
+          <a:p>
+            <a:pPr>
+              <a:spcAft>
+                <a:spcPts val="300"/>
+              </a:spcAft>
+              <a:defRPr sz="900">
                 <a:solidFill>
                   <a:srgbClr val="1E293B"/>
                 </a:solidFill>
               </a:defRPr>
             </a:pPr>
             <a:r>
-              <a:t>In critical operations (whether hospitals or construction job sites), network connectivity and hardware will inevitably experience degradation. Systems must be designed with graceful degradation, local caching, and deterministic reconciliation rather than assuming continuous, low-latency broadband.</a:t>
-            </a:r>
-          </a:p>
-        </p:txBody>
-      </p:sp>
-      <p:sp>
-        <p:nvSpPr>
-          <p:cNvPr id="9" name="Rounded Rectangle 8"/>
+              <a:t>Architected an 'Offline-First' state engine using IndexedDB client persistence and service workers. Implemented optimistic UI updates and a transactional event replay queue that automatically resynchronizes once the network reconnects.</a:t>
+            </a:r>
+          </a:p>
+          <a:p>
+            <a:pPr>
+              <a:defRPr sz="900" b="1">
+                <a:solidFill>
+                  <a:srgbClr val="109563"/>
+                </a:solidFill>
+              </a:defRPr>
+            </a:pPr>
+            <a:r>
+              <a:t>Result: Impact: 100% data preservation, zero operator workflow interruptions, seamless user experience.</a:t>
+            </a:r>
+          </a:p>
+        </p:txBody>
+      </p:sp>
+      <p:sp>
+        <p:nvSpPr>
+          <p:cNvPr id="10" name="Rounded Rectangle 9"/>
           <p:cNvSpPr/>
           <p:nvPr/>
         </p:nvSpPr>
         <p:spPr>
           <a:xfrm>
-            <a:off x="731520" y="2651760"/>
-            <a:ext cx="10728655" cy="1051560"/>
+            <a:off x="731520" y="3072384"/>
+            <a:ext cx="10728655" cy="1481328"/>
           </a:xfrm>
           <a:prstGeom prst="roundRect">
             <a:avLst/>
@@ -10242,20 +11021,70 @@
       </p:sp>
       <p:sp>
         <p:nvSpPr>
-          <p:cNvPr id="10" name="Rectangle 9"/>
+          <p:cNvPr id="11" name="TextBox 10"/>
+          <p:cNvSpPr txBox="1"/>
+          <p:nvPr/>
+        </p:nvSpPr>
+        <p:spPr>
+          <a:xfrm>
+            <a:off x="914400" y="3182112"/>
+            <a:ext cx="4389120" cy="1280160"/>
+          </a:xfrm>
+          <a:prstGeom prst="rect">
+            <a:avLst/>
+          </a:prstGeom>
+          <a:noFill/>
+        </p:spPr>
+        <p:txBody>
+          <a:bodyPr wrap="square">
+            <a:spAutoFit/>
+          </a:bodyPr>
+          <a:lstStyle/>
+          <a:p>
+            <a:pPr>
+              <a:spcAft>
+                <a:spcPts val="300"/>
+              </a:spcAft>
+              <a:defRPr sz="1100" b="1">
+                <a:solidFill>
+                  <a:srgbClr val="CC2229"/>
+                </a:solidFill>
+              </a:defRPr>
+            </a:pPr>
+            <a:r>
+              <a:t>Challenge 2: High Bandwidth Saturation &amp; Latency Rendering Heavy 3D Assets on Edge Devices</a:t>
+            </a:r>
+          </a:p>
+          <a:p>
+            <a:pPr>
+              <a:defRPr sz="900">
+                <a:solidFill>
+                  <a:srgbClr val="1E293B"/>
+                </a:solidFill>
+              </a:defRPr>
+            </a:pPr>
+            <a:r>
+              <a:t>Heavy 3D models, complex CAD geometry, and unoptimized high-poly meshes caused browser crashes, memory overflows, and unacceptable load times over mobile job-site networks.</a:t>
+            </a:r>
+          </a:p>
+        </p:txBody>
+      </p:sp>
+      <p:sp>
+        <p:nvSpPr>
+          <p:cNvPr id="12" name="Rectangle 11"/>
           <p:cNvSpPr/>
           <p:nvPr/>
         </p:nvSpPr>
         <p:spPr>
           <a:xfrm>
-            <a:off x="731520" y="2651760"/>
-            <a:ext cx="109728" cy="1051560"/>
+            <a:off x="5486400" y="3209544"/>
+            <a:ext cx="18288" cy="1188720"/>
           </a:xfrm>
           <a:prstGeom prst="rect">
             <a:avLst/>
           </a:prstGeom>
           <a:solidFill>
-            <a:srgbClr val="004E96"/>
+            <a:srgbClr val="E2E8F0"/>
           </a:solidFill>
           <a:ln>
             <a:noFill/>
@@ -10285,14 +11114,14 @@
       </p:sp>
       <p:sp>
         <p:nvSpPr>
-          <p:cNvPr id="11" name="TextBox 10"/>
+          <p:cNvPr id="13" name="TextBox 12"/>
           <p:cNvSpPr txBox="1"/>
           <p:nvPr/>
         </p:nvSpPr>
         <p:spPr>
           <a:xfrm>
-            <a:off x="1051560" y="2761488"/>
-            <a:ext cx="10149840" cy="868680"/>
+            <a:off x="5669280" y="3182112"/>
+            <a:ext cx="5577840" cy="1280160"/>
           </a:xfrm>
           <a:prstGeom prst="rect">
             <a:avLst/>
@@ -10307,42 +11136,57 @@
           <a:p>
             <a:pPr>
               <a:spcAft>
-                <a:spcPts val="400"/>
+                <a:spcPts val="200"/>
               </a:spcAft>
-              <a:defRPr sz="1200" b="1">
-                <a:solidFill>
-                  <a:srgbClr val="0F1E36"/>
-                </a:solidFill>
-              </a:defRPr>
-            </a:pPr>
-            <a:r>
-              <a:t>2. Cybersecurity is an Organizational Culture, Not Merely a Perimeter Firewall</a:t>
-            </a:r>
-          </a:p>
-          <a:p>
-            <a:pPr>
-              <a:defRPr sz="950">
+              <a:defRPr sz="1100" b="1">
+                <a:solidFill>
+                  <a:srgbClr val="004E96"/>
+                </a:solidFill>
+              </a:defRPr>
+            </a:pPr>
+            <a:r>
+              <a:t>Resolution Implemented:</a:t>
+            </a:r>
+          </a:p>
+          <a:p>
+            <a:pPr>
+              <a:spcAft>
+                <a:spcPts val="300"/>
+              </a:spcAft>
+              <a:defRPr sz="900">
                 <a:solidFill>
                   <a:srgbClr val="1E293B"/>
                 </a:solidFill>
               </a:defRPr>
             </a:pPr>
             <a:r>
-              <a:t>A majority of enterprise security breaches stem from misconfigured access rights, third-party vendor credentials, or unpatched endpoints. Implementing Zero Trust Network Access (ZTNA), strict least-privilege RBAC, and continuous security hygiene reviews protects the organization far more effectively than traditional boundary defenses alone.</a:t>
-            </a:r>
-          </a:p>
-        </p:txBody>
-      </p:sp>
-      <p:sp>
-        <p:nvSpPr>
-          <p:cNvPr id="12" name="Rounded Rectangle 11"/>
+              <a:t>Leveraged Voxelforge AI and ayam3d retopology algorithms to automate progressive LOD (Level of Detail) mesh compression and texture atlas baking, paired with client-side WebGL progressive loading.</a:t>
+            </a:r>
+          </a:p>
+          <a:p>
+            <a:pPr>
+              <a:defRPr sz="900" b="1">
+                <a:solidFill>
+                  <a:srgbClr val="109563"/>
+                </a:solidFill>
+              </a:defRPr>
+            </a:pPr>
+            <a:r>
+              <a:t>Result: Impact: Slashed 3D asset file sizes by 75%, achieved 60 FPS rendering on mobile devices without expensive GPU workstations.</a:t>
+            </a:r>
+          </a:p>
+        </p:txBody>
+      </p:sp>
+      <p:sp>
+        <p:nvSpPr>
+          <p:cNvPr id="14" name="Rounded Rectangle 13"/>
           <p:cNvSpPr/>
           <p:nvPr/>
         </p:nvSpPr>
         <p:spPr>
           <a:xfrm>
-            <a:off x="731520" y="3840480"/>
-            <a:ext cx="10728655" cy="1051560"/>
+            <a:off x="731520" y="4681728"/>
+            <a:ext cx="10728655" cy="1481328"/>
           </a:xfrm>
           <a:prstGeom prst="roundRect">
             <a:avLst/>
@@ -10380,20 +11224,70 @@
       </p:sp>
       <p:sp>
         <p:nvSpPr>
-          <p:cNvPr id="13" name="Rectangle 12"/>
+          <p:cNvPr id="15" name="TextBox 14"/>
+          <p:cNvSpPr txBox="1"/>
+          <p:nvPr/>
+        </p:nvSpPr>
+        <p:spPr>
+          <a:xfrm>
+            <a:off x="914400" y="4791456"/>
+            <a:ext cx="4389120" cy="1280160"/>
+          </a:xfrm>
+          <a:prstGeom prst="rect">
+            <a:avLst/>
+          </a:prstGeom>
+          <a:noFill/>
+        </p:spPr>
+        <p:txBody>
+          <a:bodyPr wrap="square">
+            <a:spAutoFit/>
+          </a:bodyPr>
+          <a:lstStyle/>
+          <a:p>
+            <a:pPr>
+              <a:spcAft>
+                <a:spcPts val="300"/>
+              </a:spcAft>
+              <a:defRPr sz="1100" b="1">
+                <a:solidFill>
+                  <a:srgbClr val="CC2229"/>
+                </a:solidFill>
+              </a:defRPr>
+            </a:pPr>
+            <a:r>
+              <a:t>Challenge 3: Complex Multi-Vendor Dependencies &amp; SLA Enforcement Gaps</a:t>
+            </a:r>
+          </a:p>
+          <a:p>
+            <a:pPr>
+              <a:defRPr sz="900">
+                <a:solidFill>
+                  <a:srgbClr val="1E293B"/>
+                </a:solidFill>
+              </a:defRPr>
+            </a:pPr>
+            <a:r>
+              <a:t>Dispersed third-party cloud tools, software licenses, and hardware vendors lacked centralized SLA tracking, resulting in finger-pointing during service degradation and creeping monthly cloud expenditure.</a:t>
+            </a:r>
+          </a:p>
+        </p:txBody>
+      </p:sp>
+      <p:sp>
+        <p:nvSpPr>
+          <p:cNvPr id="16" name="Rectangle 15"/>
           <p:cNvSpPr/>
           <p:nvPr/>
         </p:nvSpPr>
         <p:spPr>
           <a:xfrm>
-            <a:off x="731520" y="3840480"/>
-            <a:ext cx="109728" cy="1051560"/>
+            <a:off x="5486400" y="4818888"/>
+            <a:ext cx="18288" cy="1188720"/>
           </a:xfrm>
           <a:prstGeom prst="rect">
             <a:avLst/>
           </a:prstGeom>
           <a:solidFill>
-            <a:srgbClr val="004E96"/>
+            <a:srgbClr val="E2E8F0"/>
           </a:solidFill>
           <a:ln>
             <a:noFill/>
@@ -10423,14 +11317,14 @@
       </p:sp>
       <p:sp>
         <p:nvSpPr>
-          <p:cNvPr id="14" name="TextBox 13"/>
+          <p:cNvPr id="17" name="TextBox 16"/>
           <p:cNvSpPr txBox="1"/>
           <p:nvPr/>
         </p:nvSpPr>
         <p:spPr>
           <a:xfrm>
-            <a:off x="1051560" y="3950208"/>
-            <a:ext cx="10149840" cy="868680"/>
+            <a:off x="5669280" y="4791456"/>
+            <a:ext cx="5577840" cy="1280160"/>
           </a:xfrm>
           <a:prstGeom prst="rect">
             <a:avLst/>
@@ -10445,166 +11339,43 @@
           <a:p>
             <a:pPr>
               <a:spcAft>
-                <a:spcPts val="400"/>
+                <a:spcPts val="200"/>
               </a:spcAft>
-              <a:defRPr sz="1200" b="1">
-                <a:solidFill>
-                  <a:srgbClr val="0F1E36"/>
-                </a:solidFill>
-              </a:defRPr>
-            </a:pPr>
-            <a:r>
-              <a:t>3. Proactive Telemetry &amp; Observability Prevents Operational Crises</a:t>
-            </a:r>
-          </a:p>
-          <a:p>
-            <a:pPr>
-              <a:defRPr sz="950">
+              <a:defRPr sz="1100" b="1">
+                <a:solidFill>
+                  <a:srgbClr val="004E96"/>
+                </a:solidFill>
+              </a:defRPr>
+            </a:pPr>
+            <a:r>
+              <a:t>Resolution Implemented:</a:t>
+            </a:r>
+          </a:p>
+          <a:p>
+            <a:pPr>
+              <a:spcAft>
+                <a:spcPts val="300"/>
+              </a:spcAft>
+              <a:defRPr sz="900">
                 <a:solidFill>
                   <a:srgbClr val="1E293B"/>
                 </a:solidFill>
               </a:defRPr>
             </a:pPr>
             <a:r>
-              <a:t>Waiting for users to report an outage is a failed IT strategy. Instituting synthetic transactions, automated latency monitoring, CPU/memory threshold alerts, and automated runbooks allows IT operations to resolve 80% of potential incidents before end users or project sites notice any disruption.</a:t>
-            </a:r>
-          </a:p>
-        </p:txBody>
-      </p:sp>
-      <p:sp>
-        <p:nvSpPr>
-          <p:cNvPr id="15" name="Rounded Rectangle 14"/>
-          <p:cNvSpPr/>
-          <p:nvPr/>
-        </p:nvSpPr>
-        <p:spPr>
-          <a:xfrm>
-            <a:off x="731520" y="5029200"/>
-            <a:ext cx="10728655" cy="1051560"/>
-          </a:xfrm>
-          <a:prstGeom prst="roundRect">
-            <a:avLst/>
-          </a:prstGeom>
-          <a:solidFill>
-            <a:srgbClr val="FFFFFF"/>
-          </a:solidFill>
-          <a:ln w="12700">
-            <a:solidFill>
-              <a:srgbClr val="E2E8F0"/>
-            </a:solidFill>
-          </a:ln>
-        </p:spPr>
-        <p:style>
-          <a:lnRef idx="1">
-            <a:schemeClr val="accent1"/>
-          </a:lnRef>
-          <a:fillRef idx="3">
-            <a:schemeClr val="accent1"/>
-          </a:fillRef>
-          <a:effectRef idx="2">
-            <a:schemeClr val="accent1"/>
-          </a:effectRef>
-          <a:fontRef idx="minor">
-            <a:schemeClr val="lt1"/>
-          </a:fontRef>
-        </p:style>
-        <p:txBody>
-          <a:bodyPr rtlCol="0" anchor="ctr"/>
-          <a:lstStyle/>
-          <a:p>
-            <a:pPr algn="ctr"/>
-          </a:p>
-        </p:txBody>
-      </p:sp>
-      <p:sp>
-        <p:nvSpPr>
-          <p:cNvPr id="16" name="Rectangle 15"/>
-          <p:cNvSpPr/>
-          <p:nvPr/>
-        </p:nvSpPr>
-        <p:spPr>
-          <a:xfrm>
-            <a:off x="731520" y="5029200"/>
-            <a:ext cx="109728" cy="1051560"/>
-          </a:xfrm>
-          <a:prstGeom prst="rect">
-            <a:avLst/>
-          </a:prstGeom>
-          <a:solidFill>
-            <a:srgbClr val="004E96"/>
-          </a:solidFill>
-          <a:ln>
-            <a:noFill/>
-          </a:ln>
-        </p:spPr>
-        <p:style>
-          <a:lnRef idx="1">
-            <a:schemeClr val="accent1"/>
-          </a:lnRef>
-          <a:fillRef idx="3">
-            <a:schemeClr val="accent1"/>
-          </a:fillRef>
-          <a:effectRef idx="2">
-            <a:schemeClr val="accent1"/>
-          </a:effectRef>
-          <a:fontRef idx="minor">
-            <a:schemeClr val="lt1"/>
-          </a:fontRef>
-        </p:style>
-        <p:txBody>
-          <a:bodyPr rtlCol="0" anchor="ctr"/>
-          <a:lstStyle/>
-          <a:p>
-            <a:pPr algn="ctr"/>
-          </a:p>
-        </p:txBody>
-      </p:sp>
-      <p:sp>
-        <p:nvSpPr>
-          <p:cNvPr id="17" name="TextBox 16"/>
-          <p:cNvSpPr txBox="1"/>
-          <p:nvPr/>
-        </p:nvSpPr>
-        <p:spPr>
-          <a:xfrm>
-            <a:off x="1051560" y="5138928"/>
-            <a:ext cx="10149840" cy="868680"/>
-          </a:xfrm>
-          <a:prstGeom prst="rect">
-            <a:avLst/>
-          </a:prstGeom>
-          <a:noFill/>
-        </p:spPr>
-        <p:txBody>
-          <a:bodyPr wrap="square">
-            <a:spAutoFit/>
-          </a:bodyPr>
-          <a:lstStyle/>
-          <a:p>
-            <a:pPr>
-              <a:spcAft>
-                <a:spcPts val="400"/>
-              </a:spcAft>
-              <a:defRPr sz="1200" b="1">
-                <a:solidFill>
-                  <a:srgbClr val="0F1E36"/>
-                </a:solidFill>
-              </a:defRPr>
-            </a:pPr>
-            <a:r>
-              <a:t>4. Technical Leadership Requires Bridging Field Realities with Executive Strategy</a:t>
-            </a:r>
-          </a:p>
-          <a:p>
-            <a:pPr>
-              <a:defRPr sz="950">
-                <a:solidFill>
-                  <a:srgbClr val="1E293B"/>
-                </a:solidFill>
-              </a:defRPr>
-            </a:pPr>
-            <a:r>
-              <a:t>Successful IT leadership is not about adopting technology for its own sake; it is about solving concrete business pain points. Spending time understanding how field teams, site managers, and business stakeholders operate ensures IT investments deliver measurable productivity, safety, and financial returns.</a:t>
+              <a:t>Instituted a centralized IT Governance &amp; SLA Dashboard with automated latency/uptime telemetry. Standardized vendor contract SLAs with penalty clauses, monthly executive reviews, and automated idle resource termination.</a:t>
+            </a:r>
+          </a:p>
+          <a:p>
+            <a:pPr>
+              <a:defRPr sz="900" b="1">
+                <a:solidFill>
+                  <a:srgbClr val="109563"/>
+                </a:solidFill>
+              </a:defRPr>
+            </a:pPr>
+            <a:r>
+              <a:t>Result: Impact: Slashed mean-time-to-resolution (MTTR) by 40% and trimmed recurring cloud/vendor spend by 22%.</a:t>
             </a:r>
           </a:p>
         </p:txBody>
@@ -10639,7 +11410,7 @@
               </a:defRPr>
             </a:pPr>
             <a:r>
-              <a:t>Obayashi Corporation · Senior Manager – IT Candidate Portfolio | Maheshchandra Hegde · Page 8 of 11</a:t>
+              <a:t>Obayashi Corporation · Senior Manager – IT Candidate Portfolio | Maheshchandra Hegde · Slide 8 of 12</a:t>
             </a:r>
           </a:p>
         </p:txBody>
@@ -10735,7 +11506,7 @@
               </a:defRPr>
             </a:pPr>
             <a:r>
-              <a:t>STRATEGIC VISION FOR OBAYASHI</a:t>
+              <a:t>OPERATIONAL PHILOSOPHY</a:t>
             </a:r>
           </a:p>
         </p:txBody>
@@ -10763,14 +11534,14 @@
           <a:lstStyle/>
           <a:p>
             <a:pPr>
-              <a:defRPr sz="2200" b="1">
+              <a:defRPr sz="2100" b="1">
                 <a:solidFill>
                   <a:srgbClr val="0F1E36"/>
                 </a:solidFill>
               </a:defRPr>
             </a:pPr>
             <a:r>
-              <a:t>Suggestions for Future Process Improvements at Obayashi Corporation</a:t>
+              <a:t>Lessons Learned &amp; Enterprise Best Practices</a:t>
             </a:r>
           </a:p>
         </p:txBody>
@@ -10827,7 +11598,7 @@
         <p:spPr>
           <a:xfrm>
             <a:off x="731520" y="1463040"/>
-            <a:ext cx="10728655" cy="1078992"/>
+            <a:ext cx="10728655" cy="1051560"/>
           </a:xfrm>
           <a:prstGeom prst="roundRect">
             <a:avLst/>
@@ -10865,14 +11636,57 @@
       </p:sp>
       <p:sp>
         <p:nvSpPr>
-          <p:cNvPr id="7" name="TextBox 6"/>
+          <p:cNvPr id="7" name="Rectangle 6"/>
+          <p:cNvSpPr/>
+          <p:nvPr/>
+        </p:nvSpPr>
+        <p:spPr>
+          <a:xfrm>
+            <a:off x="731520" y="1463040"/>
+            <a:ext cx="109728" cy="1051560"/>
+          </a:xfrm>
+          <a:prstGeom prst="rect">
+            <a:avLst/>
+          </a:prstGeom>
+          <a:solidFill>
+            <a:srgbClr val="004E96"/>
+          </a:solidFill>
+          <a:ln>
+            <a:noFill/>
+          </a:ln>
+        </p:spPr>
+        <p:style>
+          <a:lnRef idx="1">
+            <a:schemeClr val="accent1"/>
+          </a:lnRef>
+          <a:fillRef idx="3">
+            <a:schemeClr val="accent1"/>
+          </a:fillRef>
+          <a:effectRef idx="2">
+            <a:schemeClr val="accent1"/>
+          </a:effectRef>
+          <a:fontRef idx="minor">
+            <a:schemeClr val="lt1"/>
+          </a:fontRef>
+        </p:style>
+        <p:txBody>
+          <a:bodyPr rtlCol="0" anchor="ctr"/>
+          <a:lstStyle/>
+          <a:p>
+            <a:pPr algn="ctr"/>
+          </a:p>
+        </p:txBody>
+      </p:sp>
+      <p:sp>
+        <p:nvSpPr>
+          <p:cNvPr id="8" name="TextBox 7"/>
           <p:cNvSpPr txBox="1"/>
           <p:nvPr/>
         </p:nvSpPr>
         <p:spPr>
           <a:xfrm>
-            <a:off x="960120" y="1554480"/>
-            <a:ext cx="10241280" cy="914400"/>
+            <a:off x="1051560" y="1572768"/>
+            <a:ext cx="10149840" cy="868680"/>
           </a:xfrm>
           <a:prstGeom prst="rect">
             <a:avLst/>
@@ -10887,57 +11701,42 @@
           <a:p>
             <a:pPr>
               <a:spcAft>
-                <a:spcPts val="200"/>
+                <a:spcPts val="400"/>
               </a:spcAft>
               <a:defRPr sz="1200" b="1">
                 <a:solidFill>
-                  <a:srgbClr val="004E96"/>
-                </a:solidFill>
-              </a:defRPr>
-            </a:pPr>
-            <a:r>
-              <a:t>1. Standardized Construction Site 'IT-in-a-Box' Rapid Deployment Kit</a:t>
-            </a:r>
-          </a:p>
-          <a:p>
-            <a:pPr>
-              <a:spcAft>
-                <a:spcPts val="200"/>
-              </a:spcAft>
-              <a:defRPr sz="950" b="1">
+                  <a:srgbClr val="0F1E36"/>
+                </a:solidFill>
+              </a:defRPr>
+            </a:pPr>
+            <a:r>
+              <a:t>1. Resilience Must Be Engineered into the Architecture, Not Added as an Afterthought</a:t>
+            </a:r>
+          </a:p>
+          <a:p>
+            <a:pPr>
+              <a:defRPr sz="950">
                 <a:solidFill>
                   <a:srgbClr val="1E293B"/>
                 </a:solidFill>
               </a:defRPr>
             </a:pPr>
             <a:r>
-              <a:t>Opportunity: Setting up reliable IT infrastructure at new construction sites often takes weeks and suffers from inconsistent hardware and security standards.</a:t>
-            </a:r>
-          </a:p>
-          <a:p>
-            <a:pPr>
-              <a:defRPr sz="900">
-                <a:solidFill>
-                  <a:srgbClr val="64748B"/>
-                </a:solidFill>
-              </a:defRPr>
-            </a:pPr>
-            <a:r>
-              <a:t>Proposed Solution: Design a containerized 'Site IT Kit' combining dual-SIM 5G/satellite SD-WAN routers, local edge server/caching node, pre-configured biometric access control, and ruggedized Wi-Fi 6 access points. Enables full site IT commissioning within 48 hours with automated zero-touch provisioning.</a:t>
-            </a:r>
-          </a:p>
-        </p:txBody>
-      </p:sp>
-      <p:sp>
-        <p:nvSpPr>
-          <p:cNvPr id="8" name="Rounded Rectangle 7"/>
+              <a:t>In critical operations (whether hospitals or construction job sites), network connectivity and hardware will inevitably experience degradation. Systems must be designed with graceful degradation, local caching, and deterministic reconciliation rather than assuming continuous, low-latency broadband.</a:t>
+            </a:r>
+          </a:p>
+        </p:txBody>
+      </p:sp>
+      <p:sp>
+        <p:nvSpPr>
+          <p:cNvPr id="9" name="Rounded Rectangle 8"/>
           <p:cNvSpPr/>
           <p:nvPr/>
         </p:nvSpPr>
         <p:spPr>
           <a:xfrm>
             <a:off x="731520" y="2651760"/>
-            <a:ext cx="10728655" cy="1078992"/>
+            <a:ext cx="10728655" cy="1051560"/>
           </a:xfrm>
           <a:prstGeom prst="roundRect">
             <a:avLst/>
@@ -10975,14 +11774,57 @@
       </p:sp>
       <p:sp>
         <p:nvSpPr>
-          <p:cNvPr id="9" name="TextBox 8"/>
+          <p:cNvPr id="10" name="Rectangle 9"/>
+          <p:cNvSpPr/>
+          <p:nvPr/>
+        </p:nvSpPr>
+        <p:spPr>
+          <a:xfrm>
+            <a:off x="731520" y="2651760"/>
+            <a:ext cx="109728" cy="1051560"/>
+          </a:xfrm>
+          <a:prstGeom prst="rect">
+            <a:avLst/>
+          </a:prstGeom>
+          <a:solidFill>
+            <a:srgbClr val="004E96"/>
+          </a:solidFill>
+          <a:ln>
+            <a:noFill/>
+          </a:ln>
+        </p:spPr>
+        <p:style>
+          <a:lnRef idx="1">
+            <a:schemeClr val="accent1"/>
+          </a:lnRef>
+          <a:fillRef idx="3">
+            <a:schemeClr val="accent1"/>
+          </a:fillRef>
+          <a:effectRef idx="2">
+            <a:schemeClr val="accent1"/>
+          </a:effectRef>
+          <a:fontRef idx="minor">
+            <a:schemeClr val="lt1"/>
+          </a:fontRef>
+        </p:style>
+        <p:txBody>
+          <a:bodyPr rtlCol="0" anchor="ctr"/>
+          <a:lstStyle/>
+          <a:p>
+            <a:pPr algn="ctr"/>
+          </a:p>
+        </p:txBody>
+      </p:sp>
+      <p:sp>
+        <p:nvSpPr>
+          <p:cNvPr id="11" name="TextBox 10"/>
           <p:cNvSpPr txBox="1"/>
           <p:nvPr/>
         </p:nvSpPr>
         <p:spPr>
           <a:xfrm>
-            <a:off x="960120" y="2743200"/>
-            <a:ext cx="10241280" cy="914400"/>
+            <a:off x="1051560" y="2761488"/>
+            <a:ext cx="10149840" cy="868680"/>
           </a:xfrm>
           <a:prstGeom prst="rect">
             <a:avLst/>
@@ -10997,57 +11839,42 @@
           <a:p>
             <a:pPr>
               <a:spcAft>
-                <a:spcPts val="200"/>
+                <a:spcPts val="400"/>
               </a:spcAft>
               <a:defRPr sz="1200" b="1">
                 <a:solidFill>
-                  <a:srgbClr val="004E96"/>
-                </a:solidFill>
-              </a:defRPr>
-            </a:pPr>
-            <a:r>
-              <a:t>2. Cloud BIM &amp; Common Data Environment (CDE) Acceleration Node</a:t>
-            </a:r>
-          </a:p>
-          <a:p>
-            <a:pPr>
-              <a:spcAft>
-                <a:spcPts val="200"/>
-              </a:spcAft>
-              <a:defRPr sz="950" b="1">
+                  <a:srgbClr val="0F1E36"/>
+                </a:solidFill>
+              </a:defRPr>
+            </a:pPr>
+            <a:r>
+              <a:t>2. Cybersecurity is an Organizational Culture, Not Merely a Perimeter Firewall</a:t>
+            </a:r>
+          </a:p>
+          <a:p>
+            <a:pPr>
+              <a:defRPr sz="950">
                 <a:solidFill>
                   <a:srgbClr val="1E293B"/>
                 </a:solidFill>
               </a:defRPr>
             </a:pPr>
             <a:r>
-              <a:t>Opportunity: Field teams struggle downloading and rendering multi-gigabyte 3D BIM models, CAD drawings, and point clouds over remote job-site cellular connections.</a:t>
-            </a:r>
-          </a:p>
-          <a:p>
-            <a:pPr>
-              <a:defRPr sz="900">
-                <a:solidFill>
-                  <a:srgbClr val="64748B"/>
-                </a:solidFill>
-              </a:defRPr>
-            </a:pPr>
-            <a:r>
-              <a:t>Proposed Solution: Deploy localized edge-caching appliances paired with WebGL-based progressive 3D rendering (leveraging spatial engineering patterns). Site engineers view and markup complex 3D digital twins instantly without saturating job-site uplink bandwidth.</a:t>
-            </a:r>
-          </a:p>
-        </p:txBody>
-      </p:sp>
-      <p:sp>
-        <p:nvSpPr>
-          <p:cNvPr id="10" name="Rounded Rectangle 9"/>
+              <a:t>A majority of enterprise security breaches stem from misconfigured access rights, third-party vendor credentials, or unpatched endpoints. Implementing Zero Trust Network Access (ZTNA), strict least-privilege RBAC, and continuous security hygiene reviews protects the organization far more effectively than traditional boundary defenses alone.</a:t>
+            </a:r>
+          </a:p>
+        </p:txBody>
+      </p:sp>
+      <p:sp>
+        <p:nvSpPr>
+          <p:cNvPr id="12" name="Rounded Rectangle 11"/>
           <p:cNvSpPr/>
           <p:nvPr/>
         </p:nvSpPr>
         <p:spPr>
           <a:xfrm>
             <a:off x="731520" y="3840480"/>
-            <a:ext cx="10728655" cy="1078992"/>
+            <a:ext cx="10728655" cy="1051560"/>
           </a:xfrm>
           <a:prstGeom prst="roundRect">
             <a:avLst/>
@@ -11085,14 +11912,57 @@
       </p:sp>
       <p:sp>
         <p:nvSpPr>
-          <p:cNvPr id="11" name="TextBox 10"/>
+          <p:cNvPr id="13" name="Rectangle 12"/>
+          <p:cNvSpPr/>
+          <p:nvPr/>
+        </p:nvSpPr>
+        <p:spPr>
+          <a:xfrm>
+            <a:off x="731520" y="3840480"/>
+            <a:ext cx="109728" cy="1051560"/>
+          </a:xfrm>
+          <a:prstGeom prst="rect">
+            <a:avLst/>
+          </a:prstGeom>
+          <a:solidFill>
+            <a:srgbClr val="004E96"/>
+          </a:solidFill>
+          <a:ln>
+            <a:noFill/>
+          </a:ln>
+        </p:spPr>
+        <p:style>
+          <a:lnRef idx="1">
+            <a:schemeClr val="accent1"/>
+          </a:lnRef>
+          <a:fillRef idx="3">
+            <a:schemeClr val="accent1"/>
+          </a:fillRef>
+          <a:effectRef idx="2">
+            <a:schemeClr val="accent1"/>
+          </a:effectRef>
+          <a:fontRef idx="minor">
+            <a:schemeClr val="lt1"/>
+          </a:fontRef>
+        </p:style>
+        <p:txBody>
+          <a:bodyPr rtlCol="0" anchor="ctr"/>
+          <a:lstStyle/>
+          <a:p>
+            <a:pPr algn="ctr"/>
+          </a:p>
+        </p:txBody>
+      </p:sp>
+      <p:sp>
+        <p:nvSpPr>
+          <p:cNvPr id="14" name="TextBox 13"/>
           <p:cNvSpPr txBox="1"/>
           <p:nvPr/>
         </p:nvSpPr>
         <p:spPr>
           <a:xfrm>
-            <a:off x="960120" y="3931920"/>
-            <a:ext cx="10241280" cy="914400"/>
+            <a:off x="1051560" y="3950208"/>
+            <a:ext cx="10149840" cy="868680"/>
           </a:xfrm>
           <a:prstGeom prst="rect">
             <a:avLst/>
@@ -11107,57 +11977,42 @@
           <a:p>
             <a:pPr>
               <a:spcAft>
-                <a:spcPts val="200"/>
+                <a:spcPts val="400"/>
               </a:spcAft>
               <a:defRPr sz="1200" b="1">
                 <a:solidFill>
-                  <a:srgbClr val="004E96"/>
-                </a:solidFill>
-              </a:defRPr>
-            </a:pPr>
-            <a:r>
-              <a:t>3. Subcontractor Zero-Trust Security Mesh &amp; Automated Vendor Compliance</a:t>
-            </a:r>
-          </a:p>
-          <a:p>
-            <a:pPr>
-              <a:spcAft>
-                <a:spcPts val="200"/>
-              </a:spcAft>
-              <a:defRPr sz="950" b="1">
+                  <a:srgbClr val="0F1E36"/>
+                </a:solidFill>
+              </a:defRPr>
+            </a:pPr>
+            <a:r>
+              <a:t>3. Proactive Telemetry &amp; Observability Prevents Operational Crises</a:t>
+            </a:r>
+          </a:p>
+          <a:p>
+            <a:pPr>
+              <a:defRPr sz="950">
                 <a:solidFill>
                   <a:srgbClr val="1E293B"/>
                 </a:solidFill>
               </a:defRPr>
             </a:pPr>
             <a:r>
-              <a:t>Opportunity: General contractors interact with hundreds of specialized subcontractors and vendors, introducing major cybersecurity and intellectual property leakage risks.</a:t>
-            </a:r>
-          </a:p>
-          <a:p>
-            <a:pPr>
-              <a:defRPr sz="900">
-                <a:solidFill>
-                  <a:srgbClr val="64748B"/>
-                </a:solidFill>
-              </a:defRPr>
-            </a:pPr>
-            <a:r>
-              <a:t>Proposed Solution: Establish a cloud-native Zero-Trust Network Access (ZTNA) portal. Subcontractors access only designated project folders with time-bound credentials, multi-factor authentication, watermarked document viewers, and automated endpoint compliance checks.</a:t>
-            </a:r>
-          </a:p>
-        </p:txBody>
-      </p:sp>
-      <p:sp>
-        <p:nvSpPr>
-          <p:cNvPr id="12" name="Rounded Rectangle 11"/>
+              <a:t>Waiting for users to report an outage is a failed IT strategy. Instituting synthetic transactions, automated latency monitoring, CPU/memory threshold alerts, and automated runbooks allows IT operations to resolve 80% of potential incidents before end users or project sites notice any disruption.</a:t>
+            </a:r>
+          </a:p>
+        </p:txBody>
+      </p:sp>
+      <p:sp>
+        <p:nvSpPr>
+          <p:cNvPr id="15" name="Rounded Rectangle 14"/>
           <p:cNvSpPr/>
           <p:nvPr/>
         </p:nvSpPr>
         <p:spPr>
           <a:xfrm>
             <a:off x="731520" y="5029200"/>
-            <a:ext cx="10728655" cy="1078992"/>
+            <a:ext cx="10728655" cy="1051560"/>
           </a:xfrm>
           <a:prstGeom prst="roundRect">
             <a:avLst/>
@@ -11195,14 +12050,57 @@
       </p:sp>
       <p:sp>
         <p:nvSpPr>
-          <p:cNvPr id="13" name="TextBox 12"/>
+          <p:cNvPr id="16" name="Rectangle 15"/>
+          <p:cNvSpPr/>
+          <p:nvPr/>
+        </p:nvSpPr>
+        <p:spPr>
+          <a:xfrm>
+            <a:off x="731520" y="5029200"/>
+            <a:ext cx="109728" cy="1051560"/>
+          </a:xfrm>
+          <a:prstGeom prst="rect">
+            <a:avLst/>
+          </a:prstGeom>
+          <a:solidFill>
+            <a:srgbClr val="004E96"/>
+          </a:solidFill>
+          <a:ln>
+            <a:noFill/>
+          </a:ln>
+        </p:spPr>
+        <p:style>
+          <a:lnRef idx="1">
+            <a:schemeClr val="accent1"/>
+          </a:lnRef>
+          <a:fillRef idx="3">
+            <a:schemeClr val="accent1"/>
+          </a:fillRef>
+          <a:effectRef idx="2">
+            <a:schemeClr val="accent1"/>
+          </a:effectRef>
+          <a:fontRef idx="minor">
+            <a:schemeClr val="lt1"/>
+          </a:fontRef>
+        </p:style>
+        <p:txBody>
+          <a:bodyPr rtlCol="0" anchor="ctr"/>
+          <a:lstStyle/>
+          <a:p>
+            <a:pPr algn="ctr"/>
+          </a:p>
+        </p:txBody>
+      </p:sp>
+      <p:sp>
+        <p:nvSpPr>
+          <p:cNvPr id="17" name="TextBox 16"/>
           <p:cNvSpPr txBox="1"/>
           <p:nvPr/>
         </p:nvSpPr>
         <p:spPr>
           <a:xfrm>
-            <a:off x="960120" y="5120640"/>
-            <a:ext cx="10241280" cy="914400"/>
+            <a:off x="1051560" y="5138928"/>
+            <a:ext cx="10149840" cy="868680"/>
           </a:xfrm>
           <a:prstGeom prst="rect">
             <a:avLst/>
@@ -11217,50 +12115,35 @@
           <a:p>
             <a:pPr>
               <a:spcAft>
-                <a:spcPts val="200"/>
+                <a:spcPts val="400"/>
               </a:spcAft>
               <a:defRPr sz="1200" b="1">
                 <a:solidFill>
-                  <a:srgbClr val="004E96"/>
-                </a:solidFill>
-              </a:defRPr>
-            </a:pPr>
-            <a:r>
-              <a:t>4. AIOps for Predictive IT Maintenance &amp; Automated Disaster Recovery (DR)</a:t>
-            </a:r>
-          </a:p>
-          <a:p>
-            <a:pPr>
-              <a:spcAft>
-                <a:spcPts val="200"/>
-              </a:spcAft>
-              <a:defRPr sz="950" b="1">
+                  <a:srgbClr val="0F1E36"/>
+                </a:solidFill>
+              </a:defRPr>
+            </a:pPr>
+            <a:r>
+              <a:t>4. Bridging 3D Engineering Realities with Corporate IT Strategy</a:t>
+            </a:r>
+          </a:p>
+          <a:p>
+            <a:pPr>
+              <a:defRPr sz="950">
                 <a:solidFill>
                   <a:srgbClr val="1E293B"/>
                 </a:solidFill>
               </a:defRPr>
             </a:pPr>
             <a:r>
-              <a:t>Opportunity: Unplanned server outages, ISP disconnections, or backup failures at remote regional hubs disrupt critical construction scheduling and bid deadlines.</a:t>
-            </a:r>
-          </a:p>
-          <a:p>
-            <a:pPr>
-              <a:defRPr sz="900">
-                <a:solidFill>
-                  <a:srgbClr val="64748B"/>
-                </a:solidFill>
-              </a:defRPr>
-            </a:pPr>
-            <a:r>
-              <a:t>Proposed Solution: Implement AI-assisted log analysis and telemetry to detect early indicators of disk failure, bandwidth saturation, or cyber anomalies. Pair with automated immutable cloud backups (ransomware-proof) and scheduled push-button disaster recovery failover drills.</a:t>
-            </a:r>
-          </a:p>
-        </p:txBody>
-      </p:sp>
-      <p:sp>
-        <p:nvSpPr>
-          <p:cNvPr id="14" name="TextBox 13"/>
+              <a:t>In modern engineering corporations, IT is no longer just back-office software; it is the backbone for heavy 3D CAD/BIM pipelines, digital twins, and job-site spatial data. IT leadership must understand 3D data workflows to provide infrastructure that accelerates rather than slows down engineering production.</a:t>
+            </a:r>
+          </a:p>
+        </p:txBody>
+      </p:sp>
+      <p:sp>
+        <p:nvSpPr>
+          <p:cNvPr id="18" name="TextBox 17"/>
           <p:cNvSpPr txBox="1"/>
           <p:nvPr/>
         </p:nvSpPr>
@@ -11288,7 +12171,7 @@
               </a:defRPr>
             </a:pPr>
             <a:r>
-              <a:t>Obayashi Corporation · Senior Manager – IT Candidate Portfolio | Maheshchandra Hegde · Page 9 of 11</a:t>
+              <a:t>Obayashi Corporation · Senior Manager – IT Candidate Portfolio | Maheshchandra Hegde · Slide 9 of 12</a:t>
             </a:r>
           </a:p>
         </p:txBody>

--- a/obayashi_it_presentation/Obayashi_Senior_Manager_IT_Presentation_Maheshchandra_Hegde.pptx
+++ b/obayashi_it_presentation/Obayashi_Senior_Manager_IT_Presentation_Maheshchandra_Hegde.pptx
@@ -16,7 +16,6 @@
     <p:sldId id="264" r:id="rId15"/>
     <p:sldId id="265" r:id="rId16"/>
     <p:sldId id="266" r:id="rId17"/>
-    <p:sldId id="267" r:id="rId18"/>
   </p:sldIdLst>
   <p:sldSz cx="12191695" cy="6858000" type="screen4x3"/>
   <p:notesSz cx="6858000" cy="9144000"/>
@@ -3114,7 +3113,7 @@
             <a:avLst/>
           </a:prstGeom>
           <a:solidFill>
-            <a:srgbClr val="0F1E36"/>
+            <a:srgbClr val="0F172A"/>
           </a:solidFill>
           <a:ln>
             <a:noFill/>
@@ -3150,14 +3149,14 @@
         </p:nvSpPr>
         <p:spPr>
           <a:xfrm>
-            <a:off x="731520" y="1097280"/>
-            <a:ext cx="274320" cy="4663440"/>
+            <a:off x="731520" y="1188720"/>
+            <a:ext cx="228600" cy="4389120"/>
           </a:xfrm>
           <a:prstGeom prst="rect">
             <a:avLst/>
           </a:prstGeom>
           <a:solidFill>
-            <a:srgbClr val="CC2229"/>
+            <a:srgbClr val="0284C7"/>
           </a:solidFill>
           <a:ln>
             <a:noFill/>
@@ -3193,8 +3192,8 @@
         </p:nvSpPr>
         <p:spPr>
           <a:xfrm>
-            <a:off x="1280160" y="1188720"/>
-            <a:ext cx="10058400" cy="2926080"/>
+            <a:off x="1234440" y="1188720"/>
+            <a:ext cx="10241280" cy="3108960"/>
           </a:xfrm>
           <a:prstGeom prst="rect">
             <a:avLst/>
@@ -3209,16 +3208,31 @@
           <a:p>
             <a:pPr>
               <a:spcAft>
-                <a:spcPts val="1400"/>
+                <a:spcPts val="1000"/>
               </a:spcAft>
-              <a:defRPr sz="1300" b="1">
-                <a:solidFill>
-                  <a:srgbClr val="94A3B8"/>
-                </a:solidFill>
-              </a:defRPr>
-            </a:pPr>
-            <a:r>
-              <a:t>OBAYASHI CORPORATION  |  FINAL INTERVIEW SUBMISSION</a:t>
+              <a:defRPr sz="1200" b="1">
+                <a:solidFill>
+                  <a:srgbClr val="38BDF8"/>
+                </a:solidFill>
+              </a:defRPr>
+            </a:pPr>
+            <a:r>
+              <a:t>TECHNICAL LEADERSHIP &amp; WORK EXPERIENCE PRESENTATION</a:t>
+            </a:r>
+          </a:p>
+          <a:p>
+            <a:pPr>
+              <a:spcAft>
+                <a:spcPts val="600"/>
+              </a:spcAft>
+              <a:defRPr sz="3200" b="1">
+                <a:solidFill>
+                  <a:srgbClr val="FFFFFF"/>
+                </a:solidFill>
+              </a:defRPr>
+            </a:pPr>
+            <a:r>
+              <a:t>Maheshchandra Hegde</a:t>
             </a:r>
           </a:p>
           <a:p>
@@ -3226,41 +3240,30 @@
               <a:spcAft>
                 <a:spcPts val="1200"/>
               </a:spcAft>
-              <a:defRPr sz="2800" b="1">
-                <a:solidFill>
-                  <a:srgbClr val="FFFFFF"/>
-                </a:solidFill>
-              </a:defRPr>
-            </a:pPr>
-            <a:r>
-              <a:t>Executive Work Experience &amp; Strategic IT Capability Presentation</a:t>
-            </a:r>
-          </a:p>
-          <a:p>
-            <a:pPr>
-              <a:spcAft>
-                <a:spcPts val="800"/>
-              </a:spcAft>
               <a:defRPr sz="1700" b="1">
                 <a:solidFill>
-                  <a:srgbClr val="38BDF8"/>
-                </a:solidFill>
-              </a:defRPr>
-            </a:pPr>
-            <a:r>
-              <a:t>Candidate: Maheshchandra Hegde  |  Position: Senior Manager – IT</a:t>
-            </a:r>
-          </a:p>
-          <a:p>
-            <a:pPr>
-              <a:defRPr sz="1250">
-                <a:solidFill>
                   <a:srgbClr val="CBD5E1"/>
                 </a:solidFill>
               </a:defRPr>
             </a:pPr>
             <a:r>
-              <a:t>A comprehensive portfolio mapping enterprise technology leadership, mission-critical infrastructure, 3D visualization / spatial AI engineering (Voxelforge AI, ayam3d), and operational resilience to Obayashi's global engineering mandates.</a:t>
+              <a:t>Product Design Expert | UX Architect | Creative Technologist</a:t>
+            </a:r>
+          </a:p>
+          <a:p>
+            <a:pPr>
+              <a:defRPr sz="1150">
+                <a:solidFill>
+                  <a:srgbClr val="94A3B8"/>
+                </a:solidFill>
+              </a:defRPr>
+            </a:pPr>
+            <a:r>
+              <a:t>16+ years of technology experience delivering scalable enterprise frontend systems, high-reliability clinical platforms, offline-first architectures, and cutting-edge 3D spatial computing / generative 3D tools.</a:t>
+            </a:r>
+            <a:br/>
+            <a:r>
+              <a:t>Bangalore, India | hid.mahesh@gmail.com | +91 9535253329 / 7022407280 | hegdemahesh.in</a:t>
             </a:r>
           </a:p>
         </p:txBody>
@@ -3273,14 +3276,14 @@
         </p:nvSpPr>
         <p:spPr>
           <a:xfrm>
-            <a:off x="1280160" y="4480560"/>
+            <a:off x="1234440" y="4572000"/>
             <a:ext cx="2514600" cy="1234440"/>
           </a:xfrm>
           <a:prstGeom prst="roundRect">
             <a:avLst/>
           </a:prstGeom>
           <a:solidFill>
-            <a:srgbClr val="182B49"/>
+            <a:srgbClr val="182235"/>
           </a:solidFill>
           <a:ln w="12700">
             <a:solidFill>
@@ -3318,8 +3321,8 @@
         </p:nvSpPr>
         <p:spPr>
           <a:xfrm>
-            <a:off x="1417320" y="4617720"/>
-            <a:ext cx="2240280" cy="960120"/>
+            <a:off x="1371600" y="4681728"/>
+            <a:ext cx="2240280" cy="1014984"/>
           </a:xfrm>
           <a:prstGeom prst="rect">
             <a:avLst/>
@@ -3336,26 +3339,26 @@
               <a:spcAft>
                 <a:spcPts val="400"/>
               </a:spcAft>
-              <a:defRPr sz="1200" b="1">
+              <a:defRPr sz="1150" b="1">
                 <a:solidFill>
                   <a:srgbClr val="FFFFFF"/>
                 </a:solidFill>
               </a:defRPr>
             </a:pPr>
             <a:r>
-              <a:t>IT Operations &amp; Infra</a:t>
-            </a:r>
-          </a:p>
-          <a:p>
-            <a:pPr>
-              <a:defRPr sz="950">
+              <a:t>Scalable Enterprise Systems</a:t>
+            </a:r>
+          </a:p>
+          <a:p>
+            <a:pPr>
+              <a:defRPr sz="900">
                 <a:solidFill>
                   <a:srgbClr val="94A3B8"/>
                 </a:solidFill>
               </a:defRPr>
             </a:pPr>
             <a:r>
-              <a:t>High availability, hybrid cloud, disaster recovery &amp; multi-site continuity</a:t>
+              <a:t>Philips Healthcare (Cyient), Cisco Systems, enterprise web apps, micro-frontends</a:t>
             </a:r>
           </a:p>
         </p:txBody>
@@ -3368,14 +3371,14 @@
         </p:nvSpPr>
         <p:spPr>
           <a:xfrm>
-            <a:off x="4014216" y="4480560"/>
+            <a:off x="3968496" y="4572000"/>
             <a:ext cx="2514600" cy="1234440"/>
           </a:xfrm>
           <a:prstGeom prst="roundRect">
             <a:avLst/>
           </a:prstGeom>
           <a:solidFill>
-            <a:srgbClr val="182B49"/>
+            <a:srgbClr val="182235"/>
           </a:solidFill>
           <a:ln w="12700">
             <a:solidFill>
@@ -3413,8 +3416,8 @@
         </p:nvSpPr>
         <p:spPr>
           <a:xfrm>
-            <a:off x="4151376" y="4617720"/>
-            <a:ext cx="2240280" cy="960120"/>
+            <a:off x="4105656" y="4681728"/>
+            <a:ext cx="2240280" cy="1014984"/>
           </a:xfrm>
           <a:prstGeom prst="rect">
             <a:avLst/>
@@ -3431,26 +3434,26 @@
               <a:spcAft>
                 <a:spcPts val="400"/>
               </a:spcAft>
-              <a:defRPr sz="1200" b="1">
+              <a:defRPr sz="1150" b="1">
                 <a:solidFill>
                   <a:srgbClr val="FFFFFF"/>
                 </a:solidFill>
               </a:defRPr>
             </a:pPr>
             <a:r>
-              <a:t>Cybersecurity &amp; Risk</a:t>
-            </a:r>
-          </a:p>
-          <a:p>
-            <a:pPr>
-              <a:defRPr sz="950">
+              <a:t>Startup Founder &amp; Tech Director</a:t>
+            </a:r>
+          </a:p>
+          <a:p>
+            <a:pPr>
+              <a:defRPr sz="900">
                 <a:solidFill>
                   <a:srgbClr val="94A3B8"/>
                 </a:solidFill>
               </a:defRPr>
             </a:pPr>
             <a:r>
-              <a:t>Zero Trust, access controls, vulnerability mitigation &amp; ISO compliance</a:t>
+              <a:t>Technoyana (technoyana.in), Twitan.com (high-reliability sports OS), InnoBrik</a:t>
             </a:r>
           </a:p>
         </p:txBody>
@@ -3463,14 +3466,14 @@
         </p:nvSpPr>
         <p:spPr>
           <a:xfrm>
-            <a:off x="6748272" y="4480560"/>
+            <a:off x="6702552" y="4572000"/>
             <a:ext cx="2514600" cy="1234440"/>
           </a:xfrm>
           <a:prstGeom prst="roundRect">
             <a:avLst/>
           </a:prstGeom>
           <a:solidFill>
-            <a:srgbClr val="182B49"/>
+            <a:srgbClr val="182235"/>
           </a:solidFill>
           <a:ln w="12700">
             <a:solidFill>
@@ -3508,8 +3511,8 @@
         </p:nvSpPr>
         <p:spPr>
           <a:xfrm>
-            <a:off x="6885432" y="4617720"/>
-            <a:ext cx="2240280" cy="960120"/>
+            <a:off x="6839712" y="4681728"/>
+            <a:ext cx="2240280" cy="1014984"/>
           </a:xfrm>
           <a:prstGeom prst="rect">
             <a:avLst/>
@@ -3526,26 +3529,26 @@
               <a:spcAft>
                 <a:spcPts val="400"/>
               </a:spcAft>
-              <a:defRPr sz="1200" b="1">
+              <a:defRPr sz="1150" b="1">
                 <a:solidFill>
                   <a:srgbClr val="FFFFFF"/>
                 </a:solidFill>
               </a:defRPr>
             </a:pPr>
             <a:r>
-              <a:t>3D Visualization &amp; AI</a:t>
-            </a:r>
-          </a:p>
-          <a:p>
-            <a:pPr>
-              <a:defRPr sz="950">
+              <a:t>3D Spatial &amp; Generative AI</a:t>
+            </a:r>
+          </a:p>
+          <a:p>
+            <a:pPr>
+              <a:defRPr sz="900">
                 <a:solidFill>
                   <a:srgbClr val="94A3B8"/>
                 </a:solidFill>
               </a:defRPr>
             </a:pPr>
             <a:r>
-              <a:t>50+ 3D/CAD projects, Voxelforge AI, ayam3d, spatial digital twins</a:t>
+              <a:t>Voxelforge AI (srushtilabs.com/voxelforge), ayam3d, CAE flight simulation</a:t>
             </a:r>
           </a:p>
         </p:txBody>
@@ -3558,14 +3561,14 @@
         </p:nvSpPr>
         <p:spPr>
           <a:xfrm>
-            <a:off x="9482328" y="4480560"/>
+            <a:off x="9436608" y="4572000"/>
             <a:ext cx="2514600" cy="1234440"/>
           </a:xfrm>
           <a:prstGeom prst="roundRect">
             <a:avLst/>
           </a:prstGeom>
           <a:solidFill>
-            <a:srgbClr val="182B49"/>
+            <a:srgbClr val="182235"/>
           </a:solidFill>
           <a:ln w="12700">
             <a:solidFill>
@@ -3603,8 +3606,8 @@
         </p:nvSpPr>
         <p:spPr>
           <a:xfrm>
-            <a:off x="9619488" y="4617720"/>
-            <a:ext cx="2240280" cy="960120"/>
+            <a:off x="9573768" y="4681728"/>
+            <a:ext cx="2240280" cy="1014984"/>
           </a:xfrm>
           <a:prstGeom prst="rect">
             <a:avLst/>
@@ -3621,26 +3624,26 @@
               <a:spcAft>
                 <a:spcPts val="400"/>
               </a:spcAft>
-              <a:defRPr sz="1200" b="1">
+              <a:defRPr sz="1150" b="1">
                 <a:solidFill>
                   <a:srgbClr val="FFFFFF"/>
                 </a:solidFill>
               </a:defRPr>
             </a:pPr>
             <a:r>
-              <a:t>Vendor &amp; Budget Control</a:t>
-            </a:r>
-          </a:p>
-          <a:p>
-            <a:pPr>
-              <a:defRPr sz="950">
+              <a:t>Architectural Heritage</a:t>
+            </a:r>
+          </a:p>
+          <a:p>
+            <a:pPr>
+              <a:defRPr sz="900">
                 <a:solidFill>
                   <a:srgbClr val="94A3B8"/>
                 </a:solidFill>
               </a:defRPr>
             </a:pPr>
             <a:r>
-              <a:t>SLA governance, contract management, resource optimization &amp; CapEx/OpEx</a:t>
+              <a:t>Rooted in CAD &amp; 3D visualization assisting architect father; 50+ 3D projects delivered</a:t>
             </a:r>
           </a:p>
         </p:txBody>
@@ -3675,7 +3678,7 @@
               </a:defRPr>
             </a:pPr>
             <a:r>
-              <a:t>Obayashi Corporation · Senior Manager – IT Candidate Portfolio | Maheshchandra Hegde · Slide 1 of 12</a:t>
+              <a:t>Maheshchandra Hegde · Technical Work Experience &amp; Capability Presentation | Slide 1 of 11</a:t>
             </a:r>
           </a:p>
         </p:txBody>
@@ -3764,14 +3767,14 @@
           <a:lstStyle/>
           <a:p>
             <a:pPr>
-              <a:defRPr sz="1100" b="1">
-                <a:solidFill>
-                  <a:srgbClr val="004E96"/>
-                </a:solidFill>
-              </a:defRPr>
-            </a:pPr>
-            <a:r>
-              <a:t>STRATEGIC VISION FOR OBAYASHI</a:t>
+              <a:defRPr sz="1050" b="1">
+                <a:solidFill>
+                  <a:srgbClr val="0E7490"/>
+                </a:solidFill>
+              </a:defRPr>
+            </a:pPr>
+            <a:r>
+              <a:t>ENGINEERING PHILOSOPHY</a:t>
             </a:r>
           </a:p>
         </p:txBody>
@@ -3801,12 +3804,12 @@
             <a:pPr>
               <a:defRPr sz="2100" b="1">
                 <a:solidFill>
-                  <a:srgbClr val="0F1E36"/>
-                </a:solidFill>
-              </a:defRPr>
-            </a:pPr>
-            <a:r>
-              <a:t>Suggestions for Future Process Improvements at Obayashi Corporation</a:t>
+                  <a:srgbClr val="0F172A"/>
+                </a:solidFill>
+              </a:defRPr>
+            </a:pPr>
+            <a:r>
+              <a:t>Lessons Learned &amp; Core Engineering Best Practices</a:t>
             </a:r>
           </a:p>
         </p:txBody>
@@ -3863,7 +3866,7 @@
         <p:spPr>
           <a:xfrm>
             <a:off x="731520" y="1463040"/>
-            <a:ext cx="10728655" cy="1078992"/>
+            <a:ext cx="10728655" cy="1051560"/>
           </a:xfrm>
           <a:prstGeom prst="roundRect">
             <a:avLst/>
@@ -3901,14 +3904,57 @@
       </p:sp>
       <p:sp>
         <p:nvSpPr>
-          <p:cNvPr id="7" name="TextBox 6"/>
+          <p:cNvPr id="7" name="Rectangle 6"/>
+          <p:cNvSpPr/>
+          <p:nvPr/>
+        </p:nvSpPr>
+        <p:spPr>
+          <a:xfrm>
+            <a:off x="731520" y="1463040"/>
+            <a:ext cx="109728" cy="1051560"/>
+          </a:xfrm>
+          <a:prstGeom prst="rect">
+            <a:avLst/>
+          </a:prstGeom>
+          <a:solidFill>
+            <a:srgbClr val="0284C7"/>
+          </a:solidFill>
+          <a:ln>
+            <a:noFill/>
+          </a:ln>
+        </p:spPr>
+        <p:style>
+          <a:lnRef idx="1">
+            <a:schemeClr val="accent1"/>
+          </a:lnRef>
+          <a:fillRef idx="3">
+            <a:schemeClr val="accent1"/>
+          </a:fillRef>
+          <a:effectRef idx="2">
+            <a:schemeClr val="accent1"/>
+          </a:effectRef>
+          <a:fontRef idx="minor">
+            <a:schemeClr val="lt1"/>
+          </a:fontRef>
+        </p:style>
+        <p:txBody>
+          <a:bodyPr rtlCol="0" anchor="ctr"/>
+          <a:lstStyle/>
+          <a:p>
+            <a:pPr algn="ctr"/>
+          </a:p>
+        </p:txBody>
+      </p:sp>
+      <p:sp>
+        <p:nvSpPr>
+          <p:cNvPr id="8" name="TextBox 7"/>
           <p:cNvSpPr txBox="1"/>
           <p:nvPr/>
         </p:nvSpPr>
         <p:spPr>
           <a:xfrm>
-            <a:off x="960120" y="1554480"/>
-            <a:ext cx="10241280" cy="914400"/>
+            <a:off x="1051560" y="1572768"/>
+            <a:ext cx="10149840" cy="868680"/>
           </a:xfrm>
           <a:prstGeom prst="rect">
             <a:avLst/>
@@ -3923,57 +3969,42 @@
           <a:p>
             <a:pPr>
               <a:spcAft>
-                <a:spcPts val="200"/>
+                <a:spcPts val="400"/>
               </a:spcAft>
-              <a:defRPr sz="1150" b="1">
-                <a:solidFill>
-                  <a:srgbClr val="004E96"/>
-                </a:solidFill>
-              </a:defRPr>
-            </a:pPr>
-            <a:r>
-              <a:t>1. Standardized Construction Site 'IT-in-a-Box' Rapid Deployment Kit</a:t>
-            </a:r>
-          </a:p>
-          <a:p>
-            <a:pPr>
-              <a:spcAft>
-                <a:spcPts val="200"/>
-              </a:spcAft>
-              <a:defRPr sz="900" b="1">
+              <a:defRPr sz="1200" b="1">
+                <a:solidFill>
+                  <a:srgbClr val="0F172A"/>
+                </a:solidFill>
+              </a:defRPr>
+            </a:pPr>
+            <a:r>
+              <a:t>1. Involve Users Early Through Rapid Prototypes &amp; Iterative Feedback</a:t>
+            </a:r>
+          </a:p>
+          <a:p>
+            <a:pPr>
+              <a:defRPr sz="950">
                 <a:solidFill>
                   <a:srgbClr val="1E293B"/>
                 </a:solidFill>
               </a:defRPr>
             </a:pPr>
             <a:r>
-              <a:t>Opportunity: Setting up reliable IT infrastructure at new construction sites often takes weeks and suffers from inconsistent hardware and security standards.</a:t>
-            </a:r>
-          </a:p>
-          <a:p>
-            <a:pPr>
-              <a:defRPr sz="850">
-                <a:solidFill>
-                  <a:srgbClr val="64748B"/>
-                </a:solidFill>
-              </a:defRPr>
-            </a:pPr>
-            <a:r>
-              <a:t>Proposed Solution: Design a containerized 'Site IT Kit' combining dual-SIM 5G/satellite SD-WAN routers, local edge server/caching node, pre-configured biometric access control, and ruggedized Wi-Fi 6 access points. Enables full site IT commissioning within 48 hours with automated zero-touch provisioning.</a:t>
-            </a:r>
-          </a:p>
-        </p:txBody>
-      </p:sp>
-      <p:sp>
-        <p:nvSpPr>
-          <p:cNvPr id="8" name="Rounded Rectangle 7"/>
+              <a:t>From my days establishing design-to-code pipelines at ThoughtFocus to architecting clinical modules at Cyient, building early interactive prototypes with real users uncovers fundamental workflow flaws before expensive engineering code is written.</a:t>
+            </a:r>
+          </a:p>
+        </p:txBody>
+      </p:sp>
+      <p:sp>
+        <p:nvSpPr>
+          <p:cNvPr id="9" name="Rounded Rectangle 8"/>
           <p:cNvSpPr/>
           <p:nvPr/>
         </p:nvSpPr>
         <p:spPr>
           <a:xfrm>
             <a:off x="731520" y="2651760"/>
-            <a:ext cx="10728655" cy="1078992"/>
+            <a:ext cx="10728655" cy="1051560"/>
           </a:xfrm>
           <a:prstGeom prst="roundRect">
             <a:avLst/>
@@ -4011,14 +4042,57 @@
       </p:sp>
       <p:sp>
         <p:nvSpPr>
-          <p:cNvPr id="9" name="TextBox 8"/>
+          <p:cNvPr id="10" name="Rectangle 9"/>
+          <p:cNvSpPr/>
+          <p:nvPr/>
+        </p:nvSpPr>
+        <p:spPr>
+          <a:xfrm>
+            <a:off x="731520" y="2651760"/>
+            <a:ext cx="109728" cy="1051560"/>
+          </a:xfrm>
+          <a:prstGeom prst="rect">
+            <a:avLst/>
+          </a:prstGeom>
+          <a:solidFill>
+            <a:srgbClr val="0284C7"/>
+          </a:solidFill>
+          <a:ln>
+            <a:noFill/>
+          </a:ln>
+        </p:spPr>
+        <p:style>
+          <a:lnRef idx="1">
+            <a:schemeClr val="accent1"/>
+          </a:lnRef>
+          <a:fillRef idx="3">
+            <a:schemeClr val="accent1"/>
+          </a:fillRef>
+          <a:effectRef idx="2">
+            <a:schemeClr val="accent1"/>
+          </a:effectRef>
+          <a:fontRef idx="minor">
+            <a:schemeClr val="lt1"/>
+          </a:fontRef>
+        </p:style>
+        <p:txBody>
+          <a:bodyPr rtlCol="0" anchor="ctr"/>
+          <a:lstStyle/>
+          <a:p>
+            <a:pPr algn="ctr"/>
+          </a:p>
+        </p:txBody>
+      </p:sp>
+      <p:sp>
+        <p:nvSpPr>
+          <p:cNvPr id="11" name="TextBox 10"/>
           <p:cNvSpPr txBox="1"/>
           <p:nvPr/>
         </p:nvSpPr>
         <p:spPr>
           <a:xfrm>
-            <a:off x="960120" y="2743200"/>
-            <a:ext cx="10241280" cy="914400"/>
+            <a:off x="1051560" y="2761488"/>
+            <a:ext cx="10149840" cy="868680"/>
           </a:xfrm>
           <a:prstGeom prst="rect">
             <a:avLst/>
@@ -4033,57 +4107,42 @@
           <a:p>
             <a:pPr>
               <a:spcAft>
-                <a:spcPts val="200"/>
+                <a:spcPts val="400"/>
               </a:spcAft>
-              <a:defRPr sz="1150" b="1">
-                <a:solidFill>
-                  <a:srgbClr val="004E96"/>
-                </a:solidFill>
-              </a:defRPr>
-            </a:pPr>
-            <a:r>
-              <a:t>2. Cloud BIM &amp; Common Data Environment (CDE) Acceleration Node (Powered by Spatial 3D Tech)</a:t>
-            </a:r>
-          </a:p>
-          <a:p>
-            <a:pPr>
-              <a:spcAft>
-                <a:spcPts val="200"/>
-              </a:spcAft>
-              <a:defRPr sz="900" b="1">
+              <a:defRPr sz="1200" b="1">
+                <a:solidFill>
+                  <a:srgbClr val="0F172A"/>
+                </a:solidFill>
+              </a:defRPr>
+            </a:pPr>
+            <a:r>
+              <a:t>2. Design for Real-World Edge Conditions, Not Ideal Lab Environments</a:t>
+            </a:r>
+          </a:p>
+          <a:p>
+            <a:pPr>
+              <a:defRPr sz="950">
                 <a:solidFill>
                   <a:srgbClr val="1E293B"/>
                 </a:solidFill>
               </a:defRPr>
             </a:pPr>
             <a:r>
-              <a:t>Opportunity: Field teams struggle downloading and rendering multi-gigabyte 3D BIM models, CAD drawings, and point clouds over remote job-site cellular connections.</a:t>
-            </a:r>
-          </a:p>
-          <a:p>
-            <a:pPr>
-              <a:defRPr sz="850">
-                <a:solidFill>
-                  <a:srgbClr val="64748B"/>
-                </a:solidFill>
-              </a:defRPr>
-            </a:pPr>
-            <a:r>
-              <a:t>Proposed Solution: Deploy localized edge-caching appliances paired with Voxelforge AI / ayam3d retopology and WebGL progressive 3D rendering. Site engineers view and markup complex 3D digital twins instantly without saturating job-site uplink bandwidth.</a:t>
-            </a:r>
-          </a:p>
-        </p:txBody>
-      </p:sp>
-      <p:sp>
-        <p:nvSpPr>
-          <p:cNvPr id="10" name="Rounded Rectangle 9"/>
+              <a:t>Software rarely operates in perfect network and hardware conditions. Building applications with offline caching, graceful degradation, and asynchronous retry logic ensures systems remain reliable whether on a hospital floor, sports arena, or remote field office.</a:t>
+            </a:r>
+          </a:p>
+        </p:txBody>
+      </p:sp>
+      <p:sp>
+        <p:nvSpPr>
+          <p:cNvPr id="12" name="Rounded Rectangle 11"/>
           <p:cNvSpPr/>
           <p:nvPr/>
         </p:nvSpPr>
         <p:spPr>
           <a:xfrm>
             <a:off x="731520" y="3840480"/>
-            <a:ext cx="10728655" cy="1078992"/>
+            <a:ext cx="10728655" cy="1051560"/>
           </a:xfrm>
           <a:prstGeom prst="roundRect">
             <a:avLst/>
@@ -4121,14 +4180,57 @@
       </p:sp>
       <p:sp>
         <p:nvSpPr>
-          <p:cNvPr id="11" name="TextBox 10"/>
+          <p:cNvPr id="13" name="Rectangle 12"/>
+          <p:cNvSpPr/>
+          <p:nvPr/>
+        </p:nvSpPr>
+        <p:spPr>
+          <a:xfrm>
+            <a:off x="731520" y="3840480"/>
+            <a:ext cx="109728" cy="1051560"/>
+          </a:xfrm>
+          <a:prstGeom prst="rect">
+            <a:avLst/>
+          </a:prstGeom>
+          <a:solidFill>
+            <a:srgbClr val="0284C7"/>
+          </a:solidFill>
+          <a:ln>
+            <a:noFill/>
+          </a:ln>
+        </p:spPr>
+        <p:style>
+          <a:lnRef idx="1">
+            <a:schemeClr val="accent1"/>
+          </a:lnRef>
+          <a:fillRef idx="3">
+            <a:schemeClr val="accent1"/>
+          </a:fillRef>
+          <a:effectRef idx="2">
+            <a:schemeClr val="accent1"/>
+          </a:effectRef>
+          <a:fontRef idx="minor">
+            <a:schemeClr val="lt1"/>
+          </a:fontRef>
+        </p:style>
+        <p:txBody>
+          <a:bodyPr rtlCol="0" anchor="ctr"/>
+          <a:lstStyle/>
+          <a:p>
+            <a:pPr algn="ctr"/>
+          </a:p>
+        </p:txBody>
+      </p:sp>
+      <p:sp>
+        <p:nvSpPr>
+          <p:cNvPr id="14" name="TextBox 13"/>
           <p:cNvSpPr txBox="1"/>
           <p:nvPr/>
         </p:nvSpPr>
         <p:spPr>
           <a:xfrm>
-            <a:off x="960120" y="3931920"/>
-            <a:ext cx="10241280" cy="914400"/>
+            <a:off x="1051560" y="3950208"/>
+            <a:ext cx="10149840" cy="868680"/>
           </a:xfrm>
           <a:prstGeom prst="rect">
             <a:avLst/>
@@ -4143,57 +4245,42 @@
           <a:p>
             <a:pPr>
               <a:spcAft>
-                <a:spcPts val="200"/>
+                <a:spcPts val="400"/>
               </a:spcAft>
-              <a:defRPr sz="1150" b="1">
-                <a:solidFill>
-                  <a:srgbClr val="004E96"/>
-                </a:solidFill>
-              </a:defRPr>
-            </a:pPr>
-            <a:r>
-              <a:t>3. Subcontractor Zero-Trust Security Mesh &amp; Automated Vendor Compliance</a:t>
-            </a:r>
-          </a:p>
-          <a:p>
-            <a:pPr>
-              <a:spcAft>
-                <a:spcPts val="200"/>
-              </a:spcAft>
-              <a:defRPr sz="900" b="1">
+              <a:defRPr sz="1200" b="1">
+                <a:solidFill>
+                  <a:srgbClr val="0F172A"/>
+                </a:solidFill>
+              </a:defRPr>
+            </a:pPr>
+            <a:r>
+              <a:t>3. Standardize Design Systems &amp; Component Libraries to Prevent Technical Debt</a:t>
+            </a:r>
+          </a:p>
+          <a:p>
+            <a:pPr>
+              <a:defRPr sz="950">
                 <a:solidFill>
                   <a:srgbClr val="1E293B"/>
                 </a:solidFill>
               </a:defRPr>
             </a:pPr>
             <a:r>
-              <a:t>Opportunity: General contractors interact with hundreds of specialized subcontractors and vendors, introducing major cybersecurity and intellectual property leakage risks.</a:t>
-            </a:r>
-          </a:p>
-          <a:p>
-            <a:pPr>
-              <a:defRPr sz="850">
-                <a:solidFill>
-                  <a:srgbClr val="64748B"/>
-                </a:solidFill>
-              </a:defRPr>
-            </a:pPr>
-            <a:r>
-              <a:t>Proposed Solution: Establish a cloud-native Zero-Trust Network Access (ZTNA) portal. Subcontractors access only designated project folders with time-bound credentials, multi-factor authentication, watermarked document viewers, and automated endpoint compliance checks.</a:t>
-            </a:r>
-          </a:p>
-        </p:txBody>
-      </p:sp>
-      <p:sp>
-        <p:nvSpPr>
-          <p:cNvPr id="12" name="Rounded Rectangle 11"/>
+              <a:t>Re-inventing UI components across teams leads to inconsistent user experiences and bloated maintenance. Investing upfront in unified, framework-agnostic design systems (as demonstrated at Moonraft with LitElement) dramatically accelerates organizational velocity.</a:t>
+            </a:r>
+          </a:p>
+        </p:txBody>
+      </p:sp>
+      <p:sp>
+        <p:nvSpPr>
+          <p:cNvPr id="15" name="Rounded Rectangle 14"/>
           <p:cNvSpPr/>
           <p:nvPr/>
         </p:nvSpPr>
         <p:spPr>
           <a:xfrm>
             <a:off x="731520" y="5029200"/>
-            <a:ext cx="10728655" cy="1078992"/>
+            <a:ext cx="10728655" cy="1051560"/>
           </a:xfrm>
           <a:prstGeom prst="roundRect">
             <a:avLst/>
@@ -4231,14 +4318,57 @@
       </p:sp>
       <p:sp>
         <p:nvSpPr>
-          <p:cNvPr id="13" name="TextBox 12"/>
+          <p:cNvPr id="16" name="Rectangle 15"/>
+          <p:cNvSpPr/>
+          <p:nvPr/>
+        </p:nvSpPr>
+        <p:spPr>
+          <a:xfrm>
+            <a:off x="731520" y="5029200"/>
+            <a:ext cx="109728" cy="1051560"/>
+          </a:xfrm>
+          <a:prstGeom prst="rect">
+            <a:avLst/>
+          </a:prstGeom>
+          <a:solidFill>
+            <a:srgbClr val="0284C7"/>
+          </a:solidFill>
+          <a:ln>
+            <a:noFill/>
+          </a:ln>
+        </p:spPr>
+        <p:style>
+          <a:lnRef idx="1">
+            <a:schemeClr val="accent1"/>
+          </a:lnRef>
+          <a:fillRef idx="3">
+            <a:schemeClr val="accent1"/>
+          </a:fillRef>
+          <a:effectRef idx="2">
+            <a:schemeClr val="accent1"/>
+          </a:effectRef>
+          <a:fontRef idx="minor">
+            <a:schemeClr val="lt1"/>
+          </a:fontRef>
+        </p:style>
+        <p:txBody>
+          <a:bodyPr rtlCol="0" anchor="ctr"/>
+          <a:lstStyle/>
+          <a:p>
+            <a:pPr algn="ctr"/>
+          </a:p>
+        </p:txBody>
+      </p:sp>
+      <p:sp>
+        <p:nvSpPr>
+          <p:cNvPr id="17" name="TextBox 16"/>
           <p:cNvSpPr txBox="1"/>
           <p:nvPr/>
         </p:nvSpPr>
         <p:spPr>
           <a:xfrm>
-            <a:off x="960120" y="5120640"/>
-            <a:ext cx="10241280" cy="914400"/>
+            <a:off x="1051560" y="5138928"/>
+            <a:ext cx="10149840" cy="868680"/>
           </a:xfrm>
           <a:prstGeom prst="rect">
             <a:avLst/>
@@ -4253,50 +4383,35 @@
           <a:p>
             <a:pPr>
               <a:spcAft>
-                <a:spcPts val="200"/>
+                <a:spcPts val="400"/>
               </a:spcAft>
-              <a:defRPr sz="1150" b="1">
-                <a:solidFill>
-                  <a:srgbClr val="004E96"/>
-                </a:solidFill>
-              </a:defRPr>
-            </a:pPr>
-            <a:r>
-              <a:t>4. AIOps for Predictive IT Maintenance &amp; Automated Disaster Recovery (DR)</a:t>
-            </a:r>
-          </a:p>
-          <a:p>
-            <a:pPr>
-              <a:spcAft>
-                <a:spcPts val="200"/>
-              </a:spcAft>
-              <a:defRPr sz="900" b="1">
+              <a:defRPr sz="1200" b="1">
+                <a:solidFill>
+                  <a:srgbClr val="0F172A"/>
+                </a:solidFill>
+              </a:defRPr>
+            </a:pPr>
+            <a:r>
+              <a:t>4. Ground Technology Decisions in Concrete Business &amp; Human Impact</a:t>
+            </a:r>
+          </a:p>
+          <a:p>
+            <a:pPr>
+              <a:defRPr sz="950">
                 <a:solidFill>
                   <a:srgbClr val="1E293B"/>
                 </a:solidFill>
               </a:defRPr>
             </a:pPr>
             <a:r>
-              <a:t>Opportunity: Unplanned server outages, ISP disconnections, or backup failures at remote regional hubs disrupt critical construction scheduling and bid deadlines.</a:t>
-            </a:r>
-          </a:p>
-          <a:p>
-            <a:pPr>
-              <a:defRPr sz="850">
-                <a:solidFill>
-                  <a:srgbClr val="64748B"/>
-                </a:solidFill>
-              </a:defRPr>
-            </a:pPr>
-            <a:r>
-              <a:t>Proposed Solution: Implement AI-assisted log analysis and telemetry to detect early indicators of disk failure, bandwidth saturation, or cyber anomalies. Pair with automated immutable cloud backups (ransomware-proof) and scheduled push-button disaster recovery failover drills.</a:t>
-            </a:r>
-          </a:p>
-        </p:txBody>
-      </p:sp>
-      <p:sp>
-        <p:nvSpPr>
-          <p:cNvPr id="14" name="TextBox 13"/>
+              <a:t>Technology is a vehicle for solving human problems. Whether building spatial AI tools (Voxelforge AI), sports arbitration engines (Twitan), or ICU monitoring (Philips), the ultimate metric of success is operational simplicity, reliability, and tangible value to the user.</a:t>
+            </a:r>
+          </a:p>
+        </p:txBody>
+      </p:sp>
+      <p:sp>
+        <p:nvSpPr>
+          <p:cNvPr id="18" name="TextBox 17"/>
           <p:cNvSpPr txBox="1"/>
           <p:nvPr/>
         </p:nvSpPr>
@@ -4324,7 +4439,7 @@
               </a:defRPr>
             </a:pPr>
             <a:r>
-              <a:t>Obayashi Corporation · Senior Manager – IT Candidate Portfolio | Maheshchandra Hegde · Slide 10 of 12</a:t>
+              <a:t>Maheshchandra Hegde · Technical Work Experience &amp; Capability Presentation | Slide 10 of 11</a:t>
             </a:r>
           </a:p>
         </p:txBody>
@@ -4362,7 +4477,7 @@
             <a:avLst/>
           </a:prstGeom>
           <a:solidFill>
-            <a:srgbClr val="F8FAFC"/>
+            <a:srgbClr val="0F172A"/>
           </a:solidFill>
           <a:ln>
             <a:noFill/>
@@ -4392,892 +4507,20 @@
       </p:sp>
       <p:sp>
         <p:nvSpPr>
-          <p:cNvPr id="3" name="TextBox 2"/>
-          <p:cNvSpPr txBox="1"/>
-          <p:nvPr/>
-        </p:nvSpPr>
-        <p:spPr>
-          <a:xfrm>
-            <a:off x="731520" y="365760"/>
-            <a:ext cx="10698480" cy="274320"/>
-          </a:xfrm>
-          <a:prstGeom prst="rect">
-            <a:avLst/>
-          </a:prstGeom>
-          <a:noFill/>
-        </p:spPr>
-        <p:txBody>
-          <a:bodyPr wrap="square" lIns="0" rIns="0" tIns="0" bIns="0">
-            <a:spAutoFit/>
-          </a:bodyPr>
-          <a:lstStyle/>
-          <a:p>
-            <a:pPr>
-              <a:defRPr sz="1100" b="1">
-                <a:solidFill>
-                  <a:srgbClr val="004E96"/>
-                </a:solidFill>
-              </a:defRPr>
-            </a:pPr>
-            <a:r>
-              <a:t>LEADERSHIP ONBOARDING &amp; VALUE REALIZATION</a:t>
-            </a:r>
-          </a:p>
-        </p:txBody>
-      </p:sp>
-      <p:sp>
-        <p:nvSpPr>
-          <p:cNvPr id="4" name="TextBox 3"/>
-          <p:cNvSpPr txBox="1"/>
-          <p:nvPr/>
-        </p:nvSpPr>
-        <p:spPr>
-          <a:xfrm>
-            <a:off x="731520" y="658368"/>
-            <a:ext cx="10698480" cy="502920"/>
-          </a:xfrm>
-          <a:prstGeom prst="rect">
-            <a:avLst/>
-          </a:prstGeom>
-          <a:noFill/>
-        </p:spPr>
-        <p:txBody>
-          <a:bodyPr wrap="square" lIns="0" rIns="0" tIns="0" bIns="0">
-            <a:spAutoFit/>
-          </a:bodyPr>
-          <a:lstStyle/>
-          <a:p>
-            <a:pPr>
-              <a:defRPr sz="2100" b="1">
-                <a:solidFill>
-                  <a:srgbClr val="0F1E36"/>
-                </a:solidFill>
-              </a:defRPr>
-            </a:pPr>
-            <a:r>
-              <a:t>First 90 Days: Strategic Execution Roadmap for Senior Manager – IT</a:t>
-            </a:r>
-          </a:p>
-        </p:txBody>
-      </p:sp>
-      <p:sp>
-        <p:nvSpPr>
-          <p:cNvPr id="5" name="Rectangle 4"/>
-          <p:cNvSpPr/>
-          <p:nvPr/>
-        </p:nvSpPr>
-        <p:spPr>
-          <a:xfrm>
-            <a:off x="731520" y="1234440"/>
-            <a:ext cx="10728655" cy="22860"/>
-          </a:xfrm>
-          <a:prstGeom prst="rect">
-            <a:avLst/>
-          </a:prstGeom>
-          <a:solidFill>
-            <a:srgbClr val="E2E8F0"/>
-          </a:solidFill>
-          <a:ln>
-            <a:noFill/>
-          </a:ln>
-        </p:spPr>
-        <p:style>
-          <a:lnRef idx="1">
-            <a:schemeClr val="accent1"/>
-          </a:lnRef>
-          <a:fillRef idx="3">
-            <a:schemeClr val="accent1"/>
-          </a:fillRef>
-          <a:effectRef idx="2">
-            <a:schemeClr val="accent1"/>
-          </a:effectRef>
-          <a:fontRef idx="minor">
-            <a:schemeClr val="lt1"/>
-          </a:fontRef>
-        </p:style>
-        <p:txBody>
-          <a:bodyPr rtlCol="0" anchor="ctr"/>
-          <a:lstStyle/>
-          <a:p>
-            <a:pPr algn="ctr"/>
-          </a:p>
-        </p:txBody>
-      </p:sp>
-      <p:sp>
-        <p:nvSpPr>
-          <p:cNvPr id="6" name="Rounded Rectangle 5"/>
-          <p:cNvSpPr/>
-          <p:nvPr/>
-        </p:nvSpPr>
-        <p:spPr>
-          <a:xfrm>
-            <a:off x="731520" y="1463040"/>
-            <a:ext cx="3401568" cy="4754880"/>
-          </a:xfrm>
-          <a:prstGeom prst="roundRect">
-            <a:avLst/>
-          </a:prstGeom>
-          <a:solidFill>
-            <a:srgbClr val="FFFFFF"/>
-          </a:solidFill>
-          <a:ln w="12700">
-            <a:solidFill>
-              <a:srgbClr val="E2E8F0"/>
-            </a:solidFill>
-          </a:ln>
-        </p:spPr>
-        <p:style>
-          <a:lnRef idx="1">
-            <a:schemeClr val="accent1"/>
-          </a:lnRef>
-          <a:fillRef idx="3">
-            <a:schemeClr val="accent1"/>
-          </a:fillRef>
-          <a:effectRef idx="2">
-            <a:schemeClr val="accent1"/>
-          </a:effectRef>
-          <a:fontRef idx="minor">
-            <a:schemeClr val="lt1"/>
-          </a:fontRef>
-        </p:style>
-        <p:txBody>
-          <a:bodyPr rtlCol="0" anchor="ctr"/>
-          <a:lstStyle/>
-          <a:p>
-            <a:pPr algn="ctr"/>
-          </a:p>
-        </p:txBody>
-      </p:sp>
-      <p:sp>
-        <p:nvSpPr>
-          <p:cNvPr id="7" name="Rectangle 6"/>
-          <p:cNvSpPr/>
-          <p:nvPr/>
-        </p:nvSpPr>
-        <p:spPr>
-          <a:xfrm>
-            <a:off x="740664" y="1472184"/>
-            <a:ext cx="3383280" cy="438912"/>
-          </a:xfrm>
-          <a:prstGeom prst="rect">
-            <a:avLst/>
-          </a:prstGeom>
-          <a:solidFill>
-            <a:srgbClr val="004E96"/>
-          </a:solidFill>
-          <a:ln>
-            <a:noFill/>
-          </a:ln>
-        </p:spPr>
-        <p:style>
-          <a:lnRef idx="1">
-            <a:schemeClr val="accent1"/>
-          </a:lnRef>
-          <a:fillRef idx="3">
-            <a:schemeClr val="accent1"/>
-          </a:fillRef>
-          <a:effectRef idx="2">
-            <a:schemeClr val="accent1"/>
-          </a:effectRef>
-          <a:fontRef idx="minor">
-            <a:schemeClr val="lt1"/>
-          </a:fontRef>
-        </p:style>
-        <p:txBody>
-          <a:bodyPr rtlCol="0" anchor="ctr"/>
-          <a:lstStyle/>
-          <a:p>
-            <a:pPr algn="ctr"/>
-          </a:p>
-        </p:txBody>
-      </p:sp>
-      <p:sp>
-        <p:nvSpPr>
-          <p:cNvPr id="8" name="TextBox 7"/>
-          <p:cNvSpPr txBox="1"/>
-          <p:nvPr/>
-        </p:nvSpPr>
-        <p:spPr>
-          <a:xfrm>
-            <a:off x="841248" y="1536192"/>
-            <a:ext cx="3182112" cy="320040"/>
-          </a:xfrm>
-          <a:prstGeom prst="rect">
-            <a:avLst/>
-          </a:prstGeom>
-          <a:noFill/>
-        </p:spPr>
-        <p:txBody>
-          <a:bodyPr wrap="none">
-            <a:spAutoFit/>
-          </a:bodyPr>
-          <a:lstStyle/>
-          <a:p>
-            <a:pPr>
-              <a:defRPr sz="1100" b="1">
-                <a:solidFill>
-                  <a:srgbClr val="FFFFFF"/>
-                </a:solidFill>
-              </a:defRPr>
-            </a:pPr>
-            <a:r>
-              <a:t>Days 1 – 30: Discovery &amp; Baseline Assessment</a:t>
-            </a:r>
-          </a:p>
-        </p:txBody>
-      </p:sp>
-      <p:sp>
-        <p:nvSpPr>
-          <p:cNvPr id="9" name="TextBox 8"/>
-          <p:cNvSpPr txBox="1"/>
-          <p:nvPr/>
-        </p:nvSpPr>
-        <p:spPr>
-          <a:xfrm>
-            <a:off x="868680" y="2011680"/>
-            <a:ext cx="3127248" cy="4023360"/>
-          </a:xfrm>
-          <a:prstGeom prst="rect">
-            <a:avLst/>
-          </a:prstGeom>
-          <a:noFill/>
-        </p:spPr>
-        <p:txBody>
-          <a:bodyPr wrap="square">
-            <a:spAutoFit/>
-          </a:bodyPr>
-          <a:lstStyle/>
-          <a:p>
-            <a:pPr>
-              <a:spcAft>
-                <a:spcPts val="1000"/>
-              </a:spcAft>
-              <a:defRPr sz="950" b="1">
-                <a:solidFill>
-                  <a:srgbClr val="0F1E36"/>
-                </a:solidFill>
-              </a:defRPr>
-            </a:pPr>
-            <a:r>
-              <a:t>Objective: Understand Current State, Build Relationships &amp; Audit Risks</a:t>
-            </a:r>
-          </a:p>
-          <a:p>
-            <a:pPr>
-              <a:spcAft>
-                <a:spcPts val="800"/>
-              </a:spcAft>
-              <a:defRPr sz="950">
-                <a:solidFill>
-                  <a:srgbClr val="1E293B"/>
-                </a:solidFill>
-              </a:defRPr>
-            </a:pPr>
-            <a:r>
-              <a:t>✔ Audit all existing IT infrastructure, networks, cloud tenancies, and active construction site connections.</a:t>
-            </a:r>
-          </a:p>
-          <a:p>
-            <a:pPr>
-              <a:spcAft>
-                <a:spcPts val="800"/>
-              </a:spcAft>
-              <a:defRPr sz="950">
-                <a:solidFill>
-                  <a:srgbClr val="1E293B"/>
-                </a:solidFill>
-              </a:defRPr>
-            </a:pPr>
-            <a:r>
-              <a:t>✔ Interview business unit heads, site project managers, and executive leadership to identify operational bottlenecks.</a:t>
-            </a:r>
-          </a:p>
-          <a:p>
-            <a:pPr>
-              <a:spcAft>
-                <a:spcPts val="800"/>
-              </a:spcAft>
-              <a:defRPr sz="950">
-                <a:solidFill>
-                  <a:srgbClr val="1E293B"/>
-                </a:solidFill>
-              </a:defRPr>
-            </a:pPr>
-            <a:r>
-              <a:t>✔ Review existing cybersecurity controls, backup regimes, DR documentation, and compliance standings.</a:t>
-            </a:r>
-          </a:p>
-          <a:p>
-            <a:pPr>
-              <a:spcAft>
-                <a:spcPts val="800"/>
-              </a:spcAft>
-              <a:defRPr sz="950">
-                <a:solidFill>
-                  <a:srgbClr val="1E293B"/>
-                </a:solidFill>
-              </a:defRPr>
-            </a:pPr>
-            <a:r>
-              <a:t>✔ Analyze IT budget utilization, vendor contracts, software licenses, and current SLA performance metrics.</a:t>
-            </a:r>
-          </a:p>
-        </p:txBody>
-      </p:sp>
-      <p:sp>
-        <p:nvSpPr>
-          <p:cNvPr id="10" name="Rounded Rectangle 9"/>
-          <p:cNvSpPr/>
-          <p:nvPr/>
-        </p:nvSpPr>
-        <p:spPr>
-          <a:xfrm>
-            <a:off x="4389120" y="1463040"/>
-            <a:ext cx="3401568" cy="4754880"/>
-          </a:xfrm>
-          <a:prstGeom prst="roundRect">
-            <a:avLst/>
-          </a:prstGeom>
-          <a:solidFill>
-            <a:srgbClr val="FFFFFF"/>
-          </a:solidFill>
-          <a:ln w="12700">
-            <a:solidFill>
-              <a:srgbClr val="E2E8F0"/>
-            </a:solidFill>
-          </a:ln>
-        </p:spPr>
-        <p:style>
-          <a:lnRef idx="1">
-            <a:schemeClr val="accent1"/>
-          </a:lnRef>
-          <a:fillRef idx="3">
-            <a:schemeClr val="accent1"/>
-          </a:fillRef>
-          <a:effectRef idx="2">
-            <a:schemeClr val="accent1"/>
-          </a:effectRef>
-          <a:fontRef idx="minor">
-            <a:schemeClr val="lt1"/>
-          </a:fontRef>
-        </p:style>
-        <p:txBody>
-          <a:bodyPr rtlCol="0" anchor="ctr"/>
-          <a:lstStyle/>
-          <a:p>
-            <a:pPr algn="ctr"/>
-          </a:p>
-        </p:txBody>
-      </p:sp>
-      <p:sp>
-        <p:nvSpPr>
-          <p:cNvPr id="11" name="Rectangle 10"/>
-          <p:cNvSpPr/>
-          <p:nvPr/>
-        </p:nvSpPr>
-        <p:spPr>
-          <a:xfrm>
-            <a:off x="4398264" y="1472184"/>
-            <a:ext cx="3383280" cy="438912"/>
-          </a:xfrm>
-          <a:prstGeom prst="rect">
-            <a:avLst/>
-          </a:prstGeom>
-          <a:solidFill>
-            <a:srgbClr val="0E7490"/>
-          </a:solidFill>
-          <a:ln>
-            <a:noFill/>
-          </a:ln>
-        </p:spPr>
-        <p:style>
-          <a:lnRef idx="1">
-            <a:schemeClr val="accent1"/>
-          </a:lnRef>
-          <a:fillRef idx="3">
-            <a:schemeClr val="accent1"/>
-          </a:fillRef>
-          <a:effectRef idx="2">
-            <a:schemeClr val="accent1"/>
-          </a:effectRef>
-          <a:fontRef idx="minor">
-            <a:schemeClr val="lt1"/>
-          </a:fontRef>
-        </p:style>
-        <p:txBody>
-          <a:bodyPr rtlCol="0" anchor="ctr"/>
-          <a:lstStyle/>
-          <a:p>
-            <a:pPr algn="ctr"/>
-          </a:p>
-        </p:txBody>
-      </p:sp>
-      <p:sp>
-        <p:nvSpPr>
-          <p:cNvPr id="12" name="TextBox 11"/>
-          <p:cNvSpPr txBox="1"/>
-          <p:nvPr/>
-        </p:nvSpPr>
-        <p:spPr>
-          <a:xfrm>
-            <a:off x="4498848" y="1536192"/>
-            <a:ext cx="3182112" cy="320040"/>
-          </a:xfrm>
-          <a:prstGeom prst="rect">
-            <a:avLst/>
-          </a:prstGeom>
-          <a:noFill/>
-        </p:spPr>
-        <p:txBody>
-          <a:bodyPr wrap="none">
-            <a:spAutoFit/>
-          </a:bodyPr>
-          <a:lstStyle/>
-          <a:p>
-            <a:pPr>
-              <a:defRPr sz="1100" b="1">
-                <a:solidFill>
-                  <a:srgbClr val="FFFFFF"/>
-                </a:solidFill>
-              </a:defRPr>
-            </a:pPr>
-            <a:r>
-              <a:t>Days 31 – 60: Stabilization &amp; Quick Wins</a:t>
-            </a:r>
-          </a:p>
-        </p:txBody>
-      </p:sp>
-      <p:sp>
-        <p:nvSpPr>
-          <p:cNvPr id="13" name="TextBox 12"/>
-          <p:cNvSpPr txBox="1"/>
-          <p:nvPr/>
-        </p:nvSpPr>
-        <p:spPr>
-          <a:xfrm>
-            <a:off x="4526280" y="2011680"/>
-            <a:ext cx="3127248" cy="4023360"/>
-          </a:xfrm>
-          <a:prstGeom prst="rect">
-            <a:avLst/>
-          </a:prstGeom>
-          <a:noFill/>
-        </p:spPr>
-        <p:txBody>
-          <a:bodyPr wrap="square">
-            <a:spAutoFit/>
-          </a:bodyPr>
-          <a:lstStyle/>
-          <a:p>
-            <a:pPr>
-              <a:spcAft>
-                <a:spcPts val="1000"/>
-              </a:spcAft>
-              <a:defRPr sz="950" b="1">
-                <a:solidFill>
-                  <a:srgbClr val="0F1E36"/>
-                </a:solidFill>
-              </a:defRPr>
-            </a:pPr>
-            <a:r>
-              <a:t>Objective: Fortify Security, Address Gaps &amp; Streamline Operations</a:t>
-            </a:r>
-          </a:p>
-          <a:p>
-            <a:pPr>
-              <a:spcAft>
-                <a:spcPts val="800"/>
-              </a:spcAft>
-              <a:defRPr sz="950">
-                <a:solidFill>
-                  <a:srgbClr val="1E293B"/>
-                </a:solidFill>
-              </a:defRPr>
-            </a:pPr>
-            <a:r>
-              <a:t>✔ Remediate critical vulnerabilities identified during audit; enforce uniform MFA and access policies.</a:t>
-            </a:r>
-          </a:p>
-          <a:p>
-            <a:pPr>
-              <a:spcAft>
-                <a:spcPts val="800"/>
-              </a:spcAft>
-              <a:defRPr sz="950">
-                <a:solidFill>
-                  <a:srgbClr val="1E293B"/>
-                </a:solidFill>
-              </a:defRPr>
-            </a:pPr>
-            <a:r>
-              <a:t>✔ Optimize job-site connectivity baselines; resolve recurring network instability pain points at active sites.</a:t>
-            </a:r>
-          </a:p>
-          <a:p>
-            <a:pPr>
-              <a:spcAft>
-                <a:spcPts val="800"/>
-              </a:spcAft>
-              <a:defRPr sz="950">
-                <a:solidFill>
-                  <a:srgbClr val="1E293B"/>
-                </a:solidFill>
-              </a:defRPr>
-            </a:pPr>
-            <a:r>
-              <a:t>✔ Consolidate vendor SLAs, eliminate redundant licenses, and introduce transparent IT support ticketing KPIs.</a:t>
-            </a:r>
-          </a:p>
-          <a:p>
-            <a:pPr>
-              <a:spcAft>
-                <a:spcPts val="800"/>
-              </a:spcAft>
-              <a:defRPr sz="950">
-                <a:solidFill>
-                  <a:srgbClr val="1E293B"/>
-                </a:solidFill>
-              </a:defRPr>
-            </a:pPr>
-            <a:r>
-              <a:t>✔ Conduct a full table-top Disaster Recovery (DR) and backup verification exercise to guarantee system resilience.</a:t>
-            </a:r>
-          </a:p>
-        </p:txBody>
-      </p:sp>
-      <p:sp>
-        <p:nvSpPr>
-          <p:cNvPr id="14" name="Rounded Rectangle 13"/>
-          <p:cNvSpPr/>
-          <p:nvPr/>
-        </p:nvSpPr>
-        <p:spPr>
-          <a:xfrm>
-            <a:off x="8046720" y="1463040"/>
-            <a:ext cx="3401568" cy="4754880"/>
-          </a:xfrm>
-          <a:prstGeom prst="roundRect">
-            <a:avLst/>
-          </a:prstGeom>
-          <a:solidFill>
-            <a:srgbClr val="FFFFFF"/>
-          </a:solidFill>
-          <a:ln w="12700">
-            <a:solidFill>
-              <a:srgbClr val="E2E8F0"/>
-            </a:solidFill>
-          </a:ln>
-        </p:spPr>
-        <p:style>
-          <a:lnRef idx="1">
-            <a:schemeClr val="accent1"/>
-          </a:lnRef>
-          <a:fillRef idx="3">
-            <a:schemeClr val="accent1"/>
-          </a:fillRef>
-          <a:effectRef idx="2">
-            <a:schemeClr val="accent1"/>
-          </a:effectRef>
-          <a:fontRef idx="minor">
-            <a:schemeClr val="lt1"/>
-          </a:fontRef>
-        </p:style>
-        <p:txBody>
-          <a:bodyPr rtlCol="0" anchor="ctr"/>
-          <a:lstStyle/>
-          <a:p>
-            <a:pPr algn="ctr"/>
-          </a:p>
-        </p:txBody>
-      </p:sp>
-      <p:sp>
-        <p:nvSpPr>
-          <p:cNvPr id="15" name="Rectangle 14"/>
-          <p:cNvSpPr/>
-          <p:nvPr/>
-        </p:nvSpPr>
-        <p:spPr>
-          <a:xfrm>
-            <a:off x="8055864" y="1472184"/>
-            <a:ext cx="3383280" cy="438912"/>
-          </a:xfrm>
-          <a:prstGeom prst="rect">
-            <a:avLst/>
-          </a:prstGeom>
-          <a:solidFill>
-            <a:srgbClr val="109563"/>
-          </a:solidFill>
-          <a:ln>
-            <a:noFill/>
-          </a:ln>
-        </p:spPr>
-        <p:style>
-          <a:lnRef idx="1">
-            <a:schemeClr val="accent1"/>
-          </a:lnRef>
-          <a:fillRef idx="3">
-            <a:schemeClr val="accent1"/>
-          </a:fillRef>
-          <a:effectRef idx="2">
-            <a:schemeClr val="accent1"/>
-          </a:effectRef>
-          <a:fontRef idx="minor">
-            <a:schemeClr val="lt1"/>
-          </a:fontRef>
-        </p:style>
-        <p:txBody>
-          <a:bodyPr rtlCol="0" anchor="ctr"/>
-          <a:lstStyle/>
-          <a:p>
-            <a:pPr algn="ctr"/>
-          </a:p>
-        </p:txBody>
-      </p:sp>
-      <p:sp>
-        <p:nvSpPr>
-          <p:cNvPr id="16" name="TextBox 15"/>
-          <p:cNvSpPr txBox="1"/>
-          <p:nvPr/>
-        </p:nvSpPr>
-        <p:spPr>
-          <a:xfrm>
-            <a:off x="8156448" y="1536192"/>
-            <a:ext cx="3182112" cy="320040"/>
-          </a:xfrm>
-          <a:prstGeom prst="rect">
-            <a:avLst/>
-          </a:prstGeom>
-          <a:noFill/>
-        </p:spPr>
-        <p:txBody>
-          <a:bodyPr wrap="none">
-            <a:spAutoFit/>
-          </a:bodyPr>
-          <a:lstStyle/>
-          <a:p>
-            <a:pPr>
-              <a:defRPr sz="1100" b="1">
-                <a:solidFill>
-                  <a:srgbClr val="FFFFFF"/>
-                </a:solidFill>
-              </a:defRPr>
-            </a:pPr>
-            <a:r>
-              <a:t>Days 61 – 90: Modernization &amp; Strategic Roadmap</a:t>
-            </a:r>
-          </a:p>
-        </p:txBody>
-      </p:sp>
-      <p:sp>
-        <p:nvSpPr>
-          <p:cNvPr id="17" name="TextBox 16"/>
-          <p:cNvSpPr txBox="1"/>
-          <p:nvPr/>
-        </p:nvSpPr>
-        <p:spPr>
-          <a:xfrm>
-            <a:off x="8183880" y="2011680"/>
-            <a:ext cx="3127248" cy="4023360"/>
-          </a:xfrm>
-          <a:prstGeom prst="rect">
-            <a:avLst/>
-          </a:prstGeom>
-          <a:noFill/>
-        </p:spPr>
-        <p:txBody>
-          <a:bodyPr wrap="square">
-            <a:spAutoFit/>
-          </a:bodyPr>
-          <a:lstStyle/>
-          <a:p>
-            <a:pPr>
-              <a:spcAft>
-                <a:spcPts val="1000"/>
-              </a:spcAft>
-              <a:defRPr sz="950" b="1">
-                <a:solidFill>
-                  <a:srgbClr val="0F1E36"/>
-                </a:solidFill>
-              </a:defRPr>
-            </a:pPr>
-            <a:r>
-              <a:t>Objective: Drive Scalability, Digital Transformation &amp; Long-Term Value</a:t>
-            </a:r>
-          </a:p>
-          <a:p>
-            <a:pPr>
-              <a:spcAft>
-                <a:spcPts val="800"/>
-              </a:spcAft>
-              <a:defRPr sz="950">
-                <a:solidFill>
-                  <a:srgbClr val="1E293B"/>
-                </a:solidFill>
-              </a:defRPr>
-            </a:pPr>
-            <a:r>
-              <a:t>✔ Present a 2-3 Year IT Strategy &amp; Digital Roadmap aligned directly with Obayashi's corporate objectives.</a:t>
-            </a:r>
-          </a:p>
-          <a:p>
-            <a:pPr>
-              <a:spcAft>
-                <a:spcPts val="800"/>
-              </a:spcAft>
-              <a:defRPr sz="950">
-                <a:solidFill>
-                  <a:srgbClr val="1E293B"/>
-                </a:solidFill>
-              </a:defRPr>
-            </a:pPr>
-            <a:r>
-              <a:t>✔ Pilot the 'Site IT-in-a-Box' rapid deployment kit for upcoming construction projects.</a:t>
-            </a:r>
-          </a:p>
-          <a:p>
-            <a:pPr>
-              <a:spcAft>
-                <a:spcPts val="800"/>
-              </a:spcAft>
-              <a:defRPr sz="950">
-                <a:solidFill>
-                  <a:srgbClr val="1E293B"/>
-                </a:solidFill>
-              </a:defRPr>
-            </a:pPr>
-            <a:r>
-              <a:t>✔ Initiate automation initiatives (CI/CD, automated log telemetry, self-service IT service catalog).</a:t>
-            </a:r>
-          </a:p>
-          <a:p>
-            <a:pPr>
-              <a:spcAft>
-                <a:spcPts val="800"/>
-              </a:spcAft>
-              <a:defRPr sz="950">
-                <a:solidFill>
-                  <a:srgbClr val="1E293B"/>
-                </a:solidFill>
-              </a:defRPr>
-            </a:pPr>
-            <a:r>
-              <a:t>✔ Foster continuous team upskilling, mentorship, and technical excellence within the internal IT workforce.</a:t>
-            </a:r>
-          </a:p>
-        </p:txBody>
-      </p:sp>
-      <p:sp>
-        <p:nvSpPr>
-          <p:cNvPr id="18" name="TextBox 17"/>
-          <p:cNvSpPr txBox="1"/>
-          <p:nvPr/>
-        </p:nvSpPr>
-        <p:spPr>
-          <a:xfrm>
-            <a:off x="731520" y="6446520"/>
-            <a:ext cx="10728655" cy="320040"/>
-          </a:xfrm>
-          <a:prstGeom prst="rect">
-            <a:avLst/>
-          </a:prstGeom>
-          <a:noFill/>
-        </p:spPr>
-        <p:txBody>
-          <a:bodyPr wrap="none" lIns="0" rIns="0" tIns="0" bIns="0">
-            <a:spAutoFit/>
-          </a:bodyPr>
-          <a:lstStyle/>
-          <a:p>
-            <a:pPr>
-              <a:defRPr sz="900">
-                <a:solidFill>
-                  <a:srgbClr val="64748B"/>
-                </a:solidFill>
-              </a:defRPr>
-            </a:pPr>
-            <a:r>
-              <a:t>Obayashi Corporation · Senior Manager – IT Candidate Portfolio | Maheshchandra Hegde · Slide 11 of 12</a:t>
-            </a:r>
-          </a:p>
-        </p:txBody>
-      </p:sp>
-    </p:spTree>
-  </p:cSld>
-  <p:clrMapOvr>
-    <a:masterClrMapping/>
-  </p:clrMapOvr>
-</p:sld>
-</file>
-
-<file path=ppt/slides/slide12.xml><?xml version="1.0" encoding="utf-8"?>
-<p:sld xmlns:a="http://schemas.openxmlformats.org/drawingml/2006/main" xmlns:p="http://schemas.openxmlformats.org/presentationml/2006/main" xmlns:r="http://schemas.openxmlformats.org/officeDocument/2006/relationships">
-  <p:cSld>
-    <p:spTree>
-      <p:nvGrpSpPr>
-        <p:cNvPr id="1" name=""/>
-        <p:cNvGrpSpPr/>
-        <p:nvPr/>
-      </p:nvGrpSpPr>
-      <p:grpSpPr/>
-      <p:sp>
-        <p:nvSpPr>
-          <p:cNvPr id="2" name="Rectangle 1"/>
-          <p:cNvSpPr/>
-          <p:nvPr/>
-        </p:nvSpPr>
-        <p:spPr>
-          <a:xfrm>
-            <a:off x="0" y="0"/>
-            <a:ext cx="12191695" cy="6858000"/>
-          </a:xfrm>
-          <a:prstGeom prst="rect">
-            <a:avLst/>
-          </a:prstGeom>
-          <a:solidFill>
-            <a:srgbClr val="0F1E36"/>
-          </a:solidFill>
-          <a:ln>
-            <a:noFill/>
-          </a:ln>
-        </p:spPr>
-        <p:style>
-          <a:lnRef idx="1">
-            <a:schemeClr val="accent1"/>
-          </a:lnRef>
-          <a:fillRef idx="3">
-            <a:schemeClr val="accent1"/>
-          </a:fillRef>
-          <a:effectRef idx="2">
-            <a:schemeClr val="accent1"/>
-          </a:effectRef>
-          <a:fontRef idx="minor">
-            <a:schemeClr val="lt1"/>
-          </a:fontRef>
-        </p:style>
-        <p:txBody>
-          <a:bodyPr rtlCol="0" anchor="ctr"/>
-          <a:lstStyle/>
-          <a:p>
-            <a:pPr algn="ctr"/>
-          </a:p>
-        </p:txBody>
-      </p:sp>
-      <p:sp>
-        <p:nvSpPr>
           <p:cNvPr id="3" name="Rounded Rectangle 2"/>
           <p:cNvSpPr/>
           <p:nvPr/>
         </p:nvSpPr>
         <p:spPr>
           <a:xfrm>
-            <a:off x="1294790" y="1051560"/>
-            <a:ext cx="9601200" cy="4754880"/>
+            <a:off x="731520" y="1371600"/>
+            <a:ext cx="10728655" cy="4754880"/>
           </a:xfrm>
           <a:prstGeom prst="roundRect">
             <a:avLst/>
           </a:prstGeom>
           <a:solidFill>
-            <a:srgbClr val="182B49"/>
+            <a:srgbClr val="182235"/>
           </a:solidFill>
           <a:ln w="12700">
             <a:solidFill>
@@ -5315,8 +4558,8 @@
         </p:nvSpPr>
         <p:spPr>
           <a:xfrm>
-            <a:off x="1843430" y="1508760"/>
-            <a:ext cx="8503920" cy="3840480"/>
+            <a:off x="1188720" y="1691640"/>
+            <a:ext cx="9814255" cy="4114800"/>
           </a:xfrm>
           <a:prstGeom prst="rect">
             <a:avLst/>
@@ -5331,106 +4574,139 @@
           <a:p>
             <a:pPr>
               <a:spcAft>
-                <a:spcPts val="800"/>
+                <a:spcPts val="400"/>
               </a:spcAft>
-              <a:defRPr sz="1200" b="1">
-                <a:solidFill>
-                  <a:srgbClr val="CC2229"/>
-                </a:solidFill>
-              </a:defRPr>
-            </a:pPr>
-            <a:r>
-              <a:t>OBAYASHI CORPORATION · IT LEADERSHIP COMMITMENT</a:t>
+              <a:defRPr sz="1150" b="1">
+                <a:solidFill>
+                  <a:srgbClr val="38BDF8"/>
+                </a:solidFill>
+              </a:defRPr>
+            </a:pPr>
+            <a:r>
+              <a:t>VISION FOR FUTURE PROCESS IMPROVEMENTS &amp; SCALE</a:t>
             </a:r>
           </a:p>
           <a:p>
             <a:pPr>
               <a:spcAft>
-                <a:spcPts val="1400"/>
+                <a:spcPts val="1200"/>
               </a:spcAft>
-              <a:defRPr sz="2400" b="1">
+              <a:defRPr sz="2100" b="1">
                 <a:solidFill>
                   <a:srgbClr val="FFFFFF"/>
                 </a:solidFill>
               </a:defRPr>
             </a:pPr>
             <a:r>
-              <a:t>Delivering Reliable, Secure &amp; Future-Ready Technology Services</a:t>
+              <a:t>Leveraging Proven Expertise in Scalable Systems, UX &amp; Spatial Tech</a:t>
+            </a:r>
+          </a:p>
+          <a:p>
+            <a:pPr>
+              <a:defRPr b="1" sz="1050">
+                <a:solidFill>
+                  <a:srgbClr val="38BDF8"/>
+                </a:solidFill>
+              </a:defRPr>
+            </a:pPr>
+            <a:r>
+              <a:t>• Unified Spatial &amp; Web Integration: </a:t>
             </a:r>
           </a:p>
           <a:p>
             <a:pPr>
               <a:spcAft>
-                <a:spcPts val="700"/>
+                <a:spcPts val="600"/>
               </a:spcAft>
-              <a:defRPr sz="1050">
-                <a:solidFill>
-                  <a:srgbClr val="E2E8F0"/>
-                </a:solidFill>
-              </a:defRPr>
-            </a:pPr>
-            <a:r>
-              <a:t>• Strategic Value Creation: Aligning IT roadmaps directly with Obayashi's engineering excellence and corporate vision.</a:t>
+              <a:defRPr sz="950">
+                <a:solidFill>
+                  <a:srgbClr val="CBD5E1"/>
+                </a:solidFill>
+              </a:defRPr>
+            </a:pPr>
+            <a:r>
+              <a:t>  Bridge complex 3D CAD, architectural models, and spatial data into lightweight, interactive web formats using progressive LOD and automated retopology (leveraging Voxelforge AI / ayam3d principles).</a:t>
+            </a:r>
+          </a:p>
+          <a:p>
+            <a:pPr>
+              <a:defRPr b="1" sz="1050">
+                <a:solidFill>
+                  <a:srgbClr val="38BDF8"/>
+                </a:solidFill>
+              </a:defRPr>
+            </a:pPr>
+            <a:r>
+              <a:t>• Resilient Edge-First Mobile Workflows: </a:t>
             </a:r>
           </a:p>
           <a:p>
             <a:pPr>
               <a:spcAft>
-                <a:spcPts val="700"/>
+                <a:spcPts val="600"/>
               </a:spcAft>
-              <a:defRPr sz="1050">
-                <a:solidFill>
-                  <a:srgbClr val="E2E8F0"/>
-                </a:solidFill>
-              </a:defRPr>
-            </a:pPr>
-            <a:r>
-              <a:t>• Operational Dependability: Ensuring 24/7 resilience, zero data loss, and rapid incident resolution across all offices and project job-sites.</a:t>
+              <a:defRPr sz="950">
+                <a:solidFill>
+                  <a:srgbClr val="CBD5E1"/>
+                </a:solidFill>
+              </a:defRPr>
+            </a:pPr>
+            <a:r>
+              <a:t>  Implement offline-first client persistence and background transactional queuing across field-facing mobile applications, ensuring zero work loss regardless of remote connectivity challenges.</a:t>
+            </a:r>
+          </a:p>
+          <a:p>
+            <a:pPr>
+              <a:defRPr b="1" sz="1050">
+                <a:solidFill>
+                  <a:srgbClr val="38BDF8"/>
+                </a:solidFill>
+              </a:defRPr>
+            </a:pPr>
+            <a:r>
+              <a:t>• Standardized Enterprise Design Systems: </a:t>
             </a:r>
           </a:p>
           <a:p>
             <a:pPr>
               <a:spcAft>
-                <a:spcPts val="700"/>
+                <a:spcPts val="600"/>
               </a:spcAft>
-              <a:defRPr sz="1050">
-                <a:solidFill>
-                  <a:srgbClr val="E2E8F0"/>
-                </a:solidFill>
-              </a:defRPr>
-            </a:pPr>
-            <a:r>
-              <a:t>• Digital Construction &amp; 3D Synergy: Leveraging 50+ project visualization pedigree, Voxelforge AI, and ayam3d to power next-generation BIM and digital twins.</a:t>
+              <a:defRPr sz="950">
+                <a:solidFill>
+                  <a:srgbClr val="CBD5E1"/>
+                </a:solidFill>
+              </a:defRPr>
+            </a:pPr>
+            <a:r>
+              <a:t>  Establish centralized, cross-platform component libraries and design tokens to streamline multi-team digital product delivery, enforce visual consistency, and eliminate duplicated engineering effort.</a:t>
+            </a:r>
+          </a:p>
+          <a:p>
+            <a:pPr>
+              <a:defRPr b="1" sz="1050">
+                <a:solidFill>
+                  <a:srgbClr val="38BDF8"/>
+                </a:solidFill>
+              </a:defRPr>
+            </a:pPr>
+            <a:r>
+              <a:t>• AI-Assisted Prototyping &amp; Development: </a:t>
             </a:r>
           </a:p>
           <a:p>
             <a:pPr>
               <a:spcAft>
-                <a:spcPts val="700"/>
+                <a:spcPts val="600"/>
               </a:spcAft>
-              <a:defRPr sz="1050">
-                <a:solidFill>
-                  <a:srgbClr val="E2E8F0"/>
-                </a:solidFill>
-              </a:defRPr>
-            </a:pPr>
-            <a:r>
-              <a:t>• Robust Cybersecurity &amp; Risk Mitigation: Protecting critical blueprints, intellectual property, and supply chain integrity with Zero Trust governance.</a:t>
-            </a:r>
-          </a:p>
-          <a:p>
-            <a:pPr>
-              <a:spcAft>
-                <a:spcPts val="700"/>
-              </a:spcAft>
-              <a:defRPr sz="1050">
-                <a:solidFill>
-                  <a:srgbClr val="E2E8F0"/>
-                </a:solidFill>
-              </a:defRPr>
-            </a:pPr>
-            <a:r>
-              <a:t>• Collaborative Culture &amp; Team Growth: Mentoring high-performing IT talent while upholding Japanese corporate standards of precision, quality, and mutual respect.</a:t>
+              <a:defRPr sz="950">
+                <a:solidFill>
+                  <a:srgbClr val="CBD5E1"/>
+                </a:solidFill>
+              </a:defRPr>
+            </a:pPr>
+            <a:r>
+              <a:t>  Incorporate generative AI and automation tools into early product discovery and asset creation pipelines, cutting design-to-code iteration cycles by 40%.</a:t>
             </a:r>
           </a:p>
           <a:p>
@@ -5438,16 +4714,12 @@
             <a:pPr>
               <a:defRPr sz="1100" b="1">
                 <a:solidFill>
-                  <a:srgbClr val="38BDF8"/>
-                </a:solidFill>
-              </a:defRPr>
-            </a:pPr>
-            <a:r>
-              <a:t>Thank you for the opportunity. I look forward to our Final Interview discussion.</a:t>
-            </a:r>
-            <a:br/>
-            <a:r>
-              <a:t>Maheshchandra Hegde  |  hid.mahesh@gmail.com  |  +91 9535253329 / +91 7022407280</a:t>
+                  <a:srgbClr val="FFFFFF"/>
+                </a:solidFill>
+              </a:defRPr>
+            </a:pPr>
+            <a:r>
+              <a:t>Maheshchandra Hegde  |  hid.mahesh@gmail.com  |  +91 9535253329 / 7022407280  |  hegdemahesh.in</a:t>
             </a:r>
           </a:p>
         </p:txBody>
@@ -5482,7 +4754,7 @@
               </a:defRPr>
             </a:pPr>
             <a:r>
-              <a:t>Obayashi Corporation · Senior Manager – IT Candidate Portfolio | Maheshchandra Hegde · Slide 12 of 12</a:t>
+              <a:t>Maheshchandra Hegde · Technical Work Experience &amp; Capability Presentation | Slide 11 of 11</a:t>
             </a:r>
           </a:p>
         </p:txBody>
@@ -5571,9 +4843,9 @@
           <a:lstStyle/>
           <a:p>
             <a:pPr>
-              <a:defRPr sz="1100" b="1">
-                <a:solidFill>
-                  <a:srgbClr val="004E96"/>
+              <a:defRPr sz="1050" b="1">
+                <a:solidFill>
+                  <a:srgbClr val="0E7490"/>
                 </a:solidFill>
               </a:defRPr>
             </a:pPr>
@@ -5608,12 +4880,12 @@
             <a:pPr>
               <a:defRPr sz="2100" b="1">
                 <a:solidFill>
-                  <a:srgbClr val="0F1E36"/>
-                </a:solidFill>
-              </a:defRPr>
-            </a:pPr>
-            <a:r>
-              <a:t>Strategic Leadership Profile &amp; Alignment with Obayashi Corporation</a:t>
+                  <a:srgbClr val="0F172A"/>
+                </a:solidFill>
+              </a:defRPr>
+            </a:pPr>
+            <a:r>
+              <a:t>Professional Background, Architectural Heritage &amp; Technical Philosophy</a:t>
             </a:r>
           </a:p>
         </p:txBody>
@@ -5670,7 +4942,7 @@
         <p:spPr>
           <a:xfrm>
             <a:off x="731520" y="1463040"/>
-            <a:ext cx="3840480" cy="4754880"/>
+            <a:ext cx="5120640" cy="4754880"/>
           </a:xfrm>
           <a:prstGeom prst="roundRect">
             <a:avLst/>
@@ -5708,14 +4980,92 @@
       </p:sp>
       <p:sp>
         <p:nvSpPr>
-          <p:cNvPr id="7" name="TextBox 6"/>
+          <p:cNvPr id="7" name="Rectangle 6"/>
+          <p:cNvSpPr/>
+          <p:nvPr/>
+        </p:nvSpPr>
+        <p:spPr>
+          <a:xfrm>
+            <a:off x="740664" y="1472184"/>
+            <a:ext cx="5102352" cy="384048"/>
+          </a:xfrm>
+          <a:prstGeom prst="rect">
+            <a:avLst/>
+          </a:prstGeom>
+          <a:solidFill>
+            <a:srgbClr val="0E7490"/>
+          </a:solidFill>
+          <a:ln>
+            <a:noFill/>
+          </a:ln>
+        </p:spPr>
+        <p:style>
+          <a:lnRef idx="1">
+            <a:schemeClr val="accent1"/>
+          </a:lnRef>
+          <a:fillRef idx="3">
+            <a:schemeClr val="accent1"/>
+          </a:fillRef>
+          <a:effectRef idx="2">
+            <a:schemeClr val="accent1"/>
+          </a:effectRef>
+          <a:fontRef idx="minor">
+            <a:schemeClr val="lt1"/>
+          </a:fontRef>
+        </p:style>
+        <p:txBody>
+          <a:bodyPr rtlCol="0" anchor="ctr"/>
+          <a:lstStyle/>
+          <a:p>
+            <a:pPr algn="ctr"/>
+          </a:p>
+        </p:txBody>
+      </p:sp>
+      <p:sp>
+        <p:nvSpPr>
+          <p:cNvPr id="8" name="TextBox 7"/>
           <p:cNvSpPr txBox="1"/>
           <p:nvPr/>
         </p:nvSpPr>
         <p:spPr>
           <a:xfrm>
-            <a:off x="960120" y="1645920"/>
-            <a:ext cx="3383280" cy="4389120"/>
+            <a:off x="868680" y="1536192"/>
+            <a:ext cx="4846320" cy="320040"/>
+          </a:xfrm>
+          <a:prstGeom prst="rect">
+            <a:avLst/>
+          </a:prstGeom>
+          <a:noFill/>
+        </p:spPr>
+        <p:txBody>
+          <a:bodyPr wrap="none">
+            <a:spAutoFit/>
+          </a:bodyPr>
+          <a:lstStyle/>
+          <a:p>
+            <a:pPr>
+              <a:defRPr sz="1100" b="1">
+                <a:solidFill>
+                  <a:srgbClr val="FFFFFF"/>
+                </a:solidFill>
+              </a:defRPr>
+            </a:pPr>
+            <a:r>
+              <a:t>ARCHITECTURAL LINEAGE &amp; PASSION FOR 3D</a:t>
+            </a:r>
+          </a:p>
+        </p:txBody>
+      </p:sp>
+      <p:sp>
+        <p:nvSpPr>
+          <p:cNvPr id="9" name="TextBox 8"/>
+          <p:cNvSpPr txBox="1"/>
+          <p:nvPr/>
+        </p:nvSpPr>
+        <p:spPr>
+          <a:xfrm>
+            <a:off x="914400" y="1965960"/>
+            <a:ext cx="4754880" cy="4114800"/>
           </a:xfrm>
           <a:prstGeom prst="rect">
             <a:avLst/>
@@ -5730,180 +5080,52 @@
           <a:p>
             <a:pPr>
               <a:spcAft>
-                <a:spcPts val="400"/>
-              </a:spcAft>
-              <a:defRPr sz="1800" b="1">
-                <a:solidFill>
-                  <a:srgbClr val="0F1E36"/>
-                </a:solidFill>
-              </a:defRPr>
-            </a:pPr>
-            <a:r>
-              <a:t>Maheshchandra Hegde</a:t>
-            </a:r>
-          </a:p>
-          <a:p>
-            <a:pPr>
-              <a:spcAft>
-                <a:spcPts val="1200"/>
-              </a:spcAft>
-              <a:defRPr sz="1100" b="1">
-                <a:solidFill>
-                  <a:srgbClr val="004E96"/>
-                </a:solidFill>
-              </a:defRPr>
-            </a:pPr>
-            <a:r>
-              <a:t>Technology Leader · Systems Architect · 3D Spatial Expert</a:t>
-            </a:r>
-          </a:p>
-          <a:p>
-            <a:pPr>
-              <a:defRPr b="1" sz="1000">
-                <a:solidFill>
-                  <a:srgbClr val="0F1E36"/>
-                </a:solidFill>
-              </a:defRPr>
-            </a:pPr>
-            <a:r>
-              <a:t>• Total Experience: </a:t>
-            </a:r>
-          </a:p>
-          <a:p>
-            <a:pPr>
-              <a:spcAft>
                 <a:spcPts val="600"/>
               </a:spcAft>
+              <a:defRPr sz="1300" b="1">
+                <a:solidFill>
+                  <a:srgbClr val="0F172A"/>
+                </a:solidFill>
+              </a:defRPr>
+            </a:pPr>
+            <a:r>
+              <a:t>Natural Convergence of Architecture and Computing</a:t>
+            </a:r>
+          </a:p>
+          <a:p>
+            <a:pPr>
               <a:defRPr sz="950">
                 <a:solidFill>
-                  <a:srgbClr val="64748B"/>
-                </a:solidFill>
-              </a:defRPr>
-            </a:pPr>
-            <a:r>
-              <a:t>  20+ Years leading enterprise IT, systems architectures &amp; digital delivery</a:t>
-            </a:r>
-          </a:p>
-          <a:p>
-            <a:pPr>
-              <a:defRPr b="1" sz="1000">
-                <a:solidFill>
-                  <a:srgbClr val="0F1E36"/>
-                </a:solidFill>
-              </a:defRPr>
-            </a:pPr>
-            <a:r>
-              <a:t>• Education: </a:t>
-            </a:r>
-          </a:p>
-          <a:p>
-            <a:pPr>
-              <a:spcAft>
-                <a:spcPts val="600"/>
-              </a:spcAft>
-              <a:defRPr sz="950">
-                <a:solidFill>
-                  <a:srgbClr val="64748B"/>
-                </a:solidFill>
-              </a:defRPr>
-            </a:pPr>
-            <a:r>
-              <a:t>  MS in Computing (Robert Gordon Univ., UK) · B.E. in Electronics &amp; Communication</a:t>
-            </a:r>
-          </a:p>
-          <a:p>
-            <a:pPr>
-              <a:defRPr b="1" sz="1000">
-                <a:solidFill>
-                  <a:srgbClr val="0F1E36"/>
-                </a:solidFill>
-              </a:defRPr>
-            </a:pPr>
-            <a:r>
-              <a:t>• Key Tenures: </a:t>
-            </a:r>
-          </a:p>
-          <a:p>
-            <a:pPr>
-              <a:spcAft>
-                <a:spcPts val="600"/>
-              </a:spcAft>
-              <a:defRPr sz="950">
-                <a:solidFill>
-                  <a:srgbClr val="64748B"/>
-                </a:solidFill>
-              </a:defRPr>
-            </a:pPr>
-            <a:r>
-              <a:t>  Cyient (Philips Critical Care), Technoyana, UST Global (Cisco Systems), CAE Simulation, Cognizant</a:t>
-            </a:r>
-          </a:p>
-          <a:p>
-            <a:pPr>
-              <a:defRPr b="1" sz="1000">
-                <a:solidFill>
-                  <a:srgbClr val="0F1E36"/>
-                </a:solidFill>
-              </a:defRPr>
-            </a:pPr>
-            <a:r>
-              <a:t>• Dual Mastery: </a:t>
-            </a:r>
-          </a:p>
-          <a:p>
-            <a:pPr>
-              <a:spcAft>
-                <a:spcPts val="600"/>
-              </a:spcAft>
-              <a:defRPr sz="950">
-                <a:solidFill>
-                  <a:srgbClr val="64748B"/>
-                </a:solidFill>
-              </a:defRPr>
-            </a:pPr>
-            <a:r>
-              <a:t>  Enterprise IT Infrastructure / Cyber + 3D Visualization, CAD, BIM alignment &amp; Spatial AI</a:t>
-            </a:r>
-          </a:p>
-          <a:p>
-            <a:pPr>
-              <a:defRPr b="1" sz="1000">
-                <a:solidFill>
-                  <a:srgbClr val="0F1E36"/>
-                </a:solidFill>
-              </a:defRPr>
-            </a:pPr>
-            <a:r>
-              <a:t>• Industry Domain: </a:t>
-            </a:r>
-          </a:p>
-          <a:p>
-            <a:pPr>
-              <a:spcAft>
-                <a:spcPts val="600"/>
-              </a:spcAft>
-              <a:defRPr sz="950">
-                <a:solidFill>
-                  <a:srgbClr val="64748B"/>
-                </a:solidFill>
-              </a:defRPr>
-            </a:pPr>
-            <a:r>
-              <a:t>  High-Reliability Healthcare, Enterprise Networking Dashboards, 3D Graphics &amp; SaaS</a:t>
-            </a:r>
-          </a:p>
-        </p:txBody>
-      </p:sp>
-      <p:sp>
-        <p:nvSpPr>
-          <p:cNvPr id="8" name="Rounded Rectangle 7"/>
+                  <a:srgbClr val="1E293B"/>
+                </a:solidFill>
+              </a:defRPr>
+            </a:pPr>
+            <a:r>
+              <a:t>• Early Foundation with Architect Father: Growing up assisting my architect father in his studio provided my earliest foundation in drafting, spatial coordination, blueprints, CAD, and architectural drawings. This practical exposure sparked an enduring passion for 3D modeling, spatial thinking, and visualization.</a:t>
+            </a:r>
+            <a:br/>
+            <a:br/>
+            <a:r>
+              <a:t>• Blending Engineering with Human Interface: Pursued formal education with a Bachelor of Engineering in Electronics &amp; Communication and a Master of Science in Computing (Robert Gordon University, UK), specializing in Human Interface Design &amp; Development.</a:t>
+            </a:r>
+            <a:br/>
+            <a:br/>
+            <a:r>
+              <a:t>• 16+ Years Hands-on Leadership: Combined rigorous software architecture with creative spatial technologies—spanning flight simulation visual databases (CAE), enterprise dashboards (Cisco), healthcare platforms (Philips), startup products (Technoyana, Twitan), and generative 3D AI (Voxelforge AI, ayam3d).</a:t>
+            </a:r>
+          </a:p>
+        </p:txBody>
+      </p:sp>
+      <p:sp>
+        <p:nvSpPr>
+          <p:cNvPr id="10" name="Rounded Rectangle 9"/>
           <p:cNvSpPr/>
           <p:nvPr/>
         </p:nvSpPr>
         <p:spPr>
           <a:xfrm>
-            <a:off x="4800600" y="1463040"/>
-            <a:ext cx="6656832" cy="1078992"/>
+            <a:off x="6108192" y="1463040"/>
+            <a:ext cx="5349240" cy="4754880"/>
           </a:xfrm>
           <a:prstGeom prst="roundRect">
             <a:avLst/>
@@ -5941,75 +5163,23 @@
       </p:sp>
       <p:sp>
         <p:nvSpPr>
-          <p:cNvPr id="9" name="TextBox 8"/>
-          <p:cNvSpPr txBox="1"/>
-          <p:nvPr/>
-        </p:nvSpPr>
-        <p:spPr>
-          <a:xfrm>
-            <a:off x="4983480" y="1572768"/>
-            <a:ext cx="6291072" cy="859536"/>
-          </a:xfrm>
-          <a:prstGeom prst="rect">
-            <a:avLst/>
-          </a:prstGeom>
-          <a:noFill/>
-        </p:spPr>
-        <p:txBody>
-          <a:bodyPr wrap="square">
-            <a:spAutoFit/>
-          </a:bodyPr>
-          <a:lstStyle/>
-          <a:p>
-            <a:pPr>
-              <a:spcAft>
-                <a:spcPts val="300"/>
-              </a:spcAft>
-              <a:defRPr sz="1200" b="1">
-                <a:solidFill>
-                  <a:srgbClr val="004E96"/>
-                </a:solidFill>
-              </a:defRPr>
-            </a:pPr>
-            <a:r>
-              <a:t>1. Multi-Site Infrastructure &amp; High Availability</a:t>
-            </a:r>
-          </a:p>
-          <a:p>
-            <a:pPr>
-              <a:defRPr sz="950">
-                <a:solidFill>
-                  <a:srgbClr val="1E293B"/>
-                </a:solidFill>
-              </a:defRPr>
-            </a:pPr>
-            <a:r>
-              <a:t>Proven expertise running mission-critical platforms demanding 99.95%+ uptime. Direct experience engineering resilient edge systems that guarantee business continuity even during remote network dropouts.</a:t>
-            </a:r>
-          </a:p>
-        </p:txBody>
-      </p:sp>
-      <p:sp>
-        <p:nvSpPr>
-          <p:cNvPr id="10" name="Rounded Rectangle 9"/>
+          <p:cNvPr id="11" name="Rectangle 10"/>
           <p:cNvSpPr/>
           <p:nvPr/>
         </p:nvSpPr>
         <p:spPr>
           <a:xfrm>
-            <a:off x="4800600" y="2688336"/>
-            <a:ext cx="6656832" cy="1078992"/>
-          </a:xfrm>
-          <a:prstGeom prst="roundRect">
+            <a:off x="6117336" y="1472184"/>
+            <a:ext cx="5330952" cy="384048"/>
+          </a:xfrm>
+          <a:prstGeom prst="rect">
             <a:avLst/>
           </a:prstGeom>
           <a:solidFill>
-            <a:srgbClr val="FFFFFF"/>
+            <a:srgbClr val="0284C7"/>
           </a:solidFill>
-          <a:ln w="12700">
-            <a:solidFill>
-              <a:srgbClr val="E2E8F0"/>
-            </a:solidFill>
+          <a:ln>
+            <a:noFill/>
           </a:ln>
         </p:spPr>
         <p:style>
@@ -6036,14 +5206,49 @@
       </p:sp>
       <p:sp>
         <p:nvSpPr>
-          <p:cNvPr id="11" name="TextBox 10"/>
+          <p:cNvPr id="12" name="TextBox 11"/>
           <p:cNvSpPr txBox="1"/>
           <p:nvPr/>
         </p:nvSpPr>
         <p:spPr>
           <a:xfrm>
-            <a:off x="4983480" y="2798064"/>
-            <a:ext cx="6291072" cy="859536"/>
+            <a:off x="6245352" y="1536192"/>
+            <a:ext cx="5074920" cy="320040"/>
+          </a:xfrm>
+          <a:prstGeom prst="rect">
+            <a:avLst/>
+          </a:prstGeom>
+          <a:noFill/>
+        </p:spPr>
+        <p:txBody>
+          <a:bodyPr wrap="none">
+            <a:spAutoFit/>
+          </a:bodyPr>
+          <a:lstStyle/>
+          <a:p>
+            <a:pPr>
+              <a:defRPr sz="1100" b="1">
+                <a:solidFill>
+                  <a:srgbClr val="FFFFFF"/>
+                </a:solidFill>
+              </a:defRPr>
+            </a:pPr>
+            <a:r>
+              <a:t>CAREER SNAPSHOT &amp; CORE COMPETENCIES</a:t>
+            </a:r>
+          </a:p>
+        </p:txBody>
+      </p:sp>
+      <p:sp>
+        <p:nvSpPr>
+          <p:cNvPr id="13" name="TextBox 12"/>
+          <p:cNvSpPr txBox="1"/>
+          <p:nvPr/>
+        </p:nvSpPr>
+        <p:spPr>
+          <a:xfrm>
+            <a:off x="6291072" y="1965960"/>
+            <a:ext cx="4983480" cy="4114800"/>
           </a:xfrm>
           <a:prstGeom prst="rect">
             <a:avLst/>
@@ -6057,226 +5262,144 @@
           <a:lstStyle/>
           <a:p>
             <a:pPr>
+              <a:defRPr b="1" sz="1000">
+                <a:solidFill>
+                  <a:srgbClr val="0F172A"/>
+                </a:solidFill>
+              </a:defRPr>
+            </a:pPr>
+            <a:r>
+              <a:t>• Frontend &amp; Scalable Architecture: </a:t>
+            </a:r>
+          </a:p>
+          <a:p>
+            <a:pPr>
               <a:spcAft>
-                <a:spcPts val="300"/>
+                <a:spcPts val="400"/>
               </a:spcAft>
-              <a:defRPr sz="1200" b="1">
-                <a:solidFill>
-                  <a:srgbClr val="004E96"/>
-                </a:solidFill>
-              </a:defRPr>
-            </a:pPr>
-            <a:r>
-              <a:t>2. Cybersecurity Governance &amp; Risk Mitigation</a:t>
-            </a:r>
-          </a:p>
-          <a:p>
-            <a:pPr>
-              <a:defRPr sz="950">
-                <a:solidFill>
-                  <a:srgbClr val="1E293B"/>
-                </a:solidFill>
-              </a:defRPr>
-            </a:pPr>
-            <a:r>
-              <a:t>Strict adherence to compliance frameworks, role-based access governance (RBAC), data protection policies, secure CI/CD pipelines, and active threat vulnerability management.</a:t>
-            </a:r>
-          </a:p>
-        </p:txBody>
-      </p:sp>
-      <p:sp>
-        <p:nvSpPr>
-          <p:cNvPr id="12" name="Rounded Rectangle 11"/>
-          <p:cNvSpPr/>
-          <p:nvPr/>
-        </p:nvSpPr>
-        <p:spPr>
-          <a:xfrm>
-            <a:off x="4800600" y="3913632"/>
-            <a:ext cx="6656832" cy="1078992"/>
-          </a:xfrm>
-          <a:prstGeom prst="roundRect">
-            <a:avLst/>
-          </a:prstGeom>
-          <a:solidFill>
-            <a:srgbClr val="FFFFFF"/>
-          </a:solidFill>
-          <a:ln w="12700">
-            <a:solidFill>
-              <a:srgbClr val="E2E8F0"/>
-            </a:solidFill>
-          </a:ln>
-        </p:spPr>
-        <p:style>
-          <a:lnRef idx="1">
-            <a:schemeClr val="accent1"/>
-          </a:lnRef>
-          <a:fillRef idx="3">
-            <a:schemeClr val="accent1"/>
-          </a:fillRef>
-          <a:effectRef idx="2">
-            <a:schemeClr val="accent1"/>
-          </a:effectRef>
-          <a:fontRef idx="minor">
-            <a:schemeClr val="lt1"/>
-          </a:fontRef>
-        </p:style>
-        <p:txBody>
-          <a:bodyPr rtlCol="0" anchor="ctr"/>
-          <a:lstStyle/>
-          <a:p>
-            <a:pPr algn="ctr"/>
-          </a:p>
-        </p:txBody>
-      </p:sp>
-      <p:sp>
-        <p:nvSpPr>
-          <p:cNvPr id="13" name="TextBox 12"/>
-          <p:cNvSpPr txBox="1"/>
-          <p:nvPr/>
-        </p:nvSpPr>
-        <p:spPr>
-          <a:xfrm>
-            <a:off x="4983480" y="4023360"/>
-            <a:ext cx="6291072" cy="859536"/>
-          </a:xfrm>
-          <a:prstGeom prst="rect">
-            <a:avLst/>
-          </a:prstGeom>
-          <a:noFill/>
-        </p:spPr>
-        <p:txBody>
-          <a:bodyPr wrap="square">
-            <a:spAutoFit/>
-          </a:bodyPr>
-          <a:lstStyle/>
+              <a:defRPr sz="900">
+                <a:solidFill>
+                  <a:srgbClr val="64748B"/>
+                </a:solidFill>
+              </a:defRPr>
+            </a:pPr>
+            <a:r>
+              <a:t>  React, Angular, TypeScript, Node.js, Web Components, Micro-frontends, LitElement, Design Systems.</a:t>
+            </a:r>
+          </a:p>
+          <a:p>
+            <a:pPr>
+              <a:defRPr b="1" sz="1000">
+                <a:solidFill>
+                  <a:srgbClr val="0F172A"/>
+                </a:solidFill>
+              </a:defRPr>
+            </a:pPr>
+            <a:r>
+              <a:t>• Cloud, Edge &amp; Reliability: </a:t>
+            </a:r>
+          </a:p>
           <a:p>
             <a:pPr>
               <a:spcAft>
-                <a:spcPts val="300"/>
+                <a:spcPts val="400"/>
               </a:spcAft>
-              <a:defRPr sz="1200" b="1">
-                <a:solidFill>
-                  <a:srgbClr val="004E96"/>
-                </a:solidFill>
-              </a:defRPr>
-            </a:pPr>
-            <a:r>
-              <a:t>3. 3D Spatial Computing &amp; Digital Construction Synergy</a:t>
-            </a:r>
-          </a:p>
-          <a:p>
-            <a:pPr>
-              <a:defRPr sz="950">
-                <a:solidFill>
-                  <a:srgbClr val="1E293B"/>
-                </a:solidFill>
-              </a:defRPr>
-            </a:pPr>
-            <a:r>
-              <a:t>Rare blend of enterprise IT governance and hands-on 3D visualization expertise (50+ projects, Voxelforge AI, ayam3d), directly bridging traditional IT with Obayashi's BIM and Digital Twin roadmaps.</a:t>
-            </a:r>
-          </a:p>
-        </p:txBody>
-      </p:sp>
-      <p:sp>
-        <p:nvSpPr>
-          <p:cNvPr id="14" name="Rounded Rectangle 13"/>
-          <p:cNvSpPr/>
-          <p:nvPr/>
-        </p:nvSpPr>
-        <p:spPr>
-          <a:xfrm>
-            <a:off x="4800600" y="5138928"/>
-            <a:ext cx="6656832" cy="1078992"/>
-          </a:xfrm>
-          <a:prstGeom prst="roundRect">
-            <a:avLst/>
-          </a:prstGeom>
-          <a:solidFill>
-            <a:srgbClr val="FFFFFF"/>
-          </a:solidFill>
-          <a:ln w="12700">
-            <a:solidFill>
-              <a:srgbClr val="E2E8F0"/>
-            </a:solidFill>
-          </a:ln>
-        </p:spPr>
-        <p:style>
-          <a:lnRef idx="1">
-            <a:schemeClr val="accent1"/>
-          </a:lnRef>
-          <a:fillRef idx="3">
-            <a:schemeClr val="accent1"/>
-          </a:fillRef>
-          <a:effectRef idx="2">
-            <a:schemeClr val="accent1"/>
-          </a:effectRef>
-          <a:fontRef idx="minor">
-            <a:schemeClr val="lt1"/>
-          </a:fontRef>
-        </p:style>
-        <p:txBody>
-          <a:bodyPr rtlCol="0" anchor="ctr"/>
-          <a:lstStyle/>
-          <a:p>
-            <a:pPr algn="ctr"/>
-          </a:p>
-        </p:txBody>
-      </p:sp>
-      <p:sp>
-        <p:nvSpPr>
-          <p:cNvPr id="15" name="TextBox 14"/>
-          <p:cNvSpPr txBox="1"/>
-          <p:nvPr/>
-        </p:nvSpPr>
-        <p:spPr>
-          <a:xfrm>
-            <a:off x="4983480" y="5248656"/>
-            <a:ext cx="6291072" cy="859536"/>
-          </a:xfrm>
-          <a:prstGeom prst="rect">
-            <a:avLst/>
-          </a:prstGeom>
-          <a:noFill/>
-        </p:spPr>
-        <p:txBody>
-          <a:bodyPr wrap="square">
-            <a:spAutoFit/>
-          </a:bodyPr>
-          <a:lstStyle/>
+              <a:defRPr sz="900">
+                <a:solidFill>
+                  <a:srgbClr val="64748B"/>
+                </a:solidFill>
+              </a:defRPr>
+            </a:pPr>
+            <a:r>
+              <a:t>  GCP, Firebase, AWS, offline-first architectures, IndexedDB/Service Workers, WebSockets, real-time data sync.</a:t>
+            </a:r>
+          </a:p>
+          <a:p>
+            <a:pPr>
+              <a:defRPr b="1" sz="1000">
+                <a:solidFill>
+                  <a:srgbClr val="0F172A"/>
+                </a:solidFill>
+              </a:defRPr>
+            </a:pPr>
+            <a:r>
+              <a:t>• Spatial 3D &amp; Generative AI: </a:t>
+            </a:r>
+          </a:p>
           <a:p>
             <a:pPr>
               <a:spcAft>
-                <a:spcPts val="300"/>
+                <a:spcPts val="400"/>
               </a:spcAft>
-              <a:defRPr sz="1200" b="1">
-                <a:solidFill>
-                  <a:srgbClr val="004E96"/>
-                </a:solidFill>
-              </a:defRPr>
-            </a:pPr>
-            <a:r>
-              <a:t>4. Team Empowerment, Vendor Governance &amp; Fiscal Discipline</a:t>
-            </a:r>
-          </a:p>
-          <a:p>
-            <a:pPr>
-              <a:defRPr sz="950">
-                <a:solidFill>
-                  <a:srgbClr val="1E293B"/>
-                </a:solidFill>
-              </a:defRPr>
-            </a:pPr>
-            <a:r>
-              <a:t>Led cross-functional squads of engineers, QA, and analysts. Successfully managed third-party vendor contracts, cloud budgets (AWS/Azure/GCP), and SLA compliance.</a:t>
-            </a:r>
-          </a:p>
-        </p:txBody>
-      </p:sp>
-      <p:sp>
-        <p:nvSpPr>
-          <p:cNvPr id="16" name="TextBox 15"/>
+              <a:defRPr sz="900">
+                <a:solidFill>
+                  <a:srgbClr val="64748B"/>
+                </a:solidFill>
+              </a:defRPr>
+            </a:pPr>
+            <a:r>
+              <a:t>  AI-assisted 3D generation (Voxelforge AI), automated mesh retopology (ayam3d), WebGL, Three.js, CAD drafting, 3D walkthroughs.</a:t>
+            </a:r>
+          </a:p>
+          <a:p>
+            <a:pPr>
+              <a:defRPr b="1" sz="1000">
+                <a:solidFill>
+                  <a:srgbClr val="0F172A"/>
+                </a:solidFill>
+              </a:defRPr>
+            </a:pPr>
+            <a:r>
+              <a:t>• Product &amp; Startup Leadership: </a:t>
+            </a:r>
+          </a:p>
+          <a:p>
+            <a:pPr>
+              <a:spcAft>
+                <a:spcPts val="400"/>
+              </a:spcAft>
+              <a:defRPr sz="900">
+                <a:solidFill>
+                  <a:srgbClr val="64748B"/>
+                </a:solidFill>
+              </a:defRPr>
+            </a:pPr>
+            <a:r>
+              <a:t>  Founder/Co-Founder across Technoyana, Twitan.com, SrushtiLabs, InnoBrik; product strategy, sprint governance, mentoring.</a:t>
+            </a:r>
+          </a:p>
+          <a:p>
+            <a:pPr>
+              <a:defRPr b="1" sz="1000">
+                <a:solidFill>
+                  <a:srgbClr val="0F172A"/>
+                </a:solidFill>
+              </a:defRPr>
+            </a:pPr>
+            <a:r>
+              <a:t>• Key Industry Tenures: </a:t>
+            </a:r>
+          </a:p>
+          <a:p>
+            <a:pPr>
+              <a:spcAft>
+                <a:spcPts val="400"/>
+              </a:spcAft>
+              <a:defRPr sz="900">
+                <a:solidFill>
+                  <a:srgbClr val="64748B"/>
+                </a:solidFill>
+              </a:defRPr>
+            </a:pPr>
+            <a:r>
+              <a:t>  Cyient (Philips Healthcare), UST Global (Cisco Systems), Ness Technologies, Moonraft Innovation Labs, ThoughtFocus, CAE Simulation.</a:t>
+            </a:r>
+          </a:p>
+        </p:txBody>
+      </p:sp>
+      <p:sp>
+        <p:nvSpPr>
+          <p:cNvPr id="14" name="TextBox 13"/>
           <p:cNvSpPr txBox="1"/>
           <p:nvPr/>
         </p:nvSpPr>
@@ -6304,7 +5427,7 @@
               </a:defRPr>
             </a:pPr>
             <a:r>
-              <a:t>Obayashi Corporation · Senior Manager – IT Candidate Portfolio | Maheshchandra Hegde · Slide 2 of 12</a:t>
+              <a:t>Maheshchandra Hegde · Technical Work Experience &amp; Capability Presentation | Slide 2 of 11</a:t>
             </a:r>
           </a:p>
         </p:txBody>
@@ -6393,14 +5516,14 @@
           <a:lstStyle/>
           <a:p>
             <a:pPr>
-              <a:defRPr sz="1100" b="1">
-                <a:solidFill>
-                  <a:srgbClr val="004E96"/>
-                </a:solidFill>
-              </a:defRPr>
-            </a:pPr>
-            <a:r>
-              <a:t>PROJECT EXPERIENCE 1</a:t>
+              <a:defRPr sz="1050" b="1">
+                <a:solidFill>
+                  <a:srgbClr val="0E7490"/>
+                </a:solidFill>
+              </a:defRPr>
+            </a:pPr>
+            <a:r>
+              <a:t>ENTERPRISE PROJECT EXPERIENCE 1</a:t>
             </a:r>
           </a:p>
         </p:txBody>
@@ -6430,12 +5553,12 @@
             <a:pPr>
               <a:defRPr sz="2100" b="1">
                 <a:solidFill>
-                  <a:srgbClr val="0F1E36"/>
-                </a:solidFill>
-              </a:defRPr>
-            </a:pPr>
-            <a:r>
-              <a:t>Project Overview: Mission-Critical Clinical Systems (Philips / Cyient)</a:t>
+                  <a:srgbClr val="0F172A"/>
+                </a:solidFill>
+              </a:defRPr>
+            </a:pPr>
+            <a:r>
+              <a:t>Healthcare Mission-Critical Systems: Philips ICCA (Cyient Limited)</a:t>
             </a:r>
           </a:p>
         </p:txBody>
@@ -6556,7 +5679,7 @@
               </a:spcAft>
               <a:defRPr sz="1700" b="1">
                 <a:solidFill>
-                  <a:srgbClr val="0F1E36"/>
+                  <a:srgbClr val="0F172A"/>
                 </a:solidFill>
               </a:defRPr>
             </a:pPr>
@@ -6571,19 +5694,19 @@
               </a:spcAft>
               <a:defRPr sz="1100" b="1">
                 <a:solidFill>
-                  <a:srgbClr val="004E96"/>
-                </a:solidFill>
-              </a:defRPr>
-            </a:pPr>
-            <a:r>
-              <a:t>Intellispace Critical Care &amp; Anesthesia Platform</a:t>
+                  <a:srgbClr val="0E7490"/>
+                </a:solidFill>
+              </a:defRPr>
+            </a:pPr>
+            <a:r>
+              <a:t>Intellispace Critical Care &amp; Anesthesia</a:t>
             </a:r>
           </a:p>
           <a:p>
             <a:pPr>
               <a:defRPr b="1" sz="1000">
                 <a:solidFill>
-                  <a:srgbClr val="0F1E36"/>
+                  <a:srgbClr val="0F172A"/>
                 </a:solidFill>
               </a:defRPr>
             </a:pPr>
@@ -6594,23 +5717,23 @@
           <a:p>
             <a:pPr>
               <a:spcAft>
-                <a:spcPts val="600"/>
+                <a:spcPts val="500"/>
               </a:spcAft>
-              <a:defRPr sz="950">
+              <a:defRPr sz="900">
                 <a:solidFill>
                   <a:srgbClr val="64748B"/>
                 </a:solidFill>
               </a:defRPr>
             </a:pPr>
             <a:r>
-              <a:t>Senior Technical Lead / Systems Architect</a:t>
+              <a:t>Senior Technical Lead (React / NodeJS)</a:t>
             </a:r>
           </a:p>
           <a:p>
             <a:pPr>
               <a:defRPr b="1" sz="1000">
                 <a:solidFill>
-                  <a:srgbClr val="0F1E36"/>
+                  <a:srgbClr val="0F172A"/>
                 </a:solidFill>
               </a:defRPr>
             </a:pPr>
@@ -6621,97 +5744,97 @@
           <a:p>
             <a:pPr>
               <a:spcAft>
-                <a:spcPts val="600"/>
+                <a:spcPts val="500"/>
               </a:spcAft>
-              <a:defRPr sz="950">
+              <a:defRPr sz="900">
                 <a:solidFill>
                   <a:srgbClr val="64748B"/>
                 </a:solidFill>
               </a:defRPr>
             </a:pPr>
             <a:r>
-              <a:t>Nov 2023 - Mar 2025</a:t>
+              <a:t>Nov 2023 – Mar 2025</a:t>
             </a:r>
           </a:p>
           <a:p>
             <a:pPr>
               <a:defRPr b="1" sz="1000">
                 <a:solidFill>
-                  <a:srgbClr val="0F1E36"/>
-                </a:solidFill>
-              </a:defRPr>
-            </a:pPr>
-            <a:r>
-              <a:t>Scale: </a:t>
+                  <a:srgbClr val="0F172A"/>
+                </a:solidFill>
+              </a:defRPr>
+            </a:pPr>
+            <a:r>
+              <a:t>Company: </a:t>
             </a:r>
           </a:p>
           <a:p>
             <a:pPr>
               <a:spcAft>
-                <a:spcPts val="600"/>
+                <a:spcPts val="500"/>
               </a:spcAft>
-              <a:defRPr sz="950">
+              <a:defRPr sz="900">
                 <a:solidFill>
                   <a:srgbClr val="64748B"/>
                 </a:solidFill>
               </a:defRPr>
             </a:pPr>
             <a:r>
-              <a:t>Enterprise Global Hospital Deployments &amp; High-Availability Clinical ICU Units</a:t>
+              <a:t>Cyient Limited for Philips Healthcare, Bangalore</a:t>
             </a:r>
           </a:p>
           <a:p>
             <a:pPr>
               <a:defRPr b="1" sz="1000">
                 <a:solidFill>
-                  <a:srgbClr val="0F1E36"/>
-                </a:solidFill>
-              </a:defRPr>
-            </a:pPr>
-            <a:r>
-              <a:t>Domain Context: </a:t>
+                  <a:srgbClr val="0F172A"/>
+                </a:solidFill>
+              </a:defRPr>
+            </a:pPr>
+            <a:r>
+              <a:t>Operational Reality: </a:t>
             </a:r>
           </a:p>
           <a:p>
             <a:pPr>
               <a:spcAft>
-                <a:spcPts val="600"/>
+                <a:spcPts val="500"/>
               </a:spcAft>
-              <a:defRPr sz="950">
+              <a:defRPr sz="900">
                 <a:solidFill>
                   <a:srgbClr val="64748B"/>
                 </a:solidFill>
               </a:defRPr>
             </a:pPr>
             <a:r>
-              <a:t>Life-critical, real-time patient monitoring, zero-latency clinical alerts &amp; strict regulatory compliance</a:t>
+              <a:t>24/7 continuous ICU hospital environments; zero tolerance for UI freeze or missing patient vitals</a:t>
             </a:r>
           </a:p>
           <a:p>
             <a:pPr>
               <a:defRPr b="1" sz="1000">
                 <a:solidFill>
-                  <a:srgbClr val="0F1E36"/>
-                </a:solidFill>
-              </a:defRPr>
-            </a:pPr>
-            <a:r>
-              <a:t>Tech Ecosystem: </a:t>
+                  <a:srgbClr val="0F172A"/>
+                </a:solidFill>
+              </a:defRPr>
+            </a:pPr>
+            <a:r>
+              <a:t>Key Focus: </a:t>
             </a:r>
           </a:p>
           <a:p>
             <a:pPr>
               <a:spcAft>
-                <a:spcPts val="600"/>
+                <a:spcPts val="500"/>
               </a:spcAft>
-              <a:defRPr sz="950">
+              <a:defRPr sz="900">
                 <a:solidFill>
                   <a:srgbClr val="64748B"/>
                 </a:solidFill>
               </a:defRPr>
             </a:pPr>
             <a:r>
-              <a:t>React, Node.js, Micro-frontends, REST/WebSocket APIs, Secure Auth, Enterprise Telemetry</a:t>
+              <a:t>Scalable frontend architecture, high performance, strict healthcare standards compliance</a:t>
             </a:r>
           </a:p>
         </p:txBody>
@@ -6787,26 +5910,26 @@
               <a:spcAft>
                 <a:spcPts val="500"/>
               </a:spcAft>
-              <a:defRPr sz="1250" b="1">
-                <a:solidFill>
-                  <a:srgbClr val="004E96"/>
-                </a:solidFill>
-              </a:defRPr>
-            </a:pPr>
-            <a:r>
-              <a:t>Strategic Objective 1: High Availability &amp; Zero-Fault Operational Resilience</a:t>
-            </a:r>
-          </a:p>
-          <a:p>
-            <a:pPr>
-              <a:defRPr sz="1000">
+              <a:defRPr sz="1200" b="1">
+                <a:solidFill>
+                  <a:srgbClr val="0284C7"/>
+                </a:solidFill>
+              </a:defRPr>
+            </a:pPr>
+            <a:r>
+              <a:t>1. High-Performance Clinical Telemetry &amp; Zero Latency</a:t>
+            </a:r>
+          </a:p>
+          <a:p>
+            <a:pPr>
+              <a:defRPr sz="950">
                 <a:solidFill>
                   <a:srgbClr val="1E293B"/>
                 </a:solidFill>
               </a:defRPr>
             </a:pPr>
             <a:r>
-              <a:t>Architect and deliver web-tier systems for ICU and anesthesia workflows where system downtime is life-threatening. Established fail-safe fallback rendering, continuous health-check telemetry, and zero unhandled state exceptions across 24/7 continuous operations.</a:t>
+              <a:t>Architected React-based frontend modules responsible for rendering complex clinical time-series charts, vitals, and medication administration workflows. Enforced strict memory management and component memoization to prevent garbage collection pauses during long-running bedside sessions.</a:t>
             </a:r>
           </a:p>
         </p:txBody>
@@ -6882,26 +6005,26 @@
               <a:spcAft>
                 <a:spcPts val="500"/>
               </a:spcAft>
-              <a:defRPr sz="1250" b="1">
-                <a:solidFill>
-                  <a:srgbClr val="004E96"/>
-                </a:solidFill>
-              </a:defRPr>
-            </a:pPr>
-            <a:r>
-              <a:t>Strategic Objective 2: Data Protection, Security &amp; Regulatory Compliance</a:t>
-            </a:r>
-          </a:p>
-          <a:p>
-            <a:pPr>
-              <a:defRPr sz="1000">
+              <a:defRPr sz="1200" b="1">
+                <a:solidFill>
+                  <a:srgbClr val="0284C7"/>
+                </a:solidFill>
+              </a:defRPr>
+            </a:pPr>
+            <a:r>
+              <a:t>2. Decoupled Modular Architecture &amp; Maintainability</a:t>
+            </a:r>
+          </a:p>
+          <a:p>
+            <a:pPr>
+              <a:defRPr sz="950">
                 <a:solidFill>
                   <a:srgbClr val="1E293B"/>
                 </a:solidFill>
               </a:defRPr>
             </a:pPr>
             <a:r>
-              <a:t>Enforce strict healthcare information security standards (HIPAA, FDA software safety benchmarks, ISO 27001 compliance). Enforced end-to-end data encryption in transit and at rest, granular role-based access (RBAC), and full audit logging of administrative and user actions.</a:t>
+              <a:t>Deconstructed complex clinical workflows into reusable, modular component libraries. Created robust contract boundaries with backend REST and streaming APIs, accelerating multi-developer collaboration while eliminating regression risks across unrelated clinical modules.</a:t>
             </a:r>
           </a:p>
         </p:txBody>
@@ -6977,26 +6100,26 @@
               <a:spcAft>
                 <a:spcPts val="500"/>
               </a:spcAft>
-              <a:defRPr sz="1250" b="1">
-                <a:solidFill>
-                  <a:srgbClr val="004E96"/>
-                </a:solidFill>
-              </a:defRPr>
-            </a:pPr>
-            <a:r>
-              <a:t>Strategic Objective 3: Scalable Modular Architecture &amp; Seamless Integration</a:t>
-            </a:r>
-          </a:p>
-          <a:p>
-            <a:pPr>
-              <a:defRPr sz="1000">
+              <a:defRPr sz="1200" b="1">
+                <a:solidFill>
+                  <a:srgbClr val="0284C7"/>
+                </a:solidFill>
+              </a:defRPr>
+            </a:pPr>
+            <a:r>
+              <a:t>3. Healthcare Regulatory &amp; Security Standards Compliance</a:t>
+            </a:r>
+          </a:p>
+          <a:p>
+            <a:pPr>
+              <a:defRPr sz="950">
                 <a:solidFill>
                   <a:srgbClr val="1E293B"/>
                 </a:solidFill>
               </a:defRPr>
             </a:pPr>
             <a:r>
-              <a:t>Transitioned monolithic legacy interfaces into a decoupled, micro-frontend architecture with standardized APIs. Enabled independent modular deployments, drastically reduced release risk, and unified clinical data feeds from diverse hardware monitors.</a:t>
+              <a:t>Ensured all developed UI modules strictly complied with medical software safety benchmarks, HIPAA data protection guidelines, role-based clinician access controls, and robust audit trails for all patient data modifications.</a:t>
             </a:r>
           </a:p>
         </p:txBody>
@@ -7031,7 +6154,7 @@
               </a:defRPr>
             </a:pPr>
             <a:r>
-              <a:t>Obayashi Corporation · Senior Manager – IT Candidate Portfolio | Maheshchandra Hegde · Slide 3 of 12</a:t>
+              <a:t>Maheshchandra Hegde · Technical Work Experience &amp; Capability Presentation | Slide 3 of 11</a:t>
             </a:r>
           </a:p>
         </p:txBody>
@@ -7120,14 +6243,14 @@
           <a:lstStyle/>
           <a:p>
             <a:pPr>
-              <a:defRPr sz="1100" b="1">
-                <a:solidFill>
-                  <a:srgbClr val="004E96"/>
-                </a:solidFill>
-              </a:defRPr>
-            </a:pPr>
-            <a:r>
-              <a:t>PROJECT EXPERIENCE 2</a:t>
+              <a:defRPr sz="1050" b="1">
+                <a:solidFill>
+                  <a:srgbClr val="0E7490"/>
+                </a:solidFill>
+              </a:defRPr>
+            </a:pPr>
+            <a:r>
+              <a:t>STARTUP VENTURES &amp; CLOUD SYSTEMS</a:t>
             </a:r>
           </a:p>
         </p:txBody>
@@ -7157,12 +6280,12 @@
             <a:pPr>
               <a:defRPr sz="2100" b="1">
                 <a:solidFill>
-                  <a:srgbClr val="0F1E36"/>
-                </a:solidFill>
-              </a:defRPr>
-            </a:pPr>
-            <a:r>
-              <a:t>Project Overview: Cloud Transformation &amp; Edge-Resilient Platform (Technoyana)</a:t>
+                  <a:srgbClr val="0F172A"/>
+                </a:solidFill>
+              </a:defRPr>
+            </a:pPr>
+            <a:r>
+              <a:t>Product Engineering &amp; Edge Resilience: Technoyana &amp; Twitan.com</a:t>
             </a:r>
           </a:p>
         </p:txBody>
@@ -7283,12 +6406,12 @@
               </a:spcAft>
               <a:defRPr sz="1700" b="1">
                 <a:solidFill>
-                  <a:srgbClr val="0F1E36"/>
-                </a:solidFill>
-              </a:defRPr>
-            </a:pPr>
-            <a:r>
-              <a:t>Technoyana Platforms</a:t>
+                  <a:srgbClr val="0F172A"/>
+                </a:solidFill>
+              </a:defRPr>
+            </a:pPr>
+            <a:r>
+              <a:t>Technoyana &amp; Twitan</a:t>
             </a:r>
           </a:p>
           <a:p>
@@ -7298,147 +6421,120 @@
               </a:spcAft>
               <a:defRPr sz="1100" b="1">
                 <a:solidFill>
-                  <a:srgbClr val="004E96"/>
-                </a:solidFill>
-              </a:defRPr>
-            </a:pPr>
-            <a:r>
-              <a:t>Digital Transformation &amp; Distributed Cloud Ecosystem</a:t>
+                  <a:srgbClr val="0284C7"/>
+                </a:solidFill>
+              </a:defRPr>
+            </a:pPr>
+            <a:r>
+              <a:t>technoyana.in | twitan.com</a:t>
             </a:r>
           </a:p>
           <a:p>
             <a:pPr>
               <a:defRPr b="1" sz="1000">
                 <a:solidFill>
-                  <a:srgbClr val="0F1E36"/>
-                </a:solidFill>
-              </a:defRPr>
-            </a:pPr>
-            <a:r>
-              <a:t>Role: </a:t>
+                  <a:srgbClr val="0F172A"/>
+                </a:solidFill>
+              </a:defRPr>
+            </a:pPr>
+            <a:r>
+              <a:t>Technoyana (2021 – 2023): </a:t>
             </a:r>
           </a:p>
           <a:p>
             <a:pPr>
               <a:spcAft>
-                <a:spcPts val="600"/>
+                <a:spcPts val="500"/>
               </a:spcAft>
-              <a:defRPr sz="950">
+              <a:defRPr sz="900">
                 <a:solidFill>
                   <a:srgbClr val="64748B"/>
                 </a:solidFill>
               </a:defRPr>
             </a:pPr>
             <a:r>
-              <a:t>Co-Founder &amp; Director of Technology / Architecture Lead</a:t>
+              <a:t>Co-Founder &amp; Director; delivered fintech apps, product discovery engines, web &amp; cross-platform mobile apps (React Native / Ionic).</a:t>
             </a:r>
           </a:p>
           <a:p>
             <a:pPr>
               <a:defRPr b="1" sz="1000">
                 <a:solidFill>
-                  <a:srgbClr val="0F1E36"/>
-                </a:solidFill>
-              </a:defRPr>
-            </a:pPr>
-            <a:r>
-              <a:t>Tenure: </a:t>
+                  <a:srgbClr val="0F172A"/>
+                </a:solidFill>
+              </a:defRPr>
+            </a:pPr>
+            <a:r>
+              <a:t>Twitan.com (Apr 2025 – Present): </a:t>
             </a:r>
           </a:p>
           <a:p>
             <a:pPr>
               <a:spcAft>
-                <a:spcPts val="600"/>
+                <a:spcPts val="500"/>
               </a:spcAft>
-              <a:defRPr sz="950">
+              <a:defRPr sz="900">
                 <a:solidFill>
                   <a:srgbClr val="64748B"/>
                 </a:solidFill>
               </a:defRPr>
             </a:pPr>
             <a:r>
-              <a:t>May 2021 - Oct 2023 (Strategic Advisor)</a:t>
+              <a:t>Founder &amp; Product Design Lead; AI-driven sports management, bracket engines &amp; live scoring (Shutlify badminton OS).</a:t>
             </a:r>
           </a:p>
           <a:p>
             <a:pPr>
               <a:defRPr b="1" sz="1000">
                 <a:solidFill>
-                  <a:srgbClr val="0F1E36"/>
-                </a:solidFill>
-              </a:defRPr>
-            </a:pPr>
-            <a:r>
-              <a:t>Key Platforms: </a:t>
+                  <a:srgbClr val="0F172A"/>
+                </a:solidFill>
+              </a:defRPr>
+            </a:pPr>
+            <a:r>
+              <a:t>Operational Reality: </a:t>
             </a:r>
           </a:p>
           <a:p>
             <a:pPr>
               <a:spcAft>
-                <a:spcPts val="600"/>
+                <a:spcPts val="500"/>
               </a:spcAft>
-              <a:defRPr sz="950">
+              <a:defRPr sz="900">
                 <a:solidFill>
                   <a:srgbClr val="64748B"/>
                 </a:solidFill>
               </a:defRPr>
             </a:pPr>
             <a:r>
-              <a:t>Twitan Sports OS (Shutlify), Fintech Operations Engine, Cloud Multi-Tenant Architecture</a:t>
+              <a:t>Tournament venues with dead-zones, unstable cellular Wi-Fi, and real-time live match arbitration.</a:t>
             </a:r>
           </a:p>
           <a:p>
             <a:pPr>
               <a:defRPr b="1" sz="1000">
                 <a:solidFill>
-                  <a:srgbClr val="0F1E36"/>
-                </a:solidFill>
-              </a:defRPr>
-            </a:pPr>
-            <a:r>
-              <a:t>Operational Reality: </a:t>
+                  <a:srgbClr val="0F172A"/>
+                </a:solidFill>
+              </a:defRPr>
+            </a:pPr>
+            <a:r>
+              <a:t>Tech Stack: </a:t>
             </a:r>
           </a:p>
           <a:p>
             <a:pPr>
               <a:spcAft>
-                <a:spcPts val="600"/>
+                <a:spcPts val="500"/>
               </a:spcAft>
-              <a:defRPr sz="950">
+              <a:defRPr sz="900">
                 <a:solidFill>
                   <a:srgbClr val="64748B"/>
                 </a:solidFill>
               </a:defRPr>
             </a:pPr>
             <a:r>
-              <a:t>High-concurrency events, remote arenas/venues with degraded cellular connectivity, multi-tenant cloud infra</a:t>
-            </a:r>
-          </a:p>
-          <a:p>
-            <a:pPr>
-              <a:defRPr b="1" sz="1000">
-                <a:solidFill>
-                  <a:srgbClr val="0F1E36"/>
-                </a:solidFill>
-              </a:defRPr>
-            </a:pPr>
-            <a:r>
-              <a:t>Relevance to Obayashi: </a:t>
-            </a:r>
-          </a:p>
-          <a:p>
-            <a:pPr>
-              <a:spcAft>
-                <a:spcPts val="600"/>
-              </a:spcAft>
-              <a:defRPr sz="950">
-                <a:solidFill>
-                  <a:srgbClr val="64748B"/>
-                </a:solidFill>
-              </a:defRPr>
-            </a:pPr>
-            <a:r>
-              <a:t>Directly mirrors remote construction site challenges: volatile network connectivity, field staff data capture, automated cloud sync</a:t>
+              <a:t>React, Angular, Node.js, Firebase/GCP, PWA, IndexedDB, WebSockets.</a:t>
             </a:r>
           </a:p>
         </p:txBody>
@@ -7514,26 +6610,26 @@
               <a:spcAft>
                 <a:spcPts val="500"/>
               </a:spcAft>
-              <a:defRPr sz="1250" b="1">
-                <a:solidFill>
-                  <a:srgbClr val="004E96"/>
-                </a:solidFill>
-              </a:defRPr>
-            </a:pPr>
-            <a:r>
-              <a:t>1. Edge-Resilient 'Offline-First' Architecture for Unstable Networks</a:t>
-            </a:r>
-          </a:p>
-          <a:p>
-            <a:pPr>
-              <a:defRPr sz="1000">
+              <a:defRPr sz="1200" b="1">
+                <a:solidFill>
+                  <a:srgbClr val="0284C7"/>
+                </a:solidFill>
+              </a:defRPr>
+            </a:pPr>
+            <a:r>
+              <a:t>1. Offline-First Resilience for Unstable Physical Venues</a:t>
+            </a:r>
+          </a:p>
+          <a:p>
+            <a:pPr>
+              <a:defRPr sz="950">
                 <a:solidFill>
                   <a:srgbClr val="1E293B"/>
                 </a:solidFill>
               </a:defRPr>
             </a:pPr>
             <a:r>
-              <a:t>Architected an offline-first data model utilizing local storage, background Service Workers, and optimistic transactional queuing. When on-site network drops occur, field users continue full operations uninterrupted; bi-directional conflict resolution synchronizes cloud data the moment connectivity is restored.</a:t>
+              <a:t>Architected an offline-first state machine using IndexedDB local storage and Service Workers for courtside officials. When Wi-Fi or cellular connections fluctuate, the app operates without interruption; all scores and events queue locally and sync with conflict-resolution algorithms upon reconnection.</a:t>
             </a:r>
           </a:p>
         </p:txBody>
@@ -7609,26 +6705,26 @@
               <a:spcAft>
                 <a:spcPts val="500"/>
               </a:spcAft>
-              <a:defRPr sz="1250" b="1">
-                <a:solidFill>
-                  <a:srgbClr val="004E96"/>
-                </a:solidFill>
-              </a:defRPr>
-            </a:pPr>
-            <a:r>
-              <a:t>2. Cloud Infrastructure &amp; Cost Governance (AWS / Firebase / Serverless)</a:t>
-            </a:r>
-          </a:p>
-          <a:p>
-            <a:pPr>
-              <a:defRPr sz="1000">
+              <a:defRPr sz="1200" b="1">
+                <a:solidFill>
+                  <a:srgbClr val="0284C7"/>
+                </a:solidFill>
+              </a:defRPr>
+            </a:pPr>
+            <a:r>
+              <a:t>2. Cloud Architecture, Firebase &amp; Rapid Delivery Workflows</a:t>
+            </a:r>
+          </a:p>
+          <a:p>
+            <a:pPr>
+              <a:defRPr sz="950">
                 <a:solidFill>
                   <a:srgbClr val="1E293B"/>
                 </a:solidFill>
               </a:defRPr>
             </a:pPr>
             <a:r>
-              <a:t>Directed cloud infrastructure roadmap, automated CI/CD pipelines, containerized deployments, and disaster recovery replication. Implemented automated resource scaling and log archiving, cutting monthly cloud spend by 22% while handling 10x traffic bursts.</a:t>
+              <a:t>Set up scalable backend cloud services using GCP, Firebase, and Node.js microservices. Evaluated and optimized tech stacks for clients, drastically reducing delivery timelines for complex fintech and consumer applications while keeping cloud operating expenses lean.</a:t>
             </a:r>
           </a:p>
         </p:txBody>
@@ -7704,26 +6800,26 @@
               <a:spcAft>
                 <a:spcPts val="500"/>
               </a:spcAft>
-              <a:defRPr sz="1250" b="1">
-                <a:solidFill>
-                  <a:srgbClr val="004E96"/>
-                </a:solidFill>
-              </a:defRPr>
-            </a:pPr>
-            <a:r>
-              <a:t>3. High-Concurrency Event Telemetry &amp; Operational Uptime</a:t>
-            </a:r>
-          </a:p>
-          <a:p>
-            <a:pPr>
-              <a:defRPr sz="1000">
+              <a:defRPr sz="1200" b="1">
+                <a:solidFill>
+                  <a:srgbClr val="0284C7"/>
+                </a:solidFill>
+              </a:defRPr>
+            </a:pPr>
+            <a:r>
+              <a:t>3. Modular Athlete &amp; Tournament Dashboards</a:t>
+            </a:r>
+          </a:p>
+          <a:p>
+            <a:pPr>
+              <a:defRPr sz="950">
                 <a:solidFill>
                   <a:srgbClr val="1E293B"/>
                 </a:solidFill>
               </a:defRPr>
             </a:pPr>
             <a:r>
-              <a:t>Built resilient real-time WebSocket state channels with automatic fallback to polling, ensuring zero operational downtime for critical tournament arbitration and multi-site scoring dashboards.</a:t>
+              <a:t>Designed modular dashboards integrating live statistics, tournament bracket generation (knockout, round-robin), court scheduling engines, and analytical insights, recognized for exceptional user experience and responsiveness.</a:t>
             </a:r>
           </a:p>
         </p:txBody>
@@ -7758,7 +6854,7 @@
               </a:defRPr>
             </a:pPr>
             <a:r>
-              <a:t>Obayashi Corporation · Senior Manager – IT Candidate Portfolio | Maheshchandra Hegde · Slide 4 of 12</a:t>
+              <a:t>Maheshchandra Hegde · Technical Work Experience &amp; Capability Presentation | Slide 4 of 11</a:t>
             </a:r>
           </a:p>
         </p:txBody>
@@ -7847,14 +6943,14 @@
           <a:lstStyle/>
           <a:p>
             <a:pPr>
-              <a:defRPr sz="1100" b="1">
-                <a:solidFill>
-                  <a:srgbClr val="004E96"/>
-                </a:solidFill>
-              </a:defRPr>
-            </a:pPr>
-            <a:r>
-              <a:t>SPATIAL COMPUTING &amp; 3D ENGINEERING</a:t>
+              <a:defRPr sz="1050" b="1">
+                <a:solidFill>
+                  <a:srgbClr val="0E7490"/>
+                </a:solidFill>
+              </a:defRPr>
+            </a:pPr>
+            <a:r>
+              <a:t>GENERATIVE AI &amp; SPATIAL TECH</a:t>
             </a:r>
           </a:p>
         </p:txBody>
@@ -7884,12 +6980,12 @@
             <a:pPr>
               <a:defRPr sz="2100" b="1">
                 <a:solidFill>
-                  <a:srgbClr val="0F1E36"/>
-                </a:solidFill>
-              </a:defRPr>
-            </a:pPr>
-            <a:r>
-              <a:t>3D Visualization Pedigree &amp; Spatial AI: Voxelforge AI, ayam3d &amp; 50+ Projects</a:t>
+                  <a:srgbClr val="0F172A"/>
+                </a:solidFill>
+              </a:defRPr>
+            </a:pPr>
+            <a:r>
+              <a:t>Spatial AI &amp; Generative 3D Pipelines: SrushtiLabs (Voxelforge AI) &amp; ayam3d</a:t>
             </a:r>
           </a:p>
         </p:txBody>
@@ -7991,13 +7087,13 @@
         <p:spPr>
           <a:xfrm>
             <a:off x="740664" y="1472184"/>
-            <a:ext cx="5102352" cy="402336"/>
+            <a:ext cx="5102352" cy="384048"/>
           </a:xfrm>
           <a:prstGeom prst="rect">
             <a:avLst/>
           </a:prstGeom>
           <a:solidFill>
-            <a:srgbClr val="004E96"/>
+            <a:srgbClr val="0E7490"/>
           </a:solidFill>
           <a:ln>
             <a:noFill/>
@@ -8055,7 +7151,7 @@
               </a:defRPr>
             </a:pPr>
             <a:r>
-              <a:t>3D VISUALIZER EXPERT: 50+ PROJECTS DELIVERED</a:t>
+              <a:t>VOXELFORGE AI (srushtilabs.com/voxelforge/)</a:t>
             </a:r>
           </a:p>
         </p:txBody>
@@ -8084,121 +7180,43 @@
           <a:p>
             <a:pPr>
               <a:spcAft>
-                <a:spcPts val="200"/>
-              </a:spcAft>
-              <a:defRPr sz="1050" b="1">
-                <a:solidFill>
-                  <a:srgbClr val="0F1E36"/>
-                </a:solidFill>
-              </a:defRPr>
-            </a:pPr>
-            <a:r>
-              <a:t>★ Architectural Visualization &amp; 3D Walkthroughs (35+ Projects)</a:t>
-            </a:r>
-          </a:p>
-          <a:p>
-            <a:pPr>
-              <a:spcAft>
                 <a:spcPts val="600"/>
               </a:spcAft>
-              <a:defRPr sz="900">
-                <a:solidFill>
-                  <a:srgbClr val="64748B"/>
-                </a:solidFill>
-              </a:defRPr>
-            </a:pPr>
-            <a:r>
-              <a:t>Extensive portfolio producing photorealistic architectural visualizations, exterior/interior 3D renderings, and high-impact 3D animated walkthroughs for commercial complexes, residential townships, and infrastructure projects.</a:t>
-            </a:r>
-          </a:p>
-          <a:p>
-            <a:pPr>
-              <a:spcAft>
-                <a:spcPts val="200"/>
-              </a:spcAft>
-              <a:defRPr sz="1050" b="1">
-                <a:solidFill>
-                  <a:srgbClr val="0F1E36"/>
-                </a:solidFill>
-              </a:defRPr>
-            </a:pPr>
-            <a:r>
-              <a:t>★ CAE Simulation Technologies (Flight Simulator 3D Databases)</a:t>
-            </a:r>
-          </a:p>
-          <a:p>
-            <a:pPr>
-              <a:spcAft>
-                <a:spcPts val="600"/>
-              </a:spcAft>
-              <a:defRPr sz="900">
-                <a:solidFill>
-                  <a:srgbClr val="64748B"/>
-                </a:solidFill>
-              </a:defRPr>
-            </a:pPr>
-            <a:r>
-              <a:t>Visual Database Developer creating high-fidelity 3D terrain databases, elevation grids, and precision 3D aircraft models for military and civil flight simulation systems.</a:t>
-            </a:r>
-          </a:p>
-          <a:p>
-            <a:pPr>
-              <a:spcAft>
-                <a:spcPts val="200"/>
-              </a:spcAft>
-              <a:defRPr sz="1050" b="1">
-                <a:solidFill>
-                  <a:srgbClr val="0F1E36"/>
-                </a:solidFill>
-              </a:defRPr>
-            </a:pPr>
-            <a:r>
-              <a:t>★ Cisco Systems: Enterprise Facility &amp; Smart Campus 3D Dashboards</a:t>
-            </a:r>
-          </a:p>
-          <a:p>
-            <a:pPr>
-              <a:spcAft>
-                <a:spcPts val="600"/>
-              </a:spcAft>
-              <a:defRPr sz="900">
-                <a:solidFill>
-                  <a:srgbClr val="64748B"/>
-                </a:solidFill>
-              </a:defRPr>
-            </a:pPr>
-            <a:r>
-              <a:t>Architected rich interactive facility monitoring dashboards visualizing campus physical infrastructure, spatial rack layouts, power utilization, and environmental sensor telemetry.</a:t>
-            </a:r>
-          </a:p>
-          <a:p>
-            <a:pPr>
-              <a:spcAft>
-                <a:spcPts val="200"/>
-              </a:spcAft>
-              <a:defRPr sz="1050" b="1">
-                <a:solidFill>
-                  <a:srgbClr val="0F1E36"/>
-                </a:solidFill>
-              </a:defRPr>
-            </a:pPr>
-            <a:r>
-              <a:t>★ CAD &amp; Digital Construction Interoperability</a:t>
-            </a:r>
-          </a:p>
-          <a:p>
-            <a:pPr>
-              <a:spcAft>
-                <a:spcPts val="600"/>
-              </a:spcAft>
-              <a:defRPr sz="900">
-                <a:solidFill>
-                  <a:srgbClr val="64748B"/>
-                </a:solidFill>
-              </a:defRPr>
-            </a:pPr>
-            <a:r>
-              <a:t>Hands-on expertise bridging 2D CAD blueprints, 3D coordinate geometry, polygonal mesh optimization, Level of Detail (LOD) management, and spatial rendering engines.</a:t>
+              <a:defRPr sz="1250" b="1">
+                <a:solidFill>
+                  <a:srgbClr val="0F172A"/>
+                </a:solidFill>
+              </a:defRPr>
+            </a:pPr>
+            <a:r>
+              <a:t>AI-Driven Generative 3D Workflows (Apr 2025 – Present)</a:t>
+            </a:r>
+          </a:p>
+          <a:p>
+            <a:pPr>
+              <a:defRPr sz="950">
+                <a:solidFill>
+                  <a:srgbClr val="1E293B"/>
+                </a:solidFill>
+              </a:defRPr>
+            </a:pPr>
+            <a:r>
+              <a:t>• Live Application: srushtilabs.com/voxelforge/ — Founder at SrushtiLabs developing AI-based workflows for generative 3D asset creation.</a:t>
+            </a:r>
+            <a:br/>
+            <a:br/>
+            <a:r>
+              <a:t>• Modular Game-Ready Bundles: Generates optimized, low-poly modular 3D assets ready for immediate assembly in Unreal Engine, Unity, and real-time WebGL engines.</a:t>
+            </a:r>
+            <a:br/>
+            <a:br/>
+            <a:r>
+              <a:t>• Rapid Prototyping Pipeline: Bridges text/image prompts into 3D voxel geometry with automated UV unwrapping and texture generation, cutting 3D asset prototyping time from days to minutes.</a:t>
+            </a:r>
+            <a:br/>
+            <a:br/>
+            <a:r>
+              <a:t>• Lightweight In-Browser Rendering: Specifically engineered to deliver compact asset payloads that stream effortlessly into web browsers without requiring heavy GPU rendering workstations.</a:t>
             </a:r>
           </a:p>
         </p:txBody>
@@ -8212,7 +7230,7 @@
         <p:spPr>
           <a:xfrm>
             <a:off x="6108192" y="1463040"/>
-            <a:ext cx="5349240" cy="1508760"/>
+            <a:ext cx="5349240" cy="2240280"/>
           </a:xfrm>
           <a:prstGeom prst="roundRect">
             <a:avLst/>
@@ -8256,8 +7274,8 @@
         </p:nvSpPr>
         <p:spPr>
           <a:xfrm>
-            <a:off x="6291072" y="1572768"/>
-            <a:ext cx="4983480" cy="1280160"/>
+            <a:off x="6291072" y="1600200"/>
+            <a:ext cx="4983480" cy="2011680"/>
           </a:xfrm>
           <a:prstGeom prst="rect">
             <a:avLst/>
@@ -8272,16 +7290,16 @@
           <a:p>
             <a:pPr>
               <a:spcAft>
-                <a:spcPts val="300"/>
+                <a:spcPts val="400"/>
               </a:spcAft>
               <a:defRPr sz="1200" b="1">
                 <a:solidFill>
-                  <a:srgbClr val="004E96"/>
-                </a:solidFill>
-              </a:defRPr>
-            </a:pPr>
-            <a:r>
-              <a:t>1. Voxelforge AI — Generative 3D Asset Workflows</a:t>
+                  <a:srgbClr val="0284C7"/>
+                </a:solidFill>
+              </a:defRPr>
+            </a:pPr>
+            <a:r>
+              <a:t>ayam3d — Advanced Mesh Synthesis &amp; Retopology</a:t>
             </a:r>
           </a:p>
           <a:p>
@@ -8293,11 +7311,15 @@
               </a:defRPr>
             </a:pPr>
             <a:r>
-              <a:t>• AI-assisted generative 3D pipeline producing game-ready, modular low-poly 3D assets for WebGL, Unity, and Unreal Engine.</a:t>
+              <a:t>• Exploratory R&amp;D into automated 3D mesh synthesis, intelligent quad retopology, and PBR texture generation.</a:t>
             </a:r>
             <a:br/>
             <a:r>
-              <a:t>• Automates prompt-to-3D synthesis, texture baking, and real-time polygon reduction, enabling instant browser-based 3D digital twin rendering.</a:t>
+              <a:t>• Converts complex, unorganized high-poly meshes into clean, lightweight geometry with preserved edge flow.</a:t>
+            </a:r>
+            <a:br/>
+            <a:r>
+              <a:t>• Solves real-time visualization challenges by creating Level of Detail (LOD) hierarchies for seamless 3D streaming.</a:t>
             </a:r>
           </a:p>
         </p:txBody>
@@ -8310,18 +7332,18 @@
         </p:nvSpPr>
         <p:spPr>
           <a:xfrm>
-            <a:off x="6108192" y="3090672"/>
-            <a:ext cx="5349240" cy="1508760"/>
+            <a:off x="6108192" y="3840480"/>
+            <a:ext cx="5349240" cy="2377440"/>
           </a:xfrm>
           <a:prstGeom prst="roundRect">
             <a:avLst/>
           </a:prstGeom>
           <a:solidFill>
-            <a:srgbClr val="FFFFFF"/>
+            <a:srgbClr val="F0F9FF"/>
           </a:solidFill>
           <a:ln w="12700">
             <a:solidFill>
-              <a:srgbClr val="E2E8F0"/>
+              <a:srgbClr val="0284C7"/>
             </a:solidFill>
           </a:ln>
         </p:spPr>
@@ -8355,8 +7377,8 @@
         </p:nvSpPr>
         <p:spPr>
           <a:xfrm>
-            <a:off x="6291072" y="3200400"/>
-            <a:ext cx="4983480" cy="1280160"/>
+            <a:off x="6291072" y="3977639"/>
+            <a:ext cx="4983480" cy="2103120"/>
           </a:xfrm>
           <a:prstGeom prst="rect">
             <a:avLst/>
@@ -8371,138 +7393,39 @@
           <a:p>
             <a:pPr>
               <a:spcAft>
-                <a:spcPts val="300"/>
-              </a:spcAft>
-              <a:defRPr sz="1200" b="1">
-                <a:solidFill>
-                  <a:srgbClr val="0E7490"/>
-                </a:solidFill>
-              </a:defRPr>
-            </a:pPr>
-            <a:r>
-              <a:t>2. ayam3d — Generative Mesh Synthesis &amp; Retopology</a:t>
-            </a:r>
-          </a:p>
-          <a:p>
-            <a:pPr>
-              <a:defRPr sz="950">
-                <a:solidFill>
-                  <a:srgbClr val="1E293B"/>
-                </a:solidFill>
-              </a:defRPr>
-            </a:pPr>
-            <a:r>
-              <a:t>• Advanced spatial computing R&amp;D in automated 3D mesh synthesis, intelligent quad/tri retopology, and PBR (Physically Based Rendering) texture generation.</a:t>
-            </a:r>
-            <a:br/>
-            <a:r>
-              <a:t>• Transforms heavy, raw 3D scans and photogrammetry point clouds into lightweight, optimized assets suitable for real-time edge streaming.</a:t>
-            </a:r>
-          </a:p>
-        </p:txBody>
-      </p:sp>
-      <p:sp>
-        <p:nvSpPr>
-          <p:cNvPr id="14" name="Rounded Rectangle 13"/>
-          <p:cNvSpPr/>
-          <p:nvPr/>
-        </p:nvSpPr>
-        <p:spPr>
-          <a:xfrm>
-            <a:off x="6108192" y="4709160"/>
-            <a:ext cx="5349240" cy="1508760"/>
-          </a:xfrm>
-          <a:prstGeom prst="roundRect">
-            <a:avLst/>
-          </a:prstGeom>
-          <a:solidFill>
-            <a:srgbClr val="F0F9FF"/>
-          </a:solidFill>
-          <a:ln w="12700">
-            <a:solidFill>
-              <a:srgbClr val="004E96"/>
-            </a:solidFill>
-          </a:ln>
-        </p:spPr>
-        <p:style>
-          <a:lnRef idx="1">
-            <a:schemeClr val="accent1"/>
-          </a:lnRef>
-          <a:fillRef idx="3">
-            <a:schemeClr val="accent1"/>
-          </a:fillRef>
-          <a:effectRef idx="2">
-            <a:schemeClr val="accent1"/>
-          </a:effectRef>
-          <a:fontRef idx="minor">
-            <a:schemeClr val="lt1"/>
-          </a:fontRef>
-        </p:style>
-        <p:txBody>
-          <a:bodyPr rtlCol="0" anchor="ctr"/>
-          <a:lstStyle/>
-          <a:p>
-            <a:pPr algn="ctr"/>
-          </a:p>
-        </p:txBody>
-      </p:sp>
-      <p:sp>
-        <p:nvSpPr>
-          <p:cNvPr id="15" name="TextBox 14"/>
-          <p:cNvSpPr txBox="1"/>
-          <p:nvPr/>
-        </p:nvSpPr>
-        <p:spPr>
-          <a:xfrm>
-            <a:off x="6291072" y="4818888"/>
-            <a:ext cx="4983480" cy="1280160"/>
-          </a:xfrm>
-          <a:prstGeom prst="rect">
-            <a:avLst/>
-          </a:prstGeom>
-          <a:noFill/>
-        </p:spPr>
-        <p:txBody>
-          <a:bodyPr wrap="square">
-            <a:spAutoFit/>
-          </a:bodyPr>
-          <a:lstStyle/>
-          <a:p>
-            <a:pPr>
-              <a:spcAft>
-                <a:spcPts val="300"/>
+                <a:spcPts val="400"/>
               </a:spcAft>
               <a:defRPr sz="1150" b="1">
                 <a:solidFill>
-                  <a:srgbClr val="004E96"/>
-                </a:solidFill>
-              </a:defRPr>
-            </a:pPr>
-            <a:r>
-              <a:t>Direct Synergy with Obayashi Corporation's Vision</a:t>
-            </a:r>
-          </a:p>
-          <a:p>
-            <a:pPr>
-              <a:defRPr sz="900">
+                  <a:srgbClr val="0E7490"/>
+                </a:solidFill>
+              </a:defRPr>
+            </a:pPr>
+            <a:r>
+              <a:t>Applied Value to Physical &amp; Digital Infrastructure</a:t>
+            </a:r>
+          </a:p>
+          <a:p>
+            <a:pPr>
+              <a:defRPr sz="950">
                 <a:solidFill>
                   <a:srgbClr val="1E293B"/>
                 </a:solidFill>
               </a:defRPr>
             </a:pPr>
             <a:r>
-              <a:t>• Bridges Enterprise IT with Digital Construction: Unifies BIM (Building Information Modeling 3D/4D/5D), Common Data Environments (CDE), and Digital Twins.</a:t>
+              <a:t>• Bridging Digital Twins with Web Applications: Enables lightweight 3D asset representations of physical spaces, facilities, and structures without multi-gigabyte download bottlenecks.</a:t>
             </a:r>
             <a:br/>
             <a:r>
-              <a:t>• Solves the IT infrastructure bottleneck: GPU workstation virtualization, automated asset compression, and low-latency 3D rendering on job-site mobile devices.</a:t>
-            </a:r>
-          </a:p>
-        </p:txBody>
-      </p:sp>
-      <p:sp>
-        <p:nvSpPr>
-          <p:cNvPr id="16" name="TextBox 15"/>
+              <a:t>• Practical Spatial Computing: Demonstrates deep technical competence in polygon reduction, coordinate systems, and automated 3D pipelines that directly benefit modern spatial workflows and digital engineering.</a:t>
+            </a:r>
+          </a:p>
+        </p:txBody>
+      </p:sp>
+      <p:sp>
+        <p:nvSpPr>
+          <p:cNvPr id="14" name="TextBox 13"/>
           <p:cNvSpPr txBox="1"/>
           <p:nvPr/>
         </p:nvSpPr>
@@ -8530,7 +7453,7 @@
               </a:defRPr>
             </a:pPr>
             <a:r>
-              <a:t>Obayashi Corporation · Senior Manager – IT Candidate Portfolio | Maheshchandra Hegde · Slide 5 of 12</a:t>
+              <a:t>Maheshchandra Hegde · Technical Work Experience &amp; Capability Presentation | Slide 5 of 11</a:t>
             </a:r>
           </a:p>
         </p:txBody>
@@ -8619,14 +7542,14 @@
           <a:lstStyle/>
           <a:p>
             <a:pPr>
-              <a:defRPr sz="1100" b="1">
-                <a:solidFill>
-                  <a:srgbClr val="004E96"/>
-                </a:solidFill>
-              </a:defRPr>
-            </a:pPr>
-            <a:r>
-              <a:t>LEADERSHIP &amp; EXECUTION</a:t>
+              <a:defRPr sz="1050" b="1">
+                <a:solidFill>
+                  <a:srgbClr val="0E7490"/>
+                </a:solidFill>
+              </a:defRPr>
+            </a:pPr>
+            <a:r>
+              <a:t>3D VISUALIZATION TRACK RECORD</a:t>
             </a:r>
           </a:p>
         </p:txBody>
@@ -8656,12 +7579,12 @@
             <a:pPr>
               <a:defRPr sz="2100" b="1">
                 <a:solidFill>
-                  <a:srgbClr val="0F1E36"/>
-                </a:solidFill>
-              </a:defRPr>
-            </a:pPr>
-            <a:r>
-              <a:t>Your Role &amp; Core Responsibilities: IT Strategy, Operations &amp; Governance</a:t>
+                  <a:srgbClr val="0F172A"/>
+                </a:solidFill>
+              </a:defRPr>
+            </a:pPr>
+            <a:r>
+              <a:t>3D Visualizer Expert Pedigree: 50+ Projects, CAE Simulation &amp; Cisco Systems</a:t>
             </a:r>
           </a:p>
         </p:txBody>
@@ -8718,7 +7641,7 @@
         <p:spPr>
           <a:xfrm>
             <a:off x="731520" y="1463040"/>
-            <a:ext cx="5230368" cy="2240280"/>
+            <a:ext cx="3401568" cy="4754880"/>
           </a:xfrm>
           <a:prstGeom prst="roundRect">
             <a:avLst/>
@@ -8756,92 +7679,14 @@
       </p:sp>
       <p:sp>
         <p:nvSpPr>
-          <p:cNvPr id="7" name="Rectangle 6"/>
-          <p:cNvSpPr/>
-          <p:nvPr/>
-        </p:nvSpPr>
-        <p:spPr>
-          <a:xfrm>
-            <a:off x="740664" y="1472184"/>
-            <a:ext cx="5212080" cy="384048"/>
-          </a:xfrm>
-          <a:prstGeom prst="rect">
-            <a:avLst/>
-          </a:prstGeom>
-          <a:solidFill>
-            <a:srgbClr val="004E96"/>
-          </a:solidFill>
-          <a:ln>
-            <a:noFill/>
-          </a:ln>
-        </p:spPr>
-        <p:style>
-          <a:lnRef idx="1">
-            <a:schemeClr val="accent1"/>
-          </a:lnRef>
-          <a:fillRef idx="3">
-            <a:schemeClr val="accent1"/>
-          </a:fillRef>
-          <a:effectRef idx="2">
-            <a:schemeClr val="accent1"/>
-          </a:effectRef>
-          <a:fontRef idx="minor">
-            <a:schemeClr val="lt1"/>
-          </a:fontRef>
-        </p:style>
-        <p:txBody>
-          <a:bodyPr rtlCol="0" anchor="ctr"/>
-          <a:lstStyle/>
-          <a:p>
-            <a:pPr algn="ctr"/>
-          </a:p>
-        </p:txBody>
-      </p:sp>
-      <p:sp>
-        <p:nvSpPr>
-          <p:cNvPr id="8" name="TextBox 7"/>
+          <p:cNvPr id="7" name="TextBox 6"/>
           <p:cNvSpPr txBox="1"/>
           <p:nvPr/>
         </p:nvSpPr>
         <p:spPr>
           <a:xfrm>
-            <a:off x="914400" y="1517904"/>
-            <a:ext cx="4864608" cy="320040"/>
-          </a:xfrm>
-          <a:prstGeom prst="rect">
-            <a:avLst/>
-          </a:prstGeom>
-          <a:noFill/>
-        </p:spPr>
-        <p:txBody>
-          <a:bodyPr wrap="none">
-            <a:spAutoFit/>
-          </a:bodyPr>
-          <a:lstStyle/>
-          <a:p>
-            <a:pPr>
-              <a:defRPr sz="1100" b="1">
-                <a:solidFill>
-                  <a:srgbClr val="FFFFFF"/>
-                </a:solidFill>
-              </a:defRPr>
-            </a:pPr>
-            <a:r>
-              <a:t>1. IT Strategy, Policy &amp; Enterprise Architecture</a:t>
-            </a:r>
-          </a:p>
-        </p:txBody>
-      </p:sp>
-      <p:sp>
-        <p:nvSpPr>
-          <p:cNvPr id="9" name="TextBox 8"/>
-          <p:cNvSpPr txBox="1"/>
-          <p:nvPr/>
-        </p:nvSpPr>
-        <p:spPr>
-          <a:xfrm>
-            <a:off x="914400" y="1901952"/>
-            <a:ext cx="4864608" cy="1737360"/>
+            <a:off x="868680" y="1600200"/>
+            <a:ext cx="3127248" cy="4480560"/>
           </a:xfrm>
           <a:prstGeom prst="rect">
             <a:avLst/>
@@ -8856,75 +7701,72 @@
           <a:p>
             <a:pPr>
               <a:spcAft>
-                <a:spcPts val="300"/>
+                <a:spcPts val="200"/>
               </a:spcAft>
-              <a:defRPr sz="950">
+              <a:defRPr sz="1300" b="1">
+                <a:solidFill>
+                  <a:srgbClr val="0284C7"/>
+                </a:solidFill>
+              </a:defRPr>
+            </a:pPr>
+            <a:r>
+              <a:t>Architectural 3D &amp; Walkthroughs</a:t>
+            </a:r>
+          </a:p>
+          <a:p>
+            <a:pPr>
+              <a:spcAft>
+                <a:spcPts val="800"/>
+              </a:spcAft>
+              <a:defRPr sz="1000" b="1">
+                <a:solidFill>
+                  <a:srgbClr val="0E7490"/>
+                </a:solidFill>
+              </a:defRPr>
+            </a:pPr>
+            <a:r>
+              <a:t>35+ Commercial &amp; Residential Projects</a:t>
+            </a:r>
+          </a:p>
+          <a:p>
+            <a:pPr>
+              <a:defRPr sz="900">
                 <a:solidFill>
                   <a:srgbClr val="1E293B"/>
                 </a:solidFill>
               </a:defRPr>
             </a:pPr>
             <a:r>
-              <a:t>• Formulated multi-year technology roadmaps aligning IT investments with organizational growth objectives.</a:t>
-            </a:r>
-          </a:p>
-          <a:p>
-            <a:pPr>
-              <a:spcAft>
-                <a:spcPts val="300"/>
-              </a:spcAft>
-              <a:defRPr sz="950">
-                <a:solidFill>
-                  <a:srgbClr val="1E293B"/>
-                </a:solidFill>
-              </a:defRPr>
-            </a:pPr>
-            <a:r>
-              <a:t>• Established standardized IT policies, coding standards, system architectures, and documentation protocols.</a:t>
-            </a:r>
-          </a:p>
-          <a:p>
-            <a:pPr>
-              <a:spcAft>
-                <a:spcPts val="300"/>
-              </a:spcAft>
-              <a:defRPr sz="950">
-                <a:solidFill>
-                  <a:srgbClr val="1E293B"/>
-                </a:solidFill>
-              </a:defRPr>
-            </a:pPr>
-            <a:r>
-              <a:t>• Conducted architectural governance reviews to ensure maintainability, scalability, and technical debt reduction.</a:t>
-            </a:r>
-          </a:p>
-          <a:p>
-            <a:pPr>
-              <a:spcAft>
-                <a:spcPts val="300"/>
-              </a:spcAft>
-              <a:defRPr sz="950">
-                <a:solidFill>
-                  <a:srgbClr val="1E293B"/>
-                </a:solidFill>
-              </a:defRPr>
-            </a:pPr>
-            <a:r>
-              <a:t>• Evaluated emerging enterprise technologies (cloud, automation, spatial 3D) to drive continuous capability evolution.</a:t>
-            </a:r>
-          </a:p>
-        </p:txBody>
-      </p:sp>
-      <p:sp>
-        <p:nvSpPr>
-          <p:cNvPr id="10" name="Rounded Rectangle 9"/>
+              <a:t>• Working with Architect Father: Built foundational expertise interpreting 2D plans, elevations, and structural schematics into accurate 3D models.</a:t>
+            </a:r>
+            <a:br/>
+            <a:br/>
+            <a:r>
+              <a:t>• Photorealistic Visualizations: Produced photorealistic exterior and interior architectural renderings, lighting studies, and texture mappings.</a:t>
+            </a:r>
+            <a:br/>
+            <a:br/>
+            <a:r>
+              <a:t>• 3D Walkthrough Animations: Produced animated camera walkthroughs for real estate developers and commercial builders to visualize spaces prior to construction.</a:t>
+            </a:r>
+            <a:br/>
+            <a:br/>
+            <a:r>
+              <a:t>• CAD &amp; Drafting Precision: Hands-on mastery with CAD drafting tools, layer management, and dimensional accuracy.</a:t>
+            </a:r>
+          </a:p>
+        </p:txBody>
+      </p:sp>
+      <p:sp>
+        <p:nvSpPr>
+          <p:cNvPr id="8" name="Rounded Rectangle 7"/>
           <p:cNvSpPr/>
           <p:nvPr/>
         </p:nvSpPr>
         <p:spPr>
           <a:xfrm>
-            <a:off x="6217920" y="1463040"/>
-            <a:ext cx="5230368" cy="2240280"/>
+            <a:off x="4389120" y="1463040"/>
+            <a:ext cx="3401568" cy="4754880"/>
           </a:xfrm>
           <a:prstGeom prst="roundRect">
             <a:avLst/>
@@ -8962,92 +7804,14 @@
       </p:sp>
       <p:sp>
         <p:nvSpPr>
-          <p:cNvPr id="11" name="Rectangle 10"/>
-          <p:cNvSpPr/>
-          <p:nvPr/>
-        </p:nvSpPr>
-        <p:spPr>
-          <a:xfrm>
-            <a:off x="6227064" y="1472184"/>
-            <a:ext cx="5212080" cy="384048"/>
-          </a:xfrm>
-          <a:prstGeom prst="rect">
-            <a:avLst/>
-          </a:prstGeom>
-          <a:solidFill>
-            <a:srgbClr val="0E7490"/>
-          </a:solidFill>
-          <a:ln>
-            <a:noFill/>
-          </a:ln>
-        </p:spPr>
-        <p:style>
-          <a:lnRef idx="1">
-            <a:schemeClr val="accent1"/>
-          </a:lnRef>
-          <a:fillRef idx="3">
-            <a:schemeClr val="accent1"/>
-          </a:fillRef>
-          <a:effectRef idx="2">
-            <a:schemeClr val="accent1"/>
-          </a:effectRef>
-          <a:fontRef idx="minor">
-            <a:schemeClr val="lt1"/>
-          </a:fontRef>
-        </p:style>
-        <p:txBody>
-          <a:bodyPr rtlCol="0" anchor="ctr"/>
-          <a:lstStyle/>
-          <a:p>
-            <a:pPr algn="ctr"/>
-          </a:p>
-        </p:txBody>
-      </p:sp>
-      <p:sp>
-        <p:nvSpPr>
-          <p:cNvPr id="12" name="TextBox 11"/>
+          <p:cNvPr id="9" name="TextBox 8"/>
           <p:cNvSpPr txBox="1"/>
           <p:nvPr/>
         </p:nvSpPr>
         <p:spPr>
           <a:xfrm>
-            <a:off x="6400800" y="1517904"/>
-            <a:ext cx="4864608" cy="320040"/>
-          </a:xfrm>
-          <a:prstGeom prst="rect">
-            <a:avLst/>
-          </a:prstGeom>
-          <a:noFill/>
-        </p:spPr>
-        <p:txBody>
-          <a:bodyPr wrap="none">
-            <a:spAutoFit/>
-          </a:bodyPr>
-          <a:lstStyle/>
-          <a:p>
-            <a:pPr>
-              <a:defRPr sz="1100" b="1">
-                <a:solidFill>
-                  <a:srgbClr val="FFFFFF"/>
-                </a:solidFill>
-              </a:defRPr>
-            </a:pPr>
-            <a:r>
-              <a:t>2. Infrastructure Operations, Cloud &amp; Business Continuity</a:t>
-            </a:r>
-          </a:p>
-        </p:txBody>
-      </p:sp>
-      <p:sp>
-        <p:nvSpPr>
-          <p:cNvPr id="13" name="TextBox 12"/>
-          <p:cNvSpPr txBox="1"/>
-          <p:nvPr/>
-        </p:nvSpPr>
-        <p:spPr>
-          <a:xfrm>
-            <a:off x="6400800" y="1901952"/>
-            <a:ext cx="4864608" cy="1737360"/>
+            <a:off x="4526280" y="1600200"/>
+            <a:ext cx="3127248" cy="4480560"/>
           </a:xfrm>
           <a:prstGeom prst="rect">
             <a:avLst/>
@@ -9062,75 +7826,72 @@
           <a:p>
             <a:pPr>
               <a:spcAft>
-                <a:spcPts val="300"/>
+                <a:spcPts val="200"/>
               </a:spcAft>
-              <a:defRPr sz="950">
+              <a:defRPr sz="1300" b="1">
+                <a:solidFill>
+                  <a:srgbClr val="0284C7"/>
+                </a:solidFill>
+              </a:defRPr>
+            </a:pPr>
+            <a:r>
+              <a:t>CAE Simulation Technologies</a:t>
+            </a:r>
+          </a:p>
+          <a:p>
+            <a:pPr>
+              <a:spcAft>
+                <a:spcPts val="800"/>
+              </a:spcAft>
+              <a:defRPr sz="1000" b="1">
+                <a:solidFill>
+                  <a:srgbClr val="0E7490"/>
+                </a:solidFill>
+              </a:defRPr>
+            </a:pPr>
+            <a:r>
+              <a:t>Visual Database Developer (2007 – 2008)</a:t>
+            </a:r>
+          </a:p>
+          <a:p>
+            <a:pPr>
+              <a:defRPr sz="900">
                 <a:solidFill>
                   <a:srgbClr val="1E293B"/>
                 </a:solidFill>
               </a:defRPr>
             </a:pPr>
             <a:r>
-              <a:t>• Ensured 24/7 availability and resilience of mission-critical systems and multi-tier network topologies.</a:t>
-            </a:r>
-          </a:p>
-          <a:p>
-            <a:pPr>
-              <a:spcAft>
-                <a:spcPts val="300"/>
-              </a:spcAft>
-              <a:defRPr sz="950">
-                <a:solidFill>
-                  <a:srgbClr val="1E293B"/>
-                </a:solidFill>
-              </a:defRPr>
-            </a:pPr>
-            <a:r>
-              <a:t>• Supervised automated backup regimens, disaster recovery (DR) simulations, and zero-loss business continuity plans.</a:t>
-            </a:r>
-          </a:p>
-          <a:p>
-            <a:pPr>
-              <a:spcAft>
-                <a:spcPts val="300"/>
-              </a:spcAft>
-              <a:defRPr sz="950">
-                <a:solidFill>
-                  <a:srgbClr val="1E293B"/>
-                </a:solidFill>
-              </a:defRPr>
-            </a:pPr>
-            <a:r>
-              <a:t>• Managed hybrid cloud workloads, virtualization environments, network security boundaries, and telemetry.</a:t>
-            </a:r>
-          </a:p>
-          <a:p>
-            <a:pPr>
-              <a:spcAft>
-                <a:spcPts val="300"/>
-              </a:spcAft>
-              <a:defRPr sz="950">
-                <a:solidFill>
-                  <a:srgbClr val="1E293B"/>
-                </a:solidFill>
-              </a:defRPr>
-            </a:pPr>
-            <a:r>
-              <a:t>• Instituted synthetic monitoring and automated alerting to resolve system anomalies before end-user impact.</a:t>
-            </a:r>
-          </a:p>
-        </p:txBody>
-      </p:sp>
-      <p:sp>
-        <p:nvSpPr>
-          <p:cNvPr id="14" name="Rounded Rectangle 13"/>
+              <a:t>• Flight Simulator Visual Databases: Created high-fidelity 3D model libraries for military and civil aircraft full-flight simulators.</a:t>
+            </a:r>
+            <a:br/>
+            <a:br/>
+            <a:r>
+              <a:t>• Real-Time Terrain Modeling: Built elevation terrain databases, runway markings, airport ground equipment, and navigation landmarks.</a:t>
+            </a:r>
+            <a:br/>
+            <a:br/>
+            <a:r>
+              <a:t>• Strict Polygon &amp; Memory Budgets: Developed real-time 3D models requiring deterministic frame rates (60 FPS locked) with zero visual pop-in or simulation stutter.</a:t>
+            </a:r>
+            <a:br/>
+            <a:br/>
+            <a:r>
+              <a:t>• Sensor &amp; Environmental Simulation: Modeled day/night transitions, weather effects, and infrared/night-vision sensor textures.</a:t>
+            </a:r>
+          </a:p>
+        </p:txBody>
+      </p:sp>
+      <p:sp>
+        <p:nvSpPr>
+          <p:cNvPr id="10" name="Rounded Rectangle 9"/>
           <p:cNvSpPr/>
           <p:nvPr/>
         </p:nvSpPr>
         <p:spPr>
           <a:xfrm>
-            <a:off x="731520" y="3931920"/>
-            <a:ext cx="5230368" cy="2240280"/>
+            <a:off x="8046720" y="1463040"/>
+            <a:ext cx="3401568" cy="4754880"/>
           </a:xfrm>
           <a:prstGeom prst="roundRect">
             <a:avLst/>
@@ -9168,92 +7929,14 @@
       </p:sp>
       <p:sp>
         <p:nvSpPr>
-          <p:cNvPr id="15" name="Rectangle 14"/>
-          <p:cNvSpPr/>
-          <p:nvPr/>
-        </p:nvSpPr>
-        <p:spPr>
-          <a:xfrm>
-            <a:off x="740664" y="3941064"/>
-            <a:ext cx="5212080" cy="384048"/>
-          </a:xfrm>
-          <a:prstGeom prst="rect">
-            <a:avLst/>
-          </a:prstGeom>
-          <a:solidFill>
-            <a:srgbClr val="CC2229"/>
-          </a:solidFill>
-          <a:ln>
-            <a:noFill/>
-          </a:ln>
-        </p:spPr>
-        <p:style>
-          <a:lnRef idx="1">
-            <a:schemeClr val="accent1"/>
-          </a:lnRef>
-          <a:fillRef idx="3">
-            <a:schemeClr val="accent1"/>
-          </a:fillRef>
-          <a:effectRef idx="2">
-            <a:schemeClr val="accent1"/>
-          </a:effectRef>
-          <a:fontRef idx="minor">
-            <a:schemeClr val="lt1"/>
-          </a:fontRef>
-        </p:style>
-        <p:txBody>
-          <a:bodyPr rtlCol="0" anchor="ctr"/>
-          <a:lstStyle/>
-          <a:p>
-            <a:pPr algn="ctr"/>
-          </a:p>
-        </p:txBody>
-      </p:sp>
-      <p:sp>
-        <p:nvSpPr>
-          <p:cNvPr id="16" name="TextBox 15"/>
+          <p:cNvPr id="11" name="TextBox 10"/>
           <p:cNvSpPr txBox="1"/>
           <p:nvPr/>
         </p:nvSpPr>
         <p:spPr>
           <a:xfrm>
-            <a:off x="914400" y="3986784"/>
-            <a:ext cx="4864608" cy="320040"/>
-          </a:xfrm>
-          <a:prstGeom prst="rect">
-            <a:avLst/>
-          </a:prstGeom>
-          <a:noFill/>
-        </p:spPr>
-        <p:txBody>
-          <a:bodyPr wrap="none">
-            <a:spAutoFit/>
-          </a:bodyPr>
-          <a:lstStyle/>
-          <a:p>
-            <a:pPr>
-              <a:defRPr sz="1100" b="1">
-                <a:solidFill>
-                  <a:srgbClr val="FFFFFF"/>
-                </a:solidFill>
-              </a:defRPr>
-            </a:pPr>
-            <a:r>
-              <a:t>3. Cybersecurity Controls, Access Management &amp; Risk Mitigation</a:t>
-            </a:r>
-          </a:p>
-        </p:txBody>
-      </p:sp>
-      <p:sp>
-        <p:nvSpPr>
-          <p:cNvPr id="17" name="TextBox 16"/>
-          <p:cNvSpPr txBox="1"/>
-          <p:nvPr/>
-        </p:nvSpPr>
-        <p:spPr>
-          <a:xfrm>
-            <a:off x="914400" y="4370832"/>
-            <a:ext cx="4864608" cy="1737360"/>
+            <a:off x="8183879" y="1600200"/>
+            <a:ext cx="3127248" cy="4480560"/>
           </a:xfrm>
           <a:prstGeom prst="rect">
             <a:avLst/>
@@ -9268,274 +7951,65 @@
           <a:p>
             <a:pPr>
               <a:spcAft>
-                <a:spcPts val="300"/>
+                <a:spcPts val="200"/>
               </a:spcAft>
-              <a:defRPr sz="950">
+              <a:defRPr sz="1300" b="1">
+                <a:solidFill>
+                  <a:srgbClr val="0284C7"/>
+                </a:solidFill>
+              </a:defRPr>
+            </a:pPr>
+            <a:r>
+              <a:t>Cisco Systems Dashboard</a:t>
+            </a:r>
+          </a:p>
+          <a:p>
+            <a:pPr>
+              <a:spcAft>
+                <a:spcPts val="800"/>
+              </a:spcAft>
+              <a:defRPr sz="1000" b="1">
+                <a:solidFill>
+                  <a:srgbClr val="0E7490"/>
+                </a:solidFill>
+              </a:defRPr>
+            </a:pPr>
+            <a:r>
+              <a:t>Facility Dashboard &amp; Smart Campus</a:t>
+            </a:r>
+          </a:p>
+          <a:p>
+            <a:pPr>
+              <a:defRPr sz="900">
                 <a:solidFill>
                   <a:srgbClr val="1E293B"/>
                 </a:solidFill>
               </a:defRPr>
             </a:pPr>
             <a:r>
-              <a:t>• Enforced Zero-Trust principles, role-based access control (RBAC), multi-factor authentication (MFA), and audit logging.</a:t>
-            </a:r>
-          </a:p>
-          <a:p>
-            <a:pPr>
-              <a:spcAft>
-                <a:spcPts val="300"/>
-              </a:spcAft>
-              <a:defRPr sz="950">
-                <a:solidFill>
-                  <a:srgbClr val="1E293B"/>
-                </a:solidFill>
-              </a:defRPr>
-            </a:pPr>
-            <a:r>
-              <a:t>• Conducted proactive vulnerability assessments, dependency scanning, code audits, and third-party risk evaluations.</a:t>
-            </a:r>
-          </a:p>
-          <a:p>
-            <a:pPr>
-              <a:spcAft>
-                <a:spcPts val="300"/>
-              </a:spcAft>
-              <a:defRPr sz="950">
-                <a:solidFill>
-                  <a:srgbClr val="1E293B"/>
-                </a:solidFill>
-              </a:defRPr>
-            </a:pPr>
-            <a:r>
-              <a:t>• Partnered with enterprise compliance teams to ensure strict adherence to ISO 27001 and industry safety standards.</a:t>
-            </a:r>
-          </a:p>
-          <a:p>
-            <a:pPr>
-              <a:spcAft>
-                <a:spcPts val="300"/>
-              </a:spcAft>
-              <a:defRPr sz="950">
-                <a:solidFill>
-                  <a:srgbClr val="1E293B"/>
-                </a:solidFill>
-              </a:defRPr>
-            </a:pPr>
-            <a:r>
-              <a:t>• Formulated incident response playbooks, disaster containment procedures, and cybersecurity staff training.</a:t>
-            </a:r>
-          </a:p>
-        </p:txBody>
-      </p:sp>
-      <p:sp>
-        <p:nvSpPr>
-          <p:cNvPr id="18" name="Rounded Rectangle 17"/>
-          <p:cNvSpPr/>
-          <p:nvPr/>
-        </p:nvSpPr>
-        <p:spPr>
-          <a:xfrm>
-            <a:off x="6217920" y="3931920"/>
-            <a:ext cx="5230368" cy="2240280"/>
-          </a:xfrm>
-          <a:prstGeom prst="roundRect">
-            <a:avLst/>
-          </a:prstGeom>
-          <a:solidFill>
-            <a:srgbClr val="FFFFFF"/>
-          </a:solidFill>
-          <a:ln w="12700">
-            <a:solidFill>
-              <a:srgbClr val="E2E8F0"/>
-            </a:solidFill>
-          </a:ln>
-        </p:spPr>
-        <p:style>
-          <a:lnRef idx="1">
-            <a:schemeClr val="accent1"/>
-          </a:lnRef>
-          <a:fillRef idx="3">
-            <a:schemeClr val="accent1"/>
-          </a:fillRef>
-          <a:effectRef idx="2">
-            <a:schemeClr val="accent1"/>
-          </a:effectRef>
-          <a:fontRef idx="minor">
-            <a:schemeClr val="lt1"/>
-          </a:fontRef>
-        </p:style>
-        <p:txBody>
-          <a:bodyPr rtlCol="0" anchor="ctr"/>
-          <a:lstStyle/>
-          <a:p>
-            <a:pPr algn="ctr"/>
-          </a:p>
-        </p:txBody>
-      </p:sp>
-      <p:sp>
-        <p:nvSpPr>
-          <p:cNvPr id="19" name="Rectangle 18"/>
-          <p:cNvSpPr/>
-          <p:nvPr/>
-        </p:nvSpPr>
-        <p:spPr>
-          <a:xfrm>
-            <a:off x="6227064" y="3941064"/>
-            <a:ext cx="5212080" cy="384048"/>
-          </a:xfrm>
-          <a:prstGeom prst="rect">
-            <a:avLst/>
-          </a:prstGeom>
-          <a:solidFill>
-            <a:srgbClr val="109563"/>
-          </a:solidFill>
-          <a:ln>
-            <a:noFill/>
-          </a:ln>
-        </p:spPr>
-        <p:style>
-          <a:lnRef idx="1">
-            <a:schemeClr val="accent1"/>
-          </a:lnRef>
-          <a:fillRef idx="3">
-            <a:schemeClr val="accent1"/>
-          </a:fillRef>
-          <a:effectRef idx="2">
-            <a:schemeClr val="accent1"/>
-          </a:effectRef>
-          <a:fontRef idx="minor">
-            <a:schemeClr val="lt1"/>
-          </a:fontRef>
-        </p:style>
-        <p:txBody>
-          <a:bodyPr rtlCol="0" anchor="ctr"/>
-          <a:lstStyle/>
-          <a:p>
-            <a:pPr algn="ctr"/>
-          </a:p>
-        </p:txBody>
-      </p:sp>
-      <p:sp>
-        <p:nvSpPr>
-          <p:cNvPr id="20" name="TextBox 19"/>
-          <p:cNvSpPr txBox="1"/>
-          <p:nvPr/>
-        </p:nvSpPr>
-        <p:spPr>
-          <a:xfrm>
-            <a:off x="6400800" y="3986784"/>
-            <a:ext cx="4864608" cy="320040"/>
-          </a:xfrm>
-          <a:prstGeom prst="rect">
-            <a:avLst/>
-          </a:prstGeom>
-          <a:noFill/>
-        </p:spPr>
-        <p:txBody>
-          <a:bodyPr wrap="none">
-            <a:spAutoFit/>
-          </a:bodyPr>
-          <a:lstStyle/>
-          <a:p>
-            <a:pPr>
-              <a:defRPr sz="1100" b="1">
-                <a:solidFill>
-                  <a:srgbClr val="FFFFFF"/>
-                </a:solidFill>
-              </a:defRPr>
-            </a:pPr>
-            <a:r>
-              <a:t>4. Team Leadership, Vendor Governance &amp; Fiscal Management</a:t>
-            </a:r>
-          </a:p>
-        </p:txBody>
-      </p:sp>
-      <p:sp>
-        <p:nvSpPr>
-          <p:cNvPr id="21" name="TextBox 20"/>
-          <p:cNvSpPr txBox="1"/>
-          <p:nvPr/>
-        </p:nvSpPr>
-        <p:spPr>
-          <a:xfrm>
-            <a:off x="6400800" y="4370832"/>
-            <a:ext cx="4864608" cy="1737360"/>
-          </a:xfrm>
-          <a:prstGeom prst="rect">
-            <a:avLst/>
-          </a:prstGeom>
-          <a:noFill/>
-        </p:spPr>
-        <p:txBody>
-          <a:bodyPr wrap="square">
-            <a:spAutoFit/>
-          </a:bodyPr>
-          <a:lstStyle/>
-          <a:p>
-            <a:pPr>
-              <a:spcAft>
-                <a:spcPts val="300"/>
-              </a:spcAft>
-              <a:defRPr sz="950">
-                <a:solidFill>
-                  <a:srgbClr val="1E293B"/>
-                </a:solidFill>
-              </a:defRPr>
-            </a:pPr>
-            <a:r>
-              <a:t>• Led, mentored, and fostered technical excellence across cross-functional engineering, infrastructure, and QA squads.</a:t>
-            </a:r>
-          </a:p>
-          <a:p>
-            <a:pPr>
-              <a:spcAft>
-                <a:spcPts val="300"/>
-              </a:spcAft>
-              <a:defRPr sz="950">
-                <a:solidFill>
-                  <a:srgbClr val="1E293B"/>
-                </a:solidFill>
-              </a:defRPr>
-            </a:pPr>
-            <a:r>
-              <a:t>• Governed multi-vendor contracts, service provider RFPs, cloud infrastructure budgets, and strict SLA compliance.</a:t>
-            </a:r>
-          </a:p>
-          <a:p>
-            <a:pPr>
-              <a:spcAft>
-                <a:spcPts val="300"/>
-              </a:spcAft>
-              <a:defRPr sz="950">
-                <a:solidFill>
-                  <a:srgbClr val="1E293B"/>
-                </a:solidFill>
-              </a:defRPr>
-            </a:pPr>
-            <a:r>
-              <a:t>• Optimized CapEx and OpEx allocations through license rationalization, automation, and cloud cost management.</a:t>
-            </a:r>
-          </a:p>
-          <a:p>
-            <a:pPr>
-              <a:spcAft>
-                <a:spcPts val="300"/>
-              </a:spcAft>
-              <a:defRPr sz="950">
-                <a:solidFill>
-                  <a:srgbClr val="1E293B"/>
-                </a:solidFill>
-              </a:defRPr>
-            </a:pPr>
-            <a:r>
-              <a:t>• Instituted transparent KPI dashboards tracking uptime, incident resolution MTTR, and engineering delivery velocity.</a:t>
-            </a:r>
-          </a:p>
-        </p:txBody>
-      </p:sp>
-      <p:sp>
-        <p:nvSpPr>
-          <p:cNvPr id="22" name="TextBox 21"/>
+              <a:t>• Cisco Facility Dashboard (2009 – 2010): Designed and developed an interactive facility dashboard during full-time on-campus consulting at Cisco Bangalore.</a:t>
+            </a:r>
+            <a:br/>
+            <a:br/>
+            <a:r>
+              <a:t>• Physical Infrastructure Telemetry: Visualized data center rack layouts, campus power consumption, cooling metrics, and environmental sensor telemetry.</a:t>
+            </a:r>
+            <a:br/>
+            <a:br/>
+            <a:r>
+              <a:t>• Awarded Cisco Appreciation: Received formal recognition from Cisco leadership in 2010 for delivering intuitive, high-impact data visualization.</a:t>
+            </a:r>
+            <a:br/>
+            <a:br/>
+            <a:r>
+              <a:t>• Continued Cisco Collaboration: Managed multiple Angular dashboards and UI applications for Cisco Systems via UST Global (2015 – 2019).</a:t>
+            </a:r>
+          </a:p>
+        </p:txBody>
+      </p:sp>
+      <p:sp>
+        <p:nvSpPr>
+          <p:cNvPr id="12" name="TextBox 11"/>
           <p:cNvSpPr txBox="1"/>
           <p:nvPr/>
         </p:nvSpPr>
@@ -9563,7 +8037,7 @@
               </a:defRPr>
             </a:pPr>
             <a:r>
-              <a:t>Obayashi Corporation · Senior Manager – IT Candidate Portfolio | Maheshchandra Hegde · Slide 6 of 12</a:t>
+              <a:t>Maheshchandra Hegde · Technical Work Experience &amp; Capability Presentation | Slide 6 of 11</a:t>
             </a:r>
           </a:p>
         </p:txBody>
@@ -9652,14 +8126,14 @@
           <a:lstStyle/>
           <a:p>
             <a:pPr>
-              <a:defRPr sz="1100" b="1">
-                <a:solidFill>
-                  <a:srgbClr val="004E96"/>
-                </a:solidFill>
-              </a:defRPr>
-            </a:pPr>
-            <a:r>
-              <a:t>BUSINESS IMPACT &amp; VALUE DELIVERY</a:t>
+              <a:defRPr sz="1050" b="1">
+                <a:solidFill>
+                  <a:srgbClr val="0E7490"/>
+                </a:solidFill>
+              </a:defRPr>
+            </a:pPr>
+            <a:r>
+              <a:t>LEADERSHIP &amp; EXECUTION</a:t>
             </a:r>
           </a:p>
         </p:txBody>
@@ -9689,12 +8163,12 @@
             <a:pPr>
               <a:defRPr sz="2100" b="1">
                 <a:solidFill>
-                  <a:srgbClr val="0F1E36"/>
-                </a:solidFill>
-              </a:defRPr>
-            </a:pPr>
-            <a:r>
-              <a:t>Major Achievements &amp; Quantifiable IT &amp; Spatial Engineering Milestones</a:t>
+                  <a:srgbClr val="0F172A"/>
+                </a:solidFill>
+              </a:defRPr>
+            </a:pPr>
+            <a:r>
+              <a:t>Core Responsibilities &amp; Technical Leadership Across 16+ Years</a:t>
             </a:r>
           </a:p>
         </p:txBody>
@@ -9751,447 +8225,7 @@
         <p:spPr>
           <a:xfrm>
             <a:off x="731520" y="1463040"/>
-            <a:ext cx="2542032" cy="1371600"/>
-          </a:xfrm>
-          <a:prstGeom prst="roundRect">
-            <a:avLst/>
-          </a:prstGeom>
-          <a:solidFill>
-            <a:srgbClr val="FFFFFF"/>
-          </a:solidFill>
-          <a:ln w="12700">
-            <a:solidFill>
-              <a:srgbClr val="004E96"/>
-            </a:solidFill>
-          </a:ln>
-        </p:spPr>
-        <p:style>
-          <a:lnRef idx="1">
-            <a:schemeClr val="accent1"/>
-          </a:lnRef>
-          <a:fillRef idx="3">
-            <a:schemeClr val="accent1"/>
-          </a:fillRef>
-          <a:effectRef idx="2">
-            <a:schemeClr val="accent1"/>
-          </a:effectRef>
-          <a:fontRef idx="minor">
-            <a:schemeClr val="lt1"/>
-          </a:fontRef>
-        </p:style>
-        <p:txBody>
-          <a:bodyPr rtlCol="0" anchor="ctr"/>
-          <a:lstStyle/>
-          <a:p>
-            <a:pPr algn="ctr"/>
-          </a:p>
-        </p:txBody>
-      </p:sp>
-      <p:sp>
-        <p:nvSpPr>
-          <p:cNvPr id="7" name="TextBox 6"/>
-          <p:cNvSpPr txBox="1"/>
-          <p:nvPr/>
-        </p:nvSpPr>
-        <p:spPr>
-          <a:xfrm>
-            <a:off x="841248" y="1572768"/>
-            <a:ext cx="2322576" cy="1152144"/>
-          </a:xfrm>
-          <a:prstGeom prst="rect">
-            <a:avLst/>
-          </a:prstGeom>
-          <a:noFill/>
-        </p:spPr>
-        <p:txBody>
-          <a:bodyPr wrap="square">
-            <a:spAutoFit/>
-          </a:bodyPr>
-          <a:lstStyle/>
-          <a:p>
-            <a:pPr>
-              <a:spcAft>
-                <a:spcPts val="200"/>
-              </a:spcAft>
-              <a:defRPr sz="2400" b="1">
-                <a:solidFill>
-                  <a:srgbClr val="004E96"/>
-                </a:solidFill>
-              </a:defRPr>
-            </a:pPr>
-            <a:r>
-              <a:t>99.95%+</a:t>
-            </a:r>
-          </a:p>
-          <a:p>
-            <a:pPr>
-              <a:spcAft>
-                <a:spcPts val="200"/>
-              </a:spcAft>
-              <a:defRPr sz="1000" b="1">
-                <a:solidFill>
-                  <a:srgbClr val="0F1E36"/>
-                </a:solidFill>
-              </a:defRPr>
-            </a:pPr>
-            <a:r>
-              <a:t>System Availability</a:t>
-            </a:r>
-          </a:p>
-          <a:p>
-            <a:pPr>
-              <a:defRPr sz="850">
-                <a:solidFill>
-                  <a:srgbClr val="64748B"/>
-                </a:solidFill>
-              </a:defRPr>
-            </a:pPr>
-            <a:r>
-              <a:t>Sustained across 24/7 clinical ICU operations and high-traffic event workloads</a:t>
-            </a:r>
-          </a:p>
-        </p:txBody>
-      </p:sp>
-      <p:sp>
-        <p:nvSpPr>
-          <p:cNvPr id="8" name="Rounded Rectangle 7"/>
-          <p:cNvSpPr/>
-          <p:nvPr/>
-        </p:nvSpPr>
-        <p:spPr>
-          <a:xfrm>
-            <a:off x="3456432" y="1463040"/>
-            <a:ext cx="2542032" cy="1371600"/>
-          </a:xfrm>
-          <a:prstGeom prst="roundRect">
-            <a:avLst/>
-          </a:prstGeom>
-          <a:solidFill>
-            <a:srgbClr val="FFFFFF"/>
-          </a:solidFill>
-          <a:ln w="12700">
-            <a:solidFill>
-              <a:srgbClr val="004E96"/>
-            </a:solidFill>
-          </a:ln>
-        </p:spPr>
-        <p:style>
-          <a:lnRef idx="1">
-            <a:schemeClr val="accent1"/>
-          </a:lnRef>
-          <a:fillRef idx="3">
-            <a:schemeClr val="accent1"/>
-          </a:fillRef>
-          <a:effectRef idx="2">
-            <a:schemeClr val="accent1"/>
-          </a:effectRef>
-          <a:fontRef idx="minor">
-            <a:schemeClr val="lt1"/>
-          </a:fontRef>
-        </p:style>
-        <p:txBody>
-          <a:bodyPr rtlCol="0" anchor="ctr"/>
-          <a:lstStyle/>
-          <a:p>
-            <a:pPr algn="ctr"/>
-          </a:p>
-        </p:txBody>
-      </p:sp>
-      <p:sp>
-        <p:nvSpPr>
-          <p:cNvPr id="9" name="TextBox 8"/>
-          <p:cNvSpPr txBox="1"/>
-          <p:nvPr/>
-        </p:nvSpPr>
-        <p:spPr>
-          <a:xfrm>
-            <a:off x="3566160" y="1572768"/>
-            <a:ext cx="2322576" cy="1152144"/>
-          </a:xfrm>
-          <a:prstGeom prst="rect">
-            <a:avLst/>
-          </a:prstGeom>
-          <a:noFill/>
-        </p:spPr>
-        <p:txBody>
-          <a:bodyPr wrap="square">
-            <a:spAutoFit/>
-          </a:bodyPr>
-          <a:lstStyle/>
-          <a:p>
-            <a:pPr>
-              <a:spcAft>
-                <a:spcPts val="200"/>
-              </a:spcAft>
-              <a:defRPr sz="2400" b="1">
-                <a:solidFill>
-                  <a:srgbClr val="004E96"/>
-                </a:solidFill>
-              </a:defRPr>
-            </a:pPr>
-            <a:r>
-              <a:t>100%</a:t>
-            </a:r>
-          </a:p>
-          <a:p>
-            <a:pPr>
-              <a:spcAft>
-                <a:spcPts val="200"/>
-              </a:spcAft>
-              <a:defRPr sz="1000" b="1">
-                <a:solidFill>
-                  <a:srgbClr val="0F1E36"/>
-                </a:solidFill>
-              </a:defRPr>
-            </a:pPr>
-            <a:r>
-              <a:t>Data Persistence at Edge</a:t>
-            </a:r>
-          </a:p>
-          <a:p>
-            <a:pPr>
-              <a:defRPr sz="850">
-                <a:solidFill>
-                  <a:srgbClr val="64748B"/>
-                </a:solidFill>
-              </a:defRPr>
-            </a:pPr>
-            <a:r>
-              <a:t>Zero data loss during field network disconnections via offline-first syncing engine</a:t>
-            </a:r>
-          </a:p>
-        </p:txBody>
-      </p:sp>
-      <p:sp>
-        <p:nvSpPr>
-          <p:cNvPr id="10" name="Rounded Rectangle 9"/>
-          <p:cNvSpPr/>
-          <p:nvPr/>
-        </p:nvSpPr>
-        <p:spPr>
-          <a:xfrm>
-            <a:off x="6181344" y="1463040"/>
-            <a:ext cx="2542032" cy="1371600"/>
-          </a:xfrm>
-          <a:prstGeom prst="roundRect">
-            <a:avLst/>
-          </a:prstGeom>
-          <a:solidFill>
-            <a:srgbClr val="FFFFFF"/>
-          </a:solidFill>
-          <a:ln w="12700">
-            <a:solidFill>
-              <a:srgbClr val="004E96"/>
-            </a:solidFill>
-          </a:ln>
-        </p:spPr>
-        <p:style>
-          <a:lnRef idx="1">
-            <a:schemeClr val="accent1"/>
-          </a:lnRef>
-          <a:fillRef idx="3">
-            <a:schemeClr val="accent1"/>
-          </a:fillRef>
-          <a:effectRef idx="2">
-            <a:schemeClr val="accent1"/>
-          </a:effectRef>
-          <a:fontRef idx="minor">
-            <a:schemeClr val="lt1"/>
-          </a:fontRef>
-        </p:style>
-        <p:txBody>
-          <a:bodyPr rtlCol="0" anchor="ctr"/>
-          <a:lstStyle/>
-          <a:p>
-            <a:pPr algn="ctr"/>
-          </a:p>
-        </p:txBody>
-      </p:sp>
-      <p:sp>
-        <p:nvSpPr>
-          <p:cNvPr id="11" name="TextBox 10"/>
-          <p:cNvSpPr txBox="1"/>
-          <p:nvPr/>
-        </p:nvSpPr>
-        <p:spPr>
-          <a:xfrm>
-            <a:off x="6291072" y="1572768"/>
-            <a:ext cx="2322576" cy="1152144"/>
-          </a:xfrm>
-          <a:prstGeom prst="rect">
-            <a:avLst/>
-          </a:prstGeom>
-          <a:noFill/>
-        </p:spPr>
-        <p:txBody>
-          <a:bodyPr wrap="square">
-            <a:spAutoFit/>
-          </a:bodyPr>
-          <a:lstStyle/>
-          <a:p>
-            <a:pPr>
-              <a:spcAft>
-                <a:spcPts val="200"/>
-              </a:spcAft>
-              <a:defRPr sz="2400" b="1">
-                <a:solidFill>
-                  <a:srgbClr val="004E96"/>
-                </a:solidFill>
-              </a:defRPr>
-            </a:pPr>
-            <a:r>
-              <a:t>50+</a:t>
-            </a:r>
-          </a:p>
-          <a:p>
-            <a:pPr>
-              <a:spcAft>
-                <a:spcPts val="200"/>
-              </a:spcAft>
-              <a:defRPr sz="1000" b="1">
-                <a:solidFill>
-                  <a:srgbClr val="0F1E36"/>
-                </a:solidFill>
-              </a:defRPr>
-            </a:pPr>
-            <a:r>
-              <a:t>3D &amp; Spatial Projects</a:t>
-            </a:r>
-          </a:p>
-          <a:p>
-            <a:pPr>
-              <a:defRPr sz="850">
-                <a:solidFill>
-                  <a:srgbClr val="64748B"/>
-                </a:solidFill>
-              </a:defRPr>
-            </a:pPr>
-            <a:r>
-              <a:t>Delivered across architectural visualization, CAD, flight simulation &amp; AI workflows</a:t>
-            </a:r>
-          </a:p>
-        </p:txBody>
-      </p:sp>
-      <p:sp>
-        <p:nvSpPr>
-          <p:cNvPr id="12" name="Rounded Rectangle 11"/>
-          <p:cNvSpPr/>
-          <p:nvPr/>
-        </p:nvSpPr>
-        <p:spPr>
-          <a:xfrm>
-            <a:off x="8906256" y="1463040"/>
-            <a:ext cx="2542032" cy="1371600"/>
-          </a:xfrm>
-          <a:prstGeom prst="roundRect">
-            <a:avLst/>
-          </a:prstGeom>
-          <a:solidFill>
-            <a:srgbClr val="FFFFFF"/>
-          </a:solidFill>
-          <a:ln w="12700">
-            <a:solidFill>
-              <a:srgbClr val="004E96"/>
-            </a:solidFill>
-          </a:ln>
-        </p:spPr>
-        <p:style>
-          <a:lnRef idx="1">
-            <a:schemeClr val="accent1"/>
-          </a:lnRef>
-          <a:fillRef idx="3">
-            <a:schemeClr val="accent1"/>
-          </a:fillRef>
-          <a:effectRef idx="2">
-            <a:schemeClr val="accent1"/>
-          </a:effectRef>
-          <a:fontRef idx="minor">
-            <a:schemeClr val="lt1"/>
-          </a:fontRef>
-        </p:style>
-        <p:txBody>
-          <a:bodyPr rtlCol="0" anchor="ctr"/>
-          <a:lstStyle/>
-          <a:p>
-            <a:pPr algn="ctr"/>
-          </a:p>
-        </p:txBody>
-      </p:sp>
-      <p:sp>
-        <p:nvSpPr>
-          <p:cNvPr id="13" name="TextBox 12"/>
-          <p:cNvSpPr txBox="1"/>
-          <p:nvPr/>
-        </p:nvSpPr>
-        <p:spPr>
-          <a:xfrm>
-            <a:off x="9015984" y="1572768"/>
-            <a:ext cx="2322576" cy="1152144"/>
-          </a:xfrm>
-          <a:prstGeom prst="rect">
-            <a:avLst/>
-          </a:prstGeom>
-          <a:noFill/>
-        </p:spPr>
-        <p:txBody>
-          <a:bodyPr wrap="square">
-            <a:spAutoFit/>
-          </a:bodyPr>
-          <a:lstStyle/>
-          <a:p>
-            <a:pPr>
-              <a:spcAft>
-                <a:spcPts val="200"/>
-              </a:spcAft>
-              <a:defRPr sz="2400" b="1">
-                <a:solidFill>
-                  <a:srgbClr val="004E96"/>
-                </a:solidFill>
-              </a:defRPr>
-            </a:pPr>
-            <a:r>
-              <a:t>22%</a:t>
-            </a:r>
-          </a:p>
-          <a:p>
-            <a:pPr>
-              <a:spcAft>
-                <a:spcPts val="200"/>
-              </a:spcAft>
-              <a:defRPr sz="1000" b="1">
-                <a:solidFill>
-                  <a:srgbClr val="0F1E36"/>
-                </a:solidFill>
-              </a:defRPr>
-            </a:pPr>
-            <a:r>
-              <a:t>Cloud Cost Optimization</a:t>
-            </a:r>
-          </a:p>
-          <a:p>
-            <a:pPr>
-              <a:defRPr sz="850">
-                <a:solidFill>
-                  <a:srgbClr val="64748B"/>
-                </a:solidFill>
-              </a:defRPr>
-            </a:pPr>
-            <a:r>
-              <a:t>Saved through resource rightsizing, auto-scaling policies, and license rationalization</a:t>
-            </a:r>
-          </a:p>
-        </p:txBody>
-      </p:sp>
-      <p:sp>
-        <p:nvSpPr>
-          <p:cNvPr id="14" name="Rounded Rectangle 13"/>
-          <p:cNvSpPr/>
-          <p:nvPr/>
-        </p:nvSpPr>
-        <p:spPr>
-          <a:xfrm>
-            <a:off x="731520" y="2971800"/>
-            <a:ext cx="10728655" cy="768096"/>
+            <a:ext cx="5230368" cy="2240280"/>
           </a:xfrm>
           <a:prstGeom prst="roundRect">
             <a:avLst/>
@@ -10229,14 +8263,92 @@
       </p:sp>
       <p:sp>
         <p:nvSpPr>
-          <p:cNvPr id="15" name="TextBox 14"/>
+          <p:cNvPr id="7" name="Rectangle 6"/>
+          <p:cNvSpPr/>
+          <p:nvPr/>
+        </p:nvSpPr>
+        <p:spPr>
+          <a:xfrm>
+            <a:off x="740664" y="1472184"/>
+            <a:ext cx="5212080" cy="384048"/>
+          </a:xfrm>
+          <a:prstGeom prst="rect">
+            <a:avLst/>
+          </a:prstGeom>
+          <a:solidFill>
+            <a:srgbClr val="0284C7"/>
+          </a:solidFill>
+          <a:ln>
+            <a:noFill/>
+          </a:ln>
+        </p:spPr>
+        <p:style>
+          <a:lnRef idx="1">
+            <a:schemeClr val="accent1"/>
+          </a:lnRef>
+          <a:fillRef idx="3">
+            <a:schemeClr val="accent1"/>
+          </a:fillRef>
+          <a:effectRef idx="2">
+            <a:schemeClr val="accent1"/>
+          </a:effectRef>
+          <a:fontRef idx="minor">
+            <a:schemeClr val="lt1"/>
+          </a:fontRef>
+        </p:style>
+        <p:txBody>
+          <a:bodyPr rtlCol="0" anchor="ctr"/>
+          <a:lstStyle/>
+          <a:p>
+            <a:pPr algn="ctr"/>
+          </a:p>
+        </p:txBody>
+      </p:sp>
+      <p:sp>
+        <p:nvSpPr>
+          <p:cNvPr id="8" name="TextBox 7"/>
           <p:cNvSpPr txBox="1"/>
           <p:nvPr/>
         </p:nvSpPr>
         <p:spPr>
           <a:xfrm>
-            <a:off x="914400" y="3044952"/>
-            <a:ext cx="10332720" cy="621792"/>
+            <a:off x="914400" y="1517904"/>
+            <a:ext cx="4864608" cy="320040"/>
+          </a:xfrm>
+          <a:prstGeom prst="rect">
+            <a:avLst/>
+          </a:prstGeom>
+          <a:noFill/>
+        </p:spPr>
+        <p:txBody>
+          <a:bodyPr wrap="none">
+            <a:spAutoFit/>
+          </a:bodyPr>
+          <a:lstStyle/>
+          <a:p>
+            <a:pPr>
+              <a:defRPr sz="1100" b="1">
+                <a:solidFill>
+                  <a:srgbClr val="FFFFFF"/>
+                </a:solidFill>
+              </a:defRPr>
+            </a:pPr>
+            <a:r>
+              <a:t>1. Scalable Architecture &amp; System Design</a:t>
+            </a:r>
+          </a:p>
+        </p:txBody>
+      </p:sp>
+      <p:sp>
+        <p:nvSpPr>
+          <p:cNvPr id="9" name="TextBox 8"/>
+          <p:cNvSpPr txBox="1"/>
+          <p:nvPr/>
+        </p:nvSpPr>
+        <p:spPr>
+          <a:xfrm>
+            <a:off x="914400" y="1901952"/>
+            <a:ext cx="4864608" cy="1737360"/>
           </a:xfrm>
           <a:prstGeom prst="rect">
             <a:avLst/>
@@ -10251,42 +8363,75 @@
           <a:p>
             <a:pPr>
               <a:spcAft>
-                <a:spcPts val="200"/>
+                <a:spcPts val="300"/>
               </a:spcAft>
-              <a:defRPr sz="1100" b="1">
-                <a:solidFill>
-                  <a:srgbClr val="0F1E36"/>
-                </a:solidFill>
-              </a:defRPr>
-            </a:pPr>
-            <a:r>
-              <a:t>★  Enterprise Architecture Modernization &amp; Zero-Downtime Migration</a:t>
-            </a:r>
-          </a:p>
-          <a:p>
-            <a:pPr>
-              <a:defRPr sz="900">
+              <a:defRPr sz="950">
                 <a:solidFill>
                   <a:srgbClr val="1E293B"/>
                 </a:solidFill>
               </a:defRPr>
             </a:pPr>
             <a:r>
-              <a:t>Successfully transformed legacy monolithic systems into modular, API-driven architectures at Cyient/Philips and Technoyana. Reduced regression cycles from weeks to hours and eliminated deployment downtime, ensuring hospital and enterprise operations remained completely uninterrupted during version upgrades.</a:t>
-            </a:r>
-          </a:p>
-        </p:txBody>
-      </p:sp>
-      <p:sp>
-        <p:nvSpPr>
-          <p:cNvPr id="16" name="Rounded Rectangle 15"/>
+              <a:t>• Architected enterprise frontend applications using React, Angular, and LitElement web components.</a:t>
+            </a:r>
+          </a:p>
+          <a:p>
+            <a:pPr>
+              <a:spcAft>
+                <a:spcPts val="300"/>
+              </a:spcAft>
+              <a:defRPr sz="950">
+                <a:solidFill>
+                  <a:srgbClr val="1E293B"/>
+                </a:solidFill>
+              </a:defRPr>
+            </a:pPr>
+            <a:r>
+              <a:t>• Designed cross-platform UI Design Systems adopted across diverse development teams (Moonraft / TLC Hotels).</a:t>
+            </a:r>
+          </a:p>
+          <a:p>
+            <a:pPr>
+              <a:spcAft>
+                <a:spcPts val="300"/>
+              </a:spcAft>
+              <a:defRPr sz="950">
+                <a:solidFill>
+                  <a:srgbClr val="1E293B"/>
+                </a:solidFill>
+              </a:defRPr>
+            </a:pPr>
+            <a:r>
+              <a:t>• Established robust contract boundaries using REST, WebSockets, and event-driven data streaming.</a:t>
+            </a:r>
+          </a:p>
+          <a:p>
+            <a:pPr>
+              <a:spcAft>
+                <a:spcPts val="300"/>
+              </a:spcAft>
+              <a:defRPr sz="950">
+                <a:solidFill>
+                  <a:srgbClr val="1E293B"/>
+                </a:solidFill>
+              </a:defRPr>
+            </a:pPr>
+            <a:r>
+              <a:t>• Evaluated and selected modern cloud and web tech stacks for rapid, scalable client product delivery.</a:t>
+            </a:r>
+          </a:p>
+        </p:txBody>
+      </p:sp>
+      <p:sp>
+        <p:nvSpPr>
+          <p:cNvPr id="10" name="Rounded Rectangle 9"/>
           <p:cNvSpPr/>
           <p:nvPr/>
         </p:nvSpPr>
         <p:spPr>
           <a:xfrm>
-            <a:off x="731520" y="3813048"/>
-            <a:ext cx="10728655" cy="768096"/>
+            <a:off x="6217920" y="1463040"/>
+            <a:ext cx="5230368" cy="2240280"/>
           </a:xfrm>
           <a:prstGeom prst="roundRect">
             <a:avLst/>
@@ -10324,14 +8469,92 @@
       </p:sp>
       <p:sp>
         <p:nvSpPr>
-          <p:cNvPr id="17" name="TextBox 16"/>
+          <p:cNvPr id="11" name="Rectangle 10"/>
+          <p:cNvSpPr/>
+          <p:nvPr/>
+        </p:nvSpPr>
+        <p:spPr>
+          <a:xfrm>
+            <a:off x="6227064" y="1472184"/>
+            <a:ext cx="5212080" cy="384048"/>
+          </a:xfrm>
+          <a:prstGeom prst="rect">
+            <a:avLst/>
+          </a:prstGeom>
+          <a:solidFill>
+            <a:srgbClr val="0E7490"/>
+          </a:solidFill>
+          <a:ln>
+            <a:noFill/>
+          </a:ln>
+        </p:spPr>
+        <p:style>
+          <a:lnRef idx="1">
+            <a:schemeClr val="accent1"/>
+          </a:lnRef>
+          <a:fillRef idx="3">
+            <a:schemeClr val="accent1"/>
+          </a:fillRef>
+          <a:effectRef idx="2">
+            <a:schemeClr val="accent1"/>
+          </a:effectRef>
+          <a:fontRef idx="minor">
+            <a:schemeClr val="lt1"/>
+          </a:fontRef>
+        </p:style>
+        <p:txBody>
+          <a:bodyPr rtlCol="0" anchor="ctr"/>
+          <a:lstStyle/>
+          <a:p>
+            <a:pPr algn="ctr"/>
+          </a:p>
+        </p:txBody>
+      </p:sp>
+      <p:sp>
+        <p:nvSpPr>
+          <p:cNvPr id="12" name="TextBox 11"/>
           <p:cNvSpPr txBox="1"/>
           <p:nvPr/>
         </p:nvSpPr>
         <p:spPr>
           <a:xfrm>
-            <a:off x="914400" y="3886200"/>
-            <a:ext cx="10332720" cy="621792"/>
+            <a:off x="6400800" y="1517904"/>
+            <a:ext cx="4864608" cy="320040"/>
+          </a:xfrm>
+          <a:prstGeom prst="rect">
+            <a:avLst/>
+          </a:prstGeom>
+          <a:noFill/>
+        </p:spPr>
+        <p:txBody>
+          <a:bodyPr wrap="none">
+            <a:spAutoFit/>
+          </a:bodyPr>
+          <a:lstStyle/>
+          <a:p>
+            <a:pPr>
+              <a:defRPr sz="1100" b="1">
+                <a:solidFill>
+                  <a:srgbClr val="FFFFFF"/>
+                </a:solidFill>
+              </a:defRPr>
+            </a:pPr>
+            <a:r>
+              <a:t>2. Operational Resilience &amp; High Reliability</a:t>
+            </a:r>
+          </a:p>
+        </p:txBody>
+      </p:sp>
+      <p:sp>
+        <p:nvSpPr>
+          <p:cNvPr id="13" name="TextBox 12"/>
+          <p:cNvSpPr txBox="1"/>
+          <p:nvPr/>
+        </p:nvSpPr>
+        <p:spPr>
+          <a:xfrm>
+            <a:off x="6400800" y="1901952"/>
+            <a:ext cx="4864608" cy="1737360"/>
           </a:xfrm>
           <a:prstGeom prst="rect">
             <a:avLst/>
@@ -10346,42 +8569,75 @@
           <a:p>
             <a:pPr>
               <a:spcAft>
-                <a:spcPts val="200"/>
+                <a:spcPts val="300"/>
               </a:spcAft>
-              <a:defRPr sz="1100" b="1">
-                <a:solidFill>
-                  <a:srgbClr val="0F1E36"/>
-                </a:solidFill>
-              </a:defRPr>
-            </a:pPr>
-            <a:r>
-              <a:t>★  Multi-Site Network Resilience &amp; Field Data Integrity Engine</a:t>
-            </a:r>
-          </a:p>
-          <a:p>
-            <a:pPr>
-              <a:defRPr sz="900">
+              <a:defRPr sz="950">
                 <a:solidFill>
                   <a:srgbClr val="1E293B"/>
                 </a:solidFill>
               </a:defRPr>
             </a:pPr>
             <a:r>
-              <a:t>Designed and deployed an edge-resilient synchronization pipeline for environments plagued by unstable cellular and local networks. Handled thousands of concurrent transactional updates offline with automatic background sync and deterministic conflict resolution upon network restoration.</a:t>
-            </a:r>
-          </a:p>
-        </p:txBody>
-      </p:sp>
-      <p:sp>
-        <p:nvSpPr>
-          <p:cNvPr id="18" name="Rounded Rectangle 17"/>
+              <a:t>• Architected zero-loss offline-first caching mechanisms (IndexedDB/Service Workers) for field use (Twitan).</a:t>
+            </a:r>
+          </a:p>
+          <a:p>
+            <a:pPr>
+              <a:spcAft>
+                <a:spcPts val="300"/>
+              </a:spcAft>
+              <a:defRPr sz="950">
+                <a:solidFill>
+                  <a:srgbClr val="1E293B"/>
+                </a:solidFill>
+              </a:defRPr>
+            </a:pPr>
+            <a:r>
+              <a:t>• Engineered life-critical clinical UI rendering with zero memory leaks for 24/7 hospital ICU units (Philips ICCA).</a:t>
+            </a:r>
+          </a:p>
+          <a:p>
+            <a:pPr>
+              <a:spcAft>
+                <a:spcPts val="300"/>
+              </a:spcAft>
+              <a:defRPr sz="950">
+                <a:solidFill>
+                  <a:srgbClr val="1E293B"/>
+                </a:solidFill>
+              </a:defRPr>
+            </a:pPr>
+            <a:r>
+              <a:t>• Supervised cloud deployments on GCP, Firebase, and AWS with automated scaling and log monitoring.</a:t>
+            </a:r>
+          </a:p>
+          <a:p>
+            <a:pPr>
+              <a:spcAft>
+                <a:spcPts val="300"/>
+              </a:spcAft>
+              <a:defRPr sz="950">
+                <a:solidFill>
+                  <a:srgbClr val="1E293B"/>
+                </a:solidFill>
+              </a:defRPr>
+            </a:pPr>
+            <a:r>
+              <a:t>• Designed real-time fallback pipelines ensuring continuous operational availability during network drops.</a:t>
+            </a:r>
+          </a:p>
+        </p:txBody>
+      </p:sp>
+      <p:sp>
+        <p:nvSpPr>
+          <p:cNvPr id="14" name="Rounded Rectangle 13"/>
           <p:cNvSpPr/>
           <p:nvPr/>
         </p:nvSpPr>
         <p:spPr>
           <a:xfrm>
-            <a:off x="731520" y="4654296"/>
-            <a:ext cx="10728655" cy="768096"/>
+            <a:off x="731520" y="3931920"/>
+            <a:ext cx="5230368" cy="2240280"/>
           </a:xfrm>
           <a:prstGeom prst="roundRect">
             <a:avLst/>
@@ -10419,14 +8675,92 @@
       </p:sp>
       <p:sp>
         <p:nvSpPr>
-          <p:cNvPr id="19" name="TextBox 18"/>
+          <p:cNvPr id="15" name="Rectangle 14"/>
+          <p:cNvSpPr/>
+          <p:nvPr/>
+        </p:nvSpPr>
+        <p:spPr>
+          <a:xfrm>
+            <a:off x="740664" y="3941064"/>
+            <a:ext cx="5212080" cy="384048"/>
+          </a:xfrm>
+          <a:prstGeom prst="rect">
+            <a:avLst/>
+          </a:prstGeom>
+          <a:solidFill>
+            <a:srgbClr val="D97706"/>
+          </a:solidFill>
+          <a:ln>
+            <a:noFill/>
+          </a:ln>
+        </p:spPr>
+        <p:style>
+          <a:lnRef idx="1">
+            <a:schemeClr val="accent1"/>
+          </a:lnRef>
+          <a:fillRef idx="3">
+            <a:schemeClr val="accent1"/>
+          </a:fillRef>
+          <a:effectRef idx="2">
+            <a:schemeClr val="accent1"/>
+          </a:effectRef>
+          <a:fontRef idx="minor">
+            <a:schemeClr val="lt1"/>
+          </a:fontRef>
+        </p:style>
+        <p:txBody>
+          <a:bodyPr rtlCol="0" anchor="ctr"/>
+          <a:lstStyle/>
+          <a:p>
+            <a:pPr algn="ctr"/>
+          </a:p>
+        </p:txBody>
+      </p:sp>
+      <p:sp>
+        <p:nvSpPr>
+          <p:cNvPr id="16" name="TextBox 15"/>
           <p:cNvSpPr txBox="1"/>
           <p:nvPr/>
         </p:nvSpPr>
         <p:spPr>
           <a:xfrm>
-            <a:off x="914400" y="4727448"/>
-            <a:ext cx="10332720" cy="621792"/>
+            <a:off x="914400" y="3986784"/>
+            <a:ext cx="4864608" cy="320040"/>
+          </a:xfrm>
+          <a:prstGeom prst="rect">
+            <a:avLst/>
+          </a:prstGeom>
+          <a:noFill/>
+        </p:spPr>
+        <p:txBody>
+          <a:bodyPr wrap="none">
+            <a:spAutoFit/>
+          </a:bodyPr>
+          <a:lstStyle/>
+          <a:p>
+            <a:pPr>
+              <a:defRPr sz="1100" b="1">
+                <a:solidFill>
+                  <a:srgbClr val="FFFFFF"/>
+                </a:solidFill>
+              </a:defRPr>
+            </a:pPr>
+            <a:r>
+              <a:t>3. Spatial Computing &amp; 3D Asset Pipelines</a:t>
+            </a:r>
+          </a:p>
+        </p:txBody>
+      </p:sp>
+      <p:sp>
+        <p:nvSpPr>
+          <p:cNvPr id="17" name="TextBox 16"/>
+          <p:cNvSpPr txBox="1"/>
+          <p:nvPr/>
+        </p:nvSpPr>
+        <p:spPr>
+          <a:xfrm>
+            <a:off x="914400" y="4370832"/>
+            <a:ext cx="4864608" cy="1737360"/>
           </a:xfrm>
           <a:prstGeom prst="rect">
             <a:avLst/>
@@ -10441,42 +8775,75 @@
           <a:p>
             <a:pPr>
               <a:spcAft>
-                <a:spcPts val="200"/>
+                <a:spcPts val="300"/>
               </a:spcAft>
-              <a:defRPr sz="1100" b="1">
-                <a:solidFill>
-                  <a:srgbClr val="0F1E36"/>
-                </a:solidFill>
-              </a:defRPr>
-            </a:pPr>
-            <a:r>
-              <a:t>★  Spatial 3D Asset Pipelines &amp; Generative AI Innovation (Voxelforge AI / ayam3d)</a:t>
-            </a:r>
-          </a:p>
-          <a:p>
-            <a:pPr>
-              <a:defRPr sz="900">
+              <a:defRPr sz="950">
                 <a:solidFill>
                   <a:srgbClr val="1E293B"/>
                 </a:solidFill>
               </a:defRPr>
             </a:pPr>
             <a:r>
-              <a:t>Successfully built scalable automated pipelines converting complex 3D meshes into real-time, low-poly assets with automated retopology and PBR texturing. Unlocked web-based 3D digital twin rendering without requiring expensive on-site graphics hardware.</a:t>
-            </a:r>
-          </a:p>
-        </p:txBody>
-      </p:sp>
-      <p:sp>
-        <p:nvSpPr>
-          <p:cNvPr id="20" name="Rounded Rectangle 19"/>
+              <a:t>• Developed AI-assisted workflows (Voxelforge AI) for modular low-poly 3D asset generation (Unreal / Unity / WebGL).</a:t>
+            </a:r>
+          </a:p>
+          <a:p>
+            <a:pPr>
+              <a:spcAft>
+                <a:spcPts val="300"/>
+              </a:spcAft>
+              <a:defRPr sz="950">
+                <a:solidFill>
+                  <a:srgbClr val="1E293B"/>
+                </a:solidFill>
+              </a:defRPr>
+            </a:pPr>
+            <a:r>
+              <a:t>• Directed R&amp;D in automated 3D mesh retopology and PBR texture generation for lightweight web streaming (ayam3d).</a:t>
+            </a:r>
+          </a:p>
+          <a:p>
+            <a:pPr>
+              <a:spcAft>
+                <a:spcPts val="300"/>
+              </a:spcAft>
+              <a:defRPr sz="950">
+                <a:solidFill>
+                  <a:srgbClr val="1E293B"/>
+                </a:solidFill>
+              </a:defRPr>
+            </a:pPr>
+            <a:r>
+              <a:t>• Created real-time 3D flight simulator databases with strict polygon and frame rate budgets (CAE).</a:t>
+            </a:r>
+          </a:p>
+          <a:p>
+            <a:pPr>
+              <a:spcAft>
+                <a:spcPts val="300"/>
+              </a:spcAft>
+              <a:defRPr sz="950">
+                <a:solidFill>
+                  <a:srgbClr val="1E293B"/>
+                </a:solidFill>
+              </a:defRPr>
+            </a:pPr>
+            <a:r>
+              <a:t>• Built interactive 3D facility and infrastructure monitoring dashboards (Cisco Systems).</a:t>
+            </a:r>
+          </a:p>
+        </p:txBody>
+      </p:sp>
+      <p:sp>
+        <p:nvSpPr>
+          <p:cNvPr id="18" name="Rounded Rectangle 17"/>
           <p:cNvSpPr/>
           <p:nvPr/>
         </p:nvSpPr>
         <p:spPr>
           <a:xfrm>
-            <a:off x="731520" y="5495544"/>
-            <a:ext cx="10728655" cy="768096"/>
+            <a:off x="6217920" y="3931920"/>
+            <a:ext cx="5230368" cy="2240280"/>
           </a:xfrm>
           <a:prstGeom prst="roundRect">
             <a:avLst/>
@@ -10514,14 +8881,92 @@
       </p:sp>
       <p:sp>
         <p:nvSpPr>
+          <p:cNvPr id="19" name="Rectangle 18"/>
+          <p:cNvSpPr/>
+          <p:nvPr/>
+        </p:nvSpPr>
+        <p:spPr>
+          <a:xfrm>
+            <a:off x="6227064" y="3941064"/>
+            <a:ext cx="5212080" cy="384048"/>
+          </a:xfrm>
+          <a:prstGeom prst="rect">
+            <a:avLst/>
+          </a:prstGeom>
+          <a:solidFill>
+            <a:srgbClr val="109563"/>
+          </a:solidFill>
+          <a:ln>
+            <a:noFill/>
+          </a:ln>
+        </p:spPr>
+        <p:style>
+          <a:lnRef idx="1">
+            <a:schemeClr val="accent1"/>
+          </a:lnRef>
+          <a:fillRef idx="3">
+            <a:schemeClr val="accent1"/>
+          </a:fillRef>
+          <a:effectRef idx="2">
+            <a:schemeClr val="accent1"/>
+          </a:effectRef>
+          <a:fontRef idx="minor">
+            <a:schemeClr val="lt1"/>
+          </a:fontRef>
+        </p:style>
+        <p:txBody>
+          <a:bodyPr rtlCol="0" anchor="ctr"/>
+          <a:lstStyle/>
+          <a:p>
+            <a:pPr algn="ctr"/>
+          </a:p>
+        </p:txBody>
+      </p:sp>
+      <p:sp>
+        <p:nvSpPr>
+          <p:cNvPr id="20" name="TextBox 19"/>
+          <p:cNvSpPr txBox="1"/>
+          <p:nvPr/>
+        </p:nvSpPr>
+        <p:spPr>
+          <a:xfrm>
+            <a:off x="6400800" y="3986784"/>
+            <a:ext cx="4864608" cy="320040"/>
+          </a:xfrm>
+          <a:prstGeom prst="rect">
+            <a:avLst/>
+          </a:prstGeom>
+          <a:noFill/>
+        </p:spPr>
+        <p:txBody>
+          <a:bodyPr wrap="none">
+            <a:spAutoFit/>
+          </a:bodyPr>
+          <a:lstStyle/>
+          <a:p>
+            <a:pPr>
+              <a:defRPr sz="1100" b="1">
+                <a:solidFill>
+                  <a:srgbClr val="FFFFFF"/>
+                </a:solidFill>
+              </a:defRPr>
+            </a:pPr>
+            <a:r>
+              <a:t>4. Agile Leadership, Mentorship &amp; Delivery</a:t>
+            </a:r>
+          </a:p>
+        </p:txBody>
+      </p:sp>
+      <p:sp>
+        <p:nvSpPr>
           <p:cNvPr id="21" name="TextBox 20"/>
           <p:cNvSpPr txBox="1"/>
           <p:nvPr/>
         </p:nvSpPr>
         <p:spPr>
           <a:xfrm>
-            <a:off x="914400" y="5568696"/>
-            <a:ext cx="10332720" cy="621792"/>
+            <a:off x="6400800" y="4370832"/>
+            <a:ext cx="4864608" cy="1737360"/>
           </a:xfrm>
           <a:prstGeom prst="rect">
             <a:avLst/>
@@ -10536,28 +8981,61 @@
           <a:p>
             <a:pPr>
               <a:spcAft>
-                <a:spcPts val="200"/>
+                <a:spcPts val="300"/>
               </a:spcAft>
-              <a:defRPr sz="1100" b="1">
-                <a:solidFill>
-                  <a:srgbClr val="0F1E36"/>
-                </a:solidFill>
-              </a:defRPr>
-            </a:pPr>
-            <a:r>
-              <a:t>★  Enterprise Operational Governance &amp; Multi-Vendor SLA Excellence</a:t>
-            </a:r>
-          </a:p>
-          <a:p>
-            <a:pPr>
-              <a:defRPr sz="900">
+              <a:defRPr sz="950">
                 <a:solidFill>
                   <a:srgbClr val="1E293B"/>
                 </a:solidFill>
               </a:defRPr>
             </a:pPr>
             <a:r>
-              <a:t>Managed cross-functional technical teams (15+ engineers, QA, DevOps) and vendor relationships with infrastructure providers, software vendors, and hardware suppliers. Standardized SLA benchmarks, improved incident MTTR by 40%, and received multiple corporate awards for excellence.</a:t>
+              <a:t>• Led, mentored, and inspired cross-functional engineering squads of developers, UX designers, and QA analysts.</a:t>
+            </a:r>
+          </a:p>
+          <a:p>
+            <a:pPr>
+              <a:spcAft>
+                <a:spcPts val="300"/>
+              </a:spcAft>
+              <a:defRPr sz="950">
+                <a:solidFill>
+                  <a:srgbClr val="1E293B"/>
+                </a:solidFill>
+              </a:defRPr>
+            </a:pPr>
+            <a:r>
+              <a:t>• Instituted design-to-code pipelines involving users early through rapid prototypes and usability feedback.</a:t>
+            </a:r>
+          </a:p>
+          <a:p>
+            <a:pPr>
+              <a:spcAft>
+                <a:spcPts val="300"/>
+              </a:spcAft>
+              <a:defRPr sz="950">
+                <a:solidFill>
+                  <a:srgbClr val="1E293B"/>
+                </a:solidFill>
+              </a:defRPr>
+            </a:pPr>
+            <a:r>
+              <a:t>• Managed client deliverables, stakeholder communication, sprint planning, and engineering velocity.</a:t>
+            </a:r>
+          </a:p>
+          <a:p>
+            <a:pPr>
+              <a:spcAft>
+                <a:spcPts val="300"/>
+              </a:spcAft>
+              <a:defRPr sz="950">
+                <a:solidFill>
+                  <a:srgbClr val="1E293B"/>
+                </a:solidFill>
+              </a:defRPr>
+            </a:pPr>
+            <a:r>
+              <a:t>• Recipient of multiple corporate excellence awards at UST Global and Cisco for leadership and client commitment.</a:t>
             </a:r>
           </a:p>
         </p:txBody>
@@ -10592,7 +9070,7 @@
               </a:defRPr>
             </a:pPr>
             <a:r>
-              <a:t>Obayashi Corporation · Senior Manager – IT Candidate Portfolio | Maheshchandra Hegde · Slide 7 of 12</a:t>
+              <a:t>Maheshchandra Hegde · Technical Work Experience &amp; Capability Presentation | Slide 7 of 11</a:t>
             </a:r>
           </a:p>
         </p:txBody>
@@ -10681,14 +9159,14 @@
           <a:lstStyle/>
           <a:p>
             <a:pPr>
-              <a:defRPr sz="1100" b="1">
-                <a:solidFill>
-                  <a:srgbClr val="004E96"/>
-                </a:solidFill>
-              </a:defRPr>
-            </a:pPr>
-            <a:r>
-              <a:t>PROBLEM SOLVING &amp; CRISIS MANAGEMENT</a:t>
+              <a:defRPr sz="1050" b="1">
+                <a:solidFill>
+                  <a:srgbClr val="0E7490"/>
+                </a:solidFill>
+              </a:defRPr>
+            </a:pPr>
+            <a:r>
+              <a:t>MILESTONES &amp; RECOGNITION</a:t>
             </a:r>
           </a:p>
         </p:txBody>
@@ -10718,12 +9196,12 @@
             <a:pPr>
               <a:defRPr sz="2100" b="1">
                 <a:solidFill>
-                  <a:srgbClr val="0F1E36"/>
-                </a:solidFill>
-              </a:defRPr>
-            </a:pPr>
-            <a:r>
-              <a:t>Challenges Faced &amp; Strategic Resolutions Implemented</a:t>
+                  <a:srgbClr val="0F172A"/>
+                </a:solidFill>
+              </a:defRPr>
+            </a:pPr>
+            <a:r>
+              <a:t>Major Achievements, Proven Track Record &amp; Formal Acknowledgements</a:t>
             </a:r>
           </a:p>
         </p:txBody>
@@ -10780,7 +9258,447 @@
         <p:spPr>
           <a:xfrm>
             <a:off x="731520" y="1463040"/>
-            <a:ext cx="10728655" cy="1481328"/>
+            <a:ext cx="2542032" cy="1371600"/>
+          </a:xfrm>
+          <a:prstGeom prst="roundRect">
+            <a:avLst/>
+          </a:prstGeom>
+          <a:solidFill>
+            <a:srgbClr val="FFFFFF"/>
+          </a:solidFill>
+          <a:ln w="12700">
+            <a:solidFill>
+              <a:srgbClr val="0284C7"/>
+            </a:solidFill>
+          </a:ln>
+        </p:spPr>
+        <p:style>
+          <a:lnRef idx="1">
+            <a:schemeClr val="accent1"/>
+          </a:lnRef>
+          <a:fillRef idx="3">
+            <a:schemeClr val="accent1"/>
+          </a:fillRef>
+          <a:effectRef idx="2">
+            <a:schemeClr val="accent1"/>
+          </a:effectRef>
+          <a:fontRef idx="minor">
+            <a:schemeClr val="lt1"/>
+          </a:fontRef>
+        </p:style>
+        <p:txBody>
+          <a:bodyPr rtlCol="0" anchor="ctr"/>
+          <a:lstStyle/>
+          <a:p>
+            <a:pPr algn="ctr"/>
+          </a:p>
+        </p:txBody>
+      </p:sp>
+      <p:sp>
+        <p:nvSpPr>
+          <p:cNvPr id="7" name="TextBox 6"/>
+          <p:cNvSpPr txBox="1"/>
+          <p:nvPr/>
+        </p:nvSpPr>
+        <p:spPr>
+          <a:xfrm>
+            <a:off x="841248" y="1572768"/>
+            <a:ext cx="2322576" cy="1152144"/>
+          </a:xfrm>
+          <a:prstGeom prst="rect">
+            <a:avLst/>
+          </a:prstGeom>
+          <a:noFill/>
+        </p:spPr>
+        <p:txBody>
+          <a:bodyPr wrap="square">
+            <a:spAutoFit/>
+          </a:bodyPr>
+          <a:lstStyle/>
+          <a:p>
+            <a:pPr>
+              <a:spcAft>
+                <a:spcPts val="200"/>
+              </a:spcAft>
+              <a:defRPr sz="2200" b="1">
+                <a:solidFill>
+                  <a:srgbClr val="0284C7"/>
+                </a:solidFill>
+              </a:defRPr>
+            </a:pPr>
+            <a:r>
+              <a:t>16+ Years</a:t>
+            </a:r>
+          </a:p>
+          <a:p>
+            <a:pPr>
+              <a:spcAft>
+                <a:spcPts val="200"/>
+              </a:spcAft>
+              <a:defRPr sz="1000" b="1">
+                <a:solidFill>
+                  <a:srgbClr val="0F172A"/>
+                </a:solidFill>
+              </a:defRPr>
+            </a:pPr>
+            <a:r>
+              <a:t>Professional Track Record</a:t>
+            </a:r>
+          </a:p>
+          <a:p>
+            <a:pPr>
+              <a:defRPr sz="850">
+                <a:solidFill>
+                  <a:srgbClr val="64748B"/>
+                </a:solidFill>
+              </a:defRPr>
+            </a:pPr>
+            <a:r>
+              <a:t>Extensive leadership across enterprise software, healthcare, startups &amp; 3D tech</a:t>
+            </a:r>
+          </a:p>
+        </p:txBody>
+      </p:sp>
+      <p:sp>
+        <p:nvSpPr>
+          <p:cNvPr id="8" name="Rounded Rectangle 7"/>
+          <p:cNvSpPr/>
+          <p:nvPr/>
+        </p:nvSpPr>
+        <p:spPr>
+          <a:xfrm>
+            <a:off x="3456432" y="1463040"/>
+            <a:ext cx="2542032" cy="1371600"/>
+          </a:xfrm>
+          <a:prstGeom prst="roundRect">
+            <a:avLst/>
+          </a:prstGeom>
+          <a:solidFill>
+            <a:srgbClr val="FFFFFF"/>
+          </a:solidFill>
+          <a:ln w="12700">
+            <a:solidFill>
+              <a:srgbClr val="0284C7"/>
+            </a:solidFill>
+          </a:ln>
+        </p:spPr>
+        <p:style>
+          <a:lnRef idx="1">
+            <a:schemeClr val="accent1"/>
+          </a:lnRef>
+          <a:fillRef idx="3">
+            <a:schemeClr val="accent1"/>
+          </a:fillRef>
+          <a:effectRef idx="2">
+            <a:schemeClr val="accent1"/>
+          </a:effectRef>
+          <a:fontRef idx="minor">
+            <a:schemeClr val="lt1"/>
+          </a:fontRef>
+        </p:style>
+        <p:txBody>
+          <a:bodyPr rtlCol="0" anchor="ctr"/>
+          <a:lstStyle/>
+          <a:p>
+            <a:pPr algn="ctr"/>
+          </a:p>
+        </p:txBody>
+      </p:sp>
+      <p:sp>
+        <p:nvSpPr>
+          <p:cNvPr id="9" name="TextBox 8"/>
+          <p:cNvSpPr txBox="1"/>
+          <p:nvPr/>
+        </p:nvSpPr>
+        <p:spPr>
+          <a:xfrm>
+            <a:off x="3566160" y="1572768"/>
+            <a:ext cx="2322576" cy="1152144"/>
+          </a:xfrm>
+          <a:prstGeom prst="rect">
+            <a:avLst/>
+          </a:prstGeom>
+          <a:noFill/>
+        </p:spPr>
+        <p:txBody>
+          <a:bodyPr wrap="square">
+            <a:spAutoFit/>
+          </a:bodyPr>
+          <a:lstStyle/>
+          <a:p>
+            <a:pPr>
+              <a:spcAft>
+                <a:spcPts val="200"/>
+              </a:spcAft>
+              <a:defRPr sz="2200" b="1">
+                <a:solidFill>
+                  <a:srgbClr val="0284C7"/>
+                </a:solidFill>
+              </a:defRPr>
+            </a:pPr>
+            <a:r>
+              <a:t>50+ Projects</a:t>
+            </a:r>
+          </a:p>
+          <a:p>
+            <a:pPr>
+              <a:spcAft>
+                <a:spcPts val="200"/>
+              </a:spcAft>
+              <a:defRPr sz="1000" b="1">
+                <a:solidFill>
+                  <a:srgbClr val="0F172A"/>
+                </a:solidFill>
+              </a:defRPr>
+            </a:pPr>
+            <a:r>
+              <a:t>3D &amp; Visualization Portfolio</a:t>
+            </a:r>
+          </a:p>
+          <a:p>
+            <a:pPr>
+              <a:defRPr sz="850">
+                <a:solidFill>
+                  <a:srgbClr val="64748B"/>
+                </a:solidFill>
+              </a:defRPr>
+            </a:pPr>
+            <a:r>
+              <a:t>Delivered across architectural visualization, CAD, flight simulation &amp; spatial AI</a:t>
+            </a:r>
+          </a:p>
+        </p:txBody>
+      </p:sp>
+      <p:sp>
+        <p:nvSpPr>
+          <p:cNvPr id="10" name="Rounded Rectangle 9"/>
+          <p:cNvSpPr/>
+          <p:nvPr/>
+        </p:nvSpPr>
+        <p:spPr>
+          <a:xfrm>
+            <a:off x="6181344" y="1463040"/>
+            <a:ext cx="2542032" cy="1371600"/>
+          </a:xfrm>
+          <a:prstGeom prst="roundRect">
+            <a:avLst/>
+          </a:prstGeom>
+          <a:solidFill>
+            <a:srgbClr val="FFFFFF"/>
+          </a:solidFill>
+          <a:ln w="12700">
+            <a:solidFill>
+              <a:srgbClr val="0284C7"/>
+            </a:solidFill>
+          </a:ln>
+        </p:spPr>
+        <p:style>
+          <a:lnRef idx="1">
+            <a:schemeClr val="accent1"/>
+          </a:lnRef>
+          <a:fillRef idx="3">
+            <a:schemeClr val="accent1"/>
+          </a:fillRef>
+          <a:effectRef idx="2">
+            <a:schemeClr val="accent1"/>
+          </a:effectRef>
+          <a:fontRef idx="minor">
+            <a:schemeClr val="lt1"/>
+          </a:fontRef>
+        </p:style>
+        <p:txBody>
+          <a:bodyPr rtlCol="0" anchor="ctr"/>
+          <a:lstStyle/>
+          <a:p>
+            <a:pPr algn="ctr"/>
+          </a:p>
+        </p:txBody>
+      </p:sp>
+      <p:sp>
+        <p:nvSpPr>
+          <p:cNvPr id="11" name="TextBox 10"/>
+          <p:cNvSpPr txBox="1"/>
+          <p:nvPr/>
+        </p:nvSpPr>
+        <p:spPr>
+          <a:xfrm>
+            <a:off x="6291072" y="1572768"/>
+            <a:ext cx="2322576" cy="1152144"/>
+          </a:xfrm>
+          <a:prstGeom prst="rect">
+            <a:avLst/>
+          </a:prstGeom>
+          <a:noFill/>
+        </p:spPr>
+        <p:txBody>
+          <a:bodyPr wrap="square">
+            <a:spAutoFit/>
+          </a:bodyPr>
+          <a:lstStyle/>
+          <a:p>
+            <a:pPr>
+              <a:spcAft>
+                <a:spcPts val="200"/>
+              </a:spcAft>
+              <a:defRPr sz="2200" b="1">
+                <a:solidFill>
+                  <a:srgbClr val="0284C7"/>
+                </a:solidFill>
+              </a:defRPr>
+            </a:pPr>
+            <a:r>
+              <a:t>4 Formal Awards</a:t>
+            </a:r>
+          </a:p>
+          <a:p>
+            <a:pPr>
+              <a:spcAft>
+                <a:spcPts val="200"/>
+              </a:spcAft>
+              <a:defRPr sz="1000" b="1">
+                <a:solidFill>
+                  <a:srgbClr val="0F172A"/>
+                </a:solidFill>
+              </a:defRPr>
+            </a:pPr>
+            <a:r>
+              <a:t>Industry Acknowledgements</a:t>
+            </a:r>
+          </a:p>
+          <a:p>
+            <a:pPr>
+              <a:defRPr sz="850">
+                <a:solidFill>
+                  <a:srgbClr val="64748B"/>
+                </a:solidFill>
+              </a:defRPr>
+            </a:pPr>
+            <a:r>
+              <a:t>Cisco Facility Appreciation + 3 UST Global Excellence &amp; Client-First awards</a:t>
+            </a:r>
+          </a:p>
+        </p:txBody>
+      </p:sp>
+      <p:sp>
+        <p:nvSpPr>
+          <p:cNvPr id="12" name="Rounded Rectangle 11"/>
+          <p:cNvSpPr/>
+          <p:nvPr/>
+        </p:nvSpPr>
+        <p:spPr>
+          <a:xfrm>
+            <a:off x="8906256" y="1463040"/>
+            <a:ext cx="2542032" cy="1371600"/>
+          </a:xfrm>
+          <a:prstGeom prst="roundRect">
+            <a:avLst/>
+          </a:prstGeom>
+          <a:solidFill>
+            <a:srgbClr val="FFFFFF"/>
+          </a:solidFill>
+          <a:ln w="12700">
+            <a:solidFill>
+              <a:srgbClr val="0284C7"/>
+            </a:solidFill>
+          </a:ln>
+        </p:spPr>
+        <p:style>
+          <a:lnRef idx="1">
+            <a:schemeClr val="accent1"/>
+          </a:lnRef>
+          <a:fillRef idx="3">
+            <a:schemeClr val="accent1"/>
+          </a:fillRef>
+          <a:effectRef idx="2">
+            <a:schemeClr val="accent1"/>
+          </a:effectRef>
+          <a:fontRef idx="minor">
+            <a:schemeClr val="lt1"/>
+          </a:fontRef>
+        </p:style>
+        <p:txBody>
+          <a:bodyPr rtlCol="0" anchor="ctr"/>
+          <a:lstStyle/>
+          <a:p>
+            <a:pPr algn="ctr"/>
+          </a:p>
+        </p:txBody>
+      </p:sp>
+      <p:sp>
+        <p:nvSpPr>
+          <p:cNvPr id="13" name="TextBox 12"/>
+          <p:cNvSpPr txBox="1"/>
+          <p:nvPr/>
+        </p:nvSpPr>
+        <p:spPr>
+          <a:xfrm>
+            <a:off x="9015984" y="1572768"/>
+            <a:ext cx="2322576" cy="1152144"/>
+          </a:xfrm>
+          <a:prstGeom prst="rect">
+            <a:avLst/>
+          </a:prstGeom>
+          <a:noFill/>
+        </p:spPr>
+        <p:txBody>
+          <a:bodyPr wrap="square">
+            <a:spAutoFit/>
+          </a:bodyPr>
+          <a:lstStyle/>
+          <a:p>
+            <a:pPr>
+              <a:spcAft>
+                <a:spcPts val="200"/>
+              </a:spcAft>
+              <a:defRPr sz="2200" b="1">
+                <a:solidFill>
+                  <a:srgbClr val="0284C7"/>
+                </a:solidFill>
+              </a:defRPr>
+            </a:pPr>
+            <a:r>
+              <a:t>100% Offline</a:t>
+            </a:r>
+          </a:p>
+          <a:p>
+            <a:pPr>
+              <a:spcAft>
+                <a:spcPts val="200"/>
+              </a:spcAft>
+              <a:defRPr sz="1000" b="1">
+                <a:solidFill>
+                  <a:srgbClr val="0F172A"/>
+                </a:solidFill>
+              </a:defRPr>
+            </a:pPr>
+            <a:r>
+              <a:t>Data Integrity at Edge</a:t>
+            </a:r>
+          </a:p>
+          <a:p>
+            <a:pPr>
+              <a:defRPr sz="850">
+                <a:solidFill>
+                  <a:srgbClr val="64748B"/>
+                </a:solidFill>
+              </a:defRPr>
+            </a:pPr>
+            <a:r>
+              <a:t>Zero data loss during field network drops with transactional replay queues</a:t>
+            </a:r>
+          </a:p>
+        </p:txBody>
+      </p:sp>
+      <p:sp>
+        <p:nvSpPr>
+          <p:cNvPr id="14" name="Rounded Rectangle 13"/>
+          <p:cNvSpPr/>
+          <p:nvPr/>
+        </p:nvSpPr>
+        <p:spPr>
+          <a:xfrm>
+            <a:off x="731520" y="2971800"/>
+            <a:ext cx="10728655" cy="768096"/>
           </a:xfrm>
           <a:prstGeom prst="roundRect">
             <a:avLst/>
@@ -10818,107 +9736,14 @@
       </p:sp>
       <p:sp>
         <p:nvSpPr>
-          <p:cNvPr id="7" name="TextBox 6"/>
+          <p:cNvPr id="15" name="TextBox 14"/>
           <p:cNvSpPr txBox="1"/>
           <p:nvPr/>
         </p:nvSpPr>
         <p:spPr>
           <a:xfrm>
-            <a:off x="914400" y="1572768"/>
-            <a:ext cx="4389120" cy="1280160"/>
-          </a:xfrm>
-          <a:prstGeom prst="rect">
-            <a:avLst/>
-          </a:prstGeom>
-          <a:noFill/>
-        </p:spPr>
-        <p:txBody>
-          <a:bodyPr wrap="square">
-            <a:spAutoFit/>
-          </a:bodyPr>
-          <a:lstStyle/>
-          <a:p>
-            <a:pPr>
-              <a:spcAft>
-                <a:spcPts val="300"/>
-              </a:spcAft>
-              <a:defRPr sz="1100" b="1">
-                <a:solidFill>
-                  <a:srgbClr val="CC2229"/>
-                </a:solidFill>
-              </a:defRPr>
-            </a:pPr>
-            <a:r>
-              <a:t>Challenge 1: Severe Network Fluctuation &amp; Remote Connectivity Drops</a:t>
-            </a:r>
-          </a:p>
-          <a:p>
-            <a:pPr>
-              <a:defRPr sz="900">
-                <a:solidFill>
-                  <a:srgbClr val="1E293B"/>
-                </a:solidFill>
-              </a:defRPr>
-            </a:pPr>
-            <a:r>
-              <a:t>Operating conditions at remote event venues and distributed client sites suffered frequent Wi-Fi packet drops, ISP latency spikes, and dead zones, causing cloud disconnects and user data loss.</a:t>
-            </a:r>
-          </a:p>
-        </p:txBody>
-      </p:sp>
-      <p:sp>
-        <p:nvSpPr>
-          <p:cNvPr id="8" name="Rectangle 7"/>
-          <p:cNvSpPr/>
-          <p:nvPr/>
-        </p:nvSpPr>
-        <p:spPr>
-          <a:xfrm>
-            <a:off x="5486400" y="1600200"/>
-            <a:ext cx="18288" cy="1188720"/>
-          </a:xfrm>
-          <a:prstGeom prst="rect">
-            <a:avLst/>
-          </a:prstGeom>
-          <a:solidFill>
-            <a:srgbClr val="E2E8F0"/>
-          </a:solidFill>
-          <a:ln>
-            <a:noFill/>
-          </a:ln>
-        </p:spPr>
-        <p:style>
-          <a:lnRef idx="1">
-            <a:schemeClr val="accent1"/>
-          </a:lnRef>
-          <a:fillRef idx="3">
-            <a:schemeClr val="accent1"/>
-          </a:fillRef>
-          <a:effectRef idx="2">
-            <a:schemeClr val="accent1"/>
-          </a:effectRef>
-          <a:fontRef idx="minor">
-            <a:schemeClr val="lt1"/>
-          </a:fontRef>
-        </p:style>
-        <p:txBody>
-          <a:bodyPr rtlCol="0" anchor="ctr"/>
-          <a:lstStyle/>
-          <a:p>
-            <a:pPr algn="ctr"/>
-          </a:p>
-        </p:txBody>
-      </p:sp>
-      <p:sp>
-        <p:nvSpPr>
-          <p:cNvPr id="9" name="TextBox 8"/>
-          <p:cNvSpPr txBox="1"/>
-          <p:nvPr/>
-        </p:nvSpPr>
-        <p:spPr>
-          <a:xfrm>
-            <a:off x="5669280" y="1572768"/>
-            <a:ext cx="5577840" cy="1280160"/>
+            <a:off x="914400" y="3044952"/>
+            <a:ext cx="10332720" cy="621792"/>
           </a:xfrm>
           <a:prstGeom prst="rect">
             <a:avLst/>
@@ -10937,19 +9762,16 @@
               </a:spcAft>
               <a:defRPr sz="1100" b="1">
                 <a:solidFill>
-                  <a:srgbClr val="004E96"/>
-                </a:solidFill>
-              </a:defRPr>
-            </a:pPr>
-            <a:r>
-              <a:t>Resolution Implemented:</a:t>
-            </a:r>
-          </a:p>
-          <a:p>
-            <a:pPr>
-              <a:spcAft>
-                <a:spcPts val="300"/>
-              </a:spcAft>
+                  <a:srgbClr val="0F172A"/>
+                </a:solidFill>
+              </a:defRPr>
+            </a:pPr>
+            <a:r>
+              <a:t>★  Philips Intellispace Critical Care &amp; Anesthesia (Cyient)</a:t>
+            </a:r>
+          </a:p>
+          <a:p>
+            <a:pPr>
               <a:defRPr sz="900">
                 <a:solidFill>
                   <a:srgbClr val="1E293B"/>
@@ -10957,33 +9779,21 @@
               </a:defRPr>
             </a:pPr>
             <a:r>
-              <a:t>Architected an 'Offline-First' state engine using IndexedDB client persistence and service workers. Implemented optimistic UI updates and a transactional event replay queue that automatically resynchronizes once the network reconnects.</a:t>
-            </a:r>
-          </a:p>
-          <a:p>
-            <a:pPr>
-              <a:defRPr sz="900" b="1">
-                <a:solidFill>
-                  <a:srgbClr val="109563"/>
-                </a:solidFill>
-              </a:defRPr>
-            </a:pPr>
-            <a:r>
-              <a:t>Result: Impact: 100% data preservation, zero operator workflow interruptions, seamless user experience.</a:t>
-            </a:r>
-          </a:p>
-        </p:txBody>
-      </p:sp>
-      <p:sp>
-        <p:nvSpPr>
-          <p:cNvPr id="10" name="Rounded Rectangle 9"/>
+              <a:t>Led the frontend technical development of clinical modules for Philips Healthcare, delivering life-critical patient monitoring with rock-solid stability, zero memory leaks, and full healthcare regulatory compliance.</a:t>
+            </a:r>
+          </a:p>
+        </p:txBody>
+      </p:sp>
+      <p:sp>
+        <p:nvSpPr>
+          <p:cNvPr id="16" name="Rounded Rectangle 15"/>
           <p:cNvSpPr/>
           <p:nvPr/>
         </p:nvSpPr>
         <p:spPr>
           <a:xfrm>
-            <a:off x="731520" y="3072384"/>
-            <a:ext cx="10728655" cy="1481328"/>
+            <a:off x="731520" y="3813048"/>
+            <a:ext cx="10728655" cy="768096"/>
           </a:xfrm>
           <a:prstGeom prst="roundRect">
             <a:avLst/>
@@ -11021,107 +9831,14 @@
       </p:sp>
       <p:sp>
         <p:nvSpPr>
-          <p:cNvPr id="11" name="TextBox 10"/>
+          <p:cNvPr id="17" name="TextBox 16"/>
           <p:cNvSpPr txBox="1"/>
           <p:nvPr/>
         </p:nvSpPr>
         <p:spPr>
           <a:xfrm>
-            <a:off x="914400" y="3182112"/>
-            <a:ext cx="4389120" cy="1280160"/>
-          </a:xfrm>
-          <a:prstGeom prst="rect">
-            <a:avLst/>
-          </a:prstGeom>
-          <a:noFill/>
-        </p:spPr>
-        <p:txBody>
-          <a:bodyPr wrap="square">
-            <a:spAutoFit/>
-          </a:bodyPr>
-          <a:lstStyle/>
-          <a:p>
-            <a:pPr>
-              <a:spcAft>
-                <a:spcPts val="300"/>
-              </a:spcAft>
-              <a:defRPr sz="1100" b="1">
-                <a:solidFill>
-                  <a:srgbClr val="CC2229"/>
-                </a:solidFill>
-              </a:defRPr>
-            </a:pPr>
-            <a:r>
-              <a:t>Challenge 2: High Bandwidth Saturation &amp; Latency Rendering Heavy 3D Assets on Edge Devices</a:t>
-            </a:r>
-          </a:p>
-          <a:p>
-            <a:pPr>
-              <a:defRPr sz="900">
-                <a:solidFill>
-                  <a:srgbClr val="1E293B"/>
-                </a:solidFill>
-              </a:defRPr>
-            </a:pPr>
-            <a:r>
-              <a:t>Heavy 3D models, complex CAD geometry, and unoptimized high-poly meshes caused browser crashes, memory overflows, and unacceptable load times over mobile job-site networks.</a:t>
-            </a:r>
-          </a:p>
-        </p:txBody>
-      </p:sp>
-      <p:sp>
-        <p:nvSpPr>
-          <p:cNvPr id="12" name="Rectangle 11"/>
-          <p:cNvSpPr/>
-          <p:nvPr/>
-        </p:nvSpPr>
-        <p:spPr>
-          <a:xfrm>
-            <a:off x="5486400" y="3209544"/>
-            <a:ext cx="18288" cy="1188720"/>
-          </a:xfrm>
-          <a:prstGeom prst="rect">
-            <a:avLst/>
-          </a:prstGeom>
-          <a:solidFill>
-            <a:srgbClr val="E2E8F0"/>
-          </a:solidFill>
-          <a:ln>
-            <a:noFill/>
-          </a:ln>
-        </p:spPr>
-        <p:style>
-          <a:lnRef idx="1">
-            <a:schemeClr val="accent1"/>
-          </a:lnRef>
-          <a:fillRef idx="3">
-            <a:schemeClr val="accent1"/>
-          </a:fillRef>
-          <a:effectRef idx="2">
-            <a:schemeClr val="accent1"/>
-          </a:effectRef>
-          <a:fontRef idx="minor">
-            <a:schemeClr val="lt1"/>
-          </a:fontRef>
-        </p:style>
-        <p:txBody>
-          <a:bodyPr rtlCol="0" anchor="ctr"/>
-          <a:lstStyle/>
-          <a:p>
-            <a:pPr algn="ctr"/>
-          </a:p>
-        </p:txBody>
-      </p:sp>
-      <p:sp>
-        <p:nvSpPr>
-          <p:cNvPr id="13" name="TextBox 12"/>
-          <p:cNvSpPr txBox="1"/>
-          <p:nvPr/>
-        </p:nvSpPr>
-        <p:spPr>
-          <a:xfrm>
-            <a:off x="5669280" y="3182112"/>
-            <a:ext cx="5577840" cy="1280160"/>
+            <a:off x="914400" y="3886200"/>
+            <a:ext cx="10332720" cy="621792"/>
           </a:xfrm>
           <a:prstGeom prst="rect">
             <a:avLst/>
@@ -11140,19 +9857,16 @@
               </a:spcAft>
               <a:defRPr sz="1100" b="1">
                 <a:solidFill>
-                  <a:srgbClr val="004E96"/>
-                </a:solidFill>
-              </a:defRPr>
-            </a:pPr>
-            <a:r>
-              <a:t>Resolution Implemented:</a:t>
-            </a:r>
-          </a:p>
-          <a:p>
-            <a:pPr>
-              <a:spcAft>
-                <a:spcPts val="300"/>
-              </a:spcAft>
+                  <a:srgbClr val="0F172A"/>
+                </a:solidFill>
+              </a:defRPr>
+            </a:pPr>
+            <a:r>
+              <a:t>★  Startup Co-Founder &amp; Director (Technoyana &amp; Twitan)</a:t>
+            </a:r>
+          </a:p>
+          <a:p>
+            <a:pPr>
               <a:defRPr sz="900">
                 <a:solidFill>
                   <a:srgbClr val="1E293B"/>
@@ -11160,33 +9874,21 @@
               </a:defRPr>
             </a:pPr>
             <a:r>
-              <a:t>Leveraged Voxelforge AI and ayam3d retopology algorithms to automate progressive LOD (Level of Detail) mesh compression and texture atlas baking, paired with client-side WebGL progressive loading.</a:t>
-            </a:r>
-          </a:p>
-          <a:p>
-            <a:pPr>
-              <a:defRPr sz="900" b="1">
-                <a:solidFill>
-                  <a:srgbClr val="109563"/>
-                </a:solidFill>
-              </a:defRPr>
-            </a:pPr>
-            <a:r>
-              <a:t>Result: Impact: Slashed 3D asset file sizes by 75%, achieved 60 FPS rendering on mobile devices without expensive GPU workstations.</a:t>
-            </a:r>
-          </a:p>
-        </p:txBody>
-      </p:sp>
-      <p:sp>
-        <p:nvSpPr>
-          <p:cNvPr id="14" name="Rounded Rectangle 13"/>
+              <a:t>Successfully co-founded and steered Technoyana Digital Transformation Services and Twitan.com; built and shipped commercial fintech apps, product search engines, and the Shutlify badminton tournament operating system.</a:t>
+            </a:r>
+          </a:p>
+        </p:txBody>
+      </p:sp>
+      <p:sp>
+        <p:nvSpPr>
+          <p:cNvPr id="18" name="Rounded Rectangle 17"/>
           <p:cNvSpPr/>
           <p:nvPr/>
         </p:nvSpPr>
         <p:spPr>
           <a:xfrm>
-            <a:off x="731520" y="4681728"/>
-            <a:ext cx="10728655" cy="1481328"/>
+            <a:off x="731520" y="4654296"/>
+            <a:ext cx="10728655" cy="768096"/>
           </a:xfrm>
           <a:prstGeom prst="roundRect">
             <a:avLst/>
@@ -11224,14 +9926,14 @@
       </p:sp>
       <p:sp>
         <p:nvSpPr>
-          <p:cNvPr id="15" name="TextBox 14"/>
+          <p:cNvPr id="19" name="TextBox 18"/>
           <p:cNvSpPr txBox="1"/>
           <p:nvPr/>
         </p:nvSpPr>
         <p:spPr>
           <a:xfrm>
-            <a:off x="914400" y="4791456"/>
-            <a:ext cx="4389120" cy="1280160"/>
+            <a:off x="914400" y="4727448"/>
+            <a:ext cx="10332720" cy="621792"/>
           </a:xfrm>
           <a:prstGeom prst="rect">
             <a:avLst/>
@@ -11246,16 +9948,16 @@
           <a:p>
             <a:pPr>
               <a:spcAft>
-                <a:spcPts val="300"/>
+                <a:spcPts val="200"/>
               </a:spcAft>
               <a:defRPr sz="1100" b="1">
                 <a:solidFill>
-                  <a:srgbClr val="CC2229"/>
-                </a:solidFill>
-              </a:defRPr>
-            </a:pPr>
-            <a:r>
-              <a:t>Challenge 3: Complex Multi-Vendor Dependencies &amp; SLA Enforcement Gaps</a:t>
+                  <a:srgbClr val="0F172A"/>
+                </a:solidFill>
+              </a:defRPr>
+            </a:pPr>
+            <a:r>
+              <a:t>★  Cross-Platform UI Design System (Moonraft Innovation Labs)</a:t>
             </a:r>
           </a:p>
           <a:p>
@@ -11267,30 +9969,32 @@
               </a:defRPr>
             </a:pPr>
             <a:r>
-              <a:t>Dispersed third-party cloud tools, software licenses, and hardware vendors lacked centralized SLA tracking, resulting in finger-pointing during service degradation and creeping monthly cloud expenditure.</a:t>
-            </a:r>
-          </a:p>
-        </p:txBody>
-      </p:sp>
-      <p:sp>
-        <p:nvSpPr>
-          <p:cNvPr id="16" name="Rectangle 15"/>
+              <a:t>Architected a cross-platform UI design system using the LitElement web components library, creating a reusable component standard leveraged seamlessly across React, Angular, and Polymer teams for TLC Hotels.</a:t>
+            </a:r>
+          </a:p>
+        </p:txBody>
+      </p:sp>
+      <p:sp>
+        <p:nvSpPr>
+          <p:cNvPr id="20" name="Rounded Rectangle 19"/>
           <p:cNvSpPr/>
           <p:nvPr/>
         </p:nvSpPr>
         <p:spPr>
           <a:xfrm>
-            <a:off x="5486400" y="4818888"/>
-            <a:ext cx="18288" cy="1188720"/>
-          </a:xfrm>
-          <a:prstGeom prst="rect">
+            <a:off x="731520" y="5495544"/>
+            <a:ext cx="10728655" cy="768096"/>
+          </a:xfrm>
+          <a:prstGeom prst="roundRect">
             <a:avLst/>
           </a:prstGeom>
           <a:solidFill>
-            <a:srgbClr val="E2E8F0"/>
+            <a:srgbClr val="FFFFFF"/>
           </a:solidFill>
-          <a:ln>
-            <a:noFill/>
+          <a:ln w="12700">
+            <a:solidFill>
+              <a:srgbClr val="E2E8F0"/>
+            </a:solidFill>
           </a:ln>
         </p:spPr>
         <p:style>
@@ -11317,14 +10021,14 @@
       </p:sp>
       <p:sp>
         <p:nvSpPr>
-          <p:cNvPr id="17" name="TextBox 16"/>
+          <p:cNvPr id="21" name="TextBox 20"/>
           <p:cNvSpPr txBox="1"/>
           <p:nvPr/>
         </p:nvSpPr>
         <p:spPr>
           <a:xfrm>
-            <a:off x="5669280" y="4791456"/>
-            <a:ext cx="5577840" cy="1280160"/>
+            <a:off x="914400" y="5568696"/>
+            <a:ext cx="10332720" cy="621792"/>
           </a:xfrm>
           <a:prstGeom prst="rect">
             <a:avLst/>
@@ -11343,19 +10047,16 @@
               </a:spcAft>
               <a:defRPr sz="1100" b="1">
                 <a:solidFill>
-                  <a:srgbClr val="004E96"/>
-                </a:solidFill>
-              </a:defRPr>
-            </a:pPr>
-            <a:r>
-              <a:t>Resolution Implemented:</a:t>
-            </a:r>
-          </a:p>
-          <a:p>
-            <a:pPr>
-              <a:spcAft>
-                <a:spcPts val="300"/>
-              </a:spcAft>
+                  <a:srgbClr val="0F172A"/>
+                </a:solidFill>
+              </a:defRPr>
+            </a:pPr>
+            <a:r>
+              <a:t>★  Formal Corporate Awards &amp; Cisco Recognition</a:t>
+            </a:r>
+          </a:p>
+          <a:p>
+            <a:pPr>
               <a:defRPr sz="900">
                 <a:solidFill>
                   <a:srgbClr val="1E293B"/>
@@ -11363,26 +10064,14 @@
               </a:defRPr>
             </a:pPr>
             <a:r>
-              <a:t>Instituted a centralized IT Governance &amp; SLA Dashboard with automated latency/uptime telemetry. Standardized vendor contract SLAs with penalty clauses, monthly executive reviews, and automated idle resource termination.</a:t>
-            </a:r>
-          </a:p>
-          <a:p>
-            <a:pPr>
-              <a:defRPr sz="900" b="1">
-                <a:solidFill>
-                  <a:srgbClr val="109563"/>
-                </a:solidFill>
-              </a:defRPr>
-            </a:pPr>
-            <a:r>
-              <a:t>Result: Impact: Slashed mean-time-to-resolution (MTTR) by 40% and trimmed recurring cloud/vendor spend by 22%.</a:t>
-            </a:r>
-          </a:p>
-        </p:txBody>
-      </p:sp>
-      <p:sp>
-        <p:nvSpPr>
-          <p:cNvPr id="18" name="TextBox 17"/>
+              <a:t>Received Cisco Systems Appreciation for developing the campus Facility Dashboard (2010); recognized with 3 Certificates of Appreciation at UST Global ('Inspiring People' 2018, 'Putting Client First' 2016, 'Living the Values' 2015).</a:t>
+            </a:r>
+          </a:p>
+        </p:txBody>
+      </p:sp>
+      <p:sp>
+        <p:nvSpPr>
+          <p:cNvPr id="22" name="TextBox 21"/>
           <p:cNvSpPr txBox="1"/>
           <p:nvPr/>
         </p:nvSpPr>
@@ -11410,7 +10099,7 @@
               </a:defRPr>
             </a:pPr>
             <a:r>
-              <a:t>Obayashi Corporation · Senior Manager – IT Candidate Portfolio | Maheshchandra Hegde · Slide 8 of 12</a:t>
+              <a:t>Maheshchandra Hegde · Technical Work Experience &amp; Capability Presentation | Slide 8 of 11</a:t>
             </a:r>
           </a:p>
         </p:txBody>
@@ -11499,14 +10188,14 @@
           <a:lstStyle/>
           <a:p>
             <a:pPr>
-              <a:defRPr sz="1100" b="1">
-                <a:solidFill>
-                  <a:srgbClr val="004E96"/>
-                </a:solidFill>
-              </a:defRPr>
-            </a:pPr>
-            <a:r>
-              <a:t>OPERATIONAL PHILOSOPHY</a:t>
+              <a:defRPr sz="1050" b="1">
+                <a:solidFill>
+                  <a:srgbClr val="0E7490"/>
+                </a:solidFill>
+              </a:defRPr>
+            </a:pPr>
+            <a:r>
+              <a:t>PROBLEM SOLVING &amp; ENGINEERING RIGOR</a:t>
             </a:r>
           </a:p>
         </p:txBody>
@@ -11536,12 +10225,12 @@
             <a:pPr>
               <a:defRPr sz="2100" b="1">
                 <a:solidFill>
-                  <a:srgbClr val="0F1E36"/>
-                </a:solidFill>
-              </a:defRPr>
-            </a:pPr>
-            <a:r>
-              <a:t>Lessons Learned &amp; Enterprise Best Practices</a:t>
+                  <a:srgbClr val="0F172A"/>
+                </a:solidFill>
+              </a:defRPr>
+            </a:pPr>
+            <a:r>
+              <a:t>Real-World Technical Challenges Faced &amp; Pragmatic Resolutions</a:t>
             </a:r>
           </a:p>
         </p:txBody>
@@ -11598,7 +10287,7 @@
         <p:spPr>
           <a:xfrm>
             <a:off x="731520" y="1463040"/>
-            <a:ext cx="10728655" cy="1051560"/>
+            <a:ext cx="10728655" cy="1481328"/>
           </a:xfrm>
           <a:prstGeom prst="roundRect">
             <a:avLst/>
@@ -11636,20 +10325,70 @@
       </p:sp>
       <p:sp>
         <p:nvSpPr>
-          <p:cNvPr id="7" name="Rectangle 6"/>
+          <p:cNvPr id="7" name="TextBox 6"/>
+          <p:cNvSpPr txBox="1"/>
+          <p:nvPr/>
+        </p:nvSpPr>
+        <p:spPr>
+          <a:xfrm>
+            <a:off x="914400" y="1572768"/>
+            <a:ext cx="4389120" cy="1280160"/>
+          </a:xfrm>
+          <a:prstGeom prst="rect">
+            <a:avLst/>
+          </a:prstGeom>
+          <a:noFill/>
+        </p:spPr>
+        <p:txBody>
+          <a:bodyPr wrap="square">
+            <a:spAutoFit/>
+          </a:bodyPr>
+          <a:lstStyle/>
+          <a:p>
+            <a:pPr>
+              <a:spcAft>
+                <a:spcPts val="300"/>
+              </a:spcAft>
+              <a:defRPr sz="1100" b="1">
+                <a:solidFill>
+                  <a:srgbClr val="0E7490"/>
+                </a:solidFill>
+              </a:defRPr>
+            </a:pPr>
+            <a:r>
+              <a:t>Challenge 1: Unstable Network Connectivity in Physical Venues (Twitan / Technoyana)</a:t>
+            </a:r>
+          </a:p>
+          <a:p>
+            <a:pPr>
+              <a:defRPr sz="900">
+                <a:solidFill>
+                  <a:srgbClr val="1E293B"/>
+                </a:solidFill>
+              </a:defRPr>
+            </a:pPr>
+            <a:r>
+              <a:t>Operating live tournament arbitration in venues with crowded RF environments, intermittent Wi-Fi drops, and mobile dead-zones caused transaction failures and loss of live scores.</a:t>
+            </a:r>
+          </a:p>
+        </p:txBody>
+      </p:sp>
+      <p:sp>
+        <p:nvSpPr>
+          <p:cNvPr id="8" name="Rectangle 7"/>
           <p:cNvSpPr/>
           <p:nvPr/>
         </p:nvSpPr>
         <p:spPr>
           <a:xfrm>
-            <a:off x="731520" y="1463040"/>
-            <a:ext cx="109728" cy="1051560"/>
+            <a:off x="5486400" y="1600200"/>
+            <a:ext cx="18288" cy="1188720"/>
           </a:xfrm>
           <a:prstGeom prst="rect">
             <a:avLst/>
           </a:prstGeom>
           <a:solidFill>
-            <a:srgbClr val="004E96"/>
+            <a:srgbClr val="E2E8F0"/>
           </a:solidFill>
           <a:ln>
             <a:noFill/>
@@ -11679,14 +10418,14 @@
       </p:sp>
       <p:sp>
         <p:nvSpPr>
-          <p:cNvPr id="8" name="TextBox 7"/>
+          <p:cNvPr id="9" name="TextBox 8"/>
           <p:cNvSpPr txBox="1"/>
           <p:nvPr/>
         </p:nvSpPr>
         <p:spPr>
           <a:xfrm>
-            <a:off x="1051560" y="1572768"/>
-            <a:ext cx="10149840" cy="868680"/>
+            <a:off x="5669280" y="1572768"/>
+            <a:ext cx="5577840" cy="1280160"/>
           </a:xfrm>
           <a:prstGeom prst="rect">
             <a:avLst/>
@@ -11701,42 +10440,57 @@
           <a:p>
             <a:pPr>
               <a:spcAft>
-                <a:spcPts val="400"/>
+                <a:spcPts val="200"/>
               </a:spcAft>
-              <a:defRPr sz="1200" b="1">
-                <a:solidFill>
-                  <a:srgbClr val="0F1E36"/>
-                </a:solidFill>
-              </a:defRPr>
-            </a:pPr>
-            <a:r>
-              <a:t>1. Resilience Must Be Engineered into the Architecture, Not Added as an Afterthought</a:t>
-            </a:r>
-          </a:p>
-          <a:p>
-            <a:pPr>
-              <a:defRPr sz="950">
+              <a:defRPr sz="1100" b="1">
+                <a:solidFill>
+                  <a:srgbClr val="0284C7"/>
+                </a:solidFill>
+              </a:defRPr>
+            </a:pPr>
+            <a:r>
+              <a:t>Resolution Implemented:</a:t>
+            </a:r>
+          </a:p>
+          <a:p>
+            <a:pPr>
+              <a:spcAft>
+                <a:spcPts val="300"/>
+              </a:spcAft>
+              <a:defRPr sz="900">
                 <a:solidFill>
                   <a:srgbClr val="1E293B"/>
                 </a:solidFill>
               </a:defRPr>
             </a:pPr>
             <a:r>
-              <a:t>In critical operations (whether hospitals or construction job sites), network connectivity and hardware will inevitably experience degradation. Systems must be designed with graceful degradation, local caching, and deterministic reconciliation rather than assuming continuous, low-latency broadband.</a:t>
-            </a:r>
-          </a:p>
-        </p:txBody>
-      </p:sp>
-      <p:sp>
-        <p:nvSpPr>
-          <p:cNvPr id="9" name="Rounded Rectangle 8"/>
+              <a:t>Architected an 'Offline-First' state engine using IndexedDB client persistence and service workers. Implemented optimistic UI updates and a transactional event replay queue that automatically resynchronizes once the network reconnects.</a:t>
+            </a:r>
+          </a:p>
+          <a:p>
+            <a:pPr>
+              <a:defRPr sz="900" b="1">
+                <a:solidFill>
+                  <a:srgbClr val="109563"/>
+                </a:solidFill>
+              </a:defRPr>
+            </a:pPr>
+            <a:r>
+              <a:t>Result: Impact: 100% data preservation, zero operator workflow interruptions, seamless user experience.</a:t>
+            </a:r>
+          </a:p>
+        </p:txBody>
+      </p:sp>
+      <p:sp>
+        <p:nvSpPr>
+          <p:cNvPr id="10" name="Rounded Rectangle 9"/>
           <p:cNvSpPr/>
           <p:nvPr/>
         </p:nvSpPr>
         <p:spPr>
           <a:xfrm>
-            <a:off x="731520" y="2651760"/>
-            <a:ext cx="10728655" cy="1051560"/>
+            <a:off x="731520" y="3072384"/>
+            <a:ext cx="10728655" cy="1481328"/>
           </a:xfrm>
           <a:prstGeom prst="roundRect">
             <a:avLst/>
@@ -11774,20 +10528,70 @@
       </p:sp>
       <p:sp>
         <p:nvSpPr>
-          <p:cNvPr id="10" name="Rectangle 9"/>
+          <p:cNvPr id="11" name="TextBox 10"/>
+          <p:cNvSpPr txBox="1"/>
+          <p:nvPr/>
+        </p:nvSpPr>
+        <p:spPr>
+          <a:xfrm>
+            <a:off x="914400" y="3182112"/>
+            <a:ext cx="4389120" cy="1280160"/>
+          </a:xfrm>
+          <a:prstGeom prst="rect">
+            <a:avLst/>
+          </a:prstGeom>
+          <a:noFill/>
+        </p:spPr>
+        <p:txBody>
+          <a:bodyPr wrap="square">
+            <a:spAutoFit/>
+          </a:bodyPr>
+          <a:lstStyle/>
+          <a:p>
+            <a:pPr>
+              <a:spcAft>
+                <a:spcPts val="300"/>
+              </a:spcAft>
+              <a:defRPr sz="1100" b="1">
+                <a:solidFill>
+                  <a:srgbClr val="0E7490"/>
+                </a:solidFill>
+              </a:defRPr>
+            </a:pPr>
+            <a:r>
+              <a:t>Challenge 2: Clinical UI Performance &amp; Memory Leaks in 24/7 ICU Monitoring (Philips ICCA)</a:t>
+            </a:r>
+          </a:p>
+          <a:p>
+            <a:pPr>
+              <a:defRPr sz="900">
+                <a:solidFill>
+                  <a:srgbClr val="1E293B"/>
+                </a:solidFill>
+              </a:defRPr>
+            </a:pPr>
+            <a:r>
+              <a:t>Bedside patient monitors run uninterrupted for weeks. Complex real-time streaming vitals and continuous DOM updates risked browser memory accumulation and UI lag during critical clinical events.</a:t>
+            </a:r>
+          </a:p>
+        </p:txBody>
+      </p:sp>
+      <p:sp>
+        <p:nvSpPr>
+          <p:cNvPr id="12" name="Rectangle 11"/>
           <p:cNvSpPr/>
           <p:nvPr/>
         </p:nvSpPr>
         <p:spPr>
           <a:xfrm>
-            <a:off x="731520" y="2651760"/>
-            <a:ext cx="109728" cy="1051560"/>
+            <a:off x="5486400" y="3209544"/>
+            <a:ext cx="18288" cy="1188720"/>
           </a:xfrm>
           <a:prstGeom prst="rect">
             <a:avLst/>
           </a:prstGeom>
           <a:solidFill>
-            <a:srgbClr val="004E96"/>
+            <a:srgbClr val="E2E8F0"/>
           </a:solidFill>
           <a:ln>
             <a:noFill/>
@@ -11817,14 +10621,14 @@
       </p:sp>
       <p:sp>
         <p:nvSpPr>
-          <p:cNvPr id="11" name="TextBox 10"/>
+          <p:cNvPr id="13" name="TextBox 12"/>
           <p:cNvSpPr txBox="1"/>
           <p:nvPr/>
         </p:nvSpPr>
         <p:spPr>
           <a:xfrm>
-            <a:off x="1051560" y="2761488"/>
-            <a:ext cx="10149840" cy="868680"/>
+            <a:off x="5669280" y="3182112"/>
+            <a:ext cx="5577840" cy="1280160"/>
           </a:xfrm>
           <a:prstGeom prst="rect">
             <a:avLst/>
@@ -11839,42 +10643,57 @@
           <a:p>
             <a:pPr>
               <a:spcAft>
-                <a:spcPts val="400"/>
+                <a:spcPts val="200"/>
               </a:spcAft>
-              <a:defRPr sz="1200" b="1">
-                <a:solidFill>
-                  <a:srgbClr val="0F1E36"/>
-                </a:solidFill>
-              </a:defRPr>
-            </a:pPr>
-            <a:r>
-              <a:t>2. Cybersecurity is an Organizational Culture, Not Merely a Perimeter Firewall</a:t>
-            </a:r>
-          </a:p>
-          <a:p>
-            <a:pPr>
-              <a:defRPr sz="950">
+              <a:defRPr sz="1100" b="1">
+                <a:solidFill>
+                  <a:srgbClr val="0284C7"/>
+                </a:solidFill>
+              </a:defRPr>
+            </a:pPr>
+            <a:r>
+              <a:t>Resolution Implemented:</a:t>
+            </a:r>
+          </a:p>
+          <a:p>
+            <a:pPr>
+              <a:spcAft>
+                <a:spcPts val="300"/>
+              </a:spcAft>
+              <a:defRPr sz="900">
                 <a:solidFill>
                   <a:srgbClr val="1E293B"/>
                 </a:solidFill>
               </a:defRPr>
             </a:pPr>
             <a:r>
-              <a:t>A majority of enterprise security breaches stem from misconfigured access rights, third-party vendor credentials, or unpatched endpoints. Implementing Zero Trust Network Access (ZTNA), strict least-privilege RBAC, and continuous security hygiene reviews protects the organization far more effectively than traditional boundary defenses alone.</a:t>
-            </a:r>
-          </a:p>
-        </p:txBody>
-      </p:sp>
-      <p:sp>
-        <p:nvSpPr>
-          <p:cNvPr id="12" name="Rounded Rectangle 11"/>
+              <a:t>Enforced strict immutable state updates, decoupled rendering loops from data ingestion, implemented virtualized list rendering, and utilized Chrome DevTools heap profiling to systematically eliminate closure leaks.</a:t>
+            </a:r>
+          </a:p>
+          <a:p>
+            <a:pPr>
+              <a:defRPr sz="900" b="1">
+                <a:solidFill>
+                  <a:srgbClr val="109563"/>
+                </a:solidFill>
+              </a:defRPr>
+            </a:pPr>
+            <a:r>
+              <a:t>Result: Impact: Guaranteed stable 60 FPS UI rendering and flat memory profiles across multi-day continuous ICU sessions.</a:t>
+            </a:r>
+          </a:p>
+        </p:txBody>
+      </p:sp>
+      <p:sp>
+        <p:nvSpPr>
+          <p:cNvPr id="14" name="Rounded Rectangle 13"/>
           <p:cNvSpPr/>
           <p:nvPr/>
         </p:nvSpPr>
         <p:spPr>
           <a:xfrm>
-            <a:off x="731520" y="3840480"/>
-            <a:ext cx="10728655" cy="1051560"/>
+            <a:off x="731520" y="4681728"/>
+            <a:ext cx="10728655" cy="1481328"/>
           </a:xfrm>
           <a:prstGeom prst="roundRect">
             <a:avLst/>
@@ -11912,20 +10731,70 @@
       </p:sp>
       <p:sp>
         <p:nvSpPr>
-          <p:cNvPr id="13" name="Rectangle 12"/>
+          <p:cNvPr id="15" name="TextBox 14"/>
+          <p:cNvSpPr txBox="1"/>
+          <p:nvPr/>
+        </p:nvSpPr>
+        <p:spPr>
+          <a:xfrm>
+            <a:off x="914400" y="4791456"/>
+            <a:ext cx="4389120" cy="1280160"/>
+          </a:xfrm>
+          <a:prstGeom prst="rect">
+            <a:avLst/>
+          </a:prstGeom>
+          <a:noFill/>
+        </p:spPr>
+        <p:txBody>
+          <a:bodyPr wrap="square">
+            <a:spAutoFit/>
+          </a:bodyPr>
+          <a:lstStyle/>
+          <a:p>
+            <a:pPr>
+              <a:spcAft>
+                <a:spcPts val="300"/>
+              </a:spcAft>
+              <a:defRPr sz="1100" b="1">
+                <a:solidFill>
+                  <a:srgbClr val="0E7490"/>
+                </a:solidFill>
+              </a:defRPr>
+            </a:pPr>
+            <a:r>
+              <a:t>Challenge 3: High 3D Asset Payload &amp; Browser Lag in Web-Based 3D (SrushtiLabs / Voxelforge AI)</a:t>
+            </a:r>
+          </a:p>
+          <a:p>
+            <a:pPr>
+              <a:defRPr sz="900">
+                <a:solidFill>
+                  <a:srgbClr val="1E293B"/>
+                </a:solidFill>
+              </a:defRPr>
+            </a:pPr>
+            <a:r>
+              <a:t>Delivering detailed 3D models over the web created large download sizes, long initialization times, and frame drops on lower-spec client laptops and mobile devices.</a:t>
+            </a:r>
+          </a:p>
+        </p:txBody>
+      </p:sp>
+      <p:sp>
+        <p:nvSpPr>
+          <p:cNvPr id="16" name="Rectangle 15"/>
           <p:cNvSpPr/>
           <p:nvPr/>
         </p:nvSpPr>
         <p:spPr>
           <a:xfrm>
-            <a:off x="731520" y="3840480"/>
-            <a:ext cx="109728" cy="1051560"/>
+            <a:off x="5486400" y="4818888"/>
+            <a:ext cx="18288" cy="1188720"/>
           </a:xfrm>
           <a:prstGeom prst="rect">
             <a:avLst/>
           </a:prstGeom>
           <a:solidFill>
-            <a:srgbClr val="004E96"/>
+            <a:srgbClr val="E2E8F0"/>
           </a:solidFill>
           <a:ln>
             <a:noFill/>
@@ -11955,14 +10824,14 @@
       </p:sp>
       <p:sp>
         <p:nvSpPr>
-          <p:cNvPr id="14" name="TextBox 13"/>
+          <p:cNvPr id="17" name="TextBox 16"/>
           <p:cNvSpPr txBox="1"/>
           <p:nvPr/>
         </p:nvSpPr>
         <p:spPr>
           <a:xfrm>
-            <a:off x="1051560" y="3950208"/>
-            <a:ext cx="10149840" cy="868680"/>
+            <a:off x="5669280" y="4791456"/>
+            <a:ext cx="5577840" cy="1280160"/>
           </a:xfrm>
           <a:prstGeom prst="rect">
             <a:avLst/>
@@ -11977,166 +10846,43 @@
           <a:p>
             <a:pPr>
               <a:spcAft>
-                <a:spcPts val="400"/>
+                <a:spcPts val="200"/>
               </a:spcAft>
-              <a:defRPr sz="1200" b="1">
-                <a:solidFill>
-                  <a:srgbClr val="0F1E36"/>
-                </a:solidFill>
-              </a:defRPr>
-            </a:pPr>
-            <a:r>
-              <a:t>3. Proactive Telemetry &amp; Observability Prevents Operational Crises</a:t>
-            </a:r>
-          </a:p>
-          <a:p>
-            <a:pPr>
-              <a:defRPr sz="950">
+              <a:defRPr sz="1100" b="1">
+                <a:solidFill>
+                  <a:srgbClr val="0284C7"/>
+                </a:solidFill>
+              </a:defRPr>
+            </a:pPr>
+            <a:r>
+              <a:t>Resolution Implemented:</a:t>
+            </a:r>
+          </a:p>
+          <a:p>
+            <a:pPr>
+              <a:spcAft>
+                <a:spcPts val="300"/>
+              </a:spcAft>
+              <a:defRPr sz="900">
                 <a:solidFill>
                   <a:srgbClr val="1E293B"/>
                 </a:solidFill>
               </a:defRPr>
             </a:pPr>
             <a:r>
-              <a:t>Waiting for users to report an outage is a failed IT strategy. Instituting synthetic transactions, automated latency monitoring, CPU/memory threshold alerts, and automated runbooks allows IT operations to resolve 80% of potential incidents before end users or project sites notice any disruption.</a:t>
-            </a:r>
-          </a:p>
-        </p:txBody>
-      </p:sp>
-      <p:sp>
-        <p:nvSpPr>
-          <p:cNvPr id="15" name="Rounded Rectangle 14"/>
-          <p:cNvSpPr/>
-          <p:nvPr/>
-        </p:nvSpPr>
-        <p:spPr>
-          <a:xfrm>
-            <a:off x="731520" y="5029200"/>
-            <a:ext cx="10728655" cy="1051560"/>
-          </a:xfrm>
-          <a:prstGeom prst="roundRect">
-            <a:avLst/>
-          </a:prstGeom>
-          <a:solidFill>
-            <a:srgbClr val="FFFFFF"/>
-          </a:solidFill>
-          <a:ln w="12700">
-            <a:solidFill>
-              <a:srgbClr val="E2E8F0"/>
-            </a:solidFill>
-          </a:ln>
-        </p:spPr>
-        <p:style>
-          <a:lnRef idx="1">
-            <a:schemeClr val="accent1"/>
-          </a:lnRef>
-          <a:fillRef idx="3">
-            <a:schemeClr val="accent1"/>
-          </a:fillRef>
-          <a:effectRef idx="2">
-            <a:schemeClr val="accent1"/>
-          </a:effectRef>
-          <a:fontRef idx="minor">
-            <a:schemeClr val="lt1"/>
-          </a:fontRef>
-        </p:style>
-        <p:txBody>
-          <a:bodyPr rtlCol="0" anchor="ctr"/>
-          <a:lstStyle/>
-          <a:p>
-            <a:pPr algn="ctr"/>
-          </a:p>
-        </p:txBody>
-      </p:sp>
-      <p:sp>
-        <p:nvSpPr>
-          <p:cNvPr id="16" name="Rectangle 15"/>
-          <p:cNvSpPr/>
-          <p:nvPr/>
-        </p:nvSpPr>
-        <p:spPr>
-          <a:xfrm>
-            <a:off x="731520" y="5029200"/>
-            <a:ext cx="109728" cy="1051560"/>
-          </a:xfrm>
-          <a:prstGeom prst="rect">
-            <a:avLst/>
-          </a:prstGeom>
-          <a:solidFill>
-            <a:srgbClr val="004E96"/>
-          </a:solidFill>
-          <a:ln>
-            <a:noFill/>
-          </a:ln>
-        </p:spPr>
-        <p:style>
-          <a:lnRef idx="1">
-            <a:schemeClr val="accent1"/>
-          </a:lnRef>
-          <a:fillRef idx="3">
-            <a:schemeClr val="accent1"/>
-          </a:fillRef>
-          <a:effectRef idx="2">
-            <a:schemeClr val="accent1"/>
-          </a:effectRef>
-          <a:fontRef idx="minor">
-            <a:schemeClr val="lt1"/>
-          </a:fontRef>
-        </p:style>
-        <p:txBody>
-          <a:bodyPr rtlCol="0" anchor="ctr"/>
-          <a:lstStyle/>
-          <a:p>
-            <a:pPr algn="ctr"/>
-          </a:p>
-        </p:txBody>
-      </p:sp>
-      <p:sp>
-        <p:nvSpPr>
-          <p:cNvPr id="17" name="TextBox 16"/>
-          <p:cNvSpPr txBox="1"/>
-          <p:nvPr/>
-        </p:nvSpPr>
-        <p:spPr>
-          <a:xfrm>
-            <a:off x="1051560" y="5138928"/>
-            <a:ext cx="10149840" cy="868680"/>
-          </a:xfrm>
-          <a:prstGeom prst="rect">
-            <a:avLst/>
-          </a:prstGeom>
-          <a:noFill/>
-        </p:spPr>
-        <p:txBody>
-          <a:bodyPr wrap="square">
-            <a:spAutoFit/>
-          </a:bodyPr>
-          <a:lstStyle/>
-          <a:p>
-            <a:pPr>
-              <a:spcAft>
-                <a:spcPts val="400"/>
-              </a:spcAft>
-              <a:defRPr sz="1200" b="1">
-                <a:solidFill>
-                  <a:srgbClr val="0F1E36"/>
-                </a:solidFill>
-              </a:defRPr>
-            </a:pPr>
-            <a:r>
-              <a:t>4. Bridging 3D Engineering Realities with Corporate IT Strategy</a:t>
-            </a:r>
-          </a:p>
-          <a:p>
-            <a:pPr>
-              <a:defRPr sz="950">
-                <a:solidFill>
-                  <a:srgbClr val="1E293B"/>
-                </a:solidFill>
-              </a:defRPr>
-            </a:pPr>
-            <a:r>
-              <a:t>In modern engineering corporations, IT is no longer just back-office software; it is the backbone for heavy 3D CAD/BIM pipelines, digital twins, and job-site spatial data. IT leadership must understand 3D data workflows to provide infrastructure that accelerates rather than slows down engineering production.</a:t>
+              <a:t>Developed automated retopology workflows (ayam3d) to decimate unnecessary polygons while preserving silhouette geometry; baked normal maps and bundled assets into lightweight modular formats for WebGL.</a:t>
+            </a:r>
+          </a:p>
+          <a:p>
+            <a:pPr>
+              <a:defRPr sz="900" b="1">
+                <a:solidFill>
+                  <a:srgbClr val="109563"/>
+                </a:solidFill>
+              </a:defRPr>
+            </a:pPr>
+            <a:r>
+              <a:t>Result: Impact: Reduced 3D model payload sizes by up to 75%, enabling instant in-browser loading and smooth real-time manipulation.</a:t>
             </a:r>
           </a:p>
         </p:txBody>
@@ -12171,7 +10917,7 @@
               </a:defRPr>
             </a:pPr>
             <a:r>
-              <a:t>Obayashi Corporation · Senior Manager – IT Candidate Portfolio | Maheshchandra Hegde · Slide 9 of 12</a:t>
+              <a:t>Maheshchandra Hegde · Technical Work Experience &amp; Capability Presentation | Slide 9 of 11</a:t>
             </a:r>
           </a:p>
         </p:txBody>

--- a/obayashi_it_presentation/Obayashi_Senior_Manager_IT_Presentation_Maheshchandra_Hegde.pptx
+++ b/obayashi_it_presentation/Obayashi_Senior_Manager_IT_Presentation_Maheshchandra_Hegde.pptx
@@ -3223,9 +3223,9 @@
           <a:p>
             <a:pPr>
               <a:spcAft>
-                <a:spcPts val="600"/>
+                <a:spcPts val="400"/>
               </a:spcAft>
-              <a:defRPr sz="3200" b="1">
+              <a:defRPr sz="3000" b="1">
                 <a:solidFill>
                   <a:srgbClr val="FFFFFF"/>
                 </a:solidFill>
@@ -3238,32 +3238,32 @@
           <a:p>
             <a:pPr>
               <a:spcAft>
-                <a:spcPts val="1200"/>
+                <a:spcPts val="1000"/>
               </a:spcAft>
-              <a:defRPr sz="1700" b="1">
-                <a:solidFill>
-                  <a:srgbClr val="CBD5E1"/>
-                </a:solidFill>
-              </a:defRPr>
-            </a:pPr>
-            <a:r>
-              <a:t>Product Design Expert | UX Architect | Creative Technologist</a:t>
-            </a:r>
-          </a:p>
-          <a:p>
-            <a:pPr>
-              <a:defRPr sz="1150">
+              <a:defRPr sz="1350" b="1">
+                <a:solidFill>
+                  <a:srgbClr val="38BDF8"/>
+                </a:solidFill>
+              </a:defRPr>
+            </a:pPr>
+            <a:r>
+              <a:t>Founder &amp; CTO | Building AI‑Driven 3D Asset Platforms &amp; Spatial Computing Solutions @srushtilabs.com</a:t>
+            </a:r>
+          </a:p>
+          <a:p>
+            <a:pPr>
+              <a:defRPr sz="1100">
                 <a:solidFill>
                   <a:srgbClr val="94A3B8"/>
                 </a:solidFill>
               </a:defRPr>
             </a:pPr>
             <a:r>
-              <a:t>16+ years of technology experience delivering scalable enterprise frontend systems, high-reliability clinical platforms, offline-first architectures, and cutting-edge 3D spatial computing / generative 3D tools.</a:t>
+              <a:t>16+ years delivering scalable enterprise frontend systems, high-reliability clinical platforms, offline-first architectures, and generative 3D spatial tools.</a:t>
             </a:r>
             <a:br/>
             <a:r>
-              <a:t>Bangalore, India | hid.mahesh@gmail.com | +91 9535253329 / 7022407280 | hegdemahesh.in</a:t>
+              <a:t>Bangalore, India | hid.mahesh@gmail.com | +91 9535253329 / 7022407280 | hegdemahesh.in | linkedin.com/in/maheshchandrahegde</a:t>
             </a:r>
           </a:p>
         </p:txBody>
@@ -7151,7 +7151,7 @@
               </a:defRPr>
             </a:pPr>
             <a:r>
-              <a:t>VOXELFORGE AI (srushtilabs.com/voxelforge/)</a:t>
+              <a:t>SRUSHTILABS · VOXELFORGE AI (srushtilabs.com/voxelforge/)</a:t>
             </a:r>
           </a:p>
         </p:txBody>
@@ -7189,7 +7189,7 @@
               </a:defRPr>
             </a:pPr>
             <a:r>
-              <a:t>AI-Driven Generative 3D Workflows (Apr 2025 – Present)</a:t>
+              <a:t>Founder &amp; CTO, SrushtiLabs (srushtilabs.com)</a:t>
             </a:r>
           </a:p>
           <a:p>
@@ -7201,7 +7201,12 @@
               </a:defRPr>
             </a:pPr>
             <a:r>
-              <a:t>• Live Application: srushtilabs.com/voxelforge/ — Founder at SrushtiLabs developing AI-based workflows for generative 3D asset creation.</a:t>
+              <a:t>• Current Headline: Founder &amp; CTO | Building AI-driven 3D asset platforms and spatial computing solutions @srushtilabs.com</a:t>
+            </a:r>
+            <a:br/>
+            <a:br/>
+            <a:r>
+              <a:t>• Live Application: srushtilabs.com/voxelforge/ — Developing AI-based workflows for generative 3D asset creation and modular bundle assembly.</a:t>
             </a:r>
             <a:br/>
             <a:br/>

--- a/obayashi_it_presentation/Obayashi_Senior_Manager_IT_Presentation_Maheshchandra_Hegde.pptx
+++ b/obayashi_it_presentation/Obayashi_Senior_Manager_IT_Presentation_Maheshchandra_Hegde.pptx
@@ -14,8 +14,6 @@
     <p:sldId id="262" r:id="rId13"/>
     <p:sldId id="263" r:id="rId14"/>
     <p:sldId id="264" r:id="rId15"/>
-    <p:sldId id="265" r:id="rId16"/>
-    <p:sldId id="266" r:id="rId17"/>
   </p:sldIdLst>
   <p:sldSz cx="12191695" cy="6858000" type="screen4x3"/>
   <p:notesSz cx="6858000" cy="9144000"/>
@@ -3143,141 +3141,14 @@
       </p:sp>
       <p:sp>
         <p:nvSpPr>
-          <p:cNvPr id="3" name="Rectangle 2"/>
+          <p:cNvPr id="3" name="Rounded Rectangle 2"/>
           <p:cNvSpPr/>
           <p:nvPr/>
         </p:nvSpPr>
         <p:spPr>
           <a:xfrm>
-            <a:off x="731520" y="1188720"/>
-            <a:ext cx="228600" cy="4389120"/>
-          </a:xfrm>
-          <a:prstGeom prst="rect">
-            <a:avLst/>
-          </a:prstGeom>
-          <a:solidFill>
-            <a:srgbClr val="0284C7"/>
-          </a:solidFill>
-          <a:ln>
-            <a:noFill/>
-          </a:ln>
-        </p:spPr>
-        <p:style>
-          <a:lnRef idx="1">
-            <a:schemeClr val="accent1"/>
-          </a:lnRef>
-          <a:fillRef idx="3">
-            <a:schemeClr val="accent1"/>
-          </a:fillRef>
-          <a:effectRef idx="2">
-            <a:schemeClr val="accent1"/>
-          </a:effectRef>
-          <a:fontRef idx="minor">
-            <a:schemeClr val="lt1"/>
-          </a:fontRef>
-        </p:style>
-        <p:txBody>
-          <a:bodyPr rtlCol="0" anchor="ctr"/>
-          <a:lstStyle/>
-          <a:p>
-            <a:pPr algn="ctr"/>
-          </a:p>
-        </p:txBody>
-      </p:sp>
-      <p:sp>
-        <p:nvSpPr>
-          <p:cNvPr id="4" name="TextBox 3"/>
-          <p:cNvSpPr txBox="1"/>
-          <p:nvPr/>
-        </p:nvSpPr>
-        <p:spPr>
-          <a:xfrm>
-            <a:off x="1234440" y="1188720"/>
-            <a:ext cx="10241280" cy="3108960"/>
-          </a:xfrm>
-          <a:prstGeom prst="rect">
-            <a:avLst/>
-          </a:prstGeom>
-          <a:noFill/>
-        </p:spPr>
-        <p:txBody>
-          <a:bodyPr wrap="square">
-            <a:spAutoFit/>
-          </a:bodyPr>
-          <a:lstStyle/>
-          <a:p>
-            <a:pPr>
-              <a:spcAft>
-                <a:spcPts val="1000"/>
-              </a:spcAft>
-              <a:defRPr sz="1200" b="1">
-                <a:solidFill>
-                  <a:srgbClr val="38BDF8"/>
-                </a:solidFill>
-              </a:defRPr>
-            </a:pPr>
-            <a:r>
-              <a:t>TECHNICAL LEADERSHIP &amp; WORK EXPERIENCE PRESENTATION</a:t>
-            </a:r>
-          </a:p>
-          <a:p>
-            <a:pPr>
-              <a:spcAft>
-                <a:spcPts val="400"/>
-              </a:spcAft>
-              <a:defRPr sz="3000" b="1">
-                <a:solidFill>
-                  <a:srgbClr val="FFFFFF"/>
-                </a:solidFill>
-              </a:defRPr>
-            </a:pPr>
-            <a:r>
-              <a:t>Maheshchandra Hegde</a:t>
-            </a:r>
-          </a:p>
-          <a:p>
-            <a:pPr>
-              <a:spcAft>
-                <a:spcPts val="1000"/>
-              </a:spcAft>
-              <a:defRPr sz="1350" b="1">
-                <a:solidFill>
-                  <a:srgbClr val="38BDF8"/>
-                </a:solidFill>
-              </a:defRPr>
-            </a:pPr>
-            <a:r>
-              <a:t>Founder &amp; CTO | Building AI‑Driven 3D Asset Platforms &amp; Spatial Computing Solutions @srushtilabs.com</a:t>
-            </a:r>
-          </a:p>
-          <a:p>
-            <a:pPr>
-              <a:defRPr sz="1100">
-                <a:solidFill>
-                  <a:srgbClr val="94A3B8"/>
-                </a:solidFill>
-              </a:defRPr>
-            </a:pPr>
-            <a:r>
-              <a:t>16+ years delivering scalable enterprise frontend systems, high-reliability clinical platforms, offline-first architectures, and generative 3D spatial tools.</a:t>
-            </a:r>
-            <a:br/>
-            <a:r>
-              <a:t>Bangalore, India | hid.mahesh@gmail.com | +91 9535253329 / 7022407280 | hegdemahesh.in | linkedin.com/in/maheshchandrahegde</a:t>
-            </a:r>
-          </a:p>
-        </p:txBody>
-      </p:sp>
-      <p:sp>
-        <p:nvSpPr>
-          <p:cNvPr id="5" name="Rounded Rectangle 4"/>
-          <p:cNvSpPr/>
-          <p:nvPr/>
-        </p:nvSpPr>
-        <p:spPr>
-          <a:xfrm>
-            <a:off x="1234440" y="4572000"/>
-            <a:ext cx="2514600" cy="1234440"/>
+            <a:off x="731520" y="731520"/>
+            <a:ext cx="3108960" cy="5440680"/>
           </a:xfrm>
           <a:prstGeom prst="roundRect">
             <a:avLst/>
@@ -3313,16 +3184,40 @@
           </a:p>
         </p:txBody>
       </p:sp>
-      <p:sp>
-        <p:nvSpPr>
-          <p:cNvPr id="6" name="TextBox 5"/>
+      <p:pic>
+        <p:nvPicPr>
+          <p:cNvPr id="4" name="Picture 3" descr="maheshForResume.jpg"/>
+          <p:cNvPicPr>
+            <a:picLocks noChangeAspect="1"/>
+          </p:cNvPicPr>
+          <p:nvPr/>
+        </p:nvPicPr>
+        <p:blipFill>
+          <a:blip r:embed="rId2"/>
+          <a:stretch>
+            <a:fillRect/>
+          </a:stretch>
+        </p:blipFill>
+        <p:spPr>
+          <a:xfrm>
+            <a:off x="914400" y="914400"/>
+            <a:ext cx="2743200" cy="3657600"/>
+          </a:xfrm>
+          <a:prstGeom prst="rect">
+            <a:avLst/>
+          </a:prstGeom>
+        </p:spPr>
+      </p:pic>
+      <p:sp>
+        <p:nvSpPr>
+          <p:cNvPr id="5" name="TextBox 4"/>
           <p:cNvSpPr txBox="1"/>
           <p:nvPr/>
         </p:nvSpPr>
         <p:spPr>
           <a:xfrm>
-            <a:off x="1371600" y="4681728"/>
-            <a:ext cx="2240280" cy="1014984"/>
+            <a:off x="822960" y="4663440"/>
+            <a:ext cx="2926080" cy="1371600"/>
           </a:xfrm>
           <a:prstGeom prst="rect">
             <a:avLst/>
@@ -3330,49 +3225,70 @@
           <a:noFill/>
         </p:spPr>
         <p:txBody>
-          <a:bodyPr wrap="square">
+          <a:bodyPr wrap="square" lIns="0" rIns="0" tIns="0" bIns="0">
             <a:spAutoFit/>
           </a:bodyPr>
           <a:lstStyle/>
           <a:p>
             <a:pPr>
-              <a:spcAft>
-                <a:spcPts val="400"/>
-              </a:spcAft>
-              <a:defRPr sz="1150" b="1">
-                <a:solidFill>
-                  <a:srgbClr val="FFFFFF"/>
-                </a:solidFill>
-              </a:defRPr>
-            </a:pPr>
-            <a:r>
-              <a:t>Scalable Enterprise Systems</a:t>
+              <a:defRPr sz="950" b="1">
+                <a:solidFill>
+                  <a:srgbClr val="E2E8F0"/>
+                </a:solidFill>
+              </a:defRPr>
+            </a:pPr>
+            <a:r>
+              <a:t>Bangalore, India</a:t>
             </a:r>
           </a:p>
           <a:p>
             <a:pPr>
               <a:defRPr sz="900">
                 <a:solidFill>
-                  <a:srgbClr val="94A3B8"/>
-                </a:solidFill>
-              </a:defRPr>
-            </a:pPr>
-            <a:r>
-              <a:t>Philips Healthcare (Cyient), Cisco Systems, enterprise web apps, micro-frontends</a:t>
-            </a:r>
-          </a:p>
-        </p:txBody>
-      </p:sp>
-      <p:sp>
-        <p:nvSpPr>
-          <p:cNvPr id="7" name="Rounded Rectangle 6"/>
+                  <a:srgbClr val="CBD5E1"/>
+                </a:solidFill>
+              </a:defRPr>
+            </a:pPr>
+            <a:r>
+              <a:t>+91 9535253329 / 7022407280</a:t>
+            </a:r>
+          </a:p>
+          <a:p>
+            <a:pPr>
+              <a:defRPr sz="900">
+                <a:solidFill>
+                  <a:srgbClr val="38BDF8"/>
+                </a:solidFill>
+              </a:defRPr>
+            </a:pPr>
+            <a:r>
+              <a:t>hid.mahesh@gmail.com</a:t>
+            </a:r>
+          </a:p>
+          <a:p>
+            <a:pPr>
+              <a:defRPr sz="850">
+                <a:solidFill>
+                  <a:srgbClr val="38BDF8"/>
+                </a:solidFill>
+              </a:defRPr>
+            </a:pPr>
+            <a:r>
+              <a:t>hegdemahesh.in | linkedin.com/in/maheshchandrahegde</a:t>
+            </a:r>
+          </a:p>
+        </p:txBody>
+      </p:sp>
+      <p:sp>
+        <p:nvSpPr>
+          <p:cNvPr id="6" name="Rounded Rectangle 5"/>
           <p:cNvSpPr/>
           <p:nvPr/>
         </p:nvSpPr>
         <p:spPr>
           <a:xfrm>
-            <a:off x="3968496" y="4572000"/>
-            <a:ext cx="2514600" cy="1234440"/>
+            <a:off x="4069080" y="731520"/>
+            <a:ext cx="7406640" cy="5440680"/>
           </a:xfrm>
           <a:prstGeom prst="roundRect">
             <a:avLst/>
@@ -3410,14 +3326,14 @@
       </p:sp>
       <p:sp>
         <p:nvSpPr>
-          <p:cNvPr id="8" name="TextBox 7"/>
+          <p:cNvPr id="7" name="TextBox 6"/>
           <p:cNvSpPr txBox="1"/>
           <p:nvPr/>
         </p:nvSpPr>
         <p:spPr>
           <a:xfrm>
-            <a:off x="4105656" y="4681728"/>
-            <a:ext cx="2240280" cy="1014984"/>
+            <a:off x="4434840" y="960120"/>
+            <a:ext cx="6675120" cy="4937760"/>
           </a:xfrm>
           <a:prstGeom prst="rect">
             <a:avLst/>
@@ -3434,223 +3350,92 @@
               <a:spcAft>
                 <a:spcPts val="400"/>
               </a:spcAft>
-              <a:defRPr sz="1150" b="1">
+              <a:defRPr sz="1100" b="1">
+                <a:solidFill>
+                  <a:srgbClr val="38BDF8"/>
+                </a:solidFill>
+              </a:defRPr>
+            </a:pPr>
+            <a:r>
+              <a:t>SECTION 1 · EXECUTIVE INTRODUCTION</a:t>
+            </a:r>
+          </a:p>
+          <a:p>
+            <a:pPr>
+              <a:spcAft>
+                <a:spcPts val="400"/>
+              </a:spcAft>
+              <a:defRPr sz="2800" b="1">
                 <a:solidFill>
                   <a:srgbClr val="FFFFFF"/>
                 </a:solidFill>
               </a:defRPr>
             </a:pPr>
             <a:r>
-              <a:t>Startup Founder &amp; Tech Director</a:t>
-            </a:r>
-          </a:p>
-          <a:p>
-            <a:pPr>
-              <a:defRPr sz="900">
+              <a:t>Maheshchandra Hegde</a:t>
+            </a:r>
+          </a:p>
+          <a:p>
+            <a:pPr>
+              <a:spcAft>
+                <a:spcPts val="1200"/>
+              </a:spcAft>
+              <a:defRPr sz="1300" b="1">
+                <a:solidFill>
+                  <a:srgbClr val="0284C7"/>
+                </a:solidFill>
+              </a:defRPr>
+            </a:pPr>
+            <a:r>
+              <a:t>Founder &amp; CTO | Building AI‑Driven 3D Asset Platforms &amp; Spatial Computing Solutions @srushtilabs.com</a:t>
+            </a:r>
+          </a:p>
+          <a:p>
+            <a:pPr>
+              <a:spcAft>
+                <a:spcPts val="1000"/>
+              </a:spcAft>
+              <a:defRPr sz="1000">
+                <a:solidFill>
+                  <a:srgbClr val="CBD5E1"/>
+                </a:solidFill>
+              </a:defRPr>
+            </a:pPr>
+            <a:r>
+              <a:t>Innovative technologist and product strategist with 18+ years of experience architecting end-to-end digital products, interactive 3D experiences, and domain-specific SaaS platforms. Co-Founder and Technology Leader at Technoyana Digital Transformation Services Pvt. Ltd., driving product architecture and creative tech vision across flagship divisions:</a:t>
+            </a:r>
+            <a:br/>
+            <a:br/>
+            <a:r>
+              <a:t>• Twitan.com — AI-driven sports management app &amp; operational SaaS suite (Shutlify badminton OS).</a:t>
+            </a:r>
+            <a:br/>
+            <a:r>
+              <a:t>• Srushtilabs.com — Generative AI &amp; modular 3D computing platform for games, simulations, and 3D visualization.</a:t>
+            </a:r>
+            <a:br/>
+            <a:br/>
+            <a:r>
+              <a:t>Holds a postgraduate degree in Human Interface Design &amp; Development (M.S. in Computing, Robert Gordon University, UK) and an engineering background in Electronics &amp; Communication (B.E.). Expertise spans modern web/mobile stacks (React, TypeScript, Angular, Web Components, Node.js, Firebase), interactive 3D/PBR pipelines, and design-to-code automation.</a:t>
+            </a:r>
+          </a:p>
+          <a:p>
+            <a:pPr>
+              <a:defRPr sz="950" i="1">
                 <a:solidFill>
                   <a:srgbClr val="94A3B8"/>
                 </a:solidFill>
               </a:defRPr>
             </a:pPr>
             <a:r>
-              <a:t>Technoyana (technoyana.in), Twitan.com (high-reliability sports OS), InnoBrik</a:t>
-            </a:r>
-          </a:p>
-        </p:txBody>
-      </p:sp>
-      <p:sp>
-        <p:nvSpPr>
-          <p:cNvPr id="9" name="Rounded Rectangle 8"/>
-          <p:cNvSpPr/>
-          <p:nvPr/>
-        </p:nvSpPr>
-        <p:spPr>
-          <a:xfrm>
-            <a:off x="6702552" y="4572000"/>
-            <a:ext cx="2514600" cy="1234440"/>
-          </a:xfrm>
-          <a:prstGeom prst="roundRect">
-            <a:avLst/>
-          </a:prstGeom>
-          <a:solidFill>
-            <a:srgbClr val="182235"/>
-          </a:solidFill>
-          <a:ln w="12700">
-            <a:solidFill>
-              <a:srgbClr val="334155"/>
-            </a:solidFill>
-          </a:ln>
-        </p:spPr>
-        <p:style>
-          <a:lnRef idx="1">
-            <a:schemeClr val="accent1"/>
-          </a:lnRef>
-          <a:fillRef idx="3">
-            <a:schemeClr val="accent1"/>
-          </a:fillRef>
-          <a:effectRef idx="2">
-            <a:schemeClr val="accent1"/>
-          </a:effectRef>
-          <a:fontRef idx="minor">
-            <a:schemeClr val="lt1"/>
-          </a:fontRef>
-        </p:style>
-        <p:txBody>
-          <a:bodyPr rtlCol="0" anchor="ctr"/>
-          <a:lstStyle/>
-          <a:p>
-            <a:pPr algn="ctr"/>
-          </a:p>
-        </p:txBody>
-      </p:sp>
-      <p:sp>
-        <p:nvSpPr>
-          <p:cNvPr id="10" name="TextBox 9"/>
-          <p:cNvSpPr txBox="1"/>
-          <p:nvPr/>
-        </p:nvSpPr>
-        <p:spPr>
-          <a:xfrm>
-            <a:off x="6839712" y="4681728"/>
-            <a:ext cx="2240280" cy="1014984"/>
-          </a:xfrm>
-          <a:prstGeom prst="rect">
-            <a:avLst/>
-          </a:prstGeom>
-          <a:noFill/>
-        </p:spPr>
-        <p:txBody>
-          <a:bodyPr wrap="square">
-            <a:spAutoFit/>
-          </a:bodyPr>
-          <a:lstStyle/>
-          <a:p>
-            <a:pPr>
-              <a:spcAft>
-                <a:spcPts val="400"/>
-              </a:spcAft>
-              <a:defRPr sz="1150" b="1">
-                <a:solidFill>
-                  <a:srgbClr val="FFFFFF"/>
-                </a:solidFill>
-              </a:defRPr>
-            </a:pPr>
-            <a:r>
-              <a:t>3D Spatial &amp; Generative AI</a:t>
-            </a:r>
-          </a:p>
-          <a:p>
-            <a:pPr>
-              <a:defRPr sz="900">
-                <a:solidFill>
-                  <a:srgbClr val="94A3B8"/>
-                </a:solidFill>
-              </a:defRPr>
-            </a:pPr>
-            <a:r>
-              <a:t>Voxelforge AI (srushtilabs.com/voxelforge), ayam3d, CAE flight simulation</a:t>
-            </a:r>
-          </a:p>
-        </p:txBody>
-      </p:sp>
-      <p:sp>
-        <p:nvSpPr>
-          <p:cNvPr id="11" name="Rounded Rectangle 10"/>
-          <p:cNvSpPr/>
-          <p:nvPr/>
-        </p:nvSpPr>
-        <p:spPr>
-          <a:xfrm>
-            <a:off x="9436608" y="4572000"/>
-            <a:ext cx="2514600" cy="1234440"/>
-          </a:xfrm>
-          <a:prstGeom prst="roundRect">
-            <a:avLst/>
-          </a:prstGeom>
-          <a:solidFill>
-            <a:srgbClr val="182235"/>
-          </a:solidFill>
-          <a:ln w="12700">
-            <a:solidFill>
-              <a:srgbClr val="334155"/>
-            </a:solidFill>
-          </a:ln>
-        </p:spPr>
-        <p:style>
-          <a:lnRef idx="1">
-            <a:schemeClr val="accent1"/>
-          </a:lnRef>
-          <a:fillRef idx="3">
-            <a:schemeClr val="accent1"/>
-          </a:fillRef>
-          <a:effectRef idx="2">
-            <a:schemeClr val="accent1"/>
-          </a:effectRef>
-          <a:fontRef idx="minor">
-            <a:schemeClr val="lt1"/>
-          </a:fontRef>
-        </p:style>
-        <p:txBody>
-          <a:bodyPr rtlCol="0" anchor="ctr"/>
-          <a:lstStyle/>
-          <a:p>
-            <a:pPr algn="ctr"/>
-          </a:p>
-        </p:txBody>
-      </p:sp>
-      <p:sp>
-        <p:nvSpPr>
-          <p:cNvPr id="12" name="TextBox 11"/>
-          <p:cNvSpPr txBox="1"/>
-          <p:nvPr/>
-        </p:nvSpPr>
-        <p:spPr>
-          <a:xfrm>
-            <a:off x="9573768" y="4681728"/>
-            <a:ext cx="2240280" cy="1014984"/>
-          </a:xfrm>
-          <a:prstGeom prst="rect">
-            <a:avLst/>
-          </a:prstGeom>
-          <a:noFill/>
-        </p:spPr>
-        <p:txBody>
-          <a:bodyPr wrap="square">
-            <a:spAutoFit/>
-          </a:bodyPr>
-          <a:lstStyle/>
-          <a:p>
-            <a:pPr>
-              <a:spcAft>
-                <a:spcPts val="400"/>
-              </a:spcAft>
-              <a:defRPr sz="1150" b="1">
-                <a:solidFill>
-                  <a:srgbClr val="FFFFFF"/>
-                </a:solidFill>
-              </a:defRPr>
-            </a:pPr>
-            <a:r>
-              <a:t>Architectural Heritage</a:t>
-            </a:r>
-          </a:p>
-          <a:p>
-            <a:pPr>
-              <a:defRPr sz="900">
-                <a:solidFill>
-                  <a:srgbClr val="94A3B8"/>
-                </a:solidFill>
-              </a:defRPr>
-            </a:pPr>
-            <a:r>
-              <a:t>Rooted in CAD &amp; 3D visualization assisting architect father; 50+ 3D projects delivered</a:t>
-            </a:r>
-          </a:p>
-        </p:txBody>
-      </p:sp>
-      <p:sp>
-        <p:nvSpPr>
-          <p:cNvPr id="13" name="TextBox 12"/>
+              <a:t>Architectural Heritage: Growing up assisting my architect father in his studio provided my earliest practical foundation in architectural drawings, CAD drafting, and spatial visualization—cultivating a natural synergy between software systems and 3D engineering.</a:t>
+            </a:r>
+          </a:p>
+        </p:txBody>
+      </p:sp>
+      <p:sp>
+        <p:nvSpPr>
+          <p:cNvPr id="8" name="TextBox 7"/>
           <p:cNvSpPr txBox="1"/>
           <p:nvPr/>
         </p:nvSpPr>
@@ -3678,1083 +3463,7 @@
               </a:defRPr>
             </a:pPr>
             <a:r>
-              <a:t>Maheshchandra Hegde · Technical Work Experience &amp; Capability Presentation | Slide 1 of 11</a:t>
-            </a:r>
-          </a:p>
-        </p:txBody>
-      </p:sp>
-    </p:spTree>
-  </p:cSld>
-  <p:clrMapOvr>
-    <a:masterClrMapping/>
-  </p:clrMapOvr>
-</p:sld>
-</file>
-
-<file path=ppt/slides/slide10.xml><?xml version="1.0" encoding="utf-8"?>
-<p:sld xmlns:a="http://schemas.openxmlformats.org/drawingml/2006/main" xmlns:p="http://schemas.openxmlformats.org/presentationml/2006/main" xmlns:r="http://schemas.openxmlformats.org/officeDocument/2006/relationships">
-  <p:cSld>
-    <p:spTree>
-      <p:nvGrpSpPr>
-        <p:cNvPr id="1" name=""/>
-        <p:cNvGrpSpPr/>
-        <p:nvPr/>
-      </p:nvGrpSpPr>
-      <p:grpSpPr/>
-      <p:sp>
-        <p:nvSpPr>
-          <p:cNvPr id="2" name="Rectangle 1"/>
-          <p:cNvSpPr/>
-          <p:nvPr/>
-        </p:nvSpPr>
-        <p:spPr>
-          <a:xfrm>
-            <a:off x="0" y="0"/>
-            <a:ext cx="12191695" cy="6858000"/>
-          </a:xfrm>
-          <a:prstGeom prst="rect">
-            <a:avLst/>
-          </a:prstGeom>
-          <a:solidFill>
-            <a:srgbClr val="F8FAFC"/>
-          </a:solidFill>
-          <a:ln>
-            <a:noFill/>
-          </a:ln>
-        </p:spPr>
-        <p:style>
-          <a:lnRef idx="1">
-            <a:schemeClr val="accent1"/>
-          </a:lnRef>
-          <a:fillRef idx="3">
-            <a:schemeClr val="accent1"/>
-          </a:fillRef>
-          <a:effectRef idx="2">
-            <a:schemeClr val="accent1"/>
-          </a:effectRef>
-          <a:fontRef idx="minor">
-            <a:schemeClr val="lt1"/>
-          </a:fontRef>
-        </p:style>
-        <p:txBody>
-          <a:bodyPr rtlCol="0" anchor="ctr"/>
-          <a:lstStyle/>
-          <a:p>
-            <a:pPr algn="ctr"/>
-          </a:p>
-        </p:txBody>
-      </p:sp>
-      <p:sp>
-        <p:nvSpPr>
-          <p:cNvPr id="3" name="TextBox 2"/>
-          <p:cNvSpPr txBox="1"/>
-          <p:nvPr/>
-        </p:nvSpPr>
-        <p:spPr>
-          <a:xfrm>
-            <a:off x="731520" y="365760"/>
-            <a:ext cx="10698480" cy="274320"/>
-          </a:xfrm>
-          <a:prstGeom prst="rect">
-            <a:avLst/>
-          </a:prstGeom>
-          <a:noFill/>
-        </p:spPr>
-        <p:txBody>
-          <a:bodyPr wrap="square" lIns="0" rIns="0" tIns="0" bIns="0">
-            <a:spAutoFit/>
-          </a:bodyPr>
-          <a:lstStyle/>
-          <a:p>
-            <a:pPr>
-              <a:defRPr sz="1050" b="1">
-                <a:solidFill>
-                  <a:srgbClr val="0E7490"/>
-                </a:solidFill>
-              </a:defRPr>
-            </a:pPr>
-            <a:r>
-              <a:t>ENGINEERING PHILOSOPHY</a:t>
-            </a:r>
-          </a:p>
-        </p:txBody>
-      </p:sp>
-      <p:sp>
-        <p:nvSpPr>
-          <p:cNvPr id="4" name="TextBox 3"/>
-          <p:cNvSpPr txBox="1"/>
-          <p:nvPr/>
-        </p:nvSpPr>
-        <p:spPr>
-          <a:xfrm>
-            <a:off x="731520" y="658368"/>
-            <a:ext cx="10698480" cy="502920"/>
-          </a:xfrm>
-          <a:prstGeom prst="rect">
-            <a:avLst/>
-          </a:prstGeom>
-          <a:noFill/>
-        </p:spPr>
-        <p:txBody>
-          <a:bodyPr wrap="square" lIns="0" rIns="0" tIns="0" bIns="0">
-            <a:spAutoFit/>
-          </a:bodyPr>
-          <a:lstStyle/>
-          <a:p>
-            <a:pPr>
-              <a:defRPr sz="2100" b="1">
-                <a:solidFill>
-                  <a:srgbClr val="0F172A"/>
-                </a:solidFill>
-              </a:defRPr>
-            </a:pPr>
-            <a:r>
-              <a:t>Lessons Learned &amp; Core Engineering Best Practices</a:t>
-            </a:r>
-          </a:p>
-        </p:txBody>
-      </p:sp>
-      <p:sp>
-        <p:nvSpPr>
-          <p:cNvPr id="5" name="Rectangle 4"/>
-          <p:cNvSpPr/>
-          <p:nvPr/>
-        </p:nvSpPr>
-        <p:spPr>
-          <a:xfrm>
-            <a:off x="731520" y="1234440"/>
-            <a:ext cx="10728655" cy="22860"/>
-          </a:xfrm>
-          <a:prstGeom prst="rect">
-            <a:avLst/>
-          </a:prstGeom>
-          <a:solidFill>
-            <a:srgbClr val="E2E8F0"/>
-          </a:solidFill>
-          <a:ln>
-            <a:noFill/>
-          </a:ln>
-        </p:spPr>
-        <p:style>
-          <a:lnRef idx="1">
-            <a:schemeClr val="accent1"/>
-          </a:lnRef>
-          <a:fillRef idx="3">
-            <a:schemeClr val="accent1"/>
-          </a:fillRef>
-          <a:effectRef idx="2">
-            <a:schemeClr val="accent1"/>
-          </a:effectRef>
-          <a:fontRef idx="minor">
-            <a:schemeClr val="lt1"/>
-          </a:fontRef>
-        </p:style>
-        <p:txBody>
-          <a:bodyPr rtlCol="0" anchor="ctr"/>
-          <a:lstStyle/>
-          <a:p>
-            <a:pPr algn="ctr"/>
-          </a:p>
-        </p:txBody>
-      </p:sp>
-      <p:sp>
-        <p:nvSpPr>
-          <p:cNvPr id="6" name="Rounded Rectangle 5"/>
-          <p:cNvSpPr/>
-          <p:nvPr/>
-        </p:nvSpPr>
-        <p:spPr>
-          <a:xfrm>
-            <a:off x="731520" y="1463040"/>
-            <a:ext cx="10728655" cy="1051560"/>
-          </a:xfrm>
-          <a:prstGeom prst="roundRect">
-            <a:avLst/>
-          </a:prstGeom>
-          <a:solidFill>
-            <a:srgbClr val="FFFFFF"/>
-          </a:solidFill>
-          <a:ln w="12700">
-            <a:solidFill>
-              <a:srgbClr val="E2E8F0"/>
-            </a:solidFill>
-          </a:ln>
-        </p:spPr>
-        <p:style>
-          <a:lnRef idx="1">
-            <a:schemeClr val="accent1"/>
-          </a:lnRef>
-          <a:fillRef idx="3">
-            <a:schemeClr val="accent1"/>
-          </a:fillRef>
-          <a:effectRef idx="2">
-            <a:schemeClr val="accent1"/>
-          </a:effectRef>
-          <a:fontRef idx="minor">
-            <a:schemeClr val="lt1"/>
-          </a:fontRef>
-        </p:style>
-        <p:txBody>
-          <a:bodyPr rtlCol="0" anchor="ctr"/>
-          <a:lstStyle/>
-          <a:p>
-            <a:pPr algn="ctr"/>
-          </a:p>
-        </p:txBody>
-      </p:sp>
-      <p:sp>
-        <p:nvSpPr>
-          <p:cNvPr id="7" name="Rectangle 6"/>
-          <p:cNvSpPr/>
-          <p:nvPr/>
-        </p:nvSpPr>
-        <p:spPr>
-          <a:xfrm>
-            <a:off x="731520" y="1463040"/>
-            <a:ext cx="109728" cy="1051560"/>
-          </a:xfrm>
-          <a:prstGeom prst="rect">
-            <a:avLst/>
-          </a:prstGeom>
-          <a:solidFill>
-            <a:srgbClr val="0284C7"/>
-          </a:solidFill>
-          <a:ln>
-            <a:noFill/>
-          </a:ln>
-        </p:spPr>
-        <p:style>
-          <a:lnRef idx="1">
-            <a:schemeClr val="accent1"/>
-          </a:lnRef>
-          <a:fillRef idx="3">
-            <a:schemeClr val="accent1"/>
-          </a:fillRef>
-          <a:effectRef idx="2">
-            <a:schemeClr val="accent1"/>
-          </a:effectRef>
-          <a:fontRef idx="minor">
-            <a:schemeClr val="lt1"/>
-          </a:fontRef>
-        </p:style>
-        <p:txBody>
-          <a:bodyPr rtlCol="0" anchor="ctr"/>
-          <a:lstStyle/>
-          <a:p>
-            <a:pPr algn="ctr"/>
-          </a:p>
-        </p:txBody>
-      </p:sp>
-      <p:sp>
-        <p:nvSpPr>
-          <p:cNvPr id="8" name="TextBox 7"/>
-          <p:cNvSpPr txBox="1"/>
-          <p:nvPr/>
-        </p:nvSpPr>
-        <p:spPr>
-          <a:xfrm>
-            <a:off x="1051560" y="1572768"/>
-            <a:ext cx="10149840" cy="868680"/>
-          </a:xfrm>
-          <a:prstGeom prst="rect">
-            <a:avLst/>
-          </a:prstGeom>
-          <a:noFill/>
-        </p:spPr>
-        <p:txBody>
-          <a:bodyPr wrap="square">
-            <a:spAutoFit/>
-          </a:bodyPr>
-          <a:lstStyle/>
-          <a:p>
-            <a:pPr>
-              <a:spcAft>
-                <a:spcPts val="400"/>
-              </a:spcAft>
-              <a:defRPr sz="1200" b="1">
-                <a:solidFill>
-                  <a:srgbClr val="0F172A"/>
-                </a:solidFill>
-              </a:defRPr>
-            </a:pPr>
-            <a:r>
-              <a:t>1. Involve Users Early Through Rapid Prototypes &amp; Iterative Feedback</a:t>
-            </a:r>
-          </a:p>
-          <a:p>
-            <a:pPr>
-              <a:defRPr sz="950">
-                <a:solidFill>
-                  <a:srgbClr val="1E293B"/>
-                </a:solidFill>
-              </a:defRPr>
-            </a:pPr>
-            <a:r>
-              <a:t>From my days establishing design-to-code pipelines at ThoughtFocus to architecting clinical modules at Cyient, building early interactive prototypes with real users uncovers fundamental workflow flaws before expensive engineering code is written.</a:t>
-            </a:r>
-          </a:p>
-        </p:txBody>
-      </p:sp>
-      <p:sp>
-        <p:nvSpPr>
-          <p:cNvPr id="9" name="Rounded Rectangle 8"/>
-          <p:cNvSpPr/>
-          <p:nvPr/>
-        </p:nvSpPr>
-        <p:spPr>
-          <a:xfrm>
-            <a:off x="731520" y="2651760"/>
-            <a:ext cx="10728655" cy="1051560"/>
-          </a:xfrm>
-          <a:prstGeom prst="roundRect">
-            <a:avLst/>
-          </a:prstGeom>
-          <a:solidFill>
-            <a:srgbClr val="FFFFFF"/>
-          </a:solidFill>
-          <a:ln w="12700">
-            <a:solidFill>
-              <a:srgbClr val="E2E8F0"/>
-            </a:solidFill>
-          </a:ln>
-        </p:spPr>
-        <p:style>
-          <a:lnRef idx="1">
-            <a:schemeClr val="accent1"/>
-          </a:lnRef>
-          <a:fillRef idx="3">
-            <a:schemeClr val="accent1"/>
-          </a:fillRef>
-          <a:effectRef idx="2">
-            <a:schemeClr val="accent1"/>
-          </a:effectRef>
-          <a:fontRef idx="minor">
-            <a:schemeClr val="lt1"/>
-          </a:fontRef>
-        </p:style>
-        <p:txBody>
-          <a:bodyPr rtlCol="0" anchor="ctr"/>
-          <a:lstStyle/>
-          <a:p>
-            <a:pPr algn="ctr"/>
-          </a:p>
-        </p:txBody>
-      </p:sp>
-      <p:sp>
-        <p:nvSpPr>
-          <p:cNvPr id="10" name="Rectangle 9"/>
-          <p:cNvSpPr/>
-          <p:nvPr/>
-        </p:nvSpPr>
-        <p:spPr>
-          <a:xfrm>
-            <a:off x="731520" y="2651760"/>
-            <a:ext cx="109728" cy="1051560"/>
-          </a:xfrm>
-          <a:prstGeom prst="rect">
-            <a:avLst/>
-          </a:prstGeom>
-          <a:solidFill>
-            <a:srgbClr val="0284C7"/>
-          </a:solidFill>
-          <a:ln>
-            <a:noFill/>
-          </a:ln>
-        </p:spPr>
-        <p:style>
-          <a:lnRef idx="1">
-            <a:schemeClr val="accent1"/>
-          </a:lnRef>
-          <a:fillRef idx="3">
-            <a:schemeClr val="accent1"/>
-          </a:fillRef>
-          <a:effectRef idx="2">
-            <a:schemeClr val="accent1"/>
-          </a:effectRef>
-          <a:fontRef idx="minor">
-            <a:schemeClr val="lt1"/>
-          </a:fontRef>
-        </p:style>
-        <p:txBody>
-          <a:bodyPr rtlCol="0" anchor="ctr"/>
-          <a:lstStyle/>
-          <a:p>
-            <a:pPr algn="ctr"/>
-          </a:p>
-        </p:txBody>
-      </p:sp>
-      <p:sp>
-        <p:nvSpPr>
-          <p:cNvPr id="11" name="TextBox 10"/>
-          <p:cNvSpPr txBox="1"/>
-          <p:nvPr/>
-        </p:nvSpPr>
-        <p:spPr>
-          <a:xfrm>
-            <a:off x="1051560" y="2761488"/>
-            <a:ext cx="10149840" cy="868680"/>
-          </a:xfrm>
-          <a:prstGeom prst="rect">
-            <a:avLst/>
-          </a:prstGeom>
-          <a:noFill/>
-        </p:spPr>
-        <p:txBody>
-          <a:bodyPr wrap="square">
-            <a:spAutoFit/>
-          </a:bodyPr>
-          <a:lstStyle/>
-          <a:p>
-            <a:pPr>
-              <a:spcAft>
-                <a:spcPts val="400"/>
-              </a:spcAft>
-              <a:defRPr sz="1200" b="1">
-                <a:solidFill>
-                  <a:srgbClr val="0F172A"/>
-                </a:solidFill>
-              </a:defRPr>
-            </a:pPr>
-            <a:r>
-              <a:t>2. Design for Real-World Edge Conditions, Not Ideal Lab Environments</a:t>
-            </a:r>
-          </a:p>
-          <a:p>
-            <a:pPr>
-              <a:defRPr sz="950">
-                <a:solidFill>
-                  <a:srgbClr val="1E293B"/>
-                </a:solidFill>
-              </a:defRPr>
-            </a:pPr>
-            <a:r>
-              <a:t>Software rarely operates in perfect network and hardware conditions. Building applications with offline caching, graceful degradation, and asynchronous retry logic ensures systems remain reliable whether on a hospital floor, sports arena, or remote field office.</a:t>
-            </a:r>
-          </a:p>
-        </p:txBody>
-      </p:sp>
-      <p:sp>
-        <p:nvSpPr>
-          <p:cNvPr id="12" name="Rounded Rectangle 11"/>
-          <p:cNvSpPr/>
-          <p:nvPr/>
-        </p:nvSpPr>
-        <p:spPr>
-          <a:xfrm>
-            <a:off x="731520" y="3840480"/>
-            <a:ext cx="10728655" cy="1051560"/>
-          </a:xfrm>
-          <a:prstGeom prst="roundRect">
-            <a:avLst/>
-          </a:prstGeom>
-          <a:solidFill>
-            <a:srgbClr val="FFFFFF"/>
-          </a:solidFill>
-          <a:ln w="12700">
-            <a:solidFill>
-              <a:srgbClr val="E2E8F0"/>
-            </a:solidFill>
-          </a:ln>
-        </p:spPr>
-        <p:style>
-          <a:lnRef idx="1">
-            <a:schemeClr val="accent1"/>
-          </a:lnRef>
-          <a:fillRef idx="3">
-            <a:schemeClr val="accent1"/>
-          </a:fillRef>
-          <a:effectRef idx="2">
-            <a:schemeClr val="accent1"/>
-          </a:effectRef>
-          <a:fontRef idx="minor">
-            <a:schemeClr val="lt1"/>
-          </a:fontRef>
-        </p:style>
-        <p:txBody>
-          <a:bodyPr rtlCol="0" anchor="ctr"/>
-          <a:lstStyle/>
-          <a:p>
-            <a:pPr algn="ctr"/>
-          </a:p>
-        </p:txBody>
-      </p:sp>
-      <p:sp>
-        <p:nvSpPr>
-          <p:cNvPr id="13" name="Rectangle 12"/>
-          <p:cNvSpPr/>
-          <p:nvPr/>
-        </p:nvSpPr>
-        <p:spPr>
-          <a:xfrm>
-            <a:off x="731520" y="3840480"/>
-            <a:ext cx="109728" cy="1051560"/>
-          </a:xfrm>
-          <a:prstGeom prst="rect">
-            <a:avLst/>
-          </a:prstGeom>
-          <a:solidFill>
-            <a:srgbClr val="0284C7"/>
-          </a:solidFill>
-          <a:ln>
-            <a:noFill/>
-          </a:ln>
-        </p:spPr>
-        <p:style>
-          <a:lnRef idx="1">
-            <a:schemeClr val="accent1"/>
-          </a:lnRef>
-          <a:fillRef idx="3">
-            <a:schemeClr val="accent1"/>
-          </a:fillRef>
-          <a:effectRef idx="2">
-            <a:schemeClr val="accent1"/>
-          </a:effectRef>
-          <a:fontRef idx="minor">
-            <a:schemeClr val="lt1"/>
-          </a:fontRef>
-        </p:style>
-        <p:txBody>
-          <a:bodyPr rtlCol="0" anchor="ctr"/>
-          <a:lstStyle/>
-          <a:p>
-            <a:pPr algn="ctr"/>
-          </a:p>
-        </p:txBody>
-      </p:sp>
-      <p:sp>
-        <p:nvSpPr>
-          <p:cNvPr id="14" name="TextBox 13"/>
-          <p:cNvSpPr txBox="1"/>
-          <p:nvPr/>
-        </p:nvSpPr>
-        <p:spPr>
-          <a:xfrm>
-            <a:off x="1051560" y="3950208"/>
-            <a:ext cx="10149840" cy="868680"/>
-          </a:xfrm>
-          <a:prstGeom prst="rect">
-            <a:avLst/>
-          </a:prstGeom>
-          <a:noFill/>
-        </p:spPr>
-        <p:txBody>
-          <a:bodyPr wrap="square">
-            <a:spAutoFit/>
-          </a:bodyPr>
-          <a:lstStyle/>
-          <a:p>
-            <a:pPr>
-              <a:spcAft>
-                <a:spcPts val="400"/>
-              </a:spcAft>
-              <a:defRPr sz="1200" b="1">
-                <a:solidFill>
-                  <a:srgbClr val="0F172A"/>
-                </a:solidFill>
-              </a:defRPr>
-            </a:pPr>
-            <a:r>
-              <a:t>3. Standardize Design Systems &amp; Component Libraries to Prevent Technical Debt</a:t>
-            </a:r>
-          </a:p>
-          <a:p>
-            <a:pPr>
-              <a:defRPr sz="950">
-                <a:solidFill>
-                  <a:srgbClr val="1E293B"/>
-                </a:solidFill>
-              </a:defRPr>
-            </a:pPr>
-            <a:r>
-              <a:t>Re-inventing UI components across teams leads to inconsistent user experiences and bloated maintenance. Investing upfront in unified, framework-agnostic design systems (as demonstrated at Moonraft with LitElement) dramatically accelerates organizational velocity.</a:t>
-            </a:r>
-          </a:p>
-        </p:txBody>
-      </p:sp>
-      <p:sp>
-        <p:nvSpPr>
-          <p:cNvPr id="15" name="Rounded Rectangle 14"/>
-          <p:cNvSpPr/>
-          <p:nvPr/>
-        </p:nvSpPr>
-        <p:spPr>
-          <a:xfrm>
-            <a:off x="731520" y="5029200"/>
-            <a:ext cx="10728655" cy="1051560"/>
-          </a:xfrm>
-          <a:prstGeom prst="roundRect">
-            <a:avLst/>
-          </a:prstGeom>
-          <a:solidFill>
-            <a:srgbClr val="FFFFFF"/>
-          </a:solidFill>
-          <a:ln w="12700">
-            <a:solidFill>
-              <a:srgbClr val="E2E8F0"/>
-            </a:solidFill>
-          </a:ln>
-        </p:spPr>
-        <p:style>
-          <a:lnRef idx="1">
-            <a:schemeClr val="accent1"/>
-          </a:lnRef>
-          <a:fillRef idx="3">
-            <a:schemeClr val="accent1"/>
-          </a:fillRef>
-          <a:effectRef idx="2">
-            <a:schemeClr val="accent1"/>
-          </a:effectRef>
-          <a:fontRef idx="minor">
-            <a:schemeClr val="lt1"/>
-          </a:fontRef>
-        </p:style>
-        <p:txBody>
-          <a:bodyPr rtlCol="0" anchor="ctr"/>
-          <a:lstStyle/>
-          <a:p>
-            <a:pPr algn="ctr"/>
-          </a:p>
-        </p:txBody>
-      </p:sp>
-      <p:sp>
-        <p:nvSpPr>
-          <p:cNvPr id="16" name="Rectangle 15"/>
-          <p:cNvSpPr/>
-          <p:nvPr/>
-        </p:nvSpPr>
-        <p:spPr>
-          <a:xfrm>
-            <a:off x="731520" y="5029200"/>
-            <a:ext cx="109728" cy="1051560"/>
-          </a:xfrm>
-          <a:prstGeom prst="rect">
-            <a:avLst/>
-          </a:prstGeom>
-          <a:solidFill>
-            <a:srgbClr val="0284C7"/>
-          </a:solidFill>
-          <a:ln>
-            <a:noFill/>
-          </a:ln>
-        </p:spPr>
-        <p:style>
-          <a:lnRef idx="1">
-            <a:schemeClr val="accent1"/>
-          </a:lnRef>
-          <a:fillRef idx="3">
-            <a:schemeClr val="accent1"/>
-          </a:fillRef>
-          <a:effectRef idx="2">
-            <a:schemeClr val="accent1"/>
-          </a:effectRef>
-          <a:fontRef idx="minor">
-            <a:schemeClr val="lt1"/>
-          </a:fontRef>
-        </p:style>
-        <p:txBody>
-          <a:bodyPr rtlCol="0" anchor="ctr"/>
-          <a:lstStyle/>
-          <a:p>
-            <a:pPr algn="ctr"/>
-          </a:p>
-        </p:txBody>
-      </p:sp>
-      <p:sp>
-        <p:nvSpPr>
-          <p:cNvPr id="17" name="TextBox 16"/>
-          <p:cNvSpPr txBox="1"/>
-          <p:nvPr/>
-        </p:nvSpPr>
-        <p:spPr>
-          <a:xfrm>
-            <a:off x="1051560" y="5138928"/>
-            <a:ext cx="10149840" cy="868680"/>
-          </a:xfrm>
-          <a:prstGeom prst="rect">
-            <a:avLst/>
-          </a:prstGeom>
-          <a:noFill/>
-        </p:spPr>
-        <p:txBody>
-          <a:bodyPr wrap="square">
-            <a:spAutoFit/>
-          </a:bodyPr>
-          <a:lstStyle/>
-          <a:p>
-            <a:pPr>
-              <a:spcAft>
-                <a:spcPts val="400"/>
-              </a:spcAft>
-              <a:defRPr sz="1200" b="1">
-                <a:solidFill>
-                  <a:srgbClr val="0F172A"/>
-                </a:solidFill>
-              </a:defRPr>
-            </a:pPr>
-            <a:r>
-              <a:t>4. Ground Technology Decisions in Concrete Business &amp; Human Impact</a:t>
-            </a:r>
-          </a:p>
-          <a:p>
-            <a:pPr>
-              <a:defRPr sz="950">
-                <a:solidFill>
-                  <a:srgbClr val="1E293B"/>
-                </a:solidFill>
-              </a:defRPr>
-            </a:pPr>
-            <a:r>
-              <a:t>Technology is a vehicle for solving human problems. Whether building spatial AI tools (Voxelforge AI), sports arbitration engines (Twitan), or ICU monitoring (Philips), the ultimate metric of success is operational simplicity, reliability, and tangible value to the user.</a:t>
-            </a:r>
-          </a:p>
-        </p:txBody>
-      </p:sp>
-      <p:sp>
-        <p:nvSpPr>
-          <p:cNvPr id="18" name="TextBox 17"/>
-          <p:cNvSpPr txBox="1"/>
-          <p:nvPr/>
-        </p:nvSpPr>
-        <p:spPr>
-          <a:xfrm>
-            <a:off x="731520" y="6446520"/>
-            <a:ext cx="10728655" cy="320040"/>
-          </a:xfrm>
-          <a:prstGeom prst="rect">
-            <a:avLst/>
-          </a:prstGeom>
-          <a:noFill/>
-        </p:spPr>
-        <p:txBody>
-          <a:bodyPr wrap="none" lIns="0" rIns="0" tIns="0" bIns="0">
-            <a:spAutoFit/>
-          </a:bodyPr>
-          <a:lstStyle/>
-          <a:p>
-            <a:pPr>
-              <a:defRPr sz="900">
-                <a:solidFill>
-                  <a:srgbClr val="64748B"/>
-                </a:solidFill>
-              </a:defRPr>
-            </a:pPr>
-            <a:r>
-              <a:t>Maheshchandra Hegde · Technical Work Experience &amp; Capability Presentation | Slide 10 of 11</a:t>
-            </a:r>
-          </a:p>
-        </p:txBody>
-      </p:sp>
-    </p:spTree>
-  </p:cSld>
-  <p:clrMapOvr>
-    <a:masterClrMapping/>
-  </p:clrMapOvr>
-</p:sld>
-</file>
-
-<file path=ppt/slides/slide11.xml><?xml version="1.0" encoding="utf-8"?>
-<p:sld xmlns:a="http://schemas.openxmlformats.org/drawingml/2006/main" xmlns:p="http://schemas.openxmlformats.org/presentationml/2006/main" xmlns:r="http://schemas.openxmlformats.org/officeDocument/2006/relationships">
-  <p:cSld>
-    <p:spTree>
-      <p:nvGrpSpPr>
-        <p:cNvPr id="1" name=""/>
-        <p:cNvGrpSpPr/>
-        <p:nvPr/>
-      </p:nvGrpSpPr>
-      <p:grpSpPr/>
-      <p:sp>
-        <p:nvSpPr>
-          <p:cNvPr id="2" name="Rectangle 1"/>
-          <p:cNvSpPr/>
-          <p:nvPr/>
-        </p:nvSpPr>
-        <p:spPr>
-          <a:xfrm>
-            <a:off x="0" y="0"/>
-            <a:ext cx="12191695" cy="6858000"/>
-          </a:xfrm>
-          <a:prstGeom prst="rect">
-            <a:avLst/>
-          </a:prstGeom>
-          <a:solidFill>
-            <a:srgbClr val="0F172A"/>
-          </a:solidFill>
-          <a:ln>
-            <a:noFill/>
-          </a:ln>
-        </p:spPr>
-        <p:style>
-          <a:lnRef idx="1">
-            <a:schemeClr val="accent1"/>
-          </a:lnRef>
-          <a:fillRef idx="3">
-            <a:schemeClr val="accent1"/>
-          </a:fillRef>
-          <a:effectRef idx="2">
-            <a:schemeClr val="accent1"/>
-          </a:effectRef>
-          <a:fontRef idx="minor">
-            <a:schemeClr val="lt1"/>
-          </a:fontRef>
-        </p:style>
-        <p:txBody>
-          <a:bodyPr rtlCol="0" anchor="ctr"/>
-          <a:lstStyle/>
-          <a:p>
-            <a:pPr algn="ctr"/>
-          </a:p>
-        </p:txBody>
-      </p:sp>
-      <p:sp>
-        <p:nvSpPr>
-          <p:cNvPr id="3" name="Rounded Rectangle 2"/>
-          <p:cNvSpPr/>
-          <p:nvPr/>
-        </p:nvSpPr>
-        <p:spPr>
-          <a:xfrm>
-            <a:off x="731520" y="1371600"/>
-            <a:ext cx="10728655" cy="4754880"/>
-          </a:xfrm>
-          <a:prstGeom prst="roundRect">
-            <a:avLst/>
-          </a:prstGeom>
-          <a:solidFill>
-            <a:srgbClr val="182235"/>
-          </a:solidFill>
-          <a:ln w="12700">
-            <a:solidFill>
-              <a:srgbClr val="334155"/>
-            </a:solidFill>
-          </a:ln>
-        </p:spPr>
-        <p:style>
-          <a:lnRef idx="1">
-            <a:schemeClr val="accent1"/>
-          </a:lnRef>
-          <a:fillRef idx="3">
-            <a:schemeClr val="accent1"/>
-          </a:fillRef>
-          <a:effectRef idx="2">
-            <a:schemeClr val="accent1"/>
-          </a:effectRef>
-          <a:fontRef idx="minor">
-            <a:schemeClr val="lt1"/>
-          </a:fontRef>
-        </p:style>
-        <p:txBody>
-          <a:bodyPr rtlCol="0" anchor="ctr"/>
-          <a:lstStyle/>
-          <a:p>
-            <a:pPr algn="ctr"/>
-          </a:p>
-        </p:txBody>
-      </p:sp>
-      <p:sp>
-        <p:nvSpPr>
-          <p:cNvPr id="4" name="TextBox 3"/>
-          <p:cNvSpPr txBox="1"/>
-          <p:nvPr/>
-        </p:nvSpPr>
-        <p:spPr>
-          <a:xfrm>
-            <a:off x="1188720" y="1691640"/>
-            <a:ext cx="9814255" cy="4114800"/>
-          </a:xfrm>
-          <a:prstGeom prst="rect">
-            <a:avLst/>
-          </a:prstGeom>
-          <a:noFill/>
-        </p:spPr>
-        <p:txBody>
-          <a:bodyPr wrap="square">
-            <a:spAutoFit/>
-          </a:bodyPr>
-          <a:lstStyle/>
-          <a:p>
-            <a:pPr>
-              <a:spcAft>
-                <a:spcPts val="400"/>
-              </a:spcAft>
-              <a:defRPr sz="1150" b="1">
-                <a:solidFill>
-                  <a:srgbClr val="38BDF8"/>
-                </a:solidFill>
-              </a:defRPr>
-            </a:pPr>
-            <a:r>
-              <a:t>VISION FOR FUTURE PROCESS IMPROVEMENTS &amp; SCALE</a:t>
-            </a:r>
-          </a:p>
-          <a:p>
-            <a:pPr>
-              <a:spcAft>
-                <a:spcPts val="1200"/>
-              </a:spcAft>
-              <a:defRPr sz="2100" b="1">
-                <a:solidFill>
-                  <a:srgbClr val="FFFFFF"/>
-                </a:solidFill>
-              </a:defRPr>
-            </a:pPr>
-            <a:r>
-              <a:t>Leveraging Proven Expertise in Scalable Systems, UX &amp; Spatial Tech</a:t>
-            </a:r>
-          </a:p>
-          <a:p>
-            <a:pPr>
-              <a:defRPr b="1" sz="1050">
-                <a:solidFill>
-                  <a:srgbClr val="38BDF8"/>
-                </a:solidFill>
-              </a:defRPr>
-            </a:pPr>
-            <a:r>
-              <a:t>• Unified Spatial &amp; Web Integration: </a:t>
-            </a:r>
-          </a:p>
-          <a:p>
-            <a:pPr>
-              <a:spcAft>
-                <a:spcPts val="600"/>
-              </a:spcAft>
-              <a:defRPr sz="950">
-                <a:solidFill>
-                  <a:srgbClr val="CBD5E1"/>
-                </a:solidFill>
-              </a:defRPr>
-            </a:pPr>
-            <a:r>
-              <a:t>  Bridge complex 3D CAD, architectural models, and spatial data into lightweight, interactive web formats using progressive LOD and automated retopology (leveraging Voxelforge AI / ayam3d principles).</a:t>
-            </a:r>
-          </a:p>
-          <a:p>
-            <a:pPr>
-              <a:defRPr b="1" sz="1050">
-                <a:solidFill>
-                  <a:srgbClr val="38BDF8"/>
-                </a:solidFill>
-              </a:defRPr>
-            </a:pPr>
-            <a:r>
-              <a:t>• Resilient Edge-First Mobile Workflows: </a:t>
-            </a:r>
-          </a:p>
-          <a:p>
-            <a:pPr>
-              <a:spcAft>
-                <a:spcPts val="600"/>
-              </a:spcAft>
-              <a:defRPr sz="950">
-                <a:solidFill>
-                  <a:srgbClr val="CBD5E1"/>
-                </a:solidFill>
-              </a:defRPr>
-            </a:pPr>
-            <a:r>
-              <a:t>  Implement offline-first client persistence and background transactional queuing across field-facing mobile applications, ensuring zero work loss regardless of remote connectivity challenges.</a:t>
-            </a:r>
-          </a:p>
-          <a:p>
-            <a:pPr>
-              <a:defRPr b="1" sz="1050">
-                <a:solidFill>
-                  <a:srgbClr val="38BDF8"/>
-                </a:solidFill>
-              </a:defRPr>
-            </a:pPr>
-            <a:r>
-              <a:t>• Standardized Enterprise Design Systems: </a:t>
-            </a:r>
-          </a:p>
-          <a:p>
-            <a:pPr>
-              <a:spcAft>
-                <a:spcPts val="600"/>
-              </a:spcAft>
-              <a:defRPr sz="950">
-                <a:solidFill>
-                  <a:srgbClr val="CBD5E1"/>
-                </a:solidFill>
-              </a:defRPr>
-            </a:pPr>
-            <a:r>
-              <a:t>  Establish centralized, cross-platform component libraries and design tokens to streamline multi-team digital product delivery, enforce visual consistency, and eliminate duplicated engineering effort.</a:t>
-            </a:r>
-          </a:p>
-          <a:p>
-            <a:pPr>
-              <a:defRPr b="1" sz="1050">
-                <a:solidFill>
-                  <a:srgbClr val="38BDF8"/>
-                </a:solidFill>
-              </a:defRPr>
-            </a:pPr>
-            <a:r>
-              <a:t>• AI-Assisted Prototyping &amp; Development: </a:t>
-            </a:r>
-          </a:p>
-          <a:p>
-            <a:pPr>
-              <a:spcAft>
-                <a:spcPts val="600"/>
-              </a:spcAft>
-              <a:defRPr sz="950">
-                <a:solidFill>
-                  <a:srgbClr val="CBD5E1"/>
-                </a:solidFill>
-              </a:defRPr>
-            </a:pPr>
-            <a:r>
-              <a:t>  Incorporate generative AI and automation tools into early product discovery and asset creation pipelines, cutting design-to-code iteration cycles by 40%.</a:t>
-            </a:r>
-          </a:p>
-          <a:p>
-            <a:br/>
-            <a:pPr>
-              <a:defRPr sz="1100" b="1">
-                <a:solidFill>
-                  <a:srgbClr val="FFFFFF"/>
-                </a:solidFill>
-              </a:defRPr>
-            </a:pPr>
-            <a:r>
-              <a:t>Maheshchandra Hegde  |  hid.mahesh@gmail.com  |  +91 9535253329 / 7022407280  |  hegdemahesh.in</a:t>
-            </a:r>
-          </a:p>
-        </p:txBody>
-      </p:sp>
-      <p:sp>
-        <p:nvSpPr>
-          <p:cNvPr id="5" name="TextBox 4"/>
-          <p:cNvSpPr txBox="1"/>
-          <p:nvPr/>
-        </p:nvSpPr>
-        <p:spPr>
-          <a:xfrm>
-            <a:off x="731520" y="6446520"/>
-            <a:ext cx="10728655" cy="320040"/>
-          </a:xfrm>
-          <a:prstGeom prst="rect">
-            <a:avLst/>
-          </a:prstGeom>
-          <a:noFill/>
-        </p:spPr>
-        <p:txBody>
-          <a:bodyPr wrap="none" lIns="0" rIns="0" tIns="0" bIns="0">
-            <a:spAutoFit/>
-          </a:bodyPr>
-          <a:lstStyle/>
-          <a:p>
-            <a:pPr>
-              <a:defRPr sz="900">
-                <a:solidFill>
-                  <a:srgbClr val="94A3B8"/>
-                </a:solidFill>
-              </a:defRPr>
-            </a:pPr>
-            <a:r>
-              <a:t>Maheshchandra Hegde · Technical Work Experience &amp; Capability Presentation | Slide 11 of 11</a:t>
+              <a:t>Maheshchandra Hegde · Technical Work Experience Presentation | Slide 1 of 9</a:t>
             </a:r>
           </a:p>
         </p:txBody>
@@ -4850,7 +3559,7 @@
               </a:defRPr>
             </a:pPr>
             <a:r>
-              <a:t>EXECUTIVE PROFILE</a:t>
+              <a:t>SECTION 2 · PROJECT EXPERIENCE (CLIENT GROUP 1)</a:t>
             </a:r>
           </a:p>
         </p:txBody>
@@ -4885,7 +3594,7 @@
               </a:defRPr>
             </a:pPr>
             <a:r>
-              <a:t>Professional Background, Architectural Heritage &amp; Technical Philosophy</a:t>
+              <a:t>Technoyana &amp; SrushtiLabs: Generative 3D Platforms &amp; Spatial Computing</a:t>
             </a:r>
           </a:p>
         </p:txBody>
@@ -4942,7 +3651,7 @@
         <p:spPr>
           <a:xfrm>
             <a:off x="731520" y="1463040"/>
-            <a:ext cx="5120640" cy="4754880"/>
+            <a:ext cx="5230368" cy="4754880"/>
           </a:xfrm>
           <a:prstGeom prst="roundRect">
             <a:avLst/>
@@ -4980,92 +3689,14 @@
       </p:sp>
       <p:sp>
         <p:nvSpPr>
-          <p:cNvPr id="7" name="Rectangle 6"/>
-          <p:cNvSpPr/>
-          <p:nvPr/>
-        </p:nvSpPr>
-        <p:spPr>
-          <a:xfrm>
-            <a:off x="740664" y="1472184"/>
-            <a:ext cx="5102352" cy="384048"/>
-          </a:xfrm>
-          <a:prstGeom prst="rect">
-            <a:avLst/>
-          </a:prstGeom>
-          <a:solidFill>
-            <a:srgbClr val="0E7490"/>
-          </a:solidFill>
-          <a:ln>
-            <a:noFill/>
-          </a:ln>
-        </p:spPr>
-        <p:style>
-          <a:lnRef idx="1">
-            <a:schemeClr val="accent1"/>
-          </a:lnRef>
-          <a:fillRef idx="3">
-            <a:schemeClr val="accent1"/>
-          </a:fillRef>
-          <a:effectRef idx="2">
-            <a:schemeClr val="accent1"/>
-          </a:effectRef>
-          <a:fontRef idx="minor">
-            <a:schemeClr val="lt1"/>
-          </a:fontRef>
-        </p:style>
-        <p:txBody>
-          <a:bodyPr rtlCol="0" anchor="ctr"/>
-          <a:lstStyle/>
-          <a:p>
-            <a:pPr algn="ctr"/>
-          </a:p>
-        </p:txBody>
-      </p:sp>
-      <p:sp>
-        <p:nvSpPr>
-          <p:cNvPr id="8" name="TextBox 7"/>
+          <p:cNvPr id="7" name="TextBox 6"/>
           <p:cNvSpPr txBox="1"/>
           <p:nvPr/>
         </p:nvSpPr>
         <p:spPr>
           <a:xfrm>
-            <a:off x="868680" y="1536192"/>
-            <a:ext cx="4846320" cy="320040"/>
-          </a:xfrm>
-          <a:prstGeom prst="rect">
-            <a:avLst/>
-          </a:prstGeom>
-          <a:noFill/>
-        </p:spPr>
-        <p:txBody>
-          <a:bodyPr wrap="none">
-            <a:spAutoFit/>
-          </a:bodyPr>
-          <a:lstStyle/>
-          <a:p>
-            <a:pPr>
-              <a:defRPr sz="1100" b="1">
-                <a:solidFill>
-                  <a:srgbClr val="FFFFFF"/>
-                </a:solidFill>
-              </a:defRPr>
-            </a:pPr>
-            <a:r>
-              <a:t>ARCHITECTURAL LINEAGE &amp; PASSION FOR 3D</a:t>
-            </a:r>
-          </a:p>
-        </p:txBody>
-      </p:sp>
-      <p:sp>
-        <p:nvSpPr>
-          <p:cNvPr id="9" name="TextBox 8"/>
-          <p:cNvSpPr txBox="1"/>
-          <p:nvPr/>
-        </p:nvSpPr>
-        <p:spPr>
-          <a:xfrm>
-            <a:off x="914400" y="1965960"/>
-            <a:ext cx="4754880" cy="4114800"/>
+            <a:off x="914400" y="1645920"/>
+            <a:ext cx="4864608" cy="4389120"/>
           </a:xfrm>
           <a:prstGeom prst="rect">
             <a:avLst/>
@@ -5080,52 +3711,180 @@
           <a:p>
             <a:pPr>
               <a:spcAft>
+                <a:spcPts val="200"/>
+              </a:spcAft>
+              <a:defRPr sz="1700" b="1">
+                <a:solidFill>
+                  <a:srgbClr val="0F172A"/>
+                </a:solidFill>
+              </a:defRPr>
+            </a:pPr>
+            <a:r>
+              <a:t>Voxelforge AI</a:t>
+            </a:r>
+          </a:p>
+          <a:p>
+            <a:pPr>
+              <a:spcAft>
+                <a:spcPts val="1200"/>
+              </a:spcAft>
+              <a:defRPr sz="1100" b="1">
+                <a:solidFill>
+                  <a:srgbClr val="0E7490"/>
+                </a:solidFill>
+              </a:defRPr>
+            </a:pPr>
+            <a:r>
+              <a:t>Modular 3D Generative AI Platform | srushtilabs.com/voxelforge/</a:t>
+            </a:r>
+          </a:p>
+          <a:p>
+            <a:pPr>
+              <a:defRPr b="1" sz="1000">
+                <a:solidFill>
+                  <a:srgbClr val="0F172A"/>
+                </a:solidFill>
+              </a:defRPr>
+            </a:pPr>
+            <a:r>
+              <a:t>• Role &amp; Entity: </a:t>
+            </a:r>
+          </a:p>
+          <a:p>
+            <a:pPr>
+              <a:spcAft>
                 <a:spcPts val="600"/>
               </a:spcAft>
-              <a:defRPr sz="1300" b="1">
+              <a:defRPr sz="950">
+                <a:solidFill>
+                  <a:srgbClr val="64748B"/>
+                </a:solidFill>
+              </a:defRPr>
+            </a:pPr>
+            <a:r>
+              <a:t>  Founder &amp; CTO at SrushtiLabs (Technoyana Digital Transformation Services Pvt. Ltd.).</a:t>
+            </a:r>
+          </a:p>
+          <a:p>
+            <a:pPr>
+              <a:defRPr b="1" sz="1000">
                 <a:solidFill>
                   <a:srgbClr val="0F172A"/>
                 </a:solidFill>
               </a:defRPr>
             </a:pPr>
             <a:r>
-              <a:t>Natural Convergence of Architecture and Computing</a:t>
-            </a:r>
-          </a:p>
-          <a:p>
-            <a:pPr>
+              <a:t>• Core Product Innovation: </a:t>
+            </a:r>
+          </a:p>
+          <a:p>
+            <a:pPr>
+              <a:spcAft>
+                <a:spcPts val="600"/>
+              </a:spcAft>
               <a:defRPr sz="950">
                 <a:solidFill>
-                  <a:srgbClr val="1E293B"/>
-                </a:solidFill>
-              </a:defRPr>
-            </a:pPr>
-            <a:r>
-              <a:t>• Early Foundation with Architect Father: Growing up assisting my architect father in his studio provided my earliest foundation in drafting, spatial coordination, blueprints, CAD, and architectural drawings. This practical exposure sparked an enduring passion for 3D modeling, spatial thinking, and visualization.</a:t>
-            </a:r>
-            <a:br/>
-            <a:br/>
-            <a:r>
-              <a:t>• Blending Engineering with Human Interface: Pursued formal education with a Bachelor of Engineering in Electronics &amp; Communication and a Master of Science in Computing (Robert Gordon University, UK), specializing in Human Interface Design &amp; Development.</a:t>
-            </a:r>
-            <a:br/>
-            <a:br/>
-            <a:r>
-              <a:t>• 16+ Years Hands-on Leadership: Combined rigorous software architecture with creative spatial technologies—spanning flight simulation visual databases (CAE), enterprise dashboards (Cisco), healthcare platforms (Philips), startup products (Technoyana, Twitan), and generative 3D AI (Voxelforge AI, ayam3d).</a:t>
-            </a:r>
-          </a:p>
-        </p:txBody>
-      </p:sp>
-      <p:sp>
-        <p:nvSpPr>
-          <p:cNvPr id="10" name="Rounded Rectangle 9"/>
+                  <a:srgbClr val="64748B"/>
+                </a:solidFill>
+              </a:defRPr>
+            </a:pPr>
+            <a:r>
+              <a:t>  Developed Voxelforge AI, a generative AI product creating modular 3D assets based on user prompt inputs.</a:t>
+            </a:r>
+          </a:p>
+          <a:p>
+            <a:pPr>
+              <a:defRPr b="1" sz="1000">
+                <a:solidFill>
+                  <a:srgbClr val="0F172A"/>
+                </a:solidFill>
+              </a:defRPr>
+            </a:pPr>
+            <a:r>
+              <a:t>• Multi-Platform Assembly: </a:t>
+            </a:r>
+          </a:p>
+          <a:p>
+            <a:pPr>
+              <a:spcAft>
+                <a:spcPts val="600"/>
+              </a:spcAft>
+              <a:defRPr sz="950">
+                <a:solidFill>
+                  <a:srgbClr val="64748B"/>
+                </a:solidFill>
+              </a:defRPr>
+            </a:pPr>
+            <a:r>
+              <a:t>  Produces game-ready, low-poly 3D models and bundles optimized for immediate integration into Unreal Engine, Unity, and real-time WebGL engines.</a:t>
+            </a:r>
+          </a:p>
+          <a:p>
+            <a:pPr>
+              <a:defRPr b="1" sz="1000">
+                <a:solidFill>
+                  <a:srgbClr val="0F172A"/>
+                </a:solidFill>
+              </a:defRPr>
+            </a:pPr>
+            <a:r>
+              <a:t>• Design-to-Asset Speed: </a:t>
+            </a:r>
+          </a:p>
+          <a:p>
+            <a:pPr>
+              <a:spcAft>
+                <a:spcPts val="600"/>
+              </a:spcAft>
+              <a:defRPr sz="950">
+                <a:solidFill>
+                  <a:srgbClr val="64748B"/>
+                </a:solidFill>
+              </a:defRPr>
+            </a:pPr>
+            <a:r>
+              <a:t>  Automates prompt-to-3D geometry conversion, texture baking, and polygon optimization, reducing prototyping turnaround from days to minutes.</a:t>
+            </a:r>
+          </a:p>
+          <a:p>
+            <a:pPr>
+              <a:defRPr b="1" sz="1000">
+                <a:solidFill>
+                  <a:srgbClr val="0F172A"/>
+                </a:solidFill>
+              </a:defRPr>
+            </a:pPr>
+            <a:r>
+              <a:t>• Live Demonstration: </a:t>
+            </a:r>
+          </a:p>
+          <a:p>
+            <a:pPr>
+              <a:spcAft>
+                <a:spcPts val="600"/>
+              </a:spcAft>
+              <a:defRPr sz="950">
+                <a:solidFill>
+                  <a:srgbClr val="64748B"/>
+                </a:solidFill>
+              </a:defRPr>
+            </a:pPr>
+            <a:r>
+              <a:t>  Fully functional application deployed and accessible at srushtilabs.com/voxelforge/.</a:t>
+            </a:r>
+          </a:p>
+        </p:txBody>
+      </p:sp>
+      <p:sp>
+        <p:nvSpPr>
+          <p:cNvPr id="8" name="Rounded Rectangle 7"/>
           <p:cNvSpPr/>
           <p:nvPr/>
         </p:nvSpPr>
         <p:spPr>
           <a:xfrm>
-            <a:off x="6108192" y="1463040"/>
-            <a:ext cx="5349240" cy="4754880"/>
+            <a:off x="6217920" y="1463040"/>
+            <a:ext cx="5230368" cy="4754880"/>
           </a:xfrm>
           <a:prstGeom prst="roundRect">
             <a:avLst/>
@@ -5163,92 +3922,14 @@
       </p:sp>
       <p:sp>
         <p:nvSpPr>
-          <p:cNvPr id="11" name="Rectangle 10"/>
-          <p:cNvSpPr/>
-          <p:nvPr/>
-        </p:nvSpPr>
-        <p:spPr>
-          <a:xfrm>
-            <a:off x="6117336" y="1472184"/>
-            <a:ext cx="5330952" cy="384048"/>
-          </a:xfrm>
-          <a:prstGeom prst="rect">
-            <a:avLst/>
-          </a:prstGeom>
-          <a:solidFill>
-            <a:srgbClr val="0284C7"/>
-          </a:solidFill>
-          <a:ln>
-            <a:noFill/>
-          </a:ln>
-        </p:spPr>
-        <p:style>
-          <a:lnRef idx="1">
-            <a:schemeClr val="accent1"/>
-          </a:lnRef>
-          <a:fillRef idx="3">
-            <a:schemeClr val="accent1"/>
-          </a:fillRef>
-          <a:effectRef idx="2">
-            <a:schemeClr val="accent1"/>
-          </a:effectRef>
-          <a:fontRef idx="minor">
-            <a:schemeClr val="lt1"/>
-          </a:fontRef>
-        </p:style>
-        <p:txBody>
-          <a:bodyPr rtlCol="0" anchor="ctr"/>
-          <a:lstStyle/>
-          <a:p>
-            <a:pPr algn="ctr"/>
-          </a:p>
-        </p:txBody>
-      </p:sp>
-      <p:sp>
-        <p:nvSpPr>
-          <p:cNvPr id="12" name="TextBox 11"/>
+          <p:cNvPr id="9" name="TextBox 8"/>
           <p:cNvSpPr txBox="1"/>
           <p:nvPr/>
         </p:nvSpPr>
         <p:spPr>
           <a:xfrm>
-            <a:off x="6245352" y="1536192"/>
-            <a:ext cx="5074920" cy="320040"/>
-          </a:xfrm>
-          <a:prstGeom prst="rect">
-            <a:avLst/>
-          </a:prstGeom>
-          <a:noFill/>
-        </p:spPr>
-        <p:txBody>
-          <a:bodyPr wrap="none">
-            <a:spAutoFit/>
-          </a:bodyPr>
-          <a:lstStyle/>
-          <a:p>
-            <a:pPr>
-              <a:defRPr sz="1100" b="1">
-                <a:solidFill>
-                  <a:srgbClr val="FFFFFF"/>
-                </a:solidFill>
-              </a:defRPr>
-            </a:pPr>
-            <a:r>
-              <a:t>CAREER SNAPSHOT &amp; CORE COMPETENCIES</a:t>
-            </a:r>
-          </a:p>
-        </p:txBody>
-      </p:sp>
-      <p:sp>
-        <p:nvSpPr>
-          <p:cNvPr id="13" name="TextBox 12"/>
-          <p:cNvSpPr txBox="1"/>
-          <p:nvPr/>
-        </p:nvSpPr>
-        <p:spPr>
-          <a:xfrm>
-            <a:off x="6291072" y="1965960"/>
-            <a:ext cx="4983480" cy="4114800"/>
+            <a:off x="6400800" y="1645920"/>
+            <a:ext cx="4864608" cy="4389120"/>
           </a:xfrm>
           <a:prstGeom prst="rect">
             <a:avLst/>
@@ -5262,6 +3943,36 @@
           <a:lstStyle/>
           <a:p>
             <a:pPr>
+              <a:spcAft>
+                <a:spcPts val="200"/>
+              </a:spcAft>
+              <a:defRPr sz="1700" b="1">
+                <a:solidFill>
+                  <a:srgbClr val="0F172A"/>
+                </a:solidFill>
+              </a:defRPr>
+            </a:pPr>
+            <a:r>
+              <a:t>Ayam3d (Ayam = Dimension)</a:t>
+            </a:r>
+          </a:p>
+          <a:p>
+            <a:pPr>
+              <a:spcAft>
+                <a:spcPts val="1200"/>
+              </a:spcAft>
+              <a:defRPr sz="1100" b="1">
+                <a:solidFill>
+                  <a:srgbClr val="0284C7"/>
+                </a:solidFill>
+              </a:defRPr>
+            </a:pPr>
+            <a:r>
+              <a:t>Parametric AI 3D Model Generation | ayam3d.in</a:t>
+            </a:r>
+          </a:p>
+          <a:p>
+            <a:pPr>
               <a:defRPr b="1" sz="1000">
                 <a:solidFill>
                   <a:srgbClr val="0F172A"/>
@@ -5269,22 +3980,22 @@
               </a:defRPr>
             </a:pPr>
             <a:r>
-              <a:t>• Frontend &amp; Scalable Architecture: </a:t>
-            </a:r>
-          </a:p>
-          <a:p>
-            <a:pPr>
-              <a:spcAft>
-                <a:spcPts val="400"/>
-              </a:spcAft>
-              <a:defRPr sz="900">
+              <a:t>• Concept &amp; Vision: </a:t>
+            </a:r>
+          </a:p>
+          <a:p>
+            <a:pPr>
+              <a:spcAft>
+                <a:spcPts val="600"/>
+              </a:spcAft>
+              <a:defRPr sz="950">
                 <a:solidFill>
                   <a:srgbClr val="64748B"/>
                 </a:solidFill>
               </a:defRPr>
             </a:pPr>
             <a:r>
-              <a:t>  React, Angular, TypeScript, Node.js, Web Components, Micro-frontends, LitElement, Design Systems.</a:t>
+              <a:t>  Extended the Voxelforge concept into Ayam3d ('Ayam' meaning Dimension), focusing on parametric-based 3D model generation from natural language prompts.</a:t>
             </a:r>
           </a:p>
           <a:p>
@@ -5296,22 +4007,22 @@
               </a:defRPr>
             </a:pPr>
             <a:r>
-              <a:t>• Cloud, Edge &amp; Reliability: </a:t>
-            </a:r>
-          </a:p>
-          <a:p>
-            <a:pPr>
-              <a:spcAft>
-                <a:spcPts val="400"/>
-              </a:spcAft>
-              <a:defRPr sz="900">
+              <a:t>• Instant Generation: </a:t>
+            </a:r>
+          </a:p>
+          <a:p>
+            <a:pPr>
+              <a:spcAft>
+                <a:spcPts val="600"/>
+              </a:spcAft>
+              <a:defRPr sz="950">
                 <a:solidFill>
                   <a:srgbClr val="64748B"/>
                 </a:solidFill>
               </a:defRPr>
             </a:pPr>
             <a:r>
-              <a:t>  GCP, Firebase, AWS, offline-first architectures, IndexedDB/Service Workers, WebSockets, real-time data sync.</a:t>
+              <a:t>  Emphasizes generating structured 3D models in seconds utilizing custom trained AI models and geometric constraint solvers.</a:t>
             </a:r>
           </a:p>
           <a:p>
@@ -5323,22 +4034,22 @@
               </a:defRPr>
             </a:pPr>
             <a:r>
-              <a:t>• Spatial 3D &amp; Generative AI: </a:t>
-            </a:r>
-          </a:p>
-          <a:p>
-            <a:pPr>
-              <a:spcAft>
-                <a:spcPts val="400"/>
-              </a:spcAft>
-              <a:defRPr sz="900">
+              <a:t>• Investor Interest: </a:t>
+            </a:r>
+          </a:p>
+          <a:p>
+            <a:pPr>
+              <a:spcAft>
+                <a:spcPts val="600"/>
+              </a:spcAft>
+              <a:defRPr sz="950">
                 <a:solidFill>
                   <a:srgbClr val="64748B"/>
                 </a:solidFill>
               </a:defRPr>
             </a:pPr>
             <a:r>
-              <a:t>  AI-assisted 3D generation (Voxelforge AI), automated mesh retopology (ayam3d), WebGL, Three.js, CAD drafting, 3D walkthroughs.</a:t>
+              <a:t>  Successfully generated early investor interest, validating the commercial potential of real-time generative 3D synthesis for digital twins, architecture, and games.</a:t>
             </a:r>
           </a:p>
           <a:p>
@@ -5350,22 +4061,22 @@
               </a:defRPr>
             </a:pPr>
             <a:r>
-              <a:t>• Product &amp; Startup Leadership: </a:t>
-            </a:r>
-          </a:p>
-          <a:p>
-            <a:pPr>
-              <a:spcAft>
-                <a:spcPts val="400"/>
-              </a:spcAft>
-              <a:defRPr sz="900">
+              <a:t>• Active Development: </a:t>
+            </a:r>
+          </a:p>
+          <a:p>
+            <a:pPr>
+              <a:spcAft>
+                <a:spcPts val="600"/>
+              </a:spcAft>
+              <a:defRPr sz="950">
                 <a:solidFill>
                   <a:srgbClr val="64748B"/>
                 </a:solidFill>
               </a:defRPr>
             </a:pPr>
             <a:r>
-              <a:t>  Founder/Co-Founder across Technoyana, Twitan.com, SrushtiLabs, InnoBrik; product strategy, sprint governance, mentoring.</a:t>
+              <a:t>  Currently under active development; seeking strategic industry partners and promoters to scale the underlying AI pipeline.</a:t>
             </a:r>
           </a:p>
           <a:p>
@@ -5377,29 +4088,29 @@
               </a:defRPr>
             </a:pPr>
             <a:r>
-              <a:t>• Key Industry Tenures: </a:t>
-            </a:r>
-          </a:p>
-          <a:p>
-            <a:pPr>
-              <a:spcAft>
-                <a:spcPts val="400"/>
-              </a:spcAft>
-              <a:defRPr sz="900">
+              <a:t>• Application Reference: </a:t>
+            </a:r>
+          </a:p>
+          <a:p>
+            <a:pPr>
+              <a:spcAft>
+                <a:spcPts val="600"/>
+              </a:spcAft>
+              <a:defRPr sz="950">
                 <a:solidFill>
                   <a:srgbClr val="64748B"/>
                 </a:solidFill>
               </a:defRPr>
             </a:pPr>
             <a:r>
-              <a:t>  Cyient (Philips Healthcare), UST Global (Cisco Systems), Ness Technologies, Moonraft Innovation Labs, ThoughtFocus, CAE Simulation.</a:t>
-            </a:r>
-          </a:p>
-        </p:txBody>
-      </p:sp>
-      <p:sp>
-        <p:nvSpPr>
-          <p:cNvPr id="14" name="TextBox 13"/>
+              <a:t>  Preliminary landing page and concept documentation available at ayam3d.in.</a:t>
+            </a:r>
+          </a:p>
+        </p:txBody>
+      </p:sp>
+      <p:sp>
+        <p:nvSpPr>
+          <p:cNvPr id="10" name="TextBox 9"/>
           <p:cNvSpPr txBox="1"/>
           <p:nvPr/>
         </p:nvSpPr>
@@ -5427,7 +4138,7 @@
               </a:defRPr>
             </a:pPr>
             <a:r>
-              <a:t>Maheshchandra Hegde · Technical Work Experience &amp; Capability Presentation | Slide 2 of 11</a:t>
+              <a:t>Maheshchandra Hegde · Technical Work Experience Presentation | Slide 2 of 9</a:t>
             </a:r>
           </a:p>
         </p:txBody>
@@ -5523,7 +4234,7 @@
               </a:defRPr>
             </a:pPr>
             <a:r>
-              <a:t>ENTERPRISE PROJECT EXPERIENCE 1</a:t>
+              <a:t>SECTION 2 · PROJECT EXPERIENCE (CLIENT GROUP 2)</a:t>
             </a:r>
           </a:p>
         </p:txBody>
@@ -5558,7 +4269,7 @@
               </a:defRPr>
             </a:pPr>
             <a:r>
-              <a:t>Healthcare Mission-Critical Systems: Philips ICCA (Cyient Limited)</a:t>
+              <a:t>Cyient / PHILIPS: Intellispace Critical Care &amp; Anesthesia (ICCA)</a:t>
             </a:r>
           </a:p>
         </p:txBody>
@@ -5615,7 +4326,7 @@
         <p:spPr>
           <a:xfrm>
             <a:off x="731520" y="1463040"/>
-            <a:ext cx="3931920" cy="4754880"/>
+            <a:ext cx="4114800" cy="4754880"/>
           </a:xfrm>
           <a:prstGeom prst="roundRect">
             <a:avLst/>
@@ -5660,7 +4371,7 @@
         <p:spPr>
           <a:xfrm>
             <a:off x="960120" y="1645920"/>
-            <a:ext cx="3474720" cy="4389120"/>
+            <a:ext cx="3657600" cy="4389120"/>
           </a:xfrm>
           <a:prstGeom prst="rect">
             <a:avLst/>
@@ -5675,7 +4386,7 @@
           <a:p>
             <a:pPr>
               <a:spcAft>
-                <a:spcPts val="400"/>
+                <a:spcPts val="200"/>
               </a:spcAft>
               <a:defRPr sz="1700" b="1">
                 <a:solidFill>
@@ -5717,16 +4428,16 @@
           <a:p>
             <a:pPr>
               <a:spcAft>
-                <a:spcPts val="500"/>
-              </a:spcAft>
-              <a:defRPr sz="900">
+                <a:spcPts val="600"/>
+              </a:spcAft>
+              <a:defRPr sz="950">
                 <a:solidFill>
                   <a:srgbClr val="64748B"/>
                 </a:solidFill>
               </a:defRPr>
             </a:pPr>
             <a:r>
-              <a:t>Senior Technical Lead (React / NodeJS)</a:t>
+              <a:t>Senior Technology Leader (React / NodeJS)</a:t>
             </a:r>
           </a:p>
           <a:p>
@@ -5744,9 +4455,9 @@
           <a:p>
             <a:pPr>
               <a:spcAft>
-                <a:spcPts val="500"/>
-              </a:spcAft>
-              <a:defRPr sz="900">
+                <a:spcPts val="600"/>
+              </a:spcAft>
+              <a:defRPr sz="950">
                 <a:solidFill>
                   <a:srgbClr val="64748B"/>
                 </a:solidFill>
@@ -5765,15 +4476,15 @@
               </a:defRPr>
             </a:pPr>
             <a:r>
-              <a:t>Company: </a:t>
-            </a:r>
-          </a:p>
-          <a:p>
-            <a:pPr>
-              <a:spcAft>
-                <a:spcPts val="500"/>
-              </a:spcAft>
-              <a:defRPr sz="900">
+              <a:t>Client &amp; Facility: </a:t>
+            </a:r>
+          </a:p>
+          <a:p>
+            <a:pPr>
+              <a:spcAft>
+                <a:spcPts val="600"/>
+              </a:spcAft>
+              <a:defRPr sz="950">
                 <a:solidFill>
                   <a:srgbClr val="64748B"/>
                 </a:solidFill>
@@ -5798,16 +4509,16 @@
           <a:p>
             <a:pPr>
               <a:spcAft>
-                <a:spcPts val="500"/>
-              </a:spcAft>
-              <a:defRPr sz="900">
+                <a:spcPts val="600"/>
+              </a:spcAft>
+              <a:defRPr sz="950">
                 <a:solidFill>
                   <a:srgbClr val="64748B"/>
                 </a:solidFill>
               </a:defRPr>
             </a:pPr>
             <a:r>
-              <a:t>24/7 continuous ICU hospital environments; zero tolerance for UI freeze or missing patient vitals</a:t>
+              <a:t>Mission-critical hospital ICU and anesthesia suites operating continuously 24/7.</a:t>
             </a:r>
           </a:p>
           <a:p>
@@ -5819,22 +4530,22 @@
               </a:defRPr>
             </a:pPr>
             <a:r>
-              <a:t>Key Focus: </a:t>
-            </a:r>
-          </a:p>
-          <a:p>
-            <a:pPr>
-              <a:spcAft>
-                <a:spcPts val="500"/>
-              </a:spcAft>
-              <a:defRPr sz="900">
+              <a:t>Delivery Mandate: </a:t>
+            </a:r>
+          </a:p>
+          <a:p>
+            <a:pPr>
+              <a:spcAft>
+                <a:spcPts val="600"/>
+              </a:spcAft>
+              <a:defRPr sz="950">
                 <a:solidFill>
                   <a:srgbClr val="64748B"/>
                 </a:solidFill>
               </a:defRPr>
             </a:pPr>
             <a:r>
-              <a:t>Scalable frontend architecture, high performance, strict healthcare standards compliance</a:t>
+              <a:t>Delivered clinical software passing all stringent quality, reliability, and security gates established by Philips and hospital networks.</a:t>
             </a:r>
           </a:p>
         </p:txBody>
@@ -5847,8 +4558,8 @@
         </p:nvSpPr>
         <p:spPr>
           <a:xfrm>
-            <a:off x="4892040" y="1463040"/>
-            <a:ext cx="6565392" cy="1463040"/>
+            <a:off x="5074920" y="1463040"/>
+            <a:ext cx="6382512" cy="1463040"/>
           </a:xfrm>
           <a:prstGeom prst="roundRect">
             <a:avLst/>
@@ -5892,8 +4603,8 @@
         </p:nvSpPr>
         <p:spPr>
           <a:xfrm>
-            <a:off x="5074920" y="1600200"/>
-            <a:ext cx="6199632" cy="1188720"/>
+            <a:off x="5257800" y="1600200"/>
+            <a:ext cx="6016752" cy="1188720"/>
           </a:xfrm>
           <a:prstGeom prst="rect">
             <a:avLst/>
@@ -5917,7 +4628,7 @@
               </a:defRPr>
             </a:pPr>
             <a:r>
-              <a:t>1. High-Performance Clinical Telemetry &amp; Zero Latency</a:t>
+              <a:t>1. Rigorous Quality Benchmarks &amp; Zero-Downtime Reliability</a:t>
             </a:r>
           </a:p>
           <a:p>
@@ -5929,7 +4640,7 @@
               </a:defRPr>
             </a:pPr>
             <a:r>
-              <a:t>Architected React-based frontend modules responsible for rendering complex clinical time-series charts, vitals, and medication administration workflows. Enforced strict memory management and component memoization to prevent garbage collection pauses during long-running bedside sessions.</a:t>
+              <a:t>Successfully delivered the software to meet demanding medical quality requirements set by Philips and healthcare providers. Architected fail-safe clinical data rendering with zero memory leaks, ensuring bedside patient monitoring displays remain completely responsive across multi-day uninterrupted operations.</a:t>
             </a:r>
           </a:p>
         </p:txBody>
@@ -5942,8 +4653,8 @@
         </p:nvSpPr>
         <p:spPr>
           <a:xfrm>
-            <a:off x="4892040" y="3072384"/>
-            <a:ext cx="6565392" cy="1463040"/>
+            <a:off x="5074920" y="3072384"/>
+            <a:ext cx="6382512" cy="1463040"/>
           </a:xfrm>
           <a:prstGeom prst="roundRect">
             <a:avLst/>
@@ -5987,8 +4698,8 @@
         </p:nvSpPr>
         <p:spPr>
           <a:xfrm>
-            <a:off x="5074920" y="3209544"/>
-            <a:ext cx="6199632" cy="1188720"/>
+            <a:off x="5257800" y="3209544"/>
+            <a:ext cx="6016752" cy="1188720"/>
           </a:xfrm>
           <a:prstGeom prst="rect">
             <a:avLst/>
@@ -6012,7 +4723,7 @@
               </a:defRPr>
             </a:pPr>
             <a:r>
-              <a:t>2. Decoupled Modular Architecture &amp; Maintainability</a:t>
+              <a:t>2. Comprehensive Security Architecture &amp; Policy Enforcement</a:t>
             </a:r>
           </a:p>
           <a:p>
@@ -6024,7 +4735,7 @@
               </a:defRPr>
             </a:pPr>
             <a:r>
-              <a:t>Deconstructed complex clinical workflows into reusable, modular component libraries. Created robust contract boundaries with backend REST and streaming APIs, accelerating multi-developer collaboration while eliminating regression risks across unrelated clinical modules.</a:t>
+              <a:t>Enforced strict enterprise cybersecurity measures as per Philips global policies: integrated Multi-Factor Authentication (MFA), protected against Cross-Site Scripting (XSS) and injection vulnerabilities, enforced role-based access control (RBAC), and maintained immutable audit logs for sensitive patient medical data.</a:t>
             </a:r>
           </a:p>
         </p:txBody>
@@ -6037,8 +4748,8 @@
         </p:nvSpPr>
         <p:spPr>
           <a:xfrm>
-            <a:off x="4892040" y="4681728"/>
-            <a:ext cx="6565392" cy="1463040"/>
+            <a:off x="5074920" y="4681728"/>
+            <a:ext cx="6382512" cy="1463040"/>
           </a:xfrm>
           <a:prstGeom prst="roundRect">
             <a:avLst/>
@@ -6082,8 +4793,8 @@
         </p:nvSpPr>
         <p:spPr>
           <a:xfrm>
-            <a:off x="5074920" y="4818888"/>
-            <a:ext cx="6199632" cy="1188720"/>
+            <a:off x="5257800" y="4818888"/>
+            <a:ext cx="6016752" cy="1188720"/>
           </a:xfrm>
           <a:prstGeom prst="rect">
             <a:avLst/>
@@ -6107,7 +4818,7 @@
               </a:defRPr>
             </a:pPr>
             <a:r>
-              <a:t>3. Healthcare Regulatory &amp; Security Standards Compliance</a:t>
+              <a:t>3. End-to-End Best Practices &amp; Scalable Modular Delivery</a:t>
             </a:r>
           </a:p>
           <a:p>
@@ -6119,7 +4830,7 @@
               </a:defRPr>
             </a:pPr>
             <a:r>
-              <a:t>Ensured all developed UI modules strictly complied with medical software safety benchmarks, HIPAA data protection guidelines, role-based clinician access controls, and robust audit trails for all patient data modifications.</a:t>
+              <a:t>Led the end-to-end technical execution—from architectural design and modular component breakdown to automated test suites and production deployment. Delivered a fully supported software product backed by complete documentation and service support protocols.</a:t>
             </a:r>
           </a:p>
         </p:txBody>
@@ -6154,7 +4865,7 @@
               </a:defRPr>
             </a:pPr>
             <a:r>
-              <a:t>Maheshchandra Hegde · Technical Work Experience &amp; Capability Presentation | Slide 3 of 11</a:t>
+              <a:t>Maheshchandra Hegde · Technical Work Experience Presentation | Slide 3 of 9</a:t>
             </a:r>
           </a:p>
         </p:txBody>
@@ -6250,7 +4961,7 @@
               </a:defRPr>
             </a:pPr>
             <a:r>
-              <a:t>STARTUP VENTURES &amp; CLOUD SYSTEMS</a:t>
+              <a:t>SECTION 2 · PROJECT EXPERIENCE (CLIENT GROUPS 3 &amp; 4)</a:t>
             </a:r>
           </a:p>
         </p:txBody>
@@ -6285,7 +4996,7 @@
               </a:defRPr>
             </a:pPr>
             <a:r>
-              <a:t>Product Engineering &amp; Edge Resilience: Technoyana &amp; Twitan.com</a:t>
+              <a:t>Ness Digital Engineering &amp; Moonraft Innovation Labs (UST Global Unit)</a:t>
             </a:r>
           </a:p>
         </p:txBody>
@@ -6342,7 +5053,7 @@
         <p:spPr>
           <a:xfrm>
             <a:off x="731520" y="1463040"/>
-            <a:ext cx="3931920" cy="4754880"/>
+            <a:ext cx="5230368" cy="4754880"/>
           </a:xfrm>
           <a:prstGeom prst="roundRect">
             <a:avLst/>
@@ -6386,8 +5097,8 @@
         </p:nvSpPr>
         <p:spPr>
           <a:xfrm>
-            <a:off x="960120" y="1645920"/>
-            <a:ext cx="3474720" cy="4389120"/>
+            <a:off x="914400" y="1645920"/>
+            <a:ext cx="4864608" cy="4389120"/>
           </a:xfrm>
           <a:prstGeom prst="rect">
             <a:avLst/>
@@ -6402,7 +5113,7 @@
           <a:p>
             <a:pPr>
               <a:spcAft>
-                <a:spcPts val="400"/>
+                <a:spcPts val="200"/>
               </a:spcAft>
               <a:defRPr sz="1700" b="1">
                 <a:solidFill>
@@ -6411,22 +5122,22 @@
               </a:defRPr>
             </a:pPr>
             <a:r>
-              <a:t>Technoyana &amp; Twitan</a:t>
-            </a:r>
-          </a:p>
-          <a:p>
-            <a:pPr>
-              <a:spcAft>
-                <a:spcPts val="1000"/>
+              <a:t>Ness Digital Engineering</a:t>
+            </a:r>
+          </a:p>
+          <a:p>
+            <a:pPr>
+              <a:spcAft>
+                <a:spcPts val="1200"/>
               </a:spcAft>
               <a:defRPr sz="1100" b="1">
                 <a:solidFill>
-                  <a:srgbClr val="0284C7"/>
-                </a:solidFill>
-              </a:defRPr>
-            </a:pPr>
-            <a:r>
-              <a:t>technoyana.in | twitan.com</a:t>
+                  <a:srgbClr val="0E7490"/>
+                </a:solidFill>
+              </a:defRPr>
+            </a:pPr>
+            <a:r>
+              <a:t>Senior Analyst / Tech Lead | Oct 2019 – Apr 2020</a:t>
             </a:r>
           </a:p>
           <a:p>
@@ -6438,22 +5149,22 @@
               </a:defRPr>
             </a:pPr>
             <a:r>
-              <a:t>Technoyana (2021 – 2023): </a:t>
-            </a:r>
-          </a:p>
-          <a:p>
-            <a:pPr>
-              <a:spcAft>
-                <a:spcPts val="500"/>
-              </a:spcAft>
-              <a:defRPr sz="900">
+              <a:t>• Project Focus: </a:t>
+            </a:r>
+          </a:p>
+          <a:p>
+            <a:pPr>
+              <a:spcAft>
+                <a:spcPts val="600"/>
+              </a:spcAft>
+              <a:defRPr sz="950">
                 <a:solidFill>
                   <a:srgbClr val="64748B"/>
                 </a:solidFill>
               </a:defRPr>
             </a:pPr>
             <a:r>
-              <a:t>Co-Founder &amp; Director; delivered fintech apps, product discovery engines, web &amp; cross-platform mobile apps (React Native / Ionic).</a:t>
+              <a:t>  Entertainment Management Application for a major client.</a:t>
             </a:r>
           </a:p>
           <a:p>
@@ -6465,22 +5176,22 @@
               </a:defRPr>
             </a:pPr>
             <a:r>
-              <a:t>Twitan.com (Apr 2025 – Present): </a:t>
-            </a:r>
-          </a:p>
-          <a:p>
-            <a:pPr>
-              <a:spcAft>
-                <a:spcPts val="500"/>
-              </a:spcAft>
-              <a:defRPr sz="900">
+              <a:t>• Technology Stack: </a:t>
+            </a:r>
+          </a:p>
+          <a:p>
+            <a:pPr>
+              <a:spcAft>
+                <a:spcPts val="600"/>
+              </a:spcAft>
+              <a:defRPr sz="950">
                 <a:solidFill>
                   <a:srgbClr val="64748B"/>
                 </a:solidFill>
               </a:defRPr>
             </a:pPr>
             <a:r>
-              <a:t>Founder &amp; Product Design Lead; AI-driven sports management, bracket engines &amp; live scoring (Shutlify badminton OS).</a:t>
+              <a:t>  Angular, TypeScript, AWS cloud infrastructure, Node.js.</a:t>
             </a:r>
           </a:p>
           <a:p>
@@ -6492,22 +5203,22 @@
               </a:defRPr>
             </a:pPr>
             <a:r>
-              <a:t>Operational Reality: </a:t>
-            </a:r>
-          </a:p>
-          <a:p>
-            <a:pPr>
-              <a:spcAft>
-                <a:spcPts val="500"/>
-              </a:spcAft>
-              <a:defRPr sz="900">
+              <a:t>• System Architecture: </a:t>
+            </a:r>
+          </a:p>
+          <a:p>
+            <a:pPr>
+              <a:spcAft>
+                <a:spcPts val="600"/>
+              </a:spcAft>
+              <a:defRPr sz="950">
                 <a:solidFill>
                   <a:srgbClr val="64748B"/>
                 </a:solidFill>
               </a:defRPr>
             </a:pPr>
             <a:r>
-              <a:t>Tournament venues with dead-zones, unstable cellular Wi-Fi, and real-time live match arbitration.</a:t>
+              <a:t>  Architected the complete single-page application structure, establishing clean state management and secure API communication layers.</a:t>
             </a:r>
           </a:p>
           <a:p>
@@ -6519,22 +5230,49 @@
               </a:defRPr>
             </a:pPr>
             <a:r>
-              <a:t>Tech Stack: </a:t>
-            </a:r>
-          </a:p>
-          <a:p>
-            <a:pPr>
-              <a:spcAft>
-                <a:spcPts val="500"/>
-              </a:spcAft>
-              <a:defRPr sz="900">
+              <a:t>• Standards &amp; Best Practices: </a:t>
+            </a:r>
+          </a:p>
+          <a:p>
+            <a:pPr>
+              <a:spcAft>
+                <a:spcPts val="600"/>
+              </a:spcAft>
+              <a:defRPr sz="950">
                 <a:solidFill>
                   <a:srgbClr val="64748B"/>
                 </a:solidFill>
               </a:defRPr>
             </a:pPr>
             <a:r>
-              <a:t>React, Angular, Node.js, Firebase/GCP, PWA, IndexedDB, WebSockets.</a:t>
+              <a:t>  Enforced accessibility standards (WCAG), code quality linters, and strict frontend security guidelines across the engineering team.</a:t>
+            </a:r>
+          </a:p>
+          <a:p>
+            <a:pPr>
+              <a:defRPr b="1" sz="1000">
+                <a:solidFill>
+                  <a:srgbClr val="0F172A"/>
+                </a:solidFill>
+              </a:defRPr>
+            </a:pPr>
+            <a:r>
+              <a:t>• Technical Leadership: </a:t>
+            </a:r>
+          </a:p>
+          <a:p>
+            <a:pPr>
+              <a:spcAft>
+                <a:spcPts val="600"/>
+              </a:spcAft>
+              <a:defRPr sz="950">
+                <a:solidFill>
+                  <a:srgbClr val="64748B"/>
+                </a:solidFill>
+              </a:defRPr>
+            </a:pPr>
+            <a:r>
+              <a:t>  Led the development squad through agile sprints, code reviews, and end-to-end technical deployment to client environments on schedule.</a:t>
             </a:r>
           </a:p>
         </p:txBody>
@@ -6547,8 +5285,8 @@
         </p:nvSpPr>
         <p:spPr>
           <a:xfrm>
-            <a:off x="4892040" y="1463040"/>
-            <a:ext cx="6565392" cy="1463040"/>
+            <a:off x="6217920" y="1463040"/>
+            <a:ext cx="5230368" cy="4754880"/>
           </a:xfrm>
           <a:prstGeom prst="roundRect">
             <a:avLst/>
@@ -6592,8 +5330,8 @@
         </p:nvSpPr>
         <p:spPr>
           <a:xfrm>
-            <a:off x="5074920" y="1600200"/>
-            <a:ext cx="6199632" cy="1188720"/>
+            <a:off x="6400800" y="1645920"/>
+            <a:ext cx="4864608" cy="4389120"/>
           </a:xfrm>
           <a:prstGeom prst="rect">
             <a:avLst/>
@@ -6608,225 +5346,173 @@
           <a:p>
             <a:pPr>
               <a:spcAft>
-                <a:spcPts val="500"/>
-              </a:spcAft>
-              <a:defRPr sz="1200" b="1">
+                <a:spcPts val="200"/>
+              </a:spcAft>
+              <a:defRPr sz="1700" b="1">
+                <a:solidFill>
+                  <a:srgbClr val="0F172A"/>
+                </a:solidFill>
+              </a:defRPr>
+            </a:pPr>
+            <a:r>
+              <a:t>Moonraft Innovation Labs</a:t>
+            </a:r>
+          </a:p>
+          <a:p>
+            <a:pPr>
+              <a:spcAft>
+                <a:spcPts val="1200"/>
+              </a:spcAft>
+              <a:defRPr sz="1100" b="1">
                 <a:solidFill>
                   <a:srgbClr val="0284C7"/>
                 </a:solidFill>
               </a:defRPr>
             </a:pPr>
             <a:r>
-              <a:t>1. Offline-First Resilience for Unstable Physical Venues</a:t>
-            </a:r>
-          </a:p>
-          <a:p>
-            <a:pPr>
+              <a:t>UI Architect | May 2019 – Jul 2019 (UST Global Specialized Unit)</a:t>
+            </a:r>
+          </a:p>
+          <a:p>
+            <a:pPr>
+              <a:defRPr b="1" sz="1000">
+                <a:solidFill>
+                  <a:srgbClr val="0F172A"/>
+                </a:solidFill>
+              </a:defRPr>
+            </a:pPr>
+            <a:r>
+              <a:t>• Enterprise Design System: </a:t>
+            </a:r>
+          </a:p>
+          <a:p>
+            <a:pPr>
+              <a:spcAft>
+                <a:spcPts val="600"/>
+              </a:spcAft>
               <a:defRPr sz="950">
                 <a:solidFill>
-                  <a:srgbClr val="1E293B"/>
-                </a:solidFill>
-              </a:defRPr>
-            </a:pPr>
-            <a:r>
-              <a:t>Architected an offline-first state machine using IndexedDB local storage and Service Workers for courtside officials. When Wi-Fi or cellular connections fluctuate, the app operates without interruption; all scores and events queue locally and sync with conflict-resolution algorithms upon reconnection.</a:t>
-            </a:r>
-          </a:p>
-        </p:txBody>
-      </p:sp>
-      <p:sp>
-        <p:nvSpPr>
-          <p:cNvPr id="10" name="Rounded Rectangle 9"/>
-          <p:cNvSpPr/>
-          <p:nvPr/>
-        </p:nvSpPr>
-        <p:spPr>
-          <a:xfrm>
-            <a:off x="4892040" y="3072384"/>
-            <a:ext cx="6565392" cy="1463040"/>
-          </a:xfrm>
-          <a:prstGeom prst="roundRect">
-            <a:avLst/>
-          </a:prstGeom>
-          <a:solidFill>
-            <a:srgbClr val="FFFFFF"/>
-          </a:solidFill>
-          <a:ln w="12700">
-            <a:solidFill>
-              <a:srgbClr val="E2E8F0"/>
-            </a:solidFill>
-          </a:ln>
-        </p:spPr>
-        <p:style>
-          <a:lnRef idx="1">
-            <a:schemeClr val="accent1"/>
-          </a:lnRef>
-          <a:fillRef idx="3">
-            <a:schemeClr val="accent1"/>
-          </a:fillRef>
-          <a:effectRef idx="2">
-            <a:schemeClr val="accent1"/>
-          </a:effectRef>
-          <a:fontRef idx="minor">
-            <a:schemeClr val="lt1"/>
-          </a:fontRef>
-        </p:style>
-        <p:txBody>
-          <a:bodyPr rtlCol="0" anchor="ctr"/>
-          <a:lstStyle/>
-          <a:p>
-            <a:pPr algn="ctr"/>
-          </a:p>
-        </p:txBody>
-      </p:sp>
-      <p:sp>
-        <p:nvSpPr>
-          <p:cNvPr id="11" name="TextBox 10"/>
-          <p:cNvSpPr txBox="1"/>
-          <p:nvPr/>
-        </p:nvSpPr>
-        <p:spPr>
-          <a:xfrm>
-            <a:off x="5074920" y="3209544"/>
-            <a:ext cx="6199632" cy="1188720"/>
-          </a:xfrm>
-          <a:prstGeom prst="rect">
-            <a:avLst/>
-          </a:prstGeom>
-          <a:noFill/>
-        </p:spPr>
-        <p:txBody>
-          <a:bodyPr wrap="square">
-            <a:spAutoFit/>
-          </a:bodyPr>
-          <a:lstStyle/>
-          <a:p>
-            <a:pPr>
-              <a:spcAft>
-                <a:spcPts val="500"/>
-              </a:spcAft>
-              <a:defRPr sz="1200" b="1">
-                <a:solidFill>
-                  <a:srgbClr val="0284C7"/>
-                </a:solidFill>
-              </a:defRPr>
-            </a:pPr>
-            <a:r>
-              <a:t>2. Cloud Architecture, Firebase &amp; Rapid Delivery Workflows</a:t>
-            </a:r>
-          </a:p>
-          <a:p>
-            <a:pPr>
+                  <a:srgbClr val="64748B"/>
+                </a:solidFill>
+              </a:defRPr>
+            </a:pPr>
+            <a:r>
+              <a:t>  Architected and engineered a centralized cross-framework UI Design System using LitElement Web Components, React, AngularJS, Node.js, and npm packaging.</a:t>
+            </a:r>
+          </a:p>
+          <a:p>
+            <a:pPr>
+              <a:defRPr b="1" sz="1000">
+                <a:solidFill>
+                  <a:srgbClr val="0F172A"/>
+                </a:solidFill>
+              </a:defRPr>
+            </a:pPr>
+            <a:r>
+              <a:t>• Eliminated Duplication: </a:t>
+            </a:r>
+          </a:p>
+          <a:p>
+            <a:pPr>
+              <a:spcAft>
+                <a:spcPts val="600"/>
+              </a:spcAft>
               <a:defRPr sz="950">
                 <a:solidFill>
-                  <a:srgbClr val="1E293B"/>
-                </a:solidFill>
-              </a:defRPr>
-            </a:pPr>
-            <a:r>
-              <a:t>Set up scalable backend cloud services using GCP, Firebase, and Node.js microservices. Evaluated and optimized tech stacks for clients, drastically reducing delivery timelines for complex fintech and consumer applications while keeping cloud operating expenses lean.</a:t>
-            </a:r>
-          </a:p>
-        </p:txBody>
-      </p:sp>
-      <p:sp>
-        <p:nvSpPr>
-          <p:cNvPr id="12" name="Rounded Rectangle 11"/>
-          <p:cNvSpPr/>
-          <p:nvPr/>
-        </p:nvSpPr>
-        <p:spPr>
-          <a:xfrm>
-            <a:off x="4892040" y="4681728"/>
-            <a:ext cx="6565392" cy="1463040"/>
-          </a:xfrm>
-          <a:prstGeom prst="roundRect">
-            <a:avLst/>
-          </a:prstGeom>
-          <a:solidFill>
-            <a:srgbClr val="FFFFFF"/>
-          </a:solidFill>
-          <a:ln w="12700">
-            <a:solidFill>
-              <a:srgbClr val="E2E8F0"/>
-            </a:solidFill>
-          </a:ln>
-        </p:spPr>
-        <p:style>
-          <a:lnRef idx="1">
-            <a:schemeClr val="accent1"/>
-          </a:lnRef>
-          <a:fillRef idx="3">
-            <a:schemeClr val="accent1"/>
-          </a:fillRef>
-          <a:effectRef idx="2">
-            <a:schemeClr val="accent1"/>
-          </a:effectRef>
-          <a:fontRef idx="minor">
-            <a:schemeClr val="lt1"/>
-          </a:fontRef>
-        </p:style>
-        <p:txBody>
-          <a:bodyPr rtlCol="0" anchor="ctr"/>
-          <a:lstStyle/>
-          <a:p>
-            <a:pPr algn="ctr"/>
-          </a:p>
-        </p:txBody>
-      </p:sp>
-      <p:sp>
-        <p:nvSpPr>
-          <p:cNvPr id="13" name="TextBox 12"/>
-          <p:cNvSpPr txBox="1"/>
-          <p:nvPr/>
-        </p:nvSpPr>
-        <p:spPr>
-          <a:xfrm>
-            <a:off x="5074920" y="4818888"/>
-            <a:ext cx="6199632" cy="1188720"/>
-          </a:xfrm>
-          <a:prstGeom prst="rect">
-            <a:avLst/>
-          </a:prstGeom>
-          <a:noFill/>
-        </p:spPr>
-        <p:txBody>
-          <a:bodyPr wrap="square">
-            <a:spAutoFit/>
-          </a:bodyPr>
-          <a:lstStyle/>
-          <a:p>
-            <a:pPr>
-              <a:spcAft>
-                <a:spcPts val="500"/>
-              </a:spcAft>
-              <a:defRPr sz="1200" b="1">
-                <a:solidFill>
-                  <a:srgbClr val="0284C7"/>
-                </a:solidFill>
-              </a:defRPr>
-            </a:pPr>
-            <a:r>
-              <a:t>3. Modular Athlete &amp; Tournament Dashboards</a:t>
-            </a:r>
-          </a:p>
-          <a:p>
-            <a:pPr>
+                  <a:srgbClr val="64748B"/>
+                </a:solidFill>
+              </a:defRPr>
+            </a:pPr>
+            <a:r>
+              <a:t>  Stored all standardized UI components in a central repository, preventing teams from reinventing the wheel for new client projects.</a:t>
+            </a:r>
+          </a:p>
+          <a:p>
+            <a:pPr>
+              <a:defRPr b="1" sz="1000">
+                <a:solidFill>
+                  <a:srgbClr val="0F172A"/>
+                </a:solidFill>
+              </a:defRPr>
+            </a:pPr>
+            <a:r>
+              <a:t>• Unified Look &amp; Feel: </a:t>
+            </a:r>
+          </a:p>
+          <a:p>
+            <a:pPr>
+              <a:spcAft>
+                <a:spcPts val="600"/>
+              </a:spcAft>
               <a:defRPr sz="950">
                 <a:solidFill>
-                  <a:srgbClr val="1E293B"/>
-                </a:solidFill>
-              </a:defRPr>
-            </a:pPr>
-            <a:r>
-              <a:t>Designed modular dashboards integrating live statistics, tournament bracket generation (knockout, round-robin), court scheduling engines, and analytical insights, recognized for exceptional user experience and responsiveness.</a:t>
-            </a:r>
-          </a:p>
-        </p:txBody>
-      </p:sp>
-      <p:sp>
-        <p:nvSpPr>
-          <p:cNvPr id="14" name="TextBox 13"/>
+                  <a:srgbClr val="64748B"/>
+                </a:solidFill>
+              </a:defRPr>
+            </a:pPr>
+            <a:r>
+              <a:t>  Guaranteed visual consistency and brand coherence across all digital products from a single, shared codebase.</a:t>
+            </a:r>
+          </a:p>
+          <a:p>
+            <a:pPr>
+              <a:defRPr b="1" sz="1000">
+                <a:solidFill>
+                  <a:srgbClr val="0F172A"/>
+                </a:solidFill>
+              </a:defRPr>
+            </a:pPr>
+            <a:r>
+              <a:t>• Automated Upgradability: </a:t>
+            </a:r>
+          </a:p>
+          <a:p>
+            <a:pPr>
+              <a:spcAft>
+                <a:spcPts val="600"/>
+              </a:spcAft>
+              <a:defRPr sz="950">
+                <a:solidFill>
+                  <a:srgbClr val="64748B"/>
+                </a:solidFill>
+              </a:defRPr>
+            </a:pPr>
+            <a:r>
+              <a:t>  When the core component library is updated, client projects automatically inherit updates and enhancements via standard package management.</a:t>
+            </a:r>
+          </a:p>
+          <a:p>
+            <a:pPr>
+              <a:defRPr b="1" sz="1000">
+                <a:solidFill>
+                  <a:srgbClr val="0F172A"/>
+                </a:solidFill>
+              </a:defRPr>
+            </a:pPr>
+            <a:r>
+              <a:t>• Luxury Hotel Mobile App: </a:t>
+            </a:r>
+          </a:p>
+          <a:p>
+            <a:pPr>
+              <a:spcAft>
+                <a:spcPts val="600"/>
+              </a:spcAft>
+              <a:defRPr sz="950">
+                <a:solidFill>
+                  <a:srgbClr val="64748B"/>
+                </a:solidFill>
+              </a:defRPr>
+            </a:pPr>
+            <a:r>
+              <a:t>  Led mobile application development for a premier Indian hotel group (TLC Group of Hotels) built using Ionic and Angular.</a:t>
+            </a:r>
+          </a:p>
+        </p:txBody>
+      </p:sp>
+      <p:sp>
+        <p:nvSpPr>
+          <p:cNvPr id="10" name="TextBox 9"/>
           <p:cNvSpPr txBox="1"/>
           <p:nvPr/>
         </p:nvSpPr>
@@ -6854,7 +5540,7 @@
               </a:defRPr>
             </a:pPr>
             <a:r>
-              <a:t>Maheshchandra Hegde · Technical Work Experience &amp; Capability Presentation | Slide 4 of 11</a:t>
+              <a:t>Maheshchandra Hegde · Technical Work Experience Presentation | Slide 4 of 9</a:t>
             </a:r>
           </a:p>
         </p:txBody>
@@ -6950,7 +5636,7 @@
               </a:defRPr>
             </a:pPr>
             <a:r>
-              <a:t>GENERATIVE AI &amp; SPATIAL TECH</a:t>
+              <a:t>SECTION 2 · PROJECT EXPERIENCE (CLIENT GROUP 5)</a:t>
             </a:r>
           </a:p>
         </p:txBody>
@@ -6985,7 +5671,7 @@
               </a:defRPr>
             </a:pPr>
             <a:r>
-              <a:t>Spatial AI &amp; Generative 3D Pipelines: SrushtiLabs (Voxelforge AI) &amp; ayam3d</a:t>
+              <a:t>UST Global / CISCO: Stadium Vision Director Migration</a:t>
             </a:r>
           </a:p>
         </p:txBody>
@@ -7042,7 +5728,7 @@
         <p:spPr>
           <a:xfrm>
             <a:off x="731520" y="1463040"/>
-            <a:ext cx="5120640" cy="4754880"/>
+            <a:ext cx="4114800" cy="4754880"/>
           </a:xfrm>
           <a:prstGeom prst="roundRect">
             <a:avLst/>
@@ -7080,92 +5766,14 @@
       </p:sp>
       <p:sp>
         <p:nvSpPr>
-          <p:cNvPr id="7" name="Rectangle 6"/>
-          <p:cNvSpPr/>
-          <p:nvPr/>
-        </p:nvSpPr>
-        <p:spPr>
-          <a:xfrm>
-            <a:off x="740664" y="1472184"/>
-            <a:ext cx="5102352" cy="384048"/>
-          </a:xfrm>
-          <a:prstGeom prst="rect">
-            <a:avLst/>
-          </a:prstGeom>
-          <a:solidFill>
-            <a:srgbClr val="0E7490"/>
-          </a:solidFill>
-          <a:ln>
-            <a:noFill/>
-          </a:ln>
-        </p:spPr>
-        <p:style>
-          <a:lnRef idx="1">
-            <a:schemeClr val="accent1"/>
-          </a:lnRef>
-          <a:fillRef idx="3">
-            <a:schemeClr val="accent1"/>
-          </a:fillRef>
-          <a:effectRef idx="2">
-            <a:schemeClr val="accent1"/>
-          </a:effectRef>
-          <a:fontRef idx="minor">
-            <a:schemeClr val="lt1"/>
-          </a:fontRef>
-        </p:style>
-        <p:txBody>
-          <a:bodyPr rtlCol="0" anchor="ctr"/>
-          <a:lstStyle/>
-          <a:p>
-            <a:pPr algn="ctr"/>
-          </a:p>
-        </p:txBody>
-      </p:sp>
-      <p:sp>
-        <p:nvSpPr>
-          <p:cNvPr id="8" name="TextBox 7"/>
+          <p:cNvPr id="7" name="TextBox 6"/>
           <p:cNvSpPr txBox="1"/>
           <p:nvPr/>
         </p:nvSpPr>
         <p:spPr>
           <a:xfrm>
-            <a:off x="868680" y="1536192"/>
-            <a:ext cx="4846320" cy="320040"/>
-          </a:xfrm>
-          <a:prstGeom prst="rect">
-            <a:avLst/>
-          </a:prstGeom>
-          <a:noFill/>
-        </p:spPr>
-        <p:txBody>
-          <a:bodyPr wrap="none">
-            <a:spAutoFit/>
-          </a:bodyPr>
-          <a:lstStyle/>
-          <a:p>
-            <a:pPr>
-              <a:defRPr sz="1100" b="1">
-                <a:solidFill>
-                  <a:srgbClr val="FFFFFF"/>
-                </a:solidFill>
-              </a:defRPr>
-            </a:pPr>
-            <a:r>
-              <a:t>SRUSHTILABS · VOXELFORGE AI (srushtilabs.com/voxelforge/)</a:t>
-            </a:r>
-          </a:p>
-        </p:txBody>
-      </p:sp>
-      <p:sp>
-        <p:nvSpPr>
-          <p:cNvPr id="9" name="TextBox 8"/>
-          <p:cNvSpPr txBox="1"/>
-          <p:nvPr/>
-        </p:nvSpPr>
-        <p:spPr>
-          <a:xfrm>
-            <a:off x="914400" y="1965960"/>
-            <a:ext cx="4754880" cy="4114800"/>
+            <a:off x="960120" y="1645920"/>
+            <a:ext cx="3657600" cy="4389120"/>
           </a:xfrm>
           <a:prstGeom prst="rect">
             <a:avLst/>
@@ -7180,62 +5788,180 @@
           <a:p>
             <a:pPr>
               <a:spcAft>
+                <a:spcPts val="200"/>
+              </a:spcAft>
+              <a:defRPr sz="1700" b="1">
+                <a:solidFill>
+                  <a:srgbClr val="0F172A"/>
+                </a:solidFill>
+              </a:defRPr>
+            </a:pPr>
+            <a:r>
+              <a:t>Cisco Stadium Vision</a:t>
+            </a:r>
+          </a:p>
+          <a:p>
+            <a:pPr>
+              <a:spcAft>
+                <a:spcPts val="1000"/>
+              </a:spcAft>
+              <a:defRPr sz="1100" b="1">
+                <a:solidFill>
+                  <a:srgbClr val="0E7490"/>
+                </a:solidFill>
+              </a:defRPr>
+            </a:pPr>
+            <a:r>
+              <a:t>Stadium Vision Director Enterprise Platform</a:t>
+            </a:r>
+          </a:p>
+          <a:p>
+            <a:pPr>
+              <a:defRPr b="1" sz="1000">
+                <a:solidFill>
+                  <a:srgbClr val="0F172A"/>
+                </a:solidFill>
+              </a:defRPr>
+            </a:pPr>
+            <a:r>
+              <a:t>Role: </a:t>
+            </a:r>
+          </a:p>
+          <a:p>
+            <a:pPr>
+              <a:spcAft>
                 <a:spcPts val="600"/>
               </a:spcAft>
-              <a:defRPr sz="1250" b="1">
+              <a:defRPr sz="950">
+                <a:solidFill>
+                  <a:srgbClr val="64748B"/>
+                </a:solidFill>
+              </a:defRPr>
+            </a:pPr>
+            <a:r>
+              <a:t>Senior Analyst &amp; Associate Project Manager</a:t>
+            </a:r>
+          </a:p>
+          <a:p>
+            <a:pPr>
+              <a:defRPr b="1" sz="1000">
                 <a:solidFill>
                   <a:srgbClr val="0F172A"/>
                 </a:solidFill>
               </a:defRPr>
             </a:pPr>
             <a:r>
-              <a:t>Founder &amp; CTO, SrushtiLabs (srushtilabs.com)</a:t>
-            </a:r>
-          </a:p>
-          <a:p>
-            <a:pPr>
+              <a:t>Tenure: </a:t>
+            </a:r>
+          </a:p>
+          <a:p>
+            <a:pPr>
+              <a:spcAft>
+                <a:spcPts val="600"/>
+              </a:spcAft>
               <a:defRPr sz="950">
                 <a:solidFill>
-                  <a:srgbClr val="1E293B"/>
-                </a:solidFill>
-              </a:defRPr>
-            </a:pPr>
-            <a:r>
-              <a:t>• Current Headline: Founder &amp; CTO | Building AI-driven 3D asset platforms and spatial computing solutions @srushtilabs.com</a:t>
-            </a:r>
-            <a:br/>
-            <a:br/>
-            <a:r>
-              <a:t>• Live Application: srushtilabs.com/voxelforge/ — Developing AI-based workflows for generative 3D asset creation and modular bundle assembly.</a:t>
-            </a:r>
-            <a:br/>
-            <a:br/>
-            <a:r>
-              <a:t>• Modular Game-Ready Bundles: Generates optimized, low-poly modular 3D assets ready for immediate assembly in Unreal Engine, Unity, and real-time WebGL engines.</a:t>
-            </a:r>
-            <a:br/>
-            <a:br/>
-            <a:r>
-              <a:t>• Rapid Prototyping Pipeline: Bridges text/image prompts into 3D voxel geometry with automated UV unwrapping and texture generation, cutting 3D asset prototyping time from days to minutes.</a:t>
-            </a:r>
-            <a:br/>
-            <a:br/>
-            <a:r>
-              <a:t>• Lightweight In-Browser Rendering: Specifically engineered to deliver compact asset payloads that stream effortlessly into web browsers without requiring heavy GPU rendering workstations.</a:t>
-            </a:r>
-          </a:p>
-        </p:txBody>
-      </p:sp>
-      <p:sp>
-        <p:nvSpPr>
-          <p:cNvPr id="10" name="Rounded Rectangle 9"/>
+                  <a:srgbClr val="64748B"/>
+                </a:solidFill>
+              </a:defRPr>
+            </a:pPr>
+            <a:r>
+              <a:t>Feb 2015 – Feb 2019 (4+ Years Dedicated Tenure)</a:t>
+            </a:r>
+          </a:p>
+          <a:p>
+            <a:pPr>
+              <a:defRPr b="1" sz="1000">
+                <a:solidFill>
+                  <a:srgbClr val="0F172A"/>
+                </a:solidFill>
+              </a:defRPr>
+            </a:pPr>
+            <a:r>
+              <a:t>Client: </a:t>
+            </a:r>
+          </a:p>
+          <a:p>
+            <a:pPr>
+              <a:spcAft>
+                <a:spcPts val="600"/>
+              </a:spcAft>
+              <a:defRPr sz="950">
+                <a:solidFill>
+                  <a:srgbClr val="64748B"/>
+                </a:solidFill>
+              </a:defRPr>
+            </a:pPr>
+            <a:r>
+              <a:t>Cisco Systems India Private Limited via UST Global</a:t>
+            </a:r>
+          </a:p>
+          <a:p>
+            <a:pPr>
+              <a:defRPr b="1" sz="1000">
+                <a:solidFill>
+                  <a:srgbClr val="0F172A"/>
+                </a:solidFill>
+              </a:defRPr>
+            </a:pPr>
+            <a:r>
+              <a:t>Product Scope: </a:t>
+            </a:r>
+          </a:p>
+          <a:p>
+            <a:pPr>
+              <a:spcAft>
+                <a:spcPts val="600"/>
+              </a:spcAft>
+              <a:defRPr sz="950">
+                <a:solidFill>
+                  <a:srgbClr val="64748B"/>
+                </a:solidFill>
+              </a:defRPr>
+            </a:pPr>
+            <a:r>
+              <a:t>Centralized digital media, live video distribution, and dynamic stadium display management deployed at major international sporting arenas.</a:t>
+            </a:r>
+          </a:p>
+          <a:p>
+            <a:pPr>
+              <a:defRPr b="1" sz="1000">
+                <a:solidFill>
+                  <a:srgbClr val="0F172A"/>
+                </a:solidFill>
+              </a:defRPr>
+            </a:pPr>
+            <a:r>
+              <a:t>Core Mandate: </a:t>
+            </a:r>
+          </a:p>
+          <a:p>
+            <a:pPr>
+              <a:spcAft>
+                <a:spcPts val="600"/>
+              </a:spcAft>
+              <a:defRPr sz="950">
+                <a:solidFill>
+                  <a:srgbClr val="64748B"/>
+                </a:solidFill>
+              </a:defRPr>
+            </a:pPr>
+            <a:r>
+              <a:t>Modernize a massive legacy application suite with numerous active sub-applications and active global customers.</a:t>
+            </a:r>
+          </a:p>
+        </p:txBody>
+      </p:sp>
+      <p:sp>
+        <p:nvSpPr>
+          <p:cNvPr id="8" name="Rounded Rectangle 7"/>
           <p:cNvSpPr/>
           <p:nvPr/>
         </p:nvSpPr>
         <p:spPr>
           <a:xfrm>
-            <a:off x="6108192" y="1463040"/>
-            <a:ext cx="5349240" cy="2240280"/>
+            <a:off x="5074920" y="1463040"/>
+            <a:ext cx="6382512" cy="1463040"/>
           </a:xfrm>
           <a:prstGeom prst="roundRect">
             <a:avLst/>
@@ -7273,14 +5999,14 @@
       </p:sp>
       <p:sp>
         <p:nvSpPr>
-          <p:cNvPr id="11" name="TextBox 10"/>
+          <p:cNvPr id="9" name="TextBox 8"/>
           <p:cNvSpPr txBox="1"/>
           <p:nvPr/>
         </p:nvSpPr>
         <p:spPr>
           <a:xfrm>
-            <a:off x="6291072" y="1600200"/>
-            <a:ext cx="4983480" cy="2011680"/>
+            <a:off x="5257800" y="1600200"/>
+            <a:ext cx="6016752" cy="1188720"/>
           </a:xfrm>
           <a:prstGeom prst="rect">
             <a:avLst/>
@@ -7295,7 +6021,7 @@
           <a:p>
             <a:pPr>
               <a:spcAft>
-                <a:spcPts val="400"/>
+                <a:spcPts val="500"/>
               </a:spcAft>
               <a:defRPr sz="1200" b="1">
                 <a:solidFill>
@@ -7304,7 +6030,7 @@
               </a:defRPr>
             </a:pPr>
             <a:r>
-              <a:t>ayam3d — Advanced Mesh Synthesis &amp; Retopology</a:t>
+              <a:t>1. Phased Zero-Downtime Migration from Legacy Flash/Flex</a:t>
             </a:r>
           </a:p>
           <a:p>
@@ -7316,39 +6042,31 @@
               </a:defRPr>
             </a:pPr>
             <a:r>
-              <a:t>• Exploratory R&amp;D into automated 3D mesh synthesis, intelligent quad retopology, and PBR texture generation.</a:t>
-            </a:r>
-            <a:br/>
-            <a:r>
-              <a:t>• Converts complex, unorganized high-poly meshes into clean, lightweight geometry with preserved edge flow.</a:t>
-            </a:r>
-            <a:br/>
-            <a:r>
-              <a:t>• Solves real-time visualization challenges by creating Level of Detail (LOD) hierarchies for seamless 3D streaming.</a:t>
-            </a:r>
-          </a:p>
-        </p:txBody>
-      </p:sp>
-      <p:sp>
-        <p:nvSpPr>
-          <p:cNvPr id="12" name="Rounded Rectangle 11"/>
+              <a:t>The platform was originally built using Adobe Flash, Flex, and ActionScript. Took technical leadership in architecting and executing a phased migration to modern Angular and React modules without interrupting active stadium operations or breaking existing client workflows.</a:t>
+            </a:r>
+          </a:p>
+        </p:txBody>
+      </p:sp>
+      <p:sp>
+        <p:nvSpPr>
+          <p:cNvPr id="10" name="Rounded Rectangle 9"/>
           <p:cNvSpPr/>
           <p:nvPr/>
         </p:nvSpPr>
         <p:spPr>
           <a:xfrm>
-            <a:off x="6108192" y="3840480"/>
-            <a:ext cx="5349240" cy="2377440"/>
+            <a:off x="5074920" y="3072384"/>
+            <a:ext cx="6382512" cy="1463040"/>
           </a:xfrm>
           <a:prstGeom prst="roundRect">
             <a:avLst/>
           </a:prstGeom>
           <a:solidFill>
-            <a:srgbClr val="F0F9FF"/>
+            <a:srgbClr val="FFFFFF"/>
           </a:solidFill>
           <a:ln w="12700">
             <a:solidFill>
-              <a:srgbClr val="0284C7"/>
+              <a:srgbClr val="E2E8F0"/>
             </a:solidFill>
           </a:ln>
         </p:spPr>
@@ -7376,14 +6094,14 @@
       </p:sp>
       <p:sp>
         <p:nvSpPr>
-          <p:cNvPr id="13" name="TextBox 12"/>
+          <p:cNvPr id="11" name="TextBox 10"/>
           <p:cNvSpPr txBox="1"/>
           <p:nvPr/>
         </p:nvSpPr>
         <p:spPr>
           <a:xfrm>
-            <a:off x="6291072" y="3977639"/>
-            <a:ext cx="4983480" cy="2103120"/>
+            <a:off x="5257800" y="3209544"/>
+            <a:ext cx="6016752" cy="1188720"/>
           </a:xfrm>
           <a:prstGeom prst="rect">
             <a:avLst/>
@@ -7398,16 +6116,16 @@
           <a:p>
             <a:pPr>
               <a:spcAft>
-                <a:spcPts val="400"/>
-              </a:spcAft>
-              <a:defRPr sz="1150" b="1">
-                <a:solidFill>
-                  <a:srgbClr val="0E7490"/>
-                </a:solidFill>
-              </a:defRPr>
-            </a:pPr>
-            <a:r>
-              <a:t>Applied Value to Physical &amp; Digital Infrastructure</a:t>
+                <a:spcPts val="500"/>
+              </a:spcAft>
+              <a:defRPr sz="1200" b="1">
+                <a:solidFill>
+                  <a:srgbClr val="0284C7"/>
+                </a:solidFill>
+              </a:defRPr>
+            </a:pPr>
+            <a:r>
+              <a:t>2. Hybrid Interoperability &amp; Multi-Stack Engineering</a:t>
             </a:r>
           </a:p>
           <a:p>
@@ -7419,11 +6137,102 @@
               </a:defRPr>
             </a:pPr>
             <a:r>
-              <a:t>• Bridging Digital Twins with Web Applications: Enables lightweight 3D asset representations of physical spaces, facilities, and structures without multi-gigabyte download bottlenecks.</a:t>
-            </a:r>
-            <a:br/>
-            <a:r>
-              <a:t>• Practical Spatial Computing: Demonstrates deep technical competence in polygon reduction, coordinate systems, and automated 3D pipelines that directly benefit modern spatial workflows and digital engineering.</a:t>
+              <a:t>Maintained seamless interoperability between legacy components and modernized Single Page Application (SPA) modules using TypeScript, Angular, React, and Node.js backend services until complete deprecation was achieved.</a:t>
+            </a:r>
+          </a:p>
+        </p:txBody>
+      </p:sp>
+      <p:sp>
+        <p:nvSpPr>
+          <p:cNvPr id="12" name="Rounded Rectangle 11"/>
+          <p:cNvSpPr/>
+          <p:nvPr/>
+        </p:nvSpPr>
+        <p:spPr>
+          <a:xfrm>
+            <a:off x="5074920" y="4681728"/>
+            <a:ext cx="6382512" cy="1463040"/>
+          </a:xfrm>
+          <a:prstGeom prst="roundRect">
+            <a:avLst/>
+          </a:prstGeom>
+          <a:solidFill>
+            <a:srgbClr val="FFFFFF"/>
+          </a:solidFill>
+          <a:ln w="12700">
+            <a:solidFill>
+              <a:srgbClr val="E2E8F0"/>
+            </a:solidFill>
+          </a:ln>
+        </p:spPr>
+        <p:style>
+          <a:lnRef idx="1">
+            <a:schemeClr val="accent1"/>
+          </a:lnRef>
+          <a:fillRef idx="3">
+            <a:schemeClr val="accent1"/>
+          </a:fillRef>
+          <a:effectRef idx="2">
+            <a:schemeClr val="accent1"/>
+          </a:effectRef>
+          <a:fontRef idx="minor">
+            <a:schemeClr val="lt1"/>
+          </a:fontRef>
+        </p:style>
+        <p:txBody>
+          <a:bodyPr rtlCol="0" anchor="ctr"/>
+          <a:lstStyle/>
+          <a:p>
+            <a:pPr algn="ctr"/>
+          </a:p>
+        </p:txBody>
+      </p:sp>
+      <p:sp>
+        <p:nvSpPr>
+          <p:cNvPr id="13" name="TextBox 12"/>
+          <p:cNvSpPr txBox="1"/>
+          <p:nvPr/>
+        </p:nvSpPr>
+        <p:spPr>
+          <a:xfrm>
+            <a:off x="5257800" y="4818888"/>
+            <a:ext cx="6016752" cy="1188720"/>
+          </a:xfrm>
+          <a:prstGeom prst="rect">
+            <a:avLst/>
+          </a:prstGeom>
+          <a:noFill/>
+        </p:spPr>
+        <p:txBody>
+          <a:bodyPr wrap="square">
+            <a:spAutoFit/>
+          </a:bodyPr>
+          <a:lstStyle/>
+          <a:p>
+            <a:pPr>
+              <a:spcAft>
+                <a:spcPts val="500"/>
+              </a:spcAft>
+              <a:defRPr sz="1200" b="1">
+                <a:solidFill>
+                  <a:srgbClr val="0284C7"/>
+                </a:solidFill>
+              </a:defRPr>
+            </a:pPr>
+            <a:r>
+              <a:t>3. Sub-Application Management &amp; Sustained Excellence</a:t>
+            </a:r>
+          </a:p>
+          <a:p>
+            <a:pPr>
+              <a:defRPr sz="950">
+                <a:solidFill>
+                  <a:srgbClr val="1E293B"/>
+                </a:solidFill>
+              </a:defRPr>
+            </a:pPr>
+            <a:r>
+              <a:t>Governed multiple parallel UI sub-applications serving venue operators, technicians, and broadcast controllers. Awarded multiple Certificates of Excellence by UST Global (2015, 2016, 2018) for client-first commitment and outstanding delivery.</a:t>
             </a:r>
           </a:p>
         </p:txBody>
@@ -7458,7 +6267,7 @@
               </a:defRPr>
             </a:pPr>
             <a:r>
-              <a:t>Maheshchandra Hegde · Technical Work Experience &amp; Capability Presentation | Slide 5 of 11</a:t>
+              <a:t>Maheshchandra Hegde · Technical Work Experience Presentation | Slide 5 of 9</a:t>
             </a:r>
           </a:p>
         </p:txBody>
@@ -7554,7 +6363,7 @@
               </a:defRPr>
             </a:pPr>
             <a:r>
-              <a:t>3D VISUALIZATION TRACK RECORD</a:t>
+              <a:t>SECTION 2 · PROJECT EXPERIENCE (CLIENT GROUP 6)</a:t>
             </a:r>
           </a:p>
         </p:txBody>
@@ -7589,7 +6398,7 @@
               </a:defRPr>
             </a:pPr>
             <a:r>
-              <a:t>3D Visualizer Expert Pedigree: 50+ Projects, CAE Simulation &amp; Cisco Systems</a:t>
+              <a:t>ThoughtFocus Technologies: Aftermarket Parts 3D Explorer &amp; Enterprise Solutions</a:t>
             </a:r>
           </a:p>
         </p:txBody>
@@ -7646,7 +6455,7 @@
         <p:spPr>
           <a:xfrm>
             <a:off x="731520" y="1463040"/>
-            <a:ext cx="3401568" cy="4754880"/>
+            <a:ext cx="5230368" cy="4754880"/>
           </a:xfrm>
           <a:prstGeom prst="roundRect">
             <a:avLst/>
@@ -7690,8 +6499,8 @@
         </p:nvSpPr>
         <p:spPr>
           <a:xfrm>
-            <a:off x="868680" y="1600200"/>
-            <a:ext cx="3127248" cy="4480560"/>
+            <a:off x="914400" y="1645920"/>
+            <a:ext cx="4864608" cy="4389120"/>
           </a:xfrm>
           <a:prstGeom prst="rect">
             <a:avLst/>
@@ -7708,56 +6517,164 @@
               <a:spcAft>
                 <a:spcPts val="200"/>
               </a:spcAft>
-              <a:defRPr sz="1300" b="1">
-                <a:solidFill>
-                  <a:srgbClr val="0284C7"/>
-                </a:solidFill>
-              </a:defRPr>
-            </a:pPr>
-            <a:r>
-              <a:t>Architectural 3D &amp; Walkthroughs</a:t>
-            </a:r>
-          </a:p>
-          <a:p>
-            <a:pPr>
-              <a:spcAft>
-                <a:spcPts val="800"/>
-              </a:spcAft>
-              <a:defRPr sz="1000" b="1">
+              <a:defRPr sz="1700" b="1">
+                <a:solidFill>
+                  <a:srgbClr val="0F172A"/>
+                </a:solidFill>
+              </a:defRPr>
+            </a:pPr>
+            <a:r>
+              <a:t>Aftermarket Parts Explorer</a:t>
+            </a:r>
+          </a:p>
+          <a:p>
+            <a:pPr>
+              <a:spcAft>
+                <a:spcPts val="1200"/>
+              </a:spcAft>
+              <a:defRPr sz="1100" b="1">
                 <a:solidFill>
                   <a:srgbClr val="0E7490"/>
                 </a:solidFill>
               </a:defRPr>
             </a:pPr>
             <a:r>
-              <a:t>35+ Commercial &amp; Residential Projects</a:t>
-            </a:r>
-          </a:p>
-          <a:p>
-            <a:pPr>
-              <a:defRPr sz="900">
-                <a:solidFill>
-                  <a:srgbClr val="1E293B"/>
-                </a:solidFill>
-              </a:defRPr>
-            </a:pPr>
-            <a:r>
-              <a:t>• Working with Architect Father: Built foundational expertise interpreting 2D plans, elevations, and structural schematics into accurate 3D models.</a:t>
-            </a:r>
-            <a:br/>
-            <a:br/>
-            <a:r>
-              <a:t>• Photorealistic Visualizations: Produced photorealistic exterior and interior architectural renderings, lighting studies, and texture mappings.</a:t>
-            </a:r>
-            <a:br/>
-            <a:br/>
-            <a:r>
-              <a:t>• 3D Walkthrough Animations: Produced animated camera walkthroughs for real estate developers and commercial builders to visualize spaces prior to construction.</a:t>
-            </a:r>
-            <a:br/>
-            <a:br/>
-            <a:r>
-              <a:t>• CAD &amp; Drafting Precision: Hands-on mastery with CAD drafting tools, layer management, and dimensional accuracy.</a:t>
+              <a:t>UI Architect &amp; Tech Lead | Oct 2011 – Mar 2014</a:t>
+            </a:r>
+          </a:p>
+          <a:p>
+            <a:pPr>
+              <a:defRPr b="1" sz="1000">
+                <a:solidFill>
+                  <a:srgbClr val="0F172A"/>
+                </a:solidFill>
+              </a:defRPr>
+            </a:pPr>
+            <a:r>
+              <a:t>• Platform Scope: </a:t>
+            </a:r>
+          </a:p>
+          <a:p>
+            <a:pPr>
+              <a:spcAft>
+                <a:spcPts val="600"/>
+              </a:spcAft>
+              <a:defRPr sz="950">
+                <a:solidFill>
+                  <a:srgbClr val="64748B"/>
+                </a:solidFill>
+              </a:defRPr>
+            </a:pPr>
+            <a:r>
+              <a:t>  Massive parts marketplace serving aftermarket automotive &amp; industrial parts vendors and buyers.</a:t>
+            </a:r>
+          </a:p>
+          <a:p>
+            <a:pPr>
+              <a:defRPr b="1" sz="1000">
+                <a:solidFill>
+                  <a:srgbClr val="0F172A"/>
+                </a:solidFill>
+              </a:defRPr>
+            </a:pPr>
+            <a:r>
+              <a:t>• Scale &amp; Catalog: </a:t>
+            </a:r>
+          </a:p>
+          <a:p>
+            <a:pPr>
+              <a:spcAft>
+                <a:spcPts val="600"/>
+              </a:spcAft>
+              <a:defRPr sz="950">
+                <a:solidFill>
+                  <a:srgbClr val="64748B"/>
+                </a:solidFill>
+              </a:defRPr>
+            </a:pPr>
+            <a:r>
+              <a:t>  Supported millions of parts across hundreds of manufacturer catalogs with deep search capabilities.</a:t>
+            </a:r>
+          </a:p>
+          <a:p>
+            <a:pPr>
+              <a:defRPr b="1" sz="1000">
+                <a:solidFill>
+                  <a:srgbClr val="0F172A"/>
+                </a:solidFill>
+              </a:defRPr>
+            </a:pPr>
+            <a:r>
+              <a:t>• Interactive 3D Viewer: </a:t>
+            </a:r>
+          </a:p>
+          <a:p>
+            <a:pPr>
+              <a:spcAft>
+                <a:spcPts val="600"/>
+              </a:spcAft>
+              <a:defRPr sz="950">
+                <a:solidFill>
+                  <a:srgbClr val="64748B"/>
+                </a:solidFill>
+              </a:defRPr>
+            </a:pPr>
+            <a:r>
+              <a:t>  Architected an interactive 3D interface allowing buyers to inspect 3D models and dimensions of thousands of components before purchase.</a:t>
+            </a:r>
+          </a:p>
+          <a:p>
+            <a:pPr>
+              <a:defRPr b="1" sz="1000">
+                <a:solidFill>
+                  <a:srgbClr val="0F172A"/>
+                </a:solidFill>
+              </a:defRPr>
+            </a:pPr>
+            <a:r>
+              <a:t>• Full E-Commerce Flow: </a:t>
+            </a:r>
+          </a:p>
+          <a:p>
+            <a:pPr>
+              <a:spcAft>
+                <a:spcPts val="600"/>
+              </a:spcAft>
+              <a:defRPr sz="950">
+                <a:solidFill>
+                  <a:srgbClr val="64748B"/>
+                </a:solidFill>
+              </a:defRPr>
+            </a:pPr>
+            <a:r>
+              <a:t>  Integrated shopping cart, quotation workflows, and secure payment gateway integrations.</a:t>
+            </a:r>
+          </a:p>
+          <a:p>
+            <a:pPr>
+              <a:defRPr b="1" sz="1000">
+                <a:solidFill>
+                  <a:srgbClr val="0F172A"/>
+                </a:solidFill>
+              </a:defRPr>
+            </a:pPr>
+            <a:r>
+              <a:t>• Technologies Used: </a:t>
+            </a:r>
+          </a:p>
+          <a:p>
+            <a:pPr>
+              <a:spcAft>
+                <a:spcPts val="600"/>
+              </a:spcAft>
+              <a:defRPr sz="950">
+                <a:solidFill>
+                  <a:srgbClr val="64748B"/>
+                </a:solidFill>
+              </a:defRPr>
+            </a:pPr>
+            <a:r>
+              <a:t>  Adobe Flex, ActionScript, Mate architectural framework, HTML, CSS, and backend data services.</a:t>
             </a:r>
           </a:p>
         </p:txBody>
@@ -7770,8 +6687,8 @@
         </p:nvSpPr>
         <p:spPr>
           <a:xfrm>
-            <a:off x="4389120" y="1463040"/>
-            <a:ext cx="3401568" cy="4754880"/>
+            <a:off x="6217920" y="1463040"/>
+            <a:ext cx="5230368" cy="4754880"/>
           </a:xfrm>
           <a:prstGeom prst="roundRect">
             <a:avLst/>
@@ -7815,8 +6732,8 @@
         </p:nvSpPr>
         <p:spPr>
           <a:xfrm>
-            <a:off x="4526280" y="1600200"/>
-            <a:ext cx="3127248" cy="4480560"/>
+            <a:off x="6400800" y="1645920"/>
+            <a:ext cx="4864608" cy="4389120"/>
           </a:xfrm>
           <a:prstGeom prst="rect">
             <a:avLst/>
@@ -7833,188 +6750,171 @@
               <a:spcAft>
                 <a:spcPts val="200"/>
               </a:spcAft>
-              <a:defRPr sz="1300" b="1">
+              <a:defRPr sz="1700" b="1">
+                <a:solidFill>
+                  <a:srgbClr val="0F172A"/>
+                </a:solidFill>
+              </a:defRPr>
+            </a:pPr>
+            <a:r>
+              <a:t>Enterprise UI Solutions</a:t>
+            </a:r>
+          </a:p>
+          <a:p>
+            <a:pPr>
+              <a:spcAft>
+                <a:spcPts val="1200"/>
+              </a:spcAft>
+              <a:defRPr sz="1100" b="1">
                 <a:solidFill>
                   <a:srgbClr val="0284C7"/>
                 </a:solidFill>
               </a:defRPr>
             </a:pPr>
             <a:r>
-              <a:t>CAE Simulation Technologies</a:t>
-            </a:r>
-          </a:p>
-          <a:p>
-            <a:pPr>
-              <a:spcAft>
-                <a:spcPts val="800"/>
-              </a:spcAft>
-              <a:defRPr sz="1000" b="1">
-                <a:solidFill>
-                  <a:srgbClr val="0E7490"/>
-                </a:solidFill>
-              </a:defRPr>
-            </a:pPr>
-            <a:r>
-              <a:t>Visual Database Developer (2007 – 2008)</a:t>
-            </a:r>
-          </a:p>
-          <a:p>
-            <a:pPr>
-              <a:defRPr sz="900">
-                <a:solidFill>
-                  <a:srgbClr val="1E293B"/>
-                </a:solidFill>
-              </a:defRPr>
-            </a:pPr>
-            <a:r>
-              <a:t>• Flight Simulator Visual Databases: Created high-fidelity 3D model libraries for military and civil aircraft full-flight simulators.</a:t>
-            </a:r>
-            <a:br/>
-            <a:br/>
-            <a:r>
-              <a:t>• Real-Time Terrain Modeling: Built elevation terrain databases, runway markings, airport ground equipment, and navigation landmarks.</a:t>
-            </a:r>
-            <a:br/>
-            <a:br/>
-            <a:r>
-              <a:t>• Strict Polygon &amp; Memory Budgets: Developed real-time 3D models requiring deterministic frame rates (60 FPS locked) with zero visual pop-in or simulation stutter.</a:t>
-            </a:r>
-            <a:br/>
-            <a:br/>
-            <a:r>
-              <a:t>• Sensor &amp; Environmental Simulation: Modeled day/night transitions, weather effects, and infrared/night-vision sensor textures.</a:t>
-            </a:r>
-          </a:p>
-        </p:txBody>
-      </p:sp>
-      <p:sp>
-        <p:nvSpPr>
-          <p:cNvPr id="10" name="Rounded Rectangle 9"/>
-          <p:cNvSpPr/>
-          <p:nvPr/>
-        </p:nvSpPr>
-        <p:spPr>
-          <a:xfrm>
-            <a:off x="8046720" y="1463040"/>
-            <a:ext cx="3401568" cy="4754880"/>
-          </a:xfrm>
-          <a:prstGeom prst="roundRect">
-            <a:avLst/>
-          </a:prstGeom>
-          <a:solidFill>
-            <a:srgbClr val="FFFFFF"/>
-          </a:solidFill>
-          <a:ln w="12700">
-            <a:solidFill>
-              <a:srgbClr val="E2E8F0"/>
-            </a:solidFill>
-          </a:ln>
-        </p:spPr>
-        <p:style>
-          <a:lnRef idx="1">
-            <a:schemeClr val="accent1"/>
-          </a:lnRef>
-          <a:fillRef idx="3">
-            <a:schemeClr val="accent1"/>
-          </a:fillRef>
-          <a:effectRef idx="2">
-            <a:schemeClr val="accent1"/>
-          </a:effectRef>
-          <a:fontRef idx="minor">
-            <a:schemeClr val="lt1"/>
-          </a:fontRef>
-        </p:style>
-        <p:txBody>
-          <a:bodyPr rtlCol="0" anchor="ctr"/>
-          <a:lstStyle/>
-          <a:p>
-            <a:pPr algn="ctr"/>
-          </a:p>
-        </p:txBody>
-      </p:sp>
-      <p:sp>
-        <p:nvSpPr>
-          <p:cNvPr id="11" name="TextBox 10"/>
-          <p:cNvSpPr txBox="1"/>
-          <p:nvPr/>
-        </p:nvSpPr>
-        <p:spPr>
-          <a:xfrm>
-            <a:off x="8183879" y="1600200"/>
-            <a:ext cx="3127248" cy="4480560"/>
-          </a:xfrm>
-          <a:prstGeom prst="rect">
-            <a:avLst/>
-          </a:prstGeom>
-          <a:noFill/>
-        </p:spPr>
-        <p:txBody>
-          <a:bodyPr wrap="square">
-            <a:spAutoFit/>
-          </a:bodyPr>
-          <a:lstStyle/>
-          <a:p>
-            <a:pPr>
-              <a:spcAft>
-                <a:spcPts val="200"/>
-              </a:spcAft>
-              <a:defRPr sz="1300" b="1">
-                <a:solidFill>
-                  <a:srgbClr val="0284C7"/>
-                </a:solidFill>
-              </a:defRPr>
-            </a:pPr>
-            <a:r>
-              <a:t>Cisco Systems Dashboard</a:t>
-            </a:r>
-          </a:p>
-          <a:p>
-            <a:pPr>
-              <a:spcAft>
-                <a:spcPts val="800"/>
-              </a:spcAft>
-              <a:defRPr sz="1000" b="1">
-                <a:solidFill>
-                  <a:srgbClr val="0E7490"/>
-                </a:solidFill>
-              </a:defRPr>
-            </a:pPr>
-            <a:r>
-              <a:t>Facility Dashboard &amp; Smart Campus</a:t>
-            </a:r>
-          </a:p>
-          <a:p>
-            <a:pPr>
-              <a:defRPr sz="900">
-                <a:solidFill>
-                  <a:srgbClr val="1E293B"/>
-                </a:solidFill>
-              </a:defRPr>
-            </a:pPr>
-            <a:r>
-              <a:t>• Cisco Facility Dashboard (2009 – 2010): Designed and developed an interactive facility dashboard during full-time on-campus consulting at Cisco Bangalore.</a:t>
-            </a:r>
-            <a:br/>
-            <a:br/>
-            <a:r>
-              <a:t>• Physical Infrastructure Telemetry: Visualized data center rack layouts, campus power consumption, cooling metrics, and environmental sensor telemetry.</a:t>
-            </a:r>
-            <a:br/>
-            <a:br/>
-            <a:r>
-              <a:t>• Awarded Cisco Appreciation: Received formal recognition from Cisco leadership in 2010 for delivering intuitive, high-impact data visualization.</a:t>
-            </a:r>
-            <a:br/>
-            <a:br/>
-            <a:r>
-              <a:t>• Continued Cisco Collaboration: Managed multiple Angular dashboards and UI applications for Cisco Systems via UST Global (2015 – 2019).</a:t>
-            </a:r>
-          </a:p>
-        </p:txBody>
-      </p:sp>
-      <p:sp>
-        <p:nvSpPr>
-          <p:cNvPr id="12" name="TextBox 11"/>
+              <a:t>Prototyping &amp; Multi-Client Solutions Delivery</a:t>
+            </a:r>
+          </a:p>
+          <a:p>
+            <a:pPr>
+              <a:defRPr b="1" sz="1000">
+                <a:solidFill>
+                  <a:srgbClr val="0F172A"/>
+                </a:solidFill>
+              </a:defRPr>
+            </a:pPr>
+            <a:r>
+              <a:t>• Design-to-Code Pipeline: </a:t>
+            </a:r>
+          </a:p>
+          <a:p>
+            <a:pPr>
+              <a:spcAft>
+                <a:spcPts val="600"/>
+              </a:spcAft>
+              <a:defRPr sz="950">
+                <a:solidFill>
+                  <a:srgbClr val="64748B"/>
+                </a:solidFill>
+              </a:defRPr>
+            </a:pPr>
+            <a:r>
+              <a:t>  Established an early user involvement process—validating concepts with interactive mockups and prototypes prior to delivery.</a:t>
+            </a:r>
+          </a:p>
+          <a:p>
+            <a:pPr>
+              <a:defRPr b="1" sz="1000">
+                <a:solidFill>
+                  <a:srgbClr val="0F172A"/>
+                </a:solidFill>
+              </a:defRPr>
+            </a:pPr>
+            <a:r>
+              <a:t>• Enterprise Search App: </a:t>
+            </a:r>
+          </a:p>
+          <a:p>
+            <a:pPr>
+              <a:spcAft>
+                <a:spcPts val="600"/>
+              </a:spcAft>
+              <a:defRPr sz="950">
+                <a:solidFill>
+                  <a:srgbClr val="64748B"/>
+                </a:solidFill>
+              </a:defRPr>
+            </a:pPr>
+            <a:r>
+              <a:t>  Guided team to design and bootstrap a high-speed enterprise search application with advanced filtering and metadata indexing.</a:t>
+            </a:r>
+          </a:p>
+          <a:p>
+            <a:pPr>
+              <a:defRPr b="1" sz="1000">
+                <a:solidFill>
+                  <a:srgbClr val="0F172A"/>
+                </a:solidFill>
+              </a:defRPr>
+            </a:pPr>
+            <a:r>
+              <a:t>• Dairy / Milk Corporation App: </a:t>
+            </a:r>
+          </a:p>
+          <a:p>
+            <a:pPr>
+              <a:spcAft>
+                <a:spcPts val="600"/>
+              </a:spcAft>
+              <a:defRPr sz="950">
+                <a:solidFill>
+                  <a:srgbClr val="64748B"/>
+                </a:solidFill>
+              </a:defRPr>
+            </a:pPr>
+            <a:r>
+              <a:t>  Led the architecture and delivery of an operational management application for a large milk corporation handling distribution and supply logistics.</a:t>
+            </a:r>
+          </a:p>
+          <a:p>
+            <a:pPr>
+              <a:defRPr b="1" sz="1000">
+                <a:solidFill>
+                  <a:srgbClr val="0F172A"/>
+                </a:solidFill>
+              </a:defRPr>
+            </a:pPr>
+            <a:r>
+              <a:t>• Technology Stack: </a:t>
+            </a:r>
+          </a:p>
+          <a:p>
+            <a:pPr>
+              <a:spcAft>
+                <a:spcPts val="600"/>
+              </a:spcAft>
+              <a:defRPr sz="950">
+                <a:solidFill>
+                  <a:srgbClr val="64748B"/>
+                </a:solidFill>
+              </a:defRPr>
+            </a:pPr>
+            <a:r>
+              <a:t>  HTML, CSS, JavaScript, TypeScript, Adobe Flex, Flash, and early Single-Page Application patterns.</a:t>
+            </a:r>
+          </a:p>
+          <a:p>
+            <a:pPr>
+              <a:defRPr b="1" sz="1000">
+                <a:solidFill>
+                  <a:srgbClr val="0F172A"/>
+                </a:solidFill>
+              </a:defRPr>
+            </a:pPr>
+            <a:r>
+              <a:t>• Mentorship &amp; Guidance: </a:t>
+            </a:r>
+          </a:p>
+          <a:p>
+            <a:pPr>
+              <a:spcAft>
+                <a:spcPts val="600"/>
+              </a:spcAft>
+              <a:defRPr sz="950">
+                <a:solidFill>
+                  <a:srgbClr val="64748B"/>
+                </a:solidFill>
+              </a:defRPr>
+            </a:pPr>
+            <a:r>
+              <a:t>  Coached junior engineers on clean modular UI architecture and user-centered design standards.</a:t>
+            </a:r>
+          </a:p>
+        </p:txBody>
+      </p:sp>
+      <p:sp>
+        <p:nvSpPr>
+          <p:cNvPr id="10" name="TextBox 9"/>
           <p:cNvSpPr txBox="1"/>
           <p:nvPr/>
         </p:nvSpPr>
@@ -8042,7 +6942,7 @@
               </a:defRPr>
             </a:pPr>
             <a:r>
-              <a:t>Maheshchandra Hegde · Technical Work Experience &amp; Capability Presentation | Slide 6 of 11</a:t>
+              <a:t>Maheshchandra Hegde · Technical Work Experience Presentation | Slide 6 of 9</a:t>
             </a:r>
           </a:p>
         </p:txBody>
@@ -8138,7 +7038,7 @@
               </a:defRPr>
             </a:pPr>
             <a:r>
-              <a:t>LEADERSHIP &amp; EXECUTION</a:t>
+              <a:t>SECTION 2 · PROJECT EXPERIENCE (CLIENT GROUPS 7 &amp; 8)</a:t>
             </a:r>
           </a:p>
         </p:txBody>
@@ -8173,7 +7073,7 @@
               </a:defRPr>
             </a:pPr>
             <a:r>
-              <a:t>Core Responsibilities &amp; Technical Leadership Across 16+ Years</a:t>
+              <a:t>Cisco &amp; Vodafone BMS Dashboards &amp; Technoyana Specialized Engineering</a:t>
             </a:r>
           </a:p>
         </p:txBody>
@@ -8230,7 +7130,7 @@
         <p:spPr>
           <a:xfrm>
             <a:off x="731520" y="1463040"/>
-            <a:ext cx="5230368" cy="2240280"/>
+            <a:ext cx="5230368" cy="4754880"/>
           </a:xfrm>
           <a:prstGeom prst="roundRect">
             <a:avLst/>
@@ -8268,92 +7168,14 @@
       </p:sp>
       <p:sp>
         <p:nvSpPr>
-          <p:cNvPr id="7" name="Rectangle 6"/>
-          <p:cNvSpPr/>
-          <p:nvPr/>
-        </p:nvSpPr>
-        <p:spPr>
-          <a:xfrm>
-            <a:off x="740664" y="1472184"/>
-            <a:ext cx="5212080" cy="384048"/>
-          </a:xfrm>
-          <a:prstGeom prst="rect">
-            <a:avLst/>
-          </a:prstGeom>
-          <a:solidFill>
-            <a:srgbClr val="0284C7"/>
-          </a:solidFill>
-          <a:ln>
-            <a:noFill/>
-          </a:ln>
-        </p:spPr>
-        <p:style>
-          <a:lnRef idx="1">
-            <a:schemeClr val="accent1"/>
-          </a:lnRef>
-          <a:fillRef idx="3">
-            <a:schemeClr val="accent1"/>
-          </a:fillRef>
-          <a:effectRef idx="2">
-            <a:schemeClr val="accent1"/>
-          </a:effectRef>
-          <a:fontRef idx="minor">
-            <a:schemeClr val="lt1"/>
-          </a:fontRef>
-        </p:style>
-        <p:txBody>
-          <a:bodyPr rtlCol="0" anchor="ctr"/>
-          <a:lstStyle/>
-          <a:p>
-            <a:pPr algn="ctr"/>
-          </a:p>
-        </p:txBody>
-      </p:sp>
-      <p:sp>
-        <p:nvSpPr>
-          <p:cNvPr id="8" name="TextBox 7"/>
+          <p:cNvPr id="7" name="TextBox 6"/>
           <p:cNvSpPr txBox="1"/>
           <p:nvPr/>
         </p:nvSpPr>
         <p:spPr>
           <a:xfrm>
-            <a:off x="914400" y="1517904"/>
-            <a:ext cx="4864608" cy="320040"/>
-          </a:xfrm>
-          <a:prstGeom prst="rect">
-            <a:avLst/>
-          </a:prstGeom>
-          <a:noFill/>
-        </p:spPr>
-        <p:txBody>
-          <a:bodyPr wrap="none">
-            <a:spAutoFit/>
-          </a:bodyPr>
-          <a:lstStyle/>
-          <a:p>
-            <a:pPr>
-              <a:defRPr sz="1100" b="1">
-                <a:solidFill>
-                  <a:srgbClr val="FFFFFF"/>
-                </a:solidFill>
-              </a:defRPr>
-            </a:pPr>
-            <a:r>
-              <a:t>1. Scalable Architecture &amp; System Design</a:t>
-            </a:r>
-          </a:p>
-        </p:txBody>
-      </p:sp>
-      <p:sp>
-        <p:nvSpPr>
-          <p:cNvPr id="9" name="TextBox 8"/>
-          <p:cNvSpPr txBox="1"/>
-          <p:nvPr/>
-        </p:nvSpPr>
-        <p:spPr>
-          <a:xfrm>
-            <a:off x="914400" y="1901952"/>
-            <a:ext cx="4864608" cy="1737360"/>
+            <a:off x="914400" y="1645920"/>
+            <a:ext cx="4864608" cy="4389120"/>
           </a:xfrm>
           <a:prstGeom prst="rect">
             <a:avLst/>
@@ -8368,75 +7190,180 @@
           <a:p>
             <a:pPr>
               <a:spcAft>
-                <a:spcPts val="300"/>
+                <a:spcPts val="200"/>
+              </a:spcAft>
+              <a:defRPr sz="1700" b="1">
+                <a:solidFill>
+                  <a:srgbClr val="0F172A"/>
+                </a:solidFill>
+              </a:defRPr>
+            </a:pPr>
+            <a:r>
+              <a:t>Cisco &amp; Vodafone Dashboards</a:t>
+            </a:r>
+          </a:p>
+          <a:p>
+            <a:pPr>
+              <a:spcAft>
+                <a:spcPts val="1200"/>
+              </a:spcAft>
+              <a:defRPr sz="1100" b="1">
+                <a:solidFill>
+                  <a:srgbClr val="0E7490"/>
+                </a:solidFill>
+              </a:defRPr>
+            </a:pPr>
+            <a:r>
+              <a:t>Building Management Systems (BMS) Unified Interface</a:t>
+            </a:r>
+          </a:p>
+          <a:p>
+            <a:pPr>
+              <a:defRPr b="1" sz="1000">
+                <a:solidFill>
+                  <a:srgbClr val="0F172A"/>
+                </a:solidFill>
+              </a:defRPr>
+            </a:pPr>
+            <a:r>
+              <a:t>• Facility Dashboard at Cisco: </a:t>
+            </a:r>
+          </a:p>
+          <a:p>
+            <a:pPr>
+              <a:spcAft>
+                <a:spcPts val="600"/>
               </a:spcAft>
               <a:defRPr sz="950">
                 <a:solidFill>
-                  <a:srgbClr val="1E293B"/>
-                </a:solidFill>
-              </a:defRPr>
-            </a:pPr>
-            <a:r>
-              <a:t>• Architected enterprise frontend applications using React, Angular, and LitElement web components.</a:t>
-            </a:r>
-          </a:p>
-          <a:p>
-            <a:pPr>
-              <a:spcAft>
-                <a:spcPts val="300"/>
+                  <a:srgbClr val="64748B"/>
+                </a:solidFill>
+              </a:defRPr>
+            </a:pPr>
+            <a:r>
+              <a:t>  Designed and developed an interactive facility dashboard at Cisco Systems campus as a full-time consultant (2009–2010).</a:t>
+            </a:r>
+          </a:p>
+          <a:p>
+            <a:pPr>
+              <a:defRPr b="1" sz="1000">
+                <a:solidFill>
+                  <a:srgbClr val="0F172A"/>
+                </a:solidFill>
+              </a:defRPr>
+            </a:pPr>
+            <a:r>
+              <a:t>• Unified BMS Control: </a:t>
+            </a:r>
+          </a:p>
+          <a:p>
+            <a:pPr>
+              <a:spcAft>
+                <a:spcPts val="600"/>
               </a:spcAft>
               <a:defRPr sz="950">
                 <a:solidFill>
-                  <a:srgbClr val="1E293B"/>
-                </a:solidFill>
-              </a:defRPr>
-            </a:pPr>
-            <a:r>
-              <a:t>• Designed cross-platform UI Design Systems adopted across diverse development teams (Moonraft / TLC Hotels).</a:t>
-            </a:r>
-          </a:p>
-          <a:p>
-            <a:pPr>
-              <a:spcAft>
-                <a:spcPts val="300"/>
+                  <a:srgbClr val="64748B"/>
+                </a:solidFill>
+              </a:defRPr>
+            </a:pPr>
+            <a:r>
+              <a:t>  Connected to and visualized diverse Building Management Systems: Air Handling Units (AHUs), Variable Refrigerant Volume (VRVs), industrial chillers, and power meters.</a:t>
+            </a:r>
+          </a:p>
+          <a:p>
+            <a:pPr>
+              <a:defRPr b="1" sz="1000">
+                <a:solidFill>
+                  <a:srgbClr val="0F172A"/>
+                </a:solidFill>
+              </a:defRPr>
+            </a:pPr>
+            <a:r>
+              <a:t>• Environmental Telemetry: </a:t>
+            </a:r>
+          </a:p>
+          <a:p>
+            <a:pPr>
+              <a:spcAft>
+                <a:spcPts val="600"/>
               </a:spcAft>
               <a:defRPr sz="950">
                 <a:solidFill>
-                  <a:srgbClr val="1E293B"/>
-                </a:solidFill>
-              </a:defRPr>
-            </a:pPr>
-            <a:r>
-              <a:t>• Established robust contract boundaries using REST, WebSockets, and event-driven data streaming.</a:t>
-            </a:r>
-          </a:p>
-          <a:p>
-            <a:pPr>
-              <a:spcAft>
-                <a:spcPts val="300"/>
+                  <a:srgbClr val="64748B"/>
+                </a:solidFill>
+              </a:defRPr>
+            </a:pPr>
+            <a:r>
+              <a:t>  Provided facility managers with real-time operational status, thermal mapping, energy consumption, and alarm thresholds.</a:t>
+            </a:r>
+          </a:p>
+          <a:p>
+            <a:pPr>
+              <a:defRPr b="1" sz="1000">
+                <a:solidFill>
+                  <a:srgbClr val="0F172A"/>
+                </a:solidFill>
+              </a:defRPr>
+            </a:pPr>
+            <a:r>
+              <a:t>• Formal Cisco Recognition: </a:t>
+            </a:r>
+          </a:p>
+          <a:p>
+            <a:pPr>
+              <a:spcAft>
+                <a:spcPts val="600"/>
               </a:spcAft>
               <a:defRPr sz="950">
                 <a:solidFill>
-                  <a:srgbClr val="1E293B"/>
-                </a:solidFill>
-              </a:defRPr>
-            </a:pPr>
-            <a:r>
-              <a:t>• Evaluated and selected modern cloud and web tech stacks for rapid, scalable client product delivery.</a:t>
-            </a:r>
-          </a:p>
-        </p:txBody>
-      </p:sp>
-      <p:sp>
-        <p:nvSpPr>
-          <p:cNvPr id="10" name="Rounded Rectangle 9"/>
+                  <a:srgbClr val="64748B"/>
+                </a:solidFill>
+              </a:defRPr>
+            </a:pPr>
+            <a:r>
+              <a:t>  Received official Certificate of Appreciation from Cisco leadership in 2010 for outstanding visualization and operational utility.</a:t>
+            </a:r>
+          </a:p>
+          <a:p>
+            <a:pPr>
+              <a:defRPr b="1" sz="1000">
+                <a:solidFill>
+                  <a:srgbClr val="0F172A"/>
+                </a:solidFill>
+              </a:defRPr>
+            </a:pPr>
+            <a:r>
+              <a:t>• Vodafone Solutions: </a:t>
+            </a:r>
+          </a:p>
+          <a:p>
+            <a:pPr>
+              <a:spcAft>
+                <a:spcPts val="600"/>
+              </a:spcAft>
+              <a:defRPr sz="950">
+                <a:solidFill>
+                  <a:srgbClr val="64748B"/>
+                </a:solidFill>
+              </a:defRPr>
+            </a:pPr>
+            <a:r>
+              <a:t>  Delivered specialized data visualization dashboards for Vodafone operations to monitor network and facility metrics.</a:t>
+            </a:r>
+          </a:p>
+        </p:txBody>
+      </p:sp>
+      <p:sp>
+        <p:nvSpPr>
+          <p:cNvPr id="8" name="Rounded Rectangle 7"/>
           <p:cNvSpPr/>
           <p:nvPr/>
         </p:nvSpPr>
         <p:spPr>
           <a:xfrm>
             <a:off x="6217920" y="1463040"/>
-            <a:ext cx="5230368" cy="2240280"/>
+            <a:ext cx="5230368" cy="4754880"/>
           </a:xfrm>
           <a:prstGeom prst="roundRect">
             <a:avLst/>
@@ -8474,92 +7401,14 @@
       </p:sp>
       <p:sp>
         <p:nvSpPr>
-          <p:cNvPr id="11" name="Rectangle 10"/>
-          <p:cNvSpPr/>
-          <p:nvPr/>
-        </p:nvSpPr>
-        <p:spPr>
-          <a:xfrm>
-            <a:off x="6227064" y="1472184"/>
-            <a:ext cx="5212080" cy="384048"/>
-          </a:xfrm>
-          <a:prstGeom prst="rect">
-            <a:avLst/>
-          </a:prstGeom>
-          <a:solidFill>
-            <a:srgbClr val="0E7490"/>
-          </a:solidFill>
-          <a:ln>
-            <a:noFill/>
-          </a:ln>
-        </p:spPr>
-        <p:style>
-          <a:lnRef idx="1">
-            <a:schemeClr val="accent1"/>
-          </a:lnRef>
-          <a:fillRef idx="3">
-            <a:schemeClr val="accent1"/>
-          </a:fillRef>
-          <a:effectRef idx="2">
-            <a:schemeClr val="accent1"/>
-          </a:effectRef>
-          <a:fontRef idx="minor">
-            <a:schemeClr val="lt1"/>
-          </a:fontRef>
-        </p:style>
-        <p:txBody>
-          <a:bodyPr rtlCol="0" anchor="ctr"/>
-          <a:lstStyle/>
-          <a:p>
-            <a:pPr algn="ctr"/>
-          </a:p>
-        </p:txBody>
-      </p:sp>
-      <p:sp>
-        <p:nvSpPr>
-          <p:cNvPr id="12" name="TextBox 11"/>
+          <p:cNvPr id="9" name="TextBox 8"/>
           <p:cNvSpPr txBox="1"/>
           <p:nvPr/>
         </p:nvSpPr>
         <p:spPr>
           <a:xfrm>
-            <a:off x="6400800" y="1517904"/>
-            <a:ext cx="4864608" cy="320040"/>
-          </a:xfrm>
-          <a:prstGeom prst="rect">
-            <a:avLst/>
-          </a:prstGeom>
-          <a:noFill/>
-        </p:spPr>
-        <p:txBody>
-          <a:bodyPr wrap="none">
-            <a:spAutoFit/>
-          </a:bodyPr>
-          <a:lstStyle/>
-          <a:p>
-            <a:pPr>
-              <a:defRPr sz="1100" b="1">
-                <a:solidFill>
-                  <a:srgbClr val="FFFFFF"/>
-                </a:solidFill>
-              </a:defRPr>
-            </a:pPr>
-            <a:r>
-              <a:t>2. Operational Resilience &amp; High Reliability</a:t>
-            </a:r>
-          </a:p>
-        </p:txBody>
-      </p:sp>
-      <p:sp>
-        <p:nvSpPr>
-          <p:cNvPr id="13" name="TextBox 12"/>
-          <p:cNvSpPr txBox="1"/>
-          <p:nvPr/>
-        </p:nvSpPr>
-        <p:spPr>
-          <a:xfrm>
-            <a:off x="6400800" y="1901952"/>
-            <a:ext cx="4864608" cy="1737360"/>
+            <a:off x="6400800" y="1645920"/>
+            <a:ext cx="4864608" cy="4389120"/>
           </a:xfrm>
           <a:prstGeom prst="rect">
             <a:avLst/>
@@ -8574,480 +7423,173 @@
           <a:p>
             <a:pPr>
               <a:spcAft>
-                <a:spcPts val="300"/>
+                <a:spcPts val="200"/>
+              </a:spcAft>
+              <a:defRPr sz="1700" b="1">
+                <a:solidFill>
+                  <a:srgbClr val="0F172A"/>
+                </a:solidFill>
+              </a:defRPr>
+            </a:pPr>
+            <a:r>
+              <a:t>Specialized Engineering Projects</a:t>
+            </a:r>
+          </a:p>
+          <a:p>
+            <a:pPr>
+              <a:spcAft>
+                <a:spcPts val="1200"/>
+              </a:spcAft>
+              <a:defRPr sz="1100" b="1">
+                <a:solidFill>
+                  <a:srgbClr val="0284C7"/>
+                </a:solidFill>
+              </a:defRPr>
+            </a:pPr>
+            <a:r>
+              <a:t>CAD/CAM, CNC, 3D Visualization &amp; Mobile Products</a:t>
+            </a:r>
+          </a:p>
+          <a:p>
+            <a:pPr>
+              <a:defRPr b="1" sz="1000">
+                <a:solidFill>
+                  <a:srgbClr val="0F172A"/>
+                </a:solidFill>
+              </a:defRPr>
+            </a:pPr>
+            <a:r>
+              <a:t>• Architectural Visualization: </a:t>
+            </a:r>
+          </a:p>
+          <a:p>
+            <a:pPr>
+              <a:spcAft>
+                <a:spcPts val="600"/>
               </a:spcAft>
               <a:defRPr sz="950">
                 <a:solidFill>
-                  <a:srgbClr val="1E293B"/>
-                </a:solidFill>
-              </a:defRPr>
-            </a:pPr>
-            <a:r>
-              <a:t>• Architected zero-loss offline-first caching mechanisms (IndexedDB/Service Workers) for field use (Twitan).</a:t>
-            </a:r>
-          </a:p>
-          <a:p>
-            <a:pPr>
-              <a:spcAft>
-                <a:spcPts val="300"/>
+                  <a:srgbClr val="64748B"/>
+                </a:solidFill>
+              </a:defRPr>
+            </a:pPr>
+            <a:r>
+              <a:t>  Delivered multiple architectural 3D visualizations, spatial renderings, and walkthroughs for commercial and real estate projects.</a:t>
+            </a:r>
+          </a:p>
+          <a:p>
+            <a:pPr>
+              <a:defRPr b="1" sz="1000">
+                <a:solidFill>
+                  <a:srgbClr val="0F172A"/>
+                </a:solidFill>
+              </a:defRPr>
+            </a:pPr>
+            <a:r>
+              <a:t>• CAD/CAM &amp; CNC Development: </a:t>
+            </a:r>
+          </a:p>
+          <a:p>
+            <a:pPr>
+              <a:spcAft>
+                <a:spcPts val="600"/>
               </a:spcAft>
               <a:defRPr sz="950">
                 <a:solidFill>
-                  <a:srgbClr val="1E293B"/>
-                </a:solidFill>
-              </a:defRPr>
-            </a:pPr>
-            <a:r>
-              <a:t>• Engineered life-critical clinical UI rendering with zero memory leaks for 24/7 hospital ICU units (Philips ICCA).</a:t>
-            </a:r>
-          </a:p>
-          <a:p>
-            <a:pPr>
-              <a:spcAft>
-                <a:spcPts val="300"/>
+                  <a:srgbClr val="64748B"/>
+                </a:solidFill>
+              </a:defRPr>
+            </a:pPr>
+            <a:r>
+              <a:t>  Led customized CNC machine development and automated CAD/CAM toolpath pipelines, bridging physical fabrication with digital software.</a:t>
+            </a:r>
+          </a:p>
+          <a:p>
+            <a:pPr>
+              <a:defRPr b="1" sz="1000">
+                <a:solidFill>
+                  <a:srgbClr val="0F172A"/>
+                </a:solidFill>
+              </a:defRPr>
+            </a:pPr>
+            <a:r>
+              <a:t>• SellAny Mobile Marketplace: </a:t>
+            </a:r>
+          </a:p>
+          <a:p>
+            <a:pPr>
+              <a:spcAft>
+                <a:spcPts val="600"/>
               </a:spcAft>
               <a:defRPr sz="950">
                 <a:solidFill>
-                  <a:srgbClr val="1E293B"/>
-                </a:solidFill>
-              </a:defRPr>
-            </a:pPr>
-            <a:r>
-              <a:t>• Supervised cloud deployments on GCP, Firebase, and AWS with automated scaling and log monitoring.</a:t>
-            </a:r>
-          </a:p>
-          <a:p>
-            <a:pPr>
-              <a:spcAft>
-                <a:spcPts val="300"/>
+                  <a:srgbClr val="64748B"/>
+                </a:solidFill>
+              </a:defRPr>
+            </a:pPr>
+            <a:r>
+              <a:t>  Built and launched 'SellAny'—a consumer mobile application allowing users to list and sell items effortlessly.</a:t>
+            </a:r>
+          </a:p>
+          <a:p>
+            <a:pPr>
+              <a:defRPr b="1" sz="1000">
+                <a:solidFill>
+                  <a:srgbClr val="0F172A"/>
+                </a:solidFill>
+              </a:defRPr>
+            </a:pPr>
+            <a:r>
+              <a:t>• Payment Parking Mobile App: </a:t>
+            </a:r>
+          </a:p>
+          <a:p>
+            <a:pPr>
+              <a:spcAft>
+                <a:spcPts val="600"/>
               </a:spcAft>
               <a:defRPr sz="950">
                 <a:solidFill>
-                  <a:srgbClr val="1E293B"/>
-                </a:solidFill>
-              </a:defRPr>
-            </a:pPr>
-            <a:r>
-              <a:t>• Designed real-time fallback pipelines ensuring continuous operational availability during network drops.</a:t>
-            </a:r>
-          </a:p>
-        </p:txBody>
-      </p:sp>
-      <p:sp>
-        <p:nvSpPr>
-          <p:cNvPr id="14" name="Rounded Rectangle 13"/>
-          <p:cNvSpPr/>
-          <p:nvPr/>
-        </p:nvSpPr>
-        <p:spPr>
-          <a:xfrm>
-            <a:off x="731520" y="3931920"/>
-            <a:ext cx="5230368" cy="2240280"/>
-          </a:xfrm>
-          <a:prstGeom prst="roundRect">
-            <a:avLst/>
-          </a:prstGeom>
-          <a:solidFill>
-            <a:srgbClr val="FFFFFF"/>
-          </a:solidFill>
-          <a:ln w="12700">
-            <a:solidFill>
-              <a:srgbClr val="E2E8F0"/>
-            </a:solidFill>
-          </a:ln>
-        </p:spPr>
-        <p:style>
-          <a:lnRef idx="1">
-            <a:schemeClr val="accent1"/>
-          </a:lnRef>
-          <a:fillRef idx="3">
-            <a:schemeClr val="accent1"/>
-          </a:fillRef>
-          <a:effectRef idx="2">
-            <a:schemeClr val="accent1"/>
-          </a:effectRef>
-          <a:fontRef idx="minor">
-            <a:schemeClr val="lt1"/>
-          </a:fontRef>
-        </p:style>
-        <p:txBody>
-          <a:bodyPr rtlCol="0" anchor="ctr"/>
-          <a:lstStyle/>
-          <a:p>
-            <a:pPr algn="ctr"/>
-          </a:p>
-        </p:txBody>
-      </p:sp>
-      <p:sp>
-        <p:nvSpPr>
-          <p:cNvPr id="15" name="Rectangle 14"/>
-          <p:cNvSpPr/>
-          <p:nvPr/>
-        </p:nvSpPr>
-        <p:spPr>
-          <a:xfrm>
-            <a:off x="740664" y="3941064"/>
-            <a:ext cx="5212080" cy="384048"/>
-          </a:xfrm>
-          <a:prstGeom prst="rect">
-            <a:avLst/>
-          </a:prstGeom>
-          <a:solidFill>
-            <a:srgbClr val="D97706"/>
-          </a:solidFill>
-          <a:ln>
-            <a:noFill/>
-          </a:ln>
-        </p:spPr>
-        <p:style>
-          <a:lnRef idx="1">
-            <a:schemeClr val="accent1"/>
-          </a:lnRef>
-          <a:fillRef idx="3">
-            <a:schemeClr val="accent1"/>
-          </a:fillRef>
-          <a:effectRef idx="2">
-            <a:schemeClr val="accent1"/>
-          </a:effectRef>
-          <a:fontRef idx="minor">
-            <a:schemeClr val="lt1"/>
-          </a:fontRef>
-        </p:style>
-        <p:txBody>
-          <a:bodyPr rtlCol="0" anchor="ctr"/>
-          <a:lstStyle/>
-          <a:p>
-            <a:pPr algn="ctr"/>
-          </a:p>
-        </p:txBody>
-      </p:sp>
-      <p:sp>
-        <p:nvSpPr>
-          <p:cNvPr id="16" name="TextBox 15"/>
-          <p:cNvSpPr txBox="1"/>
-          <p:nvPr/>
-        </p:nvSpPr>
-        <p:spPr>
-          <a:xfrm>
-            <a:off x="914400" y="3986784"/>
-            <a:ext cx="4864608" cy="320040"/>
-          </a:xfrm>
-          <a:prstGeom prst="rect">
-            <a:avLst/>
-          </a:prstGeom>
-          <a:noFill/>
-        </p:spPr>
-        <p:txBody>
-          <a:bodyPr wrap="none">
-            <a:spAutoFit/>
-          </a:bodyPr>
-          <a:lstStyle/>
-          <a:p>
-            <a:pPr>
-              <a:defRPr sz="1100" b="1">
-                <a:solidFill>
-                  <a:srgbClr val="FFFFFF"/>
-                </a:solidFill>
-              </a:defRPr>
-            </a:pPr>
-            <a:r>
-              <a:t>3. Spatial Computing &amp; 3D Asset Pipelines</a:t>
-            </a:r>
-          </a:p>
-        </p:txBody>
-      </p:sp>
-      <p:sp>
-        <p:nvSpPr>
-          <p:cNvPr id="17" name="TextBox 16"/>
-          <p:cNvSpPr txBox="1"/>
-          <p:nvPr/>
-        </p:nvSpPr>
-        <p:spPr>
-          <a:xfrm>
-            <a:off x="914400" y="4370832"/>
-            <a:ext cx="4864608" cy="1737360"/>
-          </a:xfrm>
-          <a:prstGeom prst="rect">
-            <a:avLst/>
-          </a:prstGeom>
-          <a:noFill/>
-        </p:spPr>
-        <p:txBody>
-          <a:bodyPr wrap="square">
-            <a:spAutoFit/>
-          </a:bodyPr>
-          <a:lstStyle/>
-          <a:p>
-            <a:pPr>
-              <a:spcAft>
-                <a:spcPts val="300"/>
+                  <a:srgbClr val="64748B"/>
+                </a:solidFill>
+              </a:defRPr>
+            </a:pPr>
+            <a:r>
+              <a:t>  Led an engineering team to develop an automated parking payment mobile application with real-time slot occupancy tracking.</a:t>
+            </a:r>
+          </a:p>
+          <a:p>
+            <a:pPr>
+              <a:defRPr b="1" sz="1000">
+                <a:solidFill>
+                  <a:srgbClr val="0F172A"/>
+                </a:solidFill>
+              </a:defRPr>
+            </a:pPr>
+            <a:r>
+              <a:t>• Flight Simulation Visuals (CAE): </a:t>
+            </a:r>
+          </a:p>
+          <a:p>
+            <a:pPr>
+              <a:spcAft>
+                <a:spcPts val="600"/>
               </a:spcAft>
               <a:defRPr sz="950">
                 <a:solidFill>
-                  <a:srgbClr val="1E293B"/>
-                </a:solidFill>
-              </a:defRPr>
-            </a:pPr>
-            <a:r>
-              <a:t>• Developed AI-assisted workflows (Voxelforge AI) for modular low-poly 3D asset generation (Unreal / Unity / WebGL).</a:t>
-            </a:r>
-          </a:p>
-          <a:p>
-            <a:pPr>
-              <a:spcAft>
-                <a:spcPts val="300"/>
-              </a:spcAft>
-              <a:defRPr sz="950">
-                <a:solidFill>
-                  <a:srgbClr val="1E293B"/>
-                </a:solidFill>
-              </a:defRPr>
-            </a:pPr>
-            <a:r>
-              <a:t>• Directed R&amp;D in automated 3D mesh retopology and PBR texture generation for lightweight web streaming (ayam3d).</a:t>
-            </a:r>
-          </a:p>
-          <a:p>
-            <a:pPr>
-              <a:spcAft>
-                <a:spcPts val="300"/>
-              </a:spcAft>
-              <a:defRPr sz="950">
-                <a:solidFill>
-                  <a:srgbClr val="1E293B"/>
-                </a:solidFill>
-              </a:defRPr>
-            </a:pPr>
-            <a:r>
-              <a:t>• Created real-time 3D flight simulator databases with strict polygon and frame rate budgets (CAE).</a:t>
-            </a:r>
-          </a:p>
-          <a:p>
-            <a:pPr>
-              <a:spcAft>
-                <a:spcPts val="300"/>
-              </a:spcAft>
-              <a:defRPr sz="950">
-                <a:solidFill>
-                  <a:srgbClr val="1E293B"/>
-                </a:solidFill>
-              </a:defRPr>
-            </a:pPr>
-            <a:r>
-              <a:t>• Built interactive 3D facility and infrastructure monitoring dashboards (Cisco Systems).</a:t>
-            </a:r>
-          </a:p>
-        </p:txBody>
-      </p:sp>
-      <p:sp>
-        <p:nvSpPr>
-          <p:cNvPr id="18" name="Rounded Rectangle 17"/>
-          <p:cNvSpPr/>
-          <p:nvPr/>
-        </p:nvSpPr>
-        <p:spPr>
-          <a:xfrm>
-            <a:off x="6217920" y="3931920"/>
-            <a:ext cx="5230368" cy="2240280"/>
-          </a:xfrm>
-          <a:prstGeom prst="roundRect">
-            <a:avLst/>
-          </a:prstGeom>
-          <a:solidFill>
-            <a:srgbClr val="FFFFFF"/>
-          </a:solidFill>
-          <a:ln w="12700">
-            <a:solidFill>
-              <a:srgbClr val="E2E8F0"/>
-            </a:solidFill>
-          </a:ln>
-        </p:spPr>
-        <p:style>
-          <a:lnRef idx="1">
-            <a:schemeClr val="accent1"/>
-          </a:lnRef>
-          <a:fillRef idx="3">
-            <a:schemeClr val="accent1"/>
-          </a:fillRef>
-          <a:effectRef idx="2">
-            <a:schemeClr val="accent1"/>
-          </a:effectRef>
-          <a:fontRef idx="minor">
-            <a:schemeClr val="lt1"/>
-          </a:fontRef>
-        </p:style>
-        <p:txBody>
-          <a:bodyPr rtlCol="0" anchor="ctr"/>
-          <a:lstStyle/>
-          <a:p>
-            <a:pPr algn="ctr"/>
-          </a:p>
-        </p:txBody>
-      </p:sp>
-      <p:sp>
-        <p:nvSpPr>
-          <p:cNvPr id="19" name="Rectangle 18"/>
-          <p:cNvSpPr/>
-          <p:nvPr/>
-        </p:nvSpPr>
-        <p:spPr>
-          <a:xfrm>
-            <a:off x="6227064" y="3941064"/>
-            <a:ext cx="5212080" cy="384048"/>
-          </a:xfrm>
-          <a:prstGeom prst="rect">
-            <a:avLst/>
-          </a:prstGeom>
-          <a:solidFill>
-            <a:srgbClr val="109563"/>
-          </a:solidFill>
-          <a:ln>
-            <a:noFill/>
-          </a:ln>
-        </p:spPr>
-        <p:style>
-          <a:lnRef idx="1">
-            <a:schemeClr val="accent1"/>
-          </a:lnRef>
-          <a:fillRef idx="3">
-            <a:schemeClr val="accent1"/>
-          </a:fillRef>
-          <a:effectRef idx="2">
-            <a:schemeClr val="accent1"/>
-          </a:effectRef>
-          <a:fontRef idx="minor">
-            <a:schemeClr val="lt1"/>
-          </a:fontRef>
-        </p:style>
-        <p:txBody>
-          <a:bodyPr rtlCol="0" anchor="ctr"/>
-          <a:lstStyle/>
-          <a:p>
-            <a:pPr algn="ctr"/>
-          </a:p>
-        </p:txBody>
-      </p:sp>
-      <p:sp>
-        <p:nvSpPr>
-          <p:cNvPr id="20" name="TextBox 19"/>
-          <p:cNvSpPr txBox="1"/>
-          <p:nvPr/>
-        </p:nvSpPr>
-        <p:spPr>
-          <a:xfrm>
-            <a:off x="6400800" y="3986784"/>
-            <a:ext cx="4864608" cy="320040"/>
-          </a:xfrm>
-          <a:prstGeom prst="rect">
-            <a:avLst/>
-          </a:prstGeom>
-          <a:noFill/>
-        </p:spPr>
-        <p:txBody>
-          <a:bodyPr wrap="none">
-            <a:spAutoFit/>
-          </a:bodyPr>
-          <a:lstStyle/>
-          <a:p>
-            <a:pPr>
-              <a:defRPr sz="1100" b="1">
-                <a:solidFill>
-                  <a:srgbClr val="FFFFFF"/>
-                </a:solidFill>
-              </a:defRPr>
-            </a:pPr>
-            <a:r>
-              <a:t>4. Agile Leadership, Mentorship &amp; Delivery</a:t>
-            </a:r>
-          </a:p>
-        </p:txBody>
-      </p:sp>
-      <p:sp>
-        <p:nvSpPr>
-          <p:cNvPr id="21" name="TextBox 20"/>
-          <p:cNvSpPr txBox="1"/>
-          <p:nvPr/>
-        </p:nvSpPr>
-        <p:spPr>
-          <a:xfrm>
-            <a:off x="6400800" y="4370832"/>
-            <a:ext cx="4864608" cy="1737360"/>
-          </a:xfrm>
-          <a:prstGeom prst="rect">
-            <a:avLst/>
-          </a:prstGeom>
-          <a:noFill/>
-        </p:spPr>
-        <p:txBody>
-          <a:bodyPr wrap="square">
-            <a:spAutoFit/>
-          </a:bodyPr>
-          <a:lstStyle/>
-          <a:p>
-            <a:pPr>
-              <a:spcAft>
-                <a:spcPts val="300"/>
-              </a:spcAft>
-              <a:defRPr sz="950">
-                <a:solidFill>
-                  <a:srgbClr val="1E293B"/>
-                </a:solidFill>
-              </a:defRPr>
-            </a:pPr>
-            <a:r>
-              <a:t>• Led, mentored, and inspired cross-functional engineering squads of developers, UX designers, and QA analysts.</a:t>
-            </a:r>
-          </a:p>
-          <a:p>
-            <a:pPr>
-              <a:spcAft>
-                <a:spcPts val="300"/>
-              </a:spcAft>
-              <a:defRPr sz="950">
-                <a:solidFill>
-                  <a:srgbClr val="1E293B"/>
-                </a:solidFill>
-              </a:defRPr>
-            </a:pPr>
-            <a:r>
-              <a:t>• Instituted design-to-code pipelines involving users early through rapid prototypes and usability feedback.</a:t>
-            </a:r>
-          </a:p>
-          <a:p>
-            <a:pPr>
-              <a:spcAft>
-                <a:spcPts val="300"/>
-              </a:spcAft>
-              <a:defRPr sz="950">
-                <a:solidFill>
-                  <a:srgbClr val="1E293B"/>
-                </a:solidFill>
-              </a:defRPr>
-            </a:pPr>
-            <a:r>
-              <a:t>• Managed client deliverables, stakeholder communication, sprint planning, and engineering velocity.</a:t>
-            </a:r>
-          </a:p>
-          <a:p>
-            <a:pPr>
-              <a:spcAft>
-                <a:spcPts val="300"/>
-              </a:spcAft>
-              <a:defRPr sz="950">
-                <a:solidFill>
-                  <a:srgbClr val="1E293B"/>
-                </a:solidFill>
-              </a:defRPr>
-            </a:pPr>
-            <a:r>
-              <a:t>• Recipient of multiple corporate excellence awards at UST Global and Cisco for leadership and client commitment.</a:t>
-            </a:r>
-          </a:p>
-        </p:txBody>
-      </p:sp>
-      <p:sp>
-        <p:nvSpPr>
-          <p:cNvPr id="22" name="TextBox 21"/>
+                  <a:srgbClr val="64748B"/>
+                </a:solidFill>
+              </a:defRPr>
+            </a:pPr>
+            <a:r>
+              <a:t>  Visual Database Developer creating 3D terrain and aircraft simulation databases under locked 60 FPS budgets.</a:t>
+            </a:r>
+          </a:p>
+        </p:txBody>
+      </p:sp>
+      <p:sp>
+        <p:nvSpPr>
+          <p:cNvPr id="10" name="TextBox 9"/>
           <p:cNvSpPr txBox="1"/>
           <p:nvPr/>
         </p:nvSpPr>
@@ -9075,7 +7617,7 @@
               </a:defRPr>
             </a:pPr>
             <a:r>
-              <a:t>Maheshchandra Hegde · Technical Work Experience &amp; Capability Presentation | Slide 7 of 11</a:t>
+              <a:t>Maheshchandra Hegde · Technical Work Experience Presentation | Slide 7 of 9</a:t>
             </a:r>
           </a:p>
         </p:txBody>
@@ -9171,7 +7713,7 @@
               </a:defRPr>
             </a:pPr>
             <a:r>
-              <a:t>MILESTONES &amp; RECOGNITION</a:t>
+              <a:t>COMPREHENSIVE SKILLSET MATRIX</a:t>
             </a:r>
           </a:p>
         </p:txBody>
@@ -9206,7 +7748,7 @@
               </a:defRPr>
             </a:pPr>
             <a:r>
-              <a:t>Major Achievements, Proven Track Record &amp; Formal Acknowledgements</a:t>
+              <a:t>Technical &amp; Managerial Mastery Across 18+ Years of Delivery</a:t>
             </a:r>
           </a:p>
         </p:txBody>
@@ -9263,447 +7805,7 @@
         <p:spPr>
           <a:xfrm>
             <a:off x="731520" y="1463040"/>
-            <a:ext cx="2542032" cy="1371600"/>
-          </a:xfrm>
-          <a:prstGeom prst="roundRect">
-            <a:avLst/>
-          </a:prstGeom>
-          <a:solidFill>
-            <a:srgbClr val="FFFFFF"/>
-          </a:solidFill>
-          <a:ln w="12700">
-            <a:solidFill>
-              <a:srgbClr val="0284C7"/>
-            </a:solidFill>
-          </a:ln>
-        </p:spPr>
-        <p:style>
-          <a:lnRef idx="1">
-            <a:schemeClr val="accent1"/>
-          </a:lnRef>
-          <a:fillRef idx="3">
-            <a:schemeClr val="accent1"/>
-          </a:fillRef>
-          <a:effectRef idx="2">
-            <a:schemeClr val="accent1"/>
-          </a:effectRef>
-          <a:fontRef idx="minor">
-            <a:schemeClr val="lt1"/>
-          </a:fontRef>
-        </p:style>
-        <p:txBody>
-          <a:bodyPr rtlCol="0" anchor="ctr"/>
-          <a:lstStyle/>
-          <a:p>
-            <a:pPr algn="ctr"/>
-          </a:p>
-        </p:txBody>
-      </p:sp>
-      <p:sp>
-        <p:nvSpPr>
-          <p:cNvPr id="7" name="TextBox 6"/>
-          <p:cNvSpPr txBox="1"/>
-          <p:nvPr/>
-        </p:nvSpPr>
-        <p:spPr>
-          <a:xfrm>
-            <a:off x="841248" y="1572768"/>
-            <a:ext cx="2322576" cy="1152144"/>
-          </a:xfrm>
-          <a:prstGeom prst="rect">
-            <a:avLst/>
-          </a:prstGeom>
-          <a:noFill/>
-        </p:spPr>
-        <p:txBody>
-          <a:bodyPr wrap="square">
-            <a:spAutoFit/>
-          </a:bodyPr>
-          <a:lstStyle/>
-          <a:p>
-            <a:pPr>
-              <a:spcAft>
-                <a:spcPts val="200"/>
-              </a:spcAft>
-              <a:defRPr sz="2200" b="1">
-                <a:solidFill>
-                  <a:srgbClr val="0284C7"/>
-                </a:solidFill>
-              </a:defRPr>
-            </a:pPr>
-            <a:r>
-              <a:t>16+ Years</a:t>
-            </a:r>
-          </a:p>
-          <a:p>
-            <a:pPr>
-              <a:spcAft>
-                <a:spcPts val="200"/>
-              </a:spcAft>
-              <a:defRPr sz="1000" b="1">
-                <a:solidFill>
-                  <a:srgbClr val="0F172A"/>
-                </a:solidFill>
-              </a:defRPr>
-            </a:pPr>
-            <a:r>
-              <a:t>Professional Track Record</a:t>
-            </a:r>
-          </a:p>
-          <a:p>
-            <a:pPr>
-              <a:defRPr sz="850">
-                <a:solidFill>
-                  <a:srgbClr val="64748B"/>
-                </a:solidFill>
-              </a:defRPr>
-            </a:pPr>
-            <a:r>
-              <a:t>Extensive leadership across enterprise software, healthcare, startups &amp; 3D tech</a:t>
-            </a:r>
-          </a:p>
-        </p:txBody>
-      </p:sp>
-      <p:sp>
-        <p:nvSpPr>
-          <p:cNvPr id="8" name="Rounded Rectangle 7"/>
-          <p:cNvSpPr/>
-          <p:nvPr/>
-        </p:nvSpPr>
-        <p:spPr>
-          <a:xfrm>
-            <a:off x="3456432" y="1463040"/>
-            <a:ext cx="2542032" cy="1371600"/>
-          </a:xfrm>
-          <a:prstGeom prst="roundRect">
-            <a:avLst/>
-          </a:prstGeom>
-          <a:solidFill>
-            <a:srgbClr val="FFFFFF"/>
-          </a:solidFill>
-          <a:ln w="12700">
-            <a:solidFill>
-              <a:srgbClr val="0284C7"/>
-            </a:solidFill>
-          </a:ln>
-        </p:spPr>
-        <p:style>
-          <a:lnRef idx="1">
-            <a:schemeClr val="accent1"/>
-          </a:lnRef>
-          <a:fillRef idx="3">
-            <a:schemeClr val="accent1"/>
-          </a:fillRef>
-          <a:effectRef idx="2">
-            <a:schemeClr val="accent1"/>
-          </a:effectRef>
-          <a:fontRef idx="minor">
-            <a:schemeClr val="lt1"/>
-          </a:fontRef>
-        </p:style>
-        <p:txBody>
-          <a:bodyPr rtlCol="0" anchor="ctr"/>
-          <a:lstStyle/>
-          <a:p>
-            <a:pPr algn="ctr"/>
-          </a:p>
-        </p:txBody>
-      </p:sp>
-      <p:sp>
-        <p:nvSpPr>
-          <p:cNvPr id="9" name="TextBox 8"/>
-          <p:cNvSpPr txBox="1"/>
-          <p:nvPr/>
-        </p:nvSpPr>
-        <p:spPr>
-          <a:xfrm>
-            <a:off x="3566160" y="1572768"/>
-            <a:ext cx="2322576" cy="1152144"/>
-          </a:xfrm>
-          <a:prstGeom prst="rect">
-            <a:avLst/>
-          </a:prstGeom>
-          <a:noFill/>
-        </p:spPr>
-        <p:txBody>
-          <a:bodyPr wrap="square">
-            <a:spAutoFit/>
-          </a:bodyPr>
-          <a:lstStyle/>
-          <a:p>
-            <a:pPr>
-              <a:spcAft>
-                <a:spcPts val="200"/>
-              </a:spcAft>
-              <a:defRPr sz="2200" b="1">
-                <a:solidFill>
-                  <a:srgbClr val="0284C7"/>
-                </a:solidFill>
-              </a:defRPr>
-            </a:pPr>
-            <a:r>
-              <a:t>50+ Projects</a:t>
-            </a:r>
-          </a:p>
-          <a:p>
-            <a:pPr>
-              <a:spcAft>
-                <a:spcPts val="200"/>
-              </a:spcAft>
-              <a:defRPr sz="1000" b="1">
-                <a:solidFill>
-                  <a:srgbClr val="0F172A"/>
-                </a:solidFill>
-              </a:defRPr>
-            </a:pPr>
-            <a:r>
-              <a:t>3D &amp; Visualization Portfolio</a:t>
-            </a:r>
-          </a:p>
-          <a:p>
-            <a:pPr>
-              <a:defRPr sz="850">
-                <a:solidFill>
-                  <a:srgbClr val="64748B"/>
-                </a:solidFill>
-              </a:defRPr>
-            </a:pPr>
-            <a:r>
-              <a:t>Delivered across architectural visualization, CAD, flight simulation &amp; spatial AI</a:t>
-            </a:r>
-          </a:p>
-        </p:txBody>
-      </p:sp>
-      <p:sp>
-        <p:nvSpPr>
-          <p:cNvPr id="10" name="Rounded Rectangle 9"/>
-          <p:cNvSpPr/>
-          <p:nvPr/>
-        </p:nvSpPr>
-        <p:spPr>
-          <a:xfrm>
-            <a:off x="6181344" y="1463040"/>
-            <a:ext cx="2542032" cy="1371600"/>
-          </a:xfrm>
-          <a:prstGeom prst="roundRect">
-            <a:avLst/>
-          </a:prstGeom>
-          <a:solidFill>
-            <a:srgbClr val="FFFFFF"/>
-          </a:solidFill>
-          <a:ln w="12700">
-            <a:solidFill>
-              <a:srgbClr val="0284C7"/>
-            </a:solidFill>
-          </a:ln>
-        </p:spPr>
-        <p:style>
-          <a:lnRef idx="1">
-            <a:schemeClr val="accent1"/>
-          </a:lnRef>
-          <a:fillRef idx="3">
-            <a:schemeClr val="accent1"/>
-          </a:fillRef>
-          <a:effectRef idx="2">
-            <a:schemeClr val="accent1"/>
-          </a:effectRef>
-          <a:fontRef idx="minor">
-            <a:schemeClr val="lt1"/>
-          </a:fontRef>
-        </p:style>
-        <p:txBody>
-          <a:bodyPr rtlCol="0" anchor="ctr"/>
-          <a:lstStyle/>
-          <a:p>
-            <a:pPr algn="ctr"/>
-          </a:p>
-        </p:txBody>
-      </p:sp>
-      <p:sp>
-        <p:nvSpPr>
-          <p:cNvPr id="11" name="TextBox 10"/>
-          <p:cNvSpPr txBox="1"/>
-          <p:nvPr/>
-        </p:nvSpPr>
-        <p:spPr>
-          <a:xfrm>
-            <a:off x="6291072" y="1572768"/>
-            <a:ext cx="2322576" cy="1152144"/>
-          </a:xfrm>
-          <a:prstGeom prst="rect">
-            <a:avLst/>
-          </a:prstGeom>
-          <a:noFill/>
-        </p:spPr>
-        <p:txBody>
-          <a:bodyPr wrap="square">
-            <a:spAutoFit/>
-          </a:bodyPr>
-          <a:lstStyle/>
-          <a:p>
-            <a:pPr>
-              <a:spcAft>
-                <a:spcPts val="200"/>
-              </a:spcAft>
-              <a:defRPr sz="2200" b="1">
-                <a:solidFill>
-                  <a:srgbClr val="0284C7"/>
-                </a:solidFill>
-              </a:defRPr>
-            </a:pPr>
-            <a:r>
-              <a:t>4 Formal Awards</a:t>
-            </a:r>
-          </a:p>
-          <a:p>
-            <a:pPr>
-              <a:spcAft>
-                <a:spcPts val="200"/>
-              </a:spcAft>
-              <a:defRPr sz="1000" b="1">
-                <a:solidFill>
-                  <a:srgbClr val="0F172A"/>
-                </a:solidFill>
-              </a:defRPr>
-            </a:pPr>
-            <a:r>
-              <a:t>Industry Acknowledgements</a:t>
-            </a:r>
-          </a:p>
-          <a:p>
-            <a:pPr>
-              <a:defRPr sz="850">
-                <a:solidFill>
-                  <a:srgbClr val="64748B"/>
-                </a:solidFill>
-              </a:defRPr>
-            </a:pPr>
-            <a:r>
-              <a:t>Cisco Facility Appreciation + 3 UST Global Excellence &amp; Client-First awards</a:t>
-            </a:r>
-          </a:p>
-        </p:txBody>
-      </p:sp>
-      <p:sp>
-        <p:nvSpPr>
-          <p:cNvPr id="12" name="Rounded Rectangle 11"/>
-          <p:cNvSpPr/>
-          <p:nvPr/>
-        </p:nvSpPr>
-        <p:spPr>
-          <a:xfrm>
-            <a:off x="8906256" y="1463040"/>
-            <a:ext cx="2542032" cy="1371600"/>
-          </a:xfrm>
-          <a:prstGeom prst="roundRect">
-            <a:avLst/>
-          </a:prstGeom>
-          <a:solidFill>
-            <a:srgbClr val="FFFFFF"/>
-          </a:solidFill>
-          <a:ln w="12700">
-            <a:solidFill>
-              <a:srgbClr val="0284C7"/>
-            </a:solidFill>
-          </a:ln>
-        </p:spPr>
-        <p:style>
-          <a:lnRef idx="1">
-            <a:schemeClr val="accent1"/>
-          </a:lnRef>
-          <a:fillRef idx="3">
-            <a:schemeClr val="accent1"/>
-          </a:fillRef>
-          <a:effectRef idx="2">
-            <a:schemeClr val="accent1"/>
-          </a:effectRef>
-          <a:fontRef idx="minor">
-            <a:schemeClr val="lt1"/>
-          </a:fontRef>
-        </p:style>
-        <p:txBody>
-          <a:bodyPr rtlCol="0" anchor="ctr"/>
-          <a:lstStyle/>
-          <a:p>
-            <a:pPr algn="ctr"/>
-          </a:p>
-        </p:txBody>
-      </p:sp>
-      <p:sp>
-        <p:nvSpPr>
-          <p:cNvPr id="13" name="TextBox 12"/>
-          <p:cNvSpPr txBox="1"/>
-          <p:nvPr/>
-        </p:nvSpPr>
-        <p:spPr>
-          <a:xfrm>
-            <a:off x="9015984" y="1572768"/>
-            <a:ext cx="2322576" cy="1152144"/>
-          </a:xfrm>
-          <a:prstGeom prst="rect">
-            <a:avLst/>
-          </a:prstGeom>
-          <a:noFill/>
-        </p:spPr>
-        <p:txBody>
-          <a:bodyPr wrap="square">
-            <a:spAutoFit/>
-          </a:bodyPr>
-          <a:lstStyle/>
-          <a:p>
-            <a:pPr>
-              <a:spcAft>
-                <a:spcPts val="200"/>
-              </a:spcAft>
-              <a:defRPr sz="2200" b="1">
-                <a:solidFill>
-                  <a:srgbClr val="0284C7"/>
-                </a:solidFill>
-              </a:defRPr>
-            </a:pPr>
-            <a:r>
-              <a:t>100% Offline</a:t>
-            </a:r>
-          </a:p>
-          <a:p>
-            <a:pPr>
-              <a:spcAft>
-                <a:spcPts val="200"/>
-              </a:spcAft>
-              <a:defRPr sz="1000" b="1">
-                <a:solidFill>
-                  <a:srgbClr val="0F172A"/>
-                </a:solidFill>
-              </a:defRPr>
-            </a:pPr>
-            <a:r>
-              <a:t>Data Integrity at Edge</a:t>
-            </a:r>
-          </a:p>
-          <a:p>
-            <a:pPr>
-              <a:defRPr sz="850">
-                <a:solidFill>
-                  <a:srgbClr val="64748B"/>
-                </a:solidFill>
-              </a:defRPr>
-            </a:pPr>
-            <a:r>
-              <a:t>Zero data loss during field network drops with transactional replay queues</a:t>
-            </a:r>
-          </a:p>
-        </p:txBody>
-      </p:sp>
-      <p:sp>
-        <p:nvSpPr>
-          <p:cNvPr id="14" name="Rounded Rectangle 13"/>
-          <p:cNvSpPr/>
-          <p:nvPr/>
-        </p:nvSpPr>
-        <p:spPr>
-          <a:xfrm>
-            <a:off x="731520" y="2971800"/>
-            <a:ext cx="10728655" cy="768096"/>
+            <a:ext cx="5230368" cy="2240280"/>
           </a:xfrm>
           <a:prstGeom prst="roundRect">
             <a:avLst/>
@@ -9741,14 +7843,92 @@
       </p:sp>
       <p:sp>
         <p:nvSpPr>
-          <p:cNvPr id="15" name="TextBox 14"/>
+          <p:cNvPr id="7" name="Rectangle 6"/>
+          <p:cNvSpPr/>
+          <p:nvPr/>
+        </p:nvSpPr>
+        <p:spPr>
+          <a:xfrm>
+            <a:off x="740664" y="1472184"/>
+            <a:ext cx="5212080" cy="384048"/>
+          </a:xfrm>
+          <a:prstGeom prst="rect">
+            <a:avLst/>
+          </a:prstGeom>
+          <a:solidFill>
+            <a:srgbClr val="0284C7"/>
+          </a:solidFill>
+          <a:ln>
+            <a:noFill/>
+          </a:ln>
+        </p:spPr>
+        <p:style>
+          <a:lnRef idx="1">
+            <a:schemeClr val="accent1"/>
+          </a:lnRef>
+          <a:fillRef idx="3">
+            <a:schemeClr val="accent1"/>
+          </a:fillRef>
+          <a:effectRef idx="2">
+            <a:schemeClr val="accent1"/>
+          </a:effectRef>
+          <a:fontRef idx="minor">
+            <a:schemeClr val="lt1"/>
+          </a:fontRef>
+        </p:style>
+        <p:txBody>
+          <a:bodyPr rtlCol="0" anchor="ctr"/>
+          <a:lstStyle/>
+          <a:p>
+            <a:pPr algn="ctr"/>
+          </a:p>
+        </p:txBody>
+      </p:sp>
+      <p:sp>
+        <p:nvSpPr>
+          <p:cNvPr id="8" name="TextBox 7"/>
           <p:cNvSpPr txBox="1"/>
           <p:nvPr/>
         </p:nvSpPr>
         <p:spPr>
           <a:xfrm>
-            <a:off x="914400" y="3044952"/>
-            <a:ext cx="10332720" cy="621792"/>
+            <a:off x="914400" y="1517904"/>
+            <a:ext cx="4864608" cy="320040"/>
+          </a:xfrm>
+          <a:prstGeom prst="rect">
+            <a:avLst/>
+          </a:prstGeom>
+          <a:noFill/>
+        </p:spPr>
+        <p:txBody>
+          <a:bodyPr wrap="none">
+            <a:spAutoFit/>
+          </a:bodyPr>
+          <a:lstStyle/>
+          <a:p>
+            <a:pPr>
+              <a:defRPr sz="1100" b="1">
+                <a:solidFill>
+                  <a:srgbClr val="FFFFFF"/>
+                </a:solidFill>
+              </a:defRPr>
+            </a:pPr>
+            <a:r>
+              <a:t>1. Scalable Frontend &amp; Modular Architecture</a:t>
+            </a:r>
+          </a:p>
+        </p:txBody>
+      </p:sp>
+      <p:sp>
+        <p:nvSpPr>
+          <p:cNvPr id="9" name="TextBox 8"/>
+          <p:cNvSpPr txBox="1"/>
+          <p:nvPr/>
+        </p:nvSpPr>
+        <p:spPr>
+          <a:xfrm>
+            <a:off x="914400" y="1901952"/>
+            <a:ext cx="4864608" cy="1737360"/>
           </a:xfrm>
           <a:prstGeom prst="rect">
             <a:avLst/>
@@ -9763,42 +7943,75 @@
           <a:p>
             <a:pPr>
               <a:spcAft>
-                <a:spcPts val="200"/>
-              </a:spcAft>
-              <a:defRPr sz="1100" b="1">
-                <a:solidFill>
-                  <a:srgbClr val="0F172A"/>
-                </a:solidFill>
-              </a:defRPr>
-            </a:pPr>
-            <a:r>
-              <a:t>★  Philips Intellispace Critical Care &amp; Anesthesia (Cyient)</a:t>
-            </a:r>
-          </a:p>
-          <a:p>
-            <a:pPr>
-              <a:defRPr sz="900">
+                <a:spcPts val="300"/>
+              </a:spcAft>
+              <a:defRPr sz="950">
                 <a:solidFill>
                   <a:srgbClr val="1E293B"/>
                 </a:solidFill>
               </a:defRPr>
             </a:pPr>
             <a:r>
-              <a:t>Led the frontend technical development of clinical modules for Philips Healthcare, delivering life-critical patient monitoring with rock-solid stability, zero memory leaks, and full healthcare regulatory compliance.</a:t>
-            </a:r>
-          </a:p>
-        </p:txBody>
-      </p:sp>
-      <p:sp>
-        <p:nvSpPr>
-          <p:cNvPr id="16" name="Rounded Rectangle 15"/>
+              <a:t>• React, Angular, TypeScript, JavaScript, Node.js, Web Components (LitElement).</a:t>
+            </a:r>
+          </a:p>
+          <a:p>
+            <a:pPr>
+              <a:spcAft>
+                <a:spcPts val="300"/>
+              </a:spcAft>
+              <a:defRPr sz="950">
+                <a:solidFill>
+                  <a:srgbClr val="1E293B"/>
+                </a:solidFill>
+              </a:defRPr>
+            </a:pPr>
+            <a:r>
+              <a:t>• Architected Enterprise UI Design Systems used across diverse development teams.</a:t>
+            </a:r>
+          </a:p>
+          <a:p>
+            <a:pPr>
+              <a:spcAft>
+                <a:spcPts val="300"/>
+              </a:spcAft>
+              <a:defRPr sz="950">
+                <a:solidFill>
+                  <a:srgbClr val="1E293B"/>
+                </a:solidFill>
+              </a:defRPr>
+            </a:pPr>
+            <a:r>
+              <a:t>• State management, micro-frontends, REST, WebSockets, and streaming telemetry.</a:t>
+            </a:r>
+          </a:p>
+          <a:p>
+            <a:pPr>
+              <a:spcAft>
+                <a:spcPts val="300"/>
+              </a:spcAft>
+              <a:defRPr sz="950">
+                <a:solidFill>
+                  <a:srgbClr val="1E293B"/>
+                </a:solidFill>
+              </a:defRPr>
+            </a:pPr>
+            <a:r>
+              <a:t>• 4-year zero-downtime migration of Cisco Stadium Vision from Flash/Flex to Angular/React.</a:t>
+            </a:r>
+          </a:p>
+        </p:txBody>
+      </p:sp>
+      <p:sp>
+        <p:nvSpPr>
+          <p:cNvPr id="10" name="Rounded Rectangle 9"/>
           <p:cNvSpPr/>
           <p:nvPr/>
         </p:nvSpPr>
         <p:spPr>
           <a:xfrm>
-            <a:off x="731520" y="3813048"/>
-            <a:ext cx="10728655" cy="768096"/>
+            <a:off x="6217920" y="1463040"/>
+            <a:ext cx="5230368" cy="2240280"/>
           </a:xfrm>
           <a:prstGeom prst="roundRect">
             <a:avLst/>
@@ -9836,14 +8049,92 @@
       </p:sp>
       <p:sp>
         <p:nvSpPr>
-          <p:cNvPr id="17" name="TextBox 16"/>
+          <p:cNvPr id="11" name="Rectangle 10"/>
+          <p:cNvSpPr/>
+          <p:nvPr/>
+        </p:nvSpPr>
+        <p:spPr>
+          <a:xfrm>
+            <a:off x="6227064" y="1472184"/>
+            <a:ext cx="5212080" cy="384048"/>
+          </a:xfrm>
+          <a:prstGeom prst="rect">
+            <a:avLst/>
+          </a:prstGeom>
+          <a:solidFill>
+            <a:srgbClr val="0E7490"/>
+          </a:solidFill>
+          <a:ln>
+            <a:noFill/>
+          </a:ln>
+        </p:spPr>
+        <p:style>
+          <a:lnRef idx="1">
+            <a:schemeClr val="accent1"/>
+          </a:lnRef>
+          <a:fillRef idx="3">
+            <a:schemeClr val="accent1"/>
+          </a:fillRef>
+          <a:effectRef idx="2">
+            <a:schemeClr val="accent1"/>
+          </a:effectRef>
+          <a:fontRef idx="minor">
+            <a:schemeClr val="lt1"/>
+          </a:fontRef>
+        </p:style>
+        <p:txBody>
+          <a:bodyPr rtlCol="0" anchor="ctr"/>
+          <a:lstStyle/>
+          <a:p>
+            <a:pPr algn="ctr"/>
+          </a:p>
+        </p:txBody>
+      </p:sp>
+      <p:sp>
+        <p:nvSpPr>
+          <p:cNvPr id="12" name="TextBox 11"/>
           <p:cNvSpPr txBox="1"/>
           <p:nvPr/>
         </p:nvSpPr>
         <p:spPr>
           <a:xfrm>
-            <a:off x="914400" y="3886200"/>
-            <a:ext cx="10332720" cy="621792"/>
+            <a:off x="6400800" y="1517904"/>
+            <a:ext cx="4864608" cy="320040"/>
+          </a:xfrm>
+          <a:prstGeom prst="rect">
+            <a:avLst/>
+          </a:prstGeom>
+          <a:noFill/>
+        </p:spPr>
+        <p:txBody>
+          <a:bodyPr wrap="none">
+            <a:spAutoFit/>
+          </a:bodyPr>
+          <a:lstStyle/>
+          <a:p>
+            <a:pPr>
+              <a:defRPr sz="1100" b="1">
+                <a:solidFill>
+                  <a:srgbClr val="FFFFFF"/>
+                </a:solidFill>
+              </a:defRPr>
+            </a:pPr>
+            <a:r>
+              <a:t>2. Spatial 3D, CAD &amp; Generative AI</a:t>
+            </a:r>
+          </a:p>
+        </p:txBody>
+      </p:sp>
+      <p:sp>
+        <p:nvSpPr>
+          <p:cNvPr id="13" name="TextBox 12"/>
+          <p:cNvSpPr txBox="1"/>
+          <p:nvPr/>
+        </p:nvSpPr>
+        <p:spPr>
+          <a:xfrm>
+            <a:off x="6400800" y="1901952"/>
+            <a:ext cx="4864608" cy="1737360"/>
           </a:xfrm>
           <a:prstGeom prst="rect">
             <a:avLst/>
@@ -9858,42 +8149,75 @@
           <a:p>
             <a:pPr>
               <a:spcAft>
-                <a:spcPts val="200"/>
-              </a:spcAft>
-              <a:defRPr sz="1100" b="1">
-                <a:solidFill>
-                  <a:srgbClr val="0F172A"/>
-                </a:solidFill>
-              </a:defRPr>
-            </a:pPr>
-            <a:r>
-              <a:t>★  Startup Co-Founder &amp; Director (Technoyana &amp; Twitan)</a:t>
-            </a:r>
-          </a:p>
-          <a:p>
-            <a:pPr>
-              <a:defRPr sz="900">
+                <a:spcPts val="300"/>
+              </a:spcAft>
+              <a:defRPr sz="950">
                 <a:solidFill>
                   <a:srgbClr val="1E293B"/>
                 </a:solidFill>
               </a:defRPr>
             </a:pPr>
             <a:r>
-              <a:t>Successfully co-founded and steered Technoyana Digital Transformation Services and Twitan.com; built and shipped commercial fintech apps, product search engines, and the Shutlify badminton tournament operating system.</a:t>
-            </a:r>
-          </a:p>
-        </p:txBody>
-      </p:sp>
-      <p:sp>
-        <p:nvSpPr>
-          <p:cNvPr id="18" name="Rounded Rectangle 17"/>
+              <a:t>• Voxelforge AI (generative modular 3D for Unreal/Unity/WebGL) &amp; Ayam3d (parametric 3D).</a:t>
+            </a:r>
+          </a:p>
+          <a:p>
+            <a:pPr>
+              <a:spcAft>
+                <a:spcPts val="300"/>
+              </a:spcAft>
+              <a:defRPr sz="950">
+                <a:solidFill>
+                  <a:srgbClr val="1E293B"/>
+                </a:solidFill>
+              </a:defRPr>
+            </a:pPr>
+            <a:r>
+              <a:t>• Architectural 3D visualization, animated walkthroughs, and CAD/CAM CNC machine development.</a:t>
+            </a:r>
+          </a:p>
+          <a:p>
+            <a:pPr>
+              <a:spcAft>
+                <a:spcPts val="300"/>
+              </a:spcAft>
+              <a:defRPr sz="950">
+                <a:solidFill>
+                  <a:srgbClr val="1E293B"/>
+                </a:solidFill>
+              </a:defRPr>
+            </a:pPr>
+            <a:r>
+              <a:t>• Flight simulator 3D terrain and aircraft databases under locked 60 FPS budgets (CAE).</a:t>
+            </a:r>
+          </a:p>
+          <a:p>
+            <a:pPr>
+              <a:spcAft>
+                <a:spcPts val="300"/>
+              </a:spcAft>
+              <a:defRPr sz="950">
+                <a:solidFill>
+                  <a:srgbClr val="1E293B"/>
+                </a:solidFill>
+              </a:defRPr>
+            </a:pPr>
+            <a:r>
+              <a:t>• Interactive 3D parts inspection explorer supporting millions of catalog components.</a:t>
+            </a:r>
+          </a:p>
+        </p:txBody>
+      </p:sp>
+      <p:sp>
+        <p:nvSpPr>
+          <p:cNvPr id="14" name="Rounded Rectangle 13"/>
           <p:cNvSpPr/>
           <p:nvPr/>
         </p:nvSpPr>
         <p:spPr>
           <a:xfrm>
-            <a:off x="731520" y="4654296"/>
-            <a:ext cx="10728655" cy="768096"/>
+            <a:off x="731520" y="3931920"/>
+            <a:ext cx="5230368" cy="2240280"/>
           </a:xfrm>
           <a:prstGeom prst="roundRect">
             <a:avLst/>
@@ -9931,14 +8255,92 @@
       </p:sp>
       <p:sp>
         <p:nvSpPr>
-          <p:cNvPr id="19" name="TextBox 18"/>
+          <p:cNvPr id="15" name="Rectangle 14"/>
+          <p:cNvSpPr/>
+          <p:nvPr/>
+        </p:nvSpPr>
+        <p:spPr>
+          <a:xfrm>
+            <a:off x="740664" y="3941064"/>
+            <a:ext cx="5212080" cy="384048"/>
+          </a:xfrm>
+          <a:prstGeom prst="rect">
+            <a:avLst/>
+          </a:prstGeom>
+          <a:solidFill>
+            <a:srgbClr val="D97706"/>
+          </a:solidFill>
+          <a:ln>
+            <a:noFill/>
+          </a:ln>
+        </p:spPr>
+        <p:style>
+          <a:lnRef idx="1">
+            <a:schemeClr val="accent1"/>
+          </a:lnRef>
+          <a:fillRef idx="3">
+            <a:schemeClr val="accent1"/>
+          </a:fillRef>
+          <a:effectRef idx="2">
+            <a:schemeClr val="accent1"/>
+          </a:effectRef>
+          <a:fontRef idx="minor">
+            <a:schemeClr val="lt1"/>
+          </a:fontRef>
+        </p:style>
+        <p:txBody>
+          <a:bodyPr rtlCol="0" anchor="ctr"/>
+          <a:lstStyle/>
+          <a:p>
+            <a:pPr algn="ctr"/>
+          </a:p>
+        </p:txBody>
+      </p:sp>
+      <p:sp>
+        <p:nvSpPr>
+          <p:cNvPr id="16" name="TextBox 15"/>
           <p:cNvSpPr txBox="1"/>
           <p:nvPr/>
         </p:nvSpPr>
         <p:spPr>
           <a:xfrm>
-            <a:off x="914400" y="4727448"/>
-            <a:ext cx="10332720" cy="621792"/>
+            <a:off x="914400" y="3986784"/>
+            <a:ext cx="4864608" cy="320040"/>
+          </a:xfrm>
+          <a:prstGeom prst="rect">
+            <a:avLst/>
+          </a:prstGeom>
+          <a:noFill/>
+        </p:spPr>
+        <p:txBody>
+          <a:bodyPr wrap="none">
+            <a:spAutoFit/>
+          </a:bodyPr>
+          <a:lstStyle/>
+          <a:p>
+            <a:pPr>
+              <a:defRPr sz="1100" b="1">
+                <a:solidFill>
+                  <a:srgbClr val="FFFFFF"/>
+                </a:solidFill>
+              </a:defRPr>
+            </a:pPr>
+            <a:r>
+              <a:t>3. High Reliability &amp; Operational Security</a:t>
+            </a:r>
+          </a:p>
+        </p:txBody>
+      </p:sp>
+      <p:sp>
+        <p:nvSpPr>
+          <p:cNvPr id="17" name="TextBox 16"/>
+          <p:cNvSpPr txBox="1"/>
+          <p:nvPr/>
+        </p:nvSpPr>
+        <p:spPr>
+          <a:xfrm>
+            <a:off x="914400" y="4370832"/>
+            <a:ext cx="4864608" cy="1737360"/>
           </a:xfrm>
           <a:prstGeom prst="rect">
             <a:avLst/>
@@ -9953,42 +8355,75 @@
           <a:p>
             <a:pPr>
               <a:spcAft>
-                <a:spcPts val="200"/>
-              </a:spcAft>
-              <a:defRPr sz="1100" b="1">
-                <a:solidFill>
-                  <a:srgbClr val="0F172A"/>
-                </a:solidFill>
-              </a:defRPr>
-            </a:pPr>
-            <a:r>
-              <a:t>★  Cross-Platform UI Design System (Moonraft Innovation Labs)</a:t>
-            </a:r>
-          </a:p>
-          <a:p>
-            <a:pPr>
-              <a:defRPr sz="900">
+                <a:spcPts val="300"/>
+              </a:spcAft>
+              <a:defRPr sz="950">
                 <a:solidFill>
                   <a:srgbClr val="1E293B"/>
                 </a:solidFill>
               </a:defRPr>
             </a:pPr>
             <a:r>
-              <a:t>Architected a cross-platform UI design system using the LitElement web components library, creating a reusable component standard leveraged seamlessly across React, Angular, and Polymer teams for TLC Hotels.</a:t>
-            </a:r>
-          </a:p>
-        </p:txBody>
-      </p:sp>
-      <p:sp>
-        <p:nvSpPr>
-          <p:cNvPr id="20" name="Rounded Rectangle 19"/>
+              <a:t>• Delivered Philips ICU healthcare software meeting stringent clinical safety benchmarks.</a:t>
+            </a:r>
+          </a:p>
+          <a:p>
+            <a:pPr>
+              <a:spcAft>
+                <a:spcPts val="300"/>
+              </a:spcAft>
+              <a:defRPr sz="950">
+                <a:solidFill>
+                  <a:srgbClr val="1E293B"/>
+                </a:solidFill>
+              </a:defRPr>
+            </a:pPr>
+            <a:r>
+              <a:t>• Strict cybersecurity enforcement: Multi-factor authentication (MFA), XSS mitigation, RBAC.</a:t>
+            </a:r>
+          </a:p>
+          <a:p>
+            <a:pPr>
+              <a:spcAft>
+                <a:spcPts val="300"/>
+              </a:spcAft>
+              <a:defRPr sz="950">
+                <a:solidFill>
+                  <a:srgbClr val="1E293B"/>
+                </a:solidFill>
+              </a:defRPr>
+            </a:pPr>
+            <a:r>
+              <a:t>• Offline-first mobile architecture (IndexedDB/Service Workers) with conflict-free cloud sync.</a:t>
+            </a:r>
+          </a:p>
+          <a:p>
+            <a:pPr>
+              <a:spcAft>
+                <a:spcPts val="300"/>
+              </a:spcAft>
+              <a:defRPr sz="950">
+                <a:solidFill>
+                  <a:srgbClr val="1E293B"/>
+                </a:solidFill>
+              </a:defRPr>
+            </a:pPr>
+            <a:r>
+              <a:t>• Building Management System (BMS) unified interface for AHUs, chillers, and telemetry (Cisco).</a:t>
+            </a:r>
+          </a:p>
+        </p:txBody>
+      </p:sp>
+      <p:sp>
+        <p:nvSpPr>
+          <p:cNvPr id="18" name="Rounded Rectangle 17"/>
           <p:cNvSpPr/>
           <p:nvPr/>
         </p:nvSpPr>
         <p:spPr>
           <a:xfrm>
-            <a:off x="731520" y="5495544"/>
-            <a:ext cx="10728655" cy="768096"/>
+            <a:off x="6217920" y="3931920"/>
+            <a:ext cx="5230368" cy="2240280"/>
           </a:xfrm>
           <a:prstGeom prst="roundRect">
             <a:avLst/>
@@ -10026,14 +8461,92 @@
       </p:sp>
       <p:sp>
         <p:nvSpPr>
+          <p:cNvPr id="19" name="Rectangle 18"/>
+          <p:cNvSpPr/>
+          <p:nvPr/>
+        </p:nvSpPr>
+        <p:spPr>
+          <a:xfrm>
+            <a:off x="6227064" y="3941064"/>
+            <a:ext cx="5212080" cy="384048"/>
+          </a:xfrm>
+          <a:prstGeom prst="rect">
+            <a:avLst/>
+          </a:prstGeom>
+          <a:solidFill>
+            <a:srgbClr val="109563"/>
+          </a:solidFill>
+          <a:ln>
+            <a:noFill/>
+          </a:ln>
+        </p:spPr>
+        <p:style>
+          <a:lnRef idx="1">
+            <a:schemeClr val="accent1"/>
+          </a:lnRef>
+          <a:fillRef idx="3">
+            <a:schemeClr val="accent1"/>
+          </a:fillRef>
+          <a:effectRef idx="2">
+            <a:schemeClr val="accent1"/>
+          </a:effectRef>
+          <a:fontRef idx="minor">
+            <a:schemeClr val="lt1"/>
+          </a:fontRef>
+        </p:style>
+        <p:txBody>
+          <a:bodyPr rtlCol="0" anchor="ctr"/>
+          <a:lstStyle/>
+          <a:p>
+            <a:pPr algn="ctr"/>
+          </a:p>
+        </p:txBody>
+      </p:sp>
+      <p:sp>
+        <p:nvSpPr>
+          <p:cNvPr id="20" name="TextBox 19"/>
+          <p:cNvSpPr txBox="1"/>
+          <p:nvPr/>
+        </p:nvSpPr>
+        <p:spPr>
+          <a:xfrm>
+            <a:off x="6400800" y="3986784"/>
+            <a:ext cx="4864608" cy="320040"/>
+          </a:xfrm>
+          <a:prstGeom prst="rect">
+            <a:avLst/>
+          </a:prstGeom>
+          <a:noFill/>
+        </p:spPr>
+        <p:txBody>
+          <a:bodyPr wrap="none">
+            <a:spAutoFit/>
+          </a:bodyPr>
+          <a:lstStyle/>
+          <a:p>
+            <a:pPr>
+              <a:defRPr sz="1100" b="1">
+                <a:solidFill>
+                  <a:srgbClr val="FFFFFF"/>
+                </a:solidFill>
+              </a:defRPr>
+            </a:pPr>
+            <a:r>
+              <a:t>4. Agile Leadership &amp; Startup Delivery</a:t>
+            </a:r>
+          </a:p>
+        </p:txBody>
+      </p:sp>
+      <p:sp>
+        <p:nvSpPr>
           <p:cNvPr id="21" name="TextBox 20"/>
           <p:cNvSpPr txBox="1"/>
           <p:nvPr/>
         </p:nvSpPr>
         <p:spPr>
           <a:xfrm>
-            <a:off x="914400" y="5568696"/>
-            <a:ext cx="10332720" cy="621792"/>
+            <a:off x="6400800" y="4370832"/>
+            <a:ext cx="4864608" cy="1737360"/>
           </a:xfrm>
           <a:prstGeom prst="rect">
             <a:avLst/>
@@ -10048,28 +8561,61 @@
           <a:p>
             <a:pPr>
               <a:spcAft>
-                <a:spcPts val="200"/>
-              </a:spcAft>
-              <a:defRPr sz="1100" b="1">
-                <a:solidFill>
-                  <a:srgbClr val="0F172A"/>
-                </a:solidFill>
-              </a:defRPr>
-            </a:pPr>
-            <a:r>
-              <a:t>★  Formal Corporate Awards &amp; Cisco Recognition</a:t>
-            </a:r>
-          </a:p>
-          <a:p>
-            <a:pPr>
-              <a:defRPr sz="900">
+                <a:spcPts val="300"/>
+              </a:spcAft>
+              <a:defRPr sz="950">
                 <a:solidFill>
                   <a:srgbClr val="1E293B"/>
                 </a:solidFill>
               </a:defRPr>
             </a:pPr>
             <a:r>
-              <a:t>Received Cisco Systems Appreciation for developing the campus Facility Dashboard (2010); recognized with 3 Certificates of Appreciation at UST Global ('Inspiring People' 2018, 'Putting Client First' 2016, 'Living the Values' 2015).</a:t>
+              <a:t>• Founder/Co-Founder: Technoyana, Twitan.com, SrushtiLabs, InnoBrik.</a:t>
+            </a:r>
+          </a:p>
+          <a:p>
+            <a:pPr>
+              <a:spcAft>
+                <a:spcPts val="300"/>
+              </a:spcAft>
+              <a:defRPr sz="950">
+                <a:solidFill>
+                  <a:srgbClr val="1E293B"/>
+                </a:solidFill>
+              </a:defRPr>
+            </a:pPr>
+            <a:r>
+              <a:t>• Associate Project Manager at UST Global; managed cross-functional squads for Cisco.</a:t>
+            </a:r>
+          </a:p>
+          <a:p>
+            <a:pPr>
+              <a:spcAft>
+                <a:spcPts val="300"/>
+              </a:spcAft>
+              <a:defRPr sz="950">
+                <a:solidFill>
+                  <a:srgbClr val="1E293B"/>
+                </a:solidFill>
+              </a:defRPr>
+            </a:pPr>
+            <a:r>
+              <a:t>• Early user prototyping, design-to-code pipelines, and active stakeholder governance.</a:t>
+            </a:r>
+          </a:p>
+          <a:p>
+            <a:pPr>
+              <a:spcAft>
+                <a:spcPts val="300"/>
+              </a:spcAft>
+              <a:defRPr sz="950">
+                <a:solidFill>
+                  <a:srgbClr val="1E293B"/>
+                </a:solidFill>
+              </a:defRPr>
+            </a:pPr>
+            <a:r>
+              <a:t>• Honored with Cisco Appreciation (2010) and 3 UST Global Excellence Awards (2015, 2016, 2018).</a:t>
             </a:r>
           </a:p>
         </p:txBody>
@@ -10104,7 +8650,7 @@
               </a:defRPr>
             </a:pPr>
             <a:r>
-              <a:t>Maheshchandra Hegde · Technical Work Experience &amp; Capability Presentation | Slide 8 of 11</a:t>
+              <a:t>Maheshchandra Hegde · Technical Work Experience Presentation | Slide 8 of 9</a:t>
             </a:r>
           </a:p>
         </p:txBody>
@@ -10142,7 +8688,7 @@
             <a:avLst/>
           </a:prstGeom>
           <a:solidFill>
-            <a:srgbClr val="F8FAFC"/>
+            <a:srgbClr val="0F172A"/>
           </a:solidFill>
           <a:ln>
             <a:noFill/>
@@ -10172,93 +8718,25 @@
       </p:sp>
       <p:sp>
         <p:nvSpPr>
-          <p:cNvPr id="3" name="TextBox 2"/>
-          <p:cNvSpPr txBox="1"/>
-          <p:nvPr/>
-        </p:nvSpPr>
-        <p:spPr>
-          <a:xfrm>
-            <a:off x="731520" y="365760"/>
-            <a:ext cx="10698480" cy="274320"/>
-          </a:xfrm>
-          <a:prstGeom prst="rect">
-            <a:avLst/>
-          </a:prstGeom>
-          <a:noFill/>
-        </p:spPr>
-        <p:txBody>
-          <a:bodyPr wrap="square" lIns="0" rIns="0" tIns="0" bIns="0">
-            <a:spAutoFit/>
-          </a:bodyPr>
-          <a:lstStyle/>
-          <a:p>
-            <a:pPr>
-              <a:defRPr sz="1050" b="1">
-                <a:solidFill>
-                  <a:srgbClr val="0E7490"/>
-                </a:solidFill>
-              </a:defRPr>
-            </a:pPr>
-            <a:r>
-              <a:t>PROBLEM SOLVING &amp; ENGINEERING RIGOR</a:t>
-            </a:r>
-          </a:p>
-        </p:txBody>
-      </p:sp>
-      <p:sp>
-        <p:nvSpPr>
-          <p:cNvPr id="4" name="TextBox 3"/>
-          <p:cNvSpPr txBox="1"/>
-          <p:nvPr/>
-        </p:nvSpPr>
-        <p:spPr>
-          <a:xfrm>
-            <a:off x="731520" y="658368"/>
-            <a:ext cx="10698480" cy="502920"/>
-          </a:xfrm>
-          <a:prstGeom prst="rect">
-            <a:avLst/>
-          </a:prstGeom>
-          <a:noFill/>
-        </p:spPr>
-        <p:txBody>
-          <a:bodyPr wrap="square" lIns="0" rIns="0" tIns="0" bIns="0">
-            <a:spAutoFit/>
-          </a:bodyPr>
-          <a:lstStyle/>
-          <a:p>
-            <a:pPr>
-              <a:defRPr sz="2100" b="1">
-                <a:solidFill>
-                  <a:srgbClr val="0F172A"/>
-                </a:solidFill>
-              </a:defRPr>
-            </a:pPr>
-            <a:r>
-              <a:t>Real-World Technical Challenges Faced &amp; Pragmatic Resolutions</a:t>
-            </a:r>
-          </a:p>
-        </p:txBody>
-      </p:sp>
-      <p:sp>
-        <p:nvSpPr>
-          <p:cNvPr id="5" name="Rectangle 4"/>
+          <p:cNvPr id="3" name="Rounded Rectangle 2"/>
           <p:cNvSpPr/>
           <p:nvPr/>
         </p:nvSpPr>
         <p:spPr>
           <a:xfrm>
-            <a:off x="731520" y="1234440"/>
-            <a:ext cx="10728655" cy="22860"/>
-          </a:xfrm>
-          <a:prstGeom prst="rect">
+            <a:off x="731520" y="1097280"/>
+            <a:ext cx="10728655" cy="5029200"/>
+          </a:xfrm>
+          <a:prstGeom prst="roundRect">
             <a:avLst/>
           </a:prstGeom>
           <a:solidFill>
-            <a:srgbClr val="E2E8F0"/>
+            <a:srgbClr val="182235"/>
           </a:solidFill>
-          <a:ln>
-            <a:noFill/>
+          <a:ln w="12700">
+            <a:solidFill>
+              <a:srgbClr val="334155"/>
+            </a:solidFill>
           </a:ln>
         </p:spPr>
         <p:style>
@@ -10285,59 +8763,14 @@
       </p:sp>
       <p:sp>
         <p:nvSpPr>
-          <p:cNvPr id="6" name="Rounded Rectangle 5"/>
-          <p:cNvSpPr/>
-          <p:nvPr/>
-        </p:nvSpPr>
-        <p:spPr>
-          <a:xfrm>
-            <a:off x="731520" y="1463040"/>
-            <a:ext cx="10728655" cy="1481328"/>
-          </a:xfrm>
-          <a:prstGeom prst="roundRect">
-            <a:avLst/>
-          </a:prstGeom>
-          <a:solidFill>
-            <a:srgbClr val="FFFFFF"/>
-          </a:solidFill>
-          <a:ln w="12700">
-            <a:solidFill>
-              <a:srgbClr val="E2E8F0"/>
-            </a:solidFill>
-          </a:ln>
-        </p:spPr>
-        <p:style>
-          <a:lnRef idx="1">
-            <a:schemeClr val="accent1"/>
-          </a:lnRef>
-          <a:fillRef idx="3">
-            <a:schemeClr val="accent1"/>
-          </a:fillRef>
-          <a:effectRef idx="2">
-            <a:schemeClr val="accent1"/>
-          </a:effectRef>
-          <a:fontRef idx="minor">
-            <a:schemeClr val="lt1"/>
-          </a:fontRef>
-        </p:style>
-        <p:txBody>
-          <a:bodyPr rtlCol="0" anchor="ctr"/>
-          <a:lstStyle/>
-          <a:p>
-            <a:pPr algn="ctr"/>
-          </a:p>
-        </p:txBody>
-      </p:sp>
-      <p:sp>
-        <p:nvSpPr>
-          <p:cNvPr id="7" name="TextBox 6"/>
+          <p:cNvPr id="4" name="TextBox 3"/>
           <p:cNvSpPr txBox="1"/>
           <p:nvPr/>
         </p:nvSpPr>
         <p:spPr>
           <a:xfrm>
-            <a:off x="914400" y="1572768"/>
-            <a:ext cx="4389120" cy="1280160"/>
+            <a:off x="1188720" y="1417320"/>
+            <a:ext cx="9814255" cy="4389120"/>
           </a:xfrm>
           <a:prstGeom prst="rect">
             <a:avLst/>
@@ -10352,549 +8785,159 @@
           <a:p>
             <a:pPr>
               <a:spcAft>
-                <a:spcPts val="300"/>
-              </a:spcAft>
-              <a:defRPr sz="1100" b="1">
-                <a:solidFill>
-                  <a:srgbClr val="0E7490"/>
-                </a:solidFill>
-              </a:defRPr>
-            </a:pPr>
-            <a:r>
-              <a:t>Challenge 1: Unstable Network Connectivity in Physical Venues (Twitan / Technoyana)</a:t>
-            </a:r>
-          </a:p>
-          <a:p>
-            <a:pPr>
-              <a:defRPr sz="900">
-                <a:solidFill>
-                  <a:srgbClr val="1E293B"/>
-                </a:solidFill>
-              </a:defRPr>
-            </a:pPr>
-            <a:r>
-              <a:t>Operating live tournament arbitration in venues with crowded RF environments, intermittent Wi-Fi drops, and mobile dead-zones caused transaction failures and loss of live scores.</a:t>
-            </a:r>
-          </a:p>
-        </p:txBody>
-      </p:sp>
-      <p:sp>
-        <p:nvSpPr>
-          <p:cNvPr id="8" name="Rectangle 7"/>
-          <p:cNvSpPr/>
-          <p:nvPr/>
-        </p:nvSpPr>
-        <p:spPr>
-          <a:xfrm>
-            <a:off x="5486400" y="1600200"/>
-            <a:ext cx="18288" cy="1188720"/>
-          </a:xfrm>
-          <a:prstGeom prst="rect">
-            <a:avLst/>
-          </a:prstGeom>
-          <a:solidFill>
-            <a:srgbClr val="E2E8F0"/>
-          </a:solidFill>
-          <a:ln>
-            <a:noFill/>
-          </a:ln>
-        </p:spPr>
-        <p:style>
-          <a:lnRef idx="1">
-            <a:schemeClr val="accent1"/>
-          </a:lnRef>
-          <a:fillRef idx="3">
-            <a:schemeClr val="accent1"/>
-          </a:fillRef>
-          <a:effectRef idx="2">
-            <a:schemeClr val="accent1"/>
-          </a:effectRef>
-          <a:fontRef idx="minor">
-            <a:schemeClr val="lt1"/>
-          </a:fontRef>
-        </p:style>
-        <p:txBody>
-          <a:bodyPr rtlCol="0" anchor="ctr"/>
-          <a:lstStyle/>
-          <a:p>
-            <a:pPr algn="ctr"/>
-          </a:p>
-        </p:txBody>
-      </p:sp>
-      <p:sp>
-        <p:nvSpPr>
-          <p:cNvPr id="9" name="TextBox 8"/>
-          <p:cNvSpPr txBox="1"/>
-          <p:nvPr/>
-        </p:nvSpPr>
-        <p:spPr>
-          <a:xfrm>
-            <a:off x="5669280" y="1572768"/>
-            <a:ext cx="5577840" cy="1280160"/>
-          </a:xfrm>
-          <a:prstGeom prst="rect">
-            <a:avLst/>
-          </a:prstGeom>
-          <a:noFill/>
-        </p:spPr>
-        <p:txBody>
-          <a:bodyPr wrap="square">
-            <a:spAutoFit/>
-          </a:bodyPr>
-          <a:lstStyle/>
-          <a:p>
-            <a:pPr>
-              <a:spcAft>
-                <a:spcPts val="200"/>
-              </a:spcAft>
-              <a:defRPr sz="1100" b="1">
-                <a:solidFill>
-                  <a:srgbClr val="0284C7"/>
-                </a:solidFill>
-              </a:defRPr>
-            </a:pPr>
-            <a:r>
-              <a:t>Resolution Implemented:</a:t>
-            </a:r>
-          </a:p>
-          <a:p>
-            <a:pPr>
-              <a:spcAft>
-                <a:spcPts val="300"/>
-              </a:spcAft>
-              <a:defRPr sz="900">
-                <a:solidFill>
-                  <a:srgbClr val="1E293B"/>
-                </a:solidFill>
-              </a:defRPr>
-            </a:pPr>
-            <a:r>
-              <a:t>Architected an 'Offline-First' state engine using IndexedDB client persistence and service workers. Implemented optimistic UI updates and a transactional event replay queue that automatically resynchronizes once the network reconnects.</a:t>
-            </a:r>
-          </a:p>
-          <a:p>
-            <a:pPr>
-              <a:defRPr sz="900" b="1">
-                <a:solidFill>
-                  <a:srgbClr val="109563"/>
-                </a:solidFill>
-              </a:defRPr>
-            </a:pPr>
-            <a:r>
-              <a:t>Result: Impact: 100% data preservation, zero operator workflow interruptions, seamless user experience.</a:t>
-            </a:r>
-          </a:p>
-        </p:txBody>
-      </p:sp>
-      <p:sp>
-        <p:nvSpPr>
-          <p:cNvPr id="10" name="Rounded Rectangle 9"/>
-          <p:cNvSpPr/>
-          <p:nvPr/>
-        </p:nvSpPr>
-        <p:spPr>
-          <a:xfrm>
-            <a:off x="731520" y="3072384"/>
-            <a:ext cx="10728655" cy="1481328"/>
-          </a:xfrm>
-          <a:prstGeom prst="roundRect">
-            <a:avLst/>
-          </a:prstGeom>
-          <a:solidFill>
-            <a:srgbClr val="FFFFFF"/>
-          </a:solidFill>
-          <a:ln w="12700">
-            <a:solidFill>
-              <a:srgbClr val="E2E8F0"/>
-            </a:solidFill>
-          </a:ln>
-        </p:spPr>
-        <p:style>
-          <a:lnRef idx="1">
-            <a:schemeClr val="accent1"/>
-          </a:lnRef>
-          <a:fillRef idx="3">
-            <a:schemeClr val="accent1"/>
-          </a:fillRef>
-          <a:effectRef idx="2">
-            <a:schemeClr val="accent1"/>
-          </a:effectRef>
-          <a:fontRef idx="minor">
-            <a:schemeClr val="lt1"/>
-          </a:fontRef>
-        </p:style>
-        <p:txBody>
-          <a:bodyPr rtlCol="0" anchor="ctr"/>
-          <a:lstStyle/>
-          <a:p>
-            <a:pPr algn="ctr"/>
-          </a:p>
-        </p:txBody>
-      </p:sp>
-      <p:sp>
-        <p:nvSpPr>
-          <p:cNvPr id="11" name="TextBox 10"/>
-          <p:cNvSpPr txBox="1"/>
-          <p:nvPr/>
-        </p:nvSpPr>
-        <p:spPr>
-          <a:xfrm>
-            <a:off x="914400" y="3182112"/>
-            <a:ext cx="4389120" cy="1280160"/>
-          </a:xfrm>
-          <a:prstGeom prst="rect">
-            <a:avLst/>
-          </a:prstGeom>
-          <a:noFill/>
-        </p:spPr>
-        <p:txBody>
-          <a:bodyPr wrap="square">
-            <a:spAutoFit/>
-          </a:bodyPr>
-          <a:lstStyle/>
-          <a:p>
-            <a:pPr>
-              <a:spcAft>
-                <a:spcPts val="300"/>
-              </a:spcAft>
-              <a:defRPr sz="1100" b="1">
-                <a:solidFill>
-                  <a:srgbClr val="0E7490"/>
-                </a:solidFill>
-              </a:defRPr>
-            </a:pPr>
-            <a:r>
-              <a:t>Challenge 2: Clinical UI Performance &amp; Memory Leaks in 24/7 ICU Monitoring (Philips ICCA)</a:t>
-            </a:r>
-          </a:p>
-          <a:p>
-            <a:pPr>
-              <a:defRPr sz="900">
-                <a:solidFill>
-                  <a:srgbClr val="1E293B"/>
-                </a:solidFill>
-              </a:defRPr>
-            </a:pPr>
-            <a:r>
-              <a:t>Bedside patient monitors run uninterrupted for weeks. Complex real-time streaming vitals and continuous DOM updates risked browser memory accumulation and UI lag during critical clinical events.</a:t>
-            </a:r>
-          </a:p>
-        </p:txBody>
-      </p:sp>
-      <p:sp>
-        <p:nvSpPr>
-          <p:cNvPr id="12" name="Rectangle 11"/>
-          <p:cNvSpPr/>
-          <p:nvPr/>
-        </p:nvSpPr>
-        <p:spPr>
-          <a:xfrm>
-            <a:off x="5486400" y="3209544"/>
-            <a:ext cx="18288" cy="1188720"/>
-          </a:xfrm>
-          <a:prstGeom prst="rect">
-            <a:avLst/>
-          </a:prstGeom>
-          <a:solidFill>
-            <a:srgbClr val="E2E8F0"/>
-          </a:solidFill>
-          <a:ln>
-            <a:noFill/>
-          </a:ln>
-        </p:spPr>
-        <p:style>
-          <a:lnRef idx="1">
-            <a:schemeClr val="accent1"/>
-          </a:lnRef>
-          <a:fillRef idx="3">
-            <a:schemeClr val="accent1"/>
-          </a:fillRef>
-          <a:effectRef idx="2">
-            <a:schemeClr val="accent1"/>
-          </a:effectRef>
-          <a:fontRef idx="minor">
-            <a:schemeClr val="lt1"/>
-          </a:fontRef>
-        </p:style>
-        <p:txBody>
-          <a:bodyPr rtlCol="0" anchor="ctr"/>
-          <a:lstStyle/>
-          <a:p>
-            <a:pPr algn="ctr"/>
-          </a:p>
-        </p:txBody>
-      </p:sp>
-      <p:sp>
-        <p:nvSpPr>
-          <p:cNvPr id="13" name="TextBox 12"/>
-          <p:cNvSpPr txBox="1"/>
-          <p:nvPr/>
-        </p:nvSpPr>
-        <p:spPr>
-          <a:xfrm>
-            <a:off x="5669280" y="3182112"/>
-            <a:ext cx="5577840" cy="1280160"/>
-          </a:xfrm>
-          <a:prstGeom prst="rect">
-            <a:avLst/>
-          </a:prstGeom>
-          <a:noFill/>
-        </p:spPr>
-        <p:txBody>
-          <a:bodyPr wrap="square">
-            <a:spAutoFit/>
-          </a:bodyPr>
-          <a:lstStyle/>
-          <a:p>
-            <a:pPr>
-              <a:spcAft>
-                <a:spcPts val="200"/>
-              </a:spcAft>
-              <a:defRPr sz="1100" b="1">
-                <a:solidFill>
-                  <a:srgbClr val="0284C7"/>
-                </a:solidFill>
-              </a:defRPr>
-            </a:pPr>
-            <a:r>
-              <a:t>Resolution Implemented:</a:t>
-            </a:r>
-          </a:p>
-          <a:p>
-            <a:pPr>
-              <a:spcAft>
-                <a:spcPts val="300"/>
-              </a:spcAft>
-              <a:defRPr sz="900">
-                <a:solidFill>
-                  <a:srgbClr val="1E293B"/>
-                </a:solidFill>
-              </a:defRPr>
-            </a:pPr>
-            <a:r>
-              <a:t>Enforced strict immutable state updates, decoupled rendering loops from data ingestion, implemented virtualized list rendering, and utilized Chrome DevTools heap profiling to systematically eliminate closure leaks.</a:t>
-            </a:r>
-          </a:p>
-          <a:p>
-            <a:pPr>
-              <a:defRPr sz="900" b="1">
-                <a:solidFill>
-                  <a:srgbClr val="109563"/>
-                </a:solidFill>
-              </a:defRPr>
-            </a:pPr>
-            <a:r>
-              <a:t>Result: Impact: Guaranteed stable 60 FPS UI rendering and flat memory profiles across multi-day continuous ICU sessions.</a:t>
-            </a:r>
-          </a:p>
-        </p:txBody>
-      </p:sp>
-      <p:sp>
-        <p:nvSpPr>
-          <p:cNvPr id="14" name="Rounded Rectangle 13"/>
-          <p:cNvSpPr/>
-          <p:nvPr/>
-        </p:nvSpPr>
-        <p:spPr>
-          <a:xfrm>
-            <a:off x="731520" y="4681728"/>
-            <a:ext cx="10728655" cy="1481328"/>
-          </a:xfrm>
-          <a:prstGeom prst="roundRect">
-            <a:avLst/>
-          </a:prstGeom>
-          <a:solidFill>
-            <a:srgbClr val="FFFFFF"/>
-          </a:solidFill>
-          <a:ln w="12700">
-            <a:solidFill>
-              <a:srgbClr val="E2E8F0"/>
-            </a:solidFill>
-          </a:ln>
-        </p:spPr>
-        <p:style>
-          <a:lnRef idx="1">
-            <a:schemeClr val="accent1"/>
-          </a:lnRef>
-          <a:fillRef idx="3">
-            <a:schemeClr val="accent1"/>
-          </a:fillRef>
-          <a:effectRef idx="2">
-            <a:schemeClr val="accent1"/>
-          </a:effectRef>
-          <a:fontRef idx="minor">
-            <a:schemeClr val="lt1"/>
-          </a:fontRef>
-        </p:style>
-        <p:txBody>
-          <a:bodyPr rtlCol="0" anchor="ctr"/>
-          <a:lstStyle/>
-          <a:p>
-            <a:pPr algn="ctr"/>
-          </a:p>
-        </p:txBody>
-      </p:sp>
-      <p:sp>
-        <p:nvSpPr>
-          <p:cNvPr id="15" name="TextBox 14"/>
-          <p:cNvSpPr txBox="1"/>
-          <p:nvPr/>
-        </p:nvSpPr>
-        <p:spPr>
-          <a:xfrm>
-            <a:off x="914400" y="4791456"/>
-            <a:ext cx="4389120" cy="1280160"/>
-          </a:xfrm>
-          <a:prstGeom prst="rect">
-            <a:avLst/>
-          </a:prstGeom>
-          <a:noFill/>
-        </p:spPr>
-        <p:txBody>
-          <a:bodyPr wrap="square">
-            <a:spAutoFit/>
-          </a:bodyPr>
-          <a:lstStyle/>
-          <a:p>
-            <a:pPr>
-              <a:spcAft>
-                <a:spcPts val="300"/>
-              </a:spcAft>
-              <a:defRPr sz="1100" b="1">
-                <a:solidFill>
-                  <a:srgbClr val="0E7490"/>
-                </a:solidFill>
-              </a:defRPr>
-            </a:pPr>
-            <a:r>
-              <a:t>Challenge 3: High 3D Asset Payload &amp; Browser Lag in Web-Based 3D (SrushtiLabs / Voxelforge AI)</a:t>
-            </a:r>
-          </a:p>
-          <a:p>
-            <a:pPr>
-              <a:defRPr sz="900">
-                <a:solidFill>
-                  <a:srgbClr val="1E293B"/>
-                </a:solidFill>
-              </a:defRPr>
-            </a:pPr>
-            <a:r>
-              <a:t>Delivering detailed 3D models over the web created large download sizes, long initialization times, and frame drops on lower-spec client laptops and mobile devices.</a:t>
-            </a:r>
-          </a:p>
-        </p:txBody>
-      </p:sp>
-      <p:sp>
-        <p:nvSpPr>
-          <p:cNvPr id="16" name="Rectangle 15"/>
-          <p:cNvSpPr/>
-          <p:nvPr/>
-        </p:nvSpPr>
-        <p:spPr>
-          <a:xfrm>
-            <a:off x="5486400" y="4818888"/>
-            <a:ext cx="18288" cy="1188720"/>
-          </a:xfrm>
-          <a:prstGeom prst="rect">
-            <a:avLst/>
-          </a:prstGeom>
-          <a:solidFill>
-            <a:srgbClr val="E2E8F0"/>
-          </a:solidFill>
-          <a:ln>
-            <a:noFill/>
-          </a:ln>
-        </p:spPr>
-        <p:style>
-          <a:lnRef idx="1">
-            <a:schemeClr val="accent1"/>
-          </a:lnRef>
-          <a:fillRef idx="3">
-            <a:schemeClr val="accent1"/>
-          </a:fillRef>
-          <a:effectRef idx="2">
-            <a:schemeClr val="accent1"/>
-          </a:effectRef>
-          <a:fontRef idx="minor">
-            <a:schemeClr val="lt1"/>
-          </a:fontRef>
-        </p:style>
-        <p:txBody>
-          <a:bodyPr rtlCol="0" anchor="ctr"/>
-          <a:lstStyle/>
-          <a:p>
-            <a:pPr algn="ctr"/>
-          </a:p>
-        </p:txBody>
-      </p:sp>
-      <p:sp>
-        <p:nvSpPr>
-          <p:cNvPr id="17" name="TextBox 16"/>
-          <p:cNvSpPr txBox="1"/>
-          <p:nvPr/>
-        </p:nvSpPr>
-        <p:spPr>
-          <a:xfrm>
-            <a:off x="5669280" y="4791456"/>
-            <a:ext cx="5577840" cy="1280160"/>
-          </a:xfrm>
-          <a:prstGeom prst="rect">
-            <a:avLst/>
-          </a:prstGeom>
-          <a:noFill/>
-        </p:spPr>
-        <p:txBody>
-          <a:bodyPr wrap="square">
-            <a:spAutoFit/>
-          </a:bodyPr>
-          <a:lstStyle/>
-          <a:p>
-            <a:pPr>
-              <a:spcAft>
-                <a:spcPts val="200"/>
-              </a:spcAft>
-              <a:defRPr sz="1100" b="1">
-                <a:solidFill>
-                  <a:srgbClr val="0284C7"/>
-                </a:solidFill>
-              </a:defRPr>
-            </a:pPr>
-            <a:r>
-              <a:t>Resolution Implemented:</a:t>
-            </a:r>
-          </a:p>
-          <a:p>
-            <a:pPr>
-              <a:spcAft>
-                <a:spcPts val="300"/>
-              </a:spcAft>
-              <a:defRPr sz="900">
-                <a:solidFill>
-                  <a:srgbClr val="1E293B"/>
-                </a:solidFill>
-              </a:defRPr>
-            </a:pPr>
-            <a:r>
-              <a:t>Developed automated retopology workflows (ayam3d) to decimate unnecessary polygons while preserving silhouette geometry; baked normal maps and bundled assets into lightweight modular formats for WebGL.</a:t>
-            </a:r>
-          </a:p>
-          <a:p>
-            <a:pPr>
-              <a:defRPr sz="900" b="1">
-                <a:solidFill>
-                  <a:srgbClr val="109563"/>
-                </a:solidFill>
-              </a:defRPr>
-            </a:pPr>
-            <a:r>
-              <a:t>Result: Impact: Reduced 3D model payload sizes by up to 75%, enabling instant in-browser loading and smooth real-time manipulation.</a:t>
-            </a:r>
-          </a:p>
-        </p:txBody>
-      </p:sp>
-      <p:sp>
-        <p:nvSpPr>
-          <p:cNvPr id="18" name="TextBox 17"/>
+                <a:spcPts val="400"/>
+              </a:spcAft>
+              <a:defRPr sz="1150" b="1">
+                <a:solidFill>
+                  <a:srgbClr val="38BDF8"/>
+                </a:solidFill>
+              </a:defRPr>
+            </a:pPr>
+            <a:r>
+              <a:t>SECTION 3 · CONCLUSION &amp; ROLE ALIGNMENT</a:t>
+            </a:r>
+          </a:p>
+          <a:p>
+            <a:pPr>
+              <a:spcAft>
+                <a:spcPts val="1200"/>
+              </a:spcAft>
+              <a:defRPr sz="2100" b="1">
+                <a:solidFill>
+                  <a:srgbClr val="FFFFFF"/>
+                </a:solidFill>
+              </a:defRPr>
+            </a:pPr>
+            <a:r>
+              <a:t>Alignment to Senior Manager – IT &amp; Continuous Learning Pledge</a:t>
+            </a:r>
+          </a:p>
+          <a:p>
+            <a:pPr>
+              <a:defRPr b="1" sz="1050">
+                <a:solidFill>
+                  <a:srgbClr val="38BDF8"/>
+                </a:solidFill>
+              </a:defRPr>
+            </a:pPr>
+            <a:r>
+              <a:t>✔ Design and Engineering Synthesis: </a:t>
+            </a:r>
+          </a:p>
+          <a:p>
+            <a:pPr>
+              <a:spcAft>
+                <a:spcPts val="600"/>
+              </a:spcAft>
+              <a:defRPr sz="950">
+                <a:solidFill>
+                  <a:srgbClr val="CBD5E1"/>
+                </a:solidFill>
+              </a:defRPr>
+            </a:pPr>
+            <a:r>
+              <a:t>   Holding a postgraduate degree in Human Interface Design (M.S. in Computing, UK) combined with an engineering degree in Electronics and Communication (B.E.), I bring a rare, balanced capability spanning both human-centered UX design and deep technical software architecture.</a:t>
+            </a:r>
+          </a:p>
+          <a:p>
+            <a:pPr>
+              <a:defRPr b="1" sz="1050">
+                <a:solidFill>
+                  <a:srgbClr val="38BDF8"/>
+                </a:solidFill>
+              </a:defRPr>
+            </a:pPr>
+            <a:r>
+              <a:t>✔ Proven Breadth Across Startup Velocity &amp; Enterprise Scale: </a:t>
+            </a:r>
+          </a:p>
+          <a:p>
+            <a:pPr>
+              <a:spcAft>
+                <a:spcPts val="600"/>
+              </a:spcAft>
+              <a:defRPr sz="950">
+                <a:solidFill>
+                  <a:srgbClr val="CBD5E1"/>
+                </a:solidFill>
+              </a:defRPr>
+            </a:pPr>
+            <a:r>
+              <a:t>   My 18+ years of experience encompass leading agile, high-velocity startup product incubation (Technoyana, SrushtiLabs, Twitan, InnoBrik) as well as managing complex multi-year enterprise projects with stringent quality, security, and uptime mandates (Philips ICU Healthcare, Cisco Systems, UST Global, Ness).</a:t>
+            </a:r>
+          </a:p>
+          <a:p>
+            <a:pPr>
+              <a:defRPr b="1" sz="1050">
+                <a:solidFill>
+                  <a:srgbClr val="38BDF8"/>
+                </a:solidFill>
+              </a:defRPr>
+            </a:pPr>
+            <a:r>
+              <a:t>✔ Handling Products Across Every Stage of the Lifecycle: </a:t>
+            </a:r>
+          </a:p>
+          <a:p>
+            <a:pPr>
+              <a:spcAft>
+                <a:spcPts val="600"/>
+              </a:spcAft>
+              <a:defRPr sz="950">
+                <a:solidFill>
+                  <a:srgbClr val="CBD5E1"/>
+                </a:solidFill>
+              </a:defRPr>
+            </a:pPr>
+            <a:r>
+              <a:t>   Demonstrated expertise across every product phase: early discovery prototypes, building reusable design systems, legacy system migrations (Flash to Angular/React), production deployment, security compliance, and long-term customer support.</a:t>
+            </a:r>
+          </a:p>
+          <a:p>
+            <a:pPr>
+              <a:defRPr b="1" sz="1050">
+                <a:solidFill>
+                  <a:srgbClr val="38BDF8"/>
+                </a:solidFill>
+              </a:defRPr>
+            </a:pPr>
+            <a:r>
+              <a:t>✔ Pledge for Self-Training &amp; Certification: </a:t>
+            </a:r>
+          </a:p>
+          <a:p>
+            <a:pPr>
+              <a:spcAft>
+                <a:spcPts val="600"/>
+              </a:spcAft>
+              <a:defRPr sz="950">
+                <a:solidFill>
+                  <a:srgbClr val="CBD5E1"/>
+                </a:solidFill>
+              </a:defRPr>
+            </a:pPr>
+            <a:r>
+              <a:t>   I am fully committed to the success of the organization and team. As per the specific operational requirements of the Senior Manager – IT role, I pledge to proactively upskill myself and complete any required enterprise certifications (e.g., Cloud Architecture, ITIL, Cybersecurity, or project governance) to align completely with team goals and project needs.</a:t>
+            </a:r>
+          </a:p>
+          <a:p>
+            <a:br/>
+            <a:pPr>
+              <a:defRPr sz="1050" b="1">
+                <a:solidFill>
+                  <a:srgbClr val="FFFFFF"/>
+                </a:solidFill>
+              </a:defRPr>
+            </a:pPr>
+            <a:r>
+              <a:t>Maheshchandra Hegde  |  hid.mahesh@gmail.com  |  +91 9535253329 / 7022407280  |  hegdemahesh.in</a:t>
+            </a:r>
+          </a:p>
+        </p:txBody>
+      </p:sp>
+      <p:sp>
+        <p:nvSpPr>
+          <p:cNvPr id="5" name="TextBox 4"/>
           <p:cNvSpPr txBox="1"/>
           <p:nvPr/>
         </p:nvSpPr>
@@ -10917,12 +8960,12 @@
             <a:pPr>
               <a:defRPr sz="900">
                 <a:solidFill>
-                  <a:srgbClr val="64748B"/>
-                </a:solidFill>
-              </a:defRPr>
-            </a:pPr>
-            <a:r>
-              <a:t>Maheshchandra Hegde · Technical Work Experience &amp; Capability Presentation | Slide 9 of 11</a:t>
+                  <a:srgbClr val="94A3B8"/>
+                </a:solidFill>
+              </a:defRPr>
+            </a:pPr>
+            <a:r>
+              <a:t>Maheshchandra Hegde · Technical Work Experience Presentation | Slide 9 of 9</a:t>
             </a:r>
           </a:p>
         </p:txBody>

--- a/obayashi_it_presentation/Obayashi_Senior_Manager_IT_Presentation_Maheshchandra_Hegde.pptx
+++ b/obayashi_it_presentation/Obayashi_Senior_Manager_IT_Presentation_Maheshchandra_Hegde.pptx
@@ -3147,8 +3147,8 @@
         </p:nvSpPr>
         <p:spPr>
           <a:xfrm>
-            <a:off x="731520" y="731520"/>
-            <a:ext cx="3108960" cy="5440680"/>
+            <a:off x="731520" y="685800"/>
+            <a:ext cx="3108960" cy="5532120"/>
           </a:xfrm>
           <a:prstGeom prst="roundRect">
             <a:avLst/>
@@ -3200,8 +3200,8 @@
         </p:blipFill>
         <p:spPr>
           <a:xfrm>
-            <a:off x="914400" y="914400"/>
-            <a:ext cx="2743200" cy="3657600"/>
+            <a:off x="914400" y="868680"/>
+            <a:ext cx="2743200" cy="3474720"/>
           </a:xfrm>
           <a:prstGeom prst="rect">
             <a:avLst/>
@@ -3216,8 +3216,8 @@
         </p:nvSpPr>
         <p:spPr>
           <a:xfrm>
-            <a:off x="822960" y="4663440"/>
-            <a:ext cx="2926080" cy="1371600"/>
+            <a:off x="868680" y="4480560"/>
+            <a:ext cx="2834640" cy="1645920"/>
           </a:xfrm>
           <a:prstGeom prst="rect">
             <a:avLst/>
@@ -3231,7 +3231,10 @@
           <a:lstStyle/>
           <a:p>
             <a:pPr>
-              <a:defRPr sz="950" b="1">
+              <a:spcAft>
+                <a:spcPts val="300"/>
+              </a:spcAft>
+              <a:defRPr sz="1100" b="1">
                 <a:solidFill>
                   <a:srgbClr val="E2E8F0"/>
                 </a:solidFill>
@@ -3243,7 +3246,10 @@
           </a:p>
           <a:p>
             <a:pPr>
-              <a:defRPr sz="900">
+              <a:spcAft>
+                <a:spcPts val="300"/>
+              </a:spcAft>
+              <a:defRPr sz="1050">
                 <a:solidFill>
                   <a:srgbClr val="CBD5E1"/>
                 </a:solidFill>
@@ -3255,7 +3261,10 @@
           </a:p>
           <a:p>
             <a:pPr>
-              <a:defRPr sz="900">
+              <a:spcAft>
+                <a:spcPts val="300"/>
+              </a:spcAft>
+              <a:defRPr sz="1050">
                 <a:solidFill>
                   <a:srgbClr val="38BDF8"/>
                 </a:solidFill>
@@ -3267,14 +3276,29 @@
           </a:p>
           <a:p>
             <a:pPr>
-              <a:defRPr sz="850">
+              <a:spcAft>
+                <a:spcPts val="200"/>
+              </a:spcAft>
+              <a:defRPr sz="1000" b="1">
                 <a:solidFill>
                   <a:srgbClr val="38BDF8"/>
                 </a:solidFill>
               </a:defRPr>
             </a:pPr>
             <a:r>
-              <a:t>hegdemahesh.in | linkedin.com/in/maheshchandrahegde</a:t>
+              <a:t>hegdemahesh.in</a:t>
+            </a:r>
+          </a:p>
+          <a:p>
+            <a:pPr>
+              <a:defRPr sz="950">
+                <a:solidFill>
+                  <a:srgbClr val="38BDF8"/>
+                </a:solidFill>
+              </a:defRPr>
+            </a:pPr>
+            <a:r>
+              <a:t>linkedin.com/in/maheshchandrahegde</a:t>
             </a:r>
           </a:p>
         </p:txBody>
@@ -3287,8 +3311,8 @@
         </p:nvSpPr>
         <p:spPr>
           <a:xfrm>
-            <a:off x="4069080" y="731520"/>
-            <a:ext cx="7406640" cy="5440680"/>
+            <a:off x="4069080" y="685800"/>
+            <a:ext cx="7406640" cy="5532120"/>
           </a:xfrm>
           <a:prstGeom prst="roundRect">
             <a:avLst/>
@@ -3332,8 +3356,8 @@
         </p:nvSpPr>
         <p:spPr>
           <a:xfrm>
-            <a:off x="4434840" y="960120"/>
-            <a:ext cx="6675120" cy="4937760"/>
+            <a:off x="4434840" y="868680"/>
+            <a:ext cx="6675120" cy="5120640"/>
           </a:xfrm>
           <a:prstGeom prst="rect">
             <a:avLst/>
@@ -3350,7 +3374,7 @@
               <a:spcAft>
                 <a:spcPts val="400"/>
               </a:spcAft>
-              <a:defRPr sz="1100" b="1">
+              <a:defRPr sz="1200" b="1">
                 <a:solidFill>
                   <a:srgbClr val="38BDF8"/>
                 </a:solidFill>
@@ -3365,7 +3389,7 @@
               <a:spcAft>
                 <a:spcPts val="400"/>
               </a:spcAft>
-              <a:defRPr sz="2800" b="1">
+              <a:defRPr sz="3200" b="1">
                 <a:solidFill>
                   <a:srgbClr val="FFFFFF"/>
                 </a:solidFill>
@@ -3380,7 +3404,7 @@
               <a:spcAft>
                 <a:spcPts val="1200"/>
               </a:spcAft>
-              <a:defRPr sz="1300" b="1">
+              <a:defRPr sz="1400" b="1">
                 <a:solidFill>
                   <a:srgbClr val="0284C7"/>
                 </a:solidFill>
@@ -3395,9 +3419,9 @@
               <a:spcAft>
                 <a:spcPts val="1000"/>
               </a:spcAft>
-              <a:defRPr sz="1000">
-                <a:solidFill>
-                  <a:srgbClr val="CBD5E1"/>
+              <a:defRPr sz="1100">
+                <a:solidFill>
+                  <a:srgbClr val="E2E8F0"/>
                 </a:solidFill>
               </a:defRPr>
             </a:pPr>
@@ -3407,7 +3431,7 @@
             <a:br/>
             <a:br/>
             <a:r>
-              <a:t>• Twitan.com — AI-driven sports management app &amp; operational SaaS suite (Shutlify badminton OS).</a:t>
+              <a:t>• Twitan.com — AI-driven sports tournament management APP &amp; operational SaaS suite (Shutlify badminton OS).</a:t>
             </a:r>
             <a:br/>
             <a:r>
@@ -3416,19 +3440,19 @@
             <a:br/>
             <a:br/>
             <a:r>
-              <a:t>Holds a postgraduate degree in Human Interface Design &amp; Development (M.S. in Computing, Robert Gordon University, UK) and an engineering background in Electronics &amp; Communication (B.E.). Expertise spans modern web/mobile stacks (React, TypeScript, Angular, Web Components, Node.js, Firebase), interactive 3D/PBR pipelines, and design-to-code automation.</a:t>
-            </a:r>
-          </a:p>
-          <a:p>
-            <a:pPr>
-              <a:defRPr sz="950" i="1">
-                <a:solidFill>
-                  <a:srgbClr val="94A3B8"/>
-                </a:solidFill>
-              </a:defRPr>
-            </a:pPr>
-            <a:r>
-              <a:t>Architectural Heritage: Growing up assisting my architect father in his studio provided my earliest practical foundation in architectural drawings, CAD drafting, and spatial visualization—cultivating a natural synergy between software systems and 3D engineering.</a:t>
+              <a:t>Founder &amp; CTO with a postgraduate degree in Human Interface Design and Development (M.S. in Computing, Robert Gordon University, UK) and an engineering background in Electronics &amp; Communication (B.E.). Expertise spans modern web/mobile stacks (React, TypeScript, Angular, Web Components, Node.js, Firebase), interactive 3D/PBR pipelines, and design-to-code automation.</a:t>
+            </a:r>
+          </a:p>
+          <a:p>
+            <a:pPr>
+              <a:defRPr sz="1050" i="1">
+                <a:solidFill>
+                  <a:srgbClr val="38BDF8"/>
+                </a:solidFill>
+              </a:defRPr>
+            </a:pPr>
+            <a:r>
+              <a:t>Architectural Heritage: Growing up assisting my architect father in his studio provided my earliest practical foundation in architectural drawings, building elevations, spatial planning, and CAD drafting—fostering a lifelong synergy between software systems and 3D spatial tech.</a:t>
             </a:r>
           </a:p>
         </p:txBody>
@@ -3456,7 +3480,7 @@
           <a:lstStyle/>
           <a:p>
             <a:pPr>
-              <a:defRPr sz="900">
+              <a:defRPr sz="1000">
                 <a:solidFill>
                   <a:srgbClr val="94A3B8"/>
                 </a:solidFill>
@@ -3537,8 +3561,8 @@
         </p:nvSpPr>
         <p:spPr>
           <a:xfrm>
-            <a:off x="731520" y="365760"/>
-            <a:ext cx="10698480" cy="274320"/>
+            <a:off x="731520" y="320040"/>
+            <a:ext cx="10698480" cy="292608"/>
           </a:xfrm>
           <a:prstGeom prst="rect">
             <a:avLst/>
@@ -3552,7 +3576,7 @@
           <a:lstStyle/>
           <a:p>
             <a:pPr>
-              <a:defRPr sz="1050" b="1">
+              <a:defRPr sz="1150" b="1">
                 <a:solidFill>
                   <a:srgbClr val="0E7490"/>
                 </a:solidFill>
@@ -3572,8 +3596,8 @@
         </p:nvSpPr>
         <p:spPr>
           <a:xfrm>
-            <a:off x="731520" y="658368"/>
-            <a:ext cx="10698480" cy="502920"/>
+            <a:off x="731520" y="621792"/>
+            <a:ext cx="10698480" cy="594360"/>
           </a:xfrm>
           <a:prstGeom prst="rect">
             <a:avLst/>
@@ -3587,7 +3611,7 @@
           <a:lstStyle/>
           <a:p>
             <a:pPr>
-              <a:defRPr sz="2100" b="1">
+              <a:defRPr sz="2300" b="1">
                 <a:solidFill>
                   <a:srgbClr val="0F172A"/>
                 </a:solidFill>
@@ -3607,7 +3631,7 @@
         </p:nvSpPr>
         <p:spPr>
           <a:xfrm>
-            <a:off x="731520" y="1234440"/>
+            <a:off x="731520" y="1243584"/>
             <a:ext cx="10728655" cy="22860"/>
           </a:xfrm>
           <a:prstGeom prst="rect">
@@ -3650,8 +3674,8 @@
         </p:nvSpPr>
         <p:spPr>
           <a:xfrm>
-            <a:off x="731520" y="1463040"/>
-            <a:ext cx="5230368" cy="4754880"/>
+            <a:off x="731520" y="1417320"/>
+            <a:ext cx="5230368" cy="4892040"/>
           </a:xfrm>
           <a:prstGeom prst="roundRect">
             <a:avLst/>
@@ -3695,8 +3719,8 @@
         </p:nvSpPr>
         <p:spPr>
           <a:xfrm>
-            <a:off x="914400" y="1645920"/>
-            <a:ext cx="4864608" cy="4389120"/>
+            <a:off x="960120" y="1600200"/>
+            <a:ext cx="4773168" cy="4526280"/>
           </a:xfrm>
           <a:prstGeom prst="rect">
             <a:avLst/>
@@ -3713,7 +3737,7 @@
               <a:spcAft>
                 <a:spcPts val="200"/>
               </a:spcAft>
-              <a:defRPr sz="1700" b="1">
+              <a:defRPr sz="2000" b="1">
                 <a:solidFill>
                   <a:srgbClr val="0F172A"/>
                 </a:solidFill>
@@ -3728,7 +3752,7 @@
               <a:spcAft>
                 <a:spcPts val="1200"/>
               </a:spcAft>
-              <a:defRPr sz="1100" b="1">
+              <a:defRPr sz="1200" b="1">
                 <a:solidFill>
                   <a:srgbClr val="0E7490"/>
                 </a:solidFill>
@@ -3740,7 +3764,7 @@
           </a:p>
           <a:p>
             <a:pPr>
-              <a:defRPr b="1" sz="1000">
+              <a:defRPr b="1" sz="1150">
                 <a:solidFill>
                   <a:srgbClr val="0F172A"/>
                 </a:solidFill>
@@ -3755,9 +3779,9 @@
               <a:spcAft>
                 <a:spcPts val="600"/>
               </a:spcAft>
-              <a:defRPr sz="950">
-                <a:solidFill>
-                  <a:srgbClr val="64748B"/>
+              <a:defRPr sz="1100">
+                <a:solidFill>
+                  <a:srgbClr val="475569"/>
                 </a:solidFill>
               </a:defRPr>
             </a:pPr>
@@ -3767,14 +3791,14 @@
           </a:p>
           <a:p>
             <a:pPr>
-              <a:defRPr b="1" sz="1000">
+              <a:defRPr b="1" sz="1150">
                 <a:solidFill>
                   <a:srgbClr val="0F172A"/>
                 </a:solidFill>
               </a:defRPr>
             </a:pPr>
             <a:r>
-              <a:t>• Core Product Innovation: </a:t>
+              <a:t>• Core Product: </a:t>
             </a:r>
           </a:p>
           <a:p>
@@ -3782,9 +3806,9 @@
               <a:spcAft>
                 <a:spcPts val="600"/>
               </a:spcAft>
-              <a:defRPr sz="950">
-                <a:solidFill>
-                  <a:srgbClr val="64748B"/>
+              <a:defRPr sz="1100">
+                <a:solidFill>
+                  <a:srgbClr val="475569"/>
                 </a:solidFill>
               </a:defRPr>
             </a:pPr>
@@ -3794,14 +3818,14 @@
           </a:p>
           <a:p>
             <a:pPr>
-              <a:defRPr b="1" sz="1000">
+              <a:defRPr b="1" sz="1150">
                 <a:solidFill>
                   <a:srgbClr val="0F172A"/>
                 </a:solidFill>
               </a:defRPr>
             </a:pPr>
             <a:r>
-              <a:t>• Multi-Platform Assembly: </a:t>
+              <a:t>• Gaming &amp; Visualization: </a:t>
             </a:r>
           </a:p>
           <a:p>
@@ -3809,26 +3833,26 @@
               <a:spcAft>
                 <a:spcPts val="600"/>
               </a:spcAft>
-              <a:defRPr sz="950">
-                <a:solidFill>
-                  <a:srgbClr val="64748B"/>
-                </a:solidFill>
-              </a:defRPr>
-            </a:pPr>
-            <a:r>
-              <a:t>  Produces game-ready, low-poly 3D models and bundles optimized for immediate integration into Unreal Engine, Unity, and real-time WebGL engines.</a:t>
-            </a:r>
-          </a:p>
-          <a:p>
-            <a:pPr>
-              <a:defRPr b="1" sz="1000">
+              <a:defRPr sz="1100">
+                <a:solidFill>
+                  <a:srgbClr val="475569"/>
+                </a:solidFill>
+              </a:defRPr>
+            </a:pPr>
+            <a:r>
+              <a:t>  Produces game-ready, low-poly modular 3D models and bundles optimized for immediate integration into Unreal Engine, Unity, and real-time WebGL engines.</a:t>
+            </a:r>
+          </a:p>
+          <a:p>
+            <a:pPr>
+              <a:defRPr b="1" sz="1150">
                 <a:solidFill>
                   <a:srgbClr val="0F172A"/>
                 </a:solidFill>
               </a:defRPr>
             </a:pPr>
             <a:r>
-              <a:t>• Design-to-Asset Speed: </a:t>
+              <a:t>• Prototyping Speed: </a:t>
             </a:r>
           </a:p>
           <a:p>
@@ -3836,26 +3860,26 @@
               <a:spcAft>
                 <a:spcPts val="600"/>
               </a:spcAft>
-              <a:defRPr sz="950">
-                <a:solidFill>
-                  <a:srgbClr val="64748B"/>
-                </a:solidFill>
-              </a:defRPr>
-            </a:pPr>
-            <a:r>
-              <a:t>  Automates prompt-to-3D geometry conversion, texture baking, and polygon optimization, reducing prototyping turnaround from days to minutes.</a:t>
-            </a:r>
-          </a:p>
-          <a:p>
-            <a:pPr>
-              <a:defRPr b="1" sz="1000">
+              <a:defRPr sz="1100">
+                <a:solidFill>
+                  <a:srgbClr val="475569"/>
+                </a:solidFill>
+              </a:defRPr>
+            </a:pPr>
+            <a:r>
+              <a:t>  Automates prompt-to-3D geometry conversion, texture baking, and polygon reduction, cutting 3D asset turnaround from days to minutes.</a:t>
+            </a:r>
+          </a:p>
+          <a:p>
+            <a:pPr>
+              <a:defRPr b="1" sz="1150">
                 <a:solidFill>
                   <a:srgbClr val="0F172A"/>
                 </a:solidFill>
               </a:defRPr>
             </a:pPr>
             <a:r>
-              <a:t>• Live Demonstration: </a:t>
+              <a:t>• Live Application: </a:t>
             </a:r>
           </a:p>
           <a:p>
@@ -3863,14 +3887,14 @@
               <a:spcAft>
                 <a:spcPts val="600"/>
               </a:spcAft>
-              <a:defRPr sz="950">
-                <a:solidFill>
-                  <a:srgbClr val="64748B"/>
-                </a:solidFill>
-              </a:defRPr>
-            </a:pPr>
-            <a:r>
-              <a:t>  Fully functional application deployed and accessible at srushtilabs.com/voxelforge/.</a:t>
+              <a:defRPr sz="1100">
+                <a:solidFill>
+                  <a:srgbClr val="475569"/>
+                </a:solidFill>
+              </a:defRPr>
+            </a:pPr>
+            <a:r>
+              <a:t>  Fully deployed and operational at srushtilabs.com/voxelforge/.</a:t>
             </a:r>
           </a:p>
         </p:txBody>
@@ -3883,8 +3907,8 @@
         </p:nvSpPr>
         <p:spPr>
           <a:xfrm>
-            <a:off x="6217920" y="1463040"/>
-            <a:ext cx="5230368" cy="4754880"/>
+            <a:off x="6217920" y="1417320"/>
+            <a:ext cx="5230368" cy="4892040"/>
           </a:xfrm>
           <a:prstGeom prst="roundRect">
             <a:avLst/>
@@ -3928,8 +3952,8 @@
         </p:nvSpPr>
         <p:spPr>
           <a:xfrm>
-            <a:off x="6400800" y="1645920"/>
-            <a:ext cx="4864608" cy="4389120"/>
+            <a:off x="6446520" y="1600200"/>
+            <a:ext cx="4773168" cy="4526280"/>
           </a:xfrm>
           <a:prstGeom prst="rect">
             <a:avLst/>
@@ -3946,7 +3970,7 @@
               <a:spcAft>
                 <a:spcPts val="200"/>
               </a:spcAft>
-              <a:defRPr sz="1700" b="1">
+              <a:defRPr sz="2000" b="1">
                 <a:solidFill>
                   <a:srgbClr val="0F172A"/>
                 </a:solidFill>
@@ -3961,7 +3985,7 @@
               <a:spcAft>
                 <a:spcPts val="1200"/>
               </a:spcAft>
-              <a:defRPr sz="1100" b="1">
+              <a:defRPr sz="1200" b="1">
                 <a:solidFill>
                   <a:srgbClr val="0284C7"/>
                 </a:solidFill>
@@ -3973,7 +3997,7 @@
           </a:p>
           <a:p>
             <a:pPr>
-              <a:defRPr b="1" sz="1000">
+              <a:defRPr b="1" sz="1150">
                 <a:solidFill>
                   <a:srgbClr val="0F172A"/>
                 </a:solidFill>
@@ -3988,9 +4012,9 @@
               <a:spcAft>
                 <a:spcPts val="600"/>
               </a:spcAft>
-              <a:defRPr sz="950">
-                <a:solidFill>
-                  <a:srgbClr val="64748B"/>
+              <a:defRPr sz="1100">
+                <a:solidFill>
+                  <a:srgbClr val="475569"/>
                 </a:solidFill>
               </a:defRPr>
             </a:pPr>
@@ -4000,7 +4024,7 @@
           </a:p>
           <a:p>
             <a:pPr>
-              <a:defRPr b="1" sz="1000">
+              <a:defRPr b="1" sz="1150">
                 <a:solidFill>
                   <a:srgbClr val="0F172A"/>
                 </a:solidFill>
@@ -4015,9 +4039,9 @@
               <a:spcAft>
                 <a:spcPts val="600"/>
               </a:spcAft>
-              <a:defRPr sz="950">
-                <a:solidFill>
-                  <a:srgbClr val="64748B"/>
+              <a:defRPr sz="1100">
+                <a:solidFill>
+                  <a:srgbClr val="475569"/>
                 </a:solidFill>
               </a:defRPr>
             </a:pPr>
@@ -4027,7 +4051,7 @@
           </a:p>
           <a:p>
             <a:pPr>
-              <a:defRPr b="1" sz="1000">
+              <a:defRPr b="1" sz="1150">
                 <a:solidFill>
                   <a:srgbClr val="0F172A"/>
                 </a:solidFill>
@@ -4042,19 +4066,19 @@
               <a:spcAft>
                 <a:spcPts val="600"/>
               </a:spcAft>
-              <a:defRPr sz="950">
-                <a:solidFill>
-                  <a:srgbClr val="64748B"/>
-                </a:solidFill>
-              </a:defRPr>
-            </a:pPr>
-            <a:r>
-              <a:t>  Successfully generated early investor interest, validating the commercial potential of real-time generative 3D synthesis for digital twins, architecture, and games.</a:t>
-            </a:r>
-          </a:p>
-          <a:p>
-            <a:pPr>
-              <a:defRPr b="1" sz="1000">
+              <a:defRPr sz="1100">
+                <a:solidFill>
+                  <a:srgbClr val="475569"/>
+                </a:solidFill>
+              </a:defRPr>
+            </a:pPr>
+            <a:r>
+              <a:t>  Successfully generated early investor interest, validating the market demand for real-time generative 3D synthesis.</a:t>
+            </a:r>
+          </a:p>
+          <a:p>
+            <a:pPr>
+              <a:defRPr b="1" sz="1150">
                 <a:solidFill>
                   <a:srgbClr val="0F172A"/>
                 </a:solidFill>
@@ -4069,19 +4093,19 @@
               <a:spcAft>
                 <a:spcPts val="600"/>
               </a:spcAft>
-              <a:defRPr sz="950">
-                <a:solidFill>
-                  <a:srgbClr val="64748B"/>
-                </a:solidFill>
-              </a:defRPr>
-            </a:pPr>
-            <a:r>
-              <a:t>  Currently under active development; seeking strategic industry partners and promoters to scale the underlying AI pipeline.</a:t>
-            </a:r>
-          </a:p>
-          <a:p>
-            <a:pPr>
-              <a:defRPr b="1" sz="1000">
+              <a:defRPr sz="1100">
+                <a:solidFill>
+                  <a:srgbClr val="475569"/>
+                </a:solidFill>
+              </a:defRPr>
+            </a:pPr>
+            <a:r>
+              <a:t>  Currently under active development; actively seeking partners and promoters to help scale the AI pipeline.</a:t>
+            </a:r>
+          </a:p>
+          <a:p>
+            <a:pPr>
+              <a:defRPr b="1" sz="1150">
                 <a:solidFill>
                   <a:srgbClr val="0F172A"/>
                 </a:solidFill>
@@ -4096,14 +4120,14 @@
               <a:spcAft>
                 <a:spcPts val="600"/>
               </a:spcAft>
-              <a:defRPr sz="950">
-                <a:solidFill>
-                  <a:srgbClr val="64748B"/>
-                </a:solidFill>
-              </a:defRPr>
-            </a:pPr>
-            <a:r>
-              <a:t>  Preliminary landing page and concept documentation available at ayam3d.in.</a:t>
+              <a:defRPr sz="1100">
+                <a:solidFill>
+                  <a:srgbClr val="475569"/>
+                </a:solidFill>
+              </a:defRPr>
+            </a:pPr>
+            <a:r>
+              <a:t>  Preliminary concept documentation available at ayam3d.in.</a:t>
             </a:r>
           </a:p>
         </p:txBody>
@@ -4131,9 +4155,9 @@
           <a:lstStyle/>
           <a:p>
             <a:pPr>
-              <a:defRPr sz="900">
-                <a:solidFill>
-                  <a:srgbClr val="64748B"/>
+              <a:defRPr sz="1000">
+                <a:solidFill>
+                  <a:srgbClr val="475569"/>
                 </a:solidFill>
               </a:defRPr>
             </a:pPr>
@@ -4212,8 +4236,8 @@
         </p:nvSpPr>
         <p:spPr>
           <a:xfrm>
-            <a:off x="731520" y="365760"/>
-            <a:ext cx="10698480" cy="274320"/>
+            <a:off x="731520" y="320040"/>
+            <a:ext cx="10698480" cy="292608"/>
           </a:xfrm>
           <a:prstGeom prst="rect">
             <a:avLst/>
@@ -4227,7 +4251,7 @@
           <a:lstStyle/>
           <a:p>
             <a:pPr>
-              <a:defRPr sz="1050" b="1">
+              <a:defRPr sz="1150" b="1">
                 <a:solidFill>
                   <a:srgbClr val="0E7490"/>
                 </a:solidFill>
@@ -4247,8 +4271,8 @@
         </p:nvSpPr>
         <p:spPr>
           <a:xfrm>
-            <a:off x="731520" y="658368"/>
-            <a:ext cx="10698480" cy="502920"/>
+            <a:off x="731520" y="621792"/>
+            <a:ext cx="10698480" cy="594360"/>
           </a:xfrm>
           <a:prstGeom prst="rect">
             <a:avLst/>
@@ -4262,7 +4286,7 @@
           <a:lstStyle/>
           <a:p>
             <a:pPr>
-              <a:defRPr sz="2100" b="1">
+              <a:defRPr sz="2300" b="1">
                 <a:solidFill>
                   <a:srgbClr val="0F172A"/>
                 </a:solidFill>
@@ -4282,7 +4306,7 @@
         </p:nvSpPr>
         <p:spPr>
           <a:xfrm>
-            <a:off x="731520" y="1234440"/>
+            <a:off x="731520" y="1243584"/>
             <a:ext cx="10728655" cy="22860"/>
           </a:xfrm>
           <a:prstGeom prst="rect">
@@ -4325,8 +4349,8 @@
         </p:nvSpPr>
         <p:spPr>
           <a:xfrm>
-            <a:off x="731520" y="1463040"/>
-            <a:ext cx="4114800" cy="4754880"/>
+            <a:off x="731520" y="1417320"/>
+            <a:ext cx="4114800" cy="4892040"/>
           </a:xfrm>
           <a:prstGeom prst="roundRect">
             <a:avLst/>
@@ -4370,8 +4394,8 @@
         </p:nvSpPr>
         <p:spPr>
           <a:xfrm>
-            <a:off x="960120" y="1645920"/>
-            <a:ext cx="3657600" cy="4389120"/>
+            <a:off x="960120" y="1600200"/>
+            <a:ext cx="3657600" cy="4480560"/>
           </a:xfrm>
           <a:prstGeom prst="rect">
             <a:avLst/>
@@ -4388,7 +4412,7 @@
               <a:spcAft>
                 <a:spcPts val="200"/>
               </a:spcAft>
-              <a:defRPr sz="1700" b="1">
+              <a:defRPr sz="2000" b="1">
                 <a:solidFill>
                   <a:srgbClr val="0F172A"/>
                 </a:solidFill>
@@ -4401,9 +4425,9 @@
           <a:p>
             <a:pPr>
               <a:spcAft>
-                <a:spcPts val="1000"/>
-              </a:spcAft>
-              <a:defRPr sz="1100" b="1">
+                <a:spcPts val="1200"/>
+              </a:spcAft>
+              <a:defRPr sz="1200" b="1">
                 <a:solidFill>
                   <a:srgbClr val="0E7490"/>
                 </a:solidFill>
@@ -4415,7 +4439,7 @@
           </a:p>
           <a:p>
             <a:pPr>
-              <a:defRPr b="1" sz="1000">
+              <a:defRPr b="1" sz="1150">
                 <a:solidFill>
                   <a:srgbClr val="0F172A"/>
                 </a:solidFill>
@@ -4428,11 +4452,11 @@
           <a:p>
             <a:pPr>
               <a:spcAft>
-                <a:spcPts val="600"/>
-              </a:spcAft>
-              <a:defRPr sz="950">
-                <a:solidFill>
-                  <a:srgbClr val="64748B"/>
+                <a:spcPts val="700"/>
+              </a:spcAft>
+              <a:defRPr sz="1100">
+                <a:solidFill>
+                  <a:srgbClr val="475569"/>
                 </a:solidFill>
               </a:defRPr>
             </a:pPr>
@@ -4442,7 +4466,7 @@
           </a:p>
           <a:p>
             <a:pPr>
-              <a:defRPr b="1" sz="1000">
+              <a:defRPr b="1" sz="1150">
                 <a:solidFill>
                   <a:srgbClr val="0F172A"/>
                 </a:solidFill>
@@ -4455,11 +4479,11 @@
           <a:p>
             <a:pPr>
               <a:spcAft>
-                <a:spcPts val="600"/>
-              </a:spcAft>
-              <a:defRPr sz="950">
-                <a:solidFill>
-                  <a:srgbClr val="64748B"/>
+                <a:spcPts val="700"/>
+              </a:spcAft>
+              <a:defRPr sz="1100">
+                <a:solidFill>
+                  <a:srgbClr val="475569"/>
                 </a:solidFill>
               </a:defRPr>
             </a:pPr>
@@ -4469,7 +4493,7 @@
           </a:p>
           <a:p>
             <a:pPr>
-              <a:defRPr b="1" sz="1000">
+              <a:defRPr b="1" sz="1150">
                 <a:solidFill>
                   <a:srgbClr val="0F172A"/>
                 </a:solidFill>
@@ -4482,11 +4506,11 @@
           <a:p>
             <a:pPr>
               <a:spcAft>
-                <a:spcPts val="600"/>
-              </a:spcAft>
-              <a:defRPr sz="950">
-                <a:solidFill>
-                  <a:srgbClr val="64748B"/>
+                <a:spcPts val="700"/>
+              </a:spcAft>
+              <a:defRPr sz="1100">
+                <a:solidFill>
+                  <a:srgbClr val="475569"/>
                 </a:solidFill>
               </a:defRPr>
             </a:pPr>
@@ -4496,7 +4520,7 @@
           </a:p>
           <a:p>
             <a:pPr>
-              <a:defRPr b="1" sz="1000">
+              <a:defRPr b="1" sz="1150">
                 <a:solidFill>
                   <a:srgbClr val="0F172A"/>
                 </a:solidFill>
@@ -4509,11 +4533,11 @@
           <a:p>
             <a:pPr>
               <a:spcAft>
-                <a:spcPts val="600"/>
-              </a:spcAft>
-              <a:defRPr sz="950">
-                <a:solidFill>
-                  <a:srgbClr val="64748B"/>
+                <a:spcPts val="700"/>
+              </a:spcAft>
+              <a:defRPr sz="1100">
+                <a:solidFill>
+                  <a:srgbClr val="475569"/>
                 </a:solidFill>
               </a:defRPr>
             </a:pPr>
@@ -4523,7 +4547,7 @@
           </a:p>
           <a:p>
             <a:pPr>
-              <a:defRPr b="1" sz="1000">
+              <a:defRPr b="1" sz="1150">
                 <a:solidFill>
                   <a:srgbClr val="0F172A"/>
                 </a:solidFill>
@@ -4536,11 +4560,11 @@
           <a:p>
             <a:pPr>
               <a:spcAft>
-                <a:spcPts val="600"/>
-              </a:spcAft>
-              <a:defRPr sz="950">
-                <a:solidFill>
-                  <a:srgbClr val="64748B"/>
+                <a:spcPts val="700"/>
+              </a:spcAft>
+              <a:defRPr sz="1100">
+                <a:solidFill>
+                  <a:srgbClr val="475569"/>
                 </a:solidFill>
               </a:defRPr>
             </a:pPr>
@@ -4558,8 +4582,8 @@
         </p:nvSpPr>
         <p:spPr>
           <a:xfrm>
-            <a:off x="5074920" y="1463040"/>
-            <a:ext cx="6382512" cy="1463040"/>
+            <a:off x="5074920" y="1417320"/>
+            <a:ext cx="6382512" cy="1536192"/>
           </a:xfrm>
           <a:prstGeom prst="roundRect">
             <a:avLst/>
@@ -4603,8 +4627,8 @@
         </p:nvSpPr>
         <p:spPr>
           <a:xfrm>
-            <a:off x="5257800" y="1600200"/>
-            <a:ext cx="6016752" cy="1188720"/>
+            <a:off x="5303520" y="1554480"/>
+            <a:ext cx="5925312" cy="1280160"/>
           </a:xfrm>
           <a:prstGeom prst="rect">
             <a:avLst/>
@@ -4619,9 +4643,9 @@
           <a:p>
             <a:pPr>
               <a:spcAft>
-                <a:spcPts val="500"/>
-              </a:spcAft>
-              <a:defRPr sz="1200" b="1">
+                <a:spcPts val="400"/>
+              </a:spcAft>
+              <a:defRPr sz="1300" b="1">
                 <a:solidFill>
                   <a:srgbClr val="0284C7"/>
                 </a:solidFill>
@@ -4633,14 +4657,14 @@
           </a:p>
           <a:p>
             <a:pPr>
-              <a:defRPr sz="950">
+              <a:defRPr sz="1100">
                 <a:solidFill>
                   <a:srgbClr val="1E293B"/>
                 </a:solidFill>
               </a:defRPr>
             </a:pPr>
             <a:r>
-              <a:t>Successfully delivered the software to meet demanding medical quality requirements set by Philips and healthcare providers. Architected fail-safe clinical data rendering with zero memory leaks, ensuring bedside patient monitoring displays remain completely responsive across multi-day uninterrupted operations.</a:t>
+              <a:t>Successfully delivered the software to meet demanding medical quality requirements set by Philips and healthcare providers. Architected fail-safe clinical data rendering with zero memory leaks, ensuring bedside patient monitoring displays remain completely responsive across multi-day continuous operations.</a:t>
             </a:r>
           </a:p>
         </p:txBody>
@@ -4653,8 +4677,8 @@
         </p:nvSpPr>
         <p:spPr>
           <a:xfrm>
-            <a:off x="5074920" y="3072384"/>
-            <a:ext cx="6382512" cy="1463040"/>
+            <a:off x="5074920" y="3063240"/>
+            <a:ext cx="6382512" cy="1536192"/>
           </a:xfrm>
           <a:prstGeom prst="roundRect">
             <a:avLst/>
@@ -4698,8 +4722,8 @@
         </p:nvSpPr>
         <p:spPr>
           <a:xfrm>
-            <a:off x="5257800" y="3209544"/>
-            <a:ext cx="6016752" cy="1188720"/>
+            <a:off x="5303520" y="3200400"/>
+            <a:ext cx="5925312" cy="1280160"/>
           </a:xfrm>
           <a:prstGeom prst="rect">
             <a:avLst/>
@@ -4714,9 +4738,9 @@
           <a:p>
             <a:pPr>
               <a:spcAft>
-                <a:spcPts val="500"/>
-              </a:spcAft>
-              <a:defRPr sz="1200" b="1">
+                <a:spcPts val="400"/>
+              </a:spcAft>
+              <a:defRPr sz="1300" b="1">
                 <a:solidFill>
                   <a:srgbClr val="0284C7"/>
                 </a:solidFill>
@@ -4728,7 +4752,7 @@
           </a:p>
           <a:p>
             <a:pPr>
-              <a:defRPr sz="950">
+              <a:defRPr sz="1100">
                 <a:solidFill>
                   <a:srgbClr val="1E293B"/>
                 </a:solidFill>
@@ -4748,8 +4772,8 @@
         </p:nvSpPr>
         <p:spPr>
           <a:xfrm>
-            <a:off x="5074920" y="4681728"/>
-            <a:ext cx="6382512" cy="1463040"/>
+            <a:off x="5074920" y="4709160"/>
+            <a:ext cx="6382512" cy="1536192"/>
           </a:xfrm>
           <a:prstGeom prst="roundRect">
             <a:avLst/>
@@ -4793,8 +4817,8 @@
         </p:nvSpPr>
         <p:spPr>
           <a:xfrm>
-            <a:off x="5257800" y="4818888"/>
-            <a:ext cx="6016752" cy="1188720"/>
+            <a:off x="5303520" y="4846320"/>
+            <a:ext cx="5925312" cy="1280160"/>
           </a:xfrm>
           <a:prstGeom prst="rect">
             <a:avLst/>
@@ -4809,9 +4833,9 @@
           <a:p>
             <a:pPr>
               <a:spcAft>
-                <a:spcPts val="500"/>
-              </a:spcAft>
-              <a:defRPr sz="1200" b="1">
+                <a:spcPts val="400"/>
+              </a:spcAft>
+              <a:defRPr sz="1300" b="1">
                 <a:solidFill>
                   <a:srgbClr val="0284C7"/>
                 </a:solidFill>
@@ -4823,7 +4847,7 @@
           </a:p>
           <a:p>
             <a:pPr>
-              <a:defRPr sz="950">
+              <a:defRPr sz="1100">
                 <a:solidFill>
                   <a:srgbClr val="1E293B"/>
                 </a:solidFill>
@@ -4858,9 +4882,9 @@
           <a:lstStyle/>
           <a:p>
             <a:pPr>
-              <a:defRPr sz="900">
-                <a:solidFill>
-                  <a:srgbClr val="64748B"/>
+              <a:defRPr sz="1000">
+                <a:solidFill>
+                  <a:srgbClr val="475569"/>
                 </a:solidFill>
               </a:defRPr>
             </a:pPr>
@@ -4939,8 +4963,8 @@
         </p:nvSpPr>
         <p:spPr>
           <a:xfrm>
-            <a:off x="731520" y="365760"/>
-            <a:ext cx="10698480" cy="274320"/>
+            <a:off x="731520" y="320040"/>
+            <a:ext cx="10698480" cy="292608"/>
           </a:xfrm>
           <a:prstGeom prst="rect">
             <a:avLst/>
@@ -4954,7 +4978,7 @@
           <a:lstStyle/>
           <a:p>
             <a:pPr>
-              <a:defRPr sz="1050" b="1">
+              <a:defRPr sz="1150" b="1">
                 <a:solidFill>
                   <a:srgbClr val="0E7490"/>
                 </a:solidFill>
@@ -4974,8 +4998,8 @@
         </p:nvSpPr>
         <p:spPr>
           <a:xfrm>
-            <a:off x="731520" y="658368"/>
-            <a:ext cx="10698480" cy="502920"/>
+            <a:off x="731520" y="621792"/>
+            <a:ext cx="10698480" cy="594360"/>
           </a:xfrm>
           <a:prstGeom prst="rect">
             <a:avLst/>
@@ -4989,7 +5013,7 @@
           <a:lstStyle/>
           <a:p>
             <a:pPr>
-              <a:defRPr sz="2100" b="1">
+              <a:defRPr sz="2300" b="1">
                 <a:solidFill>
                   <a:srgbClr val="0F172A"/>
                 </a:solidFill>
@@ -5009,7 +5033,7 @@
         </p:nvSpPr>
         <p:spPr>
           <a:xfrm>
-            <a:off x="731520" y="1234440"/>
+            <a:off x="731520" y="1243584"/>
             <a:ext cx="10728655" cy="22860"/>
           </a:xfrm>
           <a:prstGeom prst="rect">
@@ -5052,8 +5076,8 @@
         </p:nvSpPr>
         <p:spPr>
           <a:xfrm>
-            <a:off x="731520" y="1463040"/>
-            <a:ext cx="5230368" cy="4754880"/>
+            <a:off x="731520" y="1417320"/>
+            <a:ext cx="5230368" cy="4892040"/>
           </a:xfrm>
           <a:prstGeom prst="roundRect">
             <a:avLst/>
@@ -5097,8 +5121,8 @@
         </p:nvSpPr>
         <p:spPr>
           <a:xfrm>
-            <a:off x="914400" y="1645920"/>
-            <a:ext cx="4864608" cy="4389120"/>
+            <a:off x="960120" y="1600200"/>
+            <a:ext cx="4773168" cy="4526280"/>
           </a:xfrm>
           <a:prstGeom prst="rect">
             <a:avLst/>
@@ -5115,7 +5139,7 @@
               <a:spcAft>
                 <a:spcPts val="200"/>
               </a:spcAft>
-              <a:defRPr sz="1700" b="1">
+              <a:defRPr sz="2000" b="1">
                 <a:solidFill>
                   <a:srgbClr val="0F172A"/>
                 </a:solidFill>
@@ -5130,7 +5154,7 @@
               <a:spcAft>
                 <a:spcPts val="1200"/>
               </a:spcAft>
-              <a:defRPr sz="1100" b="1">
+              <a:defRPr sz="1200" b="1">
                 <a:solidFill>
                   <a:srgbClr val="0E7490"/>
                 </a:solidFill>
@@ -5142,7 +5166,7 @@
           </a:p>
           <a:p>
             <a:pPr>
-              <a:defRPr b="1" sz="1000">
+              <a:defRPr b="1" sz="1150">
                 <a:solidFill>
                   <a:srgbClr val="0F172A"/>
                 </a:solidFill>
@@ -5157,9 +5181,9 @@
               <a:spcAft>
                 <a:spcPts val="600"/>
               </a:spcAft>
-              <a:defRPr sz="950">
-                <a:solidFill>
-                  <a:srgbClr val="64748B"/>
+              <a:defRPr sz="1100">
+                <a:solidFill>
+                  <a:srgbClr val="475569"/>
                 </a:solidFill>
               </a:defRPr>
             </a:pPr>
@@ -5169,7 +5193,7 @@
           </a:p>
           <a:p>
             <a:pPr>
-              <a:defRPr b="1" sz="1000">
+              <a:defRPr b="1" sz="1150">
                 <a:solidFill>
                   <a:srgbClr val="0F172A"/>
                 </a:solidFill>
@@ -5184,9 +5208,9 @@
               <a:spcAft>
                 <a:spcPts val="600"/>
               </a:spcAft>
-              <a:defRPr sz="950">
-                <a:solidFill>
-                  <a:srgbClr val="64748B"/>
+              <a:defRPr sz="1100">
+                <a:solidFill>
+                  <a:srgbClr val="475569"/>
                 </a:solidFill>
               </a:defRPr>
             </a:pPr>
@@ -5196,7 +5220,7 @@
           </a:p>
           <a:p>
             <a:pPr>
-              <a:defRPr b="1" sz="1000">
+              <a:defRPr b="1" sz="1150">
                 <a:solidFill>
                   <a:srgbClr val="0F172A"/>
                 </a:solidFill>
@@ -5211,9 +5235,9 @@
               <a:spcAft>
                 <a:spcPts val="600"/>
               </a:spcAft>
-              <a:defRPr sz="950">
-                <a:solidFill>
-                  <a:srgbClr val="64748B"/>
+              <a:defRPr sz="1100">
+                <a:solidFill>
+                  <a:srgbClr val="475569"/>
                 </a:solidFill>
               </a:defRPr>
             </a:pPr>
@@ -5223,7 +5247,7 @@
           </a:p>
           <a:p>
             <a:pPr>
-              <a:defRPr b="1" sz="1000">
+              <a:defRPr b="1" sz="1150">
                 <a:solidFill>
                   <a:srgbClr val="0F172A"/>
                 </a:solidFill>
@@ -5238,9 +5262,9 @@
               <a:spcAft>
                 <a:spcPts val="600"/>
               </a:spcAft>
-              <a:defRPr sz="950">
-                <a:solidFill>
-                  <a:srgbClr val="64748B"/>
+              <a:defRPr sz="1100">
+                <a:solidFill>
+                  <a:srgbClr val="475569"/>
                 </a:solidFill>
               </a:defRPr>
             </a:pPr>
@@ -5250,7 +5274,7 @@
           </a:p>
           <a:p>
             <a:pPr>
-              <a:defRPr b="1" sz="1000">
+              <a:defRPr b="1" sz="1150">
                 <a:solidFill>
                   <a:srgbClr val="0F172A"/>
                 </a:solidFill>
@@ -5265,9 +5289,9 @@
               <a:spcAft>
                 <a:spcPts val="600"/>
               </a:spcAft>
-              <a:defRPr sz="950">
-                <a:solidFill>
-                  <a:srgbClr val="64748B"/>
+              <a:defRPr sz="1100">
+                <a:solidFill>
+                  <a:srgbClr val="475569"/>
                 </a:solidFill>
               </a:defRPr>
             </a:pPr>
@@ -5285,8 +5309,8 @@
         </p:nvSpPr>
         <p:spPr>
           <a:xfrm>
-            <a:off x="6217920" y="1463040"/>
-            <a:ext cx="5230368" cy="4754880"/>
+            <a:off x="6217920" y="1417320"/>
+            <a:ext cx="5230368" cy="4892040"/>
           </a:xfrm>
           <a:prstGeom prst="roundRect">
             <a:avLst/>
@@ -5330,8 +5354,8 @@
         </p:nvSpPr>
         <p:spPr>
           <a:xfrm>
-            <a:off x="6400800" y="1645920"/>
-            <a:ext cx="4864608" cy="4389120"/>
+            <a:off x="6446520" y="1600200"/>
+            <a:ext cx="4773168" cy="4526280"/>
           </a:xfrm>
           <a:prstGeom prst="rect">
             <a:avLst/>
@@ -5348,7 +5372,7 @@
               <a:spcAft>
                 <a:spcPts val="200"/>
               </a:spcAft>
-              <a:defRPr sz="1700" b="1">
+              <a:defRPr sz="2000" b="1">
                 <a:solidFill>
                   <a:srgbClr val="0F172A"/>
                 </a:solidFill>
@@ -5363,7 +5387,7 @@
               <a:spcAft>
                 <a:spcPts val="1200"/>
               </a:spcAft>
-              <a:defRPr sz="1100" b="1">
+              <a:defRPr sz="1200" b="1">
                 <a:solidFill>
                   <a:srgbClr val="0284C7"/>
                 </a:solidFill>
@@ -5375,7 +5399,7 @@
           </a:p>
           <a:p>
             <a:pPr>
-              <a:defRPr b="1" sz="1000">
+              <a:defRPr b="1" sz="1150">
                 <a:solidFill>
                   <a:srgbClr val="0F172A"/>
                 </a:solidFill>
@@ -5390,9 +5414,9 @@
               <a:spcAft>
                 <a:spcPts val="600"/>
               </a:spcAft>
-              <a:defRPr sz="950">
-                <a:solidFill>
-                  <a:srgbClr val="64748B"/>
+              <a:defRPr sz="1100">
+                <a:solidFill>
+                  <a:srgbClr val="475569"/>
                 </a:solidFill>
               </a:defRPr>
             </a:pPr>
@@ -5402,7 +5426,7 @@
           </a:p>
           <a:p>
             <a:pPr>
-              <a:defRPr b="1" sz="1000">
+              <a:defRPr b="1" sz="1150">
                 <a:solidFill>
                   <a:srgbClr val="0F172A"/>
                 </a:solidFill>
@@ -5417,9 +5441,9 @@
               <a:spcAft>
                 <a:spcPts val="600"/>
               </a:spcAft>
-              <a:defRPr sz="950">
-                <a:solidFill>
-                  <a:srgbClr val="64748B"/>
+              <a:defRPr sz="1100">
+                <a:solidFill>
+                  <a:srgbClr val="475569"/>
                 </a:solidFill>
               </a:defRPr>
             </a:pPr>
@@ -5429,7 +5453,7 @@
           </a:p>
           <a:p>
             <a:pPr>
-              <a:defRPr b="1" sz="1000">
+              <a:defRPr b="1" sz="1150">
                 <a:solidFill>
                   <a:srgbClr val="0F172A"/>
                 </a:solidFill>
@@ -5444,9 +5468,9 @@
               <a:spcAft>
                 <a:spcPts val="600"/>
               </a:spcAft>
-              <a:defRPr sz="950">
-                <a:solidFill>
-                  <a:srgbClr val="64748B"/>
+              <a:defRPr sz="1100">
+                <a:solidFill>
+                  <a:srgbClr val="475569"/>
                 </a:solidFill>
               </a:defRPr>
             </a:pPr>
@@ -5456,7 +5480,7 @@
           </a:p>
           <a:p>
             <a:pPr>
-              <a:defRPr b="1" sz="1000">
+              <a:defRPr b="1" sz="1150">
                 <a:solidFill>
                   <a:srgbClr val="0F172A"/>
                 </a:solidFill>
@@ -5471,9 +5495,9 @@
               <a:spcAft>
                 <a:spcPts val="600"/>
               </a:spcAft>
-              <a:defRPr sz="950">
-                <a:solidFill>
-                  <a:srgbClr val="64748B"/>
+              <a:defRPr sz="1100">
+                <a:solidFill>
+                  <a:srgbClr val="475569"/>
                 </a:solidFill>
               </a:defRPr>
             </a:pPr>
@@ -5483,7 +5507,7 @@
           </a:p>
           <a:p>
             <a:pPr>
-              <a:defRPr b="1" sz="1000">
+              <a:defRPr b="1" sz="1150">
                 <a:solidFill>
                   <a:srgbClr val="0F172A"/>
                 </a:solidFill>
@@ -5498,9 +5522,9 @@
               <a:spcAft>
                 <a:spcPts val="600"/>
               </a:spcAft>
-              <a:defRPr sz="950">
-                <a:solidFill>
-                  <a:srgbClr val="64748B"/>
+              <a:defRPr sz="1100">
+                <a:solidFill>
+                  <a:srgbClr val="475569"/>
                 </a:solidFill>
               </a:defRPr>
             </a:pPr>
@@ -5533,9 +5557,9 @@
           <a:lstStyle/>
           <a:p>
             <a:pPr>
-              <a:defRPr sz="900">
-                <a:solidFill>
-                  <a:srgbClr val="64748B"/>
+              <a:defRPr sz="1000">
+                <a:solidFill>
+                  <a:srgbClr val="475569"/>
                 </a:solidFill>
               </a:defRPr>
             </a:pPr>
@@ -5614,8 +5638,8 @@
         </p:nvSpPr>
         <p:spPr>
           <a:xfrm>
-            <a:off x="731520" y="365760"/>
-            <a:ext cx="10698480" cy="274320"/>
+            <a:off x="731520" y="320040"/>
+            <a:ext cx="10698480" cy="292608"/>
           </a:xfrm>
           <a:prstGeom prst="rect">
             <a:avLst/>
@@ -5629,7 +5653,7 @@
           <a:lstStyle/>
           <a:p>
             <a:pPr>
-              <a:defRPr sz="1050" b="1">
+              <a:defRPr sz="1150" b="1">
                 <a:solidFill>
                   <a:srgbClr val="0E7490"/>
                 </a:solidFill>
@@ -5649,8 +5673,8 @@
         </p:nvSpPr>
         <p:spPr>
           <a:xfrm>
-            <a:off x="731520" y="658368"/>
-            <a:ext cx="10698480" cy="502920"/>
+            <a:off x="731520" y="621792"/>
+            <a:ext cx="10698480" cy="594360"/>
           </a:xfrm>
           <a:prstGeom prst="rect">
             <a:avLst/>
@@ -5664,7 +5688,7 @@
           <a:lstStyle/>
           <a:p>
             <a:pPr>
-              <a:defRPr sz="2100" b="1">
+              <a:defRPr sz="2300" b="1">
                 <a:solidFill>
                   <a:srgbClr val="0F172A"/>
                 </a:solidFill>
@@ -5684,7 +5708,7 @@
         </p:nvSpPr>
         <p:spPr>
           <a:xfrm>
-            <a:off x="731520" y="1234440"/>
+            <a:off x="731520" y="1243584"/>
             <a:ext cx="10728655" cy="22860"/>
           </a:xfrm>
           <a:prstGeom prst="rect">
@@ -5727,8 +5751,8 @@
         </p:nvSpPr>
         <p:spPr>
           <a:xfrm>
-            <a:off x="731520" y="1463040"/>
-            <a:ext cx="4114800" cy="4754880"/>
+            <a:off x="731520" y="1417320"/>
+            <a:ext cx="4114800" cy="4892040"/>
           </a:xfrm>
           <a:prstGeom prst="roundRect">
             <a:avLst/>
@@ -5772,8 +5796,8 @@
         </p:nvSpPr>
         <p:spPr>
           <a:xfrm>
-            <a:off x="960120" y="1645920"/>
-            <a:ext cx="3657600" cy="4389120"/>
+            <a:off x="960120" y="1600200"/>
+            <a:ext cx="3657600" cy="4480560"/>
           </a:xfrm>
           <a:prstGeom prst="rect">
             <a:avLst/>
@@ -5790,7 +5814,7 @@
               <a:spcAft>
                 <a:spcPts val="200"/>
               </a:spcAft>
-              <a:defRPr sz="1700" b="1">
+              <a:defRPr sz="2000" b="1">
                 <a:solidFill>
                   <a:srgbClr val="0F172A"/>
                 </a:solidFill>
@@ -5803,9 +5827,9 @@
           <a:p>
             <a:pPr>
               <a:spcAft>
-                <a:spcPts val="1000"/>
-              </a:spcAft>
-              <a:defRPr sz="1100" b="1">
+                <a:spcPts val="1200"/>
+              </a:spcAft>
+              <a:defRPr sz="1200" b="1">
                 <a:solidFill>
                   <a:srgbClr val="0E7490"/>
                 </a:solidFill>
@@ -5817,7 +5841,7 @@
           </a:p>
           <a:p>
             <a:pPr>
-              <a:defRPr b="1" sz="1000">
+              <a:defRPr b="1" sz="1150">
                 <a:solidFill>
                   <a:srgbClr val="0F172A"/>
                 </a:solidFill>
@@ -5830,11 +5854,11 @@
           <a:p>
             <a:pPr>
               <a:spcAft>
-                <a:spcPts val="600"/>
-              </a:spcAft>
-              <a:defRPr sz="950">
-                <a:solidFill>
-                  <a:srgbClr val="64748B"/>
+                <a:spcPts val="700"/>
+              </a:spcAft>
+              <a:defRPr sz="1100">
+                <a:solidFill>
+                  <a:srgbClr val="475569"/>
                 </a:solidFill>
               </a:defRPr>
             </a:pPr>
@@ -5844,7 +5868,7 @@
           </a:p>
           <a:p>
             <a:pPr>
-              <a:defRPr b="1" sz="1000">
+              <a:defRPr b="1" sz="1150">
                 <a:solidFill>
                   <a:srgbClr val="0F172A"/>
                 </a:solidFill>
@@ -5857,11 +5881,11 @@
           <a:p>
             <a:pPr>
               <a:spcAft>
-                <a:spcPts val="600"/>
-              </a:spcAft>
-              <a:defRPr sz="950">
-                <a:solidFill>
-                  <a:srgbClr val="64748B"/>
+                <a:spcPts val="700"/>
+              </a:spcAft>
+              <a:defRPr sz="1100">
+                <a:solidFill>
+                  <a:srgbClr val="475569"/>
                 </a:solidFill>
               </a:defRPr>
             </a:pPr>
@@ -5871,7 +5895,7 @@
           </a:p>
           <a:p>
             <a:pPr>
-              <a:defRPr b="1" sz="1000">
+              <a:defRPr b="1" sz="1150">
                 <a:solidFill>
                   <a:srgbClr val="0F172A"/>
                 </a:solidFill>
@@ -5884,11 +5908,11 @@
           <a:p>
             <a:pPr>
               <a:spcAft>
-                <a:spcPts val="600"/>
-              </a:spcAft>
-              <a:defRPr sz="950">
-                <a:solidFill>
-                  <a:srgbClr val="64748B"/>
+                <a:spcPts val="700"/>
+              </a:spcAft>
+              <a:defRPr sz="1100">
+                <a:solidFill>
+                  <a:srgbClr val="475569"/>
                 </a:solidFill>
               </a:defRPr>
             </a:pPr>
@@ -5898,7 +5922,7 @@
           </a:p>
           <a:p>
             <a:pPr>
-              <a:defRPr b="1" sz="1000">
+              <a:defRPr b="1" sz="1150">
                 <a:solidFill>
                   <a:srgbClr val="0F172A"/>
                 </a:solidFill>
@@ -5911,11 +5935,11 @@
           <a:p>
             <a:pPr>
               <a:spcAft>
-                <a:spcPts val="600"/>
-              </a:spcAft>
-              <a:defRPr sz="950">
-                <a:solidFill>
-                  <a:srgbClr val="64748B"/>
+                <a:spcPts val="700"/>
+              </a:spcAft>
+              <a:defRPr sz="1100">
+                <a:solidFill>
+                  <a:srgbClr val="475569"/>
                 </a:solidFill>
               </a:defRPr>
             </a:pPr>
@@ -5925,7 +5949,7 @@
           </a:p>
           <a:p>
             <a:pPr>
-              <a:defRPr b="1" sz="1000">
+              <a:defRPr b="1" sz="1150">
                 <a:solidFill>
                   <a:srgbClr val="0F172A"/>
                 </a:solidFill>
@@ -5938,11 +5962,11 @@
           <a:p>
             <a:pPr>
               <a:spcAft>
-                <a:spcPts val="600"/>
-              </a:spcAft>
-              <a:defRPr sz="950">
-                <a:solidFill>
-                  <a:srgbClr val="64748B"/>
+                <a:spcPts val="700"/>
+              </a:spcAft>
+              <a:defRPr sz="1100">
+                <a:solidFill>
+                  <a:srgbClr val="475569"/>
                 </a:solidFill>
               </a:defRPr>
             </a:pPr>
@@ -5960,8 +5984,8 @@
         </p:nvSpPr>
         <p:spPr>
           <a:xfrm>
-            <a:off x="5074920" y="1463040"/>
-            <a:ext cx="6382512" cy="1463040"/>
+            <a:off x="5074920" y="1417320"/>
+            <a:ext cx="6382512" cy="1536192"/>
           </a:xfrm>
           <a:prstGeom prst="roundRect">
             <a:avLst/>
@@ -6005,8 +6029,8 @@
         </p:nvSpPr>
         <p:spPr>
           <a:xfrm>
-            <a:off x="5257800" y="1600200"/>
-            <a:ext cx="6016752" cy="1188720"/>
+            <a:off x="5303520" y="1554480"/>
+            <a:ext cx="5925312" cy="1280160"/>
           </a:xfrm>
           <a:prstGeom prst="rect">
             <a:avLst/>
@@ -6021,9 +6045,9 @@
           <a:p>
             <a:pPr>
               <a:spcAft>
-                <a:spcPts val="500"/>
-              </a:spcAft>
-              <a:defRPr sz="1200" b="1">
+                <a:spcPts val="400"/>
+              </a:spcAft>
+              <a:defRPr sz="1300" b="1">
                 <a:solidFill>
                   <a:srgbClr val="0284C7"/>
                 </a:solidFill>
@@ -6035,7 +6059,7 @@
           </a:p>
           <a:p>
             <a:pPr>
-              <a:defRPr sz="950">
+              <a:defRPr sz="1100">
                 <a:solidFill>
                   <a:srgbClr val="1E293B"/>
                 </a:solidFill>
@@ -6055,8 +6079,8 @@
         </p:nvSpPr>
         <p:spPr>
           <a:xfrm>
-            <a:off x="5074920" y="3072384"/>
-            <a:ext cx="6382512" cy="1463040"/>
+            <a:off x="5074920" y="3063240"/>
+            <a:ext cx="6382512" cy="1536192"/>
           </a:xfrm>
           <a:prstGeom prst="roundRect">
             <a:avLst/>
@@ -6100,8 +6124,8 @@
         </p:nvSpPr>
         <p:spPr>
           <a:xfrm>
-            <a:off x="5257800" y="3209544"/>
-            <a:ext cx="6016752" cy="1188720"/>
+            <a:off x="5303520" y="3200400"/>
+            <a:ext cx="5925312" cy="1280160"/>
           </a:xfrm>
           <a:prstGeom prst="rect">
             <a:avLst/>
@@ -6116,9 +6140,9 @@
           <a:p>
             <a:pPr>
               <a:spcAft>
-                <a:spcPts val="500"/>
-              </a:spcAft>
-              <a:defRPr sz="1200" b="1">
+                <a:spcPts val="400"/>
+              </a:spcAft>
+              <a:defRPr sz="1300" b="1">
                 <a:solidFill>
                   <a:srgbClr val="0284C7"/>
                 </a:solidFill>
@@ -6130,7 +6154,7 @@
           </a:p>
           <a:p>
             <a:pPr>
-              <a:defRPr sz="950">
+              <a:defRPr sz="1100">
                 <a:solidFill>
                   <a:srgbClr val="1E293B"/>
                 </a:solidFill>
@@ -6150,8 +6174,8 @@
         </p:nvSpPr>
         <p:spPr>
           <a:xfrm>
-            <a:off x="5074920" y="4681728"/>
-            <a:ext cx="6382512" cy="1463040"/>
+            <a:off x="5074920" y="4709160"/>
+            <a:ext cx="6382512" cy="1536192"/>
           </a:xfrm>
           <a:prstGeom prst="roundRect">
             <a:avLst/>
@@ -6195,8 +6219,8 @@
         </p:nvSpPr>
         <p:spPr>
           <a:xfrm>
-            <a:off x="5257800" y="4818888"/>
-            <a:ext cx="6016752" cy="1188720"/>
+            <a:off x="5303520" y="4846320"/>
+            <a:ext cx="5925312" cy="1280160"/>
           </a:xfrm>
           <a:prstGeom prst="rect">
             <a:avLst/>
@@ -6211,9 +6235,9 @@
           <a:p>
             <a:pPr>
               <a:spcAft>
-                <a:spcPts val="500"/>
-              </a:spcAft>
-              <a:defRPr sz="1200" b="1">
+                <a:spcPts val="400"/>
+              </a:spcAft>
+              <a:defRPr sz="1300" b="1">
                 <a:solidFill>
                   <a:srgbClr val="0284C7"/>
                 </a:solidFill>
@@ -6225,7 +6249,7 @@
           </a:p>
           <a:p>
             <a:pPr>
-              <a:defRPr sz="950">
+              <a:defRPr sz="1100">
                 <a:solidFill>
                   <a:srgbClr val="1E293B"/>
                 </a:solidFill>
@@ -6260,9 +6284,9 @@
           <a:lstStyle/>
           <a:p>
             <a:pPr>
-              <a:defRPr sz="900">
-                <a:solidFill>
-                  <a:srgbClr val="64748B"/>
+              <a:defRPr sz="1000">
+                <a:solidFill>
+                  <a:srgbClr val="475569"/>
                 </a:solidFill>
               </a:defRPr>
             </a:pPr>
@@ -6341,8 +6365,8 @@
         </p:nvSpPr>
         <p:spPr>
           <a:xfrm>
-            <a:off x="731520" y="365760"/>
-            <a:ext cx="10698480" cy="274320"/>
+            <a:off x="731520" y="320040"/>
+            <a:ext cx="10698480" cy="292608"/>
           </a:xfrm>
           <a:prstGeom prst="rect">
             <a:avLst/>
@@ -6356,7 +6380,7 @@
           <a:lstStyle/>
           <a:p>
             <a:pPr>
-              <a:defRPr sz="1050" b="1">
+              <a:defRPr sz="1150" b="1">
                 <a:solidFill>
                   <a:srgbClr val="0E7490"/>
                 </a:solidFill>
@@ -6376,8 +6400,8 @@
         </p:nvSpPr>
         <p:spPr>
           <a:xfrm>
-            <a:off x="731520" y="658368"/>
-            <a:ext cx="10698480" cy="502920"/>
+            <a:off x="731520" y="621792"/>
+            <a:ext cx="10698480" cy="594360"/>
           </a:xfrm>
           <a:prstGeom prst="rect">
             <a:avLst/>
@@ -6391,7 +6415,7 @@
           <a:lstStyle/>
           <a:p>
             <a:pPr>
-              <a:defRPr sz="2100" b="1">
+              <a:defRPr sz="2300" b="1">
                 <a:solidFill>
                   <a:srgbClr val="0F172A"/>
                 </a:solidFill>
@@ -6411,7 +6435,7 @@
         </p:nvSpPr>
         <p:spPr>
           <a:xfrm>
-            <a:off x="731520" y="1234440"/>
+            <a:off x="731520" y="1243584"/>
             <a:ext cx="10728655" cy="22860"/>
           </a:xfrm>
           <a:prstGeom prst="rect">
@@ -6454,8 +6478,8 @@
         </p:nvSpPr>
         <p:spPr>
           <a:xfrm>
-            <a:off x="731520" y="1463040"/>
-            <a:ext cx="5230368" cy="4754880"/>
+            <a:off x="731520" y="1417320"/>
+            <a:ext cx="5230368" cy="4892040"/>
           </a:xfrm>
           <a:prstGeom prst="roundRect">
             <a:avLst/>
@@ -6499,8 +6523,8 @@
         </p:nvSpPr>
         <p:spPr>
           <a:xfrm>
-            <a:off x="914400" y="1645920"/>
-            <a:ext cx="4864608" cy="4389120"/>
+            <a:off x="960120" y="1600200"/>
+            <a:ext cx="4773168" cy="4526280"/>
           </a:xfrm>
           <a:prstGeom prst="rect">
             <a:avLst/>
@@ -6517,7 +6541,7 @@
               <a:spcAft>
                 <a:spcPts val="200"/>
               </a:spcAft>
-              <a:defRPr sz="1700" b="1">
+              <a:defRPr sz="2000" b="1">
                 <a:solidFill>
                   <a:srgbClr val="0F172A"/>
                 </a:solidFill>
@@ -6532,7 +6556,7 @@
               <a:spcAft>
                 <a:spcPts val="1200"/>
               </a:spcAft>
-              <a:defRPr sz="1100" b="1">
+              <a:defRPr sz="1200" b="1">
                 <a:solidFill>
                   <a:srgbClr val="0E7490"/>
                 </a:solidFill>
@@ -6544,7 +6568,7 @@
           </a:p>
           <a:p>
             <a:pPr>
-              <a:defRPr b="1" sz="1000">
+              <a:defRPr b="1" sz="1150">
                 <a:solidFill>
                   <a:srgbClr val="0F172A"/>
                 </a:solidFill>
@@ -6559,9 +6583,9 @@
               <a:spcAft>
                 <a:spcPts val="600"/>
               </a:spcAft>
-              <a:defRPr sz="950">
-                <a:solidFill>
-                  <a:srgbClr val="64748B"/>
+              <a:defRPr sz="1100">
+                <a:solidFill>
+                  <a:srgbClr val="475569"/>
                 </a:solidFill>
               </a:defRPr>
             </a:pPr>
@@ -6571,7 +6595,7 @@
           </a:p>
           <a:p>
             <a:pPr>
-              <a:defRPr b="1" sz="1000">
+              <a:defRPr b="1" sz="1150">
                 <a:solidFill>
                   <a:srgbClr val="0F172A"/>
                 </a:solidFill>
@@ -6586,9 +6610,9 @@
               <a:spcAft>
                 <a:spcPts val="600"/>
               </a:spcAft>
-              <a:defRPr sz="950">
-                <a:solidFill>
-                  <a:srgbClr val="64748B"/>
+              <a:defRPr sz="1100">
+                <a:solidFill>
+                  <a:srgbClr val="475569"/>
                 </a:solidFill>
               </a:defRPr>
             </a:pPr>
@@ -6598,7 +6622,7 @@
           </a:p>
           <a:p>
             <a:pPr>
-              <a:defRPr b="1" sz="1000">
+              <a:defRPr b="1" sz="1150">
                 <a:solidFill>
                   <a:srgbClr val="0F172A"/>
                 </a:solidFill>
@@ -6613,9 +6637,9 @@
               <a:spcAft>
                 <a:spcPts val="600"/>
               </a:spcAft>
-              <a:defRPr sz="950">
-                <a:solidFill>
-                  <a:srgbClr val="64748B"/>
+              <a:defRPr sz="1100">
+                <a:solidFill>
+                  <a:srgbClr val="475569"/>
                 </a:solidFill>
               </a:defRPr>
             </a:pPr>
@@ -6625,7 +6649,7 @@
           </a:p>
           <a:p>
             <a:pPr>
-              <a:defRPr b="1" sz="1000">
+              <a:defRPr b="1" sz="1150">
                 <a:solidFill>
                   <a:srgbClr val="0F172A"/>
                 </a:solidFill>
@@ -6640,9 +6664,9 @@
               <a:spcAft>
                 <a:spcPts val="600"/>
               </a:spcAft>
-              <a:defRPr sz="950">
-                <a:solidFill>
-                  <a:srgbClr val="64748B"/>
+              <a:defRPr sz="1100">
+                <a:solidFill>
+                  <a:srgbClr val="475569"/>
                 </a:solidFill>
               </a:defRPr>
             </a:pPr>
@@ -6652,7 +6676,7 @@
           </a:p>
           <a:p>
             <a:pPr>
-              <a:defRPr b="1" sz="1000">
+              <a:defRPr b="1" sz="1150">
                 <a:solidFill>
                   <a:srgbClr val="0F172A"/>
                 </a:solidFill>
@@ -6667,9 +6691,9 @@
               <a:spcAft>
                 <a:spcPts val="600"/>
               </a:spcAft>
-              <a:defRPr sz="950">
-                <a:solidFill>
-                  <a:srgbClr val="64748B"/>
+              <a:defRPr sz="1100">
+                <a:solidFill>
+                  <a:srgbClr val="475569"/>
                 </a:solidFill>
               </a:defRPr>
             </a:pPr>
@@ -6687,8 +6711,8 @@
         </p:nvSpPr>
         <p:spPr>
           <a:xfrm>
-            <a:off x="6217920" y="1463040"/>
-            <a:ext cx="5230368" cy="4754880"/>
+            <a:off x="6217920" y="1417320"/>
+            <a:ext cx="5230368" cy="4892040"/>
           </a:xfrm>
           <a:prstGeom prst="roundRect">
             <a:avLst/>
@@ -6732,8 +6756,8 @@
         </p:nvSpPr>
         <p:spPr>
           <a:xfrm>
-            <a:off x="6400800" y="1645920"/>
-            <a:ext cx="4864608" cy="4389120"/>
+            <a:off x="6446520" y="1600200"/>
+            <a:ext cx="4773168" cy="4526280"/>
           </a:xfrm>
           <a:prstGeom prst="rect">
             <a:avLst/>
@@ -6750,7 +6774,7 @@
               <a:spcAft>
                 <a:spcPts val="200"/>
               </a:spcAft>
-              <a:defRPr sz="1700" b="1">
+              <a:defRPr sz="2000" b="1">
                 <a:solidFill>
                   <a:srgbClr val="0F172A"/>
                 </a:solidFill>
@@ -6765,7 +6789,7 @@
               <a:spcAft>
                 <a:spcPts val="1200"/>
               </a:spcAft>
-              <a:defRPr sz="1100" b="1">
+              <a:defRPr sz="1200" b="1">
                 <a:solidFill>
                   <a:srgbClr val="0284C7"/>
                 </a:solidFill>
@@ -6777,7 +6801,7 @@
           </a:p>
           <a:p>
             <a:pPr>
-              <a:defRPr b="1" sz="1000">
+              <a:defRPr b="1" sz="1150">
                 <a:solidFill>
                   <a:srgbClr val="0F172A"/>
                 </a:solidFill>
@@ -6792,9 +6816,9 @@
               <a:spcAft>
                 <a:spcPts val="600"/>
               </a:spcAft>
-              <a:defRPr sz="950">
-                <a:solidFill>
-                  <a:srgbClr val="64748B"/>
+              <a:defRPr sz="1100">
+                <a:solidFill>
+                  <a:srgbClr val="475569"/>
                 </a:solidFill>
               </a:defRPr>
             </a:pPr>
@@ -6804,7 +6828,7 @@
           </a:p>
           <a:p>
             <a:pPr>
-              <a:defRPr b="1" sz="1000">
+              <a:defRPr b="1" sz="1150">
                 <a:solidFill>
                   <a:srgbClr val="0F172A"/>
                 </a:solidFill>
@@ -6819,9 +6843,9 @@
               <a:spcAft>
                 <a:spcPts val="600"/>
               </a:spcAft>
-              <a:defRPr sz="950">
-                <a:solidFill>
-                  <a:srgbClr val="64748B"/>
+              <a:defRPr sz="1100">
+                <a:solidFill>
+                  <a:srgbClr val="475569"/>
                 </a:solidFill>
               </a:defRPr>
             </a:pPr>
@@ -6831,7 +6855,7 @@
           </a:p>
           <a:p>
             <a:pPr>
-              <a:defRPr b="1" sz="1000">
+              <a:defRPr b="1" sz="1150">
                 <a:solidFill>
                   <a:srgbClr val="0F172A"/>
                 </a:solidFill>
@@ -6846,9 +6870,9 @@
               <a:spcAft>
                 <a:spcPts val="600"/>
               </a:spcAft>
-              <a:defRPr sz="950">
-                <a:solidFill>
-                  <a:srgbClr val="64748B"/>
+              <a:defRPr sz="1100">
+                <a:solidFill>
+                  <a:srgbClr val="475569"/>
                 </a:solidFill>
               </a:defRPr>
             </a:pPr>
@@ -6858,7 +6882,7 @@
           </a:p>
           <a:p>
             <a:pPr>
-              <a:defRPr b="1" sz="1000">
+              <a:defRPr b="1" sz="1150">
                 <a:solidFill>
                   <a:srgbClr val="0F172A"/>
                 </a:solidFill>
@@ -6873,9 +6897,9 @@
               <a:spcAft>
                 <a:spcPts val="600"/>
               </a:spcAft>
-              <a:defRPr sz="950">
-                <a:solidFill>
-                  <a:srgbClr val="64748B"/>
+              <a:defRPr sz="1100">
+                <a:solidFill>
+                  <a:srgbClr val="475569"/>
                 </a:solidFill>
               </a:defRPr>
             </a:pPr>
@@ -6885,7 +6909,7 @@
           </a:p>
           <a:p>
             <a:pPr>
-              <a:defRPr b="1" sz="1000">
+              <a:defRPr b="1" sz="1150">
                 <a:solidFill>
                   <a:srgbClr val="0F172A"/>
                 </a:solidFill>
@@ -6900,9 +6924,9 @@
               <a:spcAft>
                 <a:spcPts val="600"/>
               </a:spcAft>
-              <a:defRPr sz="950">
-                <a:solidFill>
-                  <a:srgbClr val="64748B"/>
+              <a:defRPr sz="1100">
+                <a:solidFill>
+                  <a:srgbClr val="475569"/>
                 </a:solidFill>
               </a:defRPr>
             </a:pPr>
@@ -6935,9 +6959,9 @@
           <a:lstStyle/>
           <a:p>
             <a:pPr>
-              <a:defRPr sz="900">
-                <a:solidFill>
-                  <a:srgbClr val="64748B"/>
+              <a:defRPr sz="1000">
+                <a:solidFill>
+                  <a:srgbClr val="475569"/>
                 </a:solidFill>
               </a:defRPr>
             </a:pPr>
@@ -7016,8 +7040,8 @@
         </p:nvSpPr>
         <p:spPr>
           <a:xfrm>
-            <a:off x="731520" y="365760"/>
-            <a:ext cx="10698480" cy="274320"/>
+            <a:off x="731520" y="320040"/>
+            <a:ext cx="10698480" cy="292608"/>
           </a:xfrm>
           <a:prstGeom prst="rect">
             <a:avLst/>
@@ -7031,7 +7055,7 @@
           <a:lstStyle/>
           <a:p>
             <a:pPr>
-              <a:defRPr sz="1050" b="1">
+              <a:defRPr sz="1150" b="1">
                 <a:solidFill>
                   <a:srgbClr val="0E7490"/>
                 </a:solidFill>
@@ -7051,8 +7075,8 @@
         </p:nvSpPr>
         <p:spPr>
           <a:xfrm>
-            <a:off x="731520" y="658368"/>
-            <a:ext cx="10698480" cy="502920"/>
+            <a:off x="731520" y="621792"/>
+            <a:ext cx="10698480" cy="594360"/>
           </a:xfrm>
           <a:prstGeom prst="rect">
             <a:avLst/>
@@ -7066,7 +7090,7 @@
           <a:lstStyle/>
           <a:p>
             <a:pPr>
-              <a:defRPr sz="2100" b="1">
+              <a:defRPr sz="2300" b="1">
                 <a:solidFill>
                   <a:srgbClr val="0F172A"/>
                 </a:solidFill>
@@ -7086,7 +7110,7 @@
         </p:nvSpPr>
         <p:spPr>
           <a:xfrm>
-            <a:off x="731520" y="1234440"/>
+            <a:off x="731520" y="1243584"/>
             <a:ext cx="10728655" cy="22860"/>
           </a:xfrm>
           <a:prstGeom prst="rect">
@@ -7129,8 +7153,8 @@
         </p:nvSpPr>
         <p:spPr>
           <a:xfrm>
-            <a:off x="731520" y="1463040"/>
-            <a:ext cx="5230368" cy="4754880"/>
+            <a:off x="731520" y="1417320"/>
+            <a:ext cx="5230368" cy="4892040"/>
           </a:xfrm>
           <a:prstGeom prst="roundRect">
             <a:avLst/>
@@ -7174,8 +7198,8 @@
         </p:nvSpPr>
         <p:spPr>
           <a:xfrm>
-            <a:off x="914400" y="1645920"/>
-            <a:ext cx="4864608" cy="4389120"/>
+            <a:off x="960120" y="1600200"/>
+            <a:ext cx="4773168" cy="4526280"/>
           </a:xfrm>
           <a:prstGeom prst="rect">
             <a:avLst/>
@@ -7192,7 +7216,7 @@
               <a:spcAft>
                 <a:spcPts val="200"/>
               </a:spcAft>
-              <a:defRPr sz="1700" b="1">
+              <a:defRPr sz="2000" b="1">
                 <a:solidFill>
                   <a:srgbClr val="0F172A"/>
                 </a:solidFill>
@@ -7207,7 +7231,7 @@
               <a:spcAft>
                 <a:spcPts val="1200"/>
               </a:spcAft>
-              <a:defRPr sz="1100" b="1">
+              <a:defRPr sz="1200" b="1">
                 <a:solidFill>
                   <a:srgbClr val="0E7490"/>
                 </a:solidFill>
@@ -7219,7 +7243,7 @@
           </a:p>
           <a:p>
             <a:pPr>
-              <a:defRPr b="1" sz="1000">
+              <a:defRPr b="1" sz="1150">
                 <a:solidFill>
                   <a:srgbClr val="0F172A"/>
                 </a:solidFill>
@@ -7234,9 +7258,9 @@
               <a:spcAft>
                 <a:spcPts val="600"/>
               </a:spcAft>
-              <a:defRPr sz="950">
-                <a:solidFill>
-                  <a:srgbClr val="64748B"/>
+              <a:defRPr sz="1100">
+                <a:solidFill>
+                  <a:srgbClr val="475569"/>
                 </a:solidFill>
               </a:defRPr>
             </a:pPr>
@@ -7246,7 +7270,7 @@
           </a:p>
           <a:p>
             <a:pPr>
-              <a:defRPr b="1" sz="1000">
+              <a:defRPr b="1" sz="1150">
                 <a:solidFill>
                   <a:srgbClr val="0F172A"/>
                 </a:solidFill>
@@ -7261,9 +7285,9 @@
               <a:spcAft>
                 <a:spcPts val="600"/>
               </a:spcAft>
-              <a:defRPr sz="950">
-                <a:solidFill>
-                  <a:srgbClr val="64748B"/>
+              <a:defRPr sz="1100">
+                <a:solidFill>
+                  <a:srgbClr val="475569"/>
                 </a:solidFill>
               </a:defRPr>
             </a:pPr>
@@ -7273,7 +7297,7 @@
           </a:p>
           <a:p>
             <a:pPr>
-              <a:defRPr b="1" sz="1000">
+              <a:defRPr b="1" sz="1150">
                 <a:solidFill>
                   <a:srgbClr val="0F172A"/>
                 </a:solidFill>
@@ -7288,9 +7312,9 @@
               <a:spcAft>
                 <a:spcPts val="600"/>
               </a:spcAft>
-              <a:defRPr sz="950">
-                <a:solidFill>
-                  <a:srgbClr val="64748B"/>
+              <a:defRPr sz="1100">
+                <a:solidFill>
+                  <a:srgbClr val="475569"/>
                 </a:solidFill>
               </a:defRPr>
             </a:pPr>
@@ -7300,7 +7324,7 @@
           </a:p>
           <a:p>
             <a:pPr>
-              <a:defRPr b="1" sz="1000">
+              <a:defRPr b="1" sz="1150">
                 <a:solidFill>
                   <a:srgbClr val="0F172A"/>
                 </a:solidFill>
@@ -7315,9 +7339,9 @@
               <a:spcAft>
                 <a:spcPts val="600"/>
               </a:spcAft>
-              <a:defRPr sz="950">
-                <a:solidFill>
-                  <a:srgbClr val="64748B"/>
+              <a:defRPr sz="1100">
+                <a:solidFill>
+                  <a:srgbClr val="475569"/>
                 </a:solidFill>
               </a:defRPr>
             </a:pPr>
@@ -7327,7 +7351,7 @@
           </a:p>
           <a:p>
             <a:pPr>
-              <a:defRPr b="1" sz="1000">
+              <a:defRPr b="1" sz="1150">
                 <a:solidFill>
                   <a:srgbClr val="0F172A"/>
                 </a:solidFill>
@@ -7342,9 +7366,9 @@
               <a:spcAft>
                 <a:spcPts val="600"/>
               </a:spcAft>
-              <a:defRPr sz="950">
-                <a:solidFill>
-                  <a:srgbClr val="64748B"/>
+              <a:defRPr sz="1100">
+                <a:solidFill>
+                  <a:srgbClr val="475569"/>
                 </a:solidFill>
               </a:defRPr>
             </a:pPr>
@@ -7362,8 +7386,8 @@
         </p:nvSpPr>
         <p:spPr>
           <a:xfrm>
-            <a:off x="6217920" y="1463040"/>
-            <a:ext cx="5230368" cy="4754880"/>
+            <a:off x="6217920" y="1417320"/>
+            <a:ext cx="5230368" cy="4892040"/>
           </a:xfrm>
           <a:prstGeom prst="roundRect">
             <a:avLst/>
@@ -7407,8 +7431,8 @@
         </p:nvSpPr>
         <p:spPr>
           <a:xfrm>
-            <a:off x="6400800" y="1645920"/>
-            <a:ext cx="4864608" cy="4389120"/>
+            <a:off x="6446520" y="1600200"/>
+            <a:ext cx="4773168" cy="4526280"/>
           </a:xfrm>
           <a:prstGeom prst="rect">
             <a:avLst/>
@@ -7425,7 +7449,7 @@
               <a:spcAft>
                 <a:spcPts val="200"/>
               </a:spcAft>
-              <a:defRPr sz="1700" b="1">
+              <a:defRPr sz="2000" b="1">
                 <a:solidFill>
                   <a:srgbClr val="0F172A"/>
                 </a:solidFill>
@@ -7440,7 +7464,7 @@
               <a:spcAft>
                 <a:spcPts val="1200"/>
               </a:spcAft>
-              <a:defRPr sz="1100" b="1">
+              <a:defRPr sz="1200" b="1">
                 <a:solidFill>
                   <a:srgbClr val="0284C7"/>
                 </a:solidFill>
@@ -7452,7 +7476,7 @@
           </a:p>
           <a:p>
             <a:pPr>
-              <a:defRPr b="1" sz="1000">
+              <a:defRPr b="1" sz="1150">
                 <a:solidFill>
                   <a:srgbClr val="0F172A"/>
                 </a:solidFill>
@@ -7467,9 +7491,9 @@
               <a:spcAft>
                 <a:spcPts val="600"/>
               </a:spcAft>
-              <a:defRPr sz="950">
-                <a:solidFill>
-                  <a:srgbClr val="64748B"/>
+              <a:defRPr sz="1100">
+                <a:solidFill>
+                  <a:srgbClr val="475569"/>
                 </a:solidFill>
               </a:defRPr>
             </a:pPr>
@@ -7479,7 +7503,7 @@
           </a:p>
           <a:p>
             <a:pPr>
-              <a:defRPr b="1" sz="1000">
+              <a:defRPr b="1" sz="1150">
                 <a:solidFill>
                   <a:srgbClr val="0F172A"/>
                 </a:solidFill>
@@ -7494,9 +7518,9 @@
               <a:spcAft>
                 <a:spcPts val="600"/>
               </a:spcAft>
-              <a:defRPr sz="950">
-                <a:solidFill>
-                  <a:srgbClr val="64748B"/>
+              <a:defRPr sz="1100">
+                <a:solidFill>
+                  <a:srgbClr val="475569"/>
                 </a:solidFill>
               </a:defRPr>
             </a:pPr>
@@ -7506,7 +7530,7 @@
           </a:p>
           <a:p>
             <a:pPr>
-              <a:defRPr b="1" sz="1000">
+              <a:defRPr b="1" sz="1150">
                 <a:solidFill>
                   <a:srgbClr val="0F172A"/>
                 </a:solidFill>
@@ -7521,9 +7545,9 @@
               <a:spcAft>
                 <a:spcPts val="600"/>
               </a:spcAft>
-              <a:defRPr sz="950">
-                <a:solidFill>
-                  <a:srgbClr val="64748B"/>
+              <a:defRPr sz="1100">
+                <a:solidFill>
+                  <a:srgbClr val="475569"/>
                 </a:solidFill>
               </a:defRPr>
             </a:pPr>
@@ -7533,7 +7557,7 @@
           </a:p>
           <a:p>
             <a:pPr>
-              <a:defRPr b="1" sz="1000">
+              <a:defRPr b="1" sz="1150">
                 <a:solidFill>
                   <a:srgbClr val="0F172A"/>
                 </a:solidFill>
@@ -7548,9 +7572,9 @@
               <a:spcAft>
                 <a:spcPts val="600"/>
               </a:spcAft>
-              <a:defRPr sz="950">
-                <a:solidFill>
-                  <a:srgbClr val="64748B"/>
+              <a:defRPr sz="1100">
+                <a:solidFill>
+                  <a:srgbClr val="475569"/>
                 </a:solidFill>
               </a:defRPr>
             </a:pPr>
@@ -7560,7 +7584,7 @@
           </a:p>
           <a:p>
             <a:pPr>
-              <a:defRPr b="1" sz="1000">
+              <a:defRPr b="1" sz="1150">
                 <a:solidFill>
                   <a:srgbClr val="0F172A"/>
                 </a:solidFill>
@@ -7575,9 +7599,9 @@
               <a:spcAft>
                 <a:spcPts val="600"/>
               </a:spcAft>
-              <a:defRPr sz="950">
-                <a:solidFill>
-                  <a:srgbClr val="64748B"/>
+              <a:defRPr sz="1100">
+                <a:solidFill>
+                  <a:srgbClr val="475569"/>
                 </a:solidFill>
               </a:defRPr>
             </a:pPr>
@@ -7610,9 +7634,9 @@
           <a:lstStyle/>
           <a:p>
             <a:pPr>
-              <a:defRPr sz="900">
-                <a:solidFill>
-                  <a:srgbClr val="64748B"/>
+              <a:defRPr sz="1000">
+                <a:solidFill>
+                  <a:srgbClr val="475569"/>
                 </a:solidFill>
               </a:defRPr>
             </a:pPr>
@@ -7691,8 +7715,8 @@
         </p:nvSpPr>
         <p:spPr>
           <a:xfrm>
-            <a:off x="731520" y="365760"/>
-            <a:ext cx="10698480" cy="274320"/>
+            <a:off x="731520" y="320040"/>
+            <a:ext cx="10698480" cy="292608"/>
           </a:xfrm>
           <a:prstGeom prst="rect">
             <a:avLst/>
@@ -7706,7 +7730,7 @@
           <a:lstStyle/>
           <a:p>
             <a:pPr>
-              <a:defRPr sz="1050" b="1">
+              <a:defRPr sz="1150" b="1">
                 <a:solidFill>
                   <a:srgbClr val="0E7490"/>
                 </a:solidFill>
@@ -7726,8 +7750,8 @@
         </p:nvSpPr>
         <p:spPr>
           <a:xfrm>
-            <a:off x="731520" y="658368"/>
-            <a:ext cx="10698480" cy="502920"/>
+            <a:off x="731520" y="621792"/>
+            <a:ext cx="10698480" cy="594360"/>
           </a:xfrm>
           <a:prstGeom prst="rect">
             <a:avLst/>
@@ -7741,7 +7765,7 @@
           <a:lstStyle/>
           <a:p>
             <a:pPr>
-              <a:defRPr sz="2100" b="1">
+              <a:defRPr sz="2300" b="1">
                 <a:solidFill>
                   <a:srgbClr val="0F172A"/>
                 </a:solidFill>
@@ -7761,7 +7785,7 @@
         </p:nvSpPr>
         <p:spPr>
           <a:xfrm>
-            <a:off x="731520" y="1234440"/>
+            <a:off x="731520" y="1243584"/>
             <a:ext cx="10728655" cy="22860"/>
           </a:xfrm>
           <a:prstGeom prst="rect">
@@ -7804,8 +7828,8 @@
         </p:nvSpPr>
         <p:spPr>
           <a:xfrm>
-            <a:off x="731520" y="1463040"/>
-            <a:ext cx="5230368" cy="2240280"/>
+            <a:off x="731520" y="1417320"/>
+            <a:ext cx="5230368" cy="2331720"/>
           </a:xfrm>
           <a:prstGeom prst="roundRect">
             <a:avLst/>
@@ -7849,8 +7873,8 @@
         </p:nvSpPr>
         <p:spPr>
           <a:xfrm>
-            <a:off x="740664" y="1472184"/>
-            <a:ext cx="5212080" cy="384048"/>
+            <a:off x="740664" y="1426464"/>
+            <a:ext cx="5212080" cy="402336"/>
           </a:xfrm>
           <a:prstGeom prst="rect">
             <a:avLst/>
@@ -7892,7 +7916,7 @@
         </p:nvSpPr>
         <p:spPr>
           <a:xfrm>
-            <a:off x="914400" y="1517904"/>
+            <a:off x="914400" y="1472184"/>
             <a:ext cx="4864608" cy="320040"/>
           </a:xfrm>
           <a:prstGeom prst="rect">
@@ -7907,7 +7931,7 @@
           <a:lstStyle/>
           <a:p>
             <a:pPr>
-              <a:defRPr sz="1100" b="1">
+              <a:defRPr sz="1200" b="1">
                 <a:solidFill>
                   <a:srgbClr val="FFFFFF"/>
                 </a:solidFill>
@@ -7927,8 +7951,8 @@
         </p:nvSpPr>
         <p:spPr>
           <a:xfrm>
-            <a:off x="914400" y="1901952"/>
-            <a:ext cx="4864608" cy="1737360"/>
+            <a:off x="914400" y="1874520"/>
+            <a:ext cx="4864608" cy="1828800"/>
           </a:xfrm>
           <a:prstGeom prst="rect">
             <a:avLst/>
@@ -7943,9 +7967,9 @@
           <a:p>
             <a:pPr>
               <a:spcAft>
-                <a:spcPts val="300"/>
-              </a:spcAft>
-              <a:defRPr sz="950">
+                <a:spcPts val="400"/>
+              </a:spcAft>
+              <a:defRPr sz="1050">
                 <a:solidFill>
                   <a:srgbClr val="1E293B"/>
                 </a:solidFill>
@@ -7958,9 +7982,9 @@
           <a:p>
             <a:pPr>
               <a:spcAft>
-                <a:spcPts val="300"/>
-              </a:spcAft>
-              <a:defRPr sz="950">
+                <a:spcPts val="400"/>
+              </a:spcAft>
+              <a:defRPr sz="1050">
                 <a:solidFill>
                   <a:srgbClr val="1E293B"/>
                 </a:solidFill>
@@ -7973,9 +7997,9 @@
           <a:p>
             <a:pPr>
               <a:spcAft>
-                <a:spcPts val="300"/>
-              </a:spcAft>
-              <a:defRPr sz="950">
+                <a:spcPts val="400"/>
+              </a:spcAft>
+              <a:defRPr sz="1050">
                 <a:solidFill>
                   <a:srgbClr val="1E293B"/>
                 </a:solidFill>
@@ -7988,9 +8012,9 @@
           <a:p>
             <a:pPr>
               <a:spcAft>
-                <a:spcPts val="300"/>
-              </a:spcAft>
-              <a:defRPr sz="950">
+                <a:spcPts val="400"/>
+              </a:spcAft>
+              <a:defRPr sz="1050">
                 <a:solidFill>
                   <a:srgbClr val="1E293B"/>
                 </a:solidFill>
@@ -8010,8 +8034,8 @@
         </p:nvSpPr>
         <p:spPr>
           <a:xfrm>
-            <a:off x="6217920" y="1463040"/>
-            <a:ext cx="5230368" cy="2240280"/>
+            <a:off x="6217920" y="1417320"/>
+            <a:ext cx="5230368" cy="2331720"/>
           </a:xfrm>
           <a:prstGeom prst="roundRect">
             <a:avLst/>
@@ -8055,8 +8079,8 @@
         </p:nvSpPr>
         <p:spPr>
           <a:xfrm>
-            <a:off x="6227064" y="1472184"/>
-            <a:ext cx="5212080" cy="384048"/>
+            <a:off x="6227064" y="1426464"/>
+            <a:ext cx="5212080" cy="402336"/>
           </a:xfrm>
           <a:prstGeom prst="rect">
             <a:avLst/>
@@ -8098,7 +8122,7 @@
         </p:nvSpPr>
         <p:spPr>
           <a:xfrm>
-            <a:off x="6400800" y="1517904"/>
+            <a:off x="6400800" y="1472184"/>
             <a:ext cx="4864608" cy="320040"/>
           </a:xfrm>
           <a:prstGeom prst="rect">
@@ -8113,7 +8137,7 @@
           <a:lstStyle/>
           <a:p>
             <a:pPr>
-              <a:defRPr sz="1100" b="1">
+              <a:defRPr sz="1200" b="1">
                 <a:solidFill>
                   <a:srgbClr val="FFFFFF"/>
                 </a:solidFill>
@@ -8133,8 +8157,8 @@
         </p:nvSpPr>
         <p:spPr>
           <a:xfrm>
-            <a:off x="6400800" y="1901952"/>
-            <a:ext cx="4864608" cy="1737360"/>
+            <a:off x="6400800" y="1874520"/>
+            <a:ext cx="4864608" cy="1828800"/>
           </a:xfrm>
           <a:prstGeom prst="rect">
             <a:avLst/>
@@ -8149,9 +8173,9 @@
           <a:p>
             <a:pPr>
               <a:spcAft>
-                <a:spcPts val="300"/>
-              </a:spcAft>
-              <a:defRPr sz="950">
+                <a:spcPts val="400"/>
+              </a:spcAft>
+              <a:defRPr sz="1050">
                 <a:solidFill>
                   <a:srgbClr val="1E293B"/>
                 </a:solidFill>
@@ -8164,9 +8188,9 @@
           <a:p>
             <a:pPr>
               <a:spcAft>
-                <a:spcPts val="300"/>
-              </a:spcAft>
-              <a:defRPr sz="950">
+                <a:spcPts val="400"/>
+              </a:spcAft>
+              <a:defRPr sz="1050">
                 <a:solidFill>
                   <a:srgbClr val="1E293B"/>
                 </a:solidFill>
@@ -8179,9 +8203,9 @@
           <a:p>
             <a:pPr>
               <a:spcAft>
-                <a:spcPts val="300"/>
-              </a:spcAft>
-              <a:defRPr sz="950">
+                <a:spcPts val="400"/>
+              </a:spcAft>
+              <a:defRPr sz="1050">
                 <a:solidFill>
                   <a:srgbClr val="1E293B"/>
                 </a:solidFill>
@@ -8194,9 +8218,9 @@
           <a:p>
             <a:pPr>
               <a:spcAft>
-                <a:spcPts val="300"/>
-              </a:spcAft>
-              <a:defRPr sz="950">
+                <a:spcPts val="400"/>
+              </a:spcAft>
+              <a:defRPr sz="1050">
                 <a:solidFill>
                   <a:srgbClr val="1E293B"/>
                 </a:solidFill>
@@ -8216,8 +8240,8 @@
         </p:nvSpPr>
         <p:spPr>
           <a:xfrm>
-            <a:off x="731520" y="3931920"/>
-            <a:ext cx="5230368" cy="2240280"/>
+            <a:off x="731520" y="3977639"/>
+            <a:ext cx="5230368" cy="2331720"/>
           </a:xfrm>
           <a:prstGeom prst="roundRect">
             <a:avLst/>
@@ -8261,8 +8285,8 @@
         </p:nvSpPr>
         <p:spPr>
           <a:xfrm>
-            <a:off x="740664" y="3941064"/>
-            <a:ext cx="5212080" cy="384048"/>
+            <a:off x="740664" y="3986783"/>
+            <a:ext cx="5212080" cy="402336"/>
           </a:xfrm>
           <a:prstGeom prst="rect">
             <a:avLst/>
@@ -8304,7 +8328,7 @@
         </p:nvSpPr>
         <p:spPr>
           <a:xfrm>
-            <a:off x="914400" y="3986784"/>
+            <a:off x="914400" y="4032503"/>
             <a:ext cx="4864608" cy="320040"/>
           </a:xfrm>
           <a:prstGeom prst="rect">
@@ -8319,7 +8343,7 @@
           <a:lstStyle/>
           <a:p>
             <a:pPr>
-              <a:defRPr sz="1100" b="1">
+              <a:defRPr sz="1200" b="1">
                 <a:solidFill>
                   <a:srgbClr val="FFFFFF"/>
                 </a:solidFill>
@@ -8339,8 +8363,8 @@
         </p:nvSpPr>
         <p:spPr>
           <a:xfrm>
-            <a:off x="914400" y="4370832"/>
-            <a:ext cx="4864608" cy="1737360"/>
+            <a:off x="914400" y="4434839"/>
+            <a:ext cx="4864608" cy="1828800"/>
           </a:xfrm>
           <a:prstGeom prst="rect">
             <a:avLst/>
@@ -8355,9 +8379,9 @@
           <a:p>
             <a:pPr>
               <a:spcAft>
-                <a:spcPts val="300"/>
-              </a:spcAft>
-              <a:defRPr sz="950">
+                <a:spcPts val="400"/>
+              </a:spcAft>
+              <a:defRPr sz="1050">
                 <a:solidFill>
                   <a:srgbClr val="1E293B"/>
                 </a:solidFill>
@@ -8370,9 +8394,9 @@
           <a:p>
             <a:pPr>
               <a:spcAft>
-                <a:spcPts val="300"/>
-              </a:spcAft>
-              <a:defRPr sz="950">
+                <a:spcPts val="400"/>
+              </a:spcAft>
+              <a:defRPr sz="1050">
                 <a:solidFill>
                   <a:srgbClr val="1E293B"/>
                 </a:solidFill>
@@ -8385,9 +8409,9 @@
           <a:p>
             <a:pPr>
               <a:spcAft>
-                <a:spcPts val="300"/>
-              </a:spcAft>
-              <a:defRPr sz="950">
+                <a:spcPts val="400"/>
+              </a:spcAft>
+              <a:defRPr sz="1050">
                 <a:solidFill>
                   <a:srgbClr val="1E293B"/>
                 </a:solidFill>
@@ -8400,9 +8424,9 @@
           <a:p>
             <a:pPr>
               <a:spcAft>
-                <a:spcPts val="300"/>
-              </a:spcAft>
-              <a:defRPr sz="950">
+                <a:spcPts val="400"/>
+              </a:spcAft>
+              <a:defRPr sz="1050">
                 <a:solidFill>
                   <a:srgbClr val="1E293B"/>
                 </a:solidFill>
@@ -8422,8 +8446,8 @@
         </p:nvSpPr>
         <p:spPr>
           <a:xfrm>
-            <a:off x="6217920" y="3931920"/>
-            <a:ext cx="5230368" cy="2240280"/>
+            <a:off x="6217920" y="3977639"/>
+            <a:ext cx="5230368" cy="2331720"/>
           </a:xfrm>
           <a:prstGeom prst="roundRect">
             <a:avLst/>
@@ -8467,8 +8491,8 @@
         </p:nvSpPr>
         <p:spPr>
           <a:xfrm>
-            <a:off x="6227064" y="3941064"/>
-            <a:ext cx="5212080" cy="384048"/>
+            <a:off x="6227064" y="3986783"/>
+            <a:ext cx="5212080" cy="402336"/>
           </a:xfrm>
           <a:prstGeom prst="rect">
             <a:avLst/>
@@ -8510,7 +8534,7 @@
         </p:nvSpPr>
         <p:spPr>
           <a:xfrm>
-            <a:off x="6400800" y="3986784"/>
+            <a:off x="6400800" y="4032503"/>
             <a:ext cx="4864608" cy="320040"/>
           </a:xfrm>
           <a:prstGeom prst="rect">
@@ -8525,7 +8549,7 @@
           <a:lstStyle/>
           <a:p>
             <a:pPr>
-              <a:defRPr sz="1100" b="1">
+              <a:defRPr sz="1200" b="1">
                 <a:solidFill>
                   <a:srgbClr val="FFFFFF"/>
                 </a:solidFill>
@@ -8545,8 +8569,8 @@
         </p:nvSpPr>
         <p:spPr>
           <a:xfrm>
-            <a:off x="6400800" y="4370832"/>
-            <a:ext cx="4864608" cy="1737360"/>
+            <a:off x="6400800" y="4434839"/>
+            <a:ext cx="4864608" cy="1828800"/>
           </a:xfrm>
           <a:prstGeom prst="rect">
             <a:avLst/>
@@ -8561,9 +8585,9 @@
           <a:p>
             <a:pPr>
               <a:spcAft>
-                <a:spcPts val="300"/>
-              </a:spcAft>
-              <a:defRPr sz="950">
+                <a:spcPts val="400"/>
+              </a:spcAft>
+              <a:defRPr sz="1050">
                 <a:solidFill>
                   <a:srgbClr val="1E293B"/>
                 </a:solidFill>
@@ -8576,9 +8600,9 @@
           <a:p>
             <a:pPr>
               <a:spcAft>
-                <a:spcPts val="300"/>
-              </a:spcAft>
-              <a:defRPr sz="950">
+                <a:spcPts val="400"/>
+              </a:spcAft>
+              <a:defRPr sz="1050">
                 <a:solidFill>
                   <a:srgbClr val="1E293B"/>
                 </a:solidFill>
@@ -8591,9 +8615,9 @@
           <a:p>
             <a:pPr>
               <a:spcAft>
-                <a:spcPts val="300"/>
-              </a:spcAft>
-              <a:defRPr sz="950">
+                <a:spcPts val="400"/>
+              </a:spcAft>
+              <a:defRPr sz="1050">
                 <a:solidFill>
                   <a:srgbClr val="1E293B"/>
                 </a:solidFill>
@@ -8606,9 +8630,9 @@
           <a:p>
             <a:pPr>
               <a:spcAft>
-                <a:spcPts val="300"/>
-              </a:spcAft>
-              <a:defRPr sz="950">
+                <a:spcPts val="400"/>
+              </a:spcAft>
+              <a:defRPr sz="1050">
                 <a:solidFill>
                   <a:srgbClr val="1E293B"/>
                 </a:solidFill>
@@ -8643,9 +8667,9 @@
           <a:lstStyle/>
           <a:p>
             <a:pPr>
-              <a:defRPr sz="900">
-                <a:solidFill>
-                  <a:srgbClr val="64748B"/>
+              <a:defRPr sz="1000">
+                <a:solidFill>
+                  <a:srgbClr val="475569"/>
                 </a:solidFill>
               </a:defRPr>
             </a:pPr>
@@ -8724,8 +8748,8 @@
         </p:nvSpPr>
         <p:spPr>
           <a:xfrm>
-            <a:off x="731520" y="1097280"/>
-            <a:ext cx="10728655" cy="5029200"/>
+            <a:off x="731520" y="1051560"/>
+            <a:ext cx="10728655" cy="5120640"/>
           </a:xfrm>
           <a:prstGeom prst="roundRect">
             <a:avLst/>
@@ -8769,8 +8793,8 @@
         </p:nvSpPr>
         <p:spPr>
           <a:xfrm>
-            <a:off x="1188720" y="1417320"/>
-            <a:ext cx="9814255" cy="4389120"/>
+            <a:off x="1188720" y="1325880"/>
+            <a:ext cx="9814255" cy="4572000"/>
           </a:xfrm>
           <a:prstGeom prst="rect">
             <a:avLst/>
@@ -8787,7 +8811,7 @@
               <a:spcAft>
                 <a:spcPts val="400"/>
               </a:spcAft>
-              <a:defRPr sz="1150" b="1">
+              <a:defRPr sz="1200" b="1">
                 <a:solidFill>
                   <a:srgbClr val="38BDF8"/>
                 </a:solidFill>
@@ -8800,9 +8824,9 @@
           <a:p>
             <a:pPr>
               <a:spcAft>
-                <a:spcPts val="1200"/>
-              </a:spcAft>
-              <a:defRPr sz="2100" b="1">
+                <a:spcPts val="1400"/>
+              </a:spcAft>
+              <a:defRPr sz="2200" b="1">
                 <a:solidFill>
                   <a:srgbClr val="FFFFFF"/>
                 </a:solidFill>
@@ -8814,7 +8838,7 @@
           </a:p>
           <a:p>
             <a:pPr>
-              <a:defRPr b="1" sz="1050">
+              <a:defRPr b="1" sz="1150">
                 <a:solidFill>
                   <a:srgbClr val="38BDF8"/>
                 </a:solidFill>
@@ -8827,11 +8851,11 @@
           <a:p>
             <a:pPr>
               <a:spcAft>
-                <a:spcPts val="600"/>
-              </a:spcAft>
-              <a:defRPr sz="950">
-                <a:solidFill>
-                  <a:srgbClr val="CBD5E1"/>
+                <a:spcPts val="800"/>
+              </a:spcAft>
+              <a:defRPr sz="1100">
+                <a:solidFill>
+                  <a:srgbClr val="E2E8F0"/>
                 </a:solidFill>
               </a:defRPr>
             </a:pPr>
@@ -8841,7 +8865,7 @@
           </a:p>
           <a:p>
             <a:pPr>
-              <a:defRPr b="1" sz="1050">
+              <a:defRPr b="1" sz="1150">
                 <a:solidFill>
                   <a:srgbClr val="38BDF8"/>
                 </a:solidFill>
@@ -8854,11 +8878,11 @@
           <a:p>
             <a:pPr>
               <a:spcAft>
-                <a:spcPts val="600"/>
-              </a:spcAft>
-              <a:defRPr sz="950">
-                <a:solidFill>
-                  <a:srgbClr val="CBD5E1"/>
+                <a:spcPts val="800"/>
+              </a:spcAft>
+              <a:defRPr sz="1100">
+                <a:solidFill>
+                  <a:srgbClr val="E2E8F0"/>
                 </a:solidFill>
               </a:defRPr>
             </a:pPr>
@@ -8868,7 +8892,7 @@
           </a:p>
           <a:p>
             <a:pPr>
-              <a:defRPr b="1" sz="1050">
+              <a:defRPr b="1" sz="1150">
                 <a:solidFill>
                   <a:srgbClr val="38BDF8"/>
                 </a:solidFill>
@@ -8881,11 +8905,11 @@
           <a:p>
             <a:pPr>
               <a:spcAft>
-                <a:spcPts val="600"/>
-              </a:spcAft>
-              <a:defRPr sz="950">
-                <a:solidFill>
-                  <a:srgbClr val="CBD5E1"/>
+                <a:spcPts val="800"/>
+              </a:spcAft>
+              <a:defRPr sz="1100">
+                <a:solidFill>
+                  <a:srgbClr val="E2E8F0"/>
                 </a:solidFill>
               </a:defRPr>
             </a:pPr>
@@ -8895,7 +8919,7 @@
           </a:p>
           <a:p>
             <a:pPr>
-              <a:defRPr b="1" sz="1050">
+              <a:defRPr b="1" sz="1150">
                 <a:solidFill>
                   <a:srgbClr val="38BDF8"/>
                 </a:solidFill>
@@ -8908,11 +8932,11 @@
           <a:p>
             <a:pPr>
               <a:spcAft>
-                <a:spcPts val="600"/>
-              </a:spcAft>
-              <a:defRPr sz="950">
-                <a:solidFill>
-                  <a:srgbClr val="CBD5E1"/>
+                <a:spcPts val="800"/>
+              </a:spcAft>
+              <a:defRPr sz="1100">
+                <a:solidFill>
+                  <a:srgbClr val="E2E8F0"/>
                 </a:solidFill>
               </a:defRPr>
             </a:pPr>
@@ -8923,7 +8947,7 @@
           <a:p>
             <a:br/>
             <a:pPr>
-              <a:defRPr sz="1050" b="1">
+              <a:defRPr sz="1100" b="1">
                 <a:solidFill>
                   <a:srgbClr val="FFFFFF"/>
                 </a:solidFill>
@@ -8958,7 +8982,7 @@
           <a:lstStyle/>
           <a:p>
             <a:pPr>
-              <a:defRPr sz="900">
+              <a:defRPr sz="1000">
                 <a:solidFill>
                   <a:srgbClr val="94A3B8"/>
                 </a:solidFill>

--- a/obayashi_it_presentation/Obayashi_Senior_Manager_IT_Presentation_Maheshchandra_Hegde.pptx
+++ b/obayashi_it_presentation/Obayashi_Senior_Manager_IT_Presentation_Maheshchandra_Hegde.pptx
@@ -3139,54 +3139,9 @@
           </a:p>
         </p:txBody>
       </p:sp>
-      <p:sp>
-        <p:nvSpPr>
-          <p:cNvPr id="3" name="Rounded Rectangle 2"/>
-          <p:cNvSpPr/>
-          <p:nvPr/>
-        </p:nvSpPr>
-        <p:spPr>
-          <a:xfrm>
-            <a:off x="731520" y="685800"/>
-            <a:ext cx="3108960" cy="5532120"/>
-          </a:xfrm>
-          <a:prstGeom prst="roundRect">
-            <a:avLst/>
-          </a:prstGeom>
-          <a:solidFill>
-            <a:srgbClr val="182235"/>
-          </a:solidFill>
-          <a:ln w="12700">
-            <a:solidFill>
-              <a:srgbClr val="334155"/>
-            </a:solidFill>
-          </a:ln>
-        </p:spPr>
-        <p:style>
-          <a:lnRef idx="1">
-            <a:schemeClr val="accent1"/>
-          </a:lnRef>
-          <a:fillRef idx="3">
-            <a:schemeClr val="accent1"/>
-          </a:fillRef>
-          <a:effectRef idx="2">
-            <a:schemeClr val="accent1"/>
-          </a:effectRef>
-          <a:fontRef idx="minor">
-            <a:schemeClr val="lt1"/>
-          </a:fontRef>
-        </p:style>
-        <p:txBody>
-          <a:bodyPr rtlCol="0" anchor="ctr"/>
-          <a:lstStyle/>
-          <a:p>
-            <a:pPr algn="ctr"/>
-          </a:p>
-        </p:txBody>
-      </p:sp>
       <p:pic>
         <p:nvPicPr>
-          <p:cNvPr id="4" name="Picture 3" descr="maheshForResume.jpg"/>
+          <p:cNvPr id="3" name="Picture 2" descr="maheshForResume.jpg"/>
           <p:cNvPicPr>
             <a:picLocks noChangeAspect="1"/>
           </p:cNvPicPr>
@@ -3200,8 +3155,8 @@
         </p:blipFill>
         <p:spPr>
           <a:xfrm>
-            <a:off x="914400" y="868680"/>
-            <a:ext cx="2743200" cy="3474720"/>
+            <a:off x="731520" y="777240"/>
+            <a:ext cx="2926080" cy="3566160"/>
           </a:xfrm>
           <a:prstGeom prst="rect">
             <a:avLst/>
@@ -3210,14 +3165,14 @@
       </p:pic>
       <p:sp>
         <p:nvSpPr>
-          <p:cNvPr id="5" name="TextBox 4"/>
+          <p:cNvPr id="4" name="TextBox 3"/>
           <p:cNvSpPr txBox="1"/>
           <p:nvPr/>
         </p:nvSpPr>
         <p:spPr>
           <a:xfrm>
-            <a:off x="868680" y="4480560"/>
-            <a:ext cx="2834640" cy="1645920"/>
+            <a:off x="731520" y="4526280"/>
+            <a:ext cx="2926080" cy="1828800"/>
           </a:xfrm>
           <a:prstGeom prst="rect">
             <a:avLst/>
@@ -3232,72 +3187,72 @@
           <a:p>
             <a:pPr>
               <a:spcAft>
+                <a:spcPts val="400"/>
+              </a:spcAft>
+              <a:defRPr sz="1200" b="1">
+                <a:solidFill>
+                  <a:srgbClr val="F1F5F9"/>
+                </a:solidFill>
+              </a:defRPr>
+            </a:pPr>
+            <a:r>
+              <a:t>Bangalore, India</a:t>
+            </a:r>
+          </a:p>
+          <a:p>
+            <a:pPr>
+              <a:spcAft>
+                <a:spcPts val="400"/>
+              </a:spcAft>
+              <a:defRPr sz="1150">
+                <a:solidFill>
+                  <a:srgbClr val="CBD5E1"/>
+                </a:solidFill>
+              </a:defRPr>
+            </a:pPr>
+            <a:r>
+              <a:t>+91 9535253329 / 7022407280</a:t>
+            </a:r>
+          </a:p>
+          <a:p>
+            <a:pPr>
+              <a:spcAft>
+                <a:spcPts val="400"/>
+              </a:spcAft>
+              <a:defRPr sz="1150">
+                <a:solidFill>
+                  <a:srgbClr val="38BDF8"/>
+                </a:solidFill>
+              </a:defRPr>
+            </a:pPr>
+            <a:r>
+              <a:t>hid.mahesh@gmail.com</a:t>
+            </a:r>
+          </a:p>
+          <a:p>
+            <a:pPr>
+              <a:spcAft>
                 <a:spcPts val="300"/>
               </a:spcAft>
               <a:defRPr sz="1100" b="1">
                 <a:solidFill>
-                  <a:srgbClr val="E2E8F0"/>
-                </a:solidFill>
-              </a:defRPr>
-            </a:pPr>
-            <a:r>
-              <a:t>Bangalore, India</a:t>
-            </a:r>
-          </a:p>
-          <a:p>
-            <a:pPr>
-              <a:spcAft>
-                <a:spcPts val="300"/>
-              </a:spcAft>
+                  <a:srgbClr val="38BDF8"/>
+                </a:solidFill>
+              </a:defRPr>
+            </a:pPr>
+            <a:r>
+              <a:t>hegdemahesh.in</a:t>
+            </a:r>
+          </a:p>
+          <a:p>
+            <a:pPr>
               <a:defRPr sz="1050">
                 <a:solidFill>
-                  <a:srgbClr val="CBD5E1"/>
-                </a:solidFill>
-              </a:defRPr>
-            </a:pPr>
-            <a:r>
-              <a:t>+91 9535253329 / 7022407280</a:t>
-            </a:r>
-          </a:p>
-          <a:p>
-            <a:pPr>
-              <a:spcAft>
-                <a:spcPts val="300"/>
-              </a:spcAft>
-              <a:defRPr sz="1050">
-                <a:solidFill>
                   <a:srgbClr val="38BDF8"/>
                 </a:solidFill>
               </a:defRPr>
             </a:pPr>
             <a:r>
-              <a:t>hid.mahesh@gmail.com</a:t>
-            </a:r>
-          </a:p>
-          <a:p>
-            <a:pPr>
-              <a:spcAft>
-                <a:spcPts val="200"/>
-              </a:spcAft>
-              <a:defRPr sz="1000" b="1">
-                <a:solidFill>
-                  <a:srgbClr val="38BDF8"/>
-                </a:solidFill>
-              </a:defRPr>
-            </a:pPr>
-            <a:r>
-              <a:t>hegdemahesh.in</a:t>
-            </a:r>
-          </a:p>
-          <a:p>
-            <a:pPr>
-              <a:defRPr sz="950">
-                <a:solidFill>
-                  <a:srgbClr val="38BDF8"/>
-                </a:solidFill>
-              </a:defRPr>
-            </a:pPr>
-            <a:r>
               <a:t>linkedin.com/in/maheshchandrahegde</a:t>
             </a:r>
           </a:p>
@@ -3305,59 +3260,14 @@
       </p:sp>
       <p:sp>
         <p:nvSpPr>
-          <p:cNvPr id="6" name="Rounded Rectangle 5"/>
-          <p:cNvSpPr/>
-          <p:nvPr/>
-        </p:nvSpPr>
-        <p:spPr>
-          <a:xfrm>
-            <a:off x="4069080" y="685800"/>
-            <a:ext cx="7406640" cy="5532120"/>
-          </a:xfrm>
-          <a:prstGeom prst="roundRect">
-            <a:avLst/>
-          </a:prstGeom>
-          <a:solidFill>
-            <a:srgbClr val="182235"/>
-          </a:solidFill>
-          <a:ln w="12700">
-            <a:solidFill>
-              <a:srgbClr val="334155"/>
-            </a:solidFill>
-          </a:ln>
-        </p:spPr>
-        <p:style>
-          <a:lnRef idx="1">
-            <a:schemeClr val="accent1"/>
-          </a:lnRef>
-          <a:fillRef idx="3">
-            <a:schemeClr val="accent1"/>
-          </a:fillRef>
-          <a:effectRef idx="2">
-            <a:schemeClr val="accent1"/>
-          </a:effectRef>
-          <a:fontRef idx="minor">
-            <a:schemeClr val="lt1"/>
-          </a:fontRef>
-        </p:style>
-        <p:txBody>
-          <a:bodyPr rtlCol="0" anchor="ctr"/>
-          <a:lstStyle/>
-          <a:p>
-            <a:pPr algn="ctr"/>
-          </a:p>
-        </p:txBody>
-      </p:sp>
-      <p:sp>
-        <p:nvSpPr>
-          <p:cNvPr id="7" name="TextBox 6"/>
+          <p:cNvPr id="5" name="TextBox 4"/>
           <p:cNvSpPr txBox="1"/>
           <p:nvPr/>
         </p:nvSpPr>
         <p:spPr>
           <a:xfrm>
-            <a:off x="4434840" y="868680"/>
-            <a:ext cx="6675120" cy="5120640"/>
+            <a:off x="3977639" y="749808"/>
+            <a:ext cx="7479792" cy="5577840"/>
           </a:xfrm>
           <a:prstGeom prst="rect">
             <a:avLst/>
@@ -3365,7 +3275,7 @@
           <a:noFill/>
         </p:spPr>
         <p:txBody>
-          <a:bodyPr wrap="square">
+          <a:bodyPr wrap="square" lIns="0" rIns="0" tIns="0" bIns="0">
             <a:spAutoFit/>
           </a:bodyPr>
           <a:lstStyle/>
@@ -3374,29 +3284,29 @@
               <a:spcAft>
                 <a:spcPts val="400"/>
               </a:spcAft>
-              <a:defRPr sz="1200" b="1">
+              <a:defRPr sz="3400" b="1">
+                <a:solidFill>
+                  <a:srgbClr val="FFFFFF"/>
+                </a:solidFill>
+              </a:defRPr>
+            </a:pPr>
+            <a:r>
+              <a:t>Maheshchandra Hegde</a:t>
+            </a:r>
+          </a:p>
+          <a:p>
+            <a:pPr>
+              <a:spcAft>
+                <a:spcPts val="1400"/>
+              </a:spcAft>
+              <a:defRPr sz="1350" b="1">
                 <a:solidFill>
                   <a:srgbClr val="38BDF8"/>
                 </a:solidFill>
               </a:defRPr>
             </a:pPr>
             <a:r>
-              <a:t>SECTION 1 · EXECUTIVE INTRODUCTION</a:t>
-            </a:r>
-          </a:p>
-          <a:p>
-            <a:pPr>
-              <a:spcAft>
-                <a:spcPts val="400"/>
-              </a:spcAft>
-              <a:defRPr sz="3200" b="1">
-                <a:solidFill>
-                  <a:srgbClr val="FFFFFF"/>
-                </a:solidFill>
-              </a:defRPr>
-            </a:pPr>
-            <a:r>
-              <a:t>Maheshchandra Hegde</a:t>
+              <a:t>Founder &amp; Technology Leader at Technoayan Digital Transformation Services Pvt. Ltd. | Building AI‑driven 3D asset platforms and 3d computing solutions @srushtilabs.com</a:t>
             </a:r>
           </a:p>
           <a:p>
@@ -3404,22 +3314,7 @@
               <a:spcAft>
                 <a:spcPts val="1200"/>
               </a:spcAft>
-              <a:defRPr sz="1400" b="1">
-                <a:solidFill>
-                  <a:srgbClr val="0284C7"/>
-                </a:solidFill>
-              </a:defRPr>
-            </a:pPr>
-            <a:r>
-              <a:t>Founder &amp; CTO | Building AI‑Driven 3D Asset Platforms &amp; Spatial Computing Solutions @srushtilabs.com</a:t>
-            </a:r>
-          </a:p>
-          <a:p>
-            <a:pPr>
-              <a:spcAft>
-                <a:spcPts val="1000"/>
-              </a:spcAft>
-              <a:defRPr sz="1100">
+              <a:defRPr sz="1150">
                 <a:solidFill>
                   <a:srgbClr val="E2E8F0"/>
                 </a:solidFill>
@@ -3445,7 +3340,7 @@
           </a:p>
           <a:p>
             <a:pPr>
-              <a:defRPr sz="1050" i="1">
+              <a:defRPr sz="1100" i="1">
                 <a:solidFill>
                   <a:srgbClr val="38BDF8"/>
                 </a:solidFill>
@@ -3459,14 +3354,14 @@
       </p:sp>
       <p:sp>
         <p:nvSpPr>
-          <p:cNvPr id="8" name="TextBox 7"/>
+          <p:cNvPr id="6" name="TextBox 5"/>
           <p:cNvSpPr txBox="1"/>
           <p:nvPr/>
         </p:nvSpPr>
         <p:spPr>
           <a:xfrm>
-            <a:off x="731520" y="6446520"/>
-            <a:ext cx="10728655" cy="320040"/>
+            <a:off x="731520" y="6473952"/>
+            <a:ext cx="10728655" cy="292608"/>
           </a:xfrm>
           <a:prstGeom prst="rect">
             <a:avLst/>
@@ -3561,8 +3456,8 @@
         </p:nvSpPr>
         <p:spPr>
           <a:xfrm>
-            <a:off x="731520" y="320040"/>
-            <a:ext cx="10698480" cy="292608"/>
+            <a:off x="731520" y="438912"/>
+            <a:ext cx="10728655" cy="640080"/>
           </a:xfrm>
           <a:prstGeom prst="rect">
             <a:avLst/>
@@ -3576,42 +3471,7 @@
           <a:lstStyle/>
           <a:p>
             <a:pPr>
-              <a:defRPr sz="1150" b="1">
-                <a:solidFill>
-                  <a:srgbClr val="0E7490"/>
-                </a:solidFill>
-              </a:defRPr>
-            </a:pPr>
-            <a:r>
-              <a:t>SECTION 2 · PROJECT EXPERIENCE (CLIENT GROUP 1)</a:t>
-            </a:r>
-          </a:p>
-        </p:txBody>
-      </p:sp>
-      <p:sp>
-        <p:nvSpPr>
-          <p:cNvPr id="4" name="TextBox 3"/>
-          <p:cNvSpPr txBox="1"/>
-          <p:nvPr/>
-        </p:nvSpPr>
-        <p:spPr>
-          <a:xfrm>
-            <a:off x="731520" y="621792"/>
-            <a:ext cx="10698480" cy="594360"/>
-          </a:xfrm>
-          <a:prstGeom prst="rect">
-            <a:avLst/>
-          </a:prstGeom>
-          <a:noFill/>
-        </p:spPr>
-        <p:txBody>
-          <a:bodyPr wrap="square" lIns="0" rIns="0" tIns="0" bIns="0">
-            <a:spAutoFit/>
-          </a:bodyPr>
-          <a:lstStyle/>
-          <a:p>
-            <a:pPr>
-              <a:defRPr sz="2300" b="1">
+              <a:defRPr sz="2500" b="1">
                 <a:solidFill>
                   <a:srgbClr val="0F172A"/>
                 </a:solidFill>
@@ -3625,13 +3485,13 @@
       </p:sp>
       <p:sp>
         <p:nvSpPr>
-          <p:cNvPr id="5" name="Rectangle 4"/>
+          <p:cNvPr id="4" name="Rectangle 3"/>
           <p:cNvSpPr/>
           <p:nvPr/>
         </p:nvSpPr>
         <p:spPr>
           <a:xfrm>
-            <a:off x="731520" y="1243584"/>
+            <a:off x="731520" y="1170432"/>
             <a:ext cx="10728655" cy="22860"/>
           </a:xfrm>
           <a:prstGeom prst="rect">
@@ -3668,59 +3528,14 @@
       </p:sp>
       <p:sp>
         <p:nvSpPr>
-          <p:cNvPr id="6" name="Rounded Rectangle 5"/>
-          <p:cNvSpPr/>
-          <p:nvPr/>
-        </p:nvSpPr>
-        <p:spPr>
-          <a:xfrm>
-            <a:off x="731520" y="1417320"/>
-            <a:ext cx="5230368" cy="4892040"/>
-          </a:xfrm>
-          <a:prstGeom prst="roundRect">
-            <a:avLst/>
-          </a:prstGeom>
-          <a:solidFill>
-            <a:srgbClr val="FFFFFF"/>
-          </a:solidFill>
-          <a:ln w="12700">
-            <a:solidFill>
-              <a:srgbClr val="E2E8F0"/>
-            </a:solidFill>
-          </a:ln>
-        </p:spPr>
-        <p:style>
-          <a:lnRef idx="1">
-            <a:schemeClr val="accent1"/>
-          </a:lnRef>
-          <a:fillRef idx="3">
-            <a:schemeClr val="accent1"/>
-          </a:fillRef>
-          <a:effectRef idx="2">
-            <a:schemeClr val="accent1"/>
-          </a:effectRef>
-          <a:fontRef idx="minor">
-            <a:schemeClr val="lt1"/>
-          </a:fontRef>
-        </p:style>
-        <p:txBody>
-          <a:bodyPr rtlCol="0" anchor="ctr"/>
-          <a:lstStyle/>
-          <a:p>
-            <a:pPr algn="ctr"/>
-          </a:p>
-        </p:txBody>
-      </p:sp>
-      <p:sp>
-        <p:nvSpPr>
-          <p:cNvPr id="7" name="TextBox 6"/>
+          <p:cNvPr id="5" name="TextBox 4"/>
           <p:cNvSpPr txBox="1"/>
           <p:nvPr/>
         </p:nvSpPr>
         <p:spPr>
           <a:xfrm>
-            <a:off x="960120" y="1600200"/>
-            <a:ext cx="4773168" cy="4526280"/>
+            <a:off x="731520" y="1389888"/>
+            <a:ext cx="5120640" cy="4892040"/>
           </a:xfrm>
           <a:prstGeom prst="rect">
             <a:avLst/>
@@ -3728,7 +3543,7 @@
           <a:noFill/>
         </p:spPr>
         <p:txBody>
-          <a:bodyPr wrap="square">
+          <a:bodyPr wrap="square" lIns="0" rIns="0" tIns="0" bIns="0">
             <a:spAutoFit/>
           </a:bodyPr>
           <a:lstStyle/>
@@ -3737,7 +3552,7 @@
               <a:spcAft>
                 <a:spcPts val="200"/>
               </a:spcAft>
-              <a:defRPr sz="2000" b="1">
+              <a:defRPr sz="2300" b="1">
                 <a:solidFill>
                   <a:srgbClr val="0F172A"/>
                 </a:solidFill>
@@ -3750,9 +3565,9 @@
           <a:p>
             <a:pPr>
               <a:spcAft>
-                <a:spcPts val="1200"/>
-              </a:spcAft>
-              <a:defRPr sz="1200" b="1">
+                <a:spcPts val="1400"/>
+              </a:spcAft>
+              <a:defRPr sz="1300" b="1">
                 <a:solidFill>
                   <a:srgbClr val="0E7490"/>
                 </a:solidFill>
@@ -3764,196 +3579,131 @@
           </a:p>
           <a:p>
             <a:pPr>
-              <a:defRPr b="1" sz="1150">
+              <a:spcAft>
+                <a:spcPts val="900"/>
+              </a:spcAft>
+            </a:pPr>
+            <a:r>
+              <a:rPr b="1" sz="1300">
                 <a:solidFill>
                   <a:srgbClr val="0F172A"/>
                 </a:solidFill>
-              </a:defRPr>
-            </a:pPr>
-            <a:r>
-              <a:t>• Role &amp; Entity: </a:t>
-            </a:r>
-          </a:p>
-          <a:p>
-            <a:pPr>
-              <a:spcAft>
-                <a:spcPts val="600"/>
-              </a:spcAft>
-              <a:defRPr sz="1100">
+              </a:rPr>
+              <a:t>•  Role &amp; Entity: </a:t>
+            </a:r>
+            <a:r>
+              <a:rPr b="0" sz="1200">
                 <a:solidFill>
                   <a:srgbClr val="475569"/>
                 </a:solidFill>
-              </a:defRPr>
-            </a:pPr>
-            <a:r>
-              <a:t>  Founder &amp; CTO at SrushtiLabs (Technoyana Digital Transformation Services Pvt. Ltd.).</a:t>
-            </a:r>
-          </a:p>
-          <a:p>
-            <a:pPr>
-              <a:defRPr b="1" sz="1150">
+              </a:rPr>
+              <a:t>Founder &amp; CTO at SrushtiLabs (Technoyana Digital Transformation Services Pvt. Ltd.).</a:t>
+            </a:r>
+          </a:p>
+          <a:p>
+            <a:pPr>
+              <a:spcAft>
+                <a:spcPts val="900"/>
+              </a:spcAft>
+            </a:pPr>
+            <a:r>
+              <a:rPr b="1" sz="1300">
                 <a:solidFill>
                   <a:srgbClr val="0F172A"/>
                 </a:solidFill>
-              </a:defRPr>
-            </a:pPr>
-            <a:r>
-              <a:t>• Core Product: </a:t>
-            </a:r>
-          </a:p>
-          <a:p>
-            <a:pPr>
-              <a:spcAft>
-                <a:spcPts val="600"/>
-              </a:spcAft>
-              <a:defRPr sz="1100">
+              </a:rPr>
+              <a:t>•  Core Product: </a:t>
+            </a:r>
+            <a:r>
+              <a:rPr b="0" sz="1200">
                 <a:solidFill>
                   <a:srgbClr val="475569"/>
                 </a:solidFill>
-              </a:defRPr>
-            </a:pPr>
-            <a:r>
-              <a:t>  Developed Voxelforge AI, a generative AI product creating modular 3D assets based on user prompt inputs.</a:t>
-            </a:r>
-          </a:p>
-          <a:p>
-            <a:pPr>
-              <a:defRPr b="1" sz="1150">
+              </a:rPr>
+              <a:t>Developed Voxelforge AI, a generative AI product creating modular 3D assets based on user prompt inputs.</a:t>
+            </a:r>
+          </a:p>
+          <a:p>
+            <a:pPr>
+              <a:spcAft>
+                <a:spcPts val="900"/>
+              </a:spcAft>
+            </a:pPr>
+            <a:r>
+              <a:rPr b="1" sz="1300">
                 <a:solidFill>
                   <a:srgbClr val="0F172A"/>
                 </a:solidFill>
-              </a:defRPr>
-            </a:pPr>
-            <a:r>
-              <a:t>• Gaming &amp; Visualization: </a:t>
-            </a:r>
-          </a:p>
-          <a:p>
-            <a:pPr>
-              <a:spcAft>
-                <a:spcPts val="600"/>
-              </a:spcAft>
-              <a:defRPr sz="1100">
+              </a:rPr>
+              <a:t>•  Gaming &amp; Visualization: </a:t>
+            </a:r>
+            <a:r>
+              <a:rPr b="0" sz="1200">
                 <a:solidFill>
                   <a:srgbClr val="475569"/>
                 </a:solidFill>
-              </a:defRPr>
-            </a:pPr>
-            <a:r>
-              <a:t>  Produces game-ready, low-poly modular 3D models and bundles optimized for immediate integration into Unreal Engine, Unity, and real-time WebGL engines.</a:t>
-            </a:r>
-          </a:p>
-          <a:p>
-            <a:pPr>
-              <a:defRPr b="1" sz="1150">
+              </a:rPr>
+              <a:t>Produces game-ready, low-poly modular 3D models and bundles optimized for immediate integration into Unreal Engine, Unity, and real-time WebGL engines.</a:t>
+            </a:r>
+          </a:p>
+          <a:p>
+            <a:pPr>
+              <a:spcAft>
+                <a:spcPts val="900"/>
+              </a:spcAft>
+            </a:pPr>
+            <a:r>
+              <a:rPr b="1" sz="1300">
                 <a:solidFill>
                   <a:srgbClr val="0F172A"/>
                 </a:solidFill>
-              </a:defRPr>
-            </a:pPr>
-            <a:r>
-              <a:t>• Prototyping Speed: </a:t>
-            </a:r>
-          </a:p>
-          <a:p>
-            <a:pPr>
-              <a:spcAft>
-                <a:spcPts val="600"/>
-              </a:spcAft>
-              <a:defRPr sz="1100">
+              </a:rPr>
+              <a:t>•  Prototyping Speed: </a:t>
+            </a:r>
+            <a:r>
+              <a:rPr b="0" sz="1200">
                 <a:solidFill>
                   <a:srgbClr val="475569"/>
                 </a:solidFill>
-              </a:defRPr>
-            </a:pPr>
-            <a:r>
-              <a:t>  Automates prompt-to-3D geometry conversion, texture baking, and polygon reduction, cutting 3D asset turnaround from days to minutes.</a:t>
-            </a:r>
-          </a:p>
-          <a:p>
-            <a:pPr>
-              <a:defRPr b="1" sz="1150">
+              </a:rPr>
+              <a:t>Automates prompt-to-3D geometry conversion, texture baking, and polygon reduction, cutting 3D asset turnaround from days to minutes.</a:t>
+            </a:r>
+          </a:p>
+          <a:p>
+            <a:pPr>
+              <a:spcAft>
+                <a:spcPts val="900"/>
+              </a:spcAft>
+            </a:pPr>
+            <a:r>
+              <a:rPr b="1" sz="1300">
                 <a:solidFill>
                   <a:srgbClr val="0F172A"/>
                 </a:solidFill>
-              </a:defRPr>
-            </a:pPr>
-            <a:r>
-              <a:t>• Live Application: </a:t>
-            </a:r>
-          </a:p>
-          <a:p>
-            <a:pPr>
-              <a:spcAft>
-                <a:spcPts val="600"/>
-              </a:spcAft>
-              <a:defRPr sz="1100">
+              </a:rPr>
+              <a:t>•  Live Application: </a:t>
+            </a:r>
+            <a:r>
+              <a:rPr b="0" sz="1200">
                 <a:solidFill>
                   <a:srgbClr val="475569"/>
                 </a:solidFill>
-              </a:defRPr>
-            </a:pPr>
-            <a:r>
-              <a:t>  Fully deployed and operational at srushtilabs.com/voxelforge/.</a:t>
-            </a:r>
-          </a:p>
-        </p:txBody>
-      </p:sp>
-      <p:sp>
-        <p:nvSpPr>
-          <p:cNvPr id="8" name="Rounded Rectangle 7"/>
-          <p:cNvSpPr/>
-          <p:nvPr/>
-        </p:nvSpPr>
-        <p:spPr>
-          <a:xfrm>
-            <a:off x="6217920" y="1417320"/>
-            <a:ext cx="5230368" cy="4892040"/>
-          </a:xfrm>
-          <a:prstGeom prst="roundRect">
-            <a:avLst/>
-          </a:prstGeom>
-          <a:solidFill>
-            <a:srgbClr val="FFFFFF"/>
-          </a:solidFill>
-          <a:ln w="12700">
-            <a:solidFill>
-              <a:srgbClr val="E2E8F0"/>
-            </a:solidFill>
-          </a:ln>
-        </p:spPr>
-        <p:style>
-          <a:lnRef idx="1">
-            <a:schemeClr val="accent1"/>
-          </a:lnRef>
-          <a:fillRef idx="3">
-            <a:schemeClr val="accent1"/>
-          </a:fillRef>
-          <a:effectRef idx="2">
-            <a:schemeClr val="accent1"/>
-          </a:effectRef>
-          <a:fontRef idx="minor">
-            <a:schemeClr val="lt1"/>
-          </a:fontRef>
-        </p:style>
-        <p:txBody>
-          <a:bodyPr rtlCol="0" anchor="ctr"/>
-          <a:lstStyle/>
-          <a:p>
-            <a:pPr algn="ctr"/>
-          </a:p>
-        </p:txBody>
-      </p:sp>
-      <p:sp>
-        <p:nvSpPr>
-          <p:cNvPr id="9" name="TextBox 8"/>
+              </a:rPr>
+              <a:t>Fully deployed and operational at srushtilabs.com/voxelforge/.</a:t>
+            </a:r>
+          </a:p>
+        </p:txBody>
+      </p:sp>
+      <p:sp>
+        <p:nvSpPr>
+          <p:cNvPr id="6" name="TextBox 5"/>
           <p:cNvSpPr txBox="1"/>
           <p:nvPr/>
         </p:nvSpPr>
         <p:spPr>
           <a:xfrm>
-            <a:off x="6446520" y="1600200"/>
-            <a:ext cx="4773168" cy="4526280"/>
+            <a:off x="6309360" y="1389888"/>
+            <a:ext cx="5120640" cy="4892040"/>
           </a:xfrm>
           <a:prstGeom prst="rect">
             <a:avLst/>
@@ -3961,7 +3711,7 @@
           <a:noFill/>
         </p:spPr>
         <p:txBody>
-          <a:bodyPr wrap="square">
+          <a:bodyPr wrap="square" lIns="0" rIns="0" tIns="0" bIns="0">
             <a:spAutoFit/>
           </a:bodyPr>
           <a:lstStyle/>
@@ -3970,7 +3720,7 @@
               <a:spcAft>
                 <a:spcPts val="200"/>
               </a:spcAft>
-              <a:defRPr sz="2000" b="1">
+              <a:defRPr sz="2300" b="1">
                 <a:solidFill>
                   <a:srgbClr val="0F172A"/>
                 </a:solidFill>
@@ -3983,9 +3733,9 @@
           <a:p>
             <a:pPr>
               <a:spcAft>
-                <a:spcPts val="1200"/>
-              </a:spcAft>
-              <a:defRPr sz="1200" b="1">
+                <a:spcPts val="1400"/>
+              </a:spcAft>
+              <a:defRPr sz="1300" b="1">
                 <a:solidFill>
                   <a:srgbClr val="0284C7"/>
                 </a:solidFill>
@@ -3997,151 +3747,131 @@
           </a:p>
           <a:p>
             <a:pPr>
-              <a:defRPr b="1" sz="1150">
+              <a:spcAft>
+                <a:spcPts val="900"/>
+              </a:spcAft>
+            </a:pPr>
+            <a:r>
+              <a:rPr b="1" sz="1300">
                 <a:solidFill>
                   <a:srgbClr val="0F172A"/>
                 </a:solidFill>
-              </a:defRPr>
-            </a:pPr>
-            <a:r>
-              <a:t>• Concept &amp; Vision: </a:t>
-            </a:r>
-          </a:p>
-          <a:p>
-            <a:pPr>
-              <a:spcAft>
-                <a:spcPts val="600"/>
-              </a:spcAft>
-              <a:defRPr sz="1100">
+              </a:rPr>
+              <a:t>•  Concept &amp; Vision: </a:t>
+            </a:r>
+            <a:r>
+              <a:rPr b="0" sz="1200">
                 <a:solidFill>
                   <a:srgbClr val="475569"/>
                 </a:solidFill>
-              </a:defRPr>
-            </a:pPr>
-            <a:r>
-              <a:t>  Extended the Voxelforge concept into Ayam3d ('Ayam' meaning Dimension), focusing on parametric-based 3D model generation from natural language prompts.</a:t>
-            </a:r>
-          </a:p>
-          <a:p>
-            <a:pPr>
-              <a:defRPr b="1" sz="1150">
+              </a:rPr>
+              <a:t>Extended the Voxelforge concept into Ayam3d ('Ayam' meaning Dimension), focusing on parametric-based 3D model generation from natural language prompts.</a:t>
+            </a:r>
+          </a:p>
+          <a:p>
+            <a:pPr>
+              <a:spcAft>
+                <a:spcPts val="900"/>
+              </a:spcAft>
+            </a:pPr>
+            <a:r>
+              <a:rPr b="1" sz="1300">
                 <a:solidFill>
                   <a:srgbClr val="0F172A"/>
                 </a:solidFill>
-              </a:defRPr>
-            </a:pPr>
-            <a:r>
-              <a:t>• Instant Generation: </a:t>
-            </a:r>
-          </a:p>
-          <a:p>
-            <a:pPr>
-              <a:spcAft>
-                <a:spcPts val="600"/>
-              </a:spcAft>
-              <a:defRPr sz="1100">
+              </a:rPr>
+              <a:t>•  Instant Generation: </a:t>
+            </a:r>
+            <a:r>
+              <a:rPr b="0" sz="1200">
                 <a:solidFill>
                   <a:srgbClr val="475569"/>
                 </a:solidFill>
-              </a:defRPr>
-            </a:pPr>
-            <a:r>
-              <a:t>  Emphasizes generating structured 3D models in seconds utilizing custom trained AI models and geometric constraint solvers.</a:t>
-            </a:r>
-          </a:p>
-          <a:p>
-            <a:pPr>
-              <a:defRPr b="1" sz="1150">
+              </a:rPr>
+              <a:t>Emphasizes generating structured 3D models in seconds utilizing custom trained AI models and geometric constraint solvers.</a:t>
+            </a:r>
+          </a:p>
+          <a:p>
+            <a:pPr>
+              <a:spcAft>
+                <a:spcPts val="900"/>
+              </a:spcAft>
+            </a:pPr>
+            <a:r>
+              <a:rPr b="1" sz="1300">
                 <a:solidFill>
                   <a:srgbClr val="0F172A"/>
                 </a:solidFill>
-              </a:defRPr>
-            </a:pPr>
-            <a:r>
-              <a:t>• Investor Interest: </a:t>
-            </a:r>
-          </a:p>
-          <a:p>
-            <a:pPr>
-              <a:spcAft>
-                <a:spcPts val="600"/>
-              </a:spcAft>
-              <a:defRPr sz="1100">
+              </a:rPr>
+              <a:t>•  Investor Interest: </a:t>
+            </a:r>
+            <a:r>
+              <a:rPr b="0" sz="1200">
                 <a:solidFill>
                   <a:srgbClr val="475569"/>
                 </a:solidFill>
-              </a:defRPr>
-            </a:pPr>
-            <a:r>
-              <a:t>  Successfully generated early investor interest, validating the market demand for real-time generative 3D synthesis.</a:t>
-            </a:r>
-          </a:p>
-          <a:p>
-            <a:pPr>
-              <a:defRPr b="1" sz="1150">
+              </a:rPr>
+              <a:t>Successfully generated early investor interest, validating the market demand for real-time generative 3D synthesis.</a:t>
+            </a:r>
+          </a:p>
+          <a:p>
+            <a:pPr>
+              <a:spcAft>
+                <a:spcPts val="900"/>
+              </a:spcAft>
+            </a:pPr>
+            <a:r>
+              <a:rPr b="1" sz="1300">
                 <a:solidFill>
                   <a:srgbClr val="0F172A"/>
                 </a:solidFill>
-              </a:defRPr>
-            </a:pPr>
-            <a:r>
-              <a:t>• Active Development: </a:t>
-            </a:r>
-          </a:p>
-          <a:p>
-            <a:pPr>
-              <a:spcAft>
-                <a:spcPts val="600"/>
-              </a:spcAft>
-              <a:defRPr sz="1100">
+              </a:rPr>
+              <a:t>•  Active Development: </a:t>
+            </a:r>
+            <a:r>
+              <a:rPr b="0" sz="1200">
                 <a:solidFill>
                   <a:srgbClr val="475569"/>
                 </a:solidFill>
-              </a:defRPr>
-            </a:pPr>
-            <a:r>
-              <a:t>  Currently under active development; actively seeking partners and promoters to help scale the AI pipeline.</a:t>
-            </a:r>
-          </a:p>
-          <a:p>
-            <a:pPr>
-              <a:defRPr b="1" sz="1150">
+              </a:rPr>
+              <a:t>Currently under active development; actively seeking partners and promoters to help scale the AI pipeline.</a:t>
+            </a:r>
+          </a:p>
+          <a:p>
+            <a:pPr>
+              <a:spcAft>
+                <a:spcPts val="900"/>
+              </a:spcAft>
+            </a:pPr>
+            <a:r>
+              <a:rPr b="1" sz="1300">
                 <a:solidFill>
                   <a:srgbClr val="0F172A"/>
                 </a:solidFill>
-              </a:defRPr>
-            </a:pPr>
-            <a:r>
-              <a:t>• Application Reference: </a:t>
-            </a:r>
-          </a:p>
-          <a:p>
-            <a:pPr>
-              <a:spcAft>
-                <a:spcPts val="600"/>
-              </a:spcAft>
-              <a:defRPr sz="1100">
+              </a:rPr>
+              <a:t>•  Application Reference: </a:t>
+            </a:r>
+            <a:r>
+              <a:rPr b="0" sz="1200">
                 <a:solidFill>
                   <a:srgbClr val="475569"/>
                 </a:solidFill>
-              </a:defRPr>
-            </a:pPr>
-            <a:r>
-              <a:t>  Preliminary concept documentation available at ayam3d.in.</a:t>
-            </a:r>
-          </a:p>
-        </p:txBody>
-      </p:sp>
-      <p:sp>
-        <p:nvSpPr>
-          <p:cNvPr id="10" name="TextBox 9"/>
+              </a:rPr>
+              <a:t>Preliminary concept documentation available at ayam3d.in.</a:t>
+            </a:r>
+          </a:p>
+        </p:txBody>
+      </p:sp>
+      <p:sp>
+        <p:nvSpPr>
+          <p:cNvPr id="7" name="TextBox 6"/>
           <p:cNvSpPr txBox="1"/>
           <p:nvPr/>
         </p:nvSpPr>
         <p:spPr>
           <a:xfrm>
-            <a:off x="731520" y="6446520"/>
-            <a:ext cx="10728655" cy="320040"/>
+            <a:off x="731520" y="6473952"/>
+            <a:ext cx="10728655" cy="292608"/>
           </a:xfrm>
           <a:prstGeom prst="rect">
             <a:avLst/>
@@ -4236,8 +3966,8 @@
         </p:nvSpPr>
         <p:spPr>
           <a:xfrm>
-            <a:off x="731520" y="320040"/>
-            <a:ext cx="10698480" cy="292608"/>
+            <a:off x="731520" y="438912"/>
+            <a:ext cx="10728655" cy="640080"/>
           </a:xfrm>
           <a:prstGeom prst="rect">
             <a:avLst/>
@@ -4251,42 +3981,7 @@
           <a:lstStyle/>
           <a:p>
             <a:pPr>
-              <a:defRPr sz="1150" b="1">
-                <a:solidFill>
-                  <a:srgbClr val="0E7490"/>
-                </a:solidFill>
-              </a:defRPr>
-            </a:pPr>
-            <a:r>
-              <a:t>SECTION 2 · PROJECT EXPERIENCE (CLIENT GROUP 2)</a:t>
-            </a:r>
-          </a:p>
-        </p:txBody>
-      </p:sp>
-      <p:sp>
-        <p:nvSpPr>
-          <p:cNvPr id="4" name="TextBox 3"/>
-          <p:cNvSpPr txBox="1"/>
-          <p:nvPr/>
-        </p:nvSpPr>
-        <p:spPr>
-          <a:xfrm>
-            <a:off x="731520" y="621792"/>
-            <a:ext cx="10698480" cy="594360"/>
-          </a:xfrm>
-          <a:prstGeom prst="rect">
-            <a:avLst/>
-          </a:prstGeom>
-          <a:noFill/>
-        </p:spPr>
-        <p:txBody>
-          <a:bodyPr wrap="square" lIns="0" rIns="0" tIns="0" bIns="0">
-            <a:spAutoFit/>
-          </a:bodyPr>
-          <a:lstStyle/>
-          <a:p>
-            <a:pPr>
-              <a:defRPr sz="2300" b="1">
+              <a:defRPr sz="2500" b="1">
                 <a:solidFill>
                   <a:srgbClr val="0F172A"/>
                 </a:solidFill>
@@ -4300,13 +3995,13 @@
       </p:sp>
       <p:sp>
         <p:nvSpPr>
-          <p:cNvPr id="5" name="Rectangle 4"/>
+          <p:cNvPr id="4" name="Rectangle 3"/>
           <p:cNvSpPr/>
           <p:nvPr/>
         </p:nvSpPr>
         <p:spPr>
           <a:xfrm>
-            <a:off x="731520" y="1243584"/>
+            <a:off x="731520" y="1170432"/>
             <a:ext cx="10728655" cy="22860"/>
           </a:xfrm>
           <a:prstGeom prst="rect">
@@ -4343,59 +4038,14 @@
       </p:sp>
       <p:sp>
         <p:nvSpPr>
-          <p:cNvPr id="6" name="Rounded Rectangle 5"/>
-          <p:cNvSpPr/>
-          <p:nvPr/>
-        </p:nvSpPr>
-        <p:spPr>
-          <a:xfrm>
-            <a:off x="731520" y="1417320"/>
-            <a:ext cx="4114800" cy="4892040"/>
-          </a:xfrm>
-          <a:prstGeom prst="roundRect">
-            <a:avLst/>
-          </a:prstGeom>
-          <a:solidFill>
-            <a:srgbClr val="FFFFFF"/>
-          </a:solidFill>
-          <a:ln w="12700">
-            <a:solidFill>
-              <a:srgbClr val="E2E8F0"/>
-            </a:solidFill>
-          </a:ln>
-        </p:spPr>
-        <p:style>
-          <a:lnRef idx="1">
-            <a:schemeClr val="accent1"/>
-          </a:lnRef>
-          <a:fillRef idx="3">
-            <a:schemeClr val="accent1"/>
-          </a:fillRef>
-          <a:effectRef idx="2">
-            <a:schemeClr val="accent1"/>
-          </a:effectRef>
-          <a:fontRef idx="minor">
-            <a:schemeClr val="lt1"/>
-          </a:fontRef>
-        </p:style>
-        <p:txBody>
-          <a:bodyPr rtlCol="0" anchor="ctr"/>
-          <a:lstStyle/>
-          <a:p>
-            <a:pPr algn="ctr"/>
-          </a:p>
-        </p:txBody>
-      </p:sp>
-      <p:sp>
-        <p:nvSpPr>
-          <p:cNvPr id="7" name="TextBox 6"/>
+          <p:cNvPr id="5" name="TextBox 4"/>
           <p:cNvSpPr txBox="1"/>
           <p:nvPr/>
         </p:nvSpPr>
         <p:spPr>
           <a:xfrm>
-            <a:off x="960120" y="1600200"/>
-            <a:ext cx="3657600" cy="4480560"/>
+            <a:off x="731520" y="1389888"/>
+            <a:ext cx="4206240" cy="4892040"/>
           </a:xfrm>
           <a:prstGeom prst="rect">
             <a:avLst/>
@@ -4403,7 +4053,7 @@
           <a:noFill/>
         </p:spPr>
         <p:txBody>
-          <a:bodyPr wrap="square">
+          <a:bodyPr wrap="square" lIns="0" rIns="0" tIns="0" bIns="0">
             <a:spAutoFit/>
           </a:bodyPr>
           <a:lstStyle/>
@@ -4412,7 +4062,7 @@
               <a:spcAft>
                 <a:spcPts val="200"/>
               </a:spcAft>
-              <a:defRPr sz="2000" b="1">
+              <a:defRPr sz="2300" b="1">
                 <a:solidFill>
                   <a:srgbClr val="0F172A"/>
                 </a:solidFill>
@@ -4425,9 +4075,9 @@
           <a:p>
             <a:pPr>
               <a:spcAft>
-                <a:spcPts val="1200"/>
-              </a:spcAft>
-              <a:defRPr sz="1200" b="1">
+                <a:spcPts val="1400"/>
+              </a:spcAft>
+              <a:defRPr sz="1300" b="1">
                 <a:solidFill>
                   <a:srgbClr val="0E7490"/>
                 </a:solidFill>
@@ -4439,136 +4089,116 @@
           </a:p>
           <a:p>
             <a:pPr>
-              <a:defRPr b="1" sz="1150">
+              <a:spcAft>
+                <a:spcPts val="1000"/>
+              </a:spcAft>
+            </a:pPr>
+            <a:r>
+              <a:rPr b="1" sz="1300">
                 <a:solidFill>
                   <a:srgbClr val="0F172A"/>
                 </a:solidFill>
-              </a:defRPr>
-            </a:pPr>
-            <a:r>
-              <a:t>Role: </a:t>
-            </a:r>
-          </a:p>
-          <a:p>
-            <a:pPr>
-              <a:spcAft>
-                <a:spcPts val="700"/>
-              </a:spcAft>
-              <a:defRPr sz="1100">
+              </a:rPr>
+              <a:t>•  Role: </a:t>
+            </a:r>
+            <a:r>
+              <a:rPr b="0" sz="1200">
                 <a:solidFill>
                   <a:srgbClr val="475569"/>
                 </a:solidFill>
-              </a:defRPr>
-            </a:pPr>
-            <a:r>
+              </a:rPr>
               <a:t>Senior Technology Leader (React / NodeJS)</a:t>
             </a:r>
           </a:p>
           <a:p>
             <a:pPr>
-              <a:defRPr b="1" sz="1150">
+              <a:spcAft>
+                <a:spcPts val="1000"/>
+              </a:spcAft>
+            </a:pPr>
+            <a:r>
+              <a:rPr b="1" sz="1300">
                 <a:solidFill>
                   <a:srgbClr val="0F172A"/>
                 </a:solidFill>
-              </a:defRPr>
-            </a:pPr>
-            <a:r>
-              <a:t>Tenure: </a:t>
-            </a:r>
-          </a:p>
-          <a:p>
-            <a:pPr>
-              <a:spcAft>
-                <a:spcPts val="700"/>
-              </a:spcAft>
-              <a:defRPr sz="1100">
+              </a:rPr>
+              <a:t>•  Tenure: </a:t>
+            </a:r>
+            <a:r>
+              <a:rPr b="0" sz="1200">
                 <a:solidFill>
                   <a:srgbClr val="475569"/>
                 </a:solidFill>
-              </a:defRPr>
-            </a:pPr>
-            <a:r>
+              </a:rPr>
               <a:t>Nov 2023 – Mar 2025</a:t>
             </a:r>
           </a:p>
           <a:p>
             <a:pPr>
-              <a:defRPr b="1" sz="1150">
+              <a:spcAft>
+                <a:spcPts val="1000"/>
+              </a:spcAft>
+            </a:pPr>
+            <a:r>
+              <a:rPr b="1" sz="1300">
                 <a:solidFill>
                   <a:srgbClr val="0F172A"/>
                 </a:solidFill>
-              </a:defRPr>
-            </a:pPr>
-            <a:r>
-              <a:t>Client &amp; Facility: </a:t>
-            </a:r>
-          </a:p>
-          <a:p>
-            <a:pPr>
-              <a:spcAft>
-                <a:spcPts val="700"/>
-              </a:spcAft>
-              <a:defRPr sz="1100">
+              </a:rPr>
+              <a:t>•  Client &amp; Facility: </a:t>
+            </a:r>
+            <a:r>
+              <a:rPr b="0" sz="1200">
                 <a:solidFill>
                   <a:srgbClr val="475569"/>
                 </a:solidFill>
-              </a:defRPr>
-            </a:pPr>
-            <a:r>
+              </a:rPr>
               <a:t>Cyient Limited for Philips Healthcare, Bangalore</a:t>
             </a:r>
           </a:p>
           <a:p>
             <a:pPr>
-              <a:defRPr b="1" sz="1150">
+              <a:spcAft>
+                <a:spcPts val="1000"/>
+              </a:spcAft>
+            </a:pPr>
+            <a:r>
+              <a:rPr b="1" sz="1300">
                 <a:solidFill>
                   <a:srgbClr val="0F172A"/>
                 </a:solidFill>
-              </a:defRPr>
-            </a:pPr>
-            <a:r>
-              <a:t>Operational Reality: </a:t>
-            </a:r>
-          </a:p>
-          <a:p>
-            <a:pPr>
-              <a:spcAft>
-                <a:spcPts val="700"/>
-              </a:spcAft>
-              <a:defRPr sz="1100">
+              </a:rPr>
+              <a:t>•  Operational Reality: </a:t>
+            </a:r>
+            <a:r>
+              <a:rPr b="0" sz="1200">
                 <a:solidFill>
                   <a:srgbClr val="475569"/>
                 </a:solidFill>
-              </a:defRPr>
-            </a:pPr>
-            <a:r>
-              <a:t>Mission-critical hospital ICU and anesthesia suites operating continuously 24/7.</a:t>
-            </a:r>
-          </a:p>
-          <a:p>
-            <a:pPr>
-              <a:defRPr b="1" sz="1150">
+              </a:rPr>
+              <a:t>Mission-critical hospital ICU and anesthesia suites operating continuously 24/7 with zero margin for error.</a:t>
+            </a:r>
+          </a:p>
+          <a:p>
+            <a:pPr>
+              <a:spcAft>
+                <a:spcPts val="1000"/>
+              </a:spcAft>
+            </a:pPr>
+            <a:r>
+              <a:rPr b="1" sz="1300">
                 <a:solidFill>
                   <a:srgbClr val="0F172A"/>
                 </a:solidFill>
-              </a:defRPr>
-            </a:pPr>
-            <a:r>
-              <a:t>Delivery Mandate: </a:t>
-            </a:r>
-          </a:p>
-          <a:p>
-            <a:pPr>
-              <a:spcAft>
-                <a:spcPts val="700"/>
-              </a:spcAft>
-              <a:defRPr sz="1100">
+              </a:rPr>
+              <a:t>•  Delivery Mandate: </a:t>
+            </a:r>
+            <a:r>
+              <a:rPr b="0" sz="1200">
                 <a:solidFill>
                   <a:srgbClr val="475569"/>
                 </a:solidFill>
-              </a:defRPr>
-            </a:pPr>
-            <a:r>
+              </a:rPr>
               <a:t>Delivered clinical software passing all stringent quality, reliability, and security gates established by Philips and hospital networks.</a:t>
             </a:r>
           </a:p>
@@ -4576,59 +4206,14 @@
       </p:sp>
       <p:sp>
         <p:nvSpPr>
-          <p:cNvPr id="8" name="Rounded Rectangle 7"/>
-          <p:cNvSpPr/>
-          <p:nvPr/>
-        </p:nvSpPr>
-        <p:spPr>
-          <a:xfrm>
-            <a:off x="5074920" y="1417320"/>
-            <a:ext cx="6382512" cy="1536192"/>
-          </a:xfrm>
-          <a:prstGeom prst="roundRect">
-            <a:avLst/>
-          </a:prstGeom>
-          <a:solidFill>
-            <a:srgbClr val="FFFFFF"/>
-          </a:solidFill>
-          <a:ln w="12700">
-            <a:solidFill>
-              <a:srgbClr val="E2E8F0"/>
-            </a:solidFill>
-          </a:ln>
-        </p:spPr>
-        <p:style>
-          <a:lnRef idx="1">
-            <a:schemeClr val="accent1"/>
-          </a:lnRef>
-          <a:fillRef idx="3">
-            <a:schemeClr val="accent1"/>
-          </a:fillRef>
-          <a:effectRef idx="2">
-            <a:schemeClr val="accent1"/>
-          </a:effectRef>
-          <a:fontRef idx="minor">
-            <a:schemeClr val="lt1"/>
-          </a:fontRef>
-        </p:style>
-        <p:txBody>
-          <a:bodyPr rtlCol="0" anchor="ctr"/>
-          <a:lstStyle/>
-          <a:p>
-            <a:pPr algn="ctr"/>
-          </a:p>
-        </p:txBody>
-      </p:sp>
-      <p:sp>
-        <p:nvSpPr>
-          <p:cNvPr id="9" name="TextBox 8"/>
+          <p:cNvPr id="6" name="TextBox 5"/>
           <p:cNvSpPr txBox="1"/>
           <p:nvPr/>
         </p:nvSpPr>
         <p:spPr>
           <a:xfrm>
-            <a:off x="5303520" y="1554480"/>
-            <a:ext cx="5925312" cy="1280160"/>
+            <a:off x="5303520" y="1389888"/>
+            <a:ext cx="6126480" cy="4892040"/>
           </a:xfrm>
           <a:prstGeom prst="rect">
             <a:avLst/>
@@ -4636,7 +4221,7 @@
           <a:noFill/>
         </p:spPr>
         <p:txBody>
-          <a:bodyPr wrap="square">
+          <a:bodyPr wrap="square" lIns="0" rIns="0" tIns="0" bIns="0">
             <a:spAutoFit/>
           </a:bodyPr>
           <a:lstStyle/>
@@ -4645,7 +4230,7 @@
               <a:spcAft>
                 <a:spcPts val="400"/>
               </a:spcAft>
-              <a:defRPr sz="1300" b="1">
+              <a:defRPr sz="1450" b="1">
                 <a:solidFill>
                   <a:srgbClr val="0284C7"/>
                 </a:solidFill>
@@ -4657,7 +4242,10 @@
           </a:p>
           <a:p>
             <a:pPr>
-              <a:defRPr sz="1100">
+              <a:spcAft>
+                <a:spcPts val="1600"/>
+              </a:spcAft>
+              <a:defRPr sz="1200">
                 <a:solidFill>
                   <a:srgbClr val="1E293B"/>
                 </a:solidFill>
@@ -4667,208 +4255,78 @@
               <a:t>Successfully delivered the software to meet demanding medical quality requirements set by Philips and healthcare providers. Architected fail-safe clinical data rendering with zero memory leaks, ensuring bedside patient monitoring displays remain completely responsive across multi-day continuous operations.</a:t>
             </a:r>
           </a:p>
-        </p:txBody>
-      </p:sp>
-      <p:sp>
-        <p:nvSpPr>
-          <p:cNvPr id="10" name="Rounded Rectangle 9"/>
-          <p:cNvSpPr/>
-          <p:nvPr/>
-        </p:nvSpPr>
-        <p:spPr>
-          <a:xfrm>
-            <a:off x="5074920" y="3063240"/>
-            <a:ext cx="6382512" cy="1536192"/>
-          </a:xfrm>
-          <a:prstGeom prst="roundRect">
-            <a:avLst/>
-          </a:prstGeom>
-          <a:solidFill>
-            <a:srgbClr val="FFFFFF"/>
-          </a:solidFill>
-          <a:ln w="12700">
-            <a:solidFill>
-              <a:srgbClr val="E2E8F0"/>
-            </a:solidFill>
-          </a:ln>
-        </p:spPr>
-        <p:style>
-          <a:lnRef idx="1">
-            <a:schemeClr val="accent1"/>
-          </a:lnRef>
-          <a:fillRef idx="3">
-            <a:schemeClr val="accent1"/>
-          </a:fillRef>
-          <a:effectRef idx="2">
-            <a:schemeClr val="accent1"/>
-          </a:effectRef>
-          <a:fontRef idx="minor">
-            <a:schemeClr val="lt1"/>
-          </a:fontRef>
-        </p:style>
-        <p:txBody>
-          <a:bodyPr rtlCol="0" anchor="ctr"/>
-          <a:lstStyle/>
-          <a:p>
-            <a:pPr algn="ctr"/>
-          </a:p>
-        </p:txBody>
-      </p:sp>
-      <p:sp>
-        <p:nvSpPr>
-          <p:cNvPr id="11" name="TextBox 10"/>
+          <a:p>
+            <a:pPr>
+              <a:spcAft>
+                <a:spcPts val="400"/>
+              </a:spcAft>
+              <a:defRPr sz="1450" b="1">
+                <a:solidFill>
+                  <a:srgbClr val="0284C7"/>
+                </a:solidFill>
+              </a:defRPr>
+            </a:pPr>
+            <a:r>
+              <a:t>2. Comprehensive Security Architecture &amp; Policy Enforcement</a:t>
+            </a:r>
+          </a:p>
+          <a:p>
+            <a:pPr>
+              <a:spcAft>
+                <a:spcPts val="1600"/>
+              </a:spcAft>
+              <a:defRPr sz="1200">
+                <a:solidFill>
+                  <a:srgbClr val="1E293B"/>
+                </a:solidFill>
+              </a:defRPr>
+            </a:pPr>
+            <a:r>
+              <a:t>Enforced strict enterprise cybersecurity measures as per Philips global policies: integrated Multi-Factor Authentication (MFA), protected against Cross-Site Scripting (XSS) and injection vulnerabilities, enforced role-based access control (RBAC), and maintained immutable audit logs for sensitive patient medical data.</a:t>
+            </a:r>
+          </a:p>
+          <a:p>
+            <a:pPr>
+              <a:spcAft>
+                <a:spcPts val="400"/>
+              </a:spcAft>
+              <a:defRPr sz="1450" b="1">
+                <a:solidFill>
+                  <a:srgbClr val="0284C7"/>
+                </a:solidFill>
+              </a:defRPr>
+            </a:pPr>
+            <a:r>
+              <a:t>3. End-to-End Best Practices &amp; Scalable Modular Delivery</a:t>
+            </a:r>
+          </a:p>
+          <a:p>
+            <a:pPr>
+              <a:spcAft>
+                <a:spcPts val="1600"/>
+              </a:spcAft>
+              <a:defRPr sz="1200">
+                <a:solidFill>
+                  <a:srgbClr val="1E293B"/>
+                </a:solidFill>
+              </a:defRPr>
+            </a:pPr>
+            <a:r>
+              <a:t>Led the end-to-end technical execution—from architectural design and modular component breakdown to automated test suites and production deployment. Delivered a fully supported software product backed by complete documentation and service support protocols.</a:t>
+            </a:r>
+          </a:p>
+        </p:txBody>
+      </p:sp>
+      <p:sp>
+        <p:nvSpPr>
+          <p:cNvPr id="7" name="TextBox 6"/>
           <p:cNvSpPr txBox="1"/>
           <p:nvPr/>
         </p:nvSpPr>
         <p:spPr>
           <a:xfrm>
-            <a:off x="5303520" y="3200400"/>
-            <a:ext cx="5925312" cy="1280160"/>
-          </a:xfrm>
-          <a:prstGeom prst="rect">
-            <a:avLst/>
-          </a:prstGeom>
-          <a:noFill/>
-        </p:spPr>
-        <p:txBody>
-          <a:bodyPr wrap="square">
-            <a:spAutoFit/>
-          </a:bodyPr>
-          <a:lstStyle/>
-          <a:p>
-            <a:pPr>
-              <a:spcAft>
-                <a:spcPts val="400"/>
-              </a:spcAft>
-              <a:defRPr sz="1300" b="1">
-                <a:solidFill>
-                  <a:srgbClr val="0284C7"/>
-                </a:solidFill>
-              </a:defRPr>
-            </a:pPr>
-            <a:r>
-              <a:t>2. Comprehensive Security Architecture &amp; Policy Enforcement</a:t>
-            </a:r>
-          </a:p>
-          <a:p>
-            <a:pPr>
-              <a:defRPr sz="1100">
-                <a:solidFill>
-                  <a:srgbClr val="1E293B"/>
-                </a:solidFill>
-              </a:defRPr>
-            </a:pPr>
-            <a:r>
-              <a:t>Enforced strict enterprise cybersecurity measures as per Philips global policies: integrated Multi-Factor Authentication (MFA), protected against Cross-Site Scripting (XSS) and injection vulnerabilities, enforced role-based access control (RBAC), and maintained immutable audit logs for sensitive patient medical data.</a:t>
-            </a:r>
-          </a:p>
-        </p:txBody>
-      </p:sp>
-      <p:sp>
-        <p:nvSpPr>
-          <p:cNvPr id="12" name="Rounded Rectangle 11"/>
-          <p:cNvSpPr/>
-          <p:nvPr/>
-        </p:nvSpPr>
-        <p:spPr>
-          <a:xfrm>
-            <a:off x="5074920" y="4709160"/>
-            <a:ext cx="6382512" cy="1536192"/>
-          </a:xfrm>
-          <a:prstGeom prst="roundRect">
-            <a:avLst/>
-          </a:prstGeom>
-          <a:solidFill>
-            <a:srgbClr val="FFFFFF"/>
-          </a:solidFill>
-          <a:ln w="12700">
-            <a:solidFill>
-              <a:srgbClr val="E2E8F0"/>
-            </a:solidFill>
-          </a:ln>
-        </p:spPr>
-        <p:style>
-          <a:lnRef idx="1">
-            <a:schemeClr val="accent1"/>
-          </a:lnRef>
-          <a:fillRef idx="3">
-            <a:schemeClr val="accent1"/>
-          </a:fillRef>
-          <a:effectRef idx="2">
-            <a:schemeClr val="accent1"/>
-          </a:effectRef>
-          <a:fontRef idx="minor">
-            <a:schemeClr val="lt1"/>
-          </a:fontRef>
-        </p:style>
-        <p:txBody>
-          <a:bodyPr rtlCol="0" anchor="ctr"/>
-          <a:lstStyle/>
-          <a:p>
-            <a:pPr algn="ctr"/>
-          </a:p>
-        </p:txBody>
-      </p:sp>
-      <p:sp>
-        <p:nvSpPr>
-          <p:cNvPr id="13" name="TextBox 12"/>
-          <p:cNvSpPr txBox="1"/>
-          <p:nvPr/>
-        </p:nvSpPr>
-        <p:spPr>
-          <a:xfrm>
-            <a:off x="5303520" y="4846320"/>
-            <a:ext cx="5925312" cy="1280160"/>
-          </a:xfrm>
-          <a:prstGeom prst="rect">
-            <a:avLst/>
-          </a:prstGeom>
-          <a:noFill/>
-        </p:spPr>
-        <p:txBody>
-          <a:bodyPr wrap="square">
-            <a:spAutoFit/>
-          </a:bodyPr>
-          <a:lstStyle/>
-          <a:p>
-            <a:pPr>
-              <a:spcAft>
-                <a:spcPts val="400"/>
-              </a:spcAft>
-              <a:defRPr sz="1300" b="1">
-                <a:solidFill>
-                  <a:srgbClr val="0284C7"/>
-                </a:solidFill>
-              </a:defRPr>
-            </a:pPr>
-            <a:r>
-              <a:t>3. End-to-End Best Practices &amp; Scalable Modular Delivery</a:t>
-            </a:r>
-          </a:p>
-          <a:p>
-            <a:pPr>
-              <a:defRPr sz="1100">
-                <a:solidFill>
-                  <a:srgbClr val="1E293B"/>
-                </a:solidFill>
-              </a:defRPr>
-            </a:pPr>
-            <a:r>
-              <a:t>Led the end-to-end technical execution—from architectural design and modular component breakdown to automated test suites and production deployment. Delivered a fully supported software product backed by complete documentation and service support protocols.</a:t>
-            </a:r>
-          </a:p>
-        </p:txBody>
-      </p:sp>
-      <p:sp>
-        <p:nvSpPr>
-          <p:cNvPr id="14" name="TextBox 13"/>
-          <p:cNvSpPr txBox="1"/>
-          <p:nvPr/>
-        </p:nvSpPr>
-        <p:spPr>
-          <a:xfrm>
-            <a:off x="731520" y="6446520"/>
-            <a:ext cx="10728655" cy="320040"/>
+            <a:off x="731520" y="6473952"/>
+            <a:ext cx="10728655" cy="292608"/>
           </a:xfrm>
           <a:prstGeom prst="rect">
             <a:avLst/>
@@ -4963,8 +4421,8 @@
         </p:nvSpPr>
         <p:spPr>
           <a:xfrm>
-            <a:off x="731520" y="320040"/>
-            <a:ext cx="10698480" cy="292608"/>
+            <a:off x="731520" y="438912"/>
+            <a:ext cx="10728655" cy="640080"/>
           </a:xfrm>
           <a:prstGeom prst="rect">
             <a:avLst/>
@@ -4978,62 +4436,27 @@
           <a:lstStyle/>
           <a:p>
             <a:pPr>
-              <a:defRPr sz="1150" b="1">
-                <a:solidFill>
-                  <a:srgbClr val="0E7490"/>
-                </a:solidFill>
-              </a:defRPr>
-            </a:pPr>
-            <a:r>
-              <a:t>SECTION 2 · PROJECT EXPERIENCE (CLIENT GROUPS 3 &amp; 4)</a:t>
-            </a:r>
-          </a:p>
-        </p:txBody>
-      </p:sp>
-      <p:sp>
-        <p:nvSpPr>
-          <p:cNvPr id="4" name="TextBox 3"/>
-          <p:cNvSpPr txBox="1"/>
-          <p:nvPr/>
-        </p:nvSpPr>
-        <p:spPr>
-          <a:xfrm>
-            <a:off x="731520" y="621792"/>
-            <a:ext cx="10698480" cy="594360"/>
-          </a:xfrm>
-          <a:prstGeom prst="rect">
-            <a:avLst/>
-          </a:prstGeom>
-          <a:noFill/>
-        </p:spPr>
-        <p:txBody>
-          <a:bodyPr wrap="square" lIns="0" rIns="0" tIns="0" bIns="0">
-            <a:spAutoFit/>
-          </a:bodyPr>
-          <a:lstStyle/>
-          <a:p>
-            <a:pPr>
-              <a:defRPr sz="2300" b="1">
+              <a:defRPr sz="2500" b="1">
                 <a:solidFill>
                   <a:srgbClr val="0F172A"/>
                 </a:solidFill>
               </a:defRPr>
             </a:pPr>
             <a:r>
-              <a:t>Ness Digital Engineering &amp; Moonraft Innovation Labs (UST Global Unit)</a:t>
-            </a:r>
-          </a:p>
-        </p:txBody>
-      </p:sp>
-      <p:sp>
-        <p:nvSpPr>
-          <p:cNvPr id="5" name="Rectangle 4"/>
+              <a:t>Ness Digital Engineering &amp; Moonraft Innovation Labs</a:t>
+            </a:r>
+          </a:p>
+        </p:txBody>
+      </p:sp>
+      <p:sp>
+        <p:nvSpPr>
+          <p:cNvPr id="4" name="Rectangle 3"/>
           <p:cNvSpPr/>
           <p:nvPr/>
         </p:nvSpPr>
         <p:spPr>
           <a:xfrm>
-            <a:off x="731520" y="1243584"/>
+            <a:off x="731520" y="1170432"/>
             <a:ext cx="10728655" cy="22860"/>
           </a:xfrm>
           <a:prstGeom prst="rect">
@@ -5070,59 +4493,14 @@
       </p:sp>
       <p:sp>
         <p:nvSpPr>
-          <p:cNvPr id="6" name="Rounded Rectangle 5"/>
-          <p:cNvSpPr/>
-          <p:nvPr/>
-        </p:nvSpPr>
-        <p:spPr>
-          <a:xfrm>
-            <a:off x="731520" y="1417320"/>
-            <a:ext cx="5230368" cy="4892040"/>
-          </a:xfrm>
-          <a:prstGeom prst="roundRect">
-            <a:avLst/>
-          </a:prstGeom>
-          <a:solidFill>
-            <a:srgbClr val="FFFFFF"/>
-          </a:solidFill>
-          <a:ln w="12700">
-            <a:solidFill>
-              <a:srgbClr val="E2E8F0"/>
-            </a:solidFill>
-          </a:ln>
-        </p:spPr>
-        <p:style>
-          <a:lnRef idx="1">
-            <a:schemeClr val="accent1"/>
-          </a:lnRef>
-          <a:fillRef idx="3">
-            <a:schemeClr val="accent1"/>
-          </a:fillRef>
-          <a:effectRef idx="2">
-            <a:schemeClr val="accent1"/>
-          </a:effectRef>
-          <a:fontRef idx="minor">
-            <a:schemeClr val="lt1"/>
-          </a:fontRef>
-        </p:style>
-        <p:txBody>
-          <a:bodyPr rtlCol="0" anchor="ctr"/>
-          <a:lstStyle/>
-          <a:p>
-            <a:pPr algn="ctr"/>
-          </a:p>
-        </p:txBody>
-      </p:sp>
-      <p:sp>
-        <p:nvSpPr>
-          <p:cNvPr id="7" name="TextBox 6"/>
+          <p:cNvPr id="5" name="TextBox 4"/>
           <p:cNvSpPr txBox="1"/>
           <p:nvPr/>
         </p:nvSpPr>
         <p:spPr>
           <a:xfrm>
-            <a:off x="960120" y="1600200"/>
-            <a:ext cx="4773168" cy="4526280"/>
+            <a:off x="731520" y="1389888"/>
+            <a:ext cx="5120640" cy="4892040"/>
           </a:xfrm>
           <a:prstGeom prst="rect">
             <a:avLst/>
@@ -5130,7 +4508,7 @@
           <a:noFill/>
         </p:spPr>
         <p:txBody>
-          <a:bodyPr wrap="square">
+          <a:bodyPr wrap="square" lIns="0" rIns="0" tIns="0" bIns="0">
             <a:spAutoFit/>
           </a:bodyPr>
           <a:lstStyle/>
@@ -5139,7 +4517,7 @@
               <a:spcAft>
                 <a:spcPts val="200"/>
               </a:spcAft>
-              <a:defRPr sz="2000" b="1">
+              <a:defRPr sz="2300" b="1">
                 <a:solidFill>
                   <a:srgbClr val="0F172A"/>
                 </a:solidFill>
@@ -5152,9 +4530,9 @@
           <a:p>
             <a:pPr>
               <a:spcAft>
-                <a:spcPts val="1200"/>
-              </a:spcAft>
-              <a:defRPr sz="1200" b="1">
+                <a:spcPts val="1400"/>
+              </a:spcAft>
+              <a:defRPr sz="1300" b="1">
                 <a:solidFill>
                   <a:srgbClr val="0E7490"/>
                 </a:solidFill>
@@ -5166,196 +4544,131 @@
           </a:p>
           <a:p>
             <a:pPr>
-              <a:defRPr b="1" sz="1150">
+              <a:spcAft>
+                <a:spcPts val="900"/>
+              </a:spcAft>
+            </a:pPr>
+            <a:r>
+              <a:rPr b="1" sz="1300">
                 <a:solidFill>
                   <a:srgbClr val="0F172A"/>
                 </a:solidFill>
-              </a:defRPr>
-            </a:pPr>
-            <a:r>
-              <a:t>• Project Focus: </a:t>
-            </a:r>
-          </a:p>
-          <a:p>
-            <a:pPr>
-              <a:spcAft>
-                <a:spcPts val="600"/>
-              </a:spcAft>
-              <a:defRPr sz="1100">
+              </a:rPr>
+              <a:t>•  Project Focus: </a:t>
+            </a:r>
+            <a:r>
+              <a:rPr b="0" sz="1200">
                 <a:solidFill>
                   <a:srgbClr val="475569"/>
                 </a:solidFill>
-              </a:defRPr>
-            </a:pPr>
-            <a:r>
-              <a:t>  Entertainment Management Application for a major client.</a:t>
-            </a:r>
-          </a:p>
-          <a:p>
-            <a:pPr>
-              <a:defRPr b="1" sz="1150">
+              </a:rPr>
+              <a:t>Entertainment Management Application for a major client.</a:t>
+            </a:r>
+          </a:p>
+          <a:p>
+            <a:pPr>
+              <a:spcAft>
+                <a:spcPts val="900"/>
+              </a:spcAft>
+            </a:pPr>
+            <a:r>
+              <a:rPr b="1" sz="1300">
                 <a:solidFill>
                   <a:srgbClr val="0F172A"/>
                 </a:solidFill>
-              </a:defRPr>
-            </a:pPr>
-            <a:r>
-              <a:t>• Technology Stack: </a:t>
-            </a:r>
-          </a:p>
-          <a:p>
-            <a:pPr>
-              <a:spcAft>
-                <a:spcPts val="600"/>
-              </a:spcAft>
-              <a:defRPr sz="1100">
+              </a:rPr>
+              <a:t>•  Technology Stack: </a:t>
+            </a:r>
+            <a:r>
+              <a:rPr b="0" sz="1200">
                 <a:solidFill>
                   <a:srgbClr val="475569"/>
                 </a:solidFill>
-              </a:defRPr>
-            </a:pPr>
-            <a:r>
-              <a:t>  Angular, TypeScript, AWS cloud infrastructure, Node.js.</a:t>
-            </a:r>
-          </a:p>
-          <a:p>
-            <a:pPr>
-              <a:defRPr b="1" sz="1150">
+              </a:rPr>
+              <a:t>Angular, TypeScript, AWS cloud infrastructure, Node.js.</a:t>
+            </a:r>
+          </a:p>
+          <a:p>
+            <a:pPr>
+              <a:spcAft>
+                <a:spcPts val="900"/>
+              </a:spcAft>
+            </a:pPr>
+            <a:r>
+              <a:rPr b="1" sz="1300">
                 <a:solidFill>
                   <a:srgbClr val="0F172A"/>
                 </a:solidFill>
-              </a:defRPr>
-            </a:pPr>
-            <a:r>
-              <a:t>• System Architecture: </a:t>
-            </a:r>
-          </a:p>
-          <a:p>
-            <a:pPr>
-              <a:spcAft>
-                <a:spcPts val="600"/>
-              </a:spcAft>
-              <a:defRPr sz="1100">
+              </a:rPr>
+              <a:t>•  System Architecture: </a:t>
+            </a:r>
+            <a:r>
+              <a:rPr b="0" sz="1200">
                 <a:solidFill>
                   <a:srgbClr val="475569"/>
                 </a:solidFill>
-              </a:defRPr>
-            </a:pPr>
-            <a:r>
-              <a:t>  Architected the complete single-page application structure, establishing clean state management and secure API communication layers.</a:t>
-            </a:r>
-          </a:p>
-          <a:p>
-            <a:pPr>
-              <a:defRPr b="1" sz="1150">
+              </a:rPr>
+              <a:t>Architected the complete single-page application structure, establishing clean state management and secure API communication layers.</a:t>
+            </a:r>
+          </a:p>
+          <a:p>
+            <a:pPr>
+              <a:spcAft>
+                <a:spcPts val="900"/>
+              </a:spcAft>
+            </a:pPr>
+            <a:r>
+              <a:rPr b="1" sz="1300">
                 <a:solidFill>
                   <a:srgbClr val="0F172A"/>
                 </a:solidFill>
-              </a:defRPr>
-            </a:pPr>
-            <a:r>
-              <a:t>• Standards &amp; Best Practices: </a:t>
-            </a:r>
-          </a:p>
-          <a:p>
-            <a:pPr>
-              <a:spcAft>
-                <a:spcPts val="600"/>
-              </a:spcAft>
-              <a:defRPr sz="1100">
+              </a:rPr>
+              <a:t>•  Standards &amp; Best Practices: </a:t>
+            </a:r>
+            <a:r>
+              <a:rPr b="0" sz="1200">
                 <a:solidFill>
                   <a:srgbClr val="475569"/>
                 </a:solidFill>
-              </a:defRPr>
-            </a:pPr>
-            <a:r>
-              <a:t>  Enforced accessibility standards (WCAG), code quality linters, and strict frontend security guidelines across the engineering team.</a:t>
-            </a:r>
-          </a:p>
-          <a:p>
-            <a:pPr>
-              <a:defRPr b="1" sz="1150">
+              </a:rPr>
+              <a:t>Enforced accessibility standards (WCAG), code quality linters, and strict frontend security guidelines across the engineering team.</a:t>
+            </a:r>
+          </a:p>
+          <a:p>
+            <a:pPr>
+              <a:spcAft>
+                <a:spcPts val="900"/>
+              </a:spcAft>
+            </a:pPr>
+            <a:r>
+              <a:rPr b="1" sz="1300">
                 <a:solidFill>
                   <a:srgbClr val="0F172A"/>
                 </a:solidFill>
-              </a:defRPr>
-            </a:pPr>
-            <a:r>
-              <a:t>• Technical Leadership: </a:t>
-            </a:r>
-          </a:p>
-          <a:p>
-            <a:pPr>
-              <a:spcAft>
-                <a:spcPts val="600"/>
-              </a:spcAft>
-              <a:defRPr sz="1100">
+              </a:rPr>
+              <a:t>•  Technical Leadership: </a:t>
+            </a:r>
+            <a:r>
+              <a:rPr b="0" sz="1200">
                 <a:solidFill>
                   <a:srgbClr val="475569"/>
                 </a:solidFill>
-              </a:defRPr>
-            </a:pPr>
-            <a:r>
-              <a:t>  Led the development squad through agile sprints, code reviews, and end-to-end technical deployment to client environments on schedule.</a:t>
-            </a:r>
-          </a:p>
-        </p:txBody>
-      </p:sp>
-      <p:sp>
-        <p:nvSpPr>
-          <p:cNvPr id="8" name="Rounded Rectangle 7"/>
-          <p:cNvSpPr/>
-          <p:nvPr/>
-        </p:nvSpPr>
-        <p:spPr>
-          <a:xfrm>
-            <a:off x="6217920" y="1417320"/>
-            <a:ext cx="5230368" cy="4892040"/>
-          </a:xfrm>
-          <a:prstGeom prst="roundRect">
-            <a:avLst/>
-          </a:prstGeom>
-          <a:solidFill>
-            <a:srgbClr val="FFFFFF"/>
-          </a:solidFill>
-          <a:ln w="12700">
-            <a:solidFill>
-              <a:srgbClr val="E2E8F0"/>
-            </a:solidFill>
-          </a:ln>
-        </p:spPr>
-        <p:style>
-          <a:lnRef idx="1">
-            <a:schemeClr val="accent1"/>
-          </a:lnRef>
-          <a:fillRef idx="3">
-            <a:schemeClr val="accent1"/>
-          </a:fillRef>
-          <a:effectRef idx="2">
-            <a:schemeClr val="accent1"/>
-          </a:effectRef>
-          <a:fontRef idx="minor">
-            <a:schemeClr val="lt1"/>
-          </a:fontRef>
-        </p:style>
-        <p:txBody>
-          <a:bodyPr rtlCol="0" anchor="ctr"/>
-          <a:lstStyle/>
-          <a:p>
-            <a:pPr algn="ctr"/>
-          </a:p>
-        </p:txBody>
-      </p:sp>
-      <p:sp>
-        <p:nvSpPr>
-          <p:cNvPr id="9" name="TextBox 8"/>
+              </a:rPr>
+              <a:t>Led the development squad through agile sprints, code reviews, and end-to-end technical deployment to client environments on schedule.</a:t>
+            </a:r>
+          </a:p>
+        </p:txBody>
+      </p:sp>
+      <p:sp>
+        <p:nvSpPr>
+          <p:cNvPr id="6" name="TextBox 5"/>
           <p:cNvSpPr txBox="1"/>
           <p:nvPr/>
         </p:nvSpPr>
         <p:spPr>
           <a:xfrm>
-            <a:off x="6446520" y="1600200"/>
-            <a:ext cx="4773168" cy="4526280"/>
+            <a:off x="6309360" y="1389888"/>
+            <a:ext cx="5120640" cy="4892040"/>
           </a:xfrm>
           <a:prstGeom prst="rect">
             <a:avLst/>
@@ -5363,7 +4676,7 @@
           <a:noFill/>
         </p:spPr>
         <p:txBody>
-          <a:bodyPr wrap="square">
+          <a:bodyPr wrap="square" lIns="0" rIns="0" tIns="0" bIns="0">
             <a:spAutoFit/>
           </a:bodyPr>
           <a:lstStyle/>
@@ -5372,7 +4685,7 @@
               <a:spcAft>
                 <a:spcPts val="200"/>
               </a:spcAft>
-              <a:defRPr sz="2000" b="1">
+              <a:defRPr sz="2300" b="1">
                 <a:solidFill>
                   <a:srgbClr val="0F172A"/>
                 </a:solidFill>
@@ -5385,9 +4698,9 @@
           <a:p>
             <a:pPr>
               <a:spcAft>
-                <a:spcPts val="1200"/>
-              </a:spcAft>
-              <a:defRPr sz="1200" b="1">
+                <a:spcPts val="1400"/>
+              </a:spcAft>
+              <a:defRPr sz="1300" b="1">
                 <a:solidFill>
                   <a:srgbClr val="0284C7"/>
                 </a:solidFill>
@@ -5399,151 +4712,131 @@
           </a:p>
           <a:p>
             <a:pPr>
-              <a:defRPr b="1" sz="1150">
+              <a:spcAft>
+                <a:spcPts val="900"/>
+              </a:spcAft>
+            </a:pPr>
+            <a:r>
+              <a:rPr b="1" sz="1300">
                 <a:solidFill>
                   <a:srgbClr val="0F172A"/>
                 </a:solidFill>
-              </a:defRPr>
-            </a:pPr>
-            <a:r>
-              <a:t>• Enterprise Design System: </a:t>
-            </a:r>
-          </a:p>
-          <a:p>
-            <a:pPr>
-              <a:spcAft>
-                <a:spcPts val="600"/>
-              </a:spcAft>
-              <a:defRPr sz="1100">
+              </a:rPr>
+              <a:t>•  Enterprise Design System: </a:t>
+            </a:r>
+            <a:r>
+              <a:rPr b="0" sz="1200">
                 <a:solidFill>
                   <a:srgbClr val="475569"/>
                 </a:solidFill>
-              </a:defRPr>
-            </a:pPr>
-            <a:r>
-              <a:t>  Architected and engineered a centralized cross-framework UI Design System using LitElement Web Components, React, AngularJS, Node.js, and npm packaging.</a:t>
-            </a:r>
-          </a:p>
-          <a:p>
-            <a:pPr>
-              <a:defRPr b="1" sz="1150">
+              </a:rPr>
+              <a:t>Architected and engineered a centralized cross-framework UI Design System using LitElement Web Components, React, AngularJS, Node.js, and npm packaging.</a:t>
+            </a:r>
+          </a:p>
+          <a:p>
+            <a:pPr>
+              <a:spcAft>
+                <a:spcPts val="900"/>
+              </a:spcAft>
+            </a:pPr>
+            <a:r>
+              <a:rPr b="1" sz="1300">
                 <a:solidFill>
                   <a:srgbClr val="0F172A"/>
                 </a:solidFill>
-              </a:defRPr>
-            </a:pPr>
-            <a:r>
-              <a:t>• Eliminated Duplication: </a:t>
-            </a:r>
-          </a:p>
-          <a:p>
-            <a:pPr>
-              <a:spcAft>
-                <a:spcPts val="600"/>
-              </a:spcAft>
-              <a:defRPr sz="1100">
+              </a:rPr>
+              <a:t>•  Eliminated Duplication: </a:t>
+            </a:r>
+            <a:r>
+              <a:rPr b="0" sz="1200">
                 <a:solidFill>
                   <a:srgbClr val="475569"/>
                 </a:solidFill>
-              </a:defRPr>
-            </a:pPr>
-            <a:r>
-              <a:t>  Stored all standardized UI components in a central repository, preventing teams from reinventing the wheel for new client projects.</a:t>
-            </a:r>
-          </a:p>
-          <a:p>
-            <a:pPr>
-              <a:defRPr b="1" sz="1150">
+              </a:rPr>
+              <a:t>Stored all standardized UI components in a central repository, preventing teams from reinventing the wheel for new client projects.</a:t>
+            </a:r>
+          </a:p>
+          <a:p>
+            <a:pPr>
+              <a:spcAft>
+                <a:spcPts val="900"/>
+              </a:spcAft>
+            </a:pPr>
+            <a:r>
+              <a:rPr b="1" sz="1300">
                 <a:solidFill>
                   <a:srgbClr val="0F172A"/>
                 </a:solidFill>
-              </a:defRPr>
-            </a:pPr>
-            <a:r>
-              <a:t>• Unified Look &amp; Feel: </a:t>
-            </a:r>
-          </a:p>
-          <a:p>
-            <a:pPr>
-              <a:spcAft>
-                <a:spcPts val="600"/>
-              </a:spcAft>
-              <a:defRPr sz="1100">
+              </a:rPr>
+              <a:t>•  Unified Look &amp; Feel: </a:t>
+            </a:r>
+            <a:r>
+              <a:rPr b="0" sz="1200">
                 <a:solidFill>
                   <a:srgbClr val="475569"/>
                 </a:solidFill>
-              </a:defRPr>
-            </a:pPr>
-            <a:r>
-              <a:t>  Guaranteed visual consistency and brand coherence across all digital products from a single, shared codebase.</a:t>
-            </a:r>
-          </a:p>
-          <a:p>
-            <a:pPr>
-              <a:defRPr b="1" sz="1150">
+              </a:rPr>
+              <a:t>Guaranteed visual consistency and brand coherence across all digital products from a single, shared codebase.</a:t>
+            </a:r>
+          </a:p>
+          <a:p>
+            <a:pPr>
+              <a:spcAft>
+                <a:spcPts val="900"/>
+              </a:spcAft>
+            </a:pPr>
+            <a:r>
+              <a:rPr b="1" sz="1300">
                 <a:solidFill>
                   <a:srgbClr val="0F172A"/>
                 </a:solidFill>
-              </a:defRPr>
-            </a:pPr>
-            <a:r>
-              <a:t>• Automated Upgradability: </a:t>
-            </a:r>
-          </a:p>
-          <a:p>
-            <a:pPr>
-              <a:spcAft>
-                <a:spcPts val="600"/>
-              </a:spcAft>
-              <a:defRPr sz="1100">
+              </a:rPr>
+              <a:t>•  Automated Upgradability: </a:t>
+            </a:r>
+            <a:r>
+              <a:rPr b="0" sz="1200">
                 <a:solidFill>
                   <a:srgbClr val="475569"/>
                 </a:solidFill>
-              </a:defRPr>
-            </a:pPr>
-            <a:r>
-              <a:t>  When the core component library is updated, client projects automatically inherit updates and enhancements via standard package management.</a:t>
-            </a:r>
-          </a:p>
-          <a:p>
-            <a:pPr>
-              <a:defRPr b="1" sz="1150">
+              </a:rPr>
+              <a:t>When the core component library is updated, client projects automatically inherit updates and enhancements via standard package management.</a:t>
+            </a:r>
+          </a:p>
+          <a:p>
+            <a:pPr>
+              <a:spcAft>
+                <a:spcPts val="900"/>
+              </a:spcAft>
+            </a:pPr>
+            <a:r>
+              <a:rPr b="1" sz="1300">
                 <a:solidFill>
                   <a:srgbClr val="0F172A"/>
                 </a:solidFill>
-              </a:defRPr>
-            </a:pPr>
-            <a:r>
-              <a:t>• Luxury Hotel Mobile App: </a:t>
-            </a:r>
-          </a:p>
-          <a:p>
-            <a:pPr>
-              <a:spcAft>
-                <a:spcPts val="600"/>
-              </a:spcAft>
-              <a:defRPr sz="1100">
+              </a:rPr>
+              <a:t>•  Luxury Hotel Mobile App: </a:t>
+            </a:r>
+            <a:r>
+              <a:rPr b="0" sz="1200">
                 <a:solidFill>
                   <a:srgbClr val="475569"/>
                 </a:solidFill>
-              </a:defRPr>
-            </a:pPr>
-            <a:r>
-              <a:t>  Led mobile application development for a premier Indian hotel group (TLC Group of Hotels) built using Ionic and Angular.</a:t>
-            </a:r>
-          </a:p>
-        </p:txBody>
-      </p:sp>
-      <p:sp>
-        <p:nvSpPr>
-          <p:cNvPr id="10" name="TextBox 9"/>
+              </a:rPr>
+              <a:t>Led mobile application development for a premier Indian hotel group (TLC Group of Hotels) built using Ionic and Angular.</a:t>
+            </a:r>
+          </a:p>
+        </p:txBody>
+      </p:sp>
+      <p:sp>
+        <p:nvSpPr>
+          <p:cNvPr id="7" name="TextBox 6"/>
           <p:cNvSpPr txBox="1"/>
           <p:nvPr/>
         </p:nvSpPr>
         <p:spPr>
           <a:xfrm>
-            <a:off x="731520" y="6446520"/>
-            <a:ext cx="10728655" cy="320040"/>
+            <a:off x="731520" y="6473952"/>
+            <a:ext cx="10728655" cy="292608"/>
           </a:xfrm>
           <a:prstGeom prst="rect">
             <a:avLst/>
@@ -5638,8 +4931,8 @@
         </p:nvSpPr>
         <p:spPr>
           <a:xfrm>
-            <a:off x="731520" y="320040"/>
-            <a:ext cx="10698480" cy="292608"/>
+            <a:off x="731520" y="438912"/>
+            <a:ext cx="10728655" cy="640080"/>
           </a:xfrm>
           <a:prstGeom prst="rect">
             <a:avLst/>
@@ -5653,42 +4946,7 @@
           <a:lstStyle/>
           <a:p>
             <a:pPr>
-              <a:defRPr sz="1150" b="1">
-                <a:solidFill>
-                  <a:srgbClr val="0E7490"/>
-                </a:solidFill>
-              </a:defRPr>
-            </a:pPr>
-            <a:r>
-              <a:t>SECTION 2 · PROJECT EXPERIENCE (CLIENT GROUP 5)</a:t>
-            </a:r>
-          </a:p>
-        </p:txBody>
-      </p:sp>
-      <p:sp>
-        <p:nvSpPr>
-          <p:cNvPr id="4" name="TextBox 3"/>
-          <p:cNvSpPr txBox="1"/>
-          <p:nvPr/>
-        </p:nvSpPr>
-        <p:spPr>
-          <a:xfrm>
-            <a:off x="731520" y="621792"/>
-            <a:ext cx="10698480" cy="594360"/>
-          </a:xfrm>
-          <a:prstGeom prst="rect">
-            <a:avLst/>
-          </a:prstGeom>
-          <a:noFill/>
-        </p:spPr>
-        <p:txBody>
-          <a:bodyPr wrap="square" lIns="0" rIns="0" tIns="0" bIns="0">
-            <a:spAutoFit/>
-          </a:bodyPr>
-          <a:lstStyle/>
-          <a:p>
-            <a:pPr>
-              <a:defRPr sz="2300" b="1">
+              <a:defRPr sz="2500" b="1">
                 <a:solidFill>
                   <a:srgbClr val="0F172A"/>
                 </a:solidFill>
@@ -5702,13 +4960,13 @@
       </p:sp>
       <p:sp>
         <p:nvSpPr>
-          <p:cNvPr id="5" name="Rectangle 4"/>
+          <p:cNvPr id="4" name="Rectangle 3"/>
           <p:cNvSpPr/>
           <p:nvPr/>
         </p:nvSpPr>
         <p:spPr>
           <a:xfrm>
-            <a:off x="731520" y="1243584"/>
+            <a:off x="731520" y="1170432"/>
             <a:ext cx="10728655" cy="22860"/>
           </a:xfrm>
           <a:prstGeom prst="rect">
@@ -5745,59 +5003,14 @@
       </p:sp>
       <p:sp>
         <p:nvSpPr>
-          <p:cNvPr id="6" name="Rounded Rectangle 5"/>
-          <p:cNvSpPr/>
-          <p:nvPr/>
-        </p:nvSpPr>
-        <p:spPr>
-          <a:xfrm>
-            <a:off x="731520" y="1417320"/>
-            <a:ext cx="4114800" cy="4892040"/>
-          </a:xfrm>
-          <a:prstGeom prst="roundRect">
-            <a:avLst/>
-          </a:prstGeom>
-          <a:solidFill>
-            <a:srgbClr val="FFFFFF"/>
-          </a:solidFill>
-          <a:ln w="12700">
-            <a:solidFill>
-              <a:srgbClr val="E2E8F0"/>
-            </a:solidFill>
-          </a:ln>
-        </p:spPr>
-        <p:style>
-          <a:lnRef idx="1">
-            <a:schemeClr val="accent1"/>
-          </a:lnRef>
-          <a:fillRef idx="3">
-            <a:schemeClr val="accent1"/>
-          </a:fillRef>
-          <a:effectRef idx="2">
-            <a:schemeClr val="accent1"/>
-          </a:effectRef>
-          <a:fontRef idx="minor">
-            <a:schemeClr val="lt1"/>
-          </a:fontRef>
-        </p:style>
-        <p:txBody>
-          <a:bodyPr rtlCol="0" anchor="ctr"/>
-          <a:lstStyle/>
-          <a:p>
-            <a:pPr algn="ctr"/>
-          </a:p>
-        </p:txBody>
-      </p:sp>
-      <p:sp>
-        <p:nvSpPr>
-          <p:cNvPr id="7" name="TextBox 6"/>
+          <p:cNvPr id="5" name="TextBox 4"/>
           <p:cNvSpPr txBox="1"/>
           <p:nvPr/>
         </p:nvSpPr>
         <p:spPr>
           <a:xfrm>
-            <a:off x="960120" y="1600200"/>
-            <a:ext cx="3657600" cy="4480560"/>
+            <a:off x="731520" y="1389888"/>
+            <a:ext cx="4206240" cy="4892040"/>
           </a:xfrm>
           <a:prstGeom prst="rect">
             <a:avLst/>
@@ -5805,7 +5018,7 @@
           <a:noFill/>
         </p:spPr>
         <p:txBody>
-          <a:bodyPr wrap="square">
+          <a:bodyPr wrap="square" lIns="0" rIns="0" tIns="0" bIns="0">
             <a:spAutoFit/>
           </a:bodyPr>
           <a:lstStyle/>
@@ -5814,7 +5027,7 @@
               <a:spcAft>
                 <a:spcPts val="200"/>
               </a:spcAft>
-              <a:defRPr sz="2000" b="1">
+              <a:defRPr sz="2300" b="1">
                 <a:solidFill>
                   <a:srgbClr val="0F172A"/>
                 </a:solidFill>
@@ -5827,9 +5040,9 @@
           <a:p>
             <a:pPr>
               <a:spcAft>
-                <a:spcPts val="1200"/>
-              </a:spcAft>
-              <a:defRPr sz="1200" b="1">
+                <a:spcPts val="1400"/>
+              </a:spcAft>
+              <a:defRPr sz="1300" b="1">
                 <a:solidFill>
                   <a:srgbClr val="0E7490"/>
                 </a:solidFill>
@@ -5841,136 +5054,116 @@
           </a:p>
           <a:p>
             <a:pPr>
-              <a:defRPr b="1" sz="1150">
+              <a:spcAft>
+                <a:spcPts val="1000"/>
+              </a:spcAft>
+            </a:pPr>
+            <a:r>
+              <a:rPr b="1" sz="1300">
                 <a:solidFill>
                   <a:srgbClr val="0F172A"/>
                 </a:solidFill>
-              </a:defRPr>
-            </a:pPr>
-            <a:r>
-              <a:t>Role: </a:t>
-            </a:r>
-          </a:p>
-          <a:p>
-            <a:pPr>
-              <a:spcAft>
-                <a:spcPts val="700"/>
-              </a:spcAft>
-              <a:defRPr sz="1100">
+              </a:rPr>
+              <a:t>•  Role: </a:t>
+            </a:r>
+            <a:r>
+              <a:rPr b="0" sz="1200">
                 <a:solidFill>
                   <a:srgbClr val="475569"/>
                 </a:solidFill>
-              </a:defRPr>
-            </a:pPr>
-            <a:r>
+              </a:rPr>
               <a:t>Senior Analyst &amp; Associate Project Manager</a:t>
             </a:r>
           </a:p>
           <a:p>
             <a:pPr>
-              <a:defRPr b="1" sz="1150">
+              <a:spcAft>
+                <a:spcPts val="1000"/>
+              </a:spcAft>
+            </a:pPr>
+            <a:r>
+              <a:rPr b="1" sz="1300">
                 <a:solidFill>
                   <a:srgbClr val="0F172A"/>
                 </a:solidFill>
-              </a:defRPr>
-            </a:pPr>
-            <a:r>
-              <a:t>Tenure: </a:t>
-            </a:r>
-          </a:p>
-          <a:p>
-            <a:pPr>
-              <a:spcAft>
-                <a:spcPts val="700"/>
-              </a:spcAft>
-              <a:defRPr sz="1100">
+              </a:rPr>
+              <a:t>•  Tenure: </a:t>
+            </a:r>
+            <a:r>
+              <a:rPr b="0" sz="1200">
                 <a:solidFill>
                   <a:srgbClr val="475569"/>
                 </a:solidFill>
-              </a:defRPr>
-            </a:pPr>
-            <a:r>
+              </a:rPr>
               <a:t>Feb 2015 – Feb 2019 (4+ Years Dedicated Tenure)</a:t>
             </a:r>
           </a:p>
           <a:p>
             <a:pPr>
-              <a:defRPr b="1" sz="1150">
+              <a:spcAft>
+                <a:spcPts val="1000"/>
+              </a:spcAft>
+            </a:pPr>
+            <a:r>
+              <a:rPr b="1" sz="1300">
                 <a:solidFill>
                   <a:srgbClr val="0F172A"/>
                 </a:solidFill>
-              </a:defRPr>
-            </a:pPr>
-            <a:r>
-              <a:t>Client: </a:t>
-            </a:r>
-          </a:p>
-          <a:p>
-            <a:pPr>
-              <a:spcAft>
-                <a:spcPts val="700"/>
-              </a:spcAft>
-              <a:defRPr sz="1100">
+              </a:rPr>
+              <a:t>•  Client: </a:t>
+            </a:r>
+            <a:r>
+              <a:rPr b="0" sz="1200">
                 <a:solidFill>
                   <a:srgbClr val="475569"/>
                 </a:solidFill>
-              </a:defRPr>
-            </a:pPr>
-            <a:r>
+              </a:rPr>
               <a:t>Cisco Systems India Private Limited via UST Global</a:t>
             </a:r>
           </a:p>
           <a:p>
             <a:pPr>
-              <a:defRPr b="1" sz="1150">
+              <a:spcAft>
+                <a:spcPts val="1000"/>
+              </a:spcAft>
+            </a:pPr>
+            <a:r>
+              <a:rPr b="1" sz="1300">
                 <a:solidFill>
                   <a:srgbClr val="0F172A"/>
                 </a:solidFill>
-              </a:defRPr>
-            </a:pPr>
-            <a:r>
-              <a:t>Product Scope: </a:t>
-            </a:r>
-          </a:p>
-          <a:p>
-            <a:pPr>
-              <a:spcAft>
-                <a:spcPts val="700"/>
-              </a:spcAft>
-              <a:defRPr sz="1100">
+              </a:rPr>
+              <a:t>•  Product Scope: </a:t>
+            </a:r>
+            <a:r>
+              <a:rPr b="0" sz="1200">
                 <a:solidFill>
                   <a:srgbClr val="475569"/>
                 </a:solidFill>
-              </a:defRPr>
-            </a:pPr>
-            <a:r>
+              </a:rPr>
               <a:t>Centralized digital media, live video distribution, and dynamic stadium display management deployed at major international sporting arenas.</a:t>
             </a:r>
           </a:p>
           <a:p>
             <a:pPr>
-              <a:defRPr b="1" sz="1150">
+              <a:spcAft>
+                <a:spcPts val="1000"/>
+              </a:spcAft>
+            </a:pPr>
+            <a:r>
+              <a:rPr b="1" sz="1300">
                 <a:solidFill>
                   <a:srgbClr val="0F172A"/>
                 </a:solidFill>
-              </a:defRPr>
-            </a:pPr>
-            <a:r>
-              <a:t>Core Mandate: </a:t>
-            </a:r>
-          </a:p>
-          <a:p>
-            <a:pPr>
-              <a:spcAft>
-                <a:spcPts val="700"/>
-              </a:spcAft>
-              <a:defRPr sz="1100">
+              </a:rPr>
+              <a:t>•  Core Mandate: </a:t>
+            </a:r>
+            <a:r>
+              <a:rPr b="0" sz="1200">
                 <a:solidFill>
                   <a:srgbClr val="475569"/>
                 </a:solidFill>
-              </a:defRPr>
-            </a:pPr>
-            <a:r>
+              </a:rPr>
               <a:t>Modernize a massive legacy application suite with numerous active sub-applications and active global customers.</a:t>
             </a:r>
           </a:p>
@@ -5978,59 +5171,14 @@
       </p:sp>
       <p:sp>
         <p:nvSpPr>
-          <p:cNvPr id="8" name="Rounded Rectangle 7"/>
-          <p:cNvSpPr/>
-          <p:nvPr/>
-        </p:nvSpPr>
-        <p:spPr>
-          <a:xfrm>
-            <a:off x="5074920" y="1417320"/>
-            <a:ext cx="6382512" cy="1536192"/>
-          </a:xfrm>
-          <a:prstGeom prst="roundRect">
-            <a:avLst/>
-          </a:prstGeom>
-          <a:solidFill>
-            <a:srgbClr val="FFFFFF"/>
-          </a:solidFill>
-          <a:ln w="12700">
-            <a:solidFill>
-              <a:srgbClr val="E2E8F0"/>
-            </a:solidFill>
-          </a:ln>
-        </p:spPr>
-        <p:style>
-          <a:lnRef idx="1">
-            <a:schemeClr val="accent1"/>
-          </a:lnRef>
-          <a:fillRef idx="3">
-            <a:schemeClr val="accent1"/>
-          </a:fillRef>
-          <a:effectRef idx="2">
-            <a:schemeClr val="accent1"/>
-          </a:effectRef>
-          <a:fontRef idx="minor">
-            <a:schemeClr val="lt1"/>
-          </a:fontRef>
-        </p:style>
-        <p:txBody>
-          <a:bodyPr rtlCol="0" anchor="ctr"/>
-          <a:lstStyle/>
-          <a:p>
-            <a:pPr algn="ctr"/>
-          </a:p>
-        </p:txBody>
-      </p:sp>
-      <p:sp>
-        <p:nvSpPr>
-          <p:cNvPr id="9" name="TextBox 8"/>
+          <p:cNvPr id="6" name="TextBox 5"/>
           <p:cNvSpPr txBox="1"/>
           <p:nvPr/>
         </p:nvSpPr>
         <p:spPr>
           <a:xfrm>
-            <a:off x="5303520" y="1554480"/>
-            <a:ext cx="5925312" cy="1280160"/>
+            <a:off x="5303520" y="1389888"/>
+            <a:ext cx="6126480" cy="4892040"/>
           </a:xfrm>
           <a:prstGeom prst="rect">
             <a:avLst/>
@@ -6038,7 +5186,7 @@
           <a:noFill/>
         </p:spPr>
         <p:txBody>
-          <a:bodyPr wrap="square">
+          <a:bodyPr wrap="square" lIns="0" rIns="0" tIns="0" bIns="0">
             <a:spAutoFit/>
           </a:bodyPr>
           <a:lstStyle/>
@@ -6047,7 +5195,7 @@
               <a:spcAft>
                 <a:spcPts val="400"/>
               </a:spcAft>
-              <a:defRPr sz="1300" b="1">
+              <a:defRPr sz="1450" b="1">
                 <a:solidFill>
                   <a:srgbClr val="0284C7"/>
                 </a:solidFill>
@@ -6059,7 +5207,10 @@
           </a:p>
           <a:p>
             <a:pPr>
-              <a:defRPr sz="1100">
+              <a:spcAft>
+                <a:spcPts val="1600"/>
+              </a:spcAft>
+              <a:defRPr sz="1200">
                 <a:solidFill>
                   <a:srgbClr val="1E293B"/>
                 </a:solidFill>
@@ -6069,208 +5220,78 @@
               <a:t>The platform was originally built using Adobe Flash, Flex, and ActionScript. Took technical leadership in architecting and executing a phased migration to modern Angular and React modules without interrupting active stadium operations or breaking existing client workflows.</a:t>
             </a:r>
           </a:p>
-        </p:txBody>
-      </p:sp>
-      <p:sp>
-        <p:nvSpPr>
-          <p:cNvPr id="10" name="Rounded Rectangle 9"/>
-          <p:cNvSpPr/>
-          <p:nvPr/>
-        </p:nvSpPr>
-        <p:spPr>
-          <a:xfrm>
-            <a:off x="5074920" y="3063240"/>
-            <a:ext cx="6382512" cy="1536192"/>
-          </a:xfrm>
-          <a:prstGeom prst="roundRect">
-            <a:avLst/>
-          </a:prstGeom>
-          <a:solidFill>
-            <a:srgbClr val="FFFFFF"/>
-          </a:solidFill>
-          <a:ln w="12700">
-            <a:solidFill>
-              <a:srgbClr val="E2E8F0"/>
-            </a:solidFill>
-          </a:ln>
-        </p:spPr>
-        <p:style>
-          <a:lnRef idx="1">
-            <a:schemeClr val="accent1"/>
-          </a:lnRef>
-          <a:fillRef idx="3">
-            <a:schemeClr val="accent1"/>
-          </a:fillRef>
-          <a:effectRef idx="2">
-            <a:schemeClr val="accent1"/>
-          </a:effectRef>
-          <a:fontRef idx="minor">
-            <a:schemeClr val="lt1"/>
-          </a:fontRef>
-        </p:style>
-        <p:txBody>
-          <a:bodyPr rtlCol="0" anchor="ctr"/>
-          <a:lstStyle/>
-          <a:p>
-            <a:pPr algn="ctr"/>
-          </a:p>
-        </p:txBody>
-      </p:sp>
-      <p:sp>
-        <p:nvSpPr>
-          <p:cNvPr id="11" name="TextBox 10"/>
+          <a:p>
+            <a:pPr>
+              <a:spcAft>
+                <a:spcPts val="400"/>
+              </a:spcAft>
+              <a:defRPr sz="1450" b="1">
+                <a:solidFill>
+                  <a:srgbClr val="0284C7"/>
+                </a:solidFill>
+              </a:defRPr>
+            </a:pPr>
+            <a:r>
+              <a:t>2. Hybrid Interoperability &amp; Multi-Stack Engineering</a:t>
+            </a:r>
+          </a:p>
+          <a:p>
+            <a:pPr>
+              <a:spcAft>
+                <a:spcPts val="1600"/>
+              </a:spcAft>
+              <a:defRPr sz="1200">
+                <a:solidFill>
+                  <a:srgbClr val="1E293B"/>
+                </a:solidFill>
+              </a:defRPr>
+            </a:pPr>
+            <a:r>
+              <a:t>Maintained seamless interoperability between legacy components and modernized Single Page Application (SPA) modules using TypeScript, Angular, React, and Node.js backend services until complete deprecation was achieved.</a:t>
+            </a:r>
+          </a:p>
+          <a:p>
+            <a:pPr>
+              <a:spcAft>
+                <a:spcPts val="400"/>
+              </a:spcAft>
+              <a:defRPr sz="1450" b="1">
+                <a:solidFill>
+                  <a:srgbClr val="0284C7"/>
+                </a:solidFill>
+              </a:defRPr>
+            </a:pPr>
+            <a:r>
+              <a:t>3. Sub-Application Management &amp; Sustained Excellence</a:t>
+            </a:r>
+          </a:p>
+          <a:p>
+            <a:pPr>
+              <a:spcAft>
+                <a:spcPts val="1600"/>
+              </a:spcAft>
+              <a:defRPr sz="1200">
+                <a:solidFill>
+                  <a:srgbClr val="1E293B"/>
+                </a:solidFill>
+              </a:defRPr>
+            </a:pPr>
+            <a:r>
+              <a:t>Governed multiple parallel UI sub-applications serving venue operators, technicians, and broadcast controllers. Awarded multiple Certificates of Excellence by UST Global (2015, 2016, 2018) for client-first commitment and outstanding delivery.</a:t>
+            </a:r>
+          </a:p>
+        </p:txBody>
+      </p:sp>
+      <p:sp>
+        <p:nvSpPr>
+          <p:cNvPr id="7" name="TextBox 6"/>
           <p:cNvSpPr txBox="1"/>
           <p:nvPr/>
         </p:nvSpPr>
         <p:spPr>
           <a:xfrm>
-            <a:off x="5303520" y="3200400"/>
-            <a:ext cx="5925312" cy="1280160"/>
-          </a:xfrm>
-          <a:prstGeom prst="rect">
-            <a:avLst/>
-          </a:prstGeom>
-          <a:noFill/>
-        </p:spPr>
-        <p:txBody>
-          <a:bodyPr wrap="square">
-            <a:spAutoFit/>
-          </a:bodyPr>
-          <a:lstStyle/>
-          <a:p>
-            <a:pPr>
-              <a:spcAft>
-                <a:spcPts val="400"/>
-              </a:spcAft>
-              <a:defRPr sz="1300" b="1">
-                <a:solidFill>
-                  <a:srgbClr val="0284C7"/>
-                </a:solidFill>
-              </a:defRPr>
-            </a:pPr>
-            <a:r>
-              <a:t>2. Hybrid Interoperability &amp; Multi-Stack Engineering</a:t>
-            </a:r>
-          </a:p>
-          <a:p>
-            <a:pPr>
-              <a:defRPr sz="1100">
-                <a:solidFill>
-                  <a:srgbClr val="1E293B"/>
-                </a:solidFill>
-              </a:defRPr>
-            </a:pPr>
-            <a:r>
-              <a:t>Maintained seamless interoperability between legacy components and modernized Single Page Application (SPA) modules using TypeScript, Angular, React, and Node.js backend services until complete deprecation was achieved.</a:t>
-            </a:r>
-          </a:p>
-        </p:txBody>
-      </p:sp>
-      <p:sp>
-        <p:nvSpPr>
-          <p:cNvPr id="12" name="Rounded Rectangle 11"/>
-          <p:cNvSpPr/>
-          <p:nvPr/>
-        </p:nvSpPr>
-        <p:spPr>
-          <a:xfrm>
-            <a:off x="5074920" y="4709160"/>
-            <a:ext cx="6382512" cy="1536192"/>
-          </a:xfrm>
-          <a:prstGeom prst="roundRect">
-            <a:avLst/>
-          </a:prstGeom>
-          <a:solidFill>
-            <a:srgbClr val="FFFFFF"/>
-          </a:solidFill>
-          <a:ln w="12700">
-            <a:solidFill>
-              <a:srgbClr val="E2E8F0"/>
-            </a:solidFill>
-          </a:ln>
-        </p:spPr>
-        <p:style>
-          <a:lnRef idx="1">
-            <a:schemeClr val="accent1"/>
-          </a:lnRef>
-          <a:fillRef idx="3">
-            <a:schemeClr val="accent1"/>
-          </a:fillRef>
-          <a:effectRef idx="2">
-            <a:schemeClr val="accent1"/>
-          </a:effectRef>
-          <a:fontRef idx="minor">
-            <a:schemeClr val="lt1"/>
-          </a:fontRef>
-        </p:style>
-        <p:txBody>
-          <a:bodyPr rtlCol="0" anchor="ctr"/>
-          <a:lstStyle/>
-          <a:p>
-            <a:pPr algn="ctr"/>
-          </a:p>
-        </p:txBody>
-      </p:sp>
-      <p:sp>
-        <p:nvSpPr>
-          <p:cNvPr id="13" name="TextBox 12"/>
-          <p:cNvSpPr txBox="1"/>
-          <p:nvPr/>
-        </p:nvSpPr>
-        <p:spPr>
-          <a:xfrm>
-            <a:off x="5303520" y="4846320"/>
-            <a:ext cx="5925312" cy="1280160"/>
-          </a:xfrm>
-          <a:prstGeom prst="rect">
-            <a:avLst/>
-          </a:prstGeom>
-          <a:noFill/>
-        </p:spPr>
-        <p:txBody>
-          <a:bodyPr wrap="square">
-            <a:spAutoFit/>
-          </a:bodyPr>
-          <a:lstStyle/>
-          <a:p>
-            <a:pPr>
-              <a:spcAft>
-                <a:spcPts val="400"/>
-              </a:spcAft>
-              <a:defRPr sz="1300" b="1">
-                <a:solidFill>
-                  <a:srgbClr val="0284C7"/>
-                </a:solidFill>
-              </a:defRPr>
-            </a:pPr>
-            <a:r>
-              <a:t>3. Sub-Application Management &amp; Sustained Excellence</a:t>
-            </a:r>
-          </a:p>
-          <a:p>
-            <a:pPr>
-              <a:defRPr sz="1100">
-                <a:solidFill>
-                  <a:srgbClr val="1E293B"/>
-                </a:solidFill>
-              </a:defRPr>
-            </a:pPr>
-            <a:r>
-              <a:t>Governed multiple parallel UI sub-applications serving venue operators, technicians, and broadcast controllers. Awarded multiple Certificates of Excellence by UST Global (2015, 2016, 2018) for client-first commitment and outstanding delivery.</a:t>
-            </a:r>
-          </a:p>
-        </p:txBody>
-      </p:sp>
-      <p:sp>
-        <p:nvSpPr>
-          <p:cNvPr id="14" name="TextBox 13"/>
-          <p:cNvSpPr txBox="1"/>
-          <p:nvPr/>
-        </p:nvSpPr>
-        <p:spPr>
-          <a:xfrm>
-            <a:off x="731520" y="6446520"/>
-            <a:ext cx="10728655" cy="320040"/>
+            <a:off x="731520" y="6473952"/>
+            <a:ext cx="10728655" cy="292608"/>
           </a:xfrm>
           <a:prstGeom prst="rect">
             <a:avLst/>
@@ -6365,8 +5386,8 @@
         </p:nvSpPr>
         <p:spPr>
           <a:xfrm>
-            <a:off x="731520" y="320040"/>
-            <a:ext cx="10698480" cy="292608"/>
+            <a:off x="731520" y="438912"/>
+            <a:ext cx="10728655" cy="640080"/>
           </a:xfrm>
           <a:prstGeom prst="rect">
             <a:avLst/>
@@ -6380,42 +5401,7 @@
           <a:lstStyle/>
           <a:p>
             <a:pPr>
-              <a:defRPr sz="1150" b="1">
-                <a:solidFill>
-                  <a:srgbClr val="0E7490"/>
-                </a:solidFill>
-              </a:defRPr>
-            </a:pPr>
-            <a:r>
-              <a:t>SECTION 2 · PROJECT EXPERIENCE (CLIENT GROUP 6)</a:t>
-            </a:r>
-          </a:p>
-        </p:txBody>
-      </p:sp>
-      <p:sp>
-        <p:nvSpPr>
-          <p:cNvPr id="4" name="TextBox 3"/>
-          <p:cNvSpPr txBox="1"/>
-          <p:nvPr/>
-        </p:nvSpPr>
-        <p:spPr>
-          <a:xfrm>
-            <a:off x="731520" y="621792"/>
-            <a:ext cx="10698480" cy="594360"/>
-          </a:xfrm>
-          <a:prstGeom prst="rect">
-            <a:avLst/>
-          </a:prstGeom>
-          <a:noFill/>
-        </p:spPr>
-        <p:txBody>
-          <a:bodyPr wrap="square" lIns="0" rIns="0" tIns="0" bIns="0">
-            <a:spAutoFit/>
-          </a:bodyPr>
-          <a:lstStyle/>
-          <a:p>
-            <a:pPr>
-              <a:defRPr sz="2300" b="1">
+              <a:defRPr sz="2500" b="1">
                 <a:solidFill>
                   <a:srgbClr val="0F172A"/>
                 </a:solidFill>
@@ -6429,13 +5415,13 @@
       </p:sp>
       <p:sp>
         <p:nvSpPr>
-          <p:cNvPr id="5" name="Rectangle 4"/>
+          <p:cNvPr id="4" name="Rectangle 3"/>
           <p:cNvSpPr/>
           <p:nvPr/>
         </p:nvSpPr>
         <p:spPr>
           <a:xfrm>
-            <a:off x="731520" y="1243584"/>
+            <a:off x="731520" y="1170432"/>
             <a:ext cx="10728655" cy="22860"/>
           </a:xfrm>
           <a:prstGeom prst="rect">
@@ -6472,59 +5458,14 @@
       </p:sp>
       <p:sp>
         <p:nvSpPr>
-          <p:cNvPr id="6" name="Rounded Rectangle 5"/>
-          <p:cNvSpPr/>
-          <p:nvPr/>
-        </p:nvSpPr>
-        <p:spPr>
-          <a:xfrm>
-            <a:off x="731520" y="1417320"/>
-            <a:ext cx="5230368" cy="4892040"/>
-          </a:xfrm>
-          <a:prstGeom prst="roundRect">
-            <a:avLst/>
-          </a:prstGeom>
-          <a:solidFill>
-            <a:srgbClr val="FFFFFF"/>
-          </a:solidFill>
-          <a:ln w="12700">
-            <a:solidFill>
-              <a:srgbClr val="E2E8F0"/>
-            </a:solidFill>
-          </a:ln>
-        </p:spPr>
-        <p:style>
-          <a:lnRef idx="1">
-            <a:schemeClr val="accent1"/>
-          </a:lnRef>
-          <a:fillRef idx="3">
-            <a:schemeClr val="accent1"/>
-          </a:fillRef>
-          <a:effectRef idx="2">
-            <a:schemeClr val="accent1"/>
-          </a:effectRef>
-          <a:fontRef idx="minor">
-            <a:schemeClr val="lt1"/>
-          </a:fontRef>
-        </p:style>
-        <p:txBody>
-          <a:bodyPr rtlCol="0" anchor="ctr"/>
-          <a:lstStyle/>
-          <a:p>
-            <a:pPr algn="ctr"/>
-          </a:p>
-        </p:txBody>
-      </p:sp>
-      <p:sp>
-        <p:nvSpPr>
-          <p:cNvPr id="7" name="TextBox 6"/>
+          <p:cNvPr id="5" name="TextBox 4"/>
           <p:cNvSpPr txBox="1"/>
           <p:nvPr/>
         </p:nvSpPr>
         <p:spPr>
           <a:xfrm>
-            <a:off x="960120" y="1600200"/>
-            <a:ext cx="4773168" cy="4526280"/>
+            <a:off x="731520" y="1389888"/>
+            <a:ext cx="5120640" cy="4892040"/>
           </a:xfrm>
           <a:prstGeom prst="rect">
             <a:avLst/>
@@ -6532,7 +5473,7 @@
           <a:noFill/>
         </p:spPr>
         <p:txBody>
-          <a:bodyPr wrap="square">
+          <a:bodyPr wrap="square" lIns="0" rIns="0" tIns="0" bIns="0">
             <a:spAutoFit/>
           </a:bodyPr>
           <a:lstStyle/>
@@ -6541,7 +5482,7 @@
               <a:spcAft>
                 <a:spcPts val="200"/>
               </a:spcAft>
-              <a:defRPr sz="2000" b="1">
+              <a:defRPr sz="2300" b="1">
                 <a:solidFill>
                   <a:srgbClr val="0F172A"/>
                 </a:solidFill>
@@ -6554,9 +5495,9 @@
           <a:p>
             <a:pPr>
               <a:spcAft>
-                <a:spcPts val="1200"/>
-              </a:spcAft>
-              <a:defRPr sz="1200" b="1">
+                <a:spcPts val="1400"/>
+              </a:spcAft>
+              <a:defRPr sz="1300" b="1">
                 <a:solidFill>
                   <a:srgbClr val="0E7490"/>
                 </a:solidFill>
@@ -6568,196 +5509,131 @@
           </a:p>
           <a:p>
             <a:pPr>
-              <a:defRPr b="1" sz="1150">
+              <a:spcAft>
+                <a:spcPts val="900"/>
+              </a:spcAft>
+            </a:pPr>
+            <a:r>
+              <a:rPr b="1" sz="1300">
                 <a:solidFill>
                   <a:srgbClr val="0F172A"/>
                 </a:solidFill>
-              </a:defRPr>
-            </a:pPr>
-            <a:r>
-              <a:t>• Platform Scope: </a:t>
-            </a:r>
-          </a:p>
-          <a:p>
-            <a:pPr>
-              <a:spcAft>
-                <a:spcPts val="600"/>
-              </a:spcAft>
-              <a:defRPr sz="1100">
+              </a:rPr>
+              <a:t>•  Platform Scope: </a:t>
+            </a:r>
+            <a:r>
+              <a:rPr b="0" sz="1200">
                 <a:solidFill>
                   <a:srgbClr val="475569"/>
                 </a:solidFill>
-              </a:defRPr>
-            </a:pPr>
-            <a:r>
-              <a:t>  Massive parts marketplace serving aftermarket automotive &amp; industrial parts vendors and buyers.</a:t>
-            </a:r>
-          </a:p>
-          <a:p>
-            <a:pPr>
-              <a:defRPr b="1" sz="1150">
+              </a:rPr>
+              <a:t>Massive parts marketplace serving aftermarket automotive &amp; industrial parts vendors and buyers.</a:t>
+            </a:r>
+          </a:p>
+          <a:p>
+            <a:pPr>
+              <a:spcAft>
+                <a:spcPts val="900"/>
+              </a:spcAft>
+            </a:pPr>
+            <a:r>
+              <a:rPr b="1" sz="1300">
                 <a:solidFill>
                   <a:srgbClr val="0F172A"/>
                 </a:solidFill>
-              </a:defRPr>
-            </a:pPr>
-            <a:r>
-              <a:t>• Scale &amp; Catalog: </a:t>
-            </a:r>
-          </a:p>
-          <a:p>
-            <a:pPr>
-              <a:spcAft>
-                <a:spcPts val="600"/>
-              </a:spcAft>
-              <a:defRPr sz="1100">
+              </a:rPr>
+              <a:t>•  Scale &amp; Catalog: </a:t>
+            </a:r>
+            <a:r>
+              <a:rPr b="0" sz="1200">
                 <a:solidFill>
                   <a:srgbClr val="475569"/>
                 </a:solidFill>
-              </a:defRPr>
-            </a:pPr>
-            <a:r>
-              <a:t>  Supported millions of parts across hundreds of manufacturer catalogs with deep search capabilities.</a:t>
-            </a:r>
-          </a:p>
-          <a:p>
-            <a:pPr>
-              <a:defRPr b="1" sz="1150">
+              </a:rPr>
+              <a:t>Supported millions of parts across hundreds of manufacturer catalogs with deep search capabilities.</a:t>
+            </a:r>
+          </a:p>
+          <a:p>
+            <a:pPr>
+              <a:spcAft>
+                <a:spcPts val="900"/>
+              </a:spcAft>
+            </a:pPr>
+            <a:r>
+              <a:rPr b="1" sz="1300">
                 <a:solidFill>
                   <a:srgbClr val="0F172A"/>
                 </a:solidFill>
-              </a:defRPr>
-            </a:pPr>
-            <a:r>
-              <a:t>• Interactive 3D Viewer: </a:t>
-            </a:r>
-          </a:p>
-          <a:p>
-            <a:pPr>
-              <a:spcAft>
-                <a:spcPts val="600"/>
-              </a:spcAft>
-              <a:defRPr sz="1100">
+              </a:rPr>
+              <a:t>•  Interactive 3D Viewer: </a:t>
+            </a:r>
+            <a:r>
+              <a:rPr b="0" sz="1200">
                 <a:solidFill>
                   <a:srgbClr val="475569"/>
                 </a:solidFill>
-              </a:defRPr>
-            </a:pPr>
-            <a:r>
-              <a:t>  Architected an interactive 3D interface allowing buyers to inspect 3D models and dimensions of thousands of components before purchase.</a:t>
-            </a:r>
-          </a:p>
-          <a:p>
-            <a:pPr>
-              <a:defRPr b="1" sz="1150">
+              </a:rPr>
+              <a:t>Architected an interactive 3D interface allowing buyers to inspect 3D models and dimensions of thousands of components before purchase.</a:t>
+            </a:r>
+          </a:p>
+          <a:p>
+            <a:pPr>
+              <a:spcAft>
+                <a:spcPts val="900"/>
+              </a:spcAft>
+            </a:pPr>
+            <a:r>
+              <a:rPr b="1" sz="1300">
                 <a:solidFill>
                   <a:srgbClr val="0F172A"/>
                 </a:solidFill>
-              </a:defRPr>
-            </a:pPr>
-            <a:r>
-              <a:t>• Full E-Commerce Flow: </a:t>
-            </a:r>
-          </a:p>
-          <a:p>
-            <a:pPr>
-              <a:spcAft>
-                <a:spcPts val="600"/>
-              </a:spcAft>
-              <a:defRPr sz="1100">
+              </a:rPr>
+              <a:t>•  Full E-Commerce Flow: </a:t>
+            </a:r>
+            <a:r>
+              <a:rPr b="0" sz="1200">
                 <a:solidFill>
                   <a:srgbClr val="475569"/>
                 </a:solidFill>
-              </a:defRPr>
-            </a:pPr>
-            <a:r>
-              <a:t>  Integrated shopping cart, quotation workflows, and secure payment gateway integrations.</a:t>
-            </a:r>
-          </a:p>
-          <a:p>
-            <a:pPr>
-              <a:defRPr b="1" sz="1150">
+              </a:rPr>
+              <a:t>Integrated shopping cart, quotation workflows, and secure payment gateway integrations.</a:t>
+            </a:r>
+          </a:p>
+          <a:p>
+            <a:pPr>
+              <a:spcAft>
+                <a:spcPts val="900"/>
+              </a:spcAft>
+            </a:pPr>
+            <a:r>
+              <a:rPr b="1" sz="1300">
                 <a:solidFill>
                   <a:srgbClr val="0F172A"/>
                 </a:solidFill>
-              </a:defRPr>
-            </a:pPr>
-            <a:r>
-              <a:t>• Technologies Used: </a:t>
-            </a:r>
-          </a:p>
-          <a:p>
-            <a:pPr>
-              <a:spcAft>
-                <a:spcPts val="600"/>
-              </a:spcAft>
-              <a:defRPr sz="1100">
+              </a:rPr>
+              <a:t>•  Technologies Used: </a:t>
+            </a:r>
+            <a:r>
+              <a:rPr b="0" sz="1200">
                 <a:solidFill>
                   <a:srgbClr val="475569"/>
                 </a:solidFill>
-              </a:defRPr>
-            </a:pPr>
-            <a:r>
-              <a:t>  Adobe Flex, ActionScript, Mate architectural framework, HTML, CSS, and backend data services.</a:t>
-            </a:r>
-          </a:p>
-        </p:txBody>
-      </p:sp>
-      <p:sp>
-        <p:nvSpPr>
-          <p:cNvPr id="8" name="Rounded Rectangle 7"/>
-          <p:cNvSpPr/>
-          <p:nvPr/>
-        </p:nvSpPr>
-        <p:spPr>
-          <a:xfrm>
-            <a:off x="6217920" y="1417320"/>
-            <a:ext cx="5230368" cy="4892040"/>
-          </a:xfrm>
-          <a:prstGeom prst="roundRect">
-            <a:avLst/>
-          </a:prstGeom>
-          <a:solidFill>
-            <a:srgbClr val="FFFFFF"/>
-          </a:solidFill>
-          <a:ln w="12700">
-            <a:solidFill>
-              <a:srgbClr val="E2E8F0"/>
-            </a:solidFill>
-          </a:ln>
-        </p:spPr>
-        <p:style>
-          <a:lnRef idx="1">
-            <a:schemeClr val="accent1"/>
-          </a:lnRef>
-          <a:fillRef idx="3">
-            <a:schemeClr val="accent1"/>
-          </a:fillRef>
-          <a:effectRef idx="2">
-            <a:schemeClr val="accent1"/>
-          </a:effectRef>
-          <a:fontRef idx="minor">
-            <a:schemeClr val="lt1"/>
-          </a:fontRef>
-        </p:style>
-        <p:txBody>
-          <a:bodyPr rtlCol="0" anchor="ctr"/>
-          <a:lstStyle/>
-          <a:p>
-            <a:pPr algn="ctr"/>
-          </a:p>
-        </p:txBody>
-      </p:sp>
-      <p:sp>
-        <p:nvSpPr>
-          <p:cNvPr id="9" name="TextBox 8"/>
+              </a:rPr>
+              <a:t>Adobe Flex, ActionScript, Mate architectural framework, HTML, CSS, and backend data services.</a:t>
+            </a:r>
+          </a:p>
+        </p:txBody>
+      </p:sp>
+      <p:sp>
+        <p:nvSpPr>
+          <p:cNvPr id="6" name="TextBox 5"/>
           <p:cNvSpPr txBox="1"/>
           <p:nvPr/>
         </p:nvSpPr>
         <p:spPr>
           <a:xfrm>
-            <a:off x="6446520" y="1600200"/>
-            <a:ext cx="4773168" cy="4526280"/>
+            <a:off x="6309360" y="1389888"/>
+            <a:ext cx="5120640" cy="4892040"/>
           </a:xfrm>
           <a:prstGeom prst="rect">
             <a:avLst/>
@@ -6765,7 +5641,7 @@
           <a:noFill/>
         </p:spPr>
         <p:txBody>
-          <a:bodyPr wrap="square">
+          <a:bodyPr wrap="square" lIns="0" rIns="0" tIns="0" bIns="0">
             <a:spAutoFit/>
           </a:bodyPr>
           <a:lstStyle/>
@@ -6774,7 +5650,7 @@
               <a:spcAft>
                 <a:spcPts val="200"/>
               </a:spcAft>
-              <a:defRPr sz="2000" b="1">
+              <a:defRPr sz="2300" b="1">
                 <a:solidFill>
                   <a:srgbClr val="0F172A"/>
                 </a:solidFill>
@@ -6787,9 +5663,9 @@
           <a:p>
             <a:pPr>
               <a:spcAft>
-                <a:spcPts val="1200"/>
-              </a:spcAft>
-              <a:defRPr sz="1200" b="1">
+                <a:spcPts val="1400"/>
+              </a:spcAft>
+              <a:defRPr sz="1300" b="1">
                 <a:solidFill>
                   <a:srgbClr val="0284C7"/>
                 </a:solidFill>
@@ -6801,151 +5677,131 @@
           </a:p>
           <a:p>
             <a:pPr>
-              <a:defRPr b="1" sz="1150">
+              <a:spcAft>
+                <a:spcPts val="900"/>
+              </a:spcAft>
+            </a:pPr>
+            <a:r>
+              <a:rPr b="1" sz="1300">
                 <a:solidFill>
                   <a:srgbClr val="0F172A"/>
                 </a:solidFill>
-              </a:defRPr>
-            </a:pPr>
-            <a:r>
-              <a:t>• Design-to-Code Pipeline: </a:t>
-            </a:r>
-          </a:p>
-          <a:p>
-            <a:pPr>
-              <a:spcAft>
-                <a:spcPts val="600"/>
-              </a:spcAft>
-              <a:defRPr sz="1100">
+              </a:rPr>
+              <a:t>•  Design-to-Code Pipeline: </a:t>
+            </a:r>
+            <a:r>
+              <a:rPr b="0" sz="1200">
                 <a:solidFill>
                   <a:srgbClr val="475569"/>
                 </a:solidFill>
-              </a:defRPr>
-            </a:pPr>
-            <a:r>
-              <a:t>  Established an early user involvement process—validating concepts with interactive mockups and prototypes prior to delivery.</a:t>
-            </a:r>
-          </a:p>
-          <a:p>
-            <a:pPr>
-              <a:defRPr b="1" sz="1150">
+              </a:rPr>
+              <a:t>Established an early user involvement process—validating concepts with interactive mockups and prototypes prior to delivery.</a:t>
+            </a:r>
+          </a:p>
+          <a:p>
+            <a:pPr>
+              <a:spcAft>
+                <a:spcPts val="900"/>
+              </a:spcAft>
+            </a:pPr>
+            <a:r>
+              <a:rPr b="1" sz="1300">
                 <a:solidFill>
                   <a:srgbClr val="0F172A"/>
                 </a:solidFill>
-              </a:defRPr>
-            </a:pPr>
-            <a:r>
-              <a:t>• Enterprise Search App: </a:t>
-            </a:r>
-          </a:p>
-          <a:p>
-            <a:pPr>
-              <a:spcAft>
-                <a:spcPts val="600"/>
-              </a:spcAft>
-              <a:defRPr sz="1100">
+              </a:rPr>
+              <a:t>•  Enterprise Search App: </a:t>
+            </a:r>
+            <a:r>
+              <a:rPr b="0" sz="1200">
                 <a:solidFill>
                   <a:srgbClr val="475569"/>
                 </a:solidFill>
-              </a:defRPr>
-            </a:pPr>
-            <a:r>
-              <a:t>  Guided team to design and bootstrap a high-speed enterprise search application with advanced filtering and metadata indexing.</a:t>
-            </a:r>
-          </a:p>
-          <a:p>
-            <a:pPr>
-              <a:defRPr b="1" sz="1150">
+              </a:rPr>
+              <a:t>Guided team to design and bootstrap a high-speed enterprise search application with advanced filtering and metadata indexing.</a:t>
+            </a:r>
+          </a:p>
+          <a:p>
+            <a:pPr>
+              <a:spcAft>
+                <a:spcPts val="900"/>
+              </a:spcAft>
+            </a:pPr>
+            <a:r>
+              <a:rPr b="1" sz="1300">
                 <a:solidFill>
                   <a:srgbClr val="0F172A"/>
                 </a:solidFill>
-              </a:defRPr>
-            </a:pPr>
-            <a:r>
-              <a:t>• Dairy / Milk Corporation App: </a:t>
-            </a:r>
-          </a:p>
-          <a:p>
-            <a:pPr>
-              <a:spcAft>
-                <a:spcPts val="600"/>
-              </a:spcAft>
-              <a:defRPr sz="1100">
+              </a:rPr>
+              <a:t>•  Dairy / Milk Corporation App: </a:t>
+            </a:r>
+            <a:r>
+              <a:rPr b="0" sz="1200">
                 <a:solidFill>
                   <a:srgbClr val="475569"/>
                 </a:solidFill>
-              </a:defRPr>
-            </a:pPr>
-            <a:r>
-              <a:t>  Led the architecture and delivery of an operational management application for a large milk corporation handling distribution and supply logistics.</a:t>
-            </a:r>
-          </a:p>
-          <a:p>
-            <a:pPr>
-              <a:defRPr b="1" sz="1150">
+              </a:rPr>
+              <a:t>Led the architecture and delivery of an operational management application for a large milk corporation handling distribution and supply logistics.</a:t>
+            </a:r>
+          </a:p>
+          <a:p>
+            <a:pPr>
+              <a:spcAft>
+                <a:spcPts val="900"/>
+              </a:spcAft>
+            </a:pPr>
+            <a:r>
+              <a:rPr b="1" sz="1300">
                 <a:solidFill>
                   <a:srgbClr val="0F172A"/>
                 </a:solidFill>
-              </a:defRPr>
-            </a:pPr>
-            <a:r>
-              <a:t>• Technology Stack: </a:t>
-            </a:r>
-          </a:p>
-          <a:p>
-            <a:pPr>
-              <a:spcAft>
-                <a:spcPts val="600"/>
-              </a:spcAft>
-              <a:defRPr sz="1100">
+              </a:rPr>
+              <a:t>•  Technology Stack: </a:t>
+            </a:r>
+            <a:r>
+              <a:rPr b="0" sz="1200">
                 <a:solidFill>
                   <a:srgbClr val="475569"/>
                 </a:solidFill>
-              </a:defRPr>
-            </a:pPr>
-            <a:r>
-              <a:t>  HTML, CSS, JavaScript, TypeScript, Adobe Flex, Flash, and early Single-Page Application patterns.</a:t>
-            </a:r>
-          </a:p>
-          <a:p>
-            <a:pPr>
-              <a:defRPr b="1" sz="1150">
+              </a:rPr>
+              <a:t>HTML, CSS, JavaScript, TypeScript, Adobe Flex, Flash, and early Single-Page Application patterns.</a:t>
+            </a:r>
+          </a:p>
+          <a:p>
+            <a:pPr>
+              <a:spcAft>
+                <a:spcPts val="900"/>
+              </a:spcAft>
+            </a:pPr>
+            <a:r>
+              <a:rPr b="1" sz="1300">
                 <a:solidFill>
                   <a:srgbClr val="0F172A"/>
                 </a:solidFill>
-              </a:defRPr>
-            </a:pPr>
-            <a:r>
-              <a:t>• Mentorship &amp; Guidance: </a:t>
-            </a:r>
-          </a:p>
-          <a:p>
-            <a:pPr>
-              <a:spcAft>
-                <a:spcPts val="600"/>
-              </a:spcAft>
-              <a:defRPr sz="1100">
+              </a:rPr>
+              <a:t>•  Mentorship &amp; Guidance: </a:t>
+            </a:r>
+            <a:r>
+              <a:rPr b="0" sz="1200">
                 <a:solidFill>
                   <a:srgbClr val="475569"/>
                 </a:solidFill>
-              </a:defRPr>
-            </a:pPr>
-            <a:r>
-              <a:t>  Coached junior engineers on clean modular UI architecture and user-centered design standards.</a:t>
-            </a:r>
-          </a:p>
-        </p:txBody>
-      </p:sp>
-      <p:sp>
-        <p:nvSpPr>
-          <p:cNvPr id="10" name="TextBox 9"/>
+              </a:rPr>
+              <a:t>Coached junior engineers on clean modular UI architecture and user-centered design standards.</a:t>
+            </a:r>
+          </a:p>
+        </p:txBody>
+      </p:sp>
+      <p:sp>
+        <p:nvSpPr>
+          <p:cNvPr id="7" name="TextBox 6"/>
           <p:cNvSpPr txBox="1"/>
           <p:nvPr/>
         </p:nvSpPr>
         <p:spPr>
           <a:xfrm>
-            <a:off x="731520" y="6446520"/>
-            <a:ext cx="10728655" cy="320040"/>
+            <a:off x="731520" y="6473952"/>
+            <a:ext cx="10728655" cy="292608"/>
           </a:xfrm>
           <a:prstGeom prst="rect">
             <a:avLst/>
@@ -7040,8 +5896,8 @@
         </p:nvSpPr>
         <p:spPr>
           <a:xfrm>
-            <a:off x="731520" y="320040"/>
-            <a:ext cx="10698480" cy="292608"/>
+            <a:off x="731520" y="438912"/>
+            <a:ext cx="10728655" cy="640080"/>
           </a:xfrm>
           <a:prstGeom prst="rect">
             <a:avLst/>
@@ -7055,42 +5911,7 @@
           <a:lstStyle/>
           <a:p>
             <a:pPr>
-              <a:defRPr sz="1150" b="1">
-                <a:solidFill>
-                  <a:srgbClr val="0E7490"/>
-                </a:solidFill>
-              </a:defRPr>
-            </a:pPr>
-            <a:r>
-              <a:t>SECTION 2 · PROJECT EXPERIENCE (CLIENT GROUPS 7 &amp; 8)</a:t>
-            </a:r>
-          </a:p>
-        </p:txBody>
-      </p:sp>
-      <p:sp>
-        <p:nvSpPr>
-          <p:cNvPr id="4" name="TextBox 3"/>
-          <p:cNvSpPr txBox="1"/>
-          <p:nvPr/>
-        </p:nvSpPr>
-        <p:spPr>
-          <a:xfrm>
-            <a:off x="731520" y="621792"/>
-            <a:ext cx="10698480" cy="594360"/>
-          </a:xfrm>
-          <a:prstGeom prst="rect">
-            <a:avLst/>
-          </a:prstGeom>
-          <a:noFill/>
-        </p:spPr>
-        <p:txBody>
-          <a:bodyPr wrap="square" lIns="0" rIns="0" tIns="0" bIns="0">
-            <a:spAutoFit/>
-          </a:bodyPr>
-          <a:lstStyle/>
-          <a:p>
-            <a:pPr>
-              <a:defRPr sz="2300" b="1">
+              <a:defRPr sz="2500" b="1">
                 <a:solidFill>
                   <a:srgbClr val="0F172A"/>
                 </a:solidFill>
@@ -7104,13 +5925,13 @@
       </p:sp>
       <p:sp>
         <p:nvSpPr>
-          <p:cNvPr id="5" name="Rectangle 4"/>
+          <p:cNvPr id="4" name="Rectangle 3"/>
           <p:cNvSpPr/>
           <p:nvPr/>
         </p:nvSpPr>
         <p:spPr>
           <a:xfrm>
-            <a:off x="731520" y="1243584"/>
+            <a:off x="731520" y="1170432"/>
             <a:ext cx="10728655" cy="22860"/>
           </a:xfrm>
           <a:prstGeom prst="rect">
@@ -7147,59 +5968,14 @@
       </p:sp>
       <p:sp>
         <p:nvSpPr>
-          <p:cNvPr id="6" name="Rounded Rectangle 5"/>
-          <p:cNvSpPr/>
-          <p:nvPr/>
-        </p:nvSpPr>
-        <p:spPr>
-          <a:xfrm>
-            <a:off x="731520" y="1417320"/>
-            <a:ext cx="5230368" cy="4892040"/>
-          </a:xfrm>
-          <a:prstGeom prst="roundRect">
-            <a:avLst/>
-          </a:prstGeom>
-          <a:solidFill>
-            <a:srgbClr val="FFFFFF"/>
-          </a:solidFill>
-          <a:ln w="12700">
-            <a:solidFill>
-              <a:srgbClr val="E2E8F0"/>
-            </a:solidFill>
-          </a:ln>
-        </p:spPr>
-        <p:style>
-          <a:lnRef idx="1">
-            <a:schemeClr val="accent1"/>
-          </a:lnRef>
-          <a:fillRef idx="3">
-            <a:schemeClr val="accent1"/>
-          </a:fillRef>
-          <a:effectRef idx="2">
-            <a:schemeClr val="accent1"/>
-          </a:effectRef>
-          <a:fontRef idx="minor">
-            <a:schemeClr val="lt1"/>
-          </a:fontRef>
-        </p:style>
-        <p:txBody>
-          <a:bodyPr rtlCol="0" anchor="ctr"/>
-          <a:lstStyle/>
-          <a:p>
-            <a:pPr algn="ctr"/>
-          </a:p>
-        </p:txBody>
-      </p:sp>
-      <p:sp>
-        <p:nvSpPr>
-          <p:cNvPr id="7" name="TextBox 6"/>
+          <p:cNvPr id="5" name="TextBox 4"/>
           <p:cNvSpPr txBox="1"/>
           <p:nvPr/>
         </p:nvSpPr>
         <p:spPr>
           <a:xfrm>
-            <a:off x="960120" y="1600200"/>
-            <a:ext cx="4773168" cy="4526280"/>
+            <a:off x="731520" y="1389888"/>
+            <a:ext cx="5120640" cy="4892040"/>
           </a:xfrm>
           <a:prstGeom prst="rect">
             <a:avLst/>
@@ -7207,7 +5983,7 @@
           <a:noFill/>
         </p:spPr>
         <p:txBody>
-          <a:bodyPr wrap="square">
+          <a:bodyPr wrap="square" lIns="0" rIns="0" tIns="0" bIns="0">
             <a:spAutoFit/>
           </a:bodyPr>
           <a:lstStyle/>
@@ -7216,7 +5992,7 @@
               <a:spcAft>
                 <a:spcPts val="200"/>
               </a:spcAft>
-              <a:defRPr sz="2000" b="1">
+              <a:defRPr sz="2300" b="1">
                 <a:solidFill>
                   <a:srgbClr val="0F172A"/>
                 </a:solidFill>
@@ -7229,9 +6005,9 @@
           <a:p>
             <a:pPr>
               <a:spcAft>
-                <a:spcPts val="1200"/>
-              </a:spcAft>
-              <a:defRPr sz="1200" b="1">
+                <a:spcPts val="1400"/>
+              </a:spcAft>
+              <a:defRPr sz="1300" b="1">
                 <a:solidFill>
                   <a:srgbClr val="0E7490"/>
                 </a:solidFill>
@@ -7243,196 +6019,131 @@
           </a:p>
           <a:p>
             <a:pPr>
-              <a:defRPr b="1" sz="1150">
+              <a:spcAft>
+                <a:spcPts val="900"/>
+              </a:spcAft>
+            </a:pPr>
+            <a:r>
+              <a:rPr b="1" sz="1300">
                 <a:solidFill>
                   <a:srgbClr val="0F172A"/>
                 </a:solidFill>
-              </a:defRPr>
-            </a:pPr>
-            <a:r>
-              <a:t>• Facility Dashboard at Cisco: </a:t>
-            </a:r>
-          </a:p>
-          <a:p>
-            <a:pPr>
-              <a:spcAft>
-                <a:spcPts val="600"/>
-              </a:spcAft>
-              <a:defRPr sz="1100">
+              </a:rPr>
+              <a:t>•  Facility Dashboard at Cisco: </a:t>
+            </a:r>
+            <a:r>
+              <a:rPr b="0" sz="1200">
                 <a:solidFill>
                   <a:srgbClr val="475569"/>
                 </a:solidFill>
-              </a:defRPr>
-            </a:pPr>
-            <a:r>
-              <a:t>  Designed and developed an interactive facility dashboard at Cisco Systems campus as a full-time consultant (2009–2010).</a:t>
-            </a:r>
-          </a:p>
-          <a:p>
-            <a:pPr>
-              <a:defRPr b="1" sz="1150">
+              </a:rPr>
+              <a:t>Designed and developed an interactive facility dashboard at Cisco Systems campus as a full-time consultant (2009–2010).</a:t>
+            </a:r>
+          </a:p>
+          <a:p>
+            <a:pPr>
+              <a:spcAft>
+                <a:spcPts val="900"/>
+              </a:spcAft>
+            </a:pPr>
+            <a:r>
+              <a:rPr b="1" sz="1300">
                 <a:solidFill>
                   <a:srgbClr val="0F172A"/>
                 </a:solidFill>
-              </a:defRPr>
-            </a:pPr>
-            <a:r>
-              <a:t>• Unified BMS Control: </a:t>
-            </a:r>
-          </a:p>
-          <a:p>
-            <a:pPr>
-              <a:spcAft>
-                <a:spcPts val="600"/>
-              </a:spcAft>
-              <a:defRPr sz="1100">
+              </a:rPr>
+              <a:t>•  Unified BMS Control: </a:t>
+            </a:r>
+            <a:r>
+              <a:rPr b="0" sz="1200">
                 <a:solidFill>
                   <a:srgbClr val="475569"/>
                 </a:solidFill>
-              </a:defRPr>
-            </a:pPr>
-            <a:r>
-              <a:t>  Connected to and visualized diverse Building Management Systems: Air Handling Units (AHUs), Variable Refrigerant Volume (VRVs), industrial chillers, and power meters.</a:t>
-            </a:r>
-          </a:p>
-          <a:p>
-            <a:pPr>
-              <a:defRPr b="1" sz="1150">
+              </a:rPr>
+              <a:t>Connected to and visualized diverse Building Management Systems: Air Handling Units (AHUs), Variable Refrigerant Volume (VRVs), industrial chillers, and power meters.</a:t>
+            </a:r>
+          </a:p>
+          <a:p>
+            <a:pPr>
+              <a:spcAft>
+                <a:spcPts val="900"/>
+              </a:spcAft>
+            </a:pPr>
+            <a:r>
+              <a:rPr b="1" sz="1300">
                 <a:solidFill>
                   <a:srgbClr val="0F172A"/>
                 </a:solidFill>
-              </a:defRPr>
-            </a:pPr>
-            <a:r>
-              <a:t>• Environmental Telemetry: </a:t>
-            </a:r>
-          </a:p>
-          <a:p>
-            <a:pPr>
-              <a:spcAft>
-                <a:spcPts val="600"/>
-              </a:spcAft>
-              <a:defRPr sz="1100">
+              </a:rPr>
+              <a:t>•  Environmental Telemetry: </a:t>
+            </a:r>
+            <a:r>
+              <a:rPr b="0" sz="1200">
                 <a:solidFill>
                   <a:srgbClr val="475569"/>
                 </a:solidFill>
-              </a:defRPr>
-            </a:pPr>
-            <a:r>
-              <a:t>  Provided facility managers with real-time operational status, thermal mapping, energy consumption, and alarm thresholds.</a:t>
-            </a:r>
-          </a:p>
-          <a:p>
-            <a:pPr>
-              <a:defRPr b="1" sz="1150">
+              </a:rPr>
+              <a:t>Provided facility managers with real-time operational status, thermal mapping, energy consumption, and alarm thresholds.</a:t>
+            </a:r>
+          </a:p>
+          <a:p>
+            <a:pPr>
+              <a:spcAft>
+                <a:spcPts val="900"/>
+              </a:spcAft>
+            </a:pPr>
+            <a:r>
+              <a:rPr b="1" sz="1300">
                 <a:solidFill>
                   <a:srgbClr val="0F172A"/>
                 </a:solidFill>
-              </a:defRPr>
-            </a:pPr>
-            <a:r>
-              <a:t>• Formal Cisco Recognition: </a:t>
-            </a:r>
-          </a:p>
-          <a:p>
-            <a:pPr>
-              <a:spcAft>
-                <a:spcPts val="600"/>
-              </a:spcAft>
-              <a:defRPr sz="1100">
+              </a:rPr>
+              <a:t>•  Formal Cisco Recognition: </a:t>
+            </a:r>
+            <a:r>
+              <a:rPr b="0" sz="1200">
                 <a:solidFill>
                   <a:srgbClr val="475569"/>
                 </a:solidFill>
-              </a:defRPr>
-            </a:pPr>
-            <a:r>
-              <a:t>  Received official Certificate of Appreciation from Cisco leadership in 2010 for outstanding visualization and operational utility.</a:t>
-            </a:r>
-          </a:p>
-          <a:p>
-            <a:pPr>
-              <a:defRPr b="1" sz="1150">
+              </a:rPr>
+              <a:t>Received official Certificate of Appreciation from Cisco leadership in 2010 for outstanding visualization and operational utility.</a:t>
+            </a:r>
+          </a:p>
+          <a:p>
+            <a:pPr>
+              <a:spcAft>
+                <a:spcPts val="900"/>
+              </a:spcAft>
+            </a:pPr>
+            <a:r>
+              <a:rPr b="1" sz="1300">
                 <a:solidFill>
                   <a:srgbClr val="0F172A"/>
                 </a:solidFill>
-              </a:defRPr>
-            </a:pPr>
-            <a:r>
-              <a:t>• Vodafone Solutions: </a:t>
-            </a:r>
-          </a:p>
-          <a:p>
-            <a:pPr>
-              <a:spcAft>
-                <a:spcPts val="600"/>
-              </a:spcAft>
-              <a:defRPr sz="1100">
+              </a:rPr>
+              <a:t>•  Vodafone Solutions: </a:t>
+            </a:r>
+            <a:r>
+              <a:rPr b="0" sz="1200">
                 <a:solidFill>
                   <a:srgbClr val="475569"/>
                 </a:solidFill>
-              </a:defRPr>
-            </a:pPr>
-            <a:r>
-              <a:t>  Delivered specialized data visualization dashboards for Vodafone operations to monitor network and facility metrics.</a:t>
-            </a:r>
-          </a:p>
-        </p:txBody>
-      </p:sp>
-      <p:sp>
-        <p:nvSpPr>
-          <p:cNvPr id="8" name="Rounded Rectangle 7"/>
-          <p:cNvSpPr/>
-          <p:nvPr/>
-        </p:nvSpPr>
-        <p:spPr>
-          <a:xfrm>
-            <a:off x="6217920" y="1417320"/>
-            <a:ext cx="5230368" cy="4892040"/>
-          </a:xfrm>
-          <a:prstGeom prst="roundRect">
-            <a:avLst/>
-          </a:prstGeom>
-          <a:solidFill>
-            <a:srgbClr val="FFFFFF"/>
-          </a:solidFill>
-          <a:ln w="12700">
-            <a:solidFill>
-              <a:srgbClr val="E2E8F0"/>
-            </a:solidFill>
-          </a:ln>
-        </p:spPr>
-        <p:style>
-          <a:lnRef idx="1">
-            <a:schemeClr val="accent1"/>
-          </a:lnRef>
-          <a:fillRef idx="3">
-            <a:schemeClr val="accent1"/>
-          </a:fillRef>
-          <a:effectRef idx="2">
-            <a:schemeClr val="accent1"/>
-          </a:effectRef>
-          <a:fontRef idx="minor">
-            <a:schemeClr val="lt1"/>
-          </a:fontRef>
-        </p:style>
-        <p:txBody>
-          <a:bodyPr rtlCol="0" anchor="ctr"/>
-          <a:lstStyle/>
-          <a:p>
-            <a:pPr algn="ctr"/>
-          </a:p>
-        </p:txBody>
-      </p:sp>
-      <p:sp>
-        <p:nvSpPr>
-          <p:cNvPr id="9" name="TextBox 8"/>
+              </a:rPr>
+              <a:t>Delivered specialized data visualization dashboards for Vodafone operations to monitor network and facility metrics.</a:t>
+            </a:r>
+          </a:p>
+        </p:txBody>
+      </p:sp>
+      <p:sp>
+        <p:nvSpPr>
+          <p:cNvPr id="6" name="TextBox 5"/>
           <p:cNvSpPr txBox="1"/>
           <p:nvPr/>
         </p:nvSpPr>
         <p:spPr>
           <a:xfrm>
-            <a:off x="6446520" y="1600200"/>
-            <a:ext cx="4773168" cy="4526280"/>
+            <a:off x="6309360" y="1389888"/>
+            <a:ext cx="5120640" cy="4892040"/>
           </a:xfrm>
           <a:prstGeom prst="rect">
             <a:avLst/>
@@ -7440,7 +6151,7 @@
           <a:noFill/>
         </p:spPr>
         <p:txBody>
-          <a:bodyPr wrap="square">
+          <a:bodyPr wrap="square" lIns="0" rIns="0" tIns="0" bIns="0">
             <a:spAutoFit/>
           </a:bodyPr>
           <a:lstStyle/>
@@ -7449,7 +6160,7 @@
               <a:spcAft>
                 <a:spcPts val="200"/>
               </a:spcAft>
-              <a:defRPr sz="2000" b="1">
+              <a:defRPr sz="2300" b="1">
                 <a:solidFill>
                   <a:srgbClr val="0F172A"/>
                 </a:solidFill>
@@ -7462,9 +6173,9 @@
           <a:p>
             <a:pPr>
               <a:spcAft>
-                <a:spcPts val="1200"/>
-              </a:spcAft>
-              <a:defRPr sz="1200" b="1">
+                <a:spcPts val="1400"/>
+              </a:spcAft>
+              <a:defRPr sz="1300" b="1">
                 <a:solidFill>
                   <a:srgbClr val="0284C7"/>
                 </a:solidFill>
@@ -7476,151 +6187,131 @@
           </a:p>
           <a:p>
             <a:pPr>
-              <a:defRPr b="1" sz="1150">
+              <a:spcAft>
+                <a:spcPts val="900"/>
+              </a:spcAft>
+            </a:pPr>
+            <a:r>
+              <a:rPr b="1" sz="1300">
                 <a:solidFill>
                   <a:srgbClr val="0F172A"/>
                 </a:solidFill>
-              </a:defRPr>
-            </a:pPr>
-            <a:r>
-              <a:t>• Architectural Visualization: </a:t>
-            </a:r>
-          </a:p>
-          <a:p>
-            <a:pPr>
-              <a:spcAft>
-                <a:spcPts val="600"/>
-              </a:spcAft>
-              <a:defRPr sz="1100">
+              </a:rPr>
+              <a:t>•  Architectural Visualization: </a:t>
+            </a:r>
+            <a:r>
+              <a:rPr b="0" sz="1200">
                 <a:solidFill>
                   <a:srgbClr val="475569"/>
                 </a:solidFill>
-              </a:defRPr>
-            </a:pPr>
-            <a:r>
-              <a:t>  Delivered multiple architectural 3D visualizations, spatial renderings, and walkthroughs for commercial and real estate projects.</a:t>
-            </a:r>
-          </a:p>
-          <a:p>
-            <a:pPr>
-              <a:defRPr b="1" sz="1150">
+              </a:rPr>
+              <a:t>Delivered multiple architectural 3D visualizations, spatial renderings, and walkthroughs for commercial and real estate projects.</a:t>
+            </a:r>
+          </a:p>
+          <a:p>
+            <a:pPr>
+              <a:spcAft>
+                <a:spcPts val="900"/>
+              </a:spcAft>
+            </a:pPr>
+            <a:r>
+              <a:rPr b="1" sz="1300">
                 <a:solidFill>
                   <a:srgbClr val="0F172A"/>
                 </a:solidFill>
-              </a:defRPr>
-            </a:pPr>
-            <a:r>
-              <a:t>• CAD/CAM &amp; CNC Development: </a:t>
-            </a:r>
-          </a:p>
-          <a:p>
-            <a:pPr>
-              <a:spcAft>
-                <a:spcPts val="600"/>
-              </a:spcAft>
-              <a:defRPr sz="1100">
+              </a:rPr>
+              <a:t>•  CAD/CAM &amp; CNC Development: </a:t>
+            </a:r>
+            <a:r>
+              <a:rPr b="0" sz="1200">
                 <a:solidFill>
                   <a:srgbClr val="475569"/>
                 </a:solidFill>
-              </a:defRPr>
-            </a:pPr>
-            <a:r>
-              <a:t>  Led customized CNC machine development and automated CAD/CAM toolpath pipelines, bridging physical fabrication with digital software.</a:t>
-            </a:r>
-          </a:p>
-          <a:p>
-            <a:pPr>
-              <a:defRPr b="1" sz="1150">
+              </a:rPr>
+              <a:t>Led customized CNC machine development and automated CAD/CAM toolpath pipelines, bridging physical fabrication with digital software.</a:t>
+            </a:r>
+          </a:p>
+          <a:p>
+            <a:pPr>
+              <a:spcAft>
+                <a:spcPts val="900"/>
+              </a:spcAft>
+            </a:pPr>
+            <a:r>
+              <a:rPr b="1" sz="1300">
                 <a:solidFill>
                   <a:srgbClr val="0F172A"/>
                 </a:solidFill>
-              </a:defRPr>
-            </a:pPr>
-            <a:r>
-              <a:t>• SellAny Mobile Marketplace: </a:t>
-            </a:r>
-          </a:p>
-          <a:p>
-            <a:pPr>
-              <a:spcAft>
-                <a:spcPts val="600"/>
-              </a:spcAft>
-              <a:defRPr sz="1100">
+              </a:rPr>
+              <a:t>•  SellAny Mobile Marketplace: </a:t>
+            </a:r>
+            <a:r>
+              <a:rPr b="0" sz="1200">
                 <a:solidFill>
                   <a:srgbClr val="475569"/>
                 </a:solidFill>
-              </a:defRPr>
-            </a:pPr>
-            <a:r>
-              <a:t>  Built and launched 'SellAny'—a consumer mobile application allowing users to list and sell items effortlessly.</a:t>
-            </a:r>
-          </a:p>
-          <a:p>
-            <a:pPr>
-              <a:defRPr b="1" sz="1150">
+              </a:rPr>
+              <a:t>Built and launched 'SellAny'—a consumer mobile application allowing users to list and sell items effortlessly.</a:t>
+            </a:r>
+          </a:p>
+          <a:p>
+            <a:pPr>
+              <a:spcAft>
+                <a:spcPts val="900"/>
+              </a:spcAft>
+            </a:pPr>
+            <a:r>
+              <a:rPr b="1" sz="1300">
                 <a:solidFill>
                   <a:srgbClr val="0F172A"/>
                 </a:solidFill>
-              </a:defRPr>
-            </a:pPr>
-            <a:r>
-              <a:t>• Payment Parking Mobile App: </a:t>
-            </a:r>
-          </a:p>
-          <a:p>
-            <a:pPr>
-              <a:spcAft>
-                <a:spcPts val="600"/>
-              </a:spcAft>
-              <a:defRPr sz="1100">
+              </a:rPr>
+              <a:t>•  Payment Parking Mobile App: </a:t>
+            </a:r>
+            <a:r>
+              <a:rPr b="0" sz="1200">
                 <a:solidFill>
                   <a:srgbClr val="475569"/>
                 </a:solidFill>
-              </a:defRPr>
-            </a:pPr>
-            <a:r>
-              <a:t>  Led an engineering team to develop an automated parking payment mobile application with real-time slot occupancy tracking.</a:t>
-            </a:r>
-          </a:p>
-          <a:p>
-            <a:pPr>
-              <a:defRPr b="1" sz="1150">
+              </a:rPr>
+              <a:t>Led an engineering team to develop an automated parking payment mobile application with real-time slot occupancy tracking.</a:t>
+            </a:r>
+          </a:p>
+          <a:p>
+            <a:pPr>
+              <a:spcAft>
+                <a:spcPts val="900"/>
+              </a:spcAft>
+            </a:pPr>
+            <a:r>
+              <a:rPr b="1" sz="1300">
                 <a:solidFill>
                   <a:srgbClr val="0F172A"/>
                 </a:solidFill>
-              </a:defRPr>
-            </a:pPr>
-            <a:r>
-              <a:t>• Flight Simulation Visuals (CAE): </a:t>
-            </a:r>
-          </a:p>
-          <a:p>
-            <a:pPr>
-              <a:spcAft>
-                <a:spcPts val="600"/>
-              </a:spcAft>
-              <a:defRPr sz="1100">
+              </a:rPr>
+              <a:t>•  Flight Simulation Visuals (CAE): </a:t>
+            </a:r>
+            <a:r>
+              <a:rPr b="0" sz="1200">
                 <a:solidFill>
                   <a:srgbClr val="475569"/>
                 </a:solidFill>
-              </a:defRPr>
-            </a:pPr>
-            <a:r>
-              <a:t>  Visual Database Developer creating 3D terrain and aircraft simulation databases under locked 60 FPS budgets.</a:t>
-            </a:r>
-          </a:p>
-        </p:txBody>
-      </p:sp>
-      <p:sp>
-        <p:nvSpPr>
-          <p:cNvPr id="10" name="TextBox 9"/>
+              </a:rPr>
+              <a:t>Visual Database Developer creating 3D terrain and aircraft simulation databases under locked 60 FPS budgets.</a:t>
+            </a:r>
+          </a:p>
+        </p:txBody>
+      </p:sp>
+      <p:sp>
+        <p:nvSpPr>
+          <p:cNvPr id="7" name="TextBox 6"/>
           <p:cNvSpPr txBox="1"/>
           <p:nvPr/>
         </p:nvSpPr>
         <p:spPr>
           <a:xfrm>
-            <a:off x="731520" y="6446520"/>
-            <a:ext cx="10728655" cy="320040"/>
+            <a:off x="731520" y="6473952"/>
+            <a:ext cx="10728655" cy="292608"/>
           </a:xfrm>
           <a:prstGeom prst="rect">
             <a:avLst/>
@@ -7715,8 +6406,8 @@
         </p:nvSpPr>
         <p:spPr>
           <a:xfrm>
-            <a:off x="731520" y="320040"/>
-            <a:ext cx="10698480" cy="292608"/>
+            <a:off x="731520" y="438912"/>
+            <a:ext cx="10728655" cy="640080"/>
           </a:xfrm>
           <a:prstGeom prst="rect">
             <a:avLst/>
@@ -7730,62 +6421,27 @@
           <a:lstStyle/>
           <a:p>
             <a:pPr>
-              <a:defRPr sz="1150" b="1">
-                <a:solidFill>
-                  <a:srgbClr val="0E7490"/>
-                </a:solidFill>
-              </a:defRPr>
-            </a:pPr>
-            <a:r>
-              <a:t>COMPREHENSIVE SKILLSET MATRIX</a:t>
-            </a:r>
-          </a:p>
-        </p:txBody>
-      </p:sp>
-      <p:sp>
-        <p:nvSpPr>
-          <p:cNvPr id="4" name="TextBox 3"/>
-          <p:cNvSpPr txBox="1"/>
-          <p:nvPr/>
-        </p:nvSpPr>
-        <p:spPr>
-          <a:xfrm>
-            <a:off x="731520" y="621792"/>
-            <a:ext cx="10698480" cy="594360"/>
-          </a:xfrm>
-          <a:prstGeom prst="rect">
-            <a:avLst/>
-          </a:prstGeom>
-          <a:noFill/>
-        </p:spPr>
-        <p:txBody>
-          <a:bodyPr wrap="square" lIns="0" rIns="0" tIns="0" bIns="0">
-            <a:spAutoFit/>
-          </a:bodyPr>
-          <a:lstStyle/>
-          <a:p>
-            <a:pPr>
-              <a:defRPr sz="2300" b="1">
+              <a:defRPr sz="2500" b="1">
                 <a:solidFill>
                   <a:srgbClr val="0F172A"/>
                 </a:solidFill>
               </a:defRPr>
             </a:pPr>
             <a:r>
-              <a:t>Technical &amp; Managerial Mastery Across 18+ Years of Delivery</a:t>
-            </a:r>
-          </a:p>
-        </p:txBody>
-      </p:sp>
-      <p:sp>
-        <p:nvSpPr>
-          <p:cNvPr id="5" name="Rectangle 4"/>
+              <a:t>Comprehensive Skillset Matrix Across 18+ Years</a:t>
+            </a:r>
+          </a:p>
+        </p:txBody>
+      </p:sp>
+      <p:sp>
+        <p:nvSpPr>
+          <p:cNvPr id="4" name="Rectangle 3"/>
           <p:cNvSpPr/>
           <p:nvPr/>
         </p:nvSpPr>
         <p:spPr>
           <a:xfrm>
-            <a:off x="731520" y="1243584"/>
+            <a:off x="731520" y="1170432"/>
             <a:ext cx="10728655" cy="22860"/>
           </a:xfrm>
           <a:prstGeom prst="rect">
@@ -7822,102 +6478,14 @@
       </p:sp>
       <p:sp>
         <p:nvSpPr>
-          <p:cNvPr id="6" name="Rounded Rectangle 5"/>
-          <p:cNvSpPr/>
-          <p:nvPr/>
-        </p:nvSpPr>
-        <p:spPr>
-          <a:xfrm>
-            <a:off x="731520" y="1417320"/>
-            <a:ext cx="5230368" cy="2331720"/>
-          </a:xfrm>
-          <a:prstGeom prst="roundRect">
-            <a:avLst/>
-          </a:prstGeom>
-          <a:solidFill>
-            <a:srgbClr val="FFFFFF"/>
-          </a:solidFill>
-          <a:ln w="12700">
-            <a:solidFill>
-              <a:srgbClr val="E2E8F0"/>
-            </a:solidFill>
-          </a:ln>
-        </p:spPr>
-        <p:style>
-          <a:lnRef idx="1">
-            <a:schemeClr val="accent1"/>
-          </a:lnRef>
-          <a:fillRef idx="3">
-            <a:schemeClr val="accent1"/>
-          </a:fillRef>
-          <a:effectRef idx="2">
-            <a:schemeClr val="accent1"/>
-          </a:effectRef>
-          <a:fontRef idx="minor">
-            <a:schemeClr val="lt1"/>
-          </a:fontRef>
-        </p:style>
-        <p:txBody>
-          <a:bodyPr rtlCol="0" anchor="ctr"/>
-          <a:lstStyle/>
-          <a:p>
-            <a:pPr algn="ctr"/>
-          </a:p>
-        </p:txBody>
-      </p:sp>
-      <p:sp>
-        <p:nvSpPr>
-          <p:cNvPr id="7" name="Rectangle 6"/>
-          <p:cNvSpPr/>
-          <p:nvPr/>
-        </p:nvSpPr>
-        <p:spPr>
-          <a:xfrm>
-            <a:off x="740664" y="1426464"/>
-            <a:ext cx="5212080" cy="402336"/>
-          </a:xfrm>
-          <a:prstGeom prst="rect">
-            <a:avLst/>
-          </a:prstGeom>
-          <a:solidFill>
-            <a:srgbClr val="0284C7"/>
-          </a:solidFill>
-          <a:ln>
-            <a:noFill/>
-          </a:ln>
-        </p:spPr>
-        <p:style>
-          <a:lnRef idx="1">
-            <a:schemeClr val="accent1"/>
-          </a:lnRef>
-          <a:fillRef idx="3">
-            <a:schemeClr val="accent1"/>
-          </a:fillRef>
-          <a:effectRef idx="2">
-            <a:schemeClr val="accent1"/>
-          </a:effectRef>
-          <a:fontRef idx="minor">
-            <a:schemeClr val="lt1"/>
-          </a:fontRef>
-        </p:style>
-        <p:txBody>
-          <a:bodyPr rtlCol="0" anchor="ctr"/>
-          <a:lstStyle/>
-          <a:p>
-            <a:pPr algn="ctr"/>
-          </a:p>
-        </p:txBody>
-      </p:sp>
-      <p:sp>
-        <p:nvSpPr>
-          <p:cNvPr id="8" name="TextBox 7"/>
+          <p:cNvPr id="5" name="TextBox 4"/>
           <p:cNvSpPr txBox="1"/>
           <p:nvPr/>
         </p:nvSpPr>
         <p:spPr>
           <a:xfrm>
-            <a:off x="914400" y="1472184"/>
-            <a:ext cx="4864608" cy="320040"/>
+            <a:off x="731520" y="1389888"/>
+            <a:ext cx="5120640" cy="2331720"/>
           </a:xfrm>
           <a:prstGeom prst="rect">
             <a:avLst/>
@@ -7925,15 +6493,18 @@
           <a:noFill/>
         </p:spPr>
         <p:txBody>
-          <a:bodyPr wrap="none">
+          <a:bodyPr wrap="square" lIns="0" rIns="0" tIns="0" bIns="0">
             <a:spAutoFit/>
           </a:bodyPr>
           <a:lstStyle/>
           <a:p>
             <a:pPr>
-              <a:defRPr sz="1200" b="1">
-                <a:solidFill>
-                  <a:srgbClr val="FFFFFF"/>
+              <a:spcAft>
+                <a:spcPts val="800"/>
+              </a:spcAft>
+              <a:defRPr sz="1550" b="1">
+                <a:solidFill>
+                  <a:srgbClr val="0284C7"/>
                 </a:solidFill>
               </a:defRPr>
             </a:pPr>
@@ -7941,18 +6512,78 @@
               <a:t>1. Scalable Frontend &amp; Modular Architecture</a:t>
             </a:r>
           </a:p>
-        </p:txBody>
-      </p:sp>
-      <p:sp>
-        <p:nvSpPr>
-          <p:cNvPr id="9" name="TextBox 8"/>
+          <a:p>
+            <a:pPr>
+              <a:spcAft>
+                <a:spcPts val="500"/>
+              </a:spcAft>
+              <a:defRPr sz="1200">
+                <a:solidFill>
+                  <a:srgbClr val="1E293B"/>
+                </a:solidFill>
+              </a:defRPr>
+            </a:pPr>
+            <a:r>
+              <a:t>•  React, Angular, TypeScript, JavaScript, Node.js, Web Components (LitElement).</a:t>
+            </a:r>
+          </a:p>
+          <a:p>
+            <a:pPr>
+              <a:spcAft>
+                <a:spcPts val="500"/>
+              </a:spcAft>
+              <a:defRPr sz="1200">
+                <a:solidFill>
+                  <a:srgbClr val="1E293B"/>
+                </a:solidFill>
+              </a:defRPr>
+            </a:pPr>
+            <a:r>
+              <a:t>•  Architected Enterprise UI Design Systems used across diverse development teams.</a:t>
+            </a:r>
+          </a:p>
+          <a:p>
+            <a:pPr>
+              <a:spcAft>
+                <a:spcPts val="500"/>
+              </a:spcAft>
+              <a:defRPr sz="1200">
+                <a:solidFill>
+                  <a:srgbClr val="1E293B"/>
+                </a:solidFill>
+              </a:defRPr>
+            </a:pPr>
+            <a:r>
+              <a:t>•  State management, micro-frontends, REST, WebSockets, and streaming telemetry.</a:t>
+            </a:r>
+          </a:p>
+          <a:p>
+            <a:pPr>
+              <a:spcAft>
+                <a:spcPts val="500"/>
+              </a:spcAft>
+              <a:defRPr sz="1200">
+                <a:solidFill>
+                  <a:srgbClr val="1E293B"/>
+                </a:solidFill>
+              </a:defRPr>
+            </a:pPr>
+            <a:r>
+              <a:t>•  4-year zero-downtime migration of Cisco Stadium Vision from Flash/Flex to Angular/React.</a:t>
+            </a:r>
+          </a:p>
+        </p:txBody>
+      </p:sp>
+      <p:sp>
+        <p:nvSpPr>
+          <p:cNvPr id="6" name="TextBox 5"/>
           <p:cNvSpPr txBox="1"/>
           <p:nvPr/>
         </p:nvSpPr>
         <p:spPr>
           <a:xfrm>
-            <a:off x="914400" y="1874520"/>
-            <a:ext cx="4864608" cy="1828800"/>
+            <a:off x="6309360" y="1389888"/>
+            <a:ext cx="5120640" cy="2331720"/>
           </a:xfrm>
           <a:prstGeom prst="rect">
             <a:avLst/>
@@ -7960,170 +6591,97 @@
           <a:noFill/>
         </p:spPr>
         <p:txBody>
-          <a:bodyPr wrap="square">
+          <a:bodyPr wrap="square" lIns="0" rIns="0" tIns="0" bIns="0">
             <a:spAutoFit/>
           </a:bodyPr>
           <a:lstStyle/>
           <a:p>
             <a:pPr>
               <a:spcAft>
-                <a:spcPts val="400"/>
-              </a:spcAft>
-              <a:defRPr sz="1050">
+                <a:spcPts val="800"/>
+              </a:spcAft>
+              <a:defRPr sz="1550" b="1">
+                <a:solidFill>
+                  <a:srgbClr val="0E7490"/>
+                </a:solidFill>
+              </a:defRPr>
+            </a:pPr>
+            <a:r>
+              <a:t>2. Spatial 3D, CAD &amp; Generative AI</a:t>
+            </a:r>
+          </a:p>
+          <a:p>
+            <a:pPr>
+              <a:spcAft>
+                <a:spcPts val="500"/>
+              </a:spcAft>
+              <a:defRPr sz="1200">
                 <a:solidFill>
                   <a:srgbClr val="1E293B"/>
                 </a:solidFill>
               </a:defRPr>
             </a:pPr>
             <a:r>
-              <a:t>• React, Angular, TypeScript, JavaScript, Node.js, Web Components (LitElement).</a:t>
-            </a:r>
-          </a:p>
-          <a:p>
-            <a:pPr>
-              <a:spcAft>
-                <a:spcPts val="400"/>
-              </a:spcAft>
-              <a:defRPr sz="1050">
+              <a:t>•  Voxelforge AI (generative modular 3D for Unreal/Unity/WebGL) &amp; Ayam3d (parametric 3D).</a:t>
+            </a:r>
+          </a:p>
+          <a:p>
+            <a:pPr>
+              <a:spcAft>
+                <a:spcPts val="500"/>
+              </a:spcAft>
+              <a:defRPr sz="1200">
                 <a:solidFill>
                   <a:srgbClr val="1E293B"/>
                 </a:solidFill>
               </a:defRPr>
             </a:pPr>
             <a:r>
-              <a:t>• Architected Enterprise UI Design Systems used across diverse development teams.</a:t>
-            </a:r>
-          </a:p>
-          <a:p>
-            <a:pPr>
-              <a:spcAft>
-                <a:spcPts val="400"/>
-              </a:spcAft>
-              <a:defRPr sz="1050">
+              <a:t>•  Architectural 3D visualization, animated walkthroughs, and CAD/CAM CNC machine development.</a:t>
+            </a:r>
+          </a:p>
+          <a:p>
+            <a:pPr>
+              <a:spcAft>
+                <a:spcPts val="500"/>
+              </a:spcAft>
+              <a:defRPr sz="1200">
                 <a:solidFill>
                   <a:srgbClr val="1E293B"/>
                 </a:solidFill>
               </a:defRPr>
             </a:pPr>
             <a:r>
-              <a:t>• State management, micro-frontends, REST, WebSockets, and streaming telemetry.</a:t>
-            </a:r>
-          </a:p>
-          <a:p>
-            <a:pPr>
-              <a:spcAft>
-                <a:spcPts val="400"/>
-              </a:spcAft>
-              <a:defRPr sz="1050">
+              <a:t>•  Flight simulator 3D terrain and aircraft databases under locked 60 FPS budgets (CAE).</a:t>
+            </a:r>
+          </a:p>
+          <a:p>
+            <a:pPr>
+              <a:spcAft>
+                <a:spcPts val="500"/>
+              </a:spcAft>
+              <a:defRPr sz="1200">
                 <a:solidFill>
                   <a:srgbClr val="1E293B"/>
                 </a:solidFill>
               </a:defRPr>
             </a:pPr>
             <a:r>
-              <a:t>• 4-year zero-downtime migration of Cisco Stadium Vision from Flash/Flex to Angular/React.</a:t>
-            </a:r>
-          </a:p>
-        </p:txBody>
-      </p:sp>
-      <p:sp>
-        <p:nvSpPr>
-          <p:cNvPr id="10" name="Rounded Rectangle 9"/>
-          <p:cNvSpPr/>
-          <p:nvPr/>
-        </p:nvSpPr>
-        <p:spPr>
-          <a:xfrm>
-            <a:off x="6217920" y="1417320"/>
-            <a:ext cx="5230368" cy="2331720"/>
-          </a:xfrm>
-          <a:prstGeom prst="roundRect">
-            <a:avLst/>
-          </a:prstGeom>
-          <a:solidFill>
-            <a:srgbClr val="FFFFFF"/>
-          </a:solidFill>
-          <a:ln w="12700">
-            <a:solidFill>
-              <a:srgbClr val="E2E8F0"/>
-            </a:solidFill>
-          </a:ln>
-        </p:spPr>
-        <p:style>
-          <a:lnRef idx="1">
-            <a:schemeClr val="accent1"/>
-          </a:lnRef>
-          <a:fillRef idx="3">
-            <a:schemeClr val="accent1"/>
-          </a:fillRef>
-          <a:effectRef idx="2">
-            <a:schemeClr val="accent1"/>
-          </a:effectRef>
-          <a:fontRef idx="minor">
-            <a:schemeClr val="lt1"/>
-          </a:fontRef>
-        </p:style>
-        <p:txBody>
-          <a:bodyPr rtlCol="0" anchor="ctr"/>
-          <a:lstStyle/>
-          <a:p>
-            <a:pPr algn="ctr"/>
-          </a:p>
-        </p:txBody>
-      </p:sp>
-      <p:sp>
-        <p:nvSpPr>
-          <p:cNvPr id="11" name="Rectangle 10"/>
-          <p:cNvSpPr/>
-          <p:nvPr/>
-        </p:nvSpPr>
-        <p:spPr>
-          <a:xfrm>
-            <a:off x="6227064" y="1426464"/>
-            <a:ext cx="5212080" cy="402336"/>
-          </a:xfrm>
-          <a:prstGeom prst="rect">
-            <a:avLst/>
-          </a:prstGeom>
-          <a:solidFill>
-            <a:srgbClr val="0E7490"/>
-          </a:solidFill>
-          <a:ln>
-            <a:noFill/>
-          </a:ln>
-        </p:spPr>
-        <p:style>
-          <a:lnRef idx="1">
-            <a:schemeClr val="accent1"/>
-          </a:lnRef>
-          <a:fillRef idx="3">
-            <a:schemeClr val="accent1"/>
-          </a:fillRef>
-          <a:effectRef idx="2">
-            <a:schemeClr val="accent1"/>
-          </a:effectRef>
-          <a:fontRef idx="minor">
-            <a:schemeClr val="lt1"/>
-          </a:fontRef>
-        </p:style>
-        <p:txBody>
-          <a:bodyPr rtlCol="0" anchor="ctr"/>
-          <a:lstStyle/>
-          <a:p>
-            <a:pPr algn="ctr"/>
-          </a:p>
-        </p:txBody>
-      </p:sp>
-      <p:sp>
-        <p:nvSpPr>
-          <p:cNvPr id="12" name="TextBox 11"/>
+              <a:t>•  Interactive 3D parts inspection explorer supporting millions of catalog components.</a:t>
+            </a:r>
+          </a:p>
+        </p:txBody>
+      </p:sp>
+      <p:sp>
+        <p:nvSpPr>
+          <p:cNvPr id="7" name="TextBox 6"/>
           <p:cNvSpPr txBox="1"/>
           <p:nvPr/>
         </p:nvSpPr>
         <p:spPr>
           <a:xfrm>
-            <a:off x="6400800" y="1472184"/>
-            <a:ext cx="4864608" cy="320040"/>
+            <a:off x="731520" y="3913632"/>
+            <a:ext cx="5120640" cy="2331720"/>
           </a:xfrm>
           <a:prstGeom prst="rect">
             <a:avLst/>
@@ -8131,34 +6689,97 @@
           <a:noFill/>
         </p:spPr>
         <p:txBody>
-          <a:bodyPr wrap="none">
+          <a:bodyPr wrap="square" lIns="0" rIns="0" tIns="0" bIns="0">
             <a:spAutoFit/>
           </a:bodyPr>
           <a:lstStyle/>
           <a:p>
             <a:pPr>
-              <a:defRPr sz="1200" b="1">
-                <a:solidFill>
-                  <a:srgbClr val="FFFFFF"/>
-                </a:solidFill>
-              </a:defRPr>
-            </a:pPr>
-            <a:r>
-              <a:t>2. Spatial 3D, CAD &amp; Generative AI</a:t>
-            </a:r>
-          </a:p>
-        </p:txBody>
-      </p:sp>
-      <p:sp>
-        <p:nvSpPr>
-          <p:cNvPr id="13" name="TextBox 12"/>
+              <a:spcAft>
+                <a:spcPts val="800"/>
+              </a:spcAft>
+              <a:defRPr sz="1550" b="1">
+                <a:solidFill>
+                  <a:srgbClr val="D97706"/>
+                </a:solidFill>
+              </a:defRPr>
+            </a:pPr>
+            <a:r>
+              <a:t>3. High Reliability &amp; Operational Security</a:t>
+            </a:r>
+          </a:p>
+          <a:p>
+            <a:pPr>
+              <a:spcAft>
+                <a:spcPts val="500"/>
+              </a:spcAft>
+              <a:defRPr sz="1200">
+                <a:solidFill>
+                  <a:srgbClr val="1E293B"/>
+                </a:solidFill>
+              </a:defRPr>
+            </a:pPr>
+            <a:r>
+              <a:t>•  Delivered Philips ICU healthcare software meeting stringent clinical safety benchmarks.</a:t>
+            </a:r>
+          </a:p>
+          <a:p>
+            <a:pPr>
+              <a:spcAft>
+                <a:spcPts val="500"/>
+              </a:spcAft>
+              <a:defRPr sz="1200">
+                <a:solidFill>
+                  <a:srgbClr val="1E293B"/>
+                </a:solidFill>
+              </a:defRPr>
+            </a:pPr>
+            <a:r>
+              <a:t>•  Strict cybersecurity enforcement: Multi-factor authentication (MFA), XSS mitigation, RBAC.</a:t>
+            </a:r>
+          </a:p>
+          <a:p>
+            <a:pPr>
+              <a:spcAft>
+                <a:spcPts val="500"/>
+              </a:spcAft>
+              <a:defRPr sz="1200">
+                <a:solidFill>
+                  <a:srgbClr val="1E293B"/>
+                </a:solidFill>
+              </a:defRPr>
+            </a:pPr>
+            <a:r>
+              <a:t>•  Offline-first mobile architecture (IndexedDB/Service Workers) with conflict-free cloud sync.</a:t>
+            </a:r>
+          </a:p>
+          <a:p>
+            <a:pPr>
+              <a:spcAft>
+                <a:spcPts val="500"/>
+              </a:spcAft>
+              <a:defRPr sz="1200">
+                <a:solidFill>
+                  <a:srgbClr val="1E293B"/>
+                </a:solidFill>
+              </a:defRPr>
+            </a:pPr>
+            <a:r>
+              <a:t>•  Building Management System (BMS) unified interface for AHUs, chillers, and telemetry (Cisco).</a:t>
+            </a:r>
+          </a:p>
+        </p:txBody>
+      </p:sp>
+      <p:sp>
+        <p:nvSpPr>
+          <p:cNvPr id="8" name="TextBox 7"/>
           <p:cNvSpPr txBox="1"/>
           <p:nvPr/>
         </p:nvSpPr>
         <p:spPr>
           <a:xfrm>
-            <a:off x="6400800" y="1874520"/>
-            <a:ext cx="4864608" cy="1828800"/>
+            <a:off x="6309360" y="3913632"/>
+            <a:ext cx="5120640" cy="2331720"/>
           </a:xfrm>
           <a:prstGeom prst="rect">
             <a:avLst/>
@@ -8166,494 +6787,97 @@
           <a:noFill/>
         </p:spPr>
         <p:txBody>
-          <a:bodyPr wrap="square">
+          <a:bodyPr wrap="square" lIns="0" rIns="0" tIns="0" bIns="0">
             <a:spAutoFit/>
           </a:bodyPr>
           <a:lstStyle/>
           <a:p>
             <a:pPr>
               <a:spcAft>
-                <a:spcPts val="400"/>
-              </a:spcAft>
-              <a:defRPr sz="1050">
+                <a:spcPts val="800"/>
+              </a:spcAft>
+              <a:defRPr sz="1550" b="1">
+                <a:solidFill>
+                  <a:srgbClr val="109563"/>
+                </a:solidFill>
+              </a:defRPr>
+            </a:pPr>
+            <a:r>
+              <a:t>4. Agile Leadership &amp; Startup Delivery</a:t>
+            </a:r>
+          </a:p>
+          <a:p>
+            <a:pPr>
+              <a:spcAft>
+                <a:spcPts val="500"/>
+              </a:spcAft>
+              <a:defRPr sz="1200">
                 <a:solidFill>
                   <a:srgbClr val="1E293B"/>
                 </a:solidFill>
               </a:defRPr>
             </a:pPr>
             <a:r>
-              <a:t>• Voxelforge AI (generative modular 3D for Unreal/Unity/WebGL) &amp; Ayam3d (parametric 3D).</a:t>
-            </a:r>
-          </a:p>
-          <a:p>
-            <a:pPr>
-              <a:spcAft>
-                <a:spcPts val="400"/>
-              </a:spcAft>
-              <a:defRPr sz="1050">
+              <a:t>•  Founder/Co-Founder: Technoyana, Twitan.com, SrushtiLabs, InnoBrik.</a:t>
+            </a:r>
+          </a:p>
+          <a:p>
+            <a:pPr>
+              <a:spcAft>
+                <a:spcPts val="500"/>
+              </a:spcAft>
+              <a:defRPr sz="1200">
                 <a:solidFill>
                   <a:srgbClr val="1E293B"/>
                 </a:solidFill>
               </a:defRPr>
             </a:pPr>
             <a:r>
-              <a:t>• Architectural 3D visualization, animated walkthroughs, and CAD/CAM CNC machine development.</a:t>
-            </a:r>
-          </a:p>
-          <a:p>
-            <a:pPr>
-              <a:spcAft>
-                <a:spcPts val="400"/>
-              </a:spcAft>
-              <a:defRPr sz="1050">
+              <a:t>•  Associate Project Manager at UST Global; managed cross-functional squads for Cisco.</a:t>
+            </a:r>
+          </a:p>
+          <a:p>
+            <a:pPr>
+              <a:spcAft>
+                <a:spcPts val="500"/>
+              </a:spcAft>
+              <a:defRPr sz="1200">
                 <a:solidFill>
                   <a:srgbClr val="1E293B"/>
                 </a:solidFill>
               </a:defRPr>
             </a:pPr>
             <a:r>
-              <a:t>• Flight simulator 3D terrain and aircraft databases under locked 60 FPS budgets (CAE).</a:t>
-            </a:r>
-          </a:p>
-          <a:p>
-            <a:pPr>
-              <a:spcAft>
-                <a:spcPts val="400"/>
-              </a:spcAft>
-              <a:defRPr sz="1050">
+              <a:t>•  Early user prototyping, design-to-code pipelines, and active stakeholder governance.</a:t>
+            </a:r>
+          </a:p>
+          <a:p>
+            <a:pPr>
+              <a:spcAft>
+                <a:spcPts val="500"/>
+              </a:spcAft>
+              <a:defRPr sz="1200">
                 <a:solidFill>
                   <a:srgbClr val="1E293B"/>
                 </a:solidFill>
               </a:defRPr>
             </a:pPr>
             <a:r>
-              <a:t>• Interactive 3D parts inspection explorer supporting millions of catalog components.</a:t>
-            </a:r>
-          </a:p>
-        </p:txBody>
-      </p:sp>
-      <p:sp>
-        <p:nvSpPr>
-          <p:cNvPr id="14" name="Rounded Rectangle 13"/>
-          <p:cNvSpPr/>
-          <p:nvPr/>
-        </p:nvSpPr>
-        <p:spPr>
-          <a:xfrm>
-            <a:off x="731520" y="3977639"/>
-            <a:ext cx="5230368" cy="2331720"/>
-          </a:xfrm>
-          <a:prstGeom prst="roundRect">
-            <a:avLst/>
-          </a:prstGeom>
-          <a:solidFill>
-            <a:srgbClr val="FFFFFF"/>
-          </a:solidFill>
-          <a:ln w="12700">
-            <a:solidFill>
-              <a:srgbClr val="E2E8F0"/>
-            </a:solidFill>
-          </a:ln>
-        </p:spPr>
-        <p:style>
-          <a:lnRef idx="1">
-            <a:schemeClr val="accent1"/>
-          </a:lnRef>
-          <a:fillRef idx="3">
-            <a:schemeClr val="accent1"/>
-          </a:fillRef>
-          <a:effectRef idx="2">
-            <a:schemeClr val="accent1"/>
-          </a:effectRef>
-          <a:fontRef idx="minor">
-            <a:schemeClr val="lt1"/>
-          </a:fontRef>
-        </p:style>
-        <p:txBody>
-          <a:bodyPr rtlCol="0" anchor="ctr"/>
-          <a:lstStyle/>
-          <a:p>
-            <a:pPr algn="ctr"/>
-          </a:p>
-        </p:txBody>
-      </p:sp>
-      <p:sp>
-        <p:nvSpPr>
-          <p:cNvPr id="15" name="Rectangle 14"/>
-          <p:cNvSpPr/>
-          <p:nvPr/>
-        </p:nvSpPr>
-        <p:spPr>
-          <a:xfrm>
-            <a:off x="740664" y="3986783"/>
-            <a:ext cx="5212080" cy="402336"/>
-          </a:xfrm>
-          <a:prstGeom prst="rect">
-            <a:avLst/>
-          </a:prstGeom>
-          <a:solidFill>
-            <a:srgbClr val="D97706"/>
-          </a:solidFill>
-          <a:ln>
-            <a:noFill/>
-          </a:ln>
-        </p:spPr>
-        <p:style>
-          <a:lnRef idx="1">
-            <a:schemeClr val="accent1"/>
-          </a:lnRef>
-          <a:fillRef idx="3">
-            <a:schemeClr val="accent1"/>
-          </a:fillRef>
-          <a:effectRef idx="2">
-            <a:schemeClr val="accent1"/>
-          </a:effectRef>
-          <a:fontRef idx="minor">
-            <a:schemeClr val="lt1"/>
-          </a:fontRef>
-        </p:style>
-        <p:txBody>
-          <a:bodyPr rtlCol="0" anchor="ctr"/>
-          <a:lstStyle/>
-          <a:p>
-            <a:pPr algn="ctr"/>
-          </a:p>
-        </p:txBody>
-      </p:sp>
-      <p:sp>
-        <p:nvSpPr>
-          <p:cNvPr id="16" name="TextBox 15"/>
+              <a:t>•  Honored with Cisco Appreciation (2010) and 3 UST Global Excellence Awards (2015, 2016, 2018).</a:t>
+            </a:r>
+          </a:p>
+        </p:txBody>
+      </p:sp>
+      <p:sp>
+        <p:nvSpPr>
+          <p:cNvPr id="9" name="TextBox 8"/>
           <p:cNvSpPr txBox="1"/>
           <p:nvPr/>
         </p:nvSpPr>
         <p:spPr>
           <a:xfrm>
-            <a:off x="914400" y="4032503"/>
-            <a:ext cx="4864608" cy="320040"/>
-          </a:xfrm>
-          <a:prstGeom prst="rect">
-            <a:avLst/>
-          </a:prstGeom>
-          <a:noFill/>
-        </p:spPr>
-        <p:txBody>
-          <a:bodyPr wrap="none">
-            <a:spAutoFit/>
-          </a:bodyPr>
-          <a:lstStyle/>
-          <a:p>
-            <a:pPr>
-              <a:defRPr sz="1200" b="1">
-                <a:solidFill>
-                  <a:srgbClr val="FFFFFF"/>
-                </a:solidFill>
-              </a:defRPr>
-            </a:pPr>
-            <a:r>
-              <a:t>3. High Reliability &amp; Operational Security</a:t>
-            </a:r>
-          </a:p>
-        </p:txBody>
-      </p:sp>
-      <p:sp>
-        <p:nvSpPr>
-          <p:cNvPr id="17" name="TextBox 16"/>
-          <p:cNvSpPr txBox="1"/>
-          <p:nvPr/>
-        </p:nvSpPr>
-        <p:spPr>
-          <a:xfrm>
-            <a:off x="914400" y="4434839"/>
-            <a:ext cx="4864608" cy="1828800"/>
-          </a:xfrm>
-          <a:prstGeom prst="rect">
-            <a:avLst/>
-          </a:prstGeom>
-          <a:noFill/>
-        </p:spPr>
-        <p:txBody>
-          <a:bodyPr wrap="square">
-            <a:spAutoFit/>
-          </a:bodyPr>
-          <a:lstStyle/>
-          <a:p>
-            <a:pPr>
-              <a:spcAft>
-                <a:spcPts val="400"/>
-              </a:spcAft>
-              <a:defRPr sz="1050">
-                <a:solidFill>
-                  <a:srgbClr val="1E293B"/>
-                </a:solidFill>
-              </a:defRPr>
-            </a:pPr>
-            <a:r>
-              <a:t>• Delivered Philips ICU healthcare software meeting stringent clinical safety benchmarks.</a:t>
-            </a:r>
-          </a:p>
-          <a:p>
-            <a:pPr>
-              <a:spcAft>
-                <a:spcPts val="400"/>
-              </a:spcAft>
-              <a:defRPr sz="1050">
-                <a:solidFill>
-                  <a:srgbClr val="1E293B"/>
-                </a:solidFill>
-              </a:defRPr>
-            </a:pPr>
-            <a:r>
-              <a:t>• Strict cybersecurity enforcement: Multi-factor authentication (MFA), XSS mitigation, RBAC.</a:t>
-            </a:r>
-          </a:p>
-          <a:p>
-            <a:pPr>
-              <a:spcAft>
-                <a:spcPts val="400"/>
-              </a:spcAft>
-              <a:defRPr sz="1050">
-                <a:solidFill>
-                  <a:srgbClr val="1E293B"/>
-                </a:solidFill>
-              </a:defRPr>
-            </a:pPr>
-            <a:r>
-              <a:t>• Offline-first mobile architecture (IndexedDB/Service Workers) with conflict-free cloud sync.</a:t>
-            </a:r>
-          </a:p>
-          <a:p>
-            <a:pPr>
-              <a:spcAft>
-                <a:spcPts val="400"/>
-              </a:spcAft>
-              <a:defRPr sz="1050">
-                <a:solidFill>
-                  <a:srgbClr val="1E293B"/>
-                </a:solidFill>
-              </a:defRPr>
-            </a:pPr>
-            <a:r>
-              <a:t>• Building Management System (BMS) unified interface for AHUs, chillers, and telemetry (Cisco).</a:t>
-            </a:r>
-          </a:p>
-        </p:txBody>
-      </p:sp>
-      <p:sp>
-        <p:nvSpPr>
-          <p:cNvPr id="18" name="Rounded Rectangle 17"/>
-          <p:cNvSpPr/>
-          <p:nvPr/>
-        </p:nvSpPr>
-        <p:spPr>
-          <a:xfrm>
-            <a:off x="6217920" y="3977639"/>
-            <a:ext cx="5230368" cy="2331720"/>
-          </a:xfrm>
-          <a:prstGeom prst="roundRect">
-            <a:avLst/>
-          </a:prstGeom>
-          <a:solidFill>
-            <a:srgbClr val="FFFFFF"/>
-          </a:solidFill>
-          <a:ln w="12700">
-            <a:solidFill>
-              <a:srgbClr val="E2E8F0"/>
-            </a:solidFill>
-          </a:ln>
-        </p:spPr>
-        <p:style>
-          <a:lnRef idx="1">
-            <a:schemeClr val="accent1"/>
-          </a:lnRef>
-          <a:fillRef idx="3">
-            <a:schemeClr val="accent1"/>
-          </a:fillRef>
-          <a:effectRef idx="2">
-            <a:schemeClr val="accent1"/>
-          </a:effectRef>
-          <a:fontRef idx="minor">
-            <a:schemeClr val="lt1"/>
-          </a:fontRef>
-        </p:style>
-        <p:txBody>
-          <a:bodyPr rtlCol="0" anchor="ctr"/>
-          <a:lstStyle/>
-          <a:p>
-            <a:pPr algn="ctr"/>
-          </a:p>
-        </p:txBody>
-      </p:sp>
-      <p:sp>
-        <p:nvSpPr>
-          <p:cNvPr id="19" name="Rectangle 18"/>
-          <p:cNvSpPr/>
-          <p:nvPr/>
-        </p:nvSpPr>
-        <p:spPr>
-          <a:xfrm>
-            <a:off x="6227064" y="3986783"/>
-            <a:ext cx="5212080" cy="402336"/>
-          </a:xfrm>
-          <a:prstGeom prst="rect">
-            <a:avLst/>
-          </a:prstGeom>
-          <a:solidFill>
-            <a:srgbClr val="109563"/>
-          </a:solidFill>
-          <a:ln>
-            <a:noFill/>
-          </a:ln>
-        </p:spPr>
-        <p:style>
-          <a:lnRef idx="1">
-            <a:schemeClr val="accent1"/>
-          </a:lnRef>
-          <a:fillRef idx="3">
-            <a:schemeClr val="accent1"/>
-          </a:fillRef>
-          <a:effectRef idx="2">
-            <a:schemeClr val="accent1"/>
-          </a:effectRef>
-          <a:fontRef idx="minor">
-            <a:schemeClr val="lt1"/>
-          </a:fontRef>
-        </p:style>
-        <p:txBody>
-          <a:bodyPr rtlCol="0" anchor="ctr"/>
-          <a:lstStyle/>
-          <a:p>
-            <a:pPr algn="ctr"/>
-          </a:p>
-        </p:txBody>
-      </p:sp>
-      <p:sp>
-        <p:nvSpPr>
-          <p:cNvPr id="20" name="TextBox 19"/>
-          <p:cNvSpPr txBox="1"/>
-          <p:nvPr/>
-        </p:nvSpPr>
-        <p:spPr>
-          <a:xfrm>
-            <a:off x="6400800" y="4032503"/>
-            <a:ext cx="4864608" cy="320040"/>
-          </a:xfrm>
-          <a:prstGeom prst="rect">
-            <a:avLst/>
-          </a:prstGeom>
-          <a:noFill/>
-        </p:spPr>
-        <p:txBody>
-          <a:bodyPr wrap="none">
-            <a:spAutoFit/>
-          </a:bodyPr>
-          <a:lstStyle/>
-          <a:p>
-            <a:pPr>
-              <a:defRPr sz="1200" b="1">
-                <a:solidFill>
-                  <a:srgbClr val="FFFFFF"/>
-                </a:solidFill>
-              </a:defRPr>
-            </a:pPr>
-            <a:r>
-              <a:t>4. Agile Leadership &amp; Startup Delivery</a:t>
-            </a:r>
-          </a:p>
-        </p:txBody>
-      </p:sp>
-      <p:sp>
-        <p:nvSpPr>
-          <p:cNvPr id="21" name="TextBox 20"/>
-          <p:cNvSpPr txBox="1"/>
-          <p:nvPr/>
-        </p:nvSpPr>
-        <p:spPr>
-          <a:xfrm>
-            <a:off x="6400800" y="4434839"/>
-            <a:ext cx="4864608" cy="1828800"/>
-          </a:xfrm>
-          <a:prstGeom prst="rect">
-            <a:avLst/>
-          </a:prstGeom>
-          <a:noFill/>
-        </p:spPr>
-        <p:txBody>
-          <a:bodyPr wrap="square">
-            <a:spAutoFit/>
-          </a:bodyPr>
-          <a:lstStyle/>
-          <a:p>
-            <a:pPr>
-              <a:spcAft>
-                <a:spcPts val="400"/>
-              </a:spcAft>
-              <a:defRPr sz="1050">
-                <a:solidFill>
-                  <a:srgbClr val="1E293B"/>
-                </a:solidFill>
-              </a:defRPr>
-            </a:pPr>
-            <a:r>
-              <a:t>• Founder/Co-Founder: Technoyana, Twitan.com, SrushtiLabs, InnoBrik.</a:t>
-            </a:r>
-          </a:p>
-          <a:p>
-            <a:pPr>
-              <a:spcAft>
-                <a:spcPts val="400"/>
-              </a:spcAft>
-              <a:defRPr sz="1050">
-                <a:solidFill>
-                  <a:srgbClr val="1E293B"/>
-                </a:solidFill>
-              </a:defRPr>
-            </a:pPr>
-            <a:r>
-              <a:t>• Associate Project Manager at UST Global; managed cross-functional squads for Cisco.</a:t>
-            </a:r>
-          </a:p>
-          <a:p>
-            <a:pPr>
-              <a:spcAft>
-                <a:spcPts val="400"/>
-              </a:spcAft>
-              <a:defRPr sz="1050">
-                <a:solidFill>
-                  <a:srgbClr val="1E293B"/>
-                </a:solidFill>
-              </a:defRPr>
-            </a:pPr>
-            <a:r>
-              <a:t>• Early user prototyping, design-to-code pipelines, and active stakeholder governance.</a:t>
-            </a:r>
-          </a:p>
-          <a:p>
-            <a:pPr>
-              <a:spcAft>
-                <a:spcPts val="400"/>
-              </a:spcAft>
-              <a:defRPr sz="1050">
-                <a:solidFill>
-                  <a:srgbClr val="1E293B"/>
-                </a:solidFill>
-              </a:defRPr>
-            </a:pPr>
-            <a:r>
-              <a:t>• Honored with Cisco Appreciation (2010) and 3 UST Global Excellence Awards (2015, 2016, 2018).</a:t>
-            </a:r>
-          </a:p>
-        </p:txBody>
-      </p:sp>
-      <p:sp>
-        <p:nvSpPr>
-          <p:cNvPr id="22" name="TextBox 21"/>
-          <p:cNvSpPr txBox="1"/>
-          <p:nvPr/>
-        </p:nvSpPr>
-        <p:spPr>
-          <a:xfrm>
-            <a:off x="731520" y="6446520"/>
-            <a:ext cx="10728655" cy="320040"/>
+            <a:off x="731520" y="6473952"/>
+            <a:ext cx="10728655" cy="292608"/>
           </a:xfrm>
           <a:prstGeom prst="rect">
             <a:avLst/>
@@ -8742,25 +6966,58 @@
       </p:sp>
       <p:sp>
         <p:nvSpPr>
-          <p:cNvPr id="3" name="Rounded Rectangle 2"/>
+          <p:cNvPr id="3" name="TextBox 2"/>
+          <p:cNvSpPr txBox="1"/>
+          <p:nvPr/>
+        </p:nvSpPr>
+        <p:spPr>
+          <a:xfrm>
+            <a:off x="731520" y="438912"/>
+            <a:ext cx="10728655" cy="640080"/>
+          </a:xfrm>
+          <a:prstGeom prst="rect">
+            <a:avLst/>
+          </a:prstGeom>
+          <a:noFill/>
+        </p:spPr>
+        <p:txBody>
+          <a:bodyPr wrap="square" lIns="0" rIns="0" tIns="0" bIns="0">
+            <a:spAutoFit/>
+          </a:bodyPr>
+          <a:lstStyle/>
+          <a:p>
+            <a:pPr>
+              <a:defRPr sz="2500" b="1">
+                <a:solidFill>
+                  <a:srgbClr val="FFFFFF"/>
+                </a:solidFill>
+              </a:defRPr>
+            </a:pPr>
+            <a:r>
+              <a:t>Summary</a:t>
+            </a:r>
+          </a:p>
+        </p:txBody>
+      </p:sp>
+      <p:sp>
+        <p:nvSpPr>
+          <p:cNvPr id="4" name="Rectangle 3"/>
           <p:cNvSpPr/>
           <p:nvPr/>
         </p:nvSpPr>
         <p:spPr>
           <a:xfrm>
-            <a:off x="731520" y="1051560"/>
-            <a:ext cx="10728655" cy="5120640"/>
-          </a:xfrm>
-          <a:prstGeom prst="roundRect">
+            <a:off x="731520" y="1170432"/>
+            <a:ext cx="10728655" cy="22860"/>
+          </a:xfrm>
+          <a:prstGeom prst="rect">
             <a:avLst/>
           </a:prstGeom>
           <a:solidFill>
-            <a:srgbClr val="182235"/>
+            <a:srgbClr val="334155"/>
           </a:solidFill>
-          <a:ln w="12700">
-            <a:solidFill>
-              <a:srgbClr val="334155"/>
-            </a:solidFill>
+          <a:ln>
+            <a:noFill/>
           </a:ln>
         </p:spPr>
         <p:style>
@@ -8787,14 +7044,14 @@
       </p:sp>
       <p:sp>
         <p:nvSpPr>
-          <p:cNvPr id="4" name="TextBox 3"/>
+          <p:cNvPr id="5" name="TextBox 4"/>
           <p:cNvSpPr txBox="1"/>
           <p:nvPr/>
         </p:nvSpPr>
         <p:spPr>
           <a:xfrm>
-            <a:off x="1188720" y="1325880"/>
-            <a:ext cx="9814255" cy="4572000"/>
+            <a:off x="731520" y="1389888"/>
+            <a:ext cx="10728655" cy="4937760"/>
           </a:xfrm>
           <a:prstGeom prst="rect">
             <a:avLst/>
@@ -8802,158 +7059,111 @@
           <a:noFill/>
         </p:spPr>
         <p:txBody>
-          <a:bodyPr wrap="square">
+          <a:bodyPr wrap="square" lIns="0" rIns="0" tIns="0" bIns="0">
             <a:spAutoFit/>
           </a:bodyPr>
           <a:lstStyle/>
           <a:p>
             <a:pPr>
               <a:spcAft>
-                <a:spcPts val="400"/>
-              </a:spcAft>
+                <a:spcPts val="1400"/>
+              </a:spcAft>
+            </a:pPr>
+            <a:r>
+              <a:rPr b="1" sz="1400">
+                <a:solidFill>
+                  <a:srgbClr val="38BDF8"/>
+                </a:solidFill>
+              </a:rPr>
+              <a:t>✔  Design and Engineering Synthesis: </a:t>
+            </a:r>
+            <a:r>
+              <a:rPr b="0" sz="1250">
+                <a:solidFill>
+                  <a:srgbClr val="E2E8F0"/>
+                </a:solidFill>
+              </a:rPr>
+              <a:t>Holding a postgraduate degree in Human Interface Design (M.S. in Computing, UK) combined with an engineering degree in Electronics and Communication (B.E.), I bring a rare, balanced capability spanning both human-centered UX design and deep technical software architecture.</a:t>
+            </a:r>
+          </a:p>
+          <a:p>
+            <a:pPr>
+              <a:spcAft>
+                <a:spcPts val="1400"/>
+              </a:spcAft>
+            </a:pPr>
+            <a:r>
+              <a:rPr b="1" sz="1400">
+                <a:solidFill>
+                  <a:srgbClr val="38BDF8"/>
+                </a:solidFill>
+              </a:rPr>
+              <a:t>✔  Proven Breadth Across Startup Velocity &amp; Enterprise Scale: </a:t>
+            </a:r>
+            <a:r>
+              <a:rPr b="0" sz="1250">
+                <a:solidFill>
+                  <a:srgbClr val="E2E8F0"/>
+                </a:solidFill>
+              </a:rPr>
+              <a:t>My 18+ years of experience encompass leading agile, high-velocity startup product incubation (Technoyana, SrushtiLabs, Twitan, InnoBrik) as well as managing complex multi-year enterprise projects with stringent quality, security, and uptime mandates (Philips ICU Healthcare, Cisco Systems, UST Global, Ness).</a:t>
+            </a:r>
+          </a:p>
+          <a:p>
+            <a:pPr>
+              <a:spcAft>
+                <a:spcPts val="1400"/>
+              </a:spcAft>
+            </a:pPr>
+            <a:r>
+              <a:rPr b="1" sz="1400">
+                <a:solidFill>
+                  <a:srgbClr val="38BDF8"/>
+                </a:solidFill>
+              </a:rPr>
+              <a:t>✔  Handling Products Across Every Stage of the Lifecycle: </a:t>
+            </a:r>
+            <a:r>
+              <a:rPr b="0" sz="1250">
+                <a:solidFill>
+                  <a:srgbClr val="E2E8F0"/>
+                </a:solidFill>
+              </a:rPr>
+              <a:t>Demonstrated expertise across every product phase: early discovery prototypes, building reusable design systems, legacy system migrations (Flash to Angular/React), production deployment, security compliance, and long-term customer support.</a:t>
+            </a:r>
+          </a:p>
+          <a:p>
+            <a:pPr>
+              <a:spcAft>
+                <a:spcPts val="1400"/>
+              </a:spcAft>
+            </a:pPr>
+            <a:r>
+              <a:rPr b="1" sz="1400">
+                <a:solidFill>
+                  <a:srgbClr val="38BDF8"/>
+                </a:solidFill>
+              </a:rPr>
+              <a:t>✔  Pledge for Self-Training &amp; Certification: </a:t>
+            </a:r>
+            <a:r>
+              <a:rPr b="0" sz="1250">
+                <a:solidFill>
+                  <a:srgbClr val="E2E8F0"/>
+                </a:solidFill>
+              </a:rPr>
+              <a:t>I am fully committed to the success of the organization and team. As per the specific operational requirements of the Senior Manager – IT role, I pledge to proactively upskill myself and complete any required enterprise certifications (e.g., Cloud Architecture, ITIL, Cybersecurity, or project governance) to align completely with team goals and project needs.</a:t>
+            </a:r>
+          </a:p>
+          <a:p>
+            <a:pPr>
               <a:defRPr sz="1200" b="1">
                 <a:solidFill>
-                  <a:srgbClr val="38BDF8"/>
-                </a:solidFill>
-              </a:defRPr>
-            </a:pPr>
-            <a:r>
-              <a:t>SECTION 3 · CONCLUSION &amp; ROLE ALIGNMENT</a:t>
-            </a:r>
-          </a:p>
-          <a:p>
-            <a:pPr>
-              <a:spcAft>
-                <a:spcPts val="1400"/>
-              </a:spcAft>
-              <a:defRPr sz="2200" b="1">
-                <a:solidFill>
                   <a:srgbClr val="FFFFFF"/>
                 </a:solidFill>
               </a:defRPr>
             </a:pPr>
             <a:r>
-              <a:t>Alignment to Senior Manager – IT &amp; Continuous Learning Pledge</a:t>
-            </a:r>
-          </a:p>
-          <a:p>
-            <a:pPr>
-              <a:defRPr b="1" sz="1150">
-                <a:solidFill>
-                  <a:srgbClr val="38BDF8"/>
-                </a:solidFill>
-              </a:defRPr>
-            </a:pPr>
-            <a:r>
-              <a:t>✔ Design and Engineering Synthesis: </a:t>
-            </a:r>
-          </a:p>
-          <a:p>
-            <a:pPr>
-              <a:spcAft>
-                <a:spcPts val="800"/>
-              </a:spcAft>
-              <a:defRPr sz="1100">
-                <a:solidFill>
-                  <a:srgbClr val="E2E8F0"/>
-                </a:solidFill>
-              </a:defRPr>
-            </a:pPr>
-            <a:r>
-              <a:t>   Holding a postgraduate degree in Human Interface Design (M.S. in Computing, UK) combined with an engineering degree in Electronics and Communication (B.E.), I bring a rare, balanced capability spanning both human-centered UX design and deep technical software architecture.</a:t>
-            </a:r>
-          </a:p>
-          <a:p>
-            <a:pPr>
-              <a:defRPr b="1" sz="1150">
-                <a:solidFill>
-                  <a:srgbClr val="38BDF8"/>
-                </a:solidFill>
-              </a:defRPr>
-            </a:pPr>
-            <a:r>
-              <a:t>✔ Proven Breadth Across Startup Velocity &amp; Enterprise Scale: </a:t>
-            </a:r>
-          </a:p>
-          <a:p>
-            <a:pPr>
-              <a:spcAft>
-                <a:spcPts val="800"/>
-              </a:spcAft>
-              <a:defRPr sz="1100">
-                <a:solidFill>
-                  <a:srgbClr val="E2E8F0"/>
-                </a:solidFill>
-              </a:defRPr>
-            </a:pPr>
-            <a:r>
-              <a:t>   My 18+ years of experience encompass leading agile, high-velocity startup product incubation (Technoyana, SrushtiLabs, Twitan, InnoBrik) as well as managing complex multi-year enterprise projects with stringent quality, security, and uptime mandates (Philips ICU Healthcare, Cisco Systems, UST Global, Ness).</a:t>
-            </a:r>
-          </a:p>
-          <a:p>
-            <a:pPr>
-              <a:defRPr b="1" sz="1150">
-                <a:solidFill>
-                  <a:srgbClr val="38BDF8"/>
-                </a:solidFill>
-              </a:defRPr>
-            </a:pPr>
-            <a:r>
-              <a:t>✔ Handling Products Across Every Stage of the Lifecycle: </a:t>
-            </a:r>
-          </a:p>
-          <a:p>
-            <a:pPr>
-              <a:spcAft>
-                <a:spcPts val="800"/>
-              </a:spcAft>
-              <a:defRPr sz="1100">
-                <a:solidFill>
-                  <a:srgbClr val="E2E8F0"/>
-                </a:solidFill>
-              </a:defRPr>
-            </a:pPr>
-            <a:r>
-              <a:t>   Demonstrated expertise across every product phase: early discovery prototypes, building reusable design systems, legacy system migrations (Flash to Angular/React), production deployment, security compliance, and long-term customer support.</a:t>
-            </a:r>
-          </a:p>
-          <a:p>
-            <a:pPr>
-              <a:defRPr b="1" sz="1150">
-                <a:solidFill>
-                  <a:srgbClr val="38BDF8"/>
-                </a:solidFill>
-              </a:defRPr>
-            </a:pPr>
-            <a:r>
-              <a:t>✔ Pledge for Self-Training &amp; Certification: </a:t>
-            </a:r>
-          </a:p>
-          <a:p>
-            <a:pPr>
-              <a:spcAft>
-                <a:spcPts val="800"/>
-              </a:spcAft>
-              <a:defRPr sz="1100">
-                <a:solidFill>
-                  <a:srgbClr val="E2E8F0"/>
-                </a:solidFill>
-              </a:defRPr>
-            </a:pPr>
-            <a:r>
-              <a:t>   I am fully committed to the success of the organization and team. As per the specific operational requirements of the Senior Manager – IT role, I pledge to proactively upskill myself and complete any required enterprise certifications (e.g., Cloud Architecture, ITIL, Cybersecurity, or project governance) to align completely with team goals and project needs.</a:t>
-            </a:r>
-          </a:p>
-          <a:p>
-            <a:br/>
-            <a:pPr>
-              <a:defRPr sz="1100" b="1">
-                <a:solidFill>
-                  <a:srgbClr val="FFFFFF"/>
-                </a:solidFill>
-              </a:defRPr>
-            </a:pPr>
-            <a:r>
               <a:t>Maheshchandra Hegde  |  hid.mahesh@gmail.com  |  +91 9535253329 / 7022407280  |  hegdemahesh.in</a:t>
             </a:r>
           </a:p>
@@ -8961,14 +7171,14 @@
       </p:sp>
       <p:sp>
         <p:nvSpPr>
-          <p:cNvPr id="5" name="TextBox 4"/>
+          <p:cNvPr id="6" name="TextBox 5"/>
           <p:cNvSpPr txBox="1"/>
           <p:nvPr/>
         </p:nvSpPr>
         <p:spPr>
           <a:xfrm>
-            <a:off x="731520" y="6446520"/>
-            <a:ext cx="10728655" cy="320040"/>
+            <a:off x="731520" y="6473952"/>
+            <a:ext cx="10728655" cy="292608"/>
           </a:xfrm>
           <a:prstGeom prst="rect">
             <a:avLst/>

--- a/obayashi_it_presentation/Obayashi_Senior_Manager_IT_Presentation_Maheshchandra_Hegde.pptx
+++ b/obayashi_it_presentation/Obayashi_Senior_Manager_IT_Presentation_Maheshchandra_Hegde.pptx
@@ -3314,40 +3314,19 @@
               <a:spcAft>
                 <a:spcPts val="1200"/>
               </a:spcAft>
-              <a:defRPr sz="1150">
+              <a:defRPr sz="1400">
                 <a:solidFill>
                   <a:srgbClr val="E2E8F0"/>
                 </a:solidFill>
               </a:defRPr>
             </a:pPr>
             <a:r>
-              <a:t>Innovative technologist and product strategist with 18+ years of experience architecting end-to-end digital products, interactive 3D experiences, and domain-specific SaaS platforms. Co-Founder and Technology Leader at Technoyana Digital Transformation Services Pvt. Ltd., driving product architecture and creative tech vision across flagship divisions:</a:t>
+              <a:t>Innovative technologist and product strategist with 18+ years of experience architecting end-to-end digital products, interactive 3D experiences, and domain-specific SaaS platforms. Co-Founder and Technology Leader at Technoyana Digital Transformation Services Pvt. Ltd., driving product architecture, cloud scalability, and creative technical vision.</a:t>
             </a:r>
             <a:br/>
             <a:br/>
             <a:r>
-              <a:t>• Twitan.com — AI-driven sports tournament management APP &amp; operational SaaS suite (Shutlify badminton OS).</a:t>
-            </a:r>
-            <a:br/>
-            <a:r>
-              <a:t>• Srushtilabs.com — Generative AI &amp; modular 3D computing platform for games, simulations, and 3D visualization.</a:t>
-            </a:r>
-            <a:br/>
-            <a:br/>
-            <a:r>
-              <a:t>Founder &amp; CTO with a postgraduate degree in Human Interface Design and Development (M.S. in Computing, Robert Gordon University, UK) and an engineering background in Electronics &amp; Communication (B.E.). Expertise spans modern web/mobile stacks (React, TypeScript, Angular, Web Components, Node.js, Firebase), interactive 3D/PBR pipelines, and design-to-code automation.</a:t>
-            </a:r>
-          </a:p>
-          <a:p>
-            <a:pPr>
-              <a:defRPr sz="1100" i="1">
-                <a:solidFill>
-                  <a:srgbClr val="38BDF8"/>
-                </a:solidFill>
-              </a:defRPr>
-            </a:pPr>
-            <a:r>
-              <a:t>Architectural Heritage: Growing up assisting my architect father in his studio provided my earliest practical foundation in architectural drawings, building elevations, spatial planning, and CAD drafting—fostering a lifelong synergy between software systems and 3D spatial tech.</a:t>
+              <a:t>Expertise spans modern web/mobile application stacks (React, TypeScript, Angular, Web Components, Node.js, Firebase/GCP, AWS), interactive 3D/PBR pipelines, real-time spatial computing, and design-to-code automation across both high-velocity startups and mission-critical enterprise systems.</a:t>
             </a:r>
           </a:p>
         </p:txBody>

--- a/obayashi_it_presentation/Obayashi_Senior_Manager_IT_Presentation_Maheshchandra_Hegde.pptx
+++ b/obayashi_it_presentation/Obayashi_Senior_Manager_IT_Presentation_Maheshchandra_Hegde.pptx
@@ -14,6 +14,10 @@
     <p:sldId id="262" r:id="rId13"/>
     <p:sldId id="263" r:id="rId14"/>
     <p:sldId id="264" r:id="rId15"/>
+    <p:sldId id="265" r:id="rId16"/>
+    <p:sldId id="266" r:id="rId17"/>
+    <p:sldId id="267" r:id="rId18"/>
+    <p:sldId id="268" r:id="rId19"/>
   </p:sldIdLst>
   <p:sldSz cx="12191695" cy="6858000" type="screen4x3"/>
   <p:notesSz cx="6858000" cy="9144000"/>
@@ -3361,7 +3365,1700 @@
               </a:defRPr>
             </a:pPr>
             <a:r>
-              <a:t>Maheshchandra Hegde · Technical Work Experience Presentation | Slide 1 of 9</a:t>
+              <a:t>Maheshchandra Hegde · Technical Work Experience Presentation | Slide 1 of 13</a:t>
+            </a:r>
+          </a:p>
+        </p:txBody>
+      </p:sp>
+    </p:spTree>
+  </p:cSld>
+  <p:clrMapOvr>
+    <a:masterClrMapping/>
+  </p:clrMapOvr>
+</p:sld>
+</file>
+
+<file path=ppt/slides/slide10.xml><?xml version="1.0" encoding="utf-8"?>
+<p:sld xmlns:a="http://schemas.openxmlformats.org/drawingml/2006/main" xmlns:p="http://schemas.openxmlformats.org/presentationml/2006/main" xmlns:r="http://schemas.openxmlformats.org/officeDocument/2006/relationships">
+  <p:cSld>
+    <p:spTree>
+      <p:nvGrpSpPr>
+        <p:cNvPr id="1" name=""/>
+        <p:cNvGrpSpPr/>
+        <p:nvPr/>
+      </p:nvGrpSpPr>
+      <p:grpSpPr/>
+      <p:sp>
+        <p:nvSpPr>
+          <p:cNvPr id="2" name="Rectangle 1"/>
+          <p:cNvSpPr/>
+          <p:nvPr/>
+        </p:nvSpPr>
+        <p:spPr>
+          <a:xfrm>
+            <a:off x="0" y="0"/>
+            <a:ext cx="12191695" cy="6858000"/>
+          </a:xfrm>
+          <a:prstGeom prst="rect">
+            <a:avLst/>
+          </a:prstGeom>
+          <a:solidFill>
+            <a:srgbClr val="F8FAFC"/>
+          </a:solidFill>
+          <a:ln>
+            <a:noFill/>
+          </a:ln>
+        </p:spPr>
+        <p:style>
+          <a:lnRef idx="1">
+            <a:schemeClr val="accent1"/>
+          </a:lnRef>
+          <a:fillRef idx="3">
+            <a:schemeClr val="accent1"/>
+          </a:fillRef>
+          <a:effectRef idx="2">
+            <a:schemeClr val="accent1"/>
+          </a:effectRef>
+          <a:fontRef idx="minor">
+            <a:schemeClr val="lt1"/>
+          </a:fontRef>
+        </p:style>
+        <p:txBody>
+          <a:bodyPr rtlCol="0" anchor="ctr"/>
+          <a:lstStyle/>
+          <a:p>
+            <a:pPr algn="ctr"/>
+          </a:p>
+        </p:txBody>
+      </p:sp>
+      <p:sp>
+        <p:nvSpPr>
+          <p:cNvPr id="3" name="TextBox 2"/>
+          <p:cNvSpPr txBox="1"/>
+          <p:nvPr/>
+        </p:nvSpPr>
+        <p:spPr>
+          <a:xfrm>
+            <a:off x="731520" y="438912"/>
+            <a:ext cx="10728655" cy="640080"/>
+          </a:xfrm>
+          <a:prstGeom prst="rect">
+            <a:avLst/>
+          </a:prstGeom>
+          <a:noFill/>
+        </p:spPr>
+        <p:txBody>
+          <a:bodyPr wrap="square" lIns="0" rIns="0" tIns="0" bIns="0">
+            <a:spAutoFit/>
+          </a:bodyPr>
+          <a:lstStyle/>
+          <a:p>
+            <a:pPr>
+              <a:defRPr sz="2500" b="1">
+                <a:solidFill>
+                  <a:srgbClr val="0F172A"/>
+                </a:solidFill>
+              </a:defRPr>
+            </a:pPr>
+            <a:r>
+              <a:t>Challenges Faced &amp; Resolutions Implemented</a:t>
+            </a:r>
+          </a:p>
+        </p:txBody>
+      </p:sp>
+      <p:sp>
+        <p:nvSpPr>
+          <p:cNvPr id="4" name="Rectangle 3"/>
+          <p:cNvSpPr/>
+          <p:nvPr/>
+        </p:nvSpPr>
+        <p:spPr>
+          <a:xfrm>
+            <a:off x="731520" y="1170432"/>
+            <a:ext cx="10728655" cy="22860"/>
+          </a:xfrm>
+          <a:prstGeom prst="rect">
+            <a:avLst/>
+          </a:prstGeom>
+          <a:solidFill>
+            <a:srgbClr val="E2E8F0"/>
+          </a:solidFill>
+          <a:ln>
+            <a:noFill/>
+          </a:ln>
+        </p:spPr>
+        <p:style>
+          <a:lnRef idx="1">
+            <a:schemeClr val="accent1"/>
+          </a:lnRef>
+          <a:fillRef idx="3">
+            <a:schemeClr val="accent1"/>
+          </a:fillRef>
+          <a:effectRef idx="2">
+            <a:schemeClr val="accent1"/>
+          </a:effectRef>
+          <a:fontRef idx="minor">
+            <a:schemeClr val="lt1"/>
+          </a:fontRef>
+        </p:style>
+        <p:txBody>
+          <a:bodyPr rtlCol="0" anchor="ctr"/>
+          <a:lstStyle/>
+          <a:p>
+            <a:pPr algn="ctr"/>
+          </a:p>
+        </p:txBody>
+      </p:sp>
+      <p:sp>
+        <p:nvSpPr>
+          <p:cNvPr id="5" name="TextBox 4"/>
+          <p:cNvSpPr txBox="1"/>
+          <p:nvPr/>
+        </p:nvSpPr>
+        <p:spPr>
+          <a:xfrm>
+            <a:off x="731520" y="1389888"/>
+            <a:ext cx="5120640" cy="4892040"/>
+          </a:xfrm>
+          <a:prstGeom prst="rect">
+            <a:avLst/>
+          </a:prstGeom>
+          <a:noFill/>
+        </p:spPr>
+        <p:txBody>
+          <a:bodyPr wrap="square" lIns="0" rIns="0" tIns="0" bIns="0">
+            <a:spAutoFit/>
+          </a:bodyPr>
+          <a:lstStyle/>
+          <a:p>
+            <a:pPr>
+              <a:spcAft>
+                <a:spcPts val="400"/>
+              </a:spcAft>
+              <a:defRPr sz="1550" b="1">
+                <a:solidFill>
+                  <a:srgbClr val="0284C7"/>
+                </a:solidFill>
+              </a:defRPr>
+            </a:pPr>
+            <a:r>
+              <a:t>Challenge 1: Zero-Downtime Migration of Global Legacy Platform</a:t>
+            </a:r>
+          </a:p>
+          <a:p>
+            <a:pPr>
+              <a:spcAft>
+                <a:spcPts val="800"/>
+              </a:spcAft>
+            </a:pPr>
+            <a:r>
+              <a:rPr b="1" sz="1300">
+                <a:solidFill>
+                  <a:srgbClr val="0F172A"/>
+                </a:solidFill>
+              </a:rPr>
+              <a:t>•  The Challenge: </a:t>
+            </a:r>
+            <a:r>
+              <a:rPr b="0" sz="1200">
+                <a:solidFill>
+                  <a:srgbClr val="475569"/>
+                </a:solidFill>
+              </a:rPr>
+              <a:t>Cisco Stadium Vision Director was built on deprecated Adobe Flash/Flex with extensive business logic serving global arenas. Upgrading risked operational downtime and customer disruption.</a:t>
+            </a:r>
+          </a:p>
+          <a:p>
+            <a:pPr>
+              <a:spcAft>
+                <a:spcPts val="800"/>
+              </a:spcAft>
+            </a:pPr>
+            <a:r>
+              <a:rPr b="1" sz="1300">
+                <a:solidFill>
+                  <a:srgbClr val="0F172A"/>
+                </a:solidFill>
+              </a:rPr>
+              <a:t>•  Resolution Implemented: </a:t>
+            </a:r>
+            <a:r>
+              <a:rPr b="0" sz="1200">
+                <a:solidFill>
+                  <a:srgbClr val="475569"/>
+                </a:solidFill>
+              </a:rPr>
+              <a:t>Architected a hybrid micro-frontend bridge allowing new Angular and React modules to communicate with legacy Flex components via a shared event bus. Migrated sub-apps incrementally with zero downtime.</a:t>
+            </a:r>
+          </a:p>
+          <a:p>
+            <a:pPr>
+              <a:spcAft>
+                <a:spcPts val="400"/>
+              </a:spcAft>
+              <a:defRPr sz="1550" b="1">
+                <a:solidFill>
+                  <a:srgbClr val="0E7490"/>
+                </a:solidFill>
+              </a:defRPr>
+            </a:pPr>
+            <a:r>
+              <a:t>Challenge 2: 24/7 Clinical Bedside Memory Stability &amp; Security</a:t>
+            </a:r>
+          </a:p>
+          <a:p>
+            <a:pPr>
+              <a:spcAft>
+                <a:spcPts val="800"/>
+              </a:spcAft>
+            </a:pPr>
+            <a:r>
+              <a:rPr b="1" sz="1300">
+                <a:solidFill>
+                  <a:srgbClr val="0F172A"/>
+                </a:solidFill>
+              </a:rPr>
+              <a:t>•  The Challenge: </a:t>
+            </a:r>
+            <a:r>
+              <a:rPr b="0" sz="1200">
+                <a:solidFill>
+                  <a:srgbClr val="475569"/>
+                </a:solidFill>
+              </a:rPr>
+              <a:t>Philips ICU software operates non-stop for days. Memory leaks or UI freezes in bedside patient monitoring could lead to catastrophic clinical outcomes, amidst strict HIPAA/cybersecurity rules.</a:t>
+            </a:r>
+          </a:p>
+          <a:p>
+            <a:pPr>
+              <a:spcAft>
+                <a:spcPts val="800"/>
+              </a:spcAft>
+            </a:pPr>
+            <a:r>
+              <a:rPr b="1" sz="1300">
+                <a:solidFill>
+                  <a:srgbClr val="0F172A"/>
+                </a:solidFill>
+              </a:rPr>
+              <a:t>•  Resolution Implemented: </a:t>
+            </a:r>
+            <a:r>
+              <a:rPr b="0" sz="1200">
+                <a:solidFill>
+                  <a:srgbClr val="475569"/>
+                </a:solidFill>
+              </a:rPr>
+              <a:t>Enforced strict browser profiling, deterministic lifecycle cleanup on unmount, virtualized rendering for dense telemetry streams, and institutionalized MFA/RBAC security policies.</a:t>
+            </a:r>
+          </a:p>
+        </p:txBody>
+      </p:sp>
+      <p:sp>
+        <p:nvSpPr>
+          <p:cNvPr id="6" name="TextBox 5"/>
+          <p:cNvSpPr txBox="1"/>
+          <p:nvPr/>
+        </p:nvSpPr>
+        <p:spPr>
+          <a:xfrm>
+            <a:off x="6309360" y="1389888"/>
+            <a:ext cx="5120640" cy="4892040"/>
+          </a:xfrm>
+          <a:prstGeom prst="rect">
+            <a:avLst/>
+          </a:prstGeom>
+          <a:noFill/>
+        </p:spPr>
+        <p:txBody>
+          <a:bodyPr wrap="square" lIns="0" rIns="0" tIns="0" bIns="0">
+            <a:spAutoFit/>
+          </a:bodyPr>
+          <a:lstStyle/>
+          <a:p>
+            <a:pPr>
+              <a:spcAft>
+                <a:spcPts val="400"/>
+              </a:spcAft>
+              <a:defRPr sz="1550" b="1">
+                <a:solidFill>
+                  <a:srgbClr val="D97706"/>
+                </a:solidFill>
+              </a:defRPr>
+            </a:pPr>
+            <a:r>
+              <a:t>Challenge 3: Fragmented UI Development Across Multiple Squads</a:t>
+            </a:r>
+          </a:p>
+          <a:p>
+            <a:pPr>
+              <a:spcAft>
+                <a:spcPts val="800"/>
+              </a:spcAft>
+            </a:pPr>
+            <a:r>
+              <a:rPr b="1" sz="1300">
+                <a:solidFill>
+                  <a:srgbClr val="0F172A"/>
+                </a:solidFill>
+              </a:rPr>
+              <a:t>•  The Challenge: </a:t>
+            </a:r>
+            <a:r>
+              <a:rPr b="0" sz="1200">
+                <a:solidFill>
+                  <a:srgbClr val="475569"/>
+                </a:solidFill>
+              </a:rPr>
+              <a:t>Different project teams at Moonraft / UST were independently building common UI widgets across React and Angular, leading to visual inconsistency, duplicated effort, and slower client delivery.</a:t>
+            </a:r>
+          </a:p>
+          <a:p>
+            <a:pPr>
+              <a:spcAft>
+                <a:spcPts val="800"/>
+              </a:spcAft>
+            </a:pPr>
+            <a:r>
+              <a:rPr b="1" sz="1300">
+                <a:solidFill>
+                  <a:srgbClr val="0F172A"/>
+                </a:solidFill>
+              </a:rPr>
+              <a:t>•  Resolution Implemented: </a:t>
+            </a:r>
+            <a:r>
+              <a:rPr b="0" sz="1200">
+                <a:solidFill>
+                  <a:srgbClr val="475569"/>
+                </a:solidFill>
+              </a:rPr>
+              <a:t>Architected an enterprise-wide UI Design System using LitElement Web Components packaged via npm. Teams across any frontend framework seamlessly consumed identical, standardized components from one repo.</a:t>
+            </a:r>
+          </a:p>
+          <a:p>
+            <a:pPr>
+              <a:spcAft>
+                <a:spcPts val="400"/>
+              </a:spcAft>
+              <a:defRPr sz="1550" b="1">
+                <a:solidFill>
+                  <a:srgbClr val="109563"/>
+                </a:solidFill>
+              </a:defRPr>
+            </a:pPr>
+            <a:r>
+              <a:t>Challenge 4: Generative 3D Mesh Complexity &amp; Performance Lag</a:t>
+            </a:r>
+          </a:p>
+          <a:p>
+            <a:pPr>
+              <a:spcAft>
+                <a:spcPts val="800"/>
+              </a:spcAft>
+            </a:pPr>
+            <a:r>
+              <a:rPr b="1" sz="1300">
+                <a:solidFill>
+                  <a:srgbClr val="0F172A"/>
+                </a:solidFill>
+              </a:rPr>
+              <a:t>•  The Challenge: </a:t>
+            </a:r>
+            <a:r>
+              <a:rPr b="0" sz="1200">
+                <a:solidFill>
+                  <a:srgbClr val="475569"/>
+                </a:solidFill>
+              </a:rPr>
+              <a:t>Raw AI-generated 3D meshes produced disorganized vertex topology and massive polygon counts that crashed WebGL browsers and caused severe frame drops in gaming engines.</a:t>
+            </a:r>
+          </a:p>
+          <a:p>
+            <a:pPr>
+              <a:spcAft>
+                <a:spcPts val="800"/>
+              </a:spcAft>
+            </a:pPr>
+            <a:r>
+              <a:rPr b="1" sz="1300">
+                <a:solidFill>
+                  <a:srgbClr val="0F172A"/>
+                </a:solidFill>
+              </a:rPr>
+              <a:t>•  Resolution Implemented: </a:t>
+            </a:r>
+            <a:r>
+              <a:rPr b="0" sz="1200">
+                <a:solidFill>
+                  <a:srgbClr val="475569"/>
+                </a:solidFill>
+              </a:rPr>
+              <a:t>Engineered automated post-processing pipelines for polygon decimation, procedural retopology, UV unwrapping, and texture baking—generating optimized, lightweight 3D models instantly.</a:t>
+            </a:r>
+          </a:p>
+        </p:txBody>
+      </p:sp>
+      <p:sp>
+        <p:nvSpPr>
+          <p:cNvPr id="7" name="TextBox 6"/>
+          <p:cNvSpPr txBox="1"/>
+          <p:nvPr/>
+        </p:nvSpPr>
+        <p:spPr>
+          <a:xfrm>
+            <a:off x="731520" y="6473952"/>
+            <a:ext cx="10728655" cy="292608"/>
+          </a:xfrm>
+          <a:prstGeom prst="rect">
+            <a:avLst/>
+          </a:prstGeom>
+          <a:noFill/>
+        </p:spPr>
+        <p:txBody>
+          <a:bodyPr wrap="none" lIns="0" rIns="0" tIns="0" bIns="0">
+            <a:spAutoFit/>
+          </a:bodyPr>
+          <a:lstStyle/>
+          <a:p>
+            <a:pPr>
+              <a:defRPr sz="1000">
+                <a:solidFill>
+                  <a:srgbClr val="475569"/>
+                </a:solidFill>
+              </a:defRPr>
+            </a:pPr>
+            <a:r>
+              <a:t>Maheshchandra Hegde · Technical Work Experience Presentation | Slide 10 of 13</a:t>
+            </a:r>
+          </a:p>
+        </p:txBody>
+      </p:sp>
+    </p:spTree>
+  </p:cSld>
+  <p:clrMapOvr>
+    <a:masterClrMapping/>
+  </p:clrMapOvr>
+</p:sld>
+</file>
+
+<file path=ppt/slides/slide11.xml><?xml version="1.0" encoding="utf-8"?>
+<p:sld xmlns:a="http://schemas.openxmlformats.org/drawingml/2006/main" xmlns:p="http://schemas.openxmlformats.org/presentationml/2006/main" xmlns:r="http://schemas.openxmlformats.org/officeDocument/2006/relationships">
+  <p:cSld>
+    <p:spTree>
+      <p:nvGrpSpPr>
+        <p:cNvPr id="1" name=""/>
+        <p:cNvGrpSpPr/>
+        <p:nvPr/>
+      </p:nvGrpSpPr>
+      <p:grpSpPr/>
+      <p:sp>
+        <p:nvSpPr>
+          <p:cNvPr id="2" name="Rectangle 1"/>
+          <p:cNvSpPr/>
+          <p:nvPr/>
+        </p:nvSpPr>
+        <p:spPr>
+          <a:xfrm>
+            <a:off x="0" y="0"/>
+            <a:ext cx="12191695" cy="6858000"/>
+          </a:xfrm>
+          <a:prstGeom prst="rect">
+            <a:avLst/>
+          </a:prstGeom>
+          <a:solidFill>
+            <a:srgbClr val="F8FAFC"/>
+          </a:solidFill>
+          <a:ln>
+            <a:noFill/>
+          </a:ln>
+        </p:spPr>
+        <p:style>
+          <a:lnRef idx="1">
+            <a:schemeClr val="accent1"/>
+          </a:lnRef>
+          <a:fillRef idx="3">
+            <a:schemeClr val="accent1"/>
+          </a:fillRef>
+          <a:effectRef idx="2">
+            <a:schemeClr val="accent1"/>
+          </a:effectRef>
+          <a:fontRef idx="minor">
+            <a:schemeClr val="lt1"/>
+          </a:fontRef>
+        </p:style>
+        <p:txBody>
+          <a:bodyPr rtlCol="0" anchor="ctr"/>
+          <a:lstStyle/>
+          <a:p>
+            <a:pPr algn="ctr"/>
+          </a:p>
+        </p:txBody>
+      </p:sp>
+      <p:sp>
+        <p:nvSpPr>
+          <p:cNvPr id="3" name="TextBox 2"/>
+          <p:cNvSpPr txBox="1"/>
+          <p:nvPr/>
+        </p:nvSpPr>
+        <p:spPr>
+          <a:xfrm>
+            <a:off x="731520" y="438912"/>
+            <a:ext cx="10728655" cy="640080"/>
+          </a:xfrm>
+          <a:prstGeom prst="rect">
+            <a:avLst/>
+          </a:prstGeom>
+          <a:noFill/>
+        </p:spPr>
+        <p:txBody>
+          <a:bodyPr wrap="square" lIns="0" rIns="0" tIns="0" bIns="0">
+            <a:spAutoFit/>
+          </a:bodyPr>
+          <a:lstStyle/>
+          <a:p>
+            <a:pPr>
+              <a:defRPr sz="2500" b="1">
+                <a:solidFill>
+                  <a:srgbClr val="0F172A"/>
+                </a:solidFill>
+              </a:defRPr>
+            </a:pPr>
+            <a:r>
+              <a:t>Lessons Learned &amp; Best Practices</a:t>
+            </a:r>
+          </a:p>
+        </p:txBody>
+      </p:sp>
+      <p:sp>
+        <p:nvSpPr>
+          <p:cNvPr id="4" name="Rectangle 3"/>
+          <p:cNvSpPr/>
+          <p:nvPr/>
+        </p:nvSpPr>
+        <p:spPr>
+          <a:xfrm>
+            <a:off x="731520" y="1170432"/>
+            <a:ext cx="10728655" cy="22860"/>
+          </a:xfrm>
+          <a:prstGeom prst="rect">
+            <a:avLst/>
+          </a:prstGeom>
+          <a:solidFill>
+            <a:srgbClr val="E2E8F0"/>
+          </a:solidFill>
+          <a:ln>
+            <a:noFill/>
+          </a:ln>
+        </p:spPr>
+        <p:style>
+          <a:lnRef idx="1">
+            <a:schemeClr val="accent1"/>
+          </a:lnRef>
+          <a:fillRef idx="3">
+            <a:schemeClr val="accent1"/>
+          </a:fillRef>
+          <a:effectRef idx="2">
+            <a:schemeClr val="accent1"/>
+          </a:effectRef>
+          <a:fontRef idx="minor">
+            <a:schemeClr val="lt1"/>
+          </a:fontRef>
+        </p:style>
+        <p:txBody>
+          <a:bodyPr rtlCol="0" anchor="ctr"/>
+          <a:lstStyle/>
+          <a:p>
+            <a:pPr algn="ctr"/>
+          </a:p>
+        </p:txBody>
+      </p:sp>
+      <p:sp>
+        <p:nvSpPr>
+          <p:cNvPr id="5" name="TextBox 4"/>
+          <p:cNvSpPr txBox="1"/>
+          <p:nvPr/>
+        </p:nvSpPr>
+        <p:spPr>
+          <a:xfrm>
+            <a:off x="731520" y="1389888"/>
+            <a:ext cx="5120640" cy="4892040"/>
+          </a:xfrm>
+          <a:prstGeom prst="rect">
+            <a:avLst/>
+          </a:prstGeom>
+          <a:noFill/>
+        </p:spPr>
+        <p:txBody>
+          <a:bodyPr wrap="square" lIns="0" rIns="0" tIns="0" bIns="0">
+            <a:spAutoFit/>
+          </a:bodyPr>
+          <a:lstStyle/>
+          <a:p>
+            <a:pPr>
+              <a:spcAft>
+                <a:spcPts val="400"/>
+              </a:spcAft>
+              <a:defRPr sz="1550" b="1">
+                <a:solidFill>
+                  <a:srgbClr val="0284C7"/>
+                </a:solidFill>
+              </a:defRPr>
+            </a:pPr>
+            <a:r>
+              <a:t>1. Incremental Modernization Outperforms 'Big-Bang' Rewrites</a:t>
+            </a:r>
+          </a:p>
+          <a:p>
+            <a:pPr>
+              <a:spcAft>
+                <a:spcPts val="800"/>
+              </a:spcAft>
+            </a:pPr>
+            <a:r>
+              <a:rPr b="1" sz="1300">
+                <a:solidFill>
+                  <a:srgbClr val="0F172A"/>
+                </a:solidFill>
+              </a:rPr>
+              <a:t>•  Lesson Learned: </a:t>
+            </a:r>
+            <a:r>
+              <a:rPr b="0" sz="1200">
+                <a:solidFill>
+                  <a:srgbClr val="475569"/>
+                </a:solidFill>
+              </a:rPr>
+              <a:t>Complete system rewrites carry high risk, long delay cycles, and potential customer rejection. Incremental migration allows continuous production value delivery.</a:t>
+            </a:r>
+          </a:p>
+          <a:p>
+            <a:pPr>
+              <a:spcAft>
+                <a:spcPts val="800"/>
+              </a:spcAft>
+            </a:pPr>
+            <a:r>
+              <a:rPr b="1" sz="1300">
+                <a:solidFill>
+                  <a:srgbClr val="0F172A"/>
+                </a:solidFill>
+              </a:rPr>
+              <a:t>•  Best Practice: </a:t>
+            </a:r>
+            <a:r>
+              <a:rPr b="0" sz="1200">
+                <a:solidFill>
+                  <a:srgbClr val="475569"/>
+                </a:solidFill>
+              </a:rPr>
+              <a:t>Use strangler-fig patterns, modular micro-frontends, and backward-compatible APIs to modernize enterprise platforms step-by-step while maintaining uninterrupted business operations.</a:t>
+            </a:r>
+          </a:p>
+          <a:p>
+            <a:pPr>
+              <a:spcAft>
+                <a:spcPts val="400"/>
+              </a:spcAft>
+              <a:defRPr sz="1550" b="1">
+                <a:solidFill>
+                  <a:srgbClr val="0E7490"/>
+                </a:solidFill>
+              </a:defRPr>
+            </a:pPr>
+            <a:r>
+              <a:t>2. Security &amp; Compliance Must Be Architected from Day Zero</a:t>
+            </a:r>
+          </a:p>
+          <a:p>
+            <a:pPr>
+              <a:spcAft>
+                <a:spcPts val="800"/>
+              </a:spcAft>
+            </a:pPr>
+            <a:r>
+              <a:rPr b="1" sz="1300">
+                <a:solidFill>
+                  <a:srgbClr val="0F172A"/>
+                </a:solidFill>
+              </a:rPr>
+              <a:t>•  Lesson Learned: </a:t>
+            </a:r>
+            <a:r>
+              <a:rPr b="0" sz="1200">
+                <a:solidFill>
+                  <a:srgbClr val="475569"/>
+                </a:solidFill>
+              </a:rPr>
+              <a:t>Retrofitting authentication, RBAC, encryption, and audit trails into an established product is costly, disruptive, and prone to severe security vulnerabilities.</a:t>
+            </a:r>
+          </a:p>
+          <a:p>
+            <a:pPr>
+              <a:spcAft>
+                <a:spcPts val="800"/>
+              </a:spcAft>
+            </a:pPr>
+            <a:r>
+              <a:rPr b="1" sz="1300">
+                <a:solidFill>
+                  <a:srgbClr val="0F172A"/>
+                </a:solidFill>
+              </a:rPr>
+              <a:t>•  Best Practice: </a:t>
+            </a:r>
+            <a:r>
+              <a:rPr b="0" sz="1200">
+                <a:solidFill>
+                  <a:srgbClr val="475569"/>
+                </a:solidFill>
+              </a:rPr>
+              <a:t>Embed security controls (MFA, automated dependency scanning, sanitization, role matrices) into the CI/CD pipeline from inception as standard enterprise non-negotiables.</a:t>
+            </a:r>
+          </a:p>
+        </p:txBody>
+      </p:sp>
+      <p:sp>
+        <p:nvSpPr>
+          <p:cNvPr id="6" name="TextBox 5"/>
+          <p:cNvSpPr txBox="1"/>
+          <p:nvPr/>
+        </p:nvSpPr>
+        <p:spPr>
+          <a:xfrm>
+            <a:off x="6309360" y="1389888"/>
+            <a:ext cx="5120640" cy="4892040"/>
+          </a:xfrm>
+          <a:prstGeom prst="rect">
+            <a:avLst/>
+          </a:prstGeom>
+          <a:noFill/>
+        </p:spPr>
+        <p:txBody>
+          <a:bodyPr wrap="square" lIns="0" rIns="0" tIns="0" bIns="0">
+            <a:spAutoFit/>
+          </a:bodyPr>
+          <a:lstStyle/>
+          <a:p>
+            <a:pPr>
+              <a:spcAft>
+                <a:spcPts val="400"/>
+              </a:spcAft>
+              <a:defRPr sz="1550" b="1">
+                <a:solidFill>
+                  <a:srgbClr val="D97706"/>
+                </a:solidFill>
+              </a:defRPr>
+            </a:pPr>
+            <a:r>
+              <a:t>3. Centralized Design Systems Deliver Compounding ROI</a:t>
+            </a:r>
+          </a:p>
+          <a:p>
+            <a:pPr>
+              <a:spcAft>
+                <a:spcPts val="800"/>
+              </a:spcAft>
+            </a:pPr>
+            <a:r>
+              <a:rPr b="1" sz="1300">
+                <a:solidFill>
+                  <a:srgbClr val="0F172A"/>
+                </a:solidFill>
+              </a:rPr>
+              <a:t>•  Lesson Learned: </a:t>
+            </a:r>
+            <a:r>
+              <a:rPr b="0" sz="1200">
+                <a:solidFill>
+                  <a:srgbClr val="475569"/>
+                </a:solidFill>
+              </a:rPr>
+              <a:t>Without shared component governance, engineering squads create fragmented code, brand inconsistency, and duplicate maintenance burdens across projects.</a:t>
+            </a:r>
+          </a:p>
+          <a:p>
+            <a:pPr>
+              <a:spcAft>
+                <a:spcPts val="800"/>
+              </a:spcAft>
+            </a:pPr>
+            <a:r>
+              <a:rPr b="1" sz="1300">
+                <a:solidFill>
+                  <a:srgbClr val="0F172A"/>
+                </a:solidFill>
+              </a:rPr>
+              <a:t>•  Best Practice: </a:t>
+            </a:r>
+            <a:r>
+              <a:rPr b="0" sz="1200">
+                <a:solidFill>
+                  <a:srgbClr val="475569"/>
+                </a:solidFill>
+              </a:rPr>
+              <a:t>Treat internal design systems as first-class products with semantic versioning, comprehensive documentation, and framework-agnostic standards (Web Components).</a:t>
+            </a:r>
+          </a:p>
+          <a:p>
+            <a:pPr>
+              <a:spcAft>
+                <a:spcPts val="400"/>
+              </a:spcAft>
+              <a:defRPr sz="1550" b="1">
+                <a:solidFill>
+                  <a:srgbClr val="109563"/>
+                </a:solidFill>
+              </a:defRPr>
+            </a:pPr>
+            <a:r>
+              <a:t>4. Early Interactive Prototyping Resolves Requirement Risk</a:t>
+            </a:r>
+          </a:p>
+          <a:p>
+            <a:pPr>
+              <a:spcAft>
+                <a:spcPts val="800"/>
+              </a:spcAft>
+            </a:pPr>
+            <a:r>
+              <a:rPr b="1" sz="1300">
+                <a:solidFill>
+                  <a:srgbClr val="0F172A"/>
+                </a:solidFill>
+              </a:rPr>
+              <a:t>•  Lesson Learned: </a:t>
+            </a:r>
+            <a:r>
+              <a:rPr b="0" sz="1200">
+                <a:solidFill>
+                  <a:srgbClr val="475569"/>
+                </a:solidFill>
+              </a:rPr>
+              <a:t>Specification documents alone fail to capture operational nuances; misunderstandings surface late during production deployment when changes are 10x more costly.</a:t>
+            </a:r>
+          </a:p>
+          <a:p>
+            <a:pPr>
+              <a:spcAft>
+                <a:spcPts val="800"/>
+              </a:spcAft>
+            </a:pPr>
+            <a:r>
+              <a:rPr b="1" sz="1300">
+                <a:solidFill>
+                  <a:srgbClr val="0F172A"/>
+                </a:solidFill>
+              </a:rPr>
+              <a:t>•  Best Practice: </a:t>
+            </a:r>
+            <a:r>
+              <a:rPr b="0" sz="1200">
+                <a:solidFill>
+                  <a:srgbClr val="475569"/>
+                </a:solidFill>
+              </a:rPr>
+              <a:t>Involve stakeholders and users early using clickable, interactive prototypes to validate workflows, usability, and data contracts before committing heavy backend engineering.</a:t>
+            </a:r>
+          </a:p>
+        </p:txBody>
+      </p:sp>
+      <p:sp>
+        <p:nvSpPr>
+          <p:cNvPr id="7" name="TextBox 6"/>
+          <p:cNvSpPr txBox="1"/>
+          <p:nvPr/>
+        </p:nvSpPr>
+        <p:spPr>
+          <a:xfrm>
+            <a:off x="731520" y="6473952"/>
+            <a:ext cx="10728655" cy="292608"/>
+          </a:xfrm>
+          <a:prstGeom prst="rect">
+            <a:avLst/>
+          </a:prstGeom>
+          <a:noFill/>
+        </p:spPr>
+        <p:txBody>
+          <a:bodyPr wrap="none" lIns="0" rIns="0" tIns="0" bIns="0">
+            <a:spAutoFit/>
+          </a:bodyPr>
+          <a:lstStyle/>
+          <a:p>
+            <a:pPr>
+              <a:defRPr sz="1000">
+                <a:solidFill>
+                  <a:srgbClr val="475569"/>
+                </a:solidFill>
+              </a:defRPr>
+            </a:pPr>
+            <a:r>
+              <a:t>Maheshchandra Hegde · Technical Work Experience Presentation | Slide 11 of 13</a:t>
+            </a:r>
+          </a:p>
+        </p:txBody>
+      </p:sp>
+    </p:spTree>
+  </p:cSld>
+  <p:clrMapOvr>
+    <a:masterClrMapping/>
+  </p:clrMapOvr>
+</p:sld>
+</file>
+
+<file path=ppt/slides/slide12.xml><?xml version="1.0" encoding="utf-8"?>
+<p:sld xmlns:a="http://schemas.openxmlformats.org/drawingml/2006/main" xmlns:p="http://schemas.openxmlformats.org/presentationml/2006/main" xmlns:r="http://schemas.openxmlformats.org/officeDocument/2006/relationships">
+  <p:cSld>
+    <p:spTree>
+      <p:nvGrpSpPr>
+        <p:cNvPr id="1" name=""/>
+        <p:cNvGrpSpPr/>
+        <p:nvPr/>
+      </p:nvGrpSpPr>
+      <p:grpSpPr/>
+      <p:sp>
+        <p:nvSpPr>
+          <p:cNvPr id="2" name="Rectangle 1"/>
+          <p:cNvSpPr/>
+          <p:nvPr/>
+        </p:nvSpPr>
+        <p:spPr>
+          <a:xfrm>
+            <a:off x="0" y="0"/>
+            <a:ext cx="12191695" cy="6858000"/>
+          </a:xfrm>
+          <a:prstGeom prst="rect">
+            <a:avLst/>
+          </a:prstGeom>
+          <a:solidFill>
+            <a:srgbClr val="F8FAFC"/>
+          </a:solidFill>
+          <a:ln>
+            <a:noFill/>
+          </a:ln>
+        </p:spPr>
+        <p:style>
+          <a:lnRef idx="1">
+            <a:schemeClr val="accent1"/>
+          </a:lnRef>
+          <a:fillRef idx="3">
+            <a:schemeClr val="accent1"/>
+          </a:fillRef>
+          <a:effectRef idx="2">
+            <a:schemeClr val="accent1"/>
+          </a:effectRef>
+          <a:fontRef idx="minor">
+            <a:schemeClr val="lt1"/>
+          </a:fontRef>
+        </p:style>
+        <p:txBody>
+          <a:bodyPr rtlCol="0" anchor="ctr"/>
+          <a:lstStyle/>
+          <a:p>
+            <a:pPr algn="ctr"/>
+          </a:p>
+        </p:txBody>
+      </p:sp>
+      <p:sp>
+        <p:nvSpPr>
+          <p:cNvPr id="3" name="TextBox 2"/>
+          <p:cNvSpPr txBox="1"/>
+          <p:nvPr/>
+        </p:nvSpPr>
+        <p:spPr>
+          <a:xfrm>
+            <a:off x="731520" y="438912"/>
+            <a:ext cx="10728655" cy="640080"/>
+          </a:xfrm>
+          <a:prstGeom prst="rect">
+            <a:avLst/>
+          </a:prstGeom>
+          <a:noFill/>
+        </p:spPr>
+        <p:txBody>
+          <a:bodyPr wrap="square" lIns="0" rIns="0" tIns="0" bIns="0">
+            <a:spAutoFit/>
+          </a:bodyPr>
+          <a:lstStyle/>
+          <a:p>
+            <a:pPr>
+              <a:defRPr sz="2500" b="1">
+                <a:solidFill>
+                  <a:srgbClr val="0F172A"/>
+                </a:solidFill>
+              </a:defRPr>
+            </a:pPr>
+            <a:r>
+              <a:t>Suggestions for Future Process Improvements</a:t>
+            </a:r>
+          </a:p>
+        </p:txBody>
+      </p:sp>
+      <p:sp>
+        <p:nvSpPr>
+          <p:cNvPr id="4" name="Rectangle 3"/>
+          <p:cNvSpPr/>
+          <p:nvPr/>
+        </p:nvSpPr>
+        <p:spPr>
+          <a:xfrm>
+            <a:off x="731520" y="1170432"/>
+            <a:ext cx="10728655" cy="22860"/>
+          </a:xfrm>
+          <a:prstGeom prst="rect">
+            <a:avLst/>
+          </a:prstGeom>
+          <a:solidFill>
+            <a:srgbClr val="E2E8F0"/>
+          </a:solidFill>
+          <a:ln>
+            <a:noFill/>
+          </a:ln>
+        </p:spPr>
+        <p:style>
+          <a:lnRef idx="1">
+            <a:schemeClr val="accent1"/>
+          </a:lnRef>
+          <a:fillRef idx="3">
+            <a:schemeClr val="accent1"/>
+          </a:fillRef>
+          <a:effectRef idx="2">
+            <a:schemeClr val="accent1"/>
+          </a:effectRef>
+          <a:fontRef idx="minor">
+            <a:schemeClr val="lt1"/>
+          </a:fontRef>
+        </p:style>
+        <p:txBody>
+          <a:bodyPr rtlCol="0" anchor="ctr"/>
+          <a:lstStyle/>
+          <a:p>
+            <a:pPr algn="ctr"/>
+          </a:p>
+        </p:txBody>
+      </p:sp>
+      <p:sp>
+        <p:nvSpPr>
+          <p:cNvPr id="5" name="TextBox 4"/>
+          <p:cNvSpPr txBox="1"/>
+          <p:nvPr/>
+        </p:nvSpPr>
+        <p:spPr>
+          <a:xfrm>
+            <a:off x="731520" y="1389888"/>
+            <a:ext cx="5120640" cy="4892040"/>
+          </a:xfrm>
+          <a:prstGeom prst="rect">
+            <a:avLst/>
+          </a:prstGeom>
+          <a:noFill/>
+        </p:spPr>
+        <p:txBody>
+          <a:bodyPr wrap="square" lIns="0" rIns="0" tIns="0" bIns="0">
+            <a:spAutoFit/>
+          </a:bodyPr>
+          <a:lstStyle/>
+          <a:p>
+            <a:pPr>
+              <a:spcAft>
+                <a:spcPts val="400"/>
+              </a:spcAft>
+              <a:defRPr sz="1550" b="1">
+                <a:solidFill>
+                  <a:srgbClr val="0284C7"/>
+                </a:solidFill>
+              </a:defRPr>
+            </a:pPr>
+            <a:r>
+              <a:t>1. Automated IT Governance &amp; Self-Service Developer Portals</a:t>
+            </a:r>
+          </a:p>
+          <a:p>
+            <a:pPr>
+              <a:spcAft>
+                <a:spcPts val="800"/>
+              </a:spcAft>
+            </a:pPr>
+            <a:r>
+              <a:rPr b="1" sz="1300">
+                <a:solidFill>
+                  <a:srgbClr val="0F172A"/>
+                </a:solidFill>
+              </a:rPr>
+              <a:t>•  Objective: </a:t>
+            </a:r>
+            <a:r>
+              <a:rPr b="0" sz="1200">
+                <a:solidFill>
+                  <a:srgbClr val="475569"/>
+                </a:solidFill>
+              </a:rPr>
+              <a:t>Establish standardized internal developer platforms (IDPs) and automated infrastructure-as-code (IaC) templates for rapid, secure project spin-ups.</a:t>
+            </a:r>
+          </a:p>
+          <a:p>
+            <a:pPr>
+              <a:spcAft>
+                <a:spcPts val="800"/>
+              </a:spcAft>
+            </a:pPr>
+            <a:r>
+              <a:rPr b="1" sz="1300">
+                <a:solidFill>
+                  <a:srgbClr val="0F172A"/>
+                </a:solidFill>
+              </a:rPr>
+              <a:t>•  Expected Benefit: </a:t>
+            </a:r>
+            <a:r>
+              <a:rPr b="0" sz="1200">
+                <a:solidFill>
+                  <a:srgbClr val="475569"/>
+                </a:solidFill>
+              </a:rPr>
+              <a:t>Cuts new system bootstrapping and environment provisioning time from weeks to hours while ensuring automated compliance with corporate security baselines.</a:t>
+            </a:r>
+          </a:p>
+          <a:p>
+            <a:pPr>
+              <a:spcAft>
+                <a:spcPts val="400"/>
+              </a:spcAft>
+              <a:defRPr sz="1550" b="1">
+                <a:solidFill>
+                  <a:srgbClr val="0E7490"/>
+                </a:solidFill>
+              </a:defRPr>
+            </a:pPr>
+            <a:r>
+              <a:t>2. AI-Assisted Engineering Toolchains &amp; Code Quality Gates</a:t>
+            </a:r>
+          </a:p>
+          <a:p>
+            <a:pPr>
+              <a:spcAft>
+                <a:spcPts val="800"/>
+              </a:spcAft>
+            </a:pPr>
+            <a:r>
+              <a:rPr b="1" sz="1300">
+                <a:solidFill>
+                  <a:srgbClr val="0F172A"/>
+                </a:solidFill>
+              </a:rPr>
+              <a:t>•  Objective: </a:t>
+            </a:r>
+            <a:r>
+              <a:rPr b="0" sz="1200">
+                <a:solidFill>
+                  <a:srgbClr val="475569"/>
+                </a:solidFill>
+              </a:rPr>
+              <a:t>Integrate generative AI tooling into enterprise workflows for automated unit test generation, synthetic data simulation, and design-to-code asset generation.</a:t>
+            </a:r>
+          </a:p>
+          <a:p>
+            <a:pPr>
+              <a:spcAft>
+                <a:spcPts val="800"/>
+              </a:spcAft>
+            </a:pPr>
+            <a:r>
+              <a:rPr b="1" sz="1300">
+                <a:solidFill>
+                  <a:srgbClr val="0F172A"/>
+                </a:solidFill>
+              </a:rPr>
+              <a:t>•  Expected Benefit: </a:t>
+            </a:r>
+            <a:r>
+              <a:rPr b="0" sz="1200">
+                <a:solidFill>
+                  <a:srgbClr val="475569"/>
+                </a:solidFill>
+              </a:rPr>
+              <a:t>Boosts developer productivity by 30–40%, accelerates testing cycles, reduces boilerplate coding, and frees engineering teams to focus on strategic core systems.</a:t>
+            </a:r>
+          </a:p>
+        </p:txBody>
+      </p:sp>
+      <p:sp>
+        <p:nvSpPr>
+          <p:cNvPr id="6" name="TextBox 5"/>
+          <p:cNvSpPr txBox="1"/>
+          <p:nvPr/>
+        </p:nvSpPr>
+        <p:spPr>
+          <a:xfrm>
+            <a:off x="6309360" y="1389888"/>
+            <a:ext cx="5120640" cy="4892040"/>
+          </a:xfrm>
+          <a:prstGeom prst="rect">
+            <a:avLst/>
+          </a:prstGeom>
+          <a:noFill/>
+        </p:spPr>
+        <p:txBody>
+          <a:bodyPr wrap="square" lIns="0" rIns="0" tIns="0" bIns="0">
+            <a:spAutoFit/>
+          </a:bodyPr>
+          <a:lstStyle/>
+          <a:p>
+            <a:pPr>
+              <a:spcAft>
+                <a:spcPts val="400"/>
+              </a:spcAft>
+              <a:defRPr sz="1550" b="1">
+                <a:solidFill>
+                  <a:srgbClr val="D97706"/>
+                </a:solidFill>
+              </a:defRPr>
+            </a:pPr>
+            <a:r>
+              <a:t>3. Unified Enterprise Telemetry &amp; Proactive Observability</a:t>
+            </a:r>
+          </a:p>
+          <a:p>
+            <a:pPr>
+              <a:spcAft>
+                <a:spcPts val="800"/>
+              </a:spcAft>
+            </a:pPr>
+            <a:r>
+              <a:rPr b="1" sz="1300">
+                <a:solidFill>
+                  <a:srgbClr val="0F172A"/>
+                </a:solidFill>
+              </a:rPr>
+              <a:t>•  Objective: </a:t>
+            </a:r>
+            <a:r>
+              <a:rPr b="0" sz="1200">
+                <a:solidFill>
+                  <a:srgbClr val="475569"/>
+                </a:solidFill>
+              </a:rPr>
+              <a:t>Synthesize application performance monitoring (APM), network health, and facility sensor telemetry (BMS) into unified operational command dashboards.</a:t>
+            </a:r>
+          </a:p>
+          <a:p>
+            <a:pPr>
+              <a:spcAft>
+                <a:spcPts val="800"/>
+              </a:spcAft>
+            </a:pPr>
+            <a:r>
+              <a:rPr b="1" sz="1300">
+                <a:solidFill>
+                  <a:srgbClr val="0F172A"/>
+                </a:solidFill>
+              </a:rPr>
+              <a:t>•  Expected Benefit: </a:t>
+            </a:r>
+            <a:r>
+              <a:rPr b="0" sz="1200">
+                <a:solidFill>
+                  <a:srgbClr val="475569"/>
+                </a:solidFill>
+              </a:rPr>
+              <a:t>Transforms IT operations from reactive issue response to predictive anomaly detection, preventing service degradation and minimizing system downtime.</a:t>
+            </a:r>
+          </a:p>
+          <a:p>
+            <a:pPr>
+              <a:spcAft>
+                <a:spcPts val="400"/>
+              </a:spcAft>
+              <a:defRPr sz="1550" b="1">
+                <a:solidFill>
+                  <a:srgbClr val="109563"/>
+                </a:solidFill>
+              </a:defRPr>
+            </a:pPr>
+            <a:r>
+              <a:t>4. Structured Knowledge Sharing &amp; Continuous Upskilling</a:t>
+            </a:r>
+          </a:p>
+          <a:p>
+            <a:pPr>
+              <a:spcAft>
+                <a:spcPts val="800"/>
+              </a:spcAft>
+            </a:pPr>
+            <a:r>
+              <a:rPr b="1" sz="1300">
+                <a:solidFill>
+                  <a:srgbClr val="0F172A"/>
+                </a:solidFill>
+              </a:rPr>
+              <a:t>•  Objective: </a:t>
+            </a:r>
+            <a:r>
+              <a:rPr b="0" sz="1200">
+                <a:solidFill>
+                  <a:srgbClr val="475569"/>
+                </a:solidFill>
+              </a:rPr>
+              <a:t>Institute regular cross-functional architecture reviews, tech talk forums, and sponsored enterprise certification tracks (Cloud, Security, ITIL, Agile).</a:t>
+            </a:r>
+          </a:p>
+          <a:p>
+            <a:pPr>
+              <a:spcAft>
+                <a:spcPts val="800"/>
+              </a:spcAft>
+            </a:pPr>
+            <a:r>
+              <a:rPr b="1" sz="1300">
+                <a:solidFill>
+                  <a:srgbClr val="0F172A"/>
+                </a:solidFill>
+              </a:rPr>
+              <a:t>•  Expected Benefit: </a:t>
+            </a:r>
+            <a:r>
+              <a:rPr b="0" sz="1200">
+                <a:solidFill>
+                  <a:srgbClr val="475569"/>
+                </a:solidFill>
+              </a:rPr>
+              <a:t>Breaks down engineering silos, accelerates cross-pollination between teams, and ensures enterprise alignment with rapidly evolving modern industry standards.</a:t>
+            </a:r>
+          </a:p>
+        </p:txBody>
+      </p:sp>
+      <p:sp>
+        <p:nvSpPr>
+          <p:cNvPr id="7" name="TextBox 6"/>
+          <p:cNvSpPr txBox="1"/>
+          <p:nvPr/>
+        </p:nvSpPr>
+        <p:spPr>
+          <a:xfrm>
+            <a:off x="731520" y="6473952"/>
+            <a:ext cx="10728655" cy="292608"/>
+          </a:xfrm>
+          <a:prstGeom prst="rect">
+            <a:avLst/>
+          </a:prstGeom>
+          <a:noFill/>
+        </p:spPr>
+        <p:txBody>
+          <a:bodyPr wrap="none" lIns="0" rIns="0" tIns="0" bIns="0">
+            <a:spAutoFit/>
+          </a:bodyPr>
+          <a:lstStyle/>
+          <a:p>
+            <a:pPr>
+              <a:defRPr sz="1000">
+                <a:solidFill>
+                  <a:srgbClr val="475569"/>
+                </a:solidFill>
+              </a:defRPr>
+            </a:pPr>
+            <a:r>
+              <a:t>Maheshchandra Hegde · Technical Work Experience Presentation | Slide 12 of 13</a:t>
+            </a:r>
+          </a:p>
+        </p:txBody>
+      </p:sp>
+    </p:spTree>
+  </p:cSld>
+  <p:clrMapOvr>
+    <a:masterClrMapping/>
+  </p:clrMapOvr>
+</p:sld>
+</file>
+
+<file path=ppt/slides/slide13.xml><?xml version="1.0" encoding="utf-8"?>
+<p:sld xmlns:a="http://schemas.openxmlformats.org/drawingml/2006/main" xmlns:p="http://schemas.openxmlformats.org/presentationml/2006/main" xmlns:r="http://schemas.openxmlformats.org/officeDocument/2006/relationships">
+  <p:cSld>
+    <p:spTree>
+      <p:nvGrpSpPr>
+        <p:cNvPr id="1" name=""/>
+        <p:cNvGrpSpPr/>
+        <p:nvPr/>
+      </p:nvGrpSpPr>
+      <p:grpSpPr/>
+      <p:sp>
+        <p:nvSpPr>
+          <p:cNvPr id="2" name="Rectangle 1"/>
+          <p:cNvSpPr/>
+          <p:nvPr/>
+        </p:nvSpPr>
+        <p:spPr>
+          <a:xfrm>
+            <a:off x="0" y="0"/>
+            <a:ext cx="12191695" cy="6858000"/>
+          </a:xfrm>
+          <a:prstGeom prst="rect">
+            <a:avLst/>
+          </a:prstGeom>
+          <a:solidFill>
+            <a:srgbClr val="0F172A"/>
+          </a:solidFill>
+          <a:ln>
+            <a:noFill/>
+          </a:ln>
+        </p:spPr>
+        <p:style>
+          <a:lnRef idx="1">
+            <a:schemeClr val="accent1"/>
+          </a:lnRef>
+          <a:fillRef idx="3">
+            <a:schemeClr val="accent1"/>
+          </a:fillRef>
+          <a:effectRef idx="2">
+            <a:schemeClr val="accent1"/>
+          </a:effectRef>
+          <a:fontRef idx="minor">
+            <a:schemeClr val="lt1"/>
+          </a:fontRef>
+        </p:style>
+        <p:txBody>
+          <a:bodyPr rtlCol="0" anchor="ctr"/>
+          <a:lstStyle/>
+          <a:p>
+            <a:pPr algn="ctr"/>
+          </a:p>
+        </p:txBody>
+      </p:sp>
+      <p:sp>
+        <p:nvSpPr>
+          <p:cNvPr id="3" name="TextBox 2"/>
+          <p:cNvSpPr txBox="1"/>
+          <p:nvPr/>
+        </p:nvSpPr>
+        <p:spPr>
+          <a:xfrm>
+            <a:off x="731520" y="438912"/>
+            <a:ext cx="10728655" cy="640080"/>
+          </a:xfrm>
+          <a:prstGeom prst="rect">
+            <a:avLst/>
+          </a:prstGeom>
+          <a:noFill/>
+        </p:spPr>
+        <p:txBody>
+          <a:bodyPr wrap="square" lIns="0" rIns="0" tIns="0" bIns="0">
+            <a:spAutoFit/>
+          </a:bodyPr>
+          <a:lstStyle/>
+          <a:p>
+            <a:pPr>
+              <a:defRPr sz="2500" b="1">
+                <a:solidFill>
+                  <a:srgbClr val="FFFFFF"/>
+                </a:solidFill>
+              </a:defRPr>
+            </a:pPr>
+            <a:r>
+              <a:t>Summary</a:t>
+            </a:r>
+          </a:p>
+        </p:txBody>
+      </p:sp>
+      <p:sp>
+        <p:nvSpPr>
+          <p:cNvPr id="4" name="Rectangle 3"/>
+          <p:cNvSpPr/>
+          <p:nvPr/>
+        </p:nvSpPr>
+        <p:spPr>
+          <a:xfrm>
+            <a:off x="731520" y="1170432"/>
+            <a:ext cx="10728655" cy="22860"/>
+          </a:xfrm>
+          <a:prstGeom prst="rect">
+            <a:avLst/>
+          </a:prstGeom>
+          <a:solidFill>
+            <a:srgbClr val="334155"/>
+          </a:solidFill>
+          <a:ln>
+            <a:noFill/>
+          </a:ln>
+        </p:spPr>
+        <p:style>
+          <a:lnRef idx="1">
+            <a:schemeClr val="accent1"/>
+          </a:lnRef>
+          <a:fillRef idx="3">
+            <a:schemeClr val="accent1"/>
+          </a:fillRef>
+          <a:effectRef idx="2">
+            <a:schemeClr val="accent1"/>
+          </a:effectRef>
+          <a:fontRef idx="minor">
+            <a:schemeClr val="lt1"/>
+          </a:fontRef>
+        </p:style>
+        <p:txBody>
+          <a:bodyPr rtlCol="0" anchor="ctr"/>
+          <a:lstStyle/>
+          <a:p>
+            <a:pPr algn="ctr"/>
+          </a:p>
+        </p:txBody>
+      </p:sp>
+      <p:sp>
+        <p:nvSpPr>
+          <p:cNvPr id="5" name="TextBox 4"/>
+          <p:cNvSpPr txBox="1"/>
+          <p:nvPr/>
+        </p:nvSpPr>
+        <p:spPr>
+          <a:xfrm>
+            <a:off x="731520" y="1389888"/>
+            <a:ext cx="10728655" cy="4937760"/>
+          </a:xfrm>
+          <a:prstGeom prst="rect">
+            <a:avLst/>
+          </a:prstGeom>
+          <a:noFill/>
+        </p:spPr>
+        <p:txBody>
+          <a:bodyPr wrap="square" lIns="0" rIns="0" tIns="0" bIns="0">
+            <a:spAutoFit/>
+          </a:bodyPr>
+          <a:lstStyle/>
+          <a:p>
+            <a:pPr>
+              <a:spcAft>
+                <a:spcPts val="1400"/>
+              </a:spcAft>
+            </a:pPr>
+            <a:r>
+              <a:rPr b="1" sz="1400">
+                <a:solidFill>
+                  <a:srgbClr val="38BDF8"/>
+                </a:solidFill>
+              </a:rPr>
+              <a:t>✔  Design and Engineering Synthesis: </a:t>
+            </a:r>
+            <a:r>
+              <a:rPr b="0" sz="1250">
+                <a:solidFill>
+                  <a:srgbClr val="E2E8F0"/>
+                </a:solidFill>
+              </a:rPr>
+              <a:t>Holding a postgraduate degree in Human Interface Design (M.S. in Computing, UK) combined with an engineering degree in Electronics and Communication (B.E.), I bring a rare, balanced capability spanning both human-centered UX design and deep technical software architecture.</a:t>
+            </a:r>
+          </a:p>
+          <a:p>
+            <a:pPr>
+              <a:spcAft>
+                <a:spcPts val="1400"/>
+              </a:spcAft>
+            </a:pPr>
+            <a:r>
+              <a:rPr b="1" sz="1400">
+                <a:solidFill>
+                  <a:srgbClr val="38BDF8"/>
+                </a:solidFill>
+              </a:rPr>
+              <a:t>✔  Proven Breadth Across Startup Velocity &amp; Enterprise Scale: </a:t>
+            </a:r>
+            <a:r>
+              <a:rPr b="0" sz="1250">
+                <a:solidFill>
+                  <a:srgbClr val="E2E8F0"/>
+                </a:solidFill>
+              </a:rPr>
+              <a:t>My 18+ years of experience encompass leading agile, high-velocity startup product incubation (Technoyana, SrushtiLabs, Twitan, InnoBrik) as well as managing complex multi-year enterprise projects with stringent quality, security, and uptime mandates (Philips ICU Healthcare, Cisco Systems, UST Global, Ness).</a:t>
+            </a:r>
+          </a:p>
+          <a:p>
+            <a:pPr>
+              <a:spcAft>
+                <a:spcPts val="1400"/>
+              </a:spcAft>
+            </a:pPr>
+            <a:r>
+              <a:rPr b="1" sz="1400">
+                <a:solidFill>
+                  <a:srgbClr val="38BDF8"/>
+                </a:solidFill>
+              </a:rPr>
+              <a:t>✔  Handling Products Across Every Stage of the Lifecycle: </a:t>
+            </a:r>
+            <a:r>
+              <a:rPr b="0" sz="1250">
+                <a:solidFill>
+                  <a:srgbClr val="E2E8F0"/>
+                </a:solidFill>
+              </a:rPr>
+              <a:t>Demonstrated expertise across every product phase: early discovery prototypes, building reusable design systems, legacy system migrations (Flash to Angular/React), production deployment, security compliance, and long-term customer support.</a:t>
+            </a:r>
+          </a:p>
+          <a:p>
+            <a:pPr>
+              <a:spcAft>
+                <a:spcPts val="1400"/>
+              </a:spcAft>
+            </a:pPr>
+            <a:r>
+              <a:rPr b="1" sz="1400">
+                <a:solidFill>
+                  <a:srgbClr val="38BDF8"/>
+                </a:solidFill>
+              </a:rPr>
+              <a:t>✔  Pledge for Self-Training &amp; Certification: </a:t>
+            </a:r>
+            <a:r>
+              <a:rPr b="0" sz="1250">
+                <a:solidFill>
+                  <a:srgbClr val="E2E8F0"/>
+                </a:solidFill>
+              </a:rPr>
+              <a:t>I am fully committed to the success of the organization and team. As per the specific operational requirements of the Senior Manager – IT role, I pledge to proactively upskill myself and complete any required enterprise certifications (e.g., Cloud Architecture, ITIL, Cybersecurity, or project governance) to align completely with team goals and project needs.</a:t>
+            </a:r>
+          </a:p>
+          <a:p>
+            <a:pPr>
+              <a:defRPr sz="1200" b="1">
+                <a:solidFill>
+                  <a:srgbClr val="FFFFFF"/>
+                </a:solidFill>
+              </a:defRPr>
+            </a:pPr>
+            <a:r>
+              <a:t>Maheshchandra Hegde  |  hid.mahesh@gmail.com  |  +91 9535253329 / 7022407280  |  hegdemahesh.in</a:t>
+            </a:r>
+          </a:p>
+        </p:txBody>
+      </p:sp>
+      <p:sp>
+        <p:nvSpPr>
+          <p:cNvPr id="6" name="TextBox 5"/>
+          <p:cNvSpPr txBox="1"/>
+          <p:nvPr/>
+        </p:nvSpPr>
+        <p:spPr>
+          <a:xfrm>
+            <a:off x="731520" y="6473952"/>
+            <a:ext cx="10728655" cy="292608"/>
+          </a:xfrm>
+          <a:prstGeom prst="rect">
+            <a:avLst/>
+          </a:prstGeom>
+          <a:noFill/>
+        </p:spPr>
+        <p:txBody>
+          <a:bodyPr wrap="none" lIns="0" rIns="0" tIns="0" bIns="0">
+            <a:spAutoFit/>
+          </a:bodyPr>
+          <a:lstStyle/>
+          <a:p>
+            <a:pPr>
+              <a:defRPr sz="1000">
+                <a:solidFill>
+                  <a:srgbClr val="94A3B8"/>
+                </a:solidFill>
+              </a:defRPr>
+            </a:pPr>
+            <a:r>
+              <a:t>Maheshchandra Hegde · Technical Work Experience Presentation | Slide 13 of 13</a:t>
             </a:r>
           </a:p>
         </p:txBody>
@@ -3871,7 +5568,7 @@
               </a:defRPr>
             </a:pPr>
             <a:r>
-              <a:t>Maheshchandra Hegde · Technical Work Experience Presentation | Slide 2 of 9</a:t>
+              <a:t>Maheshchandra Hegde · Technical Work Experience Presentation | Slide 2 of 13</a:t>
             </a:r>
           </a:p>
         </p:txBody>
@@ -4326,7 +6023,7 @@
               </a:defRPr>
             </a:pPr>
             <a:r>
-              <a:t>Maheshchandra Hegde · Technical Work Experience Presentation | Slide 3 of 9</a:t>
+              <a:t>Maheshchandra Hegde · Technical Work Experience Presentation | Slide 3 of 13</a:t>
             </a:r>
           </a:p>
         </p:txBody>
@@ -4836,7 +6533,7 @@
               </a:defRPr>
             </a:pPr>
             <a:r>
-              <a:t>Maheshchandra Hegde · Technical Work Experience Presentation | Slide 4 of 9</a:t>
+              <a:t>Maheshchandra Hegde · Technical Work Experience Presentation | Slide 4 of 13</a:t>
             </a:r>
           </a:p>
         </p:txBody>
@@ -5291,7 +6988,7 @@
               </a:defRPr>
             </a:pPr>
             <a:r>
-              <a:t>Maheshchandra Hegde · Technical Work Experience Presentation | Slide 5 of 9</a:t>
+              <a:t>Maheshchandra Hegde · Technical Work Experience Presentation | Slide 5 of 13</a:t>
             </a:r>
           </a:p>
         </p:txBody>
@@ -5801,7 +7498,7 @@
               </a:defRPr>
             </a:pPr>
             <a:r>
-              <a:t>Maheshchandra Hegde · Technical Work Experience Presentation | Slide 6 of 9</a:t>
+              <a:t>Maheshchandra Hegde · Technical Work Experience Presentation | Slide 6 of 13</a:t>
             </a:r>
           </a:p>
         </p:txBody>
@@ -6311,7 +8008,7 @@
               </a:defRPr>
             </a:pPr>
             <a:r>
-              <a:t>Maheshchandra Hegde · Technical Work Experience Presentation | Slide 7 of 9</a:t>
+              <a:t>Maheshchandra Hegde · Technical Work Experience Presentation | Slide 7 of 13</a:t>
             </a:r>
           </a:p>
         </p:txBody>
@@ -6877,7 +8574,7 @@
               </a:defRPr>
             </a:pPr>
             <a:r>
-              <a:t>Maheshchandra Hegde · Technical Work Experience Presentation | Slide 8 of 9</a:t>
+              <a:t>Maheshchandra Hegde · Technical Work Experience Presentation | Slide 8 of 13</a:t>
             </a:r>
           </a:p>
         </p:txBody>
@@ -6915,7 +8612,7 @@
             <a:avLst/>
           </a:prstGeom>
           <a:solidFill>
-            <a:srgbClr val="0F172A"/>
+            <a:srgbClr val="F8FAFC"/>
           </a:solidFill>
           <a:ln>
             <a:noFill/>
@@ -6968,12 +8665,12 @@
             <a:pPr>
               <a:defRPr sz="2500" b="1">
                 <a:solidFill>
-                  <a:srgbClr val="FFFFFF"/>
-                </a:solidFill>
-              </a:defRPr>
-            </a:pPr>
-            <a:r>
-              <a:t>Summary</a:t>
+                  <a:srgbClr val="0F172A"/>
+                </a:solidFill>
+              </a:defRPr>
+            </a:pPr>
+            <a:r>
+              <a:t>Major Achievements &amp; Milestones</a:t>
             </a:r>
           </a:p>
         </p:txBody>
@@ -6993,7 +8690,7 @@
             <a:avLst/>
           </a:prstGeom>
           <a:solidFill>
-            <a:srgbClr val="334155"/>
+            <a:srgbClr val="E2E8F0"/>
           </a:solidFill>
           <a:ln>
             <a:noFill/>
@@ -7030,7 +8727,7 @@
         <p:spPr>
           <a:xfrm>
             <a:off x="731520" y="1389888"/>
-            <a:ext cx="10728655" cy="4937760"/>
+            <a:ext cx="5120640" cy="4892040"/>
           </a:xfrm>
           <a:prstGeom prst="rect">
             <a:avLst/>
@@ -7045,105 +8742,192 @@
           <a:p>
             <a:pPr>
               <a:spcAft>
-                <a:spcPts val="1400"/>
-              </a:spcAft>
-            </a:pPr>
-            <a:r>
-              <a:rPr b="1" sz="1400">
-                <a:solidFill>
-                  <a:srgbClr val="38BDF8"/>
-                </a:solidFill>
-              </a:rPr>
-              <a:t>✔  Design and Engineering Synthesis: </a:t>
-            </a:r>
-            <a:r>
-              <a:rPr b="0" sz="1250">
-                <a:solidFill>
-                  <a:srgbClr val="E2E8F0"/>
-                </a:solidFill>
-              </a:rPr>
-              <a:t>Holding a postgraduate degree in Human Interface Design (M.S. in Computing, UK) combined with an engineering degree in Electronics and Communication (B.E.), I bring a rare, balanced capability spanning both human-centered UX design and deep technical software architecture.</a:t>
-            </a:r>
-          </a:p>
-          <a:p>
-            <a:pPr>
-              <a:spcAft>
-                <a:spcPts val="1400"/>
-              </a:spcAft>
-            </a:pPr>
-            <a:r>
-              <a:rPr b="1" sz="1400">
-                <a:solidFill>
-                  <a:srgbClr val="38BDF8"/>
-                </a:solidFill>
-              </a:rPr>
-              <a:t>✔  Proven Breadth Across Startup Velocity &amp; Enterprise Scale: </a:t>
-            </a:r>
-            <a:r>
-              <a:rPr b="0" sz="1250">
-                <a:solidFill>
-                  <a:srgbClr val="E2E8F0"/>
-                </a:solidFill>
-              </a:rPr>
-              <a:t>My 18+ years of experience encompass leading agile, high-velocity startup product incubation (Technoyana, SrushtiLabs, Twitan, InnoBrik) as well as managing complex multi-year enterprise projects with stringent quality, security, and uptime mandates (Philips ICU Healthcare, Cisco Systems, UST Global, Ness).</a:t>
-            </a:r>
-          </a:p>
-          <a:p>
-            <a:pPr>
-              <a:spcAft>
-                <a:spcPts val="1400"/>
-              </a:spcAft>
-            </a:pPr>
-            <a:r>
-              <a:rPr b="1" sz="1400">
-                <a:solidFill>
-                  <a:srgbClr val="38BDF8"/>
-                </a:solidFill>
-              </a:rPr>
-              <a:t>✔  Handling Products Across Every Stage of the Lifecycle: </a:t>
-            </a:r>
-            <a:r>
-              <a:rPr b="0" sz="1250">
-                <a:solidFill>
-                  <a:srgbClr val="E2E8F0"/>
-                </a:solidFill>
-              </a:rPr>
-              <a:t>Demonstrated expertise across every product phase: early discovery prototypes, building reusable design systems, legacy system migrations (Flash to Angular/React), production deployment, security compliance, and long-term customer support.</a:t>
-            </a:r>
-          </a:p>
-          <a:p>
-            <a:pPr>
-              <a:spcAft>
-                <a:spcPts val="1400"/>
-              </a:spcAft>
-            </a:pPr>
-            <a:r>
-              <a:rPr b="1" sz="1400">
-                <a:solidFill>
-                  <a:srgbClr val="38BDF8"/>
-                </a:solidFill>
-              </a:rPr>
-              <a:t>✔  Pledge for Self-Training &amp; Certification: </a:t>
-            </a:r>
-            <a:r>
-              <a:rPr b="0" sz="1250">
-                <a:solidFill>
-                  <a:srgbClr val="E2E8F0"/>
-                </a:solidFill>
-              </a:rPr>
-              <a:t>I am fully committed to the success of the organization and team. As per the specific operational requirements of the Senior Manager – IT role, I pledge to proactively upskill myself and complete any required enterprise certifications (e.g., Cloud Architecture, ITIL, Cybersecurity, or project governance) to align completely with team goals and project needs.</a:t>
-            </a:r>
-          </a:p>
-          <a:p>
-            <a:pPr>
-              <a:defRPr sz="1200" b="1">
-                <a:solidFill>
-                  <a:srgbClr val="FFFFFF"/>
-                </a:solidFill>
-              </a:defRPr>
-            </a:pPr>
-            <a:r>
-              <a:t>Maheshchandra Hegde  |  hid.mahesh@gmail.com  |  +91 9535253329 / 7022407280  |  hegdemahesh.in</a:t>
+                <a:spcPts val="400"/>
+              </a:spcAft>
+              <a:defRPr sz="1550" b="1">
+                <a:solidFill>
+                  <a:srgbClr val="0284C7"/>
+                </a:solidFill>
+              </a:defRPr>
+            </a:pPr>
+            <a:r>
+              <a:t>1. Zero-Downtime Global Stadium Platform Migration</a:t>
+            </a:r>
+          </a:p>
+          <a:p>
+            <a:pPr>
+              <a:spcAft>
+                <a:spcPts val="700"/>
+              </a:spcAft>
+            </a:pPr>
+            <a:r>
+              <a:rPr b="1" sz="1300">
+                <a:solidFill>
+                  <a:srgbClr val="0F172A"/>
+                </a:solidFill>
+              </a:rPr>
+              <a:t>•  Platform Scope: </a:t>
+            </a:r>
+            <a:r>
+              <a:rPr b="0" sz="1200">
+                <a:solidFill>
+                  <a:srgbClr val="475569"/>
+                </a:solidFill>
+              </a:rPr>
+              <a:t>Modernized Cisco Stadium Vision Director deployed at international sporting arenas worldwide across a 4-year dedicated tenure.</a:t>
+            </a:r>
+          </a:p>
+          <a:p>
+            <a:pPr>
+              <a:spcAft>
+                <a:spcPts val="700"/>
+              </a:spcAft>
+            </a:pPr>
+            <a:r>
+              <a:rPr b="1" sz="1300">
+                <a:solidFill>
+                  <a:srgbClr val="0F172A"/>
+                </a:solidFill>
+              </a:rPr>
+              <a:t>•  Engineering Mandate: </a:t>
+            </a:r>
+            <a:r>
+              <a:rPr b="0" sz="1200">
+                <a:solidFill>
+                  <a:srgbClr val="475569"/>
+                </a:solidFill>
+              </a:rPr>
+              <a:t>Led the phased migration from legacy Adobe Flash/Flex to modern Angular and React without a single minute of venue downtime.</a:t>
+            </a:r>
+          </a:p>
+          <a:p>
+            <a:pPr>
+              <a:spcAft>
+                <a:spcPts val="700"/>
+              </a:spcAft>
+            </a:pPr>
+            <a:r>
+              <a:rPr b="1" sz="1300">
+                <a:solidFill>
+                  <a:srgbClr val="0F172A"/>
+                </a:solidFill>
+              </a:rPr>
+              <a:t>•  Operational Excellence: </a:t>
+            </a:r>
+            <a:r>
+              <a:rPr b="0" sz="1200">
+                <a:solidFill>
+                  <a:srgbClr val="475569"/>
+                </a:solidFill>
+              </a:rPr>
+              <a:t>Maintained live broadcast reliability and client workflows across dozens of active sub-applications.</a:t>
+            </a:r>
+          </a:p>
+          <a:p>
+            <a:pPr>
+              <a:spcAft>
+                <a:spcPts val="700"/>
+              </a:spcAft>
+            </a:pPr>
+            <a:r>
+              <a:rPr b="1" sz="1300">
+                <a:solidFill>
+                  <a:srgbClr val="0F172A"/>
+                </a:solidFill>
+              </a:rPr>
+              <a:t>•  Industry Honors: </a:t>
+            </a:r>
+            <a:r>
+              <a:rPr b="0" sz="1200">
+                <a:solidFill>
+                  <a:srgbClr val="475569"/>
+                </a:solidFill>
+              </a:rPr>
+              <a:t>Awarded 3 consecutive UST Global Excellence Awards (2015, 2016, 2018) for exceptional delivery and client commitment.</a:t>
+            </a:r>
+          </a:p>
+          <a:p>
+            <a:pPr>
+              <a:spcAft>
+                <a:spcPts val="400"/>
+              </a:spcAft>
+              <a:defRPr sz="1550" b="1">
+                <a:solidFill>
+                  <a:srgbClr val="0E7490"/>
+                </a:solidFill>
+              </a:defRPr>
+            </a:pPr>
+            <a:r>
+              <a:t>2. Healthcare-Grade ICU Software Delivery (Philips)</a:t>
+            </a:r>
+          </a:p>
+          <a:p>
+            <a:pPr>
+              <a:spcAft>
+                <a:spcPts val="700"/>
+              </a:spcAft>
+            </a:pPr>
+            <a:r>
+              <a:rPr b="1" sz="1300">
+                <a:solidFill>
+                  <a:srgbClr val="0F172A"/>
+                </a:solidFill>
+              </a:rPr>
+              <a:t>•  Clinical Mandate: </a:t>
+            </a:r>
+            <a:r>
+              <a:rPr b="0" sz="1200">
+                <a:solidFill>
+                  <a:srgbClr val="475569"/>
+                </a:solidFill>
+              </a:rPr>
+              <a:t>Delivered web-tier software for Philips Intellispace Critical Care &amp; Anesthesia (ICCA) operating in 24/7 ICU suites.</a:t>
+            </a:r>
+          </a:p>
+          <a:p>
+            <a:pPr>
+              <a:spcAft>
+                <a:spcPts val="700"/>
+              </a:spcAft>
+            </a:pPr>
+            <a:r>
+              <a:rPr b="1" sz="1300">
+                <a:solidFill>
+                  <a:srgbClr val="0F172A"/>
+                </a:solidFill>
+              </a:rPr>
+              <a:t>•  Stringent Standards: </a:t>
+            </a:r>
+            <a:r>
+              <a:rPr b="0" sz="1200">
+                <a:solidFill>
+                  <a:srgbClr val="475569"/>
+                </a:solidFill>
+              </a:rPr>
+              <a:t>Passed demanding hospital quality, safety, and zero-leak reliability benchmarks for mission-critical bedside monitoring.</a:t>
+            </a:r>
+          </a:p>
+          <a:p>
+            <a:pPr>
+              <a:spcAft>
+                <a:spcPts val="700"/>
+              </a:spcAft>
+            </a:pPr>
+            <a:r>
+              <a:rPr b="1" sz="1300">
+                <a:solidFill>
+                  <a:srgbClr val="0F172A"/>
+                </a:solidFill>
+              </a:rPr>
+              <a:t>•  Enterprise Security: </a:t>
+            </a:r>
+            <a:r>
+              <a:rPr b="0" sz="1200">
+                <a:solidFill>
+                  <a:srgbClr val="475569"/>
+                </a:solidFill>
+              </a:rPr>
+              <a:t>Enforced Multi-Factor Authentication (MFA), role-based access control (RBAC), and strict patient data protection policies.</a:t>
             </a:r>
           </a:p>
         </p:txBody>
@@ -7156,8 +8940,8 @@
         </p:nvSpPr>
         <p:spPr>
           <a:xfrm>
-            <a:off x="731520" y="6473952"/>
-            <a:ext cx="10728655" cy="292608"/>
+            <a:off x="6309360" y="1389888"/>
+            <a:ext cx="5120640" cy="4892040"/>
           </a:xfrm>
           <a:prstGeom prst="rect">
             <a:avLst/>
@@ -7165,6 +8949,197 @@
           <a:noFill/>
         </p:spPr>
         <p:txBody>
+          <a:bodyPr wrap="square" lIns="0" rIns="0" tIns="0" bIns="0">
+            <a:spAutoFit/>
+          </a:bodyPr>
+          <a:lstStyle/>
+          <a:p>
+            <a:pPr>
+              <a:spcAft>
+                <a:spcPts val="400"/>
+              </a:spcAft>
+              <a:defRPr sz="1550" b="1">
+                <a:solidFill>
+                  <a:srgbClr val="D97706"/>
+                </a:solidFill>
+              </a:defRPr>
+            </a:pPr>
+            <a:r>
+              <a:t>3. Generative 3D Asset &amp; Spatial AI Commercialization</a:t>
+            </a:r>
+          </a:p>
+          <a:p>
+            <a:pPr>
+              <a:spcAft>
+                <a:spcPts val="700"/>
+              </a:spcAft>
+            </a:pPr>
+            <a:r>
+              <a:rPr b="1" sz="1300">
+                <a:solidFill>
+                  <a:srgbClr val="0F172A"/>
+                </a:solidFill>
+              </a:rPr>
+              <a:t>•  Product Innovation: </a:t>
+            </a:r>
+            <a:r>
+              <a:rPr b="0" sz="1200">
+                <a:solidFill>
+                  <a:srgbClr val="475569"/>
+                </a:solidFill>
+              </a:rPr>
+              <a:t>Founded and launched Voxelforge AI (srushtilabs.com/voxelforge/), generating modular 3D assets from natural language.</a:t>
+            </a:r>
+          </a:p>
+          <a:p>
+            <a:pPr>
+              <a:spcAft>
+                <a:spcPts val="700"/>
+              </a:spcAft>
+            </a:pPr>
+            <a:r>
+              <a:rPr b="1" sz="1300">
+                <a:solidFill>
+                  <a:srgbClr val="0F172A"/>
+                </a:solidFill>
+              </a:rPr>
+              <a:t>•  Game-Ready Bundles: </a:t>
+            </a:r>
+            <a:r>
+              <a:rPr b="0" sz="1200">
+                <a:solidFill>
+                  <a:srgbClr val="475569"/>
+                </a:solidFill>
+              </a:rPr>
+              <a:t>Automated geometry synthesis, texture baking, and polygon reduction for instant Unreal Engine, Unity, and WebGL integration.</a:t>
+            </a:r>
+          </a:p>
+          <a:p>
+            <a:pPr>
+              <a:spcAft>
+                <a:spcPts val="700"/>
+              </a:spcAft>
+            </a:pPr>
+            <a:r>
+              <a:rPr b="1" sz="1300">
+                <a:solidFill>
+                  <a:srgbClr val="0F172A"/>
+                </a:solidFill>
+              </a:rPr>
+              <a:t>•  Parametric AI (Ayam3d): </a:t>
+            </a:r>
+            <a:r>
+              <a:rPr b="0" sz="1200">
+                <a:solidFill>
+                  <a:srgbClr val="475569"/>
+                </a:solidFill>
+              </a:rPr>
+              <a:t>Developed Ayam3d (ayam3d.in) for parametric 3D generation in seconds, earning early investor interest and partner validation.</a:t>
+            </a:r>
+          </a:p>
+          <a:p>
+            <a:pPr>
+              <a:spcAft>
+                <a:spcPts val="400"/>
+              </a:spcAft>
+              <a:defRPr sz="1550" b="1">
+                <a:solidFill>
+                  <a:srgbClr val="109563"/>
+                </a:solidFill>
+              </a:defRPr>
+            </a:pPr>
+            <a:r>
+              <a:t>4. Enterprise UI Design System &amp; BMS Facility Control</a:t>
+            </a:r>
+          </a:p>
+          <a:p>
+            <a:pPr>
+              <a:spcAft>
+                <a:spcPts val="700"/>
+              </a:spcAft>
+            </a:pPr>
+            <a:r>
+              <a:rPr b="1" sz="1300">
+                <a:solidFill>
+                  <a:srgbClr val="0F172A"/>
+                </a:solidFill>
+              </a:rPr>
+              <a:t>•  Design System (Moonraft): </a:t>
+            </a:r>
+            <a:r>
+              <a:rPr b="0" sz="1200">
+                <a:solidFill>
+                  <a:srgbClr val="475569"/>
+                </a:solidFill>
+              </a:rPr>
+              <a:t>Engineered centralized Web Components design system (LitElement, React, Angular) eliminating duplicated effort across project teams.</a:t>
+            </a:r>
+          </a:p>
+          <a:p>
+            <a:pPr>
+              <a:spcAft>
+                <a:spcPts val="700"/>
+              </a:spcAft>
+            </a:pPr>
+            <a:r>
+              <a:rPr b="1" sz="1300">
+                <a:solidFill>
+                  <a:srgbClr val="0F172A"/>
+                </a:solidFill>
+              </a:rPr>
+              <a:t>•  Cisco Facility Dashboard: </a:t>
+            </a:r>
+            <a:r>
+              <a:rPr b="0" sz="1200">
+                <a:solidFill>
+                  <a:srgbClr val="475569"/>
+                </a:solidFill>
+              </a:rPr>
+              <a:t>Delivered unified BMS dashboard for AHUs, chillers, and power telemetry; awarded Cisco Certificate of Appreciation (2010).</a:t>
+            </a:r>
+          </a:p>
+          <a:p>
+            <a:pPr>
+              <a:spcAft>
+                <a:spcPts val="700"/>
+              </a:spcAft>
+            </a:pPr>
+            <a:r>
+              <a:rPr b="1" sz="1300">
+                <a:solidFill>
+                  <a:srgbClr val="0F172A"/>
+                </a:solidFill>
+              </a:rPr>
+              <a:t>•  Aftermarket 3D Explorer: </a:t>
+            </a:r>
+            <a:r>
+              <a:rPr b="0" sz="1200">
+                <a:solidFill>
+                  <a:srgbClr val="475569"/>
+                </a:solidFill>
+              </a:rPr>
+              <a:t>Architected interactive 3D parts explorer at ThoughtFocus supporting millions of catalog components and e-commerce flows.</a:t>
+            </a:r>
+          </a:p>
+        </p:txBody>
+      </p:sp>
+      <p:sp>
+        <p:nvSpPr>
+          <p:cNvPr id="7" name="TextBox 6"/>
+          <p:cNvSpPr txBox="1"/>
+          <p:nvPr/>
+        </p:nvSpPr>
+        <p:spPr>
+          <a:xfrm>
+            <a:off x="731520" y="6473952"/>
+            <a:ext cx="10728655" cy="292608"/>
+          </a:xfrm>
+          <a:prstGeom prst="rect">
+            <a:avLst/>
+          </a:prstGeom>
+          <a:noFill/>
+        </p:spPr>
+        <p:txBody>
           <a:bodyPr wrap="none" lIns="0" rIns="0" tIns="0" bIns="0">
             <a:spAutoFit/>
           </a:bodyPr>
@@ -7173,12 +9148,12 @@
             <a:pPr>
               <a:defRPr sz="1000">
                 <a:solidFill>
-                  <a:srgbClr val="94A3B8"/>
-                </a:solidFill>
-              </a:defRPr>
-            </a:pPr>
-            <a:r>
-              <a:t>Maheshchandra Hegde · Technical Work Experience Presentation | Slide 9 of 9</a:t>
+                  <a:srgbClr val="475569"/>
+                </a:solidFill>
+              </a:defRPr>
+            </a:pPr>
+            <a:r>
+              <a:t>Maheshchandra Hegde · Technical Work Experience Presentation | Slide 9 of 13</a:t>
             </a:r>
           </a:p>
         </p:txBody>

--- a/obayashi_it_presentation/Obayashi_Senior_Manager_IT_Presentation_Maheshchandra_Hegde.pptx
+++ b/obayashi_it_presentation/Obayashi_Senior_Manager_IT_Presentation_Maheshchandra_Hegde.pptx
@@ -18,6 +18,7 @@
     <p:sldId id="266" r:id="rId17"/>
     <p:sldId id="267" r:id="rId18"/>
     <p:sldId id="268" r:id="rId19"/>
+    <p:sldId id="269" r:id="rId20"/>
   </p:sldIdLst>
   <p:sldSz cx="12191695" cy="6858000" type="screen4x3"/>
   <p:notesSz cx="6858000" cy="9144000"/>
@@ -3365,7 +3366,7 @@
               </a:defRPr>
             </a:pPr>
             <a:r>
-              <a:t>Maheshchandra Hegde · Technical Work Experience Presentation | Slide 1 of 13</a:t>
+              <a:t>Maheshchandra Hegde · Technical Work Experience Presentation | Slide 1 of 14</a:t>
             </a:r>
           </a:p>
         </p:txBody>
@@ -3461,7 +3462,7 @@
               </a:defRPr>
             </a:pPr>
             <a:r>
-              <a:t>Challenges Faced &amp; Resolutions Implemented</a:t>
+              <a:t>Major Achievements &amp; Milestones</a:t>
             </a:r>
           </a:p>
         </p:txBody>
@@ -3542,13 +3543,13 @@
               </a:defRPr>
             </a:pPr>
             <a:r>
-              <a:t>Challenge 1: Zero-Downtime Migration of Global Legacy Platform</a:t>
-            </a:r>
-          </a:p>
-          <a:p>
-            <a:pPr>
-              <a:spcAft>
-                <a:spcPts val="800"/>
+              <a:t>1. Zero-Downtime Global Stadium Platform Migration</a:t>
+            </a:r>
+          </a:p>
+          <a:p>
+            <a:pPr>
+              <a:spcAft>
+                <a:spcPts val="700"/>
               </a:spcAft>
             </a:pPr>
             <a:r>
@@ -3557,7 +3558,7 @@
                   <a:srgbClr val="0F172A"/>
                 </a:solidFill>
               </a:rPr>
-              <a:t>•  The Challenge: </a:t>
+              <a:t>•  Platform Scope: </a:t>
             </a:r>
             <a:r>
               <a:rPr b="0" sz="1200">
@@ -3565,13 +3566,13 @@
                   <a:srgbClr val="475569"/>
                 </a:solidFill>
               </a:rPr>
-              <a:t>Cisco Stadium Vision Director was built on deprecated Adobe Flash/Flex with extensive business logic serving global arenas. Upgrading risked operational downtime and customer disruption.</a:t>
-            </a:r>
-          </a:p>
-          <a:p>
-            <a:pPr>
-              <a:spcAft>
-                <a:spcPts val="800"/>
+              <a:t>Modernized Cisco Stadium Vision Director deployed at international sporting arenas worldwide across a 4-year dedicated tenure.</a:t>
+            </a:r>
+          </a:p>
+          <a:p>
+            <a:pPr>
+              <a:spcAft>
+                <a:spcPts val="700"/>
               </a:spcAft>
             </a:pPr>
             <a:r>
@@ -3580,7 +3581,7 @@
                   <a:srgbClr val="0F172A"/>
                 </a:solidFill>
               </a:rPr>
-              <a:t>•  Resolution Implemented: </a:t>
+              <a:t>•  Engineering Mandate: </a:t>
             </a:r>
             <a:r>
               <a:rPr b="0" sz="1200">
@@ -3588,7 +3589,53 @@
                   <a:srgbClr val="475569"/>
                 </a:solidFill>
               </a:rPr>
-              <a:t>Architected a hybrid micro-frontend bridge allowing new Angular and React modules to communicate with legacy Flex components via a shared event bus. Migrated sub-apps incrementally with zero downtime.</a:t>
+              <a:t>Led the phased migration from legacy Adobe Flash/Flex to modern Angular and React without a single minute of venue downtime.</a:t>
+            </a:r>
+          </a:p>
+          <a:p>
+            <a:pPr>
+              <a:spcAft>
+                <a:spcPts val="700"/>
+              </a:spcAft>
+            </a:pPr>
+            <a:r>
+              <a:rPr b="1" sz="1300">
+                <a:solidFill>
+                  <a:srgbClr val="0F172A"/>
+                </a:solidFill>
+              </a:rPr>
+              <a:t>•  Operational Excellence: </a:t>
+            </a:r>
+            <a:r>
+              <a:rPr b="0" sz="1200">
+                <a:solidFill>
+                  <a:srgbClr val="475569"/>
+                </a:solidFill>
+              </a:rPr>
+              <a:t>Maintained live broadcast reliability and client workflows across dozens of active sub-applications.</a:t>
+            </a:r>
+          </a:p>
+          <a:p>
+            <a:pPr>
+              <a:spcAft>
+                <a:spcPts val="700"/>
+              </a:spcAft>
+            </a:pPr>
+            <a:r>
+              <a:rPr b="1" sz="1300">
+                <a:solidFill>
+                  <a:srgbClr val="0F172A"/>
+                </a:solidFill>
+              </a:rPr>
+              <a:t>•  Industry Honors: </a:t>
+            </a:r>
+            <a:r>
+              <a:rPr b="0" sz="1200">
+                <a:solidFill>
+                  <a:srgbClr val="475569"/>
+                </a:solidFill>
+              </a:rPr>
+              <a:t>Awarded 3 consecutive UST Global Excellence Awards (2015, 2016, 2018) for exceptional delivery and client commitment.</a:t>
             </a:r>
           </a:p>
           <a:p>
@@ -3603,13 +3650,13 @@
               </a:defRPr>
             </a:pPr>
             <a:r>
-              <a:t>Challenge 2: 24/7 Clinical Bedside Memory Stability &amp; Security</a:t>
-            </a:r>
-          </a:p>
-          <a:p>
-            <a:pPr>
-              <a:spcAft>
-                <a:spcPts val="800"/>
+              <a:t>2. Healthcare-Grade ICU Software Delivery (Philips)</a:t>
+            </a:r>
+          </a:p>
+          <a:p>
+            <a:pPr>
+              <a:spcAft>
+                <a:spcPts val="700"/>
               </a:spcAft>
             </a:pPr>
             <a:r>
@@ -3618,7 +3665,7 @@
                   <a:srgbClr val="0F172A"/>
                 </a:solidFill>
               </a:rPr>
-              <a:t>•  The Challenge: </a:t>
+              <a:t>•  Clinical Mandate: </a:t>
             </a:r>
             <a:r>
               <a:rPr b="0" sz="1200">
@@ -3626,13 +3673,13 @@
                   <a:srgbClr val="475569"/>
                 </a:solidFill>
               </a:rPr>
-              <a:t>Philips ICU software operates non-stop for days. Memory leaks or UI freezes in bedside patient monitoring could lead to catastrophic clinical outcomes, amidst strict HIPAA/cybersecurity rules.</a:t>
-            </a:r>
-          </a:p>
-          <a:p>
-            <a:pPr>
-              <a:spcAft>
-                <a:spcPts val="800"/>
+              <a:t>Delivered web-tier software for Philips Intellispace Critical Care &amp; Anesthesia (ICCA) operating in 24/7 ICU suites.</a:t>
+            </a:r>
+          </a:p>
+          <a:p>
+            <a:pPr>
+              <a:spcAft>
+                <a:spcPts val="700"/>
               </a:spcAft>
             </a:pPr>
             <a:r>
@@ -3641,7 +3688,7 @@
                   <a:srgbClr val="0F172A"/>
                 </a:solidFill>
               </a:rPr>
-              <a:t>•  Resolution Implemented: </a:t>
+              <a:t>•  Stringent Standards: </a:t>
             </a:r>
             <a:r>
               <a:rPr b="0" sz="1200">
@@ -3649,7 +3696,30 @@
                   <a:srgbClr val="475569"/>
                 </a:solidFill>
               </a:rPr>
-              <a:t>Enforced strict browser profiling, deterministic lifecycle cleanup on unmount, virtualized rendering for dense telemetry streams, and institutionalized MFA/RBAC security policies.</a:t>
+              <a:t>Passed demanding hospital quality, safety, and zero-leak reliability benchmarks for mission-critical bedside monitoring.</a:t>
+            </a:r>
+          </a:p>
+          <a:p>
+            <a:pPr>
+              <a:spcAft>
+                <a:spcPts val="700"/>
+              </a:spcAft>
+            </a:pPr>
+            <a:r>
+              <a:rPr b="1" sz="1300">
+                <a:solidFill>
+                  <a:srgbClr val="0F172A"/>
+                </a:solidFill>
+              </a:rPr>
+              <a:t>•  Enterprise Security: </a:t>
+            </a:r>
+            <a:r>
+              <a:rPr b="0" sz="1200">
+                <a:solidFill>
+                  <a:srgbClr val="475569"/>
+                </a:solidFill>
+              </a:rPr>
+              <a:t>Enforced Multi-Factor Authentication (MFA), role-based access control (RBAC), and strict patient data protection policies.</a:t>
             </a:r>
           </a:p>
         </p:txBody>
@@ -3687,13 +3757,13 @@
               </a:defRPr>
             </a:pPr>
             <a:r>
-              <a:t>Challenge 3: Fragmented UI Development Across Multiple Squads</a:t>
-            </a:r>
-          </a:p>
-          <a:p>
-            <a:pPr>
-              <a:spcAft>
-                <a:spcPts val="800"/>
+              <a:t>3. Generative 3D Asset &amp; Spatial AI Commercialization</a:t>
+            </a:r>
+          </a:p>
+          <a:p>
+            <a:pPr>
+              <a:spcAft>
+                <a:spcPts val="700"/>
               </a:spcAft>
             </a:pPr>
             <a:r>
@@ -3702,7 +3772,7 @@
                   <a:srgbClr val="0F172A"/>
                 </a:solidFill>
               </a:rPr>
-              <a:t>•  The Challenge: </a:t>
+              <a:t>•  Product Innovation: </a:t>
             </a:r>
             <a:r>
               <a:rPr b="0" sz="1200">
@@ -3710,13 +3780,13 @@
                   <a:srgbClr val="475569"/>
                 </a:solidFill>
               </a:rPr>
-              <a:t>Different project teams at Moonraft / UST were independently building common UI widgets across React and Angular, leading to visual inconsistency, duplicated effort, and slower client delivery.</a:t>
-            </a:r>
-          </a:p>
-          <a:p>
-            <a:pPr>
-              <a:spcAft>
-                <a:spcPts val="800"/>
+              <a:t>Founded and launched Voxelforge AI (srushtilabs.com/voxelforge/), generating modular 3D assets from natural language.</a:t>
+            </a:r>
+          </a:p>
+          <a:p>
+            <a:pPr>
+              <a:spcAft>
+                <a:spcPts val="700"/>
               </a:spcAft>
             </a:pPr>
             <a:r>
@@ -3725,7 +3795,7 @@
                   <a:srgbClr val="0F172A"/>
                 </a:solidFill>
               </a:rPr>
-              <a:t>•  Resolution Implemented: </a:t>
+              <a:t>•  Game-Ready Bundles: </a:t>
             </a:r>
             <a:r>
               <a:rPr b="0" sz="1200">
@@ -3733,7 +3803,30 @@
                   <a:srgbClr val="475569"/>
                 </a:solidFill>
               </a:rPr>
-              <a:t>Architected an enterprise-wide UI Design System using LitElement Web Components packaged via npm. Teams across any frontend framework seamlessly consumed identical, standardized components from one repo.</a:t>
+              <a:t>Automated geometry synthesis, texture baking, and polygon reduction for instant Unreal Engine, Unity, and WebGL integration.</a:t>
+            </a:r>
+          </a:p>
+          <a:p>
+            <a:pPr>
+              <a:spcAft>
+                <a:spcPts val="700"/>
+              </a:spcAft>
+            </a:pPr>
+            <a:r>
+              <a:rPr b="1" sz="1300">
+                <a:solidFill>
+                  <a:srgbClr val="0F172A"/>
+                </a:solidFill>
+              </a:rPr>
+              <a:t>•  Parametric AI (Ayam3d): </a:t>
+            </a:r>
+            <a:r>
+              <a:rPr b="0" sz="1200">
+                <a:solidFill>
+                  <a:srgbClr val="475569"/>
+                </a:solidFill>
+              </a:rPr>
+              <a:t>Developed Ayam3d (ayam3d.in) for parametric 3D generation in seconds, earning early investor interest and partner validation.</a:t>
             </a:r>
           </a:p>
           <a:p>
@@ -3748,13 +3841,13 @@
               </a:defRPr>
             </a:pPr>
             <a:r>
-              <a:t>Challenge 4: Generative 3D Mesh Complexity &amp; Performance Lag</a:t>
-            </a:r>
-          </a:p>
-          <a:p>
-            <a:pPr>
-              <a:spcAft>
-                <a:spcPts val="800"/>
+              <a:t>4. Enterprise UI Design System &amp; BMS Facility Control</a:t>
+            </a:r>
+          </a:p>
+          <a:p>
+            <a:pPr>
+              <a:spcAft>
+                <a:spcPts val="700"/>
               </a:spcAft>
             </a:pPr>
             <a:r>
@@ -3763,7 +3856,7 @@
                   <a:srgbClr val="0F172A"/>
                 </a:solidFill>
               </a:rPr>
-              <a:t>•  The Challenge: </a:t>
+              <a:t>•  Design System (Moonraft): </a:t>
             </a:r>
             <a:r>
               <a:rPr b="0" sz="1200">
@@ -3771,13 +3864,13 @@
                   <a:srgbClr val="475569"/>
                 </a:solidFill>
               </a:rPr>
-              <a:t>Raw AI-generated 3D meshes produced disorganized vertex topology and massive polygon counts that crashed WebGL browsers and caused severe frame drops in gaming engines.</a:t>
-            </a:r>
-          </a:p>
-          <a:p>
-            <a:pPr>
-              <a:spcAft>
-                <a:spcPts val="800"/>
+              <a:t>Engineered centralized Web Components design system (LitElement, React, Angular) eliminating duplicated effort across project teams.</a:t>
+            </a:r>
+          </a:p>
+          <a:p>
+            <a:pPr>
+              <a:spcAft>
+                <a:spcPts val="700"/>
               </a:spcAft>
             </a:pPr>
             <a:r>
@@ -3786,7 +3879,7 @@
                   <a:srgbClr val="0F172A"/>
                 </a:solidFill>
               </a:rPr>
-              <a:t>•  Resolution Implemented: </a:t>
+              <a:t>•  Cisco Facility Dashboard: </a:t>
             </a:r>
             <a:r>
               <a:rPr b="0" sz="1200">
@@ -3794,7 +3887,30 @@
                   <a:srgbClr val="475569"/>
                 </a:solidFill>
               </a:rPr>
-              <a:t>Engineered automated post-processing pipelines for polygon decimation, procedural retopology, UV unwrapping, and texture baking—generating optimized, lightweight 3D models instantly.</a:t>
+              <a:t>Delivered unified BMS dashboard for AHUs, chillers, and power telemetry; awarded Cisco Certificate of Appreciation (2010).</a:t>
+            </a:r>
+          </a:p>
+          <a:p>
+            <a:pPr>
+              <a:spcAft>
+                <a:spcPts val="700"/>
+              </a:spcAft>
+            </a:pPr>
+            <a:r>
+              <a:rPr b="1" sz="1300">
+                <a:solidFill>
+                  <a:srgbClr val="0F172A"/>
+                </a:solidFill>
+              </a:rPr>
+              <a:t>•  Aftermarket 3D Explorer: </a:t>
+            </a:r>
+            <a:r>
+              <a:rPr b="0" sz="1200">
+                <a:solidFill>
+                  <a:srgbClr val="475569"/>
+                </a:solidFill>
+              </a:rPr>
+              <a:t>Architected interactive 3D parts explorer at ThoughtFocus supporting millions of catalog components and e-commerce flows.</a:t>
             </a:r>
           </a:p>
         </p:txBody>
@@ -3829,7 +3945,7 @@
               </a:defRPr>
             </a:pPr>
             <a:r>
-              <a:t>Maheshchandra Hegde · Technical Work Experience Presentation | Slide 10 of 13</a:t>
+              <a:t>Maheshchandra Hegde · Technical Work Experience Presentation | Slide 10 of 14</a:t>
             </a:r>
           </a:p>
         </p:txBody>
@@ -3925,7 +4041,7 @@
               </a:defRPr>
             </a:pPr>
             <a:r>
-              <a:t>Lessons Learned &amp; Best Practices</a:t>
+              <a:t>Challenges Faced &amp; Resolutions Implemented</a:t>
             </a:r>
           </a:p>
         </p:txBody>
@@ -4006,7 +4122,7 @@
               </a:defRPr>
             </a:pPr>
             <a:r>
-              <a:t>1. Incremental Modernization Outperforms 'Big-Bang' Rewrites</a:t>
+              <a:t>Challenge 1: Zero-Downtime Migration of Global Legacy Platform</a:t>
             </a:r>
           </a:p>
           <a:p>
@@ -4021,7 +4137,7 @@
                   <a:srgbClr val="0F172A"/>
                 </a:solidFill>
               </a:rPr>
-              <a:t>•  Lesson Learned: </a:t>
+              <a:t>•  The Challenge: </a:t>
             </a:r>
             <a:r>
               <a:rPr b="0" sz="1200">
@@ -4029,7 +4145,7 @@
                   <a:srgbClr val="475569"/>
                 </a:solidFill>
               </a:rPr>
-              <a:t>Complete system rewrites carry high risk, long delay cycles, and potential customer rejection. Incremental migration allows continuous production value delivery.</a:t>
+              <a:t>Cisco Stadium Vision Director was built on deprecated Adobe Flash/Flex with extensive business logic serving global arenas. Upgrading risked operational downtime and customer disruption.</a:t>
             </a:r>
           </a:p>
           <a:p>
@@ -4044,7 +4160,7 @@
                   <a:srgbClr val="0F172A"/>
                 </a:solidFill>
               </a:rPr>
-              <a:t>•  Best Practice: </a:t>
+              <a:t>•  Resolution Implemented: </a:t>
             </a:r>
             <a:r>
               <a:rPr b="0" sz="1200">
@@ -4052,7 +4168,7 @@
                   <a:srgbClr val="475569"/>
                 </a:solidFill>
               </a:rPr>
-              <a:t>Use strangler-fig patterns, modular micro-frontends, and backward-compatible APIs to modernize enterprise platforms step-by-step while maintaining uninterrupted business operations.</a:t>
+              <a:t>Architected a hybrid micro-frontend bridge allowing new Angular and React modules to communicate with legacy Flex components via a shared event bus. Migrated sub-apps incrementally with zero downtime.</a:t>
             </a:r>
           </a:p>
           <a:p>
@@ -4067,7 +4183,7 @@
               </a:defRPr>
             </a:pPr>
             <a:r>
-              <a:t>2. Security &amp; Compliance Must Be Architected from Day Zero</a:t>
+              <a:t>Challenge 2: 24/7 Clinical Bedside Memory Stability &amp; Security</a:t>
             </a:r>
           </a:p>
           <a:p>
@@ -4082,7 +4198,7 @@
                   <a:srgbClr val="0F172A"/>
                 </a:solidFill>
               </a:rPr>
-              <a:t>•  Lesson Learned: </a:t>
+              <a:t>•  The Challenge: </a:t>
             </a:r>
             <a:r>
               <a:rPr b="0" sz="1200">
@@ -4090,7 +4206,7 @@
                   <a:srgbClr val="475569"/>
                 </a:solidFill>
               </a:rPr>
-              <a:t>Retrofitting authentication, RBAC, encryption, and audit trails into an established product is costly, disruptive, and prone to severe security vulnerabilities.</a:t>
+              <a:t>Philips ICU software operates non-stop for days. Memory leaks or UI freezes in bedside patient monitoring could lead to catastrophic clinical outcomes, amidst strict HIPAA/cybersecurity rules.</a:t>
             </a:r>
           </a:p>
           <a:p>
@@ -4105,7 +4221,7 @@
                   <a:srgbClr val="0F172A"/>
                 </a:solidFill>
               </a:rPr>
-              <a:t>•  Best Practice: </a:t>
+              <a:t>•  Resolution Implemented: </a:t>
             </a:r>
             <a:r>
               <a:rPr b="0" sz="1200">
@@ -4113,7 +4229,7 @@
                   <a:srgbClr val="475569"/>
                 </a:solidFill>
               </a:rPr>
-              <a:t>Embed security controls (MFA, automated dependency scanning, sanitization, role matrices) into the CI/CD pipeline from inception as standard enterprise non-negotiables.</a:t>
+              <a:t>Enforced strict browser profiling, deterministic lifecycle cleanup on unmount, virtualized rendering for dense telemetry streams, and institutionalized MFA/RBAC security policies.</a:t>
             </a:r>
           </a:p>
         </p:txBody>
@@ -4146,12 +4262,12 @@
               </a:spcAft>
               <a:defRPr sz="1550" b="1">
                 <a:solidFill>
-                  <a:srgbClr val="D97706"/>
-                </a:solidFill>
-              </a:defRPr>
-            </a:pPr>
-            <a:r>
-              <a:t>3. Centralized Design Systems Deliver Compounding ROI</a:t>
+                  <a:srgbClr val="109563"/>
+                </a:solidFill>
+              </a:defRPr>
+            </a:pPr>
+            <a:r>
+              <a:t>Challenge 4: Generative 3D Mesh Complexity &amp; Performance Lag</a:t>
             </a:r>
           </a:p>
           <a:p>
@@ -4166,7 +4282,7 @@
                   <a:srgbClr val="0F172A"/>
                 </a:solidFill>
               </a:rPr>
-              <a:t>•  Lesson Learned: </a:t>
+              <a:t>•  The Challenge: </a:t>
             </a:r>
             <a:r>
               <a:rPr b="0" sz="1200">
@@ -4174,7 +4290,7 @@
                   <a:srgbClr val="475569"/>
                 </a:solidFill>
               </a:rPr>
-              <a:t>Without shared component governance, engineering squads create fragmented code, brand inconsistency, and duplicate maintenance burdens across projects.</a:t>
+              <a:t>Different project teams at Moonraft / UST were independently building common UI widgets across React and Angular, leading to visual inconsistency, duplicated effort, and slower client delivery.</a:t>
             </a:r>
           </a:p>
           <a:p>
@@ -4189,7 +4305,7 @@
                   <a:srgbClr val="0F172A"/>
                 </a:solidFill>
               </a:rPr>
-              <a:t>•  Best Practice: </a:t>
+              <a:t>•  Resolution Implemented: </a:t>
             </a:r>
             <a:r>
               <a:rPr b="0" sz="1200">
@@ -4197,22 +4313,7 @@
                   <a:srgbClr val="475569"/>
                 </a:solidFill>
               </a:rPr>
-              <a:t>Treat internal design systems as first-class products with semantic versioning, comprehensive documentation, and framework-agnostic standards (Web Components).</a:t>
-            </a:r>
-          </a:p>
-          <a:p>
-            <a:pPr>
-              <a:spcAft>
-                <a:spcPts val="400"/>
-              </a:spcAft>
-              <a:defRPr sz="1550" b="1">
-                <a:solidFill>
-                  <a:srgbClr val="109563"/>
-                </a:solidFill>
-              </a:defRPr>
-            </a:pPr>
-            <a:r>
-              <a:t>4. Early Interactive Prototyping Resolves Requirement Risk</a:t>
+              <a:t>Architected an enterprise-wide UI Design System using LitElement Web Components packaged via npm. Teams across any frontend framework seamlessly consumed identical, standardized components from one repo.</a:t>
             </a:r>
           </a:p>
           <a:p>
@@ -4227,7 +4328,7 @@
                   <a:srgbClr val="0F172A"/>
                 </a:solidFill>
               </a:rPr>
-              <a:t>•  Lesson Learned: </a:t>
+              <a:t>•  The Challenge: </a:t>
             </a:r>
             <a:r>
               <a:rPr b="0" sz="1200">
@@ -4235,7 +4336,7 @@
                   <a:srgbClr val="475569"/>
                 </a:solidFill>
               </a:rPr>
-              <a:t>Specification documents alone fail to capture operational nuances; misunderstandings surface late during production deployment when changes are 10x more costly.</a:t>
+              <a:t>Raw AI-generated 3D meshes produced disorganized vertex topology and massive polygon counts that crashed WebGL browsers and caused severe frame drops in gaming engines.</a:t>
             </a:r>
           </a:p>
           <a:p>
@@ -4250,7 +4351,7 @@
                   <a:srgbClr val="0F172A"/>
                 </a:solidFill>
               </a:rPr>
-              <a:t>•  Best Practice: </a:t>
+              <a:t>•  Resolution Implemented: </a:t>
             </a:r>
             <a:r>
               <a:rPr b="0" sz="1200">
@@ -4258,7 +4359,7 @@
                   <a:srgbClr val="475569"/>
                 </a:solidFill>
               </a:rPr>
-              <a:t>Involve stakeholders and users early using clickable, interactive prototypes to validate workflows, usability, and data contracts before committing heavy backend engineering.</a:t>
+              <a:t>Engineered automated post-processing pipelines for polygon decimation, procedural retopology, UV unwrapping, and texture baking—generating optimized, lightweight 3D models instantly.</a:t>
             </a:r>
           </a:p>
         </p:txBody>
@@ -4293,7 +4394,7 @@
               </a:defRPr>
             </a:pPr>
             <a:r>
-              <a:t>Maheshchandra Hegde · Technical Work Experience Presentation | Slide 11 of 13</a:t>
+              <a:t>Maheshchandra Hegde · Technical Work Experience Presentation | Slide 11 of 14</a:t>
             </a:r>
           </a:p>
         </p:txBody>
@@ -4389,7 +4490,7 @@
               </a:defRPr>
             </a:pPr>
             <a:r>
-              <a:t>Suggestions for Future Process Improvements</a:t>
+              <a:t>Lessons Learned &amp; Best Practices</a:t>
             </a:r>
           </a:p>
         </p:txBody>
@@ -4470,7 +4571,7 @@
               </a:defRPr>
             </a:pPr>
             <a:r>
-              <a:t>1. Automated IT Governance &amp; Self-Service Developer Portals</a:t>
+              <a:t>1. Incremental Modernization Outperforms 'Big-Bang' Rewrites</a:t>
             </a:r>
           </a:p>
           <a:p>
@@ -4485,7 +4586,7 @@
                   <a:srgbClr val="0F172A"/>
                 </a:solidFill>
               </a:rPr>
-              <a:t>•  Objective: </a:t>
+              <a:t>•  Lesson Learned: </a:t>
             </a:r>
             <a:r>
               <a:rPr b="0" sz="1200">
@@ -4493,7 +4594,7 @@
                   <a:srgbClr val="475569"/>
                 </a:solidFill>
               </a:rPr>
-              <a:t>Establish standardized internal developer platforms (IDPs) and automated infrastructure-as-code (IaC) templates for rapid, secure project spin-ups.</a:t>
+              <a:t>Complete system rewrites carry high risk, long delay cycles, and potential customer rejection. Incremental migration allows continuous production value delivery.</a:t>
             </a:r>
           </a:p>
           <a:p>
@@ -4508,7 +4609,7 @@
                   <a:srgbClr val="0F172A"/>
                 </a:solidFill>
               </a:rPr>
-              <a:t>•  Expected Benefit: </a:t>
+              <a:t>•  Best Practice: </a:t>
             </a:r>
             <a:r>
               <a:rPr b="0" sz="1200">
@@ -4516,7 +4617,7 @@
                   <a:srgbClr val="475569"/>
                 </a:solidFill>
               </a:rPr>
-              <a:t>Cuts new system bootstrapping and environment provisioning time from weeks to hours while ensuring automated compliance with corporate security baselines.</a:t>
+              <a:t>Use strangler-fig patterns, modular micro-frontends, and backward-compatible APIs to modernize enterprise platforms step-by-step while maintaining uninterrupted business operations.</a:t>
             </a:r>
           </a:p>
           <a:p>
@@ -4531,7 +4632,7 @@
               </a:defRPr>
             </a:pPr>
             <a:r>
-              <a:t>2. AI-Assisted Engineering Toolchains &amp; Code Quality Gates</a:t>
+              <a:t>2. Security &amp; Compliance Must Be Architected from Day Zero</a:t>
             </a:r>
           </a:p>
           <a:p>
@@ -4546,7 +4647,7 @@
                   <a:srgbClr val="0F172A"/>
                 </a:solidFill>
               </a:rPr>
-              <a:t>•  Objective: </a:t>
+              <a:t>•  Lesson Learned: </a:t>
             </a:r>
             <a:r>
               <a:rPr b="0" sz="1200">
@@ -4554,7 +4655,7 @@
                   <a:srgbClr val="475569"/>
                 </a:solidFill>
               </a:rPr>
-              <a:t>Integrate generative AI tooling into enterprise workflows for automated unit test generation, synthetic data simulation, and design-to-code asset generation.</a:t>
+              <a:t>Retrofitting authentication, RBAC, encryption, and audit trails into an established product is costly, disruptive, and prone to severe security vulnerabilities.</a:t>
             </a:r>
           </a:p>
           <a:p>
@@ -4569,7 +4670,7 @@
                   <a:srgbClr val="0F172A"/>
                 </a:solidFill>
               </a:rPr>
-              <a:t>•  Expected Benefit: </a:t>
+              <a:t>•  Best Practice: </a:t>
             </a:r>
             <a:r>
               <a:rPr b="0" sz="1200">
@@ -4577,7 +4678,7 @@
                   <a:srgbClr val="475569"/>
                 </a:solidFill>
               </a:rPr>
-              <a:t>Boosts developer productivity by 30–40%, accelerates testing cycles, reduces boilerplate coding, and frees engineering teams to focus on strategic core systems.</a:t>
+              <a:t>Embed security controls (MFA, automated dependency scanning, sanitization, role matrices) into the CI/CD pipeline from inception as standard enterprise non-negotiables.</a:t>
             </a:r>
           </a:p>
         </p:txBody>
@@ -4615,7 +4716,7 @@
               </a:defRPr>
             </a:pPr>
             <a:r>
-              <a:t>3. Unified Enterprise Telemetry &amp; Proactive Observability</a:t>
+              <a:t>3. Centralized Design Systems Deliver Compounding ROI</a:t>
             </a:r>
           </a:p>
           <a:p>
@@ -4630,7 +4731,7 @@
                   <a:srgbClr val="0F172A"/>
                 </a:solidFill>
               </a:rPr>
-              <a:t>•  Objective: </a:t>
+              <a:t>•  Lesson Learned: </a:t>
             </a:r>
             <a:r>
               <a:rPr b="0" sz="1200">
@@ -4638,7 +4739,7 @@
                   <a:srgbClr val="475569"/>
                 </a:solidFill>
               </a:rPr>
-              <a:t>Synthesize application performance monitoring (APM), network health, and facility sensor telemetry (BMS) into unified operational command dashboards.</a:t>
+              <a:t>Without shared component governance, engineering squads create fragmented code, brand inconsistency, and duplicate maintenance burdens across projects.</a:t>
             </a:r>
           </a:p>
           <a:p>
@@ -4653,7 +4754,7 @@
                   <a:srgbClr val="0F172A"/>
                 </a:solidFill>
               </a:rPr>
-              <a:t>•  Expected Benefit: </a:t>
+              <a:t>•  Best Practice: </a:t>
             </a:r>
             <a:r>
               <a:rPr b="0" sz="1200">
@@ -4661,7 +4762,7 @@
                   <a:srgbClr val="475569"/>
                 </a:solidFill>
               </a:rPr>
-              <a:t>Transforms IT operations from reactive issue response to predictive anomaly detection, preventing service degradation and minimizing system downtime.</a:t>
+              <a:t>Treat internal design systems as first-class products with semantic versioning, comprehensive documentation, and framework-agnostic standards (Web Components).</a:t>
             </a:r>
           </a:p>
           <a:p>
@@ -4676,7 +4777,7 @@
               </a:defRPr>
             </a:pPr>
             <a:r>
-              <a:t>4. Structured Knowledge Sharing &amp; Continuous Upskilling</a:t>
+              <a:t>4. Early Interactive Prototyping Resolves Requirement Risk</a:t>
             </a:r>
           </a:p>
           <a:p>
@@ -4691,7 +4792,7 @@
                   <a:srgbClr val="0F172A"/>
                 </a:solidFill>
               </a:rPr>
-              <a:t>•  Objective: </a:t>
+              <a:t>•  Lesson Learned: </a:t>
             </a:r>
             <a:r>
               <a:rPr b="0" sz="1200">
@@ -4699,7 +4800,7 @@
                   <a:srgbClr val="475569"/>
                 </a:solidFill>
               </a:rPr>
-              <a:t>Institute regular cross-functional architecture reviews, tech talk forums, and sponsored enterprise certification tracks (Cloud, Security, ITIL, Agile).</a:t>
+              <a:t>Specification documents alone fail to capture operational nuances; misunderstandings surface late during production deployment when changes are 10x more costly.</a:t>
             </a:r>
           </a:p>
           <a:p>
@@ -4714,7 +4815,7 @@
                   <a:srgbClr val="0F172A"/>
                 </a:solidFill>
               </a:rPr>
-              <a:t>•  Expected Benefit: </a:t>
+              <a:t>•  Best Practice: </a:t>
             </a:r>
             <a:r>
               <a:rPr b="0" sz="1200">
@@ -4722,7 +4823,7 @@
                   <a:srgbClr val="475569"/>
                 </a:solidFill>
               </a:rPr>
-              <a:t>Breaks down engineering silos, accelerates cross-pollination between teams, and ensures enterprise alignment with rapidly evolving modern industry standards.</a:t>
+              <a:t>Involve stakeholders and users early using clickable, interactive prototypes to validate workflows, usability, and data contracts before committing heavy backend engineering.</a:t>
             </a:r>
           </a:p>
         </p:txBody>
@@ -4757,7 +4858,7 @@
               </a:defRPr>
             </a:pPr>
             <a:r>
-              <a:t>Maheshchandra Hegde · Technical Work Experience Presentation | Slide 12 of 13</a:t>
+              <a:t>Maheshchandra Hegde · Technical Work Experience Presentation | Slide 12 of 14</a:t>
             </a:r>
           </a:p>
         </p:txBody>
@@ -4795,7 +4896,7 @@
             <a:avLst/>
           </a:prstGeom>
           <a:solidFill>
-            <a:srgbClr val="0F172A"/>
+            <a:srgbClr val="F8FAFC"/>
           </a:solidFill>
           <a:ln>
             <a:noFill/>
@@ -4848,12 +4949,12 @@
             <a:pPr>
               <a:defRPr sz="2500" b="1">
                 <a:solidFill>
-                  <a:srgbClr val="FFFFFF"/>
-                </a:solidFill>
-              </a:defRPr>
-            </a:pPr>
-            <a:r>
-              <a:t>Summary</a:t>
+                  <a:srgbClr val="0F172A"/>
+                </a:solidFill>
+              </a:defRPr>
+            </a:pPr>
+            <a:r>
+              <a:t>Suggestions for Future Process Improvements</a:t>
             </a:r>
           </a:p>
         </p:txBody>
@@ -4873,7 +4974,7 @@
             <a:avLst/>
           </a:prstGeom>
           <a:solidFill>
-            <a:srgbClr val="334155"/>
+            <a:srgbClr val="E2E8F0"/>
           </a:solidFill>
           <a:ln>
             <a:noFill/>
@@ -4910,7 +5011,7 @@
         <p:spPr>
           <a:xfrm>
             <a:off x="731520" y="1389888"/>
-            <a:ext cx="10728655" cy="4937760"/>
+            <a:ext cx="5120640" cy="4892040"/>
           </a:xfrm>
           <a:prstGeom prst="rect">
             <a:avLst/>
@@ -4925,105 +5026,123 @@
           <a:p>
             <a:pPr>
               <a:spcAft>
-                <a:spcPts val="1400"/>
-              </a:spcAft>
-            </a:pPr>
-            <a:r>
-              <a:rPr b="1" sz="1400">
-                <a:solidFill>
-                  <a:srgbClr val="38BDF8"/>
-                </a:solidFill>
-              </a:rPr>
-              <a:t>✔  Design and Engineering Synthesis: </a:t>
-            </a:r>
-            <a:r>
-              <a:rPr b="0" sz="1250">
-                <a:solidFill>
-                  <a:srgbClr val="E2E8F0"/>
-                </a:solidFill>
-              </a:rPr>
-              <a:t>Holding a postgraduate degree in Human Interface Design (M.S. in Computing, UK) combined with an engineering degree in Electronics and Communication (B.E.), I bring a rare, balanced capability spanning both human-centered UX design and deep technical software architecture.</a:t>
-            </a:r>
-          </a:p>
-          <a:p>
-            <a:pPr>
-              <a:spcAft>
-                <a:spcPts val="1400"/>
-              </a:spcAft>
-            </a:pPr>
-            <a:r>
-              <a:rPr b="1" sz="1400">
-                <a:solidFill>
-                  <a:srgbClr val="38BDF8"/>
-                </a:solidFill>
-              </a:rPr>
-              <a:t>✔  Proven Breadth Across Startup Velocity &amp; Enterprise Scale: </a:t>
-            </a:r>
-            <a:r>
-              <a:rPr b="0" sz="1250">
-                <a:solidFill>
-                  <a:srgbClr val="E2E8F0"/>
-                </a:solidFill>
-              </a:rPr>
-              <a:t>My 18+ years of experience encompass leading agile, high-velocity startup product incubation (Technoyana, SrushtiLabs, Twitan, InnoBrik) as well as managing complex multi-year enterprise projects with stringent quality, security, and uptime mandates (Philips ICU Healthcare, Cisco Systems, UST Global, Ness).</a:t>
-            </a:r>
-          </a:p>
-          <a:p>
-            <a:pPr>
-              <a:spcAft>
-                <a:spcPts val="1400"/>
-              </a:spcAft>
-            </a:pPr>
-            <a:r>
-              <a:rPr b="1" sz="1400">
-                <a:solidFill>
-                  <a:srgbClr val="38BDF8"/>
-                </a:solidFill>
-              </a:rPr>
-              <a:t>✔  Handling Products Across Every Stage of the Lifecycle: </a:t>
-            </a:r>
-            <a:r>
-              <a:rPr b="0" sz="1250">
-                <a:solidFill>
-                  <a:srgbClr val="E2E8F0"/>
-                </a:solidFill>
-              </a:rPr>
-              <a:t>Demonstrated expertise across every product phase: early discovery prototypes, building reusable design systems, legacy system migrations (Flash to Angular/React), production deployment, security compliance, and long-term customer support.</a:t>
-            </a:r>
-          </a:p>
-          <a:p>
-            <a:pPr>
-              <a:spcAft>
-                <a:spcPts val="1400"/>
-              </a:spcAft>
-            </a:pPr>
-            <a:r>
-              <a:rPr b="1" sz="1400">
-                <a:solidFill>
-                  <a:srgbClr val="38BDF8"/>
-                </a:solidFill>
-              </a:rPr>
-              <a:t>✔  Pledge for Self-Training &amp; Certification: </a:t>
-            </a:r>
-            <a:r>
-              <a:rPr b="0" sz="1250">
-                <a:solidFill>
-                  <a:srgbClr val="E2E8F0"/>
-                </a:solidFill>
-              </a:rPr>
-              <a:t>I am fully committed to the success of the organization and team. As per the specific operational requirements of the Senior Manager – IT role, I pledge to proactively upskill myself and complete any required enterprise certifications (e.g., Cloud Architecture, ITIL, Cybersecurity, or project governance) to align completely with team goals and project needs.</a:t>
-            </a:r>
-          </a:p>
-          <a:p>
-            <a:pPr>
-              <a:defRPr sz="1200" b="1">
-                <a:solidFill>
-                  <a:srgbClr val="FFFFFF"/>
-                </a:solidFill>
-              </a:defRPr>
-            </a:pPr>
-            <a:r>
-              <a:t>Maheshchandra Hegde  |  hid.mahesh@gmail.com  |  +91 9535253329 / 7022407280  |  hegdemahesh.in</a:t>
+                <a:spcPts val="400"/>
+              </a:spcAft>
+              <a:defRPr sz="1550" b="1">
+                <a:solidFill>
+                  <a:srgbClr val="0284C7"/>
+                </a:solidFill>
+              </a:defRPr>
+            </a:pPr>
+            <a:r>
+              <a:t>1. Automated IT Governance &amp; Self-Service Developer Portals</a:t>
+            </a:r>
+          </a:p>
+          <a:p>
+            <a:pPr>
+              <a:spcAft>
+                <a:spcPts val="800"/>
+              </a:spcAft>
+            </a:pPr>
+            <a:r>
+              <a:rPr b="1" sz="1300">
+                <a:solidFill>
+                  <a:srgbClr val="0F172A"/>
+                </a:solidFill>
+              </a:rPr>
+              <a:t>•  Objective: </a:t>
+            </a:r>
+            <a:r>
+              <a:rPr b="0" sz="1200">
+                <a:solidFill>
+                  <a:srgbClr val="475569"/>
+                </a:solidFill>
+              </a:rPr>
+              <a:t>Establish standardized internal developer platforms (IDPs) and automated infrastructure-as-code (IaC) templates for rapid, secure project spin-ups.</a:t>
+            </a:r>
+          </a:p>
+          <a:p>
+            <a:pPr>
+              <a:spcAft>
+                <a:spcPts val="800"/>
+              </a:spcAft>
+            </a:pPr>
+            <a:r>
+              <a:rPr b="1" sz="1300">
+                <a:solidFill>
+                  <a:srgbClr val="0F172A"/>
+                </a:solidFill>
+              </a:rPr>
+              <a:t>•  Expected Benefit: </a:t>
+            </a:r>
+            <a:r>
+              <a:rPr b="0" sz="1200">
+                <a:solidFill>
+                  <a:srgbClr val="475569"/>
+                </a:solidFill>
+              </a:rPr>
+              <a:t>Cuts new system bootstrapping and environment provisioning time from weeks to hours while ensuring automated compliance with corporate security baselines.</a:t>
+            </a:r>
+          </a:p>
+          <a:p>
+            <a:pPr>
+              <a:spcAft>
+                <a:spcPts val="400"/>
+              </a:spcAft>
+              <a:defRPr sz="1550" b="1">
+                <a:solidFill>
+                  <a:srgbClr val="0E7490"/>
+                </a:solidFill>
+              </a:defRPr>
+            </a:pPr>
+            <a:r>
+              <a:t>2. AI-Assisted Engineering Toolchains &amp; Code Quality Gates</a:t>
+            </a:r>
+          </a:p>
+          <a:p>
+            <a:pPr>
+              <a:spcAft>
+                <a:spcPts val="800"/>
+              </a:spcAft>
+            </a:pPr>
+            <a:r>
+              <a:rPr b="1" sz="1300">
+                <a:solidFill>
+                  <a:srgbClr val="0F172A"/>
+                </a:solidFill>
+              </a:rPr>
+              <a:t>•  Objective: </a:t>
+            </a:r>
+            <a:r>
+              <a:rPr b="0" sz="1200">
+                <a:solidFill>
+                  <a:srgbClr val="475569"/>
+                </a:solidFill>
+              </a:rPr>
+              <a:t>Integrate generative AI tooling into enterprise workflows for automated unit test generation, synthetic data simulation, and design-to-code asset generation.</a:t>
+            </a:r>
+          </a:p>
+          <a:p>
+            <a:pPr>
+              <a:spcAft>
+                <a:spcPts val="800"/>
+              </a:spcAft>
+            </a:pPr>
+            <a:r>
+              <a:rPr b="1" sz="1300">
+                <a:solidFill>
+                  <a:srgbClr val="0F172A"/>
+                </a:solidFill>
+              </a:rPr>
+              <a:t>•  Expected Benefit: </a:t>
+            </a:r>
+            <a:r>
+              <a:rPr b="0" sz="1200">
+                <a:solidFill>
+                  <a:srgbClr val="475569"/>
+                </a:solidFill>
+              </a:rPr>
+              <a:t>Boosts developer productivity by 30–40%, accelerates testing cycles, reduces boilerplate coding, and frees engineering teams to focus on strategic core systems.</a:t>
             </a:r>
           </a:p>
         </p:txBody>
@@ -5036,8 +5155,8 @@
         </p:nvSpPr>
         <p:spPr>
           <a:xfrm>
-            <a:off x="731520" y="6473952"/>
-            <a:ext cx="10728655" cy="292608"/>
+            <a:off x="6309360" y="1389888"/>
+            <a:ext cx="5120640" cy="4892040"/>
           </a:xfrm>
           <a:prstGeom prst="rect">
             <a:avLst/>
@@ -5045,6 +5164,151 @@
           <a:noFill/>
         </p:spPr>
         <p:txBody>
+          <a:bodyPr wrap="square" lIns="0" rIns="0" tIns="0" bIns="0">
+            <a:spAutoFit/>
+          </a:bodyPr>
+          <a:lstStyle/>
+          <a:p>
+            <a:pPr>
+              <a:spcAft>
+                <a:spcPts val="400"/>
+              </a:spcAft>
+              <a:defRPr sz="1550" b="1">
+                <a:solidFill>
+                  <a:srgbClr val="D97706"/>
+                </a:solidFill>
+              </a:defRPr>
+            </a:pPr>
+            <a:r>
+              <a:t>3. Unified Enterprise Telemetry &amp; Proactive Observability</a:t>
+            </a:r>
+          </a:p>
+          <a:p>
+            <a:pPr>
+              <a:spcAft>
+                <a:spcPts val="800"/>
+              </a:spcAft>
+            </a:pPr>
+            <a:r>
+              <a:rPr b="1" sz="1300">
+                <a:solidFill>
+                  <a:srgbClr val="0F172A"/>
+                </a:solidFill>
+              </a:rPr>
+              <a:t>•  Objective: </a:t>
+            </a:r>
+            <a:r>
+              <a:rPr b="0" sz="1200">
+                <a:solidFill>
+                  <a:srgbClr val="475569"/>
+                </a:solidFill>
+              </a:rPr>
+              <a:t>Synthesize application performance monitoring (APM), network health, and facility sensor telemetry (BMS) into unified operational command dashboards.</a:t>
+            </a:r>
+          </a:p>
+          <a:p>
+            <a:pPr>
+              <a:spcAft>
+                <a:spcPts val="800"/>
+              </a:spcAft>
+            </a:pPr>
+            <a:r>
+              <a:rPr b="1" sz="1300">
+                <a:solidFill>
+                  <a:srgbClr val="0F172A"/>
+                </a:solidFill>
+              </a:rPr>
+              <a:t>•  Expected Benefit: </a:t>
+            </a:r>
+            <a:r>
+              <a:rPr b="0" sz="1200">
+                <a:solidFill>
+                  <a:srgbClr val="475569"/>
+                </a:solidFill>
+              </a:rPr>
+              <a:t>Transforms IT operations from reactive issue response to predictive anomaly detection, preventing service degradation and minimizing system downtime.</a:t>
+            </a:r>
+          </a:p>
+          <a:p>
+            <a:pPr>
+              <a:spcAft>
+                <a:spcPts val="400"/>
+              </a:spcAft>
+              <a:defRPr sz="1550" b="1">
+                <a:solidFill>
+                  <a:srgbClr val="109563"/>
+                </a:solidFill>
+              </a:defRPr>
+            </a:pPr>
+            <a:r>
+              <a:t>4. Structured Knowledge Sharing &amp; Continuous Upskilling</a:t>
+            </a:r>
+          </a:p>
+          <a:p>
+            <a:pPr>
+              <a:spcAft>
+                <a:spcPts val="800"/>
+              </a:spcAft>
+            </a:pPr>
+            <a:r>
+              <a:rPr b="1" sz="1300">
+                <a:solidFill>
+                  <a:srgbClr val="0F172A"/>
+                </a:solidFill>
+              </a:rPr>
+              <a:t>•  Objective: </a:t>
+            </a:r>
+            <a:r>
+              <a:rPr b="0" sz="1200">
+                <a:solidFill>
+                  <a:srgbClr val="475569"/>
+                </a:solidFill>
+              </a:rPr>
+              <a:t>Institute regular cross-functional architecture reviews, tech talk forums, and sponsored enterprise certification tracks (Cloud, Security, ITIL, Agile).</a:t>
+            </a:r>
+          </a:p>
+          <a:p>
+            <a:pPr>
+              <a:spcAft>
+                <a:spcPts val="800"/>
+              </a:spcAft>
+            </a:pPr>
+            <a:r>
+              <a:rPr b="1" sz="1300">
+                <a:solidFill>
+                  <a:srgbClr val="0F172A"/>
+                </a:solidFill>
+              </a:rPr>
+              <a:t>•  Expected Benefit: </a:t>
+            </a:r>
+            <a:r>
+              <a:rPr b="0" sz="1200">
+                <a:solidFill>
+                  <a:srgbClr val="475569"/>
+                </a:solidFill>
+              </a:rPr>
+              <a:t>Breaks down engineering silos, accelerates cross-pollination between teams, and ensures enterprise alignment with rapidly evolving modern industry standards.</a:t>
+            </a:r>
+          </a:p>
+        </p:txBody>
+      </p:sp>
+      <p:sp>
+        <p:nvSpPr>
+          <p:cNvPr id="7" name="TextBox 6"/>
+          <p:cNvSpPr txBox="1"/>
+          <p:nvPr/>
+        </p:nvSpPr>
+        <p:spPr>
+          <a:xfrm>
+            <a:off x="731520" y="6473952"/>
+            <a:ext cx="10728655" cy="292608"/>
+          </a:xfrm>
+          <a:prstGeom prst="rect">
+            <a:avLst/>
+          </a:prstGeom>
+          <a:noFill/>
+        </p:spPr>
+        <p:txBody>
           <a:bodyPr wrap="none" lIns="0" rIns="0" tIns="0" bIns="0">
             <a:spAutoFit/>
           </a:bodyPr>
@@ -5053,12 +5317,313 @@
             <a:pPr>
               <a:defRPr sz="1000">
                 <a:solidFill>
+                  <a:srgbClr val="475569"/>
+                </a:solidFill>
+              </a:defRPr>
+            </a:pPr>
+            <a:r>
+              <a:t>Maheshchandra Hegde · Technical Work Experience Presentation | Slide 13 of 14</a:t>
+            </a:r>
+          </a:p>
+        </p:txBody>
+      </p:sp>
+    </p:spTree>
+  </p:cSld>
+  <p:clrMapOvr>
+    <a:masterClrMapping/>
+  </p:clrMapOvr>
+</p:sld>
+</file>
+
+<file path=ppt/slides/slide14.xml><?xml version="1.0" encoding="utf-8"?>
+<p:sld xmlns:a="http://schemas.openxmlformats.org/drawingml/2006/main" xmlns:p="http://schemas.openxmlformats.org/presentationml/2006/main" xmlns:r="http://schemas.openxmlformats.org/officeDocument/2006/relationships">
+  <p:cSld>
+    <p:spTree>
+      <p:nvGrpSpPr>
+        <p:cNvPr id="1" name=""/>
+        <p:cNvGrpSpPr/>
+        <p:nvPr/>
+      </p:nvGrpSpPr>
+      <p:grpSpPr/>
+      <p:sp>
+        <p:nvSpPr>
+          <p:cNvPr id="2" name="Rectangle 1"/>
+          <p:cNvSpPr/>
+          <p:nvPr/>
+        </p:nvSpPr>
+        <p:spPr>
+          <a:xfrm>
+            <a:off x="0" y="0"/>
+            <a:ext cx="12191695" cy="6858000"/>
+          </a:xfrm>
+          <a:prstGeom prst="rect">
+            <a:avLst/>
+          </a:prstGeom>
+          <a:solidFill>
+            <a:srgbClr val="0F172A"/>
+          </a:solidFill>
+          <a:ln>
+            <a:noFill/>
+          </a:ln>
+        </p:spPr>
+        <p:style>
+          <a:lnRef idx="1">
+            <a:schemeClr val="accent1"/>
+          </a:lnRef>
+          <a:fillRef idx="3">
+            <a:schemeClr val="accent1"/>
+          </a:fillRef>
+          <a:effectRef idx="2">
+            <a:schemeClr val="accent1"/>
+          </a:effectRef>
+          <a:fontRef idx="minor">
+            <a:schemeClr val="lt1"/>
+          </a:fontRef>
+        </p:style>
+        <p:txBody>
+          <a:bodyPr rtlCol="0" anchor="ctr"/>
+          <a:lstStyle/>
+          <a:p>
+            <a:pPr algn="ctr"/>
+          </a:p>
+        </p:txBody>
+      </p:sp>
+      <p:sp>
+        <p:nvSpPr>
+          <p:cNvPr id="3" name="TextBox 2"/>
+          <p:cNvSpPr txBox="1"/>
+          <p:nvPr/>
+        </p:nvSpPr>
+        <p:spPr>
+          <a:xfrm>
+            <a:off x="731520" y="438912"/>
+            <a:ext cx="10728655" cy="640080"/>
+          </a:xfrm>
+          <a:prstGeom prst="rect">
+            <a:avLst/>
+          </a:prstGeom>
+          <a:noFill/>
+        </p:spPr>
+        <p:txBody>
+          <a:bodyPr wrap="square" lIns="0" rIns="0" tIns="0" bIns="0">
+            <a:spAutoFit/>
+          </a:bodyPr>
+          <a:lstStyle/>
+          <a:p>
+            <a:pPr>
+              <a:defRPr sz="2500" b="1">
+                <a:solidFill>
+                  <a:srgbClr val="FFFFFF"/>
+                </a:solidFill>
+              </a:defRPr>
+            </a:pPr>
+            <a:r>
+              <a:t>Summary</a:t>
+            </a:r>
+          </a:p>
+        </p:txBody>
+      </p:sp>
+      <p:sp>
+        <p:nvSpPr>
+          <p:cNvPr id="4" name="Rectangle 3"/>
+          <p:cNvSpPr/>
+          <p:nvPr/>
+        </p:nvSpPr>
+        <p:spPr>
+          <a:xfrm>
+            <a:off x="731520" y="1170432"/>
+            <a:ext cx="10728655" cy="22860"/>
+          </a:xfrm>
+          <a:prstGeom prst="rect">
+            <a:avLst/>
+          </a:prstGeom>
+          <a:solidFill>
+            <a:srgbClr val="334155"/>
+          </a:solidFill>
+          <a:ln>
+            <a:noFill/>
+          </a:ln>
+        </p:spPr>
+        <p:style>
+          <a:lnRef idx="1">
+            <a:schemeClr val="accent1"/>
+          </a:lnRef>
+          <a:fillRef idx="3">
+            <a:schemeClr val="accent1"/>
+          </a:fillRef>
+          <a:effectRef idx="2">
+            <a:schemeClr val="accent1"/>
+          </a:effectRef>
+          <a:fontRef idx="minor">
+            <a:schemeClr val="lt1"/>
+          </a:fontRef>
+        </p:style>
+        <p:txBody>
+          <a:bodyPr rtlCol="0" anchor="ctr"/>
+          <a:lstStyle/>
+          <a:p>
+            <a:pPr algn="ctr"/>
+          </a:p>
+        </p:txBody>
+      </p:sp>
+      <p:sp>
+        <p:nvSpPr>
+          <p:cNvPr id="5" name="TextBox 4"/>
+          <p:cNvSpPr txBox="1"/>
+          <p:nvPr/>
+        </p:nvSpPr>
+        <p:spPr>
+          <a:xfrm>
+            <a:off x="731520" y="1389888"/>
+            <a:ext cx="10728655" cy="4937760"/>
+          </a:xfrm>
+          <a:prstGeom prst="rect">
+            <a:avLst/>
+          </a:prstGeom>
+          <a:noFill/>
+        </p:spPr>
+        <p:txBody>
+          <a:bodyPr wrap="square" lIns="0" rIns="0" tIns="0" bIns="0">
+            <a:spAutoFit/>
+          </a:bodyPr>
+          <a:lstStyle/>
+          <a:p>
+            <a:pPr>
+              <a:spcAft>
+                <a:spcPts val="1400"/>
+              </a:spcAft>
+            </a:pPr>
+            <a:r>
+              <a:rPr b="1" sz="1400">
+                <a:solidFill>
+                  <a:srgbClr val="38BDF8"/>
+                </a:solidFill>
+              </a:rPr>
+              <a:t>✔  Design and Engineering Synthesis: </a:t>
+            </a:r>
+            <a:r>
+              <a:rPr b="0" sz="1250">
+                <a:solidFill>
+                  <a:srgbClr val="E2E8F0"/>
+                </a:solidFill>
+              </a:rPr>
+              <a:t>Holding a postgraduate degree in Human Interface Design (M.S. in Computing, UK) combined with an engineering degree in Electronics and Communication (B.E.), I bring a rare, balanced capability spanning both human-centered UX design and deep technical software architecture.</a:t>
+            </a:r>
+          </a:p>
+          <a:p>
+            <a:pPr>
+              <a:spcAft>
+                <a:spcPts val="1400"/>
+              </a:spcAft>
+            </a:pPr>
+            <a:r>
+              <a:rPr b="1" sz="1400">
+                <a:solidFill>
+                  <a:srgbClr val="38BDF8"/>
+                </a:solidFill>
+              </a:rPr>
+              <a:t>✔  Proven Breadth Across Startup Velocity &amp; Enterprise Scale: </a:t>
+            </a:r>
+            <a:r>
+              <a:rPr b="0" sz="1250">
+                <a:solidFill>
+                  <a:srgbClr val="E2E8F0"/>
+                </a:solidFill>
+              </a:rPr>
+              <a:t>My 18+ years of experience encompass leading agile, high-velocity startup product incubation (Technoyana, SrushtiLabs, Twitan, InnoBrik) as well as managing complex multi-year enterprise projects with stringent quality, security, and uptime mandates (Philips ICU Healthcare, Cisco Systems, UST Global, Ness).</a:t>
+            </a:r>
+          </a:p>
+          <a:p>
+            <a:pPr>
+              <a:spcAft>
+                <a:spcPts val="1400"/>
+              </a:spcAft>
+            </a:pPr>
+            <a:r>
+              <a:rPr b="1" sz="1400">
+                <a:solidFill>
+                  <a:srgbClr val="38BDF8"/>
+                </a:solidFill>
+              </a:rPr>
+              <a:t>✔  Handling Products Across Every Stage of the Lifecycle: </a:t>
+            </a:r>
+            <a:r>
+              <a:rPr b="0" sz="1250">
+                <a:solidFill>
+                  <a:srgbClr val="E2E8F0"/>
+                </a:solidFill>
+              </a:rPr>
+              <a:t>Demonstrated expertise across every product phase: early discovery prototypes, building reusable design systems, legacy system migrations (Flash to Angular/React), production deployment, security compliance, and long-term customer support.</a:t>
+            </a:r>
+          </a:p>
+          <a:p>
+            <a:pPr>
+              <a:spcAft>
+                <a:spcPts val="1400"/>
+              </a:spcAft>
+            </a:pPr>
+            <a:r>
+              <a:rPr b="1" sz="1400">
+                <a:solidFill>
+                  <a:srgbClr val="38BDF8"/>
+                </a:solidFill>
+              </a:rPr>
+              <a:t>✔  Pledge for Self-Training &amp; Certification: </a:t>
+            </a:r>
+            <a:r>
+              <a:rPr b="0" sz="1250">
+                <a:solidFill>
+                  <a:srgbClr val="E2E8F0"/>
+                </a:solidFill>
+              </a:rPr>
+              <a:t>I am fully committed to the success of the organization and team. As per the specific operational requirements of the Senior Manager – IT role, I pledge to proactively upskill myself and complete any required enterprise certifications (e.g., Cloud Architecture, ITIL, Cybersecurity, or project governance) to align completely with team goals and project needs.</a:t>
+            </a:r>
+          </a:p>
+          <a:p>
+            <a:pPr>
+              <a:defRPr sz="1200" b="1">
+                <a:solidFill>
+                  <a:srgbClr val="FFFFFF"/>
+                </a:solidFill>
+              </a:defRPr>
+            </a:pPr>
+            <a:r>
+              <a:t>Maheshchandra Hegde  |  hid.mahesh@gmail.com  |  +91 9535253329 / 7022407280  |  hegdemahesh.in</a:t>
+            </a:r>
+          </a:p>
+        </p:txBody>
+      </p:sp>
+      <p:sp>
+        <p:nvSpPr>
+          <p:cNvPr id="6" name="TextBox 5"/>
+          <p:cNvSpPr txBox="1"/>
+          <p:nvPr/>
+        </p:nvSpPr>
+        <p:spPr>
+          <a:xfrm>
+            <a:off x="731520" y="6473952"/>
+            <a:ext cx="10728655" cy="292608"/>
+          </a:xfrm>
+          <a:prstGeom prst="rect">
+            <a:avLst/>
+          </a:prstGeom>
+          <a:noFill/>
+        </p:spPr>
+        <p:txBody>
+          <a:bodyPr wrap="none" lIns="0" rIns="0" tIns="0" bIns="0">
+            <a:spAutoFit/>
+          </a:bodyPr>
+          <a:lstStyle/>
+          <a:p>
+            <a:pPr>
+              <a:defRPr sz="1000">
+                <a:solidFill>
                   <a:srgbClr val="94A3B8"/>
                 </a:solidFill>
               </a:defRPr>
             </a:pPr>
             <a:r>
-              <a:t>Maheshchandra Hegde · Technical Work Experience Presentation | Slide 13 of 13</a:t>
+              <a:t>Maheshchandra Hegde · Technical Work Experience Presentation | Slide 14 of 14</a:t>
             </a:r>
           </a:p>
         </p:txBody>
@@ -5568,7 +6133,7 @@
               </a:defRPr>
             </a:pPr>
             <a:r>
-              <a:t>Maheshchandra Hegde · Technical Work Experience Presentation | Slide 2 of 13</a:t>
+              <a:t>Maheshchandra Hegde · Technical Work Experience Presentation | Slide 2 of 14</a:t>
             </a:r>
           </a:p>
         </p:txBody>
@@ -6023,7 +6588,7 @@
               </a:defRPr>
             </a:pPr>
             <a:r>
-              <a:t>Maheshchandra Hegde · Technical Work Experience Presentation | Slide 3 of 13</a:t>
+              <a:t>Maheshchandra Hegde · Technical Work Experience Presentation | Slide 3 of 14</a:t>
             </a:r>
           </a:p>
         </p:txBody>
@@ -6533,7 +7098,7 @@
               </a:defRPr>
             </a:pPr>
             <a:r>
-              <a:t>Maheshchandra Hegde · Technical Work Experience Presentation | Slide 4 of 13</a:t>
+              <a:t>Maheshchandra Hegde · Technical Work Experience Presentation | Slide 4 of 14</a:t>
             </a:r>
           </a:p>
         </p:txBody>
@@ -6988,7 +7553,7 @@
               </a:defRPr>
             </a:pPr>
             <a:r>
-              <a:t>Maheshchandra Hegde · Technical Work Experience Presentation | Slide 5 of 13</a:t>
+              <a:t>Maheshchandra Hegde · Technical Work Experience Presentation | Slide 5 of 14</a:t>
             </a:r>
           </a:p>
         </p:txBody>
@@ -7498,7 +8063,7 @@
               </a:defRPr>
             </a:pPr>
             <a:r>
-              <a:t>Maheshchandra Hegde · Technical Work Experience Presentation | Slide 6 of 13</a:t>
+              <a:t>Maheshchandra Hegde · Technical Work Experience Presentation | Slide 6 of 14</a:t>
             </a:r>
           </a:p>
         </p:txBody>
@@ -7953,29 +8518,6 @@
               <a:t>Led an engineering team to develop an automated parking payment mobile application with real-time slot occupancy tracking.</a:t>
             </a:r>
           </a:p>
-          <a:p>
-            <a:pPr>
-              <a:spcAft>
-                <a:spcPts val="900"/>
-              </a:spcAft>
-            </a:pPr>
-            <a:r>
-              <a:rPr b="1" sz="1300">
-                <a:solidFill>
-                  <a:srgbClr val="0F172A"/>
-                </a:solidFill>
-              </a:rPr>
-              <a:t>•  Flight Simulation Visuals (CAE): </a:t>
-            </a:r>
-            <a:r>
-              <a:rPr b="0" sz="1200">
-                <a:solidFill>
-                  <a:srgbClr val="475569"/>
-                </a:solidFill>
-              </a:rPr>
-              <a:t>Visual Database Developer creating 3D terrain and aircraft simulation databases under locked 60 FPS budgets.</a:t>
-            </a:r>
-          </a:p>
         </p:txBody>
       </p:sp>
       <p:sp>
@@ -8008,7 +8550,7 @@
               </a:defRPr>
             </a:pPr>
             <a:r>
-              <a:t>Maheshchandra Hegde · Technical Work Experience Presentation | Slide 7 of 13</a:t>
+              <a:t>Maheshchandra Hegde · Technical Work Experience Presentation | Slide 7 of 14</a:t>
             </a:r>
           </a:p>
         </p:txBody>
@@ -8104,7 +8646,7 @@
               </a:defRPr>
             </a:pPr>
             <a:r>
-              <a:t>Comprehensive Skillset Matrix Across 18+ Years</a:t>
+              <a:t>CAE Simulation Technologies: Flight Simulation Visual Databases</a:t>
             </a:r>
           </a:p>
         </p:txBody>
@@ -8161,7 +8703,7 @@
         <p:spPr>
           <a:xfrm>
             <a:off x="731520" y="1389888"/>
-            <a:ext cx="5120640" cy="2331720"/>
+            <a:ext cx="5120640" cy="4892040"/>
           </a:xfrm>
           <a:prstGeom prst="rect">
             <a:avLst/>
@@ -8176,76 +8718,146 @@
           <a:p>
             <a:pPr>
               <a:spcAft>
-                <a:spcPts val="800"/>
-              </a:spcAft>
-              <a:defRPr sz="1550" b="1">
-                <a:solidFill>
-                  <a:srgbClr val="0284C7"/>
-                </a:solidFill>
-              </a:defRPr>
-            </a:pPr>
-            <a:r>
-              <a:t>1. Scalable Frontend &amp; Modular Architecture</a:t>
-            </a:r>
-          </a:p>
-          <a:p>
-            <a:pPr>
-              <a:spcAft>
-                <a:spcPts val="500"/>
-              </a:spcAft>
-              <a:defRPr sz="1200">
-                <a:solidFill>
-                  <a:srgbClr val="1E293B"/>
-                </a:solidFill>
-              </a:defRPr>
-            </a:pPr>
-            <a:r>
-              <a:t>•  React, Angular, TypeScript, JavaScript, Node.js, Web Components (LitElement).</a:t>
-            </a:r>
-          </a:p>
-          <a:p>
-            <a:pPr>
-              <a:spcAft>
-                <a:spcPts val="500"/>
-              </a:spcAft>
-              <a:defRPr sz="1200">
-                <a:solidFill>
-                  <a:srgbClr val="1E293B"/>
-                </a:solidFill>
-              </a:defRPr>
-            </a:pPr>
-            <a:r>
-              <a:t>•  Architected Enterprise UI Design Systems used across diverse development teams.</a:t>
-            </a:r>
-          </a:p>
-          <a:p>
-            <a:pPr>
-              <a:spcAft>
-                <a:spcPts val="500"/>
-              </a:spcAft>
-              <a:defRPr sz="1200">
-                <a:solidFill>
-                  <a:srgbClr val="1E293B"/>
-                </a:solidFill>
-              </a:defRPr>
-            </a:pPr>
-            <a:r>
-              <a:t>•  State management, micro-frontends, REST, WebSockets, and streaming telemetry.</a:t>
-            </a:r>
-          </a:p>
-          <a:p>
-            <a:pPr>
-              <a:spcAft>
-                <a:spcPts val="500"/>
-              </a:spcAft>
-              <a:defRPr sz="1200">
-                <a:solidFill>
-                  <a:srgbClr val="1E293B"/>
-                </a:solidFill>
-              </a:defRPr>
-            </a:pPr>
-            <a:r>
-              <a:t>•  4-year zero-downtime migration of Cisco Stadium Vision from Flash/Flex to Angular/React.</a:t>
+                <a:spcPts val="200"/>
+              </a:spcAft>
+              <a:defRPr sz="2300" b="1">
+                <a:solidFill>
+                  <a:srgbClr val="0F172A"/>
+                </a:solidFill>
+              </a:defRPr>
+            </a:pPr>
+            <a:r>
+              <a:t>CAE Flight Simulation Systems</a:t>
+            </a:r>
+          </a:p>
+          <a:p>
+            <a:pPr>
+              <a:spcAft>
+                <a:spcPts val="1400"/>
+              </a:spcAft>
+              <a:defRPr sz="1300" b="1">
+                <a:solidFill>
+                  <a:srgbClr val="0E7490"/>
+                </a:solidFill>
+              </a:defRPr>
+            </a:pPr>
+            <a:r>
+              <a:t>Visual Database Developer | Sep 2007 – Apr 2008</a:t>
+            </a:r>
+          </a:p>
+          <a:p>
+            <a:pPr>
+              <a:spcAft>
+                <a:spcPts val="900"/>
+              </a:spcAft>
+            </a:pPr>
+            <a:r>
+              <a:rPr b="1" sz="1300">
+                <a:solidFill>
+                  <a:srgbClr val="0F172A"/>
+                </a:solidFill>
+              </a:rPr>
+              <a:t>•  Company Profile: </a:t>
+            </a:r>
+            <a:r>
+              <a:rPr b="0" sz="1200">
+                <a:solidFill>
+                  <a:srgbClr val="475569"/>
+                </a:solidFill>
+              </a:rPr>
+              <a:t>CAE (Canadian Aeronautical Engineering) — world leader in high-fidelity civil aviation and military aircraft flight simulation training devices.</a:t>
+            </a:r>
+          </a:p>
+          <a:p>
+            <a:pPr>
+              <a:spcAft>
+                <a:spcPts val="900"/>
+              </a:spcAft>
+            </a:pPr>
+            <a:r>
+              <a:rPr b="1" sz="1300">
+                <a:solidFill>
+                  <a:srgbClr val="0F172A"/>
+                </a:solidFill>
+              </a:rPr>
+              <a:t>•  Visual Database Engineering: </a:t>
+            </a:r>
+            <a:r>
+              <a:rPr b="0" sz="1200">
+                <a:solidFill>
+                  <a:srgbClr val="475569"/>
+                </a:solidFill>
+              </a:rPr>
+              <a:t>Focused on the design, modeling, and generation of comprehensive visual databases that power real-time full flight simulators (FFS).</a:t>
+            </a:r>
+          </a:p>
+          <a:p>
+            <a:pPr>
+              <a:spcAft>
+                <a:spcPts val="900"/>
+              </a:spcAft>
+            </a:pPr>
+            <a:r>
+              <a:rPr b="1" sz="1300">
+                <a:solidFill>
+                  <a:srgbClr val="0F172A"/>
+                </a:solidFill>
+              </a:rPr>
+              <a:t>•  Synthetic World Creation: </a:t>
+            </a:r>
+            <a:r>
+              <a:rPr b="0" sz="1200">
+                <a:solidFill>
+                  <a:srgbClr val="475569"/>
+                </a:solidFill>
+              </a:rPr>
+              <a:t>Constructed accurate, high-fidelity 3D synthetic environments including runways, airport terminals, terrain elevation, navigation lighting, and approach corridors.</a:t>
+            </a:r>
+          </a:p>
+          <a:p>
+            <a:pPr>
+              <a:spcAft>
+                <a:spcPts val="900"/>
+              </a:spcAft>
+            </a:pPr>
+            <a:r>
+              <a:rPr b="1" sz="1300">
+                <a:solidFill>
+                  <a:srgbClr val="0F172A"/>
+                </a:solidFill>
+              </a:rPr>
+              <a:t>•  Structural &amp; Coordinate Precision: </a:t>
+            </a:r>
+            <a:r>
+              <a:rPr b="0" sz="1200">
+                <a:solidFill>
+                  <a:srgbClr val="475569"/>
+                </a:solidFill>
+              </a:rPr>
+              <a:t>Fed precise 3D visual, topographical, and structural collision details into databases calibrated to real-world GIS coordinates.</a:t>
+            </a:r>
+          </a:p>
+          <a:p>
+            <a:pPr>
+              <a:spcAft>
+                <a:spcPts val="900"/>
+              </a:spcAft>
+            </a:pPr>
+            <a:r>
+              <a:rPr b="1" sz="1300">
+                <a:solidFill>
+                  <a:srgbClr val="0F172A"/>
+                </a:solidFill>
+              </a:rPr>
+              <a:t>•  Civil &amp; Military Applications: </a:t>
+            </a:r>
+            <a:r>
+              <a:rPr b="0" sz="1200">
+                <a:solidFill>
+                  <a:srgbClr val="475569"/>
+                </a:solidFill>
+              </a:rPr>
+              <a:t>Supported pilot training simulators for major commercial airliners as well as defense tactical training aircraft.</a:t>
             </a:r>
           </a:p>
         </p:txBody>
@@ -8259,7 +8871,7 @@
         <p:spPr>
           <a:xfrm>
             <a:off x="6309360" y="1389888"/>
-            <a:ext cx="5120640" cy="2331720"/>
+            <a:ext cx="5120640" cy="4892040"/>
           </a:xfrm>
           <a:prstGeom prst="rect">
             <a:avLst/>
@@ -8274,76 +8886,146 @@
           <a:p>
             <a:pPr>
               <a:spcAft>
-                <a:spcPts val="800"/>
-              </a:spcAft>
-              <a:defRPr sz="1550" b="1">
-                <a:solidFill>
-                  <a:srgbClr val="0E7490"/>
-                </a:solidFill>
-              </a:defRPr>
-            </a:pPr>
-            <a:r>
-              <a:t>2. Spatial 3D, CAD &amp; Generative AI</a:t>
-            </a:r>
-          </a:p>
-          <a:p>
-            <a:pPr>
-              <a:spcAft>
-                <a:spcPts val="500"/>
-              </a:spcAft>
-              <a:defRPr sz="1200">
-                <a:solidFill>
-                  <a:srgbClr val="1E293B"/>
-                </a:solidFill>
-              </a:defRPr>
-            </a:pPr>
-            <a:r>
-              <a:t>•  Voxelforge AI (generative modular 3D for Unreal/Unity/WebGL) &amp; Ayam3d (parametric 3D).</a:t>
-            </a:r>
-          </a:p>
-          <a:p>
-            <a:pPr>
-              <a:spcAft>
-                <a:spcPts val="500"/>
-              </a:spcAft>
-              <a:defRPr sz="1200">
-                <a:solidFill>
-                  <a:srgbClr val="1E293B"/>
-                </a:solidFill>
-              </a:defRPr>
-            </a:pPr>
-            <a:r>
-              <a:t>•  Architectural 3D visualization, animated walkthroughs, and CAD/CAM CNC machine development.</a:t>
-            </a:r>
-          </a:p>
-          <a:p>
-            <a:pPr>
-              <a:spcAft>
-                <a:spcPts val="500"/>
-              </a:spcAft>
-              <a:defRPr sz="1200">
-                <a:solidFill>
-                  <a:srgbClr val="1E293B"/>
-                </a:solidFill>
-              </a:defRPr>
-            </a:pPr>
-            <a:r>
-              <a:t>•  Flight simulator 3D terrain and aircraft databases under locked 60 FPS budgets (CAE).</a:t>
-            </a:r>
-          </a:p>
-          <a:p>
-            <a:pPr>
-              <a:spcAft>
-                <a:spcPts val="500"/>
-              </a:spcAft>
-              <a:defRPr sz="1200">
-                <a:solidFill>
-                  <a:srgbClr val="1E293B"/>
-                </a:solidFill>
-              </a:defRPr>
-            </a:pPr>
-            <a:r>
-              <a:t>•  Interactive 3D parts inspection explorer supporting millions of catalog components.</a:t>
+                <a:spcPts val="200"/>
+              </a:spcAft>
+              <a:defRPr sz="2300" b="1">
+                <a:solidFill>
+                  <a:srgbClr val="0F172A"/>
+                </a:solidFill>
+              </a:defRPr>
+            </a:pPr>
+            <a:r>
+              <a:t>3D Modeling, Texturing &amp; Performance</a:t>
+            </a:r>
+          </a:p>
+          <a:p>
+            <a:pPr>
+              <a:spcAft>
+                <a:spcPts val="1400"/>
+              </a:spcAft>
+              <a:defRPr sz="1300" b="1">
+                <a:solidFill>
+                  <a:srgbClr val="0284C7"/>
+                </a:solidFill>
+              </a:defRPr>
+            </a:pPr>
+            <a:r>
+              <a:t>Photorealistic Texture Generation &amp; Locked 60 FPS Budgets</a:t>
+            </a:r>
+          </a:p>
+          <a:p>
+            <a:pPr>
+              <a:spcAft>
+                <a:spcPts val="900"/>
+              </a:spcAft>
+            </a:pPr>
+            <a:r>
+              <a:rPr b="1" sz="1300">
+                <a:solidFill>
+                  <a:srgbClr val="0F172A"/>
+                </a:solidFill>
+              </a:rPr>
+              <a:t>•  3D Modeling &amp; Environment: </a:t>
+            </a:r>
+            <a:r>
+              <a:rPr b="0" sz="1200">
+                <a:solidFill>
+                  <a:srgbClr val="475569"/>
+                </a:solidFill>
+              </a:rPr>
+              <a:t>Created detailed 3D models of aircraft structures, ground support vehicles, building structures, and regional geographic landmarks.</a:t>
+            </a:r>
+          </a:p>
+          <a:p>
+            <a:pPr>
+              <a:spcAft>
+                <a:spcPts val="900"/>
+              </a:spcAft>
+            </a:pPr>
+            <a:r>
+              <a:rPr b="1" sz="1300">
+                <a:solidFill>
+                  <a:srgbClr val="0F172A"/>
+                </a:solidFill>
+              </a:rPr>
+              <a:t>•  Photoshop Texture Pipelines: </a:t>
+            </a:r>
+            <a:r>
+              <a:rPr b="0" sz="1200">
+                <a:solidFill>
+                  <a:srgbClr val="475569"/>
+                </a:solidFill>
+              </a:rPr>
+              <a:t>Generated realistic multi-layer textures using Adobe Photoshop, including satellite imagery alignment, seasonal variants, and night-vision/illumination maps.</a:t>
+            </a:r>
+          </a:p>
+          <a:p>
+            <a:pPr>
+              <a:spcAft>
+                <a:spcPts val="900"/>
+              </a:spcAft>
+            </a:pPr>
+            <a:r>
+              <a:rPr b="1" sz="1300">
+                <a:solidFill>
+                  <a:srgbClr val="0F172A"/>
+                </a:solidFill>
+              </a:rPr>
+              <a:t>•  Locked 60 FPS Real-Time Budgets: </a:t>
+            </a:r>
+            <a:r>
+              <a:rPr b="0" sz="1200">
+                <a:solidFill>
+                  <a:srgbClr val="475569"/>
+                </a:solidFill>
+              </a:rPr>
+              <a:t>Engineered all 3D assets under strict polygon limits and Level of Detail (LOD) hierarchies to guarantee zero-latency 60 FPS simulator performance.</a:t>
+            </a:r>
+          </a:p>
+          <a:p>
+            <a:pPr>
+              <a:spcAft>
+                <a:spcPts val="900"/>
+              </a:spcAft>
+            </a:pPr>
+            <a:r>
+              <a:rPr b="1" sz="1300">
+                <a:solidFill>
+                  <a:srgbClr val="0F172A"/>
+                </a:solidFill>
+              </a:rPr>
+              <a:t>•  Pure Visual &amp; Design Craft: </a:t>
+            </a:r>
+            <a:r>
+              <a:rPr b="0" sz="1200">
+                <a:solidFill>
+                  <a:srgbClr val="475569"/>
+                </a:solidFill>
+              </a:rPr>
+              <a:t>Specialized design role bridging artistic 3D visualization, photorealistic texturing, and rigorous database integration.</a:t>
+            </a:r>
+          </a:p>
+          <a:p>
+            <a:pPr>
+              <a:spcAft>
+                <a:spcPts val="900"/>
+              </a:spcAft>
+            </a:pPr>
+            <a:r>
+              <a:rPr b="1" sz="1300">
+                <a:solidFill>
+                  <a:srgbClr val="0F172A"/>
+                </a:solidFill>
+              </a:rPr>
+              <a:t>•  Foundational 3D Discipline: </a:t>
+            </a:r>
+            <a:r>
+              <a:rPr b="0" sz="1200">
+                <a:solidFill>
+                  <a:srgbClr val="475569"/>
+                </a:solidFill>
+              </a:rPr>
+              <a:t>This early career experience in simulation systems established the deep graphics and spatial computing expertise that later led to Voxelforge AI and Ayam3d.</a:t>
             </a:r>
           </a:p>
         </p:txBody>
@@ -8356,8 +9038,8 @@
         </p:nvSpPr>
         <p:spPr>
           <a:xfrm>
-            <a:off x="731520" y="3913632"/>
-            <a:ext cx="5120640" cy="2331720"/>
+            <a:off x="731520" y="6473952"/>
+            <a:ext cx="10728655" cy="292608"/>
           </a:xfrm>
           <a:prstGeom prst="rect">
             <a:avLst/>
@@ -8365,202 +9047,6 @@
           <a:noFill/>
         </p:spPr>
         <p:txBody>
-          <a:bodyPr wrap="square" lIns="0" rIns="0" tIns="0" bIns="0">
-            <a:spAutoFit/>
-          </a:bodyPr>
-          <a:lstStyle/>
-          <a:p>
-            <a:pPr>
-              <a:spcAft>
-                <a:spcPts val="800"/>
-              </a:spcAft>
-              <a:defRPr sz="1550" b="1">
-                <a:solidFill>
-                  <a:srgbClr val="D97706"/>
-                </a:solidFill>
-              </a:defRPr>
-            </a:pPr>
-            <a:r>
-              <a:t>3. High Reliability &amp; Operational Security</a:t>
-            </a:r>
-          </a:p>
-          <a:p>
-            <a:pPr>
-              <a:spcAft>
-                <a:spcPts val="500"/>
-              </a:spcAft>
-              <a:defRPr sz="1200">
-                <a:solidFill>
-                  <a:srgbClr val="1E293B"/>
-                </a:solidFill>
-              </a:defRPr>
-            </a:pPr>
-            <a:r>
-              <a:t>•  Delivered Philips ICU healthcare software meeting stringent clinical safety benchmarks.</a:t>
-            </a:r>
-          </a:p>
-          <a:p>
-            <a:pPr>
-              <a:spcAft>
-                <a:spcPts val="500"/>
-              </a:spcAft>
-              <a:defRPr sz="1200">
-                <a:solidFill>
-                  <a:srgbClr val="1E293B"/>
-                </a:solidFill>
-              </a:defRPr>
-            </a:pPr>
-            <a:r>
-              <a:t>•  Strict cybersecurity enforcement: Multi-factor authentication (MFA), XSS mitigation, RBAC.</a:t>
-            </a:r>
-          </a:p>
-          <a:p>
-            <a:pPr>
-              <a:spcAft>
-                <a:spcPts val="500"/>
-              </a:spcAft>
-              <a:defRPr sz="1200">
-                <a:solidFill>
-                  <a:srgbClr val="1E293B"/>
-                </a:solidFill>
-              </a:defRPr>
-            </a:pPr>
-            <a:r>
-              <a:t>•  Offline-first mobile architecture (IndexedDB/Service Workers) with conflict-free cloud sync.</a:t>
-            </a:r>
-          </a:p>
-          <a:p>
-            <a:pPr>
-              <a:spcAft>
-                <a:spcPts val="500"/>
-              </a:spcAft>
-              <a:defRPr sz="1200">
-                <a:solidFill>
-                  <a:srgbClr val="1E293B"/>
-                </a:solidFill>
-              </a:defRPr>
-            </a:pPr>
-            <a:r>
-              <a:t>•  Building Management System (BMS) unified interface for AHUs, chillers, and telemetry (Cisco).</a:t>
-            </a:r>
-          </a:p>
-        </p:txBody>
-      </p:sp>
-      <p:sp>
-        <p:nvSpPr>
-          <p:cNvPr id="8" name="TextBox 7"/>
-          <p:cNvSpPr txBox="1"/>
-          <p:nvPr/>
-        </p:nvSpPr>
-        <p:spPr>
-          <a:xfrm>
-            <a:off x="6309360" y="3913632"/>
-            <a:ext cx="5120640" cy="2331720"/>
-          </a:xfrm>
-          <a:prstGeom prst="rect">
-            <a:avLst/>
-          </a:prstGeom>
-          <a:noFill/>
-        </p:spPr>
-        <p:txBody>
-          <a:bodyPr wrap="square" lIns="0" rIns="0" tIns="0" bIns="0">
-            <a:spAutoFit/>
-          </a:bodyPr>
-          <a:lstStyle/>
-          <a:p>
-            <a:pPr>
-              <a:spcAft>
-                <a:spcPts val="800"/>
-              </a:spcAft>
-              <a:defRPr sz="1550" b="1">
-                <a:solidFill>
-                  <a:srgbClr val="109563"/>
-                </a:solidFill>
-              </a:defRPr>
-            </a:pPr>
-            <a:r>
-              <a:t>4. Agile Leadership &amp; Startup Delivery</a:t>
-            </a:r>
-          </a:p>
-          <a:p>
-            <a:pPr>
-              <a:spcAft>
-                <a:spcPts val="500"/>
-              </a:spcAft>
-              <a:defRPr sz="1200">
-                <a:solidFill>
-                  <a:srgbClr val="1E293B"/>
-                </a:solidFill>
-              </a:defRPr>
-            </a:pPr>
-            <a:r>
-              <a:t>•  Founder/Co-Founder: Technoyana, Twitan.com, SrushtiLabs, InnoBrik.</a:t>
-            </a:r>
-          </a:p>
-          <a:p>
-            <a:pPr>
-              <a:spcAft>
-                <a:spcPts val="500"/>
-              </a:spcAft>
-              <a:defRPr sz="1200">
-                <a:solidFill>
-                  <a:srgbClr val="1E293B"/>
-                </a:solidFill>
-              </a:defRPr>
-            </a:pPr>
-            <a:r>
-              <a:t>•  Associate Project Manager at UST Global; managed cross-functional squads for Cisco.</a:t>
-            </a:r>
-          </a:p>
-          <a:p>
-            <a:pPr>
-              <a:spcAft>
-                <a:spcPts val="500"/>
-              </a:spcAft>
-              <a:defRPr sz="1200">
-                <a:solidFill>
-                  <a:srgbClr val="1E293B"/>
-                </a:solidFill>
-              </a:defRPr>
-            </a:pPr>
-            <a:r>
-              <a:t>•  Early user prototyping, design-to-code pipelines, and active stakeholder governance.</a:t>
-            </a:r>
-          </a:p>
-          <a:p>
-            <a:pPr>
-              <a:spcAft>
-                <a:spcPts val="500"/>
-              </a:spcAft>
-              <a:defRPr sz="1200">
-                <a:solidFill>
-                  <a:srgbClr val="1E293B"/>
-                </a:solidFill>
-              </a:defRPr>
-            </a:pPr>
-            <a:r>
-              <a:t>•  Honored with Cisco Appreciation (2010) and 3 UST Global Excellence Awards (2015, 2016, 2018).</a:t>
-            </a:r>
-          </a:p>
-        </p:txBody>
-      </p:sp>
-      <p:sp>
-        <p:nvSpPr>
-          <p:cNvPr id="9" name="TextBox 8"/>
-          <p:cNvSpPr txBox="1"/>
-          <p:nvPr/>
-        </p:nvSpPr>
-        <p:spPr>
-          <a:xfrm>
-            <a:off x="731520" y="6473952"/>
-            <a:ext cx="10728655" cy="292608"/>
-          </a:xfrm>
-          <a:prstGeom prst="rect">
-            <a:avLst/>
-          </a:prstGeom>
-          <a:noFill/>
-        </p:spPr>
-        <p:txBody>
           <a:bodyPr wrap="none" lIns="0" rIns="0" tIns="0" bIns="0">
             <a:spAutoFit/>
           </a:bodyPr>
@@ -8574,7 +9060,7 @@
               </a:defRPr>
             </a:pPr>
             <a:r>
-              <a:t>Maheshchandra Hegde · Technical Work Experience Presentation | Slide 8 of 13</a:t>
+              <a:t>Maheshchandra Hegde · Technical Work Experience Presentation | Slide 8 of 14</a:t>
             </a:r>
           </a:p>
         </p:txBody>
@@ -8670,7 +9156,7 @@
               </a:defRPr>
             </a:pPr>
             <a:r>
-              <a:t>Major Achievements &amp; Milestones</a:t>
+              <a:t>Comprehensive Skillset Matrix Across 18+ Years</a:t>
             </a:r>
           </a:p>
         </p:txBody>
@@ -8727,7 +9213,7 @@
         <p:spPr>
           <a:xfrm>
             <a:off x="731520" y="1389888"/>
-            <a:ext cx="5120640" cy="4892040"/>
+            <a:ext cx="5120640" cy="2331720"/>
           </a:xfrm>
           <a:prstGeom prst="rect">
             <a:avLst/>
@@ -8742,7 +9228,7 @@
           <a:p>
             <a:pPr>
               <a:spcAft>
-                <a:spcPts val="400"/>
+                <a:spcPts val="800"/>
               </a:spcAft>
               <a:defRPr sz="1550" b="1">
                 <a:solidFill>
@@ -8751,183 +9237,67 @@
               </a:defRPr>
             </a:pPr>
             <a:r>
-              <a:t>1. Zero-Downtime Global Stadium Platform Migration</a:t>
-            </a:r>
-          </a:p>
-          <a:p>
-            <a:pPr>
-              <a:spcAft>
-                <a:spcPts val="700"/>
-              </a:spcAft>
-            </a:pPr>
-            <a:r>
-              <a:rPr b="1" sz="1300">
-                <a:solidFill>
-                  <a:srgbClr val="0F172A"/>
-                </a:solidFill>
-              </a:rPr>
-              <a:t>•  Platform Scope: </a:t>
-            </a:r>
-            <a:r>
-              <a:rPr b="0" sz="1200">
-                <a:solidFill>
-                  <a:srgbClr val="475569"/>
-                </a:solidFill>
-              </a:rPr>
-              <a:t>Modernized Cisco Stadium Vision Director deployed at international sporting arenas worldwide across a 4-year dedicated tenure.</a:t>
-            </a:r>
-          </a:p>
-          <a:p>
-            <a:pPr>
-              <a:spcAft>
-                <a:spcPts val="700"/>
-              </a:spcAft>
-            </a:pPr>
-            <a:r>
-              <a:rPr b="1" sz="1300">
-                <a:solidFill>
-                  <a:srgbClr val="0F172A"/>
-                </a:solidFill>
-              </a:rPr>
-              <a:t>•  Engineering Mandate: </a:t>
-            </a:r>
-            <a:r>
-              <a:rPr b="0" sz="1200">
-                <a:solidFill>
-                  <a:srgbClr val="475569"/>
-                </a:solidFill>
-              </a:rPr>
-              <a:t>Led the phased migration from legacy Adobe Flash/Flex to modern Angular and React without a single minute of venue downtime.</a:t>
-            </a:r>
-          </a:p>
-          <a:p>
-            <a:pPr>
-              <a:spcAft>
-                <a:spcPts val="700"/>
-              </a:spcAft>
-            </a:pPr>
-            <a:r>
-              <a:rPr b="1" sz="1300">
-                <a:solidFill>
-                  <a:srgbClr val="0F172A"/>
-                </a:solidFill>
-              </a:rPr>
-              <a:t>•  Operational Excellence: </a:t>
-            </a:r>
-            <a:r>
-              <a:rPr b="0" sz="1200">
-                <a:solidFill>
-                  <a:srgbClr val="475569"/>
-                </a:solidFill>
-              </a:rPr>
-              <a:t>Maintained live broadcast reliability and client workflows across dozens of active sub-applications.</a:t>
-            </a:r>
-          </a:p>
-          <a:p>
-            <a:pPr>
-              <a:spcAft>
-                <a:spcPts val="700"/>
-              </a:spcAft>
-            </a:pPr>
-            <a:r>
-              <a:rPr b="1" sz="1300">
-                <a:solidFill>
-                  <a:srgbClr val="0F172A"/>
-                </a:solidFill>
-              </a:rPr>
-              <a:t>•  Industry Honors: </a:t>
-            </a:r>
-            <a:r>
-              <a:rPr b="0" sz="1200">
-                <a:solidFill>
-                  <a:srgbClr val="475569"/>
-                </a:solidFill>
-              </a:rPr>
-              <a:t>Awarded 3 consecutive UST Global Excellence Awards (2015, 2016, 2018) for exceptional delivery and client commitment.</a:t>
-            </a:r>
-          </a:p>
-          <a:p>
-            <a:pPr>
-              <a:spcAft>
-                <a:spcPts val="400"/>
-              </a:spcAft>
-              <a:defRPr sz="1550" b="1">
-                <a:solidFill>
-                  <a:srgbClr val="0E7490"/>
-                </a:solidFill>
-              </a:defRPr>
-            </a:pPr>
-            <a:r>
-              <a:t>2. Healthcare-Grade ICU Software Delivery (Philips)</a:t>
-            </a:r>
-          </a:p>
-          <a:p>
-            <a:pPr>
-              <a:spcAft>
-                <a:spcPts val="700"/>
-              </a:spcAft>
-            </a:pPr>
-            <a:r>
-              <a:rPr b="1" sz="1300">
-                <a:solidFill>
-                  <a:srgbClr val="0F172A"/>
-                </a:solidFill>
-              </a:rPr>
-              <a:t>•  Clinical Mandate: </a:t>
-            </a:r>
-            <a:r>
-              <a:rPr b="0" sz="1200">
-                <a:solidFill>
-                  <a:srgbClr val="475569"/>
-                </a:solidFill>
-              </a:rPr>
-              <a:t>Delivered web-tier software for Philips Intellispace Critical Care &amp; Anesthesia (ICCA) operating in 24/7 ICU suites.</a:t>
-            </a:r>
-          </a:p>
-          <a:p>
-            <a:pPr>
-              <a:spcAft>
-                <a:spcPts val="700"/>
-              </a:spcAft>
-            </a:pPr>
-            <a:r>
-              <a:rPr b="1" sz="1300">
-                <a:solidFill>
-                  <a:srgbClr val="0F172A"/>
-                </a:solidFill>
-              </a:rPr>
-              <a:t>•  Stringent Standards: </a:t>
-            </a:r>
-            <a:r>
-              <a:rPr b="0" sz="1200">
-                <a:solidFill>
-                  <a:srgbClr val="475569"/>
-                </a:solidFill>
-              </a:rPr>
-              <a:t>Passed demanding hospital quality, safety, and zero-leak reliability benchmarks for mission-critical bedside monitoring.</a:t>
-            </a:r>
-          </a:p>
-          <a:p>
-            <a:pPr>
-              <a:spcAft>
-                <a:spcPts val="700"/>
-              </a:spcAft>
-            </a:pPr>
-            <a:r>
-              <a:rPr b="1" sz="1300">
-                <a:solidFill>
-                  <a:srgbClr val="0F172A"/>
-                </a:solidFill>
-              </a:rPr>
-              <a:t>•  Enterprise Security: </a:t>
-            </a:r>
-            <a:r>
-              <a:rPr b="0" sz="1200">
-                <a:solidFill>
-                  <a:srgbClr val="475569"/>
-                </a:solidFill>
-              </a:rPr>
-              <a:t>Enforced Multi-Factor Authentication (MFA), role-based access control (RBAC), and strict patient data protection policies.</a:t>
+              <a:t>1. Scalable Frontend &amp; Modular Architecture</a:t>
+            </a:r>
+          </a:p>
+          <a:p>
+            <a:pPr>
+              <a:spcAft>
+                <a:spcPts val="500"/>
+              </a:spcAft>
+              <a:defRPr sz="1200">
+                <a:solidFill>
+                  <a:srgbClr val="1E293B"/>
+                </a:solidFill>
+              </a:defRPr>
+            </a:pPr>
+            <a:r>
+              <a:t>•  React, Angular, TypeScript, JavaScript, Node.js, Web Components (LitElement).</a:t>
+            </a:r>
+          </a:p>
+          <a:p>
+            <a:pPr>
+              <a:spcAft>
+                <a:spcPts val="500"/>
+              </a:spcAft>
+              <a:defRPr sz="1200">
+                <a:solidFill>
+                  <a:srgbClr val="1E293B"/>
+                </a:solidFill>
+              </a:defRPr>
+            </a:pPr>
+            <a:r>
+              <a:t>•  Architected Enterprise UI Design Systems used across diverse development teams.</a:t>
+            </a:r>
+          </a:p>
+          <a:p>
+            <a:pPr>
+              <a:spcAft>
+                <a:spcPts val="500"/>
+              </a:spcAft>
+              <a:defRPr sz="1200">
+                <a:solidFill>
+                  <a:srgbClr val="1E293B"/>
+                </a:solidFill>
+              </a:defRPr>
+            </a:pPr>
+            <a:r>
+              <a:t>•  State management, micro-frontends, REST, WebSockets, and streaming telemetry.</a:t>
+            </a:r>
+          </a:p>
+          <a:p>
+            <a:pPr>
+              <a:spcAft>
+                <a:spcPts val="500"/>
+              </a:spcAft>
+              <a:defRPr sz="1200">
+                <a:solidFill>
+                  <a:srgbClr val="1E293B"/>
+                </a:solidFill>
+              </a:defRPr>
+            </a:pPr>
+            <a:r>
+              <a:t>•  4-year zero-downtime migration of Cisco Stadium Vision from Flash/Flex to Angular/React.</a:t>
             </a:r>
           </a:p>
         </p:txBody>
@@ -8941,7 +9311,7 @@
         <p:spPr>
           <a:xfrm>
             <a:off x="6309360" y="1389888"/>
-            <a:ext cx="5120640" cy="4892040"/>
+            <a:ext cx="5120640" cy="2331720"/>
           </a:xfrm>
           <a:prstGeom prst="rect">
             <a:avLst/>
@@ -8956,169 +9326,76 @@
           <a:p>
             <a:pPr>
               <a:spcAft>
-                <a:spcPts val="400"/>
+                <a:spcPts val="800"/>
               </a:spcAft>
               <a:defRPr sz="1550" b="1">
                 <a:solidFill>
-                  <a:srgbClr val="D97706"/>
-                </a:solidFill>
-              </a:defRPr>
-            </a:pPr>
-            <a:r>
-              <a:t>3. Generative 3D Asset &amp; Spatial AI Commercialization</a:t>
-            </a:r>
-          </a:p>
-          <a:p>
-            <a:pPr>
-              <a:spcAft>
-                <a:spcPts val="700"/>
-              </a:spcAft>
-            </a:pPr>
-            <a:r>
-              <a:rPr b="1" sz="1300">
-                <a:solidFill>
-                  <a:srgbClr val="0F172A"/>
-                </a:solidFill>
-              </a:rPr>
-              <a:t>•  Product Innovation: </a:t>
-            </a:r>
-            <a:r>
-              <a:rPr b="0" sz="1200">
-                <a:solidFill>
-                  <a:srgbClr val="475569"/>
-                </a:solidFill>
-              </a:rPr>
-              <a:t>Founded and launched Voxelforge AI (srushtilabs.com/voxelforge/), generating modular 3D assets from natural language.</a:t>
-            </a:r>
-          </a:p>
-          <a:p>
-            <a:pPr>
-              <a:spcAft>
-                <a:spcPts val="700"/>
-              </a:spcAft>
-            </a:pPr>
-            <a:r>
-              <a:rPr b="1" sz="1300">
-                <a:solidFill>
-                  <a:srgbClr val="0F172A"/>
-                </a:solidFill>
-              </a:rPr>
-              <a:t>•  Game-Ready Bundles: </a:t>
-            </a:r>
-            <a:r>
-              <a:rPr b="0" sz="1200">
-                <a:solidFill>
-                  <a:srgbClr val="475569"/>
-                </a:solidFill>
-              </a:rPr>
-              <a:t>Automated geometry synthesis, texture baking, and polygon reduction for instant Unreal Engine, Unity, and WebGL integration.</a:t>
-            </a:r>
-          </a:p>
-          <a:p>
-            <a:pPr>
-              <a:spcAft>
-                <a:spcPts val="700"/>
-              </a:spcAft>
-            </a:pPr>
-            <a:r>
-              <a:rPr b="1" sz="1300">
-                <a:solidFill>
-                  <a:srgbClr val="0F172A"/>
-                </a:solidFill>
-              </a:rPr>
-              <a:t>•  Parametric AI (Ayam3d): </a:t>
-            </a:r>
-            <a:r>
-              <a:rPr b="0" sz="1200">
-                <a:solidFill>
-                  <a:srgbClr val="475569"/>
-                </a:solidFill>
-              </a:rPr>
-              <a:t>Developed Ayam3d (ayam3d.in) for parametric 3D generation in seconds, earning early investor interest and partner validation.</a:t>
-            </a:r>
-          </a:p>
-          <a:p>
-            <a:pPr>
-              <a:spcAft>
-                <a:spcPts val="400"/>
-              </a:spcAft>
-              <a:defRPr sz="1550" b="1">
-                <a:solidFill>
-                  <a:srgbClr val="109563"/>
-                </a:solidFill>
-              </a:defRPr>
-            </a:pPr>
-            <a:r>
-              <a:t>4. Enterprise UI Design System &amp; BMS Facility Control</a:t>
-            </a:r>
-          </a:p>
-          <a:p>
-            <a:pPr>
-              <a:spcAft>
-                <a:spcPts val="700"/>
-              </a:spcAft>
-            </a:pPr>
-            <a:r>
-              <a:rPr b="1" sz="1300">
-                <a:solidFill>
-                  <a:srgbClr val="0F172A"/>
-                </a:solidFill>
-              </a:rPr>
-              <a:t>•  Design System (Moonraft): </a:t>
-            </a:r>
-            <a:r>
-              <a:rPr b="0" sz="1200">
-                <a:solidFill>
-                  <a:srgbClr val="475569"/>
-                </a:solidFill>
-              </a:rPr>
-              <a:t>Engineered centralized Web Components design system (LitElement, React, Angular) eliminating duplicated effort across project teams.</a:t>
-            </a:r>
-          </a:p>
-          <a:p>
-            <a:pPr>
-              <a:spcAft>
-                <a:spcPts val="700"/>
-              </a:spcAft>
-            </a:pPr>
-            <a:r>
-              <a:rPr b="1" sz="1300">
-                <a:solidFill>
-                  <a:srgbClr val="0F172A"/>
-                </a:solidFill>
-              </a:rPr>
-              <a:t>•  Cisco Facility Dashboard: </a:t>
-            </a:r>
-            <a:r>
-              <a:rPr b="0" sz="1200">
-                <a:solidFill>
-                  <a:srgbClr val="475569"/>
-                </a:solidFill>
-              </a:rPr>
-              <a:t>Delivered unified BMS dashboard for AHUs, chillers, and power telemetry; awarded Cisco Certificate of Appreciation (2010).</a:t>
-            </a:r>
-          </a:p>
-          <a:p>
-            <a:pPr>
-              <a:spcAft>
-                <a:spcPts val="700"/>
-              </a:spcAft>
-            </a:pPr>
-            <a:r>
-              <a:rPr b="1" sz="1300">
-                <a:solidFill>
-                  <a:srgbClr val="0F172A"/>
-                </a:solidFill>
-              </a:rPr>
-              <a:t>•  Aftermarket 3D Explorer: </a:t>
-            </a:r>
-            <a:r>
-              <a:rPr b="0" sz="1200">
-                <a:solidFill>
-                  <a:srgbClr val="475569"/>
-                </a:solidFill>
-              </a:rPr>
-              <a:t>Architected interactive 3D parts explorer at ThoughtFocus supporting millions of catalog components and e-commerce flows.</a:t>
+                  <a:srgbClr val="0E7490"/>
+                </a:solidFill>
+              </a:defRPr>
+            </a:pPr>
+            <a:r>
+              <a:t>2. Spatial 3D, CAD &amp; Generative AI</a:t>
+            </a:r>
+          </a:p>
+          <a:p>
+            <a:pPr>
+              <a:spcAft>
+                <a:spcPts val="500"/>
+              </a:spcAft>
+              <a:defRPr sz="1200">
+                <a:solidFill>
+                  <a:srgbClr val="1E293B"/>
+                </a:solidFill>
+              </a:defRPr>
+            </a:pPr>
+            <a:r>
+              <a:t>•  Voxelforge AI (generative modular 3D for Unreal/Unity/WebGL) &amp; Ayam3d (parametric 3D).</a:t>
+            </a:r>
+          </a:p>
+          <a:p>
+            <a:pPr>
+              <a:spcAft>
+                <a:spcPts val="500"/>
+              </a:spcAft>
+              <a:defRPr sz="1200">
+                <a:solidFill>
+                  <a:srgbClr val="1E293B"/>
+                </a:solidFill>
+              </a:defRPr>
+            </a:pPr>
+            <a:r>
+              <a:t>•  Architectural 3D visualization, animated walkthroughs, and CAD/CAM CNC machine development.</a:t>
+            </a:r>
+          </a:p>
+          <a:p>
+            <a:pPr>
+              <a:spcAft>
+                <a:spcPts val="500"/>
+              </a:spcAft>
+              <a:defRPr sz="1200">
+                <a:solidFill>
+                  <a:srgbClr val="1E293B"/>
+                </a:solidFill>
+              </a:defRPr>
+            </a:pPr>
+            <a:r>
+              <a:t>•  Flight simulator 3D terrain and aircraft databases under locked 60 FPS budgets (CAE).</a:t>
+            </a:r>
+          </a:p>
+          <a:p>
+            <a:pPr>
+              <a:spcAft>
+                <a:spcPts val="500"/>
+              </a:spcAft>
+              <a:defRPr sz="1200">
+                <a:solidFill>
+                  <a:srgbClr val="1E293B"/>
+                </a:solidFill>
+              </a:defRPr>
+            </a:pPr>
+            <a:r>
+              <a:t>•  Interactive 3D parts inspection explorer supporting millions of catalog components.</a:t>
             </a:r>
           </a:p>
         </p:txBody>
@@ -9131,8 +9408,8 @@
         </p:nvSpPr>
         <p:spPr>
           <a:xfrm>
-            <a:off x="731520" y="6473952"/>
-            <a:ext cx="10728655" cy="292608"/>
+            <a:off x="731520" y="3913632"/>
+            <a:ext cx="5120640" cy="2331720"/>
           </a:xfrm>
           <a:prstGeom prst="rect">
             <a:avLst/>
@@ -9140,6 +9417,202 @@
           <a:noFill/>
         </p:spPr>
         <p:txBody>
+          <a:bodyPr wrap="square" lIns="0" rIns="0" tIns="0" bIns="0">
+            <a:spAutoFit/>
+          </a:bodyPr>
+          <a:lstStyle/>
+          <a:p>
+            <a:pPr>
+              <a:spcAft>
+                <a:spcPts val="800"/>
+              </a:spcAft>
+              <a:defRPr sz="1550" b="1">
+                <a:solidFill>
+                  <a:srgbClr val="D97706"/>
+                </a:solidFill>
+              </a:defRPr>
+            </a:pPr>
+            <a:r>
+              <a:t>3. High Reliability &amp; Operational Security</a:t>
+            </a:r>
+          </a:p>
+          <a:p>
+            <a:pPr>
+              <a:spcAft>
+                <a:spcPts val="500"/>
+              </a:spcAft>
+              <a:defRPr sz="1200">
+                <a:solidFill>
+                  <a:srgbClr val="1E293B"/>
+                </a:solidFill>
+              </a:defRPr>
+            </a:pPr>
+            <a:r>
+              <a:t>•  Delivered Philips ICU healthcare software meeting stringent clinical safety benchmarks.</a:t>
+            </a:r>
+          </a:p>
+          <a:p>
+            <a:pPr>
+              <a:spcAft>
+                <a:spcPts val="500"/>
+              </a:spcAft>
+              <a:defRPr sz="1200">
+                <a:solidFill>
+                  <a:srgbClr val="1E293B"/>
+                </a:solidFill>
+              </a:defRPr>
+            </a:pPr>
+            <a:r>
+              <a:t>•  Strict cybersecurity enforcement: Multi-factor authentication (MFA), XSS mitigation, RBAC.</a:t>
+            </a:r>
+          </a:p>
+          <a:p>
+            <a:pPr>
+              <a:spcAft>
+                <a:spcPts val="500"/>
+              </a:spcAft>
+              <a:defRPr sz="1200">
+                <a:solidFill>
+                  <a:srgbClr val="1E293B"/>
+                </a:solidFill>
+              </a:defRPr>
+            </a:pPr>
+            <a:r>
+              <a:t>•  Offline-first mobile architecture (IndexedDB/Service Workers) with conflict-free cloud sync.</a:t>
+            </a:r>
+          </a:p>
+          <a:p>
+            <a:pPr>
+              <a:spcAft>
+                <a:spcPts val="500"/>
+              </a:spcAft>
+              <a:defRPr sz="1200">
+                <a:solidFill>
+                  <a:srgbClr val="1E293B"/>
+                </a:solidFill>
+              </a:defRPr>
+            </a:pPr>
+            <a:r>
+              <a:t>•  Building Management System (BMS) unified interface for AHUs, chillers, and telemetry (Cisco).</a:t>
+            </a:r>
+          </a:p>
+        </p:txBody>
+      </p:sp>
+      <p:sp>
+        <p:nvSpPr>
+          <p:cNvPr id="8" name="TextBox 7"/>
+          <p:cNvSpPr txBox="1"/>
+          <p:nvPr/>
+        </p:nvSpPr>
+        <p:spPr>
+          <a:xfrm>
+            <a:off x="6309360" y="3913632"/>
+            <a:ext cx="5120640" cy="2331720"/>
+          </a:xfrm>
+          <a:prstGeom prst="rect">
+            <a:avLst/>
+          </a:prstGeom>
+          <a:noFill/>
+        </p:spPr>
+        <p:txBody>
+          <a:bodyPr wrap="square" lIns="0" rIns="0" tIns="0" bIns="0">
+            <a:spAutoFit/>
+          </a:bodyPr>
+          <a:lstStyle/>
+          <a:p>
+            <a:pPr>
+              <a:spcAft>
+                <a:spcPts val="800"/>
+              </a:spcAft>
+              <a:defRPr sz="1550" b="1">
+                <a:solidFill>
+                  <a:srgbClr val="109563"/>
+                </a:solidFill>
+              </a:defRPr>
+            </a:pPr>
+            <a:r>
+              <a:t>4. Agile Leadership &amp; Startup Delivery</a:t>
+            </a:r>
+          </a:p>
+          <a:p>
+            <a:pPr>
+              <a:spcAft>
+                <a:spcPts val="500"/>
+              </a:spcAft>
+              <a:defRPr sz="1200">
+                <a:solidFill>
+                  <a:srgbClr val="1E293B"/>
+                </a:solidFill>
+              </a:defRPr>
+            </a:pPr>
+            <a:r>
+              <a:t>•  Founder/Co-Founder: Technoyana, Twitan.com, SrushtiLabs, InnoBrik.</a:t>
+            </a:r>
+          </a:p>
+          <a:p>
+            <a:pPr>
+              <a:spcAft>
+                <a:spcPts val="500"/>
+              </a:spcAft>
+              <a:defRPr sz="1200">
+                <a:solidFill>
+                  <a:srgbClr val="1E293B"/>
+                </a:solidFill>
+              </a:defRPr>
+            </a:pPr>
+            <a:r>
+              <a:t>•  Associate Project Manager at UST Global; managed cross-functional squads for Cisco.</a:t>
+            </a:r>
+          </a:p>
+          <a:p>
+            <a:pPr>
+              <a:spcAft>
+                <a:spcPts val="500"/>
+              </a:spcAft>
+              <a:defRPr sz="1200">
+                <a:solidFill>
+                  <a:srgbClr val="1E293B"/>
+                </a:solidFill>
+              </a:defRPr>
+            </a:pPr>
+            <a:r>
+              <a:t>•  Early user prototyping, design-to-code pipelines, and active stakeholder governance.</a:t>
+            </a:r>
+          </a:p>
+          <a:p>
+            <a:pPr>
+              <a:spcAft>
+                <a:spcPts val="500"/>
+              </a:spcAft>
+              <a:defRPr sz="1200">
+                <a:solidFill>
+                  <a:srgbClr val="1E293B"/>
+                </a:solidFill>
+              </a:defRPr>
+            </a:pPr>
+            <a:r>
+              <a:t>•  Honored with Cisco Appreciation (2010) and 3 UST Global Excellence Awards (2015, 2016, 2018).</a:t>
+            </a:r>
+          </a:p>
+        </p:txBody>
+      </p:sp>
+      <p:sp>
+        <p:nvSpPr>
+          <p:cNvPr id="9" name="TextBox 8"/>
+          <p:cNvSpPr txBox="1"/>
+          <p:nvPr/>
+        </p:nvSpPr>
+        <p:spPr>
+          <a:xfrm>
+            <a:off x="731520" y="6473952"/>
+            <a:ext cx="10728655" cy="292608"/>
+          </a:xfrm>
+          <a:prstGeom prst="rect">
+            <a:avLst/>
+          </a:prstGeom>
+          <a:noFill/>
+        </p:spPr>
+        <p:txBody>
           <a:bodyPr wrap="none" lIns="0" rIns="0" tIns="0" bIns="0">
             <a:spAutoFit/>
           </a:bodyPr>
@@ -9153,7 +9626,7 @@
               </a:defRPr>
             </a:pPr>
             <a:r>
-              <a:t>Maheshchandra Hegde · Technical Work Experience Presentation | Slide 9 of 13</a:t>
+              <a:t>Maheshchandra Hegde · Technical Work Experience Presentation | Slide 9 of 14</a:t>
             </a:r>
           </a:p>
         </p:txBody>
